--- a/deck/カンツギ_事業計画書_やさしい版.pptx
+++ b/deck/カンツギ_事業計画書_やさしい版.pptx
@@ -22,9 +22,10 @@
     <p:sldId id="270" r:id="rId16"/>
     <p:sldId id="271" r:id="rId17"/>
     <p:sldId id="272" r:id="rId18"/>
+    <p:sldId id="273" r:id="rId19"/>
   </p:sldIdLst>
   <p:notesMasterIdLst>
-    <p:notesMasterId r:id="rId19"/>
+    <p:notesMasterId r:id="rId20"/>
   </p:notesMasterIdLst>
   <p:sldSz cx="9144000" cy="5143500"/>
   <p:notesSz cx="5143500" cy="9144000"/>
@@ -1073,8 +1074,8 @@
             <a:r>
               <a:rPr lang="en-US" dirty="0"/>
               <a:t>【表紙・20秒】
-要約：数字は3つだけ。300万円、255万円、2.8拠点
-カンツギです。今日はお金の仕組みを、3つの数字だけでお話しします。お客様が1拠点で年300万円払う。そのうち255万円が当社に残る。社員1人で2.8拠点を見られれば黒字。この3つです。</a:t>
+要約：数字は3つだけ。300万円、255万円、3拠点
+カンツギです。今日はお金の仕組みを、3つの数字だけでお話しします。お客様が1拠点で年300万円払う。そのうち255万円が当社に残る。社員1人で3拠点を見られれば黒字。この3つです。</a:t>
             </a:r>
             <a:endParaRPr lang="en-US" dirty="0"/>
           </a:p>
@@ -1164,7 +1165,7 @@
               <a:rPr lang="en-US" dirty="0"/>
               <a:t>【お金の話3・40秒】
 要約：利用料300万円のうち255万円が残る。だから利用料を積み上げる
-次に、当社の財布に何が残るか。300万円の利用料のうち、サーバーやAIの費用は15%の45万円。255万円が残ります。導入支援の200万円は、人が動くので120万円が人件費に消え、残るのは80万円。だから当社は、人が動く仕事ではなく、利用料を積み上げる会社にします。</a:t>
+次に、当社の財布に何が残るか。300万円の利用料のうち、サーバーやAIの費用は15%の45万円。255万円が残ります。導入支援の200万円は、担当者が2か月現場に入るので、その人件費の約133万円が消え、残るのは約67万円。だから当社は、人が動く仕事ではなく、利用料を積み上げる会社にします。</a:t>
             </a:r>
             <a:endParaRPr lang="en-US" dirty="0"/>
           </a:p>
@@ -1253,8 +1254,8 @@
             <a:r>
               <a:rPr lang="en-US" dirty="0"/>
               <a:t>【お金の話4・40秒】
-要約：社員1人で2.8拠点を見れば黒字。4年目に超える
-なぜ最初は赤字なのか。社員1人にかかる費用は、給料や家賃を合わせて年713万円。1拠点から残るのは255万円。713を255で割ると2.8。つまり、社員1人で2.8拠点を見られれば黒字です。1年目から3年目は、人を先に雇うので2.8に届かず赤字。4年目に3.67となって黒字になります。合言葉は2.8です。</a:t>
+要約：社員1人で3拠点を見れば黒字。4年目に超える
+なぜ最初は赤字なのか。社員1人にかかる費用は、給料や家賃を合わせて年約690万円。1拠点から残るのは255万円。690を255で割ると2.7。ただ、新しいお客様は最初の年は半年分しか払わないので、年度末に数えると1人3拠点が目安です。ここで言う社員は、営業だけでなく技術やサポートの人も含めた全員です。1年目から3年目は、人を先に雇うので3に届かず赤字。4年目に3.44となって黒字になります。合言葉は3です。</a:t>
             </a:r>
             <a:endParaRPr lang="en-US" dirty="0"/>
           </a:p>
@@ -1344,7 +1345,7 @@
               <a:rPr lang="en-US" dirty="0"/>
               <a:t>【お金の話5・40秒】
 要約：去年のお客様が今年も払う。売上は雪だるま式
-利用料は毎年いただくので、去年までのお客様の分が今年の売上に乗ります。5年目の売上2億9,000万円のうち、57%は前の年までのお客様からの利用料です。新しいお客様が増えるたびに、雪だるまのように大きくなります。営業利益は4年目に黒字、5年目に6,900万円です。</a:t>
+利用料は毎年いただくので、去年までのお客様の分が今年の売上に乗ります。5年目の売上2億9,000万円のうち、57%は前の年までのお客様からの利用料です。新しいお客様が増えるたびに、雪だるまのように大きくなります。営業利益は4年目に黒字、5年目に約6,100万円です。</a:t>
             </a:r>
             <a:endParaRPr lang="en-US" dirty="0"/>
           </a:p>
@@ -1433,8 +1434,8 @@
             <a:r>
               <a:rPr lang="en-US" dirty="0"/>
               <a:t>【お金の話6・30秒】
-要約：64万円かけて連れてきたお客様が、1,865万円残してくれる
-最後に、お客様1拠点を連れてくる費用は約64万円。営業2人の人件費と広告費を、新しいお客様の数で割った数字です。一方、1拠点が7年間で残してくれる粗利は約1,865万円。約29倍です。64万円は3か月で回収できます。7年は控えめに見た数字です。</a:t>
+要約：88万円かけて連れてきたお客様が、1,850万円残してくれる
+お客様1拠点を連れてくる費用は約88万円。営業3人の人件費と広告費を、新しいお客様の数で割った数字です。一方、1拠点が7年間で残してくれる粗利は約1,850万円。約21倍です。88万円は約4か月で回収できます。7年は控えめに見た数字です。</a:t>
             </a:r>
             <a:endParaRPr lang="en-US" dirty="0"/>
           </a:p>
@@ -1522,9 +1523,9 @@
           <a:p>
             <a:r>
               <a:rPr lang="en-US" dirty="0"/>
-              <a:t>【500万円・30秒】
-要約：500万円で、6か月以内に1拠点を動かす
-今回お願いする500万円は、試作品と1拠点の実証に使います。私の給料はゼロです。3か月で試作品、6か月で実証。その結果を持って、公庫の融資とベンチャーキャピタルの出資を受けます。条件は10%でのご提案です。</a:t>
+              <a:t>【お金の話7・40秒】
+要約：計画の6割取れれば黒字。届かなければ、先に決めた線で止まる
+うまくいかなかったらどうするか。新しいお客様が計画の何割取れたら大丈夫かを計算しました。採用を実績に合わせて遅らせれば、計画の6割で黒字になります。5割を割ると黒字になりません。危ないのは、お客様が増えていないのに人を雇い続けることです。だから止まる線を先に決めます。1年目の終わりに、試してくれた3社のうち2社以上が本契約なら進む。1社なら値段とお客様を見直す。0社なら撤退か方向転換。2年目に新しい拠点が5つに届かなければ、採用を止めます。それと、この計画は出資を受けられることが前提です。</a:t>
             </a:r>
             <a:endParaRPr lang="en-US" dirty="0"/>
           </a:p>
@@ -1612,9 +1613,9 @@
           <a:p>
             <a:r>
               <a:rPr lang="en-US" dirty="0"/>
-              <a:t>【全体図・30秒】
-要約：上の矢印は記録とサービス、下の矢印はお金
-1枚にまとめるとこうなります。上の流れが記録とサービス。お客様の現場から記録が来て、照合・報告書・教材にして返す。下の流れがお金。お客様から年300万円が入り、45万円がサーバー代、255万円が残って社員の費用をまかなう。社員1人で2.8拠点を超えたら黒字。そして記録が貯まるほど、真似されにくくなります。</a:t>
+              <a:t>【500万円・30秒】
+要約：500万円で、6か月以内に1拠点を動かす
+今回お願いする500万円は、試作品と1拠点の実証に使います。私の給料はゼロです。3か月で試作品、6か月で実証。その結果を持って、公庫の融資とベンチャーキャピタルの出資を受けます。条件は10%でのご提案です。</a:t>
             </a:r>
             <a:endParaRPr lang="en-US" dirty="0"/>
           </a:p>
@@ -1702,9 +1703,9 @@
           <a:p>
             <a:r>
               <a:rPr lang="en-US" dirty="0"/>
-              <a:t>【ツッコミ対策・40秒】
-要約：3つのツッコミには、この一言で返す
-よく聞かれる3つの質問への答えです。本当に300万円も払うのか。月240万円分の時間が浮くので、2か月で元が取れます。なぜ4年目まで赤字なのか。人を先に雇うからで、社員1人2.8拠点を超えたら黒字になります。真似されないか。現場の記録は使うほど貯まり、後から来た会社には移せません。</a:t>
+              <a:t>【全体図・30秒】
+要約：上の矢印は記録とサービス、下の矢印はお金
+1枚にまとめるとこうなります。上の流れが記録とサービス。お客様の現場から記録が来て、照合・報告書・教材にして返す。下の流れがお金。お客様から年300万円が入り、45万円がサーバー代、255万円が残って社員の費用をまかなう。社員1人で3拠点を超えたら黒字。そして記録が貯まるほど、真似されにくくなります。</a:t>
             </a:r>
             <a:endParaRPr lang="en-US" dirty="0"/>
           </a:p>
@@ -1792,9 +1793,9 @@
           <a:p>
             <a:r>
               <a:rPr lang="en-US" dirty="0"/>
-              <a:t>【まとめ・30秒】
-要約：300万・255万・2.8。この3つで話せる
-まとめです。お客様が年300万円払う。255万円が残る。社員1人2.8拠点で黒字。この3つの数字で、すべて説明できます。詳しい計算の根拠は、別冊の理論武装版にまとめています。</a:t>
+              <a:t>【ツッコミ対策・40秒】
+要約：3つのツッコミには、この一言で返す
+よく聞かれる3つの質問への答えです。本当に300万円も払うのか。月240万円分の時間が浮くので、2か月で元が取れます。なぜ4年目まで赤字なのか。人を先に雇うからで、社員1人3拠点を超えたら黒字になります。真似されないか。現場の記録は使うほど貯まり、後から来た会社には移せません。</a:t>
             </a:r>
             <a:endParaRPr lang="en-US" dirty="0"/>
           </a:p>
@@ -1818,6 +1819,96 @@
             <a:fld id="{F7021451-1387-4CA6-816F-3879F97B5CBC}" type="slidenum">
               <a:rPr lang="en-US"/>
               <a:t>17</a:t>
+            </a:fld>
+            <a:endParaRPr lang="en-US"/>
+          </a:p>
+        </p:txBody>
+      </p:sp>
+    </p:spTree>
+    <p:extLst>
+      <p:ext uri="{BB962C8B-B14F-4D97-AF65-F5344CB8AC3E}">
+        <p14:creationId xmlns:p14="http://schemas.microsoft.com/office/powerpoint/2010/main" val="1024086991"/>
+      </p:ext>
+    </p:extLst>
+  </p:cSld>
+  <p:clrMapOvr>
+    <a:masterClrMapping/>
+  </p:clrMapOvr>
+</p:notes>
+</file>
+
+<file path=ppt/notesSlides/notesSlide18.xml><?xml version="1.0" encoding="utf-8"?>
+<p:notes xmlns:a="http://schemas.openxmlformats.org/drawingml/2006/main" xmlns:r="http://schemas.openxmlformats.org/officeDocument/2006/relationships" xmlns:p="http://schemas.openxmlformats.org/presentationml/2006/main">
+  <p:cSld>
+    <p:spTree>
+      <p:nvGrpSpPr>
+        <p:cNvPr id="1" name=""/>
+        <p:cNvGrpSpPr/>
+        <p:nvPr/>
+      </p:nvGrpSpPr>
+      <p:grpSpPr>
+        <a:xfrm>
+          <a:off x="0" y="0"/>
+          <a:ext cx="0" cy="0"/>
+          <a:chOff x="0" y="0"/>
+          <a:chExt cx="0" cy="0"/>
+        </a:xfrm>
+      </p:grpSpPr>
+      <p:sp>
+        <p:nvSpPr>
+          <p:cNvPr id="2" name="Slide Image Placeholder 1"/>
+          <p:cNvSpPr>
+            <a:spLocks noGrp="1" noRot="1" noChangeAspect="1"/>
+          </p:cNvSpPr>
+          <p:nvPr>
+            <p:ph type="sldImg"/>
+          </p:nvPr>
+        </p:nvSpPr>
+        <p:spPr/>
+      </p:sp>
+      <p:sp>
+        <p:nvSpPr>
+          <p:cNvPr id="3" name="Notes Placeholder 2"/>
+          <p:cNvSpPr>
+            <a:spLocks noGrp="1"/>
+          </p:cNvSpPr>
+          <p:nvPr>
+            <p:ph type="body" idx="1"/>
+          </p:nvPr>
+        </p:nvSpPr>
+        <p:spPr/>
+        <p:txBody>
+          <a:bodyPr/>
+          <a:lstStyle/>
+          <a:p>
+            <a:r>
+              <a:rPr lang="en-US" dirty="0"/>
+              <a:t>【まとめ・30秒】
+要約：300万・255万・3。この3つで話せる
+まとめです。お客様が年300万円払う。255万円が残る。社員1人3拠点で黒字。この3つの数字で、すべて説明できます。詳しい計算の根拠は、別冊の理論武装版にまとめています。</a:t>
+            </a:r>
+            <a:endParaRPr lang="en-US" dirty="0"/>
+          </a:p>
+        </p:txBody>
+      </p:sp>
+      <p:sp>
+        <p:nvSpPr>
+          <p:cNvPr id="4" name="Slide Number Placeholder 3"/>
+          <p:cNvSpPr>
+            <a:spLocks noGrp="1"/>
+          </p:cNvSpPr>
+          <p:nvPr>
+            <p:ph type="sldNum" sz="quarter" idx="10"/>
+          </p:nvPr>
+        </p:nvSpPr>
+        <p:spPr/>
+        <p:txBody>
+          <a:bodyPr/>
+          <a:lstStyle/>
+          <a:p>
+            <a:fld id="{F7021451-1387-4CA6-816F-3879F97B5CBC}" type="slidenum">
+              <a:rPr lang="en-US"/>
+              <a:t>18</a:t>
             </a:fld>
             <a:endParaRPr lang="en-US"/>
           </a:p>
@@ -3820,7 +3911,7 @@
                 <a:ea typeface="Meiryo" pitchFamily="34" charset="-122"/>
                 <a:cs typeface="Meiryo" pitchFamily="34" charset="-120"/>
               </a:rPr>
-              <a:t>2.8拠点</a:t>
+              <a:t>3拠点</a:t>
             </a:r>
             <a:endParaRPr lang="en-US" sz="2200" dirty="0"/>
           </a:p>
@@ -4339,7 +4430,7 @@
                 <a:ea typeface="Meiryo" pitchFamily="34" charset="-122"/>
                 <a:cs typeface="Meiryo" pitchFamily="34" charset="-120"/>
               </a:rPr>
-              <a:t>利用料は85%が残る。導入支援は40%しか残らない。だから利用料を積み上げる</a:t>
+              <a:t>利用料は85%が残る。導入支援は3分の1しか残らない。だから利用料を積み上げる</a:t>
             </a:r>
             <a:endParaRPr lang="en-US" sz="1200" dirty="0"/>
           </a:p>
@@ -4854,8 +4945,8 @@
         </p:nvSpPr>
         <p:spPr>
           <a:xfrm>
-            <a:off x="4343400" y="3267456"/>
-            <a:ext cx="640080" cy="573024"/>
+            <a:off x="4343400" y="3360572"/>
+            <a:ext cx="640080" cy="479908"/>
           </a:xfrm>
           <a:prstGeom prst="rect">
             <a:avLst/>
@@ -4879,7 +4970,7 @@
         </p:nvSpPr>
         <p:spPr>
           <a:xfrm>
-            <a:off x="4160520" y="2974848"/>
+            <a:off x="4160520" y="3067964"/>
             <a:ext cx="1005840" cy="274320"/>
           </a:xfrm>
           <a:prstGeom prst="rect">
@@ -4907,7 +4998,7 @@
                 <a:ea typeface="Meiryo" pitchFamily="34" charset="-122"/>
                 <a:cs typeface="Meiryo" pitchFamily="34" charset="-120"/>
               </a:rPr>
-              <a:t>80万円</a:t>
+              <a:t>67万円</a:t>
             </a:r>
             <a:endParaRPr lang="en-US" sz="1100" dirty="0"/>
           </a:p>
@@ -5033,7 +5124,7 @@
                 <a:ea typeface="Meiryo" pitchFamily="34" charset="-122"/>
                 <a:cs typeface="Meiryo" pitchFamily="34" charset="-120"/>
               </a:rPr>
-              <a:t>120万円は</a:t>
+              <a:t>133万円は</a:t>
             </a:r>
             <a:endParaRPr lang="en-US" sz="850" dirty="0"/>
           </a:p>
@@ -5053,7 +5144,27 @@
                 <a:ea typeface="Meiryo" pitchFamily="34" charset="-122"/>
                 <a:cs typeface="Meiryo" pitchFamily="34" charset="-120"/>
               </a:rPr>
-              <a:t>担当者の人件費</a:t>
+              <a:t>担当者2か月分</a:t>
+            </a:r>
+            <a:endParaRPr lang="en-US" sz="850" dirty="0"/>
+          </a:p>
+          <a:p>
+            <a:pPr algn="l" indent="0" marL="0">
+              <a:lnSpc>
+                <a:spcPct val="115000"/>
+              </a:lnSpc>
+              <a:buNone/>
+            </a:pPr>
+            <a:r>
+              <a:rPr lang="en-US" sz="850" dirty="0">
+                <a:solidFill>
+                  <a:srgbClr val="4D4D4D"/>
+                </a:solidFill>
+                <a:latin typeface="Meiryo" pitchFamily="34" charset="0"/>
+                <a:ea typeface="Meiryo" pitchFamily="34" charset="-122"/>
+                <a:cs typeface="Meiryo" pitchFamily="34" charset="-120"/>
+              </a:rPr>
+              <a:t>の人件費</a:t>
             </a:r>
             <a:endParaRPr lang="en-US" sz="850" dirty="0"/>
           </a:p>
@@ -5308,7 +5419,7 @@
                 <a:ea typeface="Meiryo" pitchFamily="34" charset="-122"/>
                 <a:cs typeface="Meiryo" pitchFamily="34" charset="-120"/>
               </a:rPr>
-              <a:t>1拠点あたりの金額。サーバー・AI代は売上の15%、導入支援の人件費は売上の60%と置いた</a:t>
+              <a:t>1拠点あたりの金額。サーバー・AI代は売上の15%（大事な場面だけ送る前提）。導入支援の人件費は800万円×2か月÷12</a:t>
             </a:r>
             <a:endParaRPr lang="en-US" sz="800" dirty="0"/>
           </a:p>
@@ -5440,7 +5551,7 @@
                 <a:ea typeface="Meiryo" pitchFamily="34" charset="-122"/>
                 <a:cs typeface="Meiryo" pitchFamily="34" charset="-120"/>
               </a:rPr>
-              <a:t>なぜ最初は赤字？ 合言葉は「2.8」</a:t>
+              <a:t>なぜ最初は赤字？ 合言葉は「3」</a:t>
             </a:r>
             <a:endParaRPr lang="en-US" sz="2000" dirty="0"/>
           </a:p>
@@ -5482,7 +5593,7 @@
                 <a:ea typeface="Meiryo" pitchFamily="34" charset="-122"/>
                 <a:cs typeface="Meiryo" pitchFamily="34" charset="-120"/>
               </a:rPr>
-              <a:t>社員1人で2.8拠点を見られれば黒字。4年目に超える</a:t>
+              <a:t>社員1人で3拠点を見られれば黒字。4年目に超える</a:t>
             </a:r>
             <a:endParaRPr lang="en-US" sz="1200" dirty="0"/>
           </a:p>
@@ -5564,7 +5675,7 @@
                 <a:ea typeface="Meiryo" pitchFamily="34" charset="-122"/>
                 <a:cs typeface="Meiryo" pitchFamily="34" charset="-120"/>
               </a:rPr>
-              <a:t>年713万円</a:t>
+              <a:t>年694万円</a:t>
             </a:r>
             <a:endParaRPr lang="en-US" sz="950" dirty="0"/>
           </a:p>
@@ -5682,8 +5793,8 @@
         </p:nvSpPr>
         <p:spPr>
           <a:xfrm>
-            <a:off x="365760" y="1901952"/>
-            <a:ext cx="3931920" cy="548640"/>
+            <a:off x="365760" y="1847088"/>
+            <a:ext cx="3931920" cy="411480"/>
           </a:xfrm>
           <a:prstGeom prst="rect">
             <a:avLst/>
@@ -5702,7 +5813,7 @@
               <a:buNone/>
             </a:pPr>
             <a:r>
-              <a:rPr lang="en-US" sz="1800" b="1" dirty="0">
+              <a:rPr lang="en-US" sz="1600" b="1" dirty="0">
                 <a:solidFill>
                   <a:srgbClr val="1A1A1A"/>
                 </a:solidFill>
@@ -5710,7 +5821,7 @@
                 <a:ea typeface="Meiryo" pitchFamily="34" charset="-122"/>
                 <a:cs typeface="Meiryo" pitchFamily="34" charset="-120"/>
               </a:rPr>
-              <a:t>＝ </a:t>
+              <a:t>＝ 2.7　→　</a:t>
             </a:r>
             <a:pPr algn="ctr" indent="0" marL="0">
               <a:lnSpc>
@@ -5719,7 +5830,7 @@
               <a:buNone/>
             </a:pPr>
             <a:r>
-              <a:rPr lang="en-US" sz="2600" b="1" dirty="0">
+              <a:rPr lang="en-US" sz="2400" b="1" dirty="0">
                 <a:solidFill>
                   <a:srgbClr val="B8692E"/>
                 </a:solidFill>
@@ -5727,15 +5838,57 @@
                 <a:ea typeface="Meiryo" pitchFamily="34" charset="-122"/>
                 <a:cs typeface="Meiryo" pitchFamily="34" charset="-120"/>
               </a:rPr>
-              <a:t>2.8拠点</a:t>
-            </a:r>
-            <a:endParaRPr lang="en-US" sz="1800" dirty="0"/>
+              <a:t>目安 3拠点</a:t>
+            </a:r>
+            <a:endParaRPr lang="en-US" sz="1600" dirty="0"/>
+          </a:p>
+        </p:txBody>
+      </p:sp>
+      <p:sp>
+        <p:nvSpPr>
+          <p:cNvPr id="10" name="Text 7"/>
+          <p:cNvSpPr txBox="1"/>
+          <p:nvPr/>
+        </p:nvSpPr>
+        <p:spPr>
+          <a:xfrm>
+            <a:off x="457200" y="2240280"/>
+            <a:ext cx="3749040" cy="237744"/>
+          </a:xfrm>
+          <a:prstGeom prst="rect">
+            <a:avLst/>
+          </a:prstGeom>
+          <a:noFill/>
+          <a:ln/>
+        </p:spPr>
+        <p:txBody>
+          <a:bodyPr wrap="square" lIns="0" tIns="0" rIns="0" bIns="0" rtlCol="0" anchor="t"/>
+          <a:lstStyle/>
+          <a:p>
+            <a:pPr algn="ctr" indent="0" marL="0">
+              <a:lnSpc>
+                <a:spcPct val="115000"/>
+              </a:lnSpc>
+              <a:buNone/>
+            </a:pPr>
+            <a:r>
+              <a:rPr lang="en-US" sz="850" dirty="0">
+                <a:solidFill>
+                  <a:srgbClr val="4D4D4D"/>
+                </a:solidFill>
+                <a:latin typeface="Meiryo" pitchFamily="34" charset="0"/>
+                <a:ea typeface="Meiryo" pitchFamily="34" charset="-122"/>
+                <a:cs typeface="Meiryo" pitchFamily="34" charset="-120"/>
+              </a:rPr>
+              <a:t>新しいお客様は最初の年は半年分しか払わないので、年度末に数えると3</a:t>
+            </a:r>
+            <a:endParaRPr lang="en-US" sz="850" dirty="0"/>
           </a:p>
         </p:txBody>
       </p:sp>
       <p:pic>
         <p:nvPicPr>
-          <p:cNvPr id="10" name="Image 0" descr="preencoded.png">    </p:cNvPr>
+          <p:cNvPr id="11" name="Image 0" descr="preencoded.png">    </p:cNvPr>
           <p:cNvPicPr>
             <a:picLocks noChangeAspect="1"/>
           </p:cNvPicPr>
@@ -5759,7 +5912,7 @@
       </p:pic>
       <p:pic>
         <p:nvPicPr>
-          <p:cNvPr id="11" name="Image 1" descr="preencoded.png">    </p:cNvPr>
+          <p:cNvPr id="12" name="Image 1" descr="preencoded.png">    </p:cNvPr>
           <p:cNvPicPr>
             <a:picLocks noChangeAspect="1"/>
           </p:cNvPicPr>
@@ -5783,7 +5936,7 @@
       </p:pic>
       <p:pic>
         <p:nvPicPr>
-          <p:cNvPr id="12" name="Image 2" descr="preencoded.png">    </p:cNvPr>
+          <p:cNvPr id="13" name="Image 2" descr="preencoded.png">    </p:cNvPr>
           <p:cNvPicPr>
             <a:picLocks noChangeAspect="1"/>
           </p:cNvPicPr>
@@ -5807,7 +5960,7 @@
       </p:pic>
       <p:pic>
         <p:nvPicPr>
-          <p:cNvPr id="13" name="Image 3" descr="preencoded.png">    </p:cNvPr>
+          <p:cNvPr id="14" name="Image 3" descr="preencoded.png">    </p:cNvPr>
           <p:cNvPicPr>
             <a:picLocks noChangeAspect="1"/>
           </p:cNvPicPr>
@@ -5831,26 +5984,6 @@
       </p:pic>
       <p:sp>
         <p:nvSpPr>
-          <p:cNvPr id="14" name="Shape 7"/>
-          <p:cNvSpPr/>
-          <p:nvPr/>
-        </p:nvSpPr>
-        <p:spPr>
-          <a:xfrm>
-            <a:off x="3447288" y="2926080"/>
-            <a:ext cx="146304" cy="731520"/>
-          </a:xfrm>
-          <a:prstGeom prst="rect">
-            <a:avLst/>
-          </a:prstGeom>
-          <a:solidFill>
-            <a:srgbClr val="FFFFFF"/>
-          </a:solidFill>
-          <a:ln/>
-        </p:spPr>
-      </p:sp>
-      <p:sp>
-        <p:nvSpPr>
           <p:cNvPr id="15" name="Text 8"/>
           <p:cNvSpPr txBox="1"/>
           <p:nvPr/>
@@ -5885,7 +6018,7 @@
                 <a:ea typeface="Meiryo" pitchFamily="34" charset="-122"/>
                 <a:cs typeface="Meiryo" pitchFamily="34" charset="-120"/>
               </a:rPr>
-              <a:t>1人で、2.8拠点（支店・営業所）を見る</a:t>
+              <a:t>1人で、3拠点（支店・営業所）を見る</a:t>
             </a:r>
             <a:endParaRPr lang="en-US" sz="1000" dirty="0"/>
           </a:p>
@@ -6402,8 +6535,8 @@
         </p:nvSpPr>
         <p:spPr>
           <a:xfrm>
-            <a:off x="7159752" y="2081107"/>
-            <a:ext cx="502920" cy="1713653"/>
+            <a:off x="7159752" y="2188210"/>
+            <a:ext cx="502920" cy="1606550"/>
           </a:xfrm>
           <a:prstGeom prst="rect">
             <a:avLst/>
@@ -6422,7 +6555,7 @@
         </p:nvSpPr>
         <p:spPr>
           <a:xfrm>
-            <a:off x="7022592" y="1843363"/>
+            <a:off x="7022592" y="1950466"/>
             <a:ext cx="777240" cy="219456"/>
           </a:xfrm>
           <a:prstGeom prst="rect">
@@ -6450,7 +6583,7 @@
                 <a:ea typeface="Meiryo" pitchFamily="34" charset="-122"/>
                 <a:cs typeface="Meiryo" pitchFamily="34" charset="-120"/>
               </a:rPr>
-              <a:t>3.67</a:t>
+              <a:t>3.44</a:t>
             </a:r>
             <a:endParaRPr lang="en-US" sz="1000" dirty="0"/>
           </a:p>
@@ -6534,7 +6667,7 @@
                 <a:ea typeface="Meiryo" pitchFamily="34" charset="-122"/>
                 <a:cs typeface="Meiryo" pitchFamily="34" charset="-120"/>
               </a:rPr>
-              <a:t>55拠点÷15人</a:t>
+              <a:t>55拠点÷16人</a:t>
             </a:r>
             <a:endParaRPr lang="en-US" sz="750" dirty="0"/>
           </a:p>
@@ -6548,8 +6681,8 @@
         </p:nvSpPr>
         <p:spPr>
           <a:xfrm>
-            <a:off x="7946136" y="1808480"/>
-            <a:ext cx="502920" cy="1986280"/>
+            <a:off x="7946136" y="1903065"/>
+            <a:ext cx="502920" cy="1891695"/>
           </a:xfrm>
           <a:prstGeom prst="rect">
             <a:avLst/>
@@ -6568,7 +6701,7 @@
         </p:nvSpPr>
         <p:spPr>
           <a:xfrm>
-            <a:off x="7808976" y="1570736"/>
+            <a:off x="7808976" y="1665321"/>
             <a:ext cx="777240" cy="219456"/>
           </a:xfrm>
           <a:prstGeom prst="rect">
@@ -6596,7 +6729,7 @@
                 <a:ea typeface="Meiryo" pitchFamily="34" charset="-122"/>
                 <a:cs typeface="Meiryo" pitchFamily="34" charset="-120"/>
               </a:rPr>
-              <a:t>4.25</a:t>
+              <a:t>4.05</a:t>
             </a:r>
             <a:endParaRPr lang="en-US" sz="1000" dirty="0"/>
           </a:p>
@@ -6680,7 +6813,7 @@
                 <a:ea typeface="Meiryo" pitchFamily="34" charset="-122"/>
                 <a:cs typeface="Meiryo" pitchFamily="34" charset="-120"/>
               </a:rPr>
-              <a:t>85拠点÷20人</a:t>
+              <a:t>85拠点÷21人</a:t>
             </a:r>
             <a:endParaRPr lang="en-US" sz="750" dirty="0"/>
           </a:p>
@@ -6694,7 +6827,7 @@
         </p:nvSpPr>
         <p:spPr>
           <a:xfrm>
-            <a:off x="4617720" y="2486152"/>
+            <a:off x="4617720" y="2392680"/>
             <a:ext cx="4160520" cy="0"/>
           </a:xfrm>
           <a:prstGeom prst="line">
@@ -6717,7 +6850,7 @@
         </p:nvSpPr>
         <p:spPr>
           <a:xfrm>
-            <a:off x="4663440" y="2239264"/>
+            <a:off x="4663440" y="2145792"/>
             <a:ext cx="1188720" cy="219456"/>
           </a:xfrm>
           <a:prstGeom prst="rect">
@@ -6745,7 +6878,7 @@
                 <a:ea typeface="Meiryo" pitchFamily="34" charset="-122"/>
                 <a:cs typeface="Meiryo" pitchFamily="34" charset="-120"/>
               </a:rPr>
-              <a:t>黒字ライン 2.8</a:t>
+              <a:t>黒字ライン 3</a:t>
             </a:r>
             <a:endParaRPr lang="en-US" sz="950" dirty="0"/>
           </a:p>
@@ -6894,7 +7027,7 @@
                 <a:ea typeface="Meiryo" pitchFamily="34" charset="-122"/>
                 <a:cs typeface="Meiryo" pitchFamily="34" charset="-120"/>
               </a:rPr>
-              <a:t>社員1人の費用＝4年目の販管費1億700万円÷15人（給料のほか家賃・広告・交通費などを含む）</a:t>
+              <a:t>社員1人の費用＝4年目の販管費11,103万円÷16人（営業・技術・サポートの全員。給料のほか家賃・広告・交通費などを含む）</a:t>
             </a:r>
             <a:endParaRPr lang="en-US" sz="800" dirty="0"/>
           </a:p>
@@ -7874,7 +8007,7 @@
                           <a:ea typeface="Meiryo" pitchFamily="34" charset="-122"/>
                           <a:cs typeface="Meiryo" pitchFamily="34" charset="-120"/>
                         </a:rPr>
-                        <a:t>28</a:t>
+                        <a:t>20</a:t>
                       </a:r>
                       <a:endParaRPr lang="en-US" sz="1000" dirty="0">
                         <a:latin typeface="Meiryo" charset="0"/>
@@ -8026,7 +8159,7 @@
                           <a:ea typeface="Meiryo" pitchFamily="34" charset="-122"/>
                           <a:cs typeface="Meiryo" pitchFamily="34" charset="-120"/>
                         </a:rPr>
-                        <a:t>69</a:t>
+                        <a:t>61</a:t>
                       </a:r>
                       <a:endParaRPr lang="en-US" sz="1000" dirty="0">
                         <a:latin typeface="Meiryo" charset="0"/>
@@ -8363,7 +8496,7 @@
                 <a:ea typeface="Meiryo" pitchFamily="34" charset="-122"/>
                 <a:cs typeface="Meiryo" pitchFamily="34" charset="-120"/>
               </a:rPr>
-              <a:t>64万円のエサで、1,865万円の魚を釣る</a:t>
+              <a:t>88万円のエサで、1,852万円の魚を釣る</a:t>
             </a:r>
             <a:endParaRPr lang="en-US" sz="2000" dirty="0"/>
           </a:p>
@@ -8558,7 +8691,7 @@
                 <a:ea typeface="Meiryo" pitchFamily="34" charset="-122"/>
                 <a:cs typeface="Meiryo" pitchFamily="34" charset="-120"/>
               </a:rPr>
-              <a:t>約64万円</a:t>
+              <a:t>約88万円</a:t>
             </a:r>
             <a:endParaRPr lang="en-US" sz="2400" dirty="0"/>
           </a:p>
@@ -8600,7 +8733,7 @@
                 <a:ea typeface="Meiryo" pitchFamily="34" charset="-122"/>
                 <a:cs typeface="Meiryo" pitchFamily="34" charset="-120"/>
               </a:rPr>
-              <a:t>（営業2人の人件費1,600万円</a:t>
+              <a:t>（営業3人の人件費2,400万円</a:t>
             </a:r>
             <a:endParaRPr lang="en-US" sz="1000" dirty="0"/>
           </a:p>
@@ -8682,7 +8815,7 @@
                 <a:ea typeface="Meiryo" pitchFamily="34" charset="-122"/>
                 <a:cs typeface="Meiryo" pitchFamily="34" charset="-120"/>
               </a:rPr>
-              <a:t>約29倍</a:t>
+              <a:t>約21倍</a:t>
             </a:r>
             <a:endParaRPr lang="en-US" sz="2400" dirty="0"/>
           </a:p>
@@ -8854,7 +8987,7 @@
                 <a:ea typeface="Meiryo" pitchFamily="34" charset="-122"/>
                 <a:cs typeface="Meiryo" pitchFamily="34" charset="-120"/>
               </a:rPr>
-              <a:t>約1,865万円</a:t>
+              <a:t>約1,852万円</a:t>
             </a:r>
             <a:endParaRPr lang="en-US" sz="2400" dirty="0"/>
           </a:p>
@@ -8916,7 +9049,7 @@
                 <a:ea typeface="Meiryo" pitchFamily="34" charset="-122"/>
                 <a:cs typeface="Meiryo" pitchFamily="34" charset="-120"/>
               </a:rPr>
-              <a:t>＋ 導入支援の粗利80万円</a:t>
+              <a:t>＋ 導入支援の粗利67万円</a:t>
             </a:r>
             <a:endParaRPr lang="en-US" sz="1050" dirty="0"/>
           </a:p>
@@ -9022,7 +9155,7 @@
                 <a:ea typeface="Meiryo" pitchFamily="34" charset="-122"/>
                 <a:cs typeface="Meiryo" pitchFamily="34" charset="-120"/>
               </a:rPr>
-              <a:t>64万円は約3か月で回収（64万円 ÷ 月21万円の粗利）。</a:t>
+              <a:t>88万円は約4か月で回収（88万円 ÷ 月21万円の粗利）。</a:t>
             </a:r>
             <a:endParaRPr lang="en-US" sz="1050" dirty="0"/>
           </a:p>
@@ -9042,7 +9175,7 @@
                 <a:ea typeface="Meiryo" pitchFamily="34" charset="-122"/>
                 <a:cs typeface="Meiryo" pitchFamily="34" charset="-120"/>
               </a:rPr>
-              <a:t>目安は「LTVがCACの3倍以上」。当社は約29倍なので、お客様を増やすほど会社が強くなる</a:t>
+              <a:t>目安は「LTVがCACの3倍以上」。当社は約21倍なので、お客様を増やすほど会社が強くなる</a:t>
             </a:r>
             <a:endParaRPr lang="en-US" sz="1050" dirty="0"/>
           </a:p>
@@ -9151,13 +9284,30 @@
             <a:r>
               <a:rPr lang="en-US" sz="2000" b="1" dirty="0">
                 <a:solidFill>
+                  <a:srgbClr val="B8692E"/>
+                </a:solidFill>
+                <a:latin typeface="Meiryo" pitchFamily="34" charset="0"/>
+                <a:ea typeface="Meiryo" pitchFamily="34" charset="-122"/>
+                <a:cs typeface="Meiryo" pitchFamily="34" charset="-120"/>
+              </a:rPr>
+              <a:t>お金の話7 </a:t>
+            </a:r>
+            <a:pPr algn="l" indent="0" marL="0">
+              <a:lnSpc>
+                <a:spcPct val="115000"/>
+              </a:lnSpc>
+              <a:buNone/>
+            </a:pPr>
+            <a:r>
+              <a:rPr lang="en-US" sz="2000" b="1" dirty="0">
+                <a:solidFill>
                   <a:srgbClr val="1A1A1A"/>
                 </a:solidFill>
                 <a:latin typeface="Meiryo" pitchFamily="34" charset="0"/>
                 <a:ea typeface="Meiryo" pitchFamily="34" charset="-122"/>
                 <a:cs typeface="Meiryo" pitchFamily="34" charset="-120"/>
               </a:rPr>
-              <a:t>500万円で、6か月以内に最初の1拠点を動かす</a:t>
+              <a:t>うまくいかなかったら？ 止まる線を先に決める</a:t>
             </a:r>
             <a:endParaRPr lang="en-US" sz="2000" dirty="0"/>
           </a:p>
@@ -9199,7 +9349,7 @@
                 <a:ea typeface="Meiryo" pitchFamily="34" charset="-122"/>
                 <a:cs typeface="Meiryo" pitchFamily="34" charset="-120"/>
               </a:rPr>
-              <a:t>創業者の給料はゼロ。すべて試作品と実証に使う</a:t>
+              <a:t>採用をお客様の数に合わせれば、計画の6割で黒字。届かなければ、決めた線で止まる</a:t>
             </a:r>
             <a:endParaRPr lang="en-US" sz="1200" dirty="0"/>
           </a:p>
@@ -9207,14 +9357,2026 @@
       </p:sp>
       <p:sp>
         <p:nvSpPr>
-          <p:cNvPr id="5" name="Shape 2"/>
+          <p:cNvPr id="5" name="Text 2"/>
+          <p:cNvSpPr txBox="1"/>
+          <p:nvPr/>
+        </p:nvSpPr>
+        <p:spPr>
+          <a:xfrm>
+            <a:off x="365760" y="1051560"/>
+            <a:ext cx="4846320" cy="237744"/>
+          </a:xfrm>
+          <a:prstGeom prst="rect">
+            <a:avLst/>
+          </a:prstGeom>
+          <a:noFill/>
+          <a:ln/>
+        </p:spPr>
+        <p:txBody>
+          <a:bodyPr wrap="square" lIns="0" tIns="0" rIns="0" bIns="0" rtlCol="0" anchor="t"/>
+          <a:lstStyle/>
+          <a:p>
+            <a:pPr algn="l" indent="0" marL="0">
+              <a:lnSpc>
+                <a:spcPct val="115000"/>
+              </a:lnSpc>
+              <a:buNone/>
+            </a:pPr>
+            <a:r>
+              <a:rPr lang="en-US" sz="1050" b="1" dirty="0">
+                <a:solidFill>
+                  <a:srgbClr val="1A1A1A"/>
+                </a:solidFill>
+                <a:latin typeface="Meiryo" pitchFamily="34" charset="0"/>
+                <a:ea typeface="Meiryo" pitchFamily="34" charset="-122"/>
+                <a:cs typeface="Meiryo" pitchFamily="34" charset="-120"/>
+              </a:rPr>
+              <a:t>新規拠点が計画に届かなかったら（百万円）</a:t>
+            </a:r>
+            <a:endParaRPr lang="en-US" sz="1050" dirty="0"/>
+          </a:p>
+        </p:txBody>
+      </p:sp>
+      <p:sp>
+        <p:nvSpPr>
+          <p:cNvPr id="6" name="Text 3"/>
+          <p:cNvSpPr txBox="1"/>
+          <p:nvPr/>
+        </p:nvSpPr>
+        <p:spPr>
+          <a:xfrm>
+            <a:off x="2651760" y="1325880"/>
+            <a:ext cx="1280160" cy="219456"/>
+          </a:xfrm>
+          <a:prstGeom prst="rect">
+            <a:avLst/>
+          </a:prstGeom>
+          <a:solidFill>
+            <a:srgbClr val="F2F2F2"/>
+          </a:solidFill>
+          <a:ln/>
+        </p:spPr>
+        <p:txBody>
+          <a:bodyPr wrap="square" lIns="0" tIns="0" rIns="0" bIns="0" rtlCol="0" anchor="ctr"/>
+          <a:lstStyle/>
+          <a:p>
+            <a:pPr algn="ctr" indent="0" marL="0">
+              <a:lnSpc>
+                <a:spcPct val="115000"/>
+              </a:lnSpc>
+              <a:buNone/>
+            </a:pPr>
+            <a:r>
+              <a:rPr lang="en-US" sz="850" b="1" dirty="0">
+                <a:solidFill>
+                  <a:srgbClr val="1A1A1A"/>
+                </a:solidFill>
+                <a:latin typeface="Meiryo" pitchFamily="34" charset="0"/>
+                <a:ea typeface="Meiryo" pitchFamily="34" charset="-122"/>
+                <a:cs typeface="Meiryo" pitchFamily="34" charset="-120"/>
+              </a:rPr>
+              <a:t>採用を実績に合わせる</a:t>
+            </a:r>
+            <a:endParaRPr lang="en-US" sz="850" dirty="0"/>
+          </a:p>
+        </p:txBody>
+      </p:sp>
+      <p:sp>
+        <p:nvSpPr>
+          <p:cNvPr id="7" name="Text 4"/>
+          <p:cNvSpPr txBox="1"/>
+          <p:nvPr/>
+        </p:nvSpPr>
+        <p:spPr>
+          <a:xfrm>
+            <a:off x="3931920" y="1325880"/>
+            <a:ext cx="1280160" cy="219456"/>
+          </a:xfrm>
+          <a:prstGeom prst="rect">
+            <a:avLst/>
+          </a:prstGeom>
+          <a:solidFill>
+            <a:srgbClr val="F2F2F2"/>
+          </a:solidFill>
+          <a:ln/>
+        </p:spPr>
+        <p:txBody>
+          <a:bodyPr wrap="square" lIns="0" tIns="0" rIns="0" bIns="0" rtlCol="0" anchor="ctr"/>
+          <a:lstStyle/>
+          <a:p>
+            <a:pPr algn="ctr" indent="0" marL="0">
+              <a:lnSpc>
+                <a:spcPct val="115000"/>
+              </a:lnSpc>
+              <a:buNone/>
+            </a:pPr>
+            <a:r>
+              <a:rPr lang="en-US" sz="850" b="1" dirty="0">
+                <a:solidFill>
+                  <a:srgbClr val="B8692E"/>
+                </a:solidFill>
+                <a:latin typeface="Meiryo" pitchFamily="34" charset="0"/>
+                <a:ea typeface="Meiryo" pitchFamily="34" charset="-122"/>
+                <a:cs typeface="Meiryo" pitchFamily="34" charset="-120"/>
+              </a:rPr>
+              <a:t>採用は計画どおり</a:t>
+            </a:r>
+            <a:endParaRPr lang="en-US" sz="850" dirty="0"/>
+          </a:p>
+        </p:txBody>
+      </p:sp>
+      <p:graphicFrame>
+        <p:nvGraphicFramePr>
+          <p:cNvPr id="15" name="shortfall"/>
+          <p:cNvGraphicFramePr>
+            <a:graphicFrameLocks noGrp="1"/>
+          </p:cNvGraphicFramePr>
+          <p:nvPr>
+            <p:extLst>
+              <p:ext uri="{D42A27DB-BD31-4B8C-83A1-F6EECF244321}">
+                <p14:modId xmlns:p14="http://schemas.microsoft.com/office/powerpoint/2010/main" val="1579011935"/>
+              </p:ext>
+            </p:extLst>
+          </p:nvPr>
+        </p:nvGraphicFramePr>
+        <p:xfrm>
+          <a:off x="365760" y="1554480"/>
+          <a:ext cx="4846320" cy="914400"/>
+        </p:xfrm>
+        <a:graphic>
+          <a:graphicData uri="http://schemas.openxmlformats.org/drawingml/2006/table">
+            <a:tbl>
+              <a:tblPr/>
+              <a:tblGrid>
+                <a:gridCol w="960120"/>
+                <a:gridCol w="1325880"/>
+                <a:gridCol w="640080"/>
+                <a:gridCol w="640080"/>
+                <a:gridCol w="640080"/>
+                <a:gridCol w="640080"/>
+              </a:tblGrid>
+              <a:tr h="292608">
+                <a:tc>
+                  <a:txBody>
+                    <a:bodyPr/>
+                    <a:lstStyle/>
+                    <a:p>
+                      <a:pPr algn="l" indent="0" marL="0">
+                        <a:buNone/>
+                      </a:pPr>
+                      <a:r>
+                        <a:rPr lang="en-US" sz="850" b="1" dirty="0">
+                          <a:solidFill>
+                            <a:srgbClr val="1A1A1A"/>
+                          </a:solidFill>
+                          <a:latin typeface="Meiryo" pitchFamily="34" charset="0"/>
+                          <a:ea typeface="Meiryo" pitchFamily="34" charset="-122"/>
+                          <a:cs typeface="Meiryo" pitchFamily="34" charset="-120"/>
+                        </a:rPr>
+                        <a:t>新規の達成度</a:t>
+                      </a:r>
+                      <a:endParaRPr lang="en-US" sz="850" dirty="0">
+                        <a:latin typeface="Meiryo" charset="0"/>
+                        <a:ea typeface="Meiryo" charset="0"/>
+                        <a:cs typeface="Meiryo" charset="0"/>
+                      </a:endParaRPr>
+                    </a:p>
+                  </a:txBody>
+                  <a:tcPr marL="54864" marR="54864" marT="18288" marB="18288" anchor="ctr">
+                    <a:lnL w="0" cap="flat" cmpd="sng" algn="ctr">
+                      <a:noFill/>
+                    </a:lnL>
+                    <a:lnR w="0" cap="flat" cmpd="sng" algn="ctr">
+                      <a:noFill/>
+                    </a:lnR>
+                    <a:lnT w="0" cap="flat" cmpd="sng" algn="ctr">
+                      <a:noFill/>
+                    </a:lnT>
+                    <a:lnB w="19050" cap="flat" cmpd="sng" algn="ctr">
+                      <a:solidFill>
+                        <a:srgbClr val="1A1A1A"/>
+                      </a:solidFill>
+                      <a:prstDash val="solid"/>
+                      <a:round/>
+                      <a:headEnd type="none" w="med" len="med"/>
+                      <a:tailEnd type="none" w="med" len="med"/>
+                    </a:lnB>
+                    <a:solidFill>
+                      <a:srgbClr val="F2F2F2"/>
+                    </a:solidFill>
+                  </a:tcPr>
+                </a:tc>
+                <a:tc>
+                  <a:txBody>
+                    <a:bodyPr/>
+                    <a:lstStyle/>
+                    <a:p>
+                      <a:pPr algn="ctr" indent="0" marL="0">
+                        <a:buNone/>
+                      </a:pPr>
+                      <a:r>
+                        <a:rPr lang="en-US" sz="850" b="1" dirty="0">
+                          <a:solidFill>
+                            <a:srgbClr val="1A1A1A"/>
+                          </a:solidFill>
+                          <a:latin typeface="Meiryo" pitchFamily="34" charset="0"/>
+                          <a:ea typeface="Meiryo" pitchFamily="34" charset="-122"/>
+                          <a:cs typeface="Meiryo" pitchFamily="34" charset="-120"/>
+                        </a:rPr>
+                        <a:t>新規拠点（1〜5年目）</a:t>
+                      </a:r>
+                      <a:endParaRPr lang="en-US" sz="850" dirty="0">
+                        <a:latin typeface="Meiryo" charset="0"/>
+                        <a:ea typeface="Meiryo" charset="0"/>
+                        <a:cs typeface="Meiryo" charset="0"/>
+                      </a:endParaRPr>
+                    </a:p>
+                  </a:txBody>
+                  <a:tcPr marL="54864" marR="54864" marT="18288" marB="18288" anchor="ctr">
+                    <a:lnL w="0" cap="flat" cmpd="sng" algn="ctr">
+                      <a:noFill/>
+                    </a:lnL>
+                    <a:lnR w="0" cap="flat" cmpd="sng" algn="ctr">
+                      <a:noFill/>
+                    </a:lnR>
+                    <a:lnT w="0" cap="flat" cmpd="sng" algn="ctr">
+                      <a:noFill/>
+                    </a:lnT>
+                    <a:lnB w="19050" cap="flat" cmpd="sng" algn="ctr">
+                      <a:solidFill>
+                        <a:srgbClr val="1A1A1A"/>
+                      </a:solidFill>
+                      <a:prstDash val="solid"/>
+                      <a:round/>
+                      <a:headEnd type="none" w="med" len="med"/>
+                      <a:tailEnd type="none" w="med" len="med"/>
+                    </a:lnB>
+                    <a:solidFill>
+                      <a:srgbClr val="F2F2F2"/>
+                    </a:solidFill>
+                  </a:tcPr>
+                </a:tc>
+                <a:tc>
+                  <a:txBody>
+                    <a:bodyPr/>
+                    <a:lstStyle/>
+                    <a:p>
+                      <a:pPr algn="ctr" indent="0" marL="0">
+                        <a:buNone/>
+                      </a:pPr>
+                      <a:r>
+                        <a:rPr lang="en-US" sz="850" b="1" dirty="0">
+                          <a:solidFill>
+                            <a:srgbClr val="1A1A1A"/>
+                          </a:solidFill>
+                          <a:latin typeface="Meiryo" pitchFamily="34" charset="0"/>
+                          <a:ea typeface="Meiryo" pitchFamily="34" charset="-122"/>
+                          <a:cs typeface="Meiryo" pitchFamily="34" charset="-120"/>
+                        </a:rPr>
+                        <a:t>黒字化</a:t>
+                      </a:r>
+                      <a:endParaRPr lang="en-US" sz="850" dirty="0">
+                        <a:latin typeface="Meiryo" charset="0"/>
+                        <a:ea typeface="Meiryo" charset="0"/>
+                        <a:cs typeface="Meiryo" charset="0"/>
+                      </a:endParaRPr>
+                    </a:p>
+                  </a:txBody>
+                  <a:tcPr marL="54864" marR="54864" marT="18288" marB="18288" anchor="ctr">
+                    <a:lnL w="0" cap="flat" cmpd="sng" algn="ctr">
+                      <a:noFill/>
+                    </a:lnL>
+                    <a:lnR w="0" cap="flat" cmpd="sng" algn="ctr">
+                      <a:noFill/>
+                    </a:lnR>
+                    <a:lnT w="0" cap="flat" cmpd="sng" algn="ctr">
+                      <a:noFill/>
+                    </a:lnT>
+                    <a:lnB w="19050" cap="flat" cmpd="sng" algn="ctr">
+                      <a:solidFill>
+                        <a:srgbClr val="1A1A1A"/>
+                      </a:solidFill>
+                      <a:prstDash val="solid"/>
+                      <a:round/>
+                      <a:headEnd type="none" w="med" len="med"/>
+                      <a:tailEnd type="none" w="med" len="med"/>
+                    </a:lnB>
+                    <a:solidFill>
+                      <a:srgbClr val="F2F2F2"/>
+                    </a:solidFill>
+                  </a:tcPr>
+                </a:tc>
+                <a:tc>
+                  <a:txBody>
+                    <a:bodyPr/>
+                    <a:lstStyle/>
+                    <a:p>
+                      <a:pPr algn="ctr" indent="0" marL="0">
+                        <a:buNone/>
+                      </a:pPr>
+                      <a:r>
+                        <a:rPr lang="en-US" sz="850" b="1" dirty="0">
+                          <a:solidFill>
+                            <a:srgbClr val="1A1A1A"/>
+                          </a:solidFill>
+                          <a:latin typeface="Meiryo" pitchFamily="34" charset="0"/>
+                          <a:ea typeface="Meiryo" pitchFamily="34" charset="-122"/>
+                          <a:cs typeface="Meiryo" pitchFamily="34" charset="-120"/>
+                        </a:rPr>
+                        <a:t>最低現金</a:t>
+                      </a:r>
+                      <a:endParaRPr lang="en-US" sz="850" dirty="0">
+                        <a:latin typeface="Meiryo" charset="0"/>
+                        <a:ea typeface="Meiryo" charset="0"/>
+                        <a:cs typeface="Meiryo" charset="0"/>
+                      </a:endParaRPr>
+                    </a:p>
+                  </a:txBody>
+                  <a:tcPr marL="54864" marR="54864" marT="18288" marB="18288" anchor="ctr">
+                    <a:lnL w="0" cap="flat" cmpd="sng" algn="ctr">
+                      <a:noFill/>
+                    </a:lnL>
+                    <a:lnR w="0" cap="flat" cmpd="sng" algn="ctr">
+                      <a:noFill/>
+                    </a:lnR>
+                    <a:lnT w="0" cap="flat" cmpd="sng" algn="ctr">
+                      <a:noFill/>
+                    </a:lnT>
+                    <a:lnB w="19050" cap="flat" cmpd="sng" algn="ctr">
+                      <a:solidFill>
+                        <a:srgbClr val="1A1A1A"/>
+                      </a:solidFill>
+                      <a:prstDash val="solid"/>
+                      <a:round/>
+                      <a:headEnd type="none" w="med" len="med"/>
+                      <a:tailEnd type="none" w="med" len="med"/>
+                    </a:lnB>
+                    <a:solidFill>
+                      <a:srgbClr val="F2F2F2"/>
+                    </a:solidFill>
+                  </a:tcPr>
+                </a:tc>
+                <a:tc>
+                  <a:txBody>
+                    <a:bodyPr/>
+                    <a:lstStyle/>
+                    <a:p>
+                      <a:pPr algn="ctr" indent="0" marL="0">
+                        <a:buNone/>
+                      </a:pPr>
+                      <a:r>
+                        <a:rPr lang="en-US" sz="850" b="1" dirty="0">
+                          <a:solidFill>
+                            <a:srgbClr val="1A1A1A"/>
+                          </a:solidFill>
+                          <a:latin typeface="Meiryo" pitchFamily="34" charset="0"/>
+                          <a:ea typeface="Meiryo" pitchFamily="34" charset="-122"/>
+                          <a:cs typeface="Meiryo" pitchFamily="34" charset="-120"/>
+                        </a:rPr>
+                        <a:t>黒字化</a:t>
+                      </a:r>
+                      <a:endParaRPr lang="en-US" sz="850" dirty="0">
+                        <a:latin typeface="Meiryo" charset="0"/>
+                        <a:ea typeface="Meiryo" charset="0"/>
+                        <a:cs typeface="Meiryo" charset="0"/>
+                      </a:endParaRPr>
+                    </a:p>
+                  </a:txBody>
+                  <a:tcPr marL="54864" marR="54864" marT="18288" marB="18288" anchor="ctr">
+                    <a:lnL w="0" cap="flat" cmpd="sng" algn="ctr">
+                      <a:noFill/>
+                    </a:lnL>
+                    <a:lnR w="0" cap="flat" cmpd="sng" algn="ctr">
+                      <a:noFill/>
+                    </a:lnR>
+                    <a:lnT w="0" cap="flat" cmpd="sng" algn="ctr">
+                      <a:noFill/>
+                    </a:lnT>
+                    <a:lnB w="19050" cap="flat" cmpd="sng" algn="ctr">
+                      <a:solidFill>
+                        <a:srgbClr val="1A1A1A"/>
+                      </a:solidFill>
+                      <a:prstDash val="solid"/>
+                      <a:round/>
+                      <a:headEnd type="none" w="med" len="med"/>
+                      <a:tailEnd type="none" w="med" len="med"/>
+                    </a:lnB>
+                    <a:solidFill>
+                      <a:srgbClr val="F2F2F2"/>
+                    </a:solidFill>
+                  </a:tcPr>
+                </a:tc>
+                <a:tc>
+                  <a:txBody>
+                    <a:bodyPr/>
+                    <a:lstStyle/>
+                    <a:p>
+                      <a:pPr algn="ctr" indent="0" marL="0">
+                        <a:buNone/>
+                      </a:pPr>
+                      <a:r>
+                        <a:rPr lang="en-US" sz="850" b="1" dirty="0">
+                          <a:solidFill>
+                            <a:srgbClr val="1A1A1A"/>
+                          </a:solidFill>
+                          <a:latin typeface="Meiryo" pitchFamily="34" charset="0"/>
+                          <a:ea typeface="Meiryo" pitchFamily="34" charset="-122"/>
+                          <a:cs typeface="Meiryo" pitchFamily="34" charset="-120"/>
+                        </a:rPr>
+                        <a:t>最低現金</a:t>
+                      </a:r>
+                      <a:endParaRPr lang="en-US" sz="850" dirty="0">
+                        <a:latin typeface="Meiryo" charset="0"/>
+                        <a:ea typeface="Meiryo" charset="0"/>
+                        <a:cs typeface="Meiryo" charset="0"/>
+                      </a:endParaRPr>
+                    </a:p>
+                  </a:txBody>
+                  <a:tcPr marL="54864" marR="54864" marT="18288" marB="18288" anchor="ctr">
+                    <a:lnL w="0" cap="flat" cmpd="sng" algn="ctr">
+                      <a:noFill/>
+                    </a:lnL>
+                    <a:lnR w="0" cap="flat" cmpd="sng" algn="ctr">
+                      <a:noFill/>
+                    </a:lnR>
+                    <a:lnT w="0" cap="flat" cmpd="sng" algn="ctr">
+                      <a:noFill/>
+                    </a:lnT>
+                    <a:lnB w="19050" cap="flat" cmpd="sng" algn="ctr">
+                      <a:solidFill>
+                        <a:srgbClr val="1A1A1A"/>
+                      </a:solidFill>
+                      <a:prstDash val="solid"/>
+                      <a:round/>
+                      <a:headEnd type="none" w="med" len="med"/>
+                      <a:tailEnd type="none" w="med" len="med"/>
+                    </a:lnB>
+                    <a:solidFill>
+                      <a:srgbClr val="F2F2F2"/>
+                    </a:solidFill>
+                  </a:tcPr>
+                </a:tc>
+              </a:tr>
+              <a:tr h="292608">
+                <a:tc>
+                  <a:txBody>
+                    <a:bodyPr/>
+                    <a:lstStyle/>
+                    <a:p>
+                      <a:pPr algn="l" indent="0" marL="0">
+                        <a:buNone/>
+                      </a:pPr>
+                      <a:r>
+                        <a:rPr lang="en-US" sz="850" dirty="0">
+                          <a:solidFill>
+                            <a:srgbClr val="1A1A1A"/>
+                          </a:solidFill>
+                          <a:latin typeface="Meiryo" pitchFamily="34" charset="0"/>
+                          <a:ea typeface="Meiryo" pitchFamily="34" charset="-122"/>
+                          <a:cs typeface="Meiryo" pitchFamily="34" charset="-120"/>
+                        </a:rPr>
+                        <a:t>計画どおり</a:t>
+                      </a:r>
+                      <a:endParaRPr lang="en-US" sz="850" dirty="0">
+                        <a:latin typeface="Meiryo" charset="0"/>
+                        <a:ea typeface="Meiryo" charset="0"/>
+                        <a:cs typeface="Meiryo" charset="0"/>
+                      </a:endParaRPr>
+                    </a:p>
+                  </a:txBody>
+                  <a:tcPr marL="54864" marR="54864" marT="18288" marB="18288" anchor="ctr">
+                    <a:lnL w="0" cap="flat" cmpd="sng" algn="ctr">
+                      <a:noFill/>
+                    </a:lnL>
+                    <a:lnR w="0" cap="flat" cmpd="sng" algn="ctr">
+                      <a:noFill/>
+                    </a:lnR>
+                    <a:lnT w="0" cap="flat" cmpd="sng" algn="ctr">
+                      <a:noFill/>
+                    </a:lnT>
+                    <a:lnB w="9525" cap="flat" cmpd="sng" algn="ctr">
+                      <a:solidFill>
+                        <a:srgbClr val="BFBFBF"/>
+                      </a:solidFill>
+                      <a:prstDash val="solid"/>
+                      <a:round/>
+                      <a:headEnd type="none" w="med" len="med"/>
+                      <a:tailEnd type="none" w="med" len="med"/>
+                    </a:lnB>
+                    <a:solidFill>
+                      <a:srgbClr val="FFFFFF"/>
+                    </a:solidFill>
+                  </a:tcPr>
+                </a:tc>
+                <a:tc>
+                  <a:txBody>
+                    <a:bodyPr/>
+                    <a:lstStyle/>
+                    <a:p>
+                      <a:pPr algn="ctr" indent="0" marL="0">
+                        <a:buNone/>
+                      </a:pPr>
+                      <a:r>
+                        <a:rPr lang="en-US" sz="850" dirty="0">
+                          <a:solidFill>
+                            <a:srgbClr val="4D4D4D"/>
+                          </a:solidFill>
+                          <a:latin typeface="Meiryo" pitchFamily="34" charset="0"/>
+                          <a:ea typeface="Meiryo" pitchFamily="34" charset="-122"/>
+                          <a:cs typeface="Meiryo" pitchFamily="34" charset="-120"/>
+                        </a:rPr>
+                        <a:t>3・9・18・27・33</a:t>
+                      </a:r>
+                      <a:endParaRPr lang="en-US" sz="850" dirty="0">
+                        <a:latin typeface="Meiryo" charset="0"/>
+                        <a:ea typeface="Meiryo" charset="0"/>
+                        <a:cs typeface="Meiryo" charset="0"/>
+                      </a:endParaRPr>
+                    </a:p>
+                  </a:txBody>
+                  <a:tcPr marL="54864" marR="54864" marT="18288" marB="18288" anchor="ctr">
+                    <a:lnL w="0" cap="flat" cmpd="sng" algn="ctr">
+                      <a:noFill/>
+                    </a:lnL>
+                    <a:lnR w="0" cap="flat" cmpd="sng" algn="ctr">
+                      <a:noFill/>
+                    </a:lnR>
+                    <a:lnT w="0" cap="flat" cmpd="sng" algn="ctr">
+                      <a:noFill/>
+                    </a:lnT>
+                    <a:lnB w="9525" cap="flat" cmpd="sng" algn="ctr">
+                      <a:solidFill>
+                        <a:srgbClr val="BFBFBF"/>
+                      </a:solidFill>
+                      <a:prstDash val="solid"/>
+                      <a:round/>
+                      <a:headEnd type="none" w="med" len="med"/>
+                      <a:tailEnd type="none" w="med" len="med"/>
+                    </a:lnB>
+                    <a:solidFill>
+                      <a:srgbClr val="FFFFFF"/>
+                    </a:solidFill>
+                  </a:tcPr>
+                </a:tc>
+                <a:tc>
+                  <a:txBody>
+                    <a:bodyPr/>
+                    <a:lstStyle/>
+                    <a:p>
+                      <a:pPr algn="ctr" indent="0" marL="0">
+                        <a:buNone/>
+                      </a:pPr>
+                      <a:r>
+                        <a:rPr lang="en-US" sz="850" dirty="0">
+                          <a:solidFill>
+                            <a:srgbClr val="1A1A1A"/>
+                          </a:solidFill>
+                          <a:latin typeface="Meiryo" pitchFamily="34" charset="0"/>
+                          <a:ea typeface="Meiryo" pitchFamily="34" charset="-122"/>
+                          <a:cs typeface="Meiryo" pitchFamily="34" charset="-120"/>
+                        </a:rPr>
+                        <a:t>4年目</a:t>
+                      </a:r>
+                      <a:endParaRPr lang="en-US" sz="850" dirty="0">
+                        <a:latin typeface="Meiryo" charset="0"/>
+                        <a:ea typeface="Meiryo" charset="0"/>
+                        <a:cs typeface="Meiryo" charset="0"/>
+                      </a:endParaRPr>
+                    </a:p>
+                  </a:txBody>
+                  <a:tcPr marL="54864" marR="54864" marT="18288" marB="18288" anchor="ctr">
+                    <a:lnL w="0" cap="flat" cmpd="sng" algn="ctr">
+                      <a:noFill/>
+                    </a:lnL>
+                    <a:lnR w="0" cap="flat" cmpd="sng" algn="ctr">
+                      <a:noFill/>
+                    </a:lnR>
+                    <a:lnT w="0" cap="flat" cmpd="sng" algn="ctr">
+                      <a:noFill/>
+                    </a:lnT>
+                    <a:lnB w="9525" cap="flat" cmpd="sng" algn="ctr">
+                      <a:solidFill>
+                        <a:srgbClr val="BFBFBF"/>
+                      </a:solidFill>
+                      <a:prstDash val="solid"/>
+                      <a:round/>
+                      <a:headEnd type="none" w="med" len="med"/>
+                      <a:tailEnd type="none" w="med" len="med"/>
+                    </a:lnB>
+                    <a:solidFill>
+                      <a:srgbClr val="FFFFFF"/>
+                    </a:solidFill>
+                  </a:tcPr>
+                </a:tc>
+                <a:tc>
+                  <a:txBody>
+                    <a:bodyPr/>
+                    <a:lstStyle/>
+                    <a:p>
+                      <a:pPr algn="ctr" indent="0" marL="0">
+                        <a:buNone/>
+                      </a:pPr>
+                      <a:r>
+                        <a:rPr lang="en-US" sz="850" dirty="0">
+                          <a:solidFill>
+                            <a:srgbClr val="1A1A1A"/>
+                          </a:solidFill>
+                          <a:latin typeface="Meiryo" pitchFamily="34" charset="0"/>
+                          <a:ea typeface="Meiryo" pitchFamily="34" charset="-122"/>
+                          <a:cs typeface="Meiryo" pitchFamily="34" charset="-120"/>
+                        </a:rPr>
+                        <a:t>60</a:t>
+                      </a:r>
+                      <a:endParaRPr lang="en-US" sz="850" dirty="0">
+                        <a:latin typeface="Meiryo" charset="0"/>
+                        <a:ea typeface="Meiryo" charset="0"/>
+                        <a:cs typeface="Meiryo" charset="0"/>
+                      </a:endParaRPr>
+                    </a:p>
+                  </a:txBody>
+                  <a:tcPr marL="54864" marR="54864" marT="18288" marB="18288" anchor="ctr">
+                    <a:lnL w="0" cap="flat" cmpd="sng" algn="ctr">
+                      <a:noFill/>
+                    </a:lnL>
+                    <a:lnR w="0" cap="flat" cmpd="sng" algn="ctr">
+                      <a:noFill/>
+                    </a:lnR>
+                    <a:lnT w="0" cap="flat" cmpd="sng" algn="ctr">
+                      <a:noFill/>
+                    </a:lnT>
+                    <a:lnB w="9525" cap="flat" cmpd="sng" algn="ctr">
+                      <a:solidFill>
+                        <a:srgbClr val="BFBFBF"/>
+                      </a:solidFill>
+                      <a:prstDash val="solid"/>
+                      <a:round/>
+                      <a:headEnd type="none" w="med" len="med"/>
+                      <a:tailEnd type="none" w="med" len="med"/>
+                    </a:lnB>
+                    <a:solidFill>
+                      <a:srgbClr val="FFFFFF"/>
+                    </a:solidFill>
+                  </a:tcPr>
+                </a:tc>
+                <a:tc>
+                  <a:txBody>
+                    <a:bodyPr/>
+                    <a:lstStyle/>
+                    <a:p>
+                      <a:pPr algn="ctr" indent="0" marL="0">
+                        <a:buNone/>
+                      </a:pPr>
+                      <a:r>
+                        <a:rPr lang="en-US" sz="850" dirty="0">
+                          <a:solidFill>
+                            <a:srgbClr val="1A1A1A"/>
+                          </a:solidFill>
+                          <a:latin typeface="Meiryo" pitchFamily="34" charset="0"/>
+                          <a:ea typeface="Meiryo" pitchFamily="34" charset="-122"/>
+                          <a:cs typeface="Meiryo" pitchFamily="34" charset="-120"/>
+                        </a:rPr>
+                        <a:t>4年目</a:t>
+                      </a:r>
+                      <a:endParaRPr lang="en-US" sz="850" dirty="0">
+                        <a:latin typeface="Meiryo" charset="0"/>
+                        <a:ea typeface="Meiryo" charset="0"/>
+                        <a:cs typeface="Meiryo" charset="0"/>
+                      </a:endParaRPr>
+                    </a:p>
+                  </a:txBody>
+                  <a:tcPr marL="54864" marR="54864" marT="18288" marB="18288" anchor="ctr">
+                    <a:lnL w="0" cap="flat" cmpd="sng" algn="ctr">
+                      <a:noFill/>
+                    </a:lnL>
+                    <a:lnR w="0" cap="flat" cmpd="sng" algn="ctr">
+                      <a:noFill/>
+                    </a:lnR>
+                    <a:lnT w="0" cap="flat" cmpd="sng" algn="ctr">
+                      <a:noFill/>
+                    </a:lnT>
+                    <a:lnB w="9525" cap="flat" cmpd="sng" algn="ctr">
+                      <a:solidFill>
+                        <a:srgbClr val="BFBFBF"/>
+                      </a:solidFill>
+                      <a:prstDash val="solid"/>
+                      <a:round/>
+                      <a:headEnd type="none" w="med" len="med"/>
+                      <a:tailEnd type="none" w="med" len="med"/>
+                    </a:lnB>
+                    <a:solidFill>
+                      <a:srgbClr val="FFFFFF"/>
+                    </a:solidFill>
+                  </a:tcPr>
+                </a:tc>
+                <a:tc>
+                  <a:txBody>
+                    <a:bodyPr/>
+                    <a:lstStyle/>
+                    <a:p>
+                      <a:pPr algn="ctr" indent="0" marL="0">
+                        <a:buNone/>
+                      </a:pPr>
+                      <a:r>
+                        <a:rPr lang="en-US" sz="850" dirty="0">
+                          <a:solidFill>
+                            <a:srgbClr val="1A1A1A"/>
+                          </a:solidFill>
+                          <a:latin typeface="Meiryo" pitchFamily="34" charset="0"/>
+                          <a:ea typeface="Meiryo" pitchFamily="34" charset="-122"/>
+                          <a:cs typeface="Meiryo" pitchFamily="34" charset="-120"/>
+                        </a:rPr>
+                        <a:t>60</a:t>
+                      </a:r>
+                      <a:endParaRPr lang="en-US" sz="850" dirty="0">
+                        <a:latin typeface="Meiryo" charset="0"/>
+                        <a:ea typeface="Meiryo" charset="0"/>
+                        <a:cs typeface="Meiryo" charset="0"/>
+                      </a:endParaRPr>
+                    </a:p>
+                  </a:txBody>
+                  <a:tcPr marL="54864" marR="54864" marT="18288" marB="18288" anchor="ctr">
+                    <a:lnL w="0" cap="flat" cmpd="sng" algn="ctr">
+                      <a:noFill/>
+                    </a:lnL>
+                    <a:lnR w="0" cap="flat" cmpd="sng" algn="ctr">
+                      <a:noFill/>
+                    </a:lnR>
+                    <a:lnT w="0" cap="flat" cmpd="sng" algn="ctr">
+                      <a:noFill/>
+                    </a:lnT>
+                    <a:lnB w="9525" cap="flat" cmpd="sng" algn="ctr">
+                      <a:solidFill>
+                        <a:srgbClr val="BFBFBF"/>
+                      </a:solidFill>
+                      <a:prstDash val="solid"/>
+                      <a:round/>
+                      <a:headEnd type="none" w="med" len="med"/>
+                      <a:tailEnd type="none" w="med" len="med"/>
+                    </a:lnB>
+                    <a:solidFill>
+                      <a:srgbClr val="FFFFFF"/>
+                    </a:solidFill>
+                  </a:tcPr>
+                </a:tc>
+              </a:tr>
+              <a:tr h="292608">
+                <a:tc>
+                  <a:txBody>
+                    <a:bodyPr/>
+                    <a:lstStyle/>
+                    <a:p>
+                      <a:pPr algn="l" indent="0" marL="0">
+                        <a:buNone/>
+                      </a:pPr>
+                      <a:r>
+                        <a:rPr lang="en-US" sz="850" dirty="0">
+                          <a:solidFill>
+                            <a:srgbClr val="1A1A1A"/>
+                          </a:solidFill>
+                          <a:latin typeface="Meiryo" pitchFamily="34" charset="0"/>
+                          <a:ea typeface="Meiryo" pitchFamily="34" charset="-122"/>
+                          <a:cs typeface="Meiryo" pitchFamily="34" charset="-120"/>
+                        </a:rPr>
+                        <a:t>計画の8割</a:t>
+                      </a:r>
+                      <a:endParaRPr lang="en-US" sz="850" dirty="0">
+                        <a:latin typeface="Meiryo" charset="0"/>
+                        <a:ea typeface="Meiryo" charset="0"/>
+                        <a:cs typeface="Meiryo" charset="0"/>
+                      </a:endParaRPr>
+                    </a:p>
+                  </a:txBody>
+                  <a:tcPr marL="54864" marR="54864" marT="18288" marB="18288" anchor="ctr">
+                    <a:lnL w="0" cap="flat" cmpd="sng" algn="ctr">
+                      <a:noFill/>
+                    </a:lnL>
+                    <a:lnR w="0" cap="flat" cmpd="sng" algn="ctr">
+                      <a:noFill/>
+                    </a:lnR>
+                    <a:lnT w="0" cap="flat" cmpd="sng" algn="ctr">
+                      <a:noFill/>
+                    </a:lnT>
+                    <a:lnB w="9525" cap="flat" cmpd="sng" algn="ctr">
+                      <a:solidFill>
+                        <a:srgbClr val="BFBFBF"/>
+                      </a:solidFill>
+                      <a:prstDash val="solid"/>
+                      <a:round/>
+                      <a:headEnd type="none" w="med" len="med"/>
+                      <a:tailEnd type="none" w="med" len="med"/>
+                    </a:lnB>
+                    <a:solidFill>
+                      <a:srgbClr val="FFFFFF"/>
+                    </a:solidFill>
+                  </a:tcPr>
+                </a:tc>
+                <a:tc>
+                  <a:txBody>
+                    <a:bodyPr/>
+                    <a:lstStyle/>
+                    <a:p>
+                      <a:pPr algn="ctr" indent="0" marL="0">
+                        <a:buNone/>
+                      </a:pPr>
+                      <a:r>
+                        <a:rPr lang="en-US" sz="850" dirty="0">
+                          <a:solidFill>
+                            <a:srgbClr val="4D4D4D"/>
+                          </a:solidFill>
+                          <a:latin typeface="Meiryo" pitchFamily="34" charset="0"/>
+                          <a:ea typeface="Meiryo" pitchFamily="34" charset="-122"/>
+                          <a:cs typeface="Meiryo" pitchFamily="34" charset="-120"/>
+                        </a:rPr>
+                        <a:t>2・7・14・22・26</a:t>
+                      </a:r>
+                      <a:endParaRPr lang="en-US" sz="850" dirty="0">
+                        <a:latin typeface="Meiryo" charset="0"/>
+                        <a:ea typeface="Meiryo" charset="0"/>
+                        <a:cs typeface="Meiryo" charset="0"/>
+                      </a:endParaRPr>
+                    </a:p>
+                  </a:txBody>
+                  <a:tcPr marL="54864" marR="54864" marT="18288" marB="18288" anchor="ctr">
+                    <a:lnL w="0" cap="flat" cmpd="sng" algn="ctr">
+                      <a:noFill/>
+                    </a:lnL>
+                    <a:lnR w="0" cap="flat" cmpd="sng" algn="ctr">
+                      <a:noFill/>
+                    </a:lnR>
+                    <a:lnT w="0" cap="flat" cmpd="sng" algn="ctr">
+                      <a:noFill/>
+                    </a:lnT>
+                    <a:lnB w="9525" cap="flat" cmpd="sng" algn="ctr">
+                      <a:solidFill>
+                        <a:srgbClr val="BFBFBF"/>
+                      </a:solidFill>
+                      <a:prstDash val="solid"/>
+                      <a:round/>
+                      <a:headEnd type="none" w="med" len="med"/>
+                      <a:tailEnd type="none" w="med" len="med"/>
+                    </a:lnB>
+                    <a:solidFill>
+                      <a:srgbClr val="FFFFFF"/>
+                    </a:solidFill>
+                  </a:tcPr>
+                </a:tc>
+                <a:tc>
+                  <a:txBody>
+                    <a:bodyPr/>
+                    <a:lstStyle/>
+                    <a:p>
+                      <a:pPr algn="ctr" indent="0" marL="0">
+                        <a:buNone/>
+                      </a:pPr>
+                      <a:r>
+                        <a:rPr lang="en-US" sz="850" dirty="0">
+                          <a:solidFill>
+                            <a:srgbClr val="1A1A1A"/>
+                          </a:solidFill>
+                          <a:latin typeface="Meiryo" pitchFamily="34" charset="0"/>
+                          <a:ea typeface="Meiryo" pitchFamily="34" charset="-122"/>
+                          <a:cs typeface="Meiryo" pitchFamily="34" charset="-120"/>
+                        </a:rPr>
+                        <a:t>4年目</a:t>
+                      </a:r>
+                      <a:endParaRPr lang="en-US" sz="850" dirty="0">
+                        <a:latin typeface="Meiryo" charset="0"/>
+                        <a:ea typeface="Meiryo" charset="0"/>
+                        <a:cs typeface="Meiryo" charset="0"/>
+                      </a:endParaRPr>
+                    </a:p>
+                  </a:txBody>
+                  <a:tcPr marL="54864" marR="54864" marT="18288" marB="18288" anchor="ctr">
+                    <a:lnL w="0" cap="flat" cmpd="sng" algn="ctr">
+                      <a:noFill/>
+                    </a:lnL>
+                    <a:lnR w="0" cap="flat" cmpd="sng" algn="ctr">
+                      <a:noFill/>
+                    </a:lnR>
+                    <a:lnT w="0" cap="flat" cmpd="sng" algn="ctr">
+                      <a:noFill/>
+                    </a:lnT>
+                    <a:lnB w="9525" cap="flat" cmpd="sng" algn="ctr">
+                      <a:solidFill>
+                        <a:srgbClr val="BFBFBF"/>
+                      </a:solidFill>
+                      <a:prstDash val="solid"/>
+                      <a:round/>
+                      <a:headEnd type="none" w="med" len="med"/>
+                      <a:tailEnd type="none" w="med" len="med"/>
+                    </a:lnB>
+                    <a:solidFill>
+                      <a:srgbClr val="FFFFFF"/>
+                    </a:solidFill>
+                  </a:tcPr>
+                </a:tc>
+                <a:tc>
+                  <a:txBody>
+                    <a:bodyPr/>
+                    <a:lstStyle/>
+                    <a:p>
+                      <a:pPr algn="ctr" indent="0" marL="0">
+                        <a:buNone/>
+                      </a:pPr>
+                      <a:r>
+                        <a:rPr lang="en-US" sz="850" dirty="0">
+                          <a:solidFill>
+                            <a:srgbClr val="1A1A1A"/>
+                          </a:solidFill>
+                          <a:latin typeface="Meiryo" pitchFamily="34" charset="0"/>
+                          <a:ea typeface="Meiryo" pitchFamily="34" charset="-122"/>
+                          <a:cs typeface="Meiryo" pitchFamily="34" charset="-120"/>
+                        </a:rPr>
+                        <a:t>39</a:t>
+                      </a:r>
+                      <a:endParaRPr lang="en-US" sz="850" dirty="0">
+                        <a:latin typeface="Meiryo" charset="0"/>
+                        <a:ea typeface="Meiryo" charset="0"/>
+                        <a:cs typeface="Meiryo" charset="0"/>
+                      </a:endParaRPr>
+                    </a:p>
+                  </a:txBody>
+                  <a:tcPr marL="54864" marR="54864" marT="18288" marB="18288" anchor="ctr">
+                    <a:lnL w="0" cap="flat" cmpd="sng" algn="ctr">
+                      <a:noFill/>
+                    </a:lnL>
+                    <a:lnR w="0" cap="flat" cmpd="sng" algn="ctr">
+                      <a:noFill/>
+                    </a:lnR>
+                    <a:lnT w="0" cap="flat" cmpd="sng" algn="ctr">
+                      <a:noFill/>
+                    </a:lnT>
+                    <a:lnB w="9525" cap="flat" cmpd="sng" algn="ctr">
+                      <a:solidFill>
+                        <a:srgbClr val="BFBFBF"/>
+                      </a:solidFill>
+                      <a:prstDash val="solid"/>
+                      <a:round/>
+                      <a:headEnd type="none" w="med" len="med"/>
+                      <a:tailEnd type="none" w="med" len="med"/>
+                    </a:lnB>
+                    <a:solidFill>
+                      <a:srgbClr val="FFFFFF"/>
+                    </a:solidFill>
+                  </a:tcPr>
+                </a:tc>
+                <a:tc>
+                  <a:txBody>
+                    <a:bodyPr/>
+                    <a:lstStyle/>
+                    <a:p>
+                      <a:pPr algn="ctr" indent="0" marL="0">
+                        <a:buNone/>
+                      </a:pPr>
+                      <a:r>
+                        <a:rPr lang="en-US" sz="850" dirty="0">
+                          <a:solidFill>
+                            <a:srgbClr val="1A1A1A"/>
+                          </a:solidFill>
+                          <a:latin typeface="Meiryo" pitchFamily="34" charset="0"/>
+                          <a:ea typeface="Meiryo" pitchFamily="34" charset="-122"/>
+                          <a:cs typeface="Meiryo" pitchFamily="34" charset="-120"/>
+                        </a:rPr>
+                        <a:t>5年目</a:t>
+                      </a:r>
+                      <a:endParaRPr lang="en-US" sz="850" dirty="0">
+                        <a:latin typeface="Meiryo" charset="0"/>
+                        <a:ea typeface="Meiryo" charset="0"/>
+                        <a:cs typeface="Meiryo" charset="0"/>
+                      </a:endParaRPr>
+                    </a:p>
+                  </a:txBody>
+                  <a:tcPr marL="54864" marR="54864" marT="18288" marB="18288" anchor="ctr">
+                    <a:lnL w="0" cap="flat" cmpd="sng" algn="ctr">
+                      <a:noFill/>
+                    </a:lnL>
+                    <a:lnR w="0" cap="flat" cmpd="sng" algn="ctr">
+                      <a:noFill/>
+                    </a:lnR>
+                    <a:lnT w="0" cap="flat" cmpd="sng" algn="ctr">
+                      <a:noFill/>
+                    </a:lnT>
+                    <a:lnB w="9525" cap="flat" cmpd="sng" algn="ctr">
+                      <a:solidFill>
+                        <a:srgbClr val="BFBFBF"/>
+                      </a:solidFill>
+                      <a:prstDash val="solid"/>
+                      <a:round/>
+                      <a:headEnd type="none" w="med" len="med"/>
+                      <a:tailEnd type="none" w="med" len="med"/>
+                    </a:lnB>
+                    <a:solidFill>
+                      <a:srgbClr val="FFFFFF"/>
+                    </a:solidFill>
+                  </a:tcPr>
+                </a:tc>
+                <a:tc>
+                  <a:txBody>
+                    <a:bodyPr/>
+                    <a:lstStyle/>
+                    <a:p>
+                      <a:pPr algn="ctr" indent="0" marL="0">
+                        <a:buNone/>
+                      </a:pPr>
+                      <a:r>
+                        <a:rPr lang="en-US" sz="850" dirty="0">
+                          <a:solidFill>
+                            <a:srgbClr val="1A1A1A"/>
+                          </a:solidFill>
+                          <a:latin typeface="Meiryo" pitchFamily="34" charset="0"/>
+                          <a:ea typeface="Meiryo" pitchFamily="34" charset="-122"/>
+                          <a:cs typeface="Meiryo" pitchFamily="34" charset="-120"/>
+                        </a:rPr>
+                        <a:t>8</a:t>
+                      </a:r>
+                      <a:endParaRPr lang="en-US" sz="850" dirty="0">
+                        <a:latin typeface="Meiryo" charset="0"/>
+                        <a:ea typeface="Meiryo" charset="0"/>
+                        <a:cs typeface="Meiryo" charset="0"/>
+                      </a:endParaRPr>
+                    </a:p>
+                  </a:txBody>
+                  <a:tcPr marL="54864" marR="54864" marT="18288" marB="18288" anchor="ctr">
+                    <a:lnL w="0" cap="flat" cmpd="sng" algn="ctr">
+                      <a:noFill/>
+                    </a:lnL>
+                    <a:lnR w="0" cap="flat" cmpd="sng" algn="ctr">
+                      <a:noFill/>
+                    </a:lnR>
+                    <a:lnT w="0" cap="flat" cmpd="sng" algn="ctr">
+                      <a:noFill/>
+                    </a:lnT>
+                    <a:lnB w="9525" cap="flat" cmpd="sng" algn="ctr">
+                      <a:solidFill>
+                        <a:srgbClr val="BFBFBF"/>
+                      </a:solidFill>
+                      <a:prstDash val="solid"/>
+                      <a:round/>
+                      <a:headEnd type="none" w="med" len="med"/>
+                      <a:tailEnd type="none" w="med" len="med"/>
+                    </a:lnB>
+                    <a:solidFill>
+                      <a:srgbClr val="FFFFFF"/>
+                    </a:solidFill>
+                  </a:tcPr>
+                </a:tc>
+              </a:tr>
+              <a:tr h="292608">
+                <a:tc>
+                  <a:txBody>
+                    <a:bodyPr/>
+                    <a:lstStyle/>
+                    <a:p>
+                      <a:pPr algn="l" indent="0" marL="0">
+                        <a:buNone/>
+                      </a:pPr>
+                      <a:r>
+                        <a:rPr lang="en-US" sz="850" dirty="0">
+                          <a:solidFill>
+                            <a:srgbClr val="1A1A1A"/>
+                          </a:solidFill>
+                          <a:latin typeface="Meiryo" pitchFamily="34" charset="0"/>
+                          <a:ea typeface="Meiryo" pitchFamily="34" charset="-122"/>
+                          <a:cs typeface="Meiryo" pitchFamily="34" charset="-120"/>
+                        </a:rPr>
+                        <a:t>計画の7割</a:t>
+                      </a:r>
+                      <a:endParaRPr lang="en-US" sz="850" dirty="0">
+                        <a:latin typeface="Meiryo" charset="0"/>
+                        <a:ea typeface="Meiryo" charset="0"/>
+                        <a:cs typeface="Meiryo" charset="0"/>
+                      </a:endParaRPr>
+                    </a:p>
+                  </a:txBody>
+                  <a:tcPr marL="54864" marR="54864" marT="18288" marB="18288" anchor="ctr">
+                    <a:lnL w="0" cap="flat" cmpd="sng" algn="ctr">
+                      <a:noFill/>
+                    </a:lnL>
+                    <a:lnR w="0" cap="flat" cmpd="sng" algn="ctr">
+                      <a:noFill/>
+                    </a:lnR>
+                    <a:lnT w="0" cap="flat" cmpd="sng" algn="ctr">
+                      <a:noFill/>
+                    </a:lnT>
+                    <a:lnB w="9525" cap="flat" cmpd="sng" algn="ctr">
+                      <a:solidFill>
+                        <a:srgbClr val="BFBFBF"/>
+                      </a:solidFill>
+                      <a:prstDash val="solid"/>
+                      <a:round/>
+                      <a:headEnd type="none" w="med" len="med"/>
+                      <a:tailEnd type="none" w="med" len="med"/>
+                    </a:lnB>
+                    <a:solidFill>
+                      <a:srgbClr val="FFFFFF"/>
+                    </a:solidFill>
+                  </a:tcPr>
+                </a:tc>
+                <a:tc>
+                  <a:txBody>
+                    <a:bodyPr/>
+                    <a:lstStyle/>
+                    <a:p>
+                      <a:pPr algn="ctr" indent="0" marL="0">
+                        <a:buNone/>
+                      </a:pPr>
+                      <a:r>
+                        <a:rPr lang="en-US" sz="850" dirty="0">
+                          <a:solidFill>
+                            <a:srgbClr val="4D4D4D"/>
+                          </a:solidFill>
+                          <a:latin typeface="Meiryo" pitchFamily="34" charset="0"/>
+                          <a:ea typeface="Meiryo" pitchFamily="34" charset="-122"/>
+                          <a:cs typeface="Meiryo" pitchFamily="34" charset="-120"/>
+                        </a:rPr>
+                        <a:t>2・6・13・19・23</a:t>
+                      </a:r>
+                      <a:endParaRPr lang="en-US" sz="850" dirty="0">
+                        <a:latin typeface="Meiryo" charset="0"/>
+                        <a:ea typeface="Meiryo" charset="0"/>
+                        <a:cs typeface="Meiryo" charset="0"/>
+                      </a:endParaRPr>
+                    </a:p>
+                  </a:txBody>
+                  <a:tcPr marL="54864" marR="54864" marT="18288" marB="18288" anchor="ctr">
+                    <a:lnL w="0" cap="flat" cmpd="sng" algn="ctr">
+                      <a:noFill/>
+                    </a:lnL>
+                    <a:lnR w="0" cap="flat" cmpd="sng" algn="ctr">
+                      <a:noFill/>
+                    </a:lnR>
+                    <a:lnT w="0" cap="flat" cmpd="sng" algn="ctr">
+                      <a:noFill/>
+                    </a:lnT>
+                    <a:lnB w="9525" cap="flat" cmpd="sng" algn="ctr">
+                      <a:solidFill>
+                        <a:srgbClr val="BFBFBF"/>
+                      </a:solidFill>
+                      <a:prstDash val="solid"/>
+                      <a:round/>
+                      <a:headEnd type="none" w="med" len="med"/>
+                      <a:tailEnd type="none" w="med" len="med"/>
+                    </a:lnB>
+                    <a:solidFill>
+                      <a:srgbClr val="FFFFFF"/>
+                    </a:solidFill>
+                  </a:tcPr>
+                </a:tc>
+                <a:tc>
+                  <a:txBody>
+                    <a:bodyPr/>
+                    <a:lstStyle/>
+                    <a:p>
+                      <a:pPr algn="ctr" indent="0" marL="0">
+                        <a:buNone/>
+                      </a:pPr>
+                      <a:r>
+                        <a:rPr lang="en-US" sz="850" dirty="0">
+                          <a:solidFill>
+                            <a:srgbClr val="1A1A1A"/>
+                          </a:solidFill>
+                          <a:latin typeface="Meiryo" pitchFamily="34" charset="0"/>
+                          <a:ea typeface="Meiryo" pitchFamily="34" charset="-122"/>
+                          <a:cs typeface="Meiryo" pitchFamily="34" charset="-120"/>
+                        </a:rPr>
+                        <a:t>4年目</a:t>
+                      </a:r>
+                      <a:endParaRPr lang="en-US" sz="850" dirty="0">
+                        <a:latin typeface="Meiryo" charset="0"/>
+                        <a:ea typeface="Meiryo" charset="0"/>
+                        <a:cs typeface="Meiryo" charset="0"/>
+                      </a:endParaRPr>
+                    </a:p>
+                  </a:txBody>
+                  <a:tcPr marL="54864" marR="54864" marT="18288" marB="18288" anchor="ctr">
+                    <a:lnL w="0" cap="flat" cmpd="sng" algn="ctr">
+                      <a:noFill/>
+                    </a:lnL>
+                    <a:lnR w="0" cap="flat" cmpd="sng" algn="ctr">
+                      <a:noFill/>
+                    </a:lnR>
+                    <a:lnT w="0" cap="flat" cmpd="sng" algn="ctr">
+                      <a:noFill/>
+                    </a:lnT>
+                    <a:lnB w="9525" cap="flat" cmpd="sng" algn="ctr">
+                      <a:solidFill>
+                        <a:srgbClr val="BFBFBF"/>
+                      </a:solidFill>
+                      <a:prstDash val="solid"/>
+                      <a:round/>
+                      <a:headEnd type="none" w="med" len="med"/>
+                      <a:tailEnd type="none" w="med" len="med"/>
+                    </a:lnB>
+                    <a:solidFill>
+                      <a:srgbClr val="FFFFFF"/>
+                    </a:solidFill>
+                  </a:tcPr>
+                </a:tc>
+                <a:tc>
+                  <a:txBody>
+                    <a:bodyPr/>
+                    <a:lstStyle/>
+                    <a:p>
+                      <a:pPr algn="ctr" indent="0" marL="0">
+                        <a:buNone/>
+                      </a:pPr>
+                      <a:r>
+                        <a:rPr lang="en-US" sz="850" dirty="0">
+                          <a:solidFill>
+                            <a:srgbClr val="1A1A1A"/>
+                          </a:solidFill>
+                          <a:latin typeface="Meiryo" pitchFamily="34" charset="0"/>
+                          <a:ea typeface="Meiryo" pitchFamily="34" charset="-122"/>
+                          <a:cs typeface="Meiryo" pitchFamily="34" charset="-120"/>
+                        </a:rPr>
+                        <a:t>36</a:t>
+                      </a:r>
+                      <a:endParaRPr lang="en-US" sz="850" dirty="0">
+                        <a:latin typeface="Meiryo" charset="0"/>
+                        <a:ea typeface="Meiryo" charset="0"/>
+                        <a:cs typeface="Meiryo" charset="0"/>
+                      </a:endParaRPr>
+                    </a:p>
+                  </a:txBody>
+                  <a:tcPr marL="54864" marR="54864" marT="18288" marB="18288" anchor="ctr">
+                    <a:lnL w="0" cap="flat" cmpd="sng" algn="ctr">
+                      <a:noFill/>
+                    </a:lnL>
+                    <a:lnR w="0" cap="flat" cmpd="sng" algn="ctr">
+                      <a:noFill/>
+                    </a:lnR>
+                    <a:lnT w="0" cap="flat" cmpd="sng" algn="ctr">
+                      <a:noFill/>
+                    </a:lnT>
+                    <a:lnB w="9525" cap="flat" cmpd="sng" algn="ctr">
+                      <a:solidFill>
+                        <a:srgbClr val="BFBFBF"/>
+                      </a:solidFill>
+                      <a:prstDash val="solid"/>
+                      <a:round/>
+                      <a:headEnd type="none" w="med" len="med"/>
+                      <a:tailEnd type="none" w="med" len="med"/>
+                    </a:lnB>
+                    <a:solidFill>
+                      <a:srgbClr val="FFFFFF"/>
+                    </a:solidFill>
+                  </a:tcPr>
+                </a:tc>
+                <a:tc>
+                  <a:txBody>
+                    <a:bodyPr/>
+                    <a:lstStyle/>
+                    <a:p>
+                      <a:pPr algn="ctr" indent="0" marL="0">
+                        <a:buNone/>
+                      </a:pPr>
+                      <a:r>
+                        <a:rPr lang="en-US" sz="850" b="1" dirty="0">
+                          <a:solidFill>
+                            <a:srgbClr val="B8692E"/>
+                          </a:solidFill>
+                          <a:latin typeface="Meiryo" pitchFamily="34" charset="0"/>
+                          <a:ea typeface="Meiryo" pitchFamily="34" charset="-122"/>
+                          <a:cs typeface="Meiryo" pitchFamily="34" charset="-120"/>
+                        </a:rPr>
+                        <a:t>しない</a:t>
+                      </a:r>
+                      <a:endParaRPr lang="en-US" sz="850" dirty="0">
+                        <a:latin typeface="Meiryo" charset="0"/>
+                        <a:ea typeface="Meiryo" charset="0"/>
+                        <a:cs typeface="Meiryo" charset="0"/>
+                      </a:endParaRPr>
+                    </a:p>
+                  </a:txBody>
+                  <a:tcPr marL="54864" marR="54864" marT="18288" marB="18288" anchor="ctr">
+                    <a:lnL w="0" cap="flat" cmpd="sng" algn="ctr">
+                      <a:noFill/>
+                    </a:lnL>
+                    <a:lnR w="0" cap="flat" cmpd="sng" algn="ctr">
+                      <a:noFill/>
+                    </a:lnR>
+                    <a:lnT w="0" cap="flat" cmpd="sng" algn="ctr">
+                      <a:noFill/>
+                    </a:lnT>
+                    <a:lnB w="9525" cap="flat" cmpd="sng" algn="ctr">
+                      <a:solidFill>
+                        <a:srgbClr val="BFBFBF"/>
+                      </a:solidFill>
+                      <a:prstDash val="solid"/>
+                      <a:round/>
+                      <a:headEnd type="none" w="med" len="med"/>
+                      <a:tailEnd type="none" w="med" len="med"/>
+                    </a:lnB>
+                    <a:solidFill>
+                      <a:srgbClr val="FFFFFF"/>
+                    </a:solidFill>
+                  </a:tcPr>
+                </a:tc>
+                <a:tc>
+                  <a:txBody>
+                    <a:bodyPr/>
+                    <a:lstStyle/>
+                    <a:p>
+                      <a:pPr algn="ctr" indent="0" marL="0">
+                        <a:buNone/>
+                      </a:pPr>
+                      <a:r>
+                        <a:rPr lang="en-US" sz="850" b="1" dirty="0">
+                          <a:solidFill>
+                            <a:srgbClr val="B8692E"/>
+                          </a:solidFill>
+                          <a:latin typeface="Meiryo" pitchFamily="34" charset="0"/>
+                          <a:ea typeface="Meiryo" pitchFamily="34" charset="-122"/>
+                          <a:cs typeface="Meiryo" pitchFamily="34" charset="-120"/>
+                        </a:rPr>
+                        <a:t>-38</a:t>
+                      </a:r>
+                      <a:endParaRPr lang="en-US" sz="850" dirty="0">
+                        <a:latin typeface="Meiryo" charset="0"/>
+                        <a:ea typeface="Meiryo" charset="0"/>
+                        <a:cs typeface="Meiryo" charset="0"/>
+                      </a:endParaRPr>
+                    </a:p>
+                  </a:txBody>
+                  <a:tcPr marL="54864" marR="54864" marT="18288" marB="18288" anchor="ctr">
+                    <a:lnL w="0" cap="flat" cmpd="sng" algn="ctr">
+                      <a:noFill/>
+                    </a:lnL>
+                    <a:lnR w="0" cap="flat" cmpd="sng" algn="ctr">
+                      <a:noFill/>
+                    </a:lnR>
+                    <a:lnT w="0" cap="flat" cmpd="sng" algn="ctr">
+                      <a:noFill/>
+                    </a:lnT>
+                    <a:lnB w="9525" cap="flat" cmpd="sng" algn="ctr">
+                      <a:solidFill>
+                        <a:srgbClr val="BFBFBF"/>
+                      </a:solidFill>
+                      <a:prstDash val="solid"/>
+                      <a:round/>
+                      <a:headEnd type="none" w="med" len="med"/>
+                      <a:tailEnd type="none" w="med" len="med"/>
+                    </a:lnB>
+                    <a:solidFill>
+                      <a:srgbClr val="FFFFFF"/>
+                    </a:solidFill>
+                  </a:tcPr>
+                </a:tc>
+              </a:tr>
+              <a:tr h="292608">
+                <a:tc>
+                  <a:txBody>
+                    <a:bodyPr/>
+                    <a:lstStyle/>
+                    <a:p>
+                      <a:pPr algn="l" indent="0" marL="0">
+                        <a:buNone/>
+                      </a:pPr>
+                      <a:r>
+                        <a:rPr lang="en-US" sz="850" b="1" dirty="0">
+                          <a:solidFill>
+                            <a:srgbClr val="B8692E"/>
+                          </a:solidFill>
+                          <a:latin typeface="Meiryo" pitchFamily="34" charset="0"/>
+                          <a:ea typeface="Meiryo" pitchFamily="34" charset="-122"/>
+                          <a:cs typeface="Meiryo" pitchFamily="34" charset="-120"/>
+                        </a:rPr>
+                        <a:t>計画の6割</a:t>
+                      </a:r>
+                      <a:endParaRPr lang="en-US" sz="850" dirty="0">
+                        <a:latin typeface="Meiryo" charset="0"/>
+                        <a:ea typeface="Meiryo" charset="0"/>
+                        <a:cs typeface="Meiryo" charset="0"/>
+                      </a:endParaRPr>
+                    </a:p>
+                  </a:txBody>
+                  <a:tcPr marL="54864" marR="54864" marT="18288" marB="18288" anchor="ctr">
+                    <a:lnL w="0" cap="flat" cmpd="sng" algn="ctr">
+                      <a:noFill/>
+                    </a:lnL>
+                    <a:lnR w="0" cap="flat" cmpd="sng" algn="ctr">
+                      <a:noFill/>
+                    </a:lnR>
+                    <a:lnT w="19050" cap="flat" cmpd="sng" algn="ctr">
+                      <a:solidFill>
+                        <a:srgbClr val="1A1A1A"/>
+                      </a:solidFill>
+                      <a:prstDash val="solid"/>
+                      <a:round/>
+                      <a:headEnd type="none" w="med" len="med"/>
+                      <a:tailEnd type="none" w="med" len="med"/>
+                    </a:lnT>
+                    <a:lnB w="9525" cap="flat" cmpd="sng" algn="ctr">
+                      <a:solidFill>
+                        <a:srgbClr val="BFBFBF"/>
+                      </a:solidFill>
+                      <a:prstDash val="solid"/>
+                      <a:round/>
+                      <a:headEnd type="none" w="med" len="med"/>
+                      <a:tailEnd type="none" w="med" len="med"/>
+                    </a:lnB>
+                    <a:solidFill>
+                      <a:srgbClr val="FFFFFF"/>
+                    </a:solidFill>
+                  </a:tcPr>
+                </a:tc>
+                <a:tc>
+                  <a:txBody>
+                    <a:bodyPr/>
+                    <a:lstStyle/>
+                    <a:p>
+                      <a:pPr algn="ctr" indent="0" marL="0">
+                        <a:buNone/>
+                      </a:pPr>
+                      <a:r>
+                        <a:rPr lang="en-US" sz="850" b="1" dirty="0">
+                          <a:solidFill>
+                            <a:srgbClr val="4D4D4D"/>
+                          </a:solidFill>
+                          <a:latin typeface="Meiryo" pitchFamily="34" charset="0"/>
+                          <a:ea typeface="Meiryo" pitchFamily="34" charset="-122"/>
+                          <a:cs typeface="Meiryo" pitchFamily="34" charset="-120"/>
+                        </a:rPr>
+                        <a:t>2・5・11・16・20</a:t>
+                      </a:r>
+                      <a:endParaRPr lang="en-US" sz="850" dirty="0">
+                        <a:latin typeface="Meiryo" charset="0"/>
+                        <a:ea typeface="Meiryo" charset="0"/>
+                        <a:cs typeface="Meiryo" charset="0"/>
+                      </a:endParaRPr>
+                    </a:p>
+                  </a:txBody>
+                  <a:tcPr marL="54864" marR="54864" marT="18288" marB="18288" anchor="ctr">
+                    <a:lnL w="0" cap="flat" cmpd="sng" algn="ctr">
+                      <a:noFill/>
+                    </a:lnL>
+                    <a:lnR w="0" cap="flat" cmpd="sng" algn="ctr">
+                      <a:noFill/>
+                    </a:lnR>
+                    <a:lnT w="19050" cap="flat" cmpd="sng" algn="ctr">
+                      <a:solidFill>
+                        <a:srgbClr val="1A1A1A"/>
+                      </a:solidFill>
+                      <a:prstDash val="solid"/>
+                      <a:round/>
+                      <a:headEnd type="none" w="med" len="med"/>
+                      <a:tailEnd type="none" w="med" len="med"/>
+                    </a:lnT>
+                    <a:lnB w="9525" cap="flat" cmpd="sng" algn="ctr">
+                      <a:solidFill>
+                        <a:srgbClr val="BFBFBF"/>
+                      </a:solidFill>
+                      <a:prstDash val="solid"/>
+                      <a:round/>
+                      <a:headEnd type="none" w="med" len="med"/>
+                      <a:tailEnd type="none" w="med" len="med"/>
+                    </a:lnB>
+                    <a:solidFill>
+                      <a:srgbClr val="FFFFFF"/>
+                    </a:solidFill>
+                  </a:tcPr>
+                </a:tc>
+                <a:tc>
+                  <a:txBody>
+                    <a:bodyPr/>
+                    <a:lstStyle/>
+                    <a:p>
+                      <a:pPr algn="ctr" indent="0" marL="0">
+                        <a:buNone/>
+                      </a:pPr>
+                      <a:r>
+                        <a:rPr lang="en-US" sz="850" b="1" dirty="0">
+                          <a:solidFill>
+                            <a:srgbClr val="1A1A1A"/>
+                          </a:solidFill>
+                          <a:latin typeface="Meiryo" pitchFamily="34" charset="0"/>
+                          <a:ea typeface="Meiryo" pitchFamily="34" charset="-122"/>
+                          <a:cs typeface="Meiryo" pitchFamily="34" charset="-120"/>
+                        </a:rPr>
+                        <a:t>5年目</a:t>
+                      </a:r>
+                      <a:endParaRPr lang="en-US" sz="850" dirty="0">
+                        <a:latin typeface="Meiryo" charset="0"/>
+                        <a:ea typeface="Meiryo" charset="0"/>
+                        <a:cs typeface="Meiryo" charset="0"/>
+                      </a:endParaRPr>
+                    </a:p>
+                  </a:txBody>
+                  <a:tcPr marL="54864" marR="54864" marT="18288" marB="18288" anchor="ctr">
+                    <a:lnL w="0" cap="flat" cmpd="sng" algn="ctr">
+                      <a:noFill/>
+                    </a:lnL>
+                    <a:lnR w="0" cap="flat" cmpd="sng" algn="ctr">
+                      <a:noFill/>
+                    </a:lnR>
+                    <a:lnT w="19050" cap="flat" cmpd="sng" algn="ctr">
+                      <a:solidFill>
+                        <a:srgbClr val="1A1A1A"/>
+                      </a:solidFill>
+                      <a:prstDash val="solid"/>
+                      <a:round/>
+                      <a:headEnd type="none" w="med" len="med"/>
+                      <a:tailEnd type="none" w="med" len="med"/>
+                    </a:lnT>
+                    <a:lnB w="9525" cap="flat" cmpd="sng" algn="ctr">
+                      <a:solidFill>
+                        <a:srgbClr val="BFBFBF"/>
+                      </a:solidFill>
+                      <a:prstDash val="solid"/>
+                      <a:round/>
+                      <a:headEnd type="none" w="med" len="med"/>
+                      <a:tailEnd type="none" w="med" len="med"/>
+                    </a:lnB>
+                    <a:solidFill>
+                      <a:srgbClr val="FFFFFF"/>
+                    </a:solidFill>
+                  </a:tcPr>
+                </a:tc>
+                <a:tc>
+                  <a:txBody>
+                    <a:bodyPr/>
+                    <a:lstStyle/>
+                    <a:p>
+                      <a:pPr algn="ctr" indent="0" marL="0">
+                        <a:buNone/>
+                      </a:pPr>
+                      <a:r>
+                        <a:rPr lang="en-US" sz="850" b="1" dirty="0">
+                          <a:solidFill>
+                            <a:srgbClr val="1A1A1A"/>
+                          </a:solidFill>
+                          <a:latin typeface="Meiryo" pitchFamily="34" charset="0"/>
+                          <a:ea typeface="Meiryo" pitchFamily="34" charset="-122"/>
+                          <a:cs typeface="Meiryo" pitchFamily="34" charset="-120"/>
+                        </a:rPr>
+                        <a:t>20</a:t>
+                      </a:r>
+                      <a:endParaRPr lang="en-US" sz="850" dirty="0">
+                        <a:latin typeface="Meiryo" charset="0"/>
+                        <a:ea typeface="Meiryo" charset="0"/>
+                        <a:cs typeface="Meiryo" charset="0"/>
+                      </a:endParaRPr>
+                    </a:p>
+                  </a:txBody>
+                  <a:tcPr marL="54864" marR="54864" marT="18288" marB="18288" anchor="ctr">
+                    <a:lnL w="0" cap="flat" cmpd="sng" algn="ctr">
+                      <a:noFill/>
+                    </a:lnL>
+                    <a:lnR w="0" cap="flat" cmpd="sng" algn="ctr">
+                      <a:noFill/>
+                    </a:lnR>
+                    <a:lnT w="19050" cap="flat" cmpd="sng" algn="ctr">
+                      <a:solidFill>
+                        <a:srgbClr val="1A1A1A"/>
+                      </a:solidFill>
+                      <a:prstDash val="solid"/>
+                      <a:round/>
+                      <a:headEnd type="none" w="med" len="med"/>
+                      <a:tailEnd type="none" w="med" len="med"/>
+                    </a:lnT>
+                    <a:lnB w="9525" cap="flat" cmpd="sng" algn="ctr">
+                      <a:solidFill>
+                        <a:srgbClr val="BFBFBF"/>
+                      </a:solidFill>
+                      <a:prstDash val="solid"/>
+                      <a:round/>
+                      <a:headEnd type="none" w="med" len="med"/>
+                      <a:tailEnd type="none" w="med" len="med"/>
+                    </a:lnB>
+                    <a:solidFill>
+                      <a:srgbClr val="FFFFFF"/>
+                    </a:solidFill>
+                  </a:tcPr>
+                </a:tc>
+                <a:tc>
+                  <a:txBody>
+                    <a:bodyPr/>
+                    <a:lstStyle/>
+                    <a:p>
+                      <a:pPr algn="ctr" indent="0" marL="0">
+                        <a:buNone/>
+                      </a:pPr>
+                      <a:r>
+                        <a:rPr lang="en-US" sz="850" b="1" dirty="0">
+                          <a:solidFill>
+                            <a:srgbClr val="B8692E"/>
+                          </a:solidFill>
+                          <a:latin typeface="Meiryo" pitchFamily="34" charset="0"/>
+                          <a:ea typeface="Meiryo" pitchFamily="34" charset="-122"/>
+                          <a:cs typeface="Meiryo" pitchFamily="34" charset="-120"/>
+                        </a:rPr>
+                        <a:t>しない</a:t>
+                      </a:r>
+                      <a:endParaRPr lang="en-US" sz="850" dirty="0">
+                        <a:latin typeface="Meiryo" charset="0"/>
+                        <a:ea typeface="Meiryo" charset="0"/>
+                        <a:cs typeface="Meiryo" charset="0"/>
+                      </a:endParaRPr>
+                    </a:p>
+                  </a:txBody>
+                  <a:tcPr marL="54864" marR="54864" marT="18288" marB="18288" anchor="ctr">
+                    <a:lnL w="0" cap="flat" cmpd="sng" algn="ctr">
+                      <a:noFill/>
+                    </a:lnL>
+                    <a:lnR w="0" cap="flat" cmpd="sng" algn="ctr">
+                      <a:noFill/>
+                    </a:lnR>
+                    <a:lnT w="19050" cap="flat" cmpd="sng" algn="ctr">
+                      <a:solidFill>
+                        <a:srgbClr val="1A1A1A"/>
+                      </a:solidFill>
+                      <a:prstDash val="solid"/>
+                      <a:round/>
+                      <a:headEnd type="none" w="med" len="med"/>
+                      <a:tailEnd type="none" w="med" len="med"/>
+                    </a:lnT>
+                    <a:lnB w="9525" cap="flat" cmpd="sng" algn="ctr">
+                      <a:solidFill>
+                        <a:srgbClr val="BFBFBF"/>
+                      </a:solidFill>
+                      <a:prstDash val="solid"/>
+                      <a:round/>
+                      <a:headEnd type="none" w="med" len="med"/>
+                      <a:tailEnd type="none" w="med" len="med"/>
+                    </a:lnB>
+                    <a:solidFill>
+                      <a:srgbClr val="FFFFFF"/>
+                    </a:solidFill>
+                  </a:tcPr>
+                </a:tc>
+                <a:tc>
+                  <a:txBody>
+                    <a:bodyPr/>
+                    <a:lstStyle/>
+                    <a:p>
+                      <a:pPr algn="ctr" indent="0" marL="0">
+                        <a:buNone/>
+                      </a:pPr>
+                      <a:r>
+                        <a:rPr lang="en-US" sz="850" b="1" dirty="0">
+                          <a:solidFill>
+                            <a:srgbClr val="B8692E"/>
+                          </a:solidFill>
+                          <a:latin typeface="Meiryo" pitchFamily="34" charset="0"/>
+                          <a:ea typeface="Meiryo" pitchFamily="34" charset="-122"/>
+                          <a:cs typeface="Meiryo" pitchFamily="34" charset="-120"/>
+                        </a:rPr>
+                        <a:t>-97</a:t>
+                      </a:r>
+                      <a:endParaRPr lang="en-US" sz="850" dirty="0">
+                        <a:latin typeface="Meiryo" charset="0"/>
+                        <a:ea typeface="Meiryo" charset="0"/>
+                        <a:cs typeface="Meiryo" charset="0"/>
+                      </a:endParaRPr>
+                    </a:p>
+                  </a:txBody>
+                  <a:tcPr marL="54864" marR="54864" marT="18288" marB="18288" anchor="ctr">
+                    <a:lnL w="0" cap="flat" cmpd="sng" algn="ctr">
+                      <a:noFill/>
+                    </a:lnL>
+                    <a:lnR w="0" cap="flat" cmpd="sng" algn="ctr">
+                      <a:noFill/>
+                    </a:lnR>
+                    <a:lnT w="19050" cap="flat" cmpd="sng" algn="ctr">
+                      <a:solidFill>
+                        <a:srgbClr val="1A1A1A"/>
+                      </a:solidFill>
+                      <a:prstDash val="solid"/>
+                      <a:round/>
+                      <a:headEnd type="none" w="med" len="med"/>
+                      <a:tailEnd type="none" w="med" len="med"/>
+                    </a:lnT>
+                    <a:lnB w="9525" cap="flat" cmpd="sng" algn="ctr">
+                      <a:solidFill>
+                        <a:srgbClr val="BFBFBF"/>
+                      </a:solidFill>
+                      <a:prstDash val="solid"/>
+                      <a:round/>
+                      <a:headEnd type="none" w="med" len="med"/>
+                      <a:tailEnd type="none" w="med" len="med"/>
+                    </a:lnB>
+                    <a:solidFill>
+                      <a:srgbClr val="FFFFFF"/>
+                    </a:solidFill>
+                  </a:tcPr>
+                </a:tc>
+              </a:tr>
+              <a:tr h="292608">
+                <a:tc>
+                  <a:txBody>
+                    <a:bodyPr/>
+                    <a:lstStyle/>
+                    <a:p>
+                      <a:pPr algn="l" indent="0" marL="0">
+                        <a:buNone/>
+                      </a:pPr>
+                      <a:r>
+                        <a:rPr lang="en-US" sz="850" dirty="0">
+                          <a:solidFill>
+                            <a:srgbClr val="1A1A1A"/>
+                          </a:solidFill>
+                          <a:latin typeface="Meiryo" pitchFamily="34" charset="0"/>
+                          <a:ea typeface="Meiryo" pitchFamily="34" charset="-122"/>
+                          <a:cs typeface="Meiryo" pitchFamily="34" charset="-120"/>
+                        </a:rPr>
+                        <a:t>計画の5割</a:t>
+                      </a:r>
+                      <a:endParaRPr lang="en-US" sz="850" dirty="0">
+                        <a:latin typeface="Meiryo" charset="0"/>
+                        <a:ea typeface="Meiryo" charset="0"/>
+                        <a:cs typeface="Meiryo" charset="0"/>
+                      </a:endParaRPr>
+                    </a:p>
+                  </a:txBody>
+                  <a:tcPr marL="54864" marR="54864" marT="18288" marB="18288" anchor="ctr">
+                    <a:lnL w="0" cap="flat" cmpd="sng" algn="ctr">
+                      <a:noFill/>
+                    </a:lnL>
+                    <a:lnR w="0" cap="flat" cmpd="sng" algn="ctr">
+                      <a:noFill/>
+                    </a:lnR>
+                    <a:lnT w="0" cap="flat" cmpd="sng" algn="ctr">
+                      <a:noFill/>
+                    </a:lnT>
+                    <a:lnB w="9525" cap="flat" cmpd="sng" algn="ctr">
+                      <a:solidFill>
+                        <a:srgbClr val="BFBFBF"/>
+                      </a:solidFill>
+                      <a:prstDash val="solid"/>
+                      <a:round/>
+                      <a:headEnd type="none" w="med" len="med"/>
+                      <a:tailEnd type="none" w="med" len="med"/>
+                    </a:lnB>
+                    <a:solidFill>
+                      <a:srgbClr val="FFFFFF"/>
+                    </a:solidFill>
+                  </a:tcPr>
+                </a:tc>
+                <a:tc>
+                  <a:txBody>
+                    <a:bodyPr/>
+                    <a:lstStyle/>
+                    <a:p>
+                      <a:pPr algn="ctr" indent="0" marL="0">
+                        <a:buNone/>
+                      </a:pPr>
+                      <a:r>
+                        <a:rPr lang="en-US" sz="850" dirty="0">
+                          <a:solidFill>
+                            <a:srgbClr val="4D4D4D"/>
+                          </a:solidFill>
+                          <a:latin typeface="Meiryo" pitchFamily="34" charset="0"/>
+                          <a:ea typeface="Meiryo" pitchFamily="34" charset="-122"/>
+                          <a:cs typeface="Meiryo" pitchFamily="34" charset="-120"/>
+                        </a:rPr>
+                        <a:t>2・5・9・14・17</a:t>
+                      </a:r>
+                      <a:endParaRPr lang="en-US" sz="850" dirty="0">
+                        <a:latin typeface="Meiryo" charset="0"/>
+                        <a:ea typeface="Meiryo" charset="0"/>
+                        <a:cs typeface="Meiryo" charset="0"/>
+                      </a:endParaRPr>
+                    </a:p>
+                  </a:txBody>
+                  <a:tcPr marL="54864" marR="54864" marT="18288" marB="18288" anchor="ctr">
+                    <a:lnL w="0" cap="flat" cmpd="sng" algn="ctr">
+                      <a:noFill/>
+                    </a:lnL>
+                    <a:lnR w="0" cap="flat" cmpd="sng" algn="ctr">
+                      <a:noFill/>
+                    </a:lnR>
+                    <a:lnT w="0" cap="flat" cmpd="sng" algn="ctr">
+                      <a:noFill/>
+                    </a:lnT>
+                    <a:lnB w="9525" cap="flat" cmpd="sng" algn="ctr">
+                      <a:solidFill>
+                        <a:srgbClr val="BFBFBF"/>
+                      </a:solidFill>
+                      <a:prstDash val="solid"/>
+                      <a:round/>
+                      <a:headEnd type="none" w="med" len="med"/>
+                      <a:tailEnd type="none" w="med" len="med"/>
+                    </a:lnB>
+                    <a:solidFill>
+                      <a:srgbClr val="FFFFFF"/>
+                    </a:solidFill>
+                  </a:tcPr>
+                </a:tc>
+                <a:tc>
+                  <a:txBody>
+                    <a:bodyPr/>
+                    <a:lstStyle/>
+                    <a:p>
+                      <a:pPr algn="ctr" indent="0" marL="0">
+                        <a:buNone/>
+                      </a:pPr>
+                      <a:r>
+                        <a:rPr lang="en-US" sz="850" b="1" dirty="0">
+                          <a:solidFill>
+                            <a:srgbClr val="B8692E"/>
+                          </a:solidFill>
+                          <a:latin typeface="Meiryo" pitchFamily="34" charset="0"/>
+                          <a:ea typeface="Meiryo" pitchFamily="34" charset="-122"/>
+                          <a:cs typeface="Meiryo" pitchFamily="34" charset="-120"/>
+                        </a:rPr>
+                        <a:t>しない</a:t>
+                      </a:r>
+                      <a:endParaRPr lang="en-US" sz="850" dirty="0">
+                        <a:latin typeface="Meiryo" charset="0"/>
+                        <a:ea typeface="Meiryo" charset="0"/>
+                        <a:cs typeface="Meiryo" charset="0"/>
+                      </a:endParaRPr>
+                    </a:p>
+                  </a:txBody>
+                  <a:tcPr marL="54864" marR="54864" marT="18288" marB="18288" anchor="ctr">
+                    <a:lnL w="0" cap="flat" cmpd="sng" algn="ctr">
+                      <a:noFill/>
+                    </a:lnL>
+                    <a:lnR w="0" cap="flat" cmpd="sng" algn="ctr">
+                      <a:noFill/>
+                    </a:lnR>
+                    <a:lnT w="0" cap="flat" cmpd="sng" algn="ctr">
+                      <a:noFill/>
+                    </a:lnT>
+                    <a:lnB w="9525" cap="flat" cmpd="sng" algn="ctr">
+                      <a:solidFill>
+                        <a:srgbClr val="BFBFBF"/>
+                      </a:solidFill>
+                      <a:prstDash val="solid"/>
+                      <a:round/>
+                      <a:headEnd type="none" w="med" len="med"/>
+                      <a:tailEnd type="none" w="med" len="med"/>
+                    </a:lnB>
+                    <a:solidFill>
+                      <a:srgbClr val="FFFFFF"/>
+                    </a:solidFill>
+                  </a:tcPr>
+                </a:tc>
+                <a:tc>
+                  <a:txBody>
+                    <a:bodyPr/>
+                    <a:lstStyle/>
+                    <a:p>
+                      <a:pPr algn="ctr" indent="0" marL="0">
+                        <a:buNone/>
+                      </a:pPr>
+                      <a:r>
+                        <a:rPr lang="en-US" sz="850" dirty="0">
+                          <a:solidFill>
+                            <a:srgbClr val="1A1A1A"/>
+                          </a:solidFill>
+                          <a:latin typeface="Meiryo" pitchFamily="34" charset="0"/>
+                          <a:ea typeface="Meiryo" pitchFamily="34" charset="-122"/>
+                          <a:cs typeface="Meiryo" pitchFamily="34" charset="-120"/>
+                        </a:rPr>
+                        <a:t>5</a:t>
+                      </a:r>
+                      <a:endParaRPr lang="en-US" sz="850" dirty="0">
+                        <a:latin typeface="Meiryo" charset="0"/>
+                        <a:ea typeface="Meiryo" charset="0"/>
+                        <a:cs typeface="Meiryo" charset="0"/>
+                      </a:endParaRPr>
+                    </a:p>
+                  </a:txBody>
+                  <a:tcPr marL="54864" marR="54864" marT="18288" marB="18288" anchor="ctr">
+                    <a:lnL w="0" cap="flat" cmpd="sng" algn="ctr">
+                      <a:noFill/>
+                    </a:lnL>
+                    <a:lnR w="0" cap="flat" cmpd="sng" algn="ctr">
+                      <a:noFill/>
+                    </a:lnR>
+                    <a:lnT w="0" cap="flat" cmpd="sng" algn="ctr">
+                      <a:noFill/>
+                    </a:lnT>
+                    <a:lnB w="9525" cap="flat" cmpd="sng" algn="ctr">
+                      <a:solidFill>
+                        <a:srgbClr val="BFBFBF"/>
+                      </a:solidFill>
+                      <a:prstDash val="solid"/>
+                      <a:round/>
+                      <a:headEnd type="none" w="med" len="med"/>
+                      <a:tailEnd type="none" w="med" len="med"/>
+                    </a:lnB>
+                    <a:solidFill>
+                      <a:srgbClr val="FFFFFF"/>
+                    </a:solidFill>
+                  </a:tcPr>
+                </a:tc>
+                <a:tc>
+                  <a:txBody>
+                    <a:bodyPr/>
+                    <a:lstStyle/>
+                    <a:p>
+                      <a:pPr algn="ctr" indent="0" marL="0">
+                        <a:buNone/>
+                      </a:pPr>
+                      <a:r>
+                        <a:rPr lang="en-US" sz="850" b="1" dirty="0">
+                          <a:solidFill>
+                            <a:srgbClr val="B8692E"/>
+                          </a:solidFill>
+                          <a:latin typeface="Meiryo" pitchFamily="34" charset="0"/>
+                          <a:ea typeface="Meiryo" pitchFamily="34" charset="-122"/>
+                          <a:cs typeface="Meiryo" pitchFamily="34" charset="-120"/>
+                        </a:rPr>
+                        <a:t>しない</a:t>
+                      </a:r>
+                      <a:endParaRPr lang="en-US" sz="850" dirty="0">
+                        <a:latin typeface="Meiryo" charset="0"/>
+                        <a:ea typeface="Meiryo" charset="0"/>
+                        <a:cs typeface="Meiryo" charset="0"/>
+                      </a:endParaRPr>
+                    </a:p>
+                  </a:txBody>
+                  <a:tcPr marL="54864" marR="54864" marT="18288" marB="18288" anchor="ctr">
+                    <a:lnL w="0" cap="flat" cmpd="sng" algn="ctr">
+                      <a:noFill/>
+                    </a:lnL>
+                    <a:lnR w="0" cap="flat" cmpd="sng" algn="ctr">
+                      <a:noFill/>
+                    </a:lnR>
+                    <a:lnT w="0" cap="flat" cmpd="sng" algn="ctr">
+                      <a:noFill/>
+                    </a:lnT>
+                    <a:lnB w="9525" cap="flat" cmpd="sng" algn="ctr">
+                      <a:solidFill>
+                        <a:srgbClr val="BFBFBF"/>
+                      </a:solidFill>
+                      <a:prstDash val="solid"/>
+                      <a:round/>
+                      <a:headEnd type="none" w="med" len="med"/>
+                      <a:tailEnd type="none" w="med" len="med"/>
+                    </a:lnB>
+                    <a:solidFill>
+                      <a:srgbClr val="FFFFFF"/>
+                    </a:solidFill>
+                  </a:tcPr>
+                </a:tc>
+                <a:tc>
+                  <a:txBody>
+                    <a:bodyPr/>
+                    <a:lstStyle/>
+                    <a:p>
+                      <a:pPr algn="ctr" indent="0" marL="0">
+                        <a:buNone/>
+                      </a:pPr>
+                      <a:r>
+                        <a:rPr lang="en-US" sz="850" b="1" dirty="0">
+                          <a:solidFill>
+                            <a:srgbClr val="B8692E"/>
+                          </a:solidFill>
+                          <a:latin typeface="Meiryo" pitchFamily="34" charset="0"/>
+                          <a:ea typeface="Meiryo" pitchFamily="34" charset="-122"/>
+                          <a:cs typeface="Meiryo" pitchFamily="34" charset="-120"/>
+                        </a:rPr>
+                        <a:t>-139</a:t>
+                      </a:r>
+                      <a:endParaRPr lang="en-US" sz="850" dirty="0">
+                        <a:latin typeface="Meiryo" charset="0"/>
+                        <a:ea typeface="Meiryo" charset="0"/>
+                        <a:cs typeface="Meiryo" charset="0"/>
+                      </a:endParaRPr>
+                    </a:p>
+                  </a:txBody>
+                  <a:tcPr marL="54864" marR="54864" marT="18288" marB="18288" anchor="ctr">
+                    <a:lnL w="0" cap="flat" cmpd="sng" algn="ctr">
+                      <a:noFill/>
+                    </a:lnL>
+                    <a:lnR w="0" cap="flat" cmpd="sng" algn="ctr">
+                      <a:noFill/>
+                    </a:lnR>
+                    <a:lnT w="0" cap="flat" cmpd="sng" algn="ctr">
+                      <a:noFill/>
+                    </a:lnT>
+                    <a:lnB w="9525" cap="flat" cmpd="sng" algn="ctr">
+                      <a:solidFill>
+                        <a:srgbClr val="BFBFBF"/>
+                      </a:solidFill>
+                      <a:prstDash val="solid"/>
+                      <a:round/>
+                      <a:headEnd type="none" w="med" len="med"/>
+                      <a:tailEnd type="none" w="med" len="med"/>
+                    </a:lnB>
+                    <a:solidFill>
+                      <a:srgbClr val="FFFFFF"/>
+                    </a:solidFill>
+                  </a:tcPr>
+                </a:tc>
+              </a:tr>
+            </a:tbl>
+          </a:graphicData>
+        </a:graphic>
+      </p:graphicFrame>
+      <p:sp>
+        <p:nvSpPr>
+          <p:cNvPr id="9" name="Shape 5"/>
           <p:cNvSpPr/>
           <p:nvPr/>
         </p:nvSpPr>
         <p:spPr>
           <a:xfrm>
-            <a:off x="365760" y="1097280"/>
-            <a:ext cx="1965960" cy="1371600"/>
+            <a:off x="365760" y="3447288"/>
+            <a:ext cx="4846320" cy="822960"/>
           </a:xfrm>
           <a:prstGeom prst="rect">
             <a:avLst/>
@@ -9227,14 +11389,128 @@
       </p:sp>
       <p:sp>
         <p:nvSpPr>
-          <p:cNvPr id="6" name="Text 3"/>
-          <p:cNvSpPr txBox="1"/>
-          <p:nvPr/>
-        </p:nvSpPr>
-        <p:spPr>
-          <a:xfrm>
-            <a:off x="475488" y="1188720"/>
-            <a:ext cx="1737360" cy="274320"/>
+          <p:cNvPr id="10" name="Text 6"/>
+          <p:cNvSpPr txBox="1"/>
+          <p:nvPr/>
+        </p:nvSpPr>
+        <p:spPr>
+          <a:xfrm>
+            <a:off x="502920" y="3465576"/>
+            <a:ext cx="4572000" cy="786384"/>
+          </a:xfrm>
+          <a:prstGeom prst="rect">
+            <a:avLst/>
+          </a:prstGeom>
+          <a:noFill/>
+          <a:ln/>
+        </p:spPr>
+        <p:txBody>
+          <a:bodyPr wrap="square" lIns="0" tIns="0" rIns="0" bIns="0" rtlCol="0" anchor="ctr"/>
+          <a:lstStyle/>
+          <a:p>
+            <a:pPr algn="l" indent="0" marL="0">
+              <a:lnSpc>
+                <a:spcPct val="115000"/>
+              </a:lnSpc>
+              <a:spcAft>
+                <a:spcPts val="100"/>
+              </a:spcAft>
+              <a:buNone/>
+            </a:pPr>
+            <a:r>
+              <a:rPr lang="en-US" sz="900" b="1" dirty="0">
+                <a:solidFill>
+                  <a:srgbClr val="E3A774"/>
+                </a:solidFill>
+                <a:latin typeface="Meiryo" pitchFamily="34" charset="0"/>
+                <a:ea typeface="Meiryo" pitchFamily="34" charset="-122"/>
+                <a:cs typeface="Meiryo" pitchFamily="34" charset="-120"/>
+              </a:rPr>
+              <a:t>読み方</a:t>
+            </a:r>
+            <a:endParaRPr lang="en-US" sz="900" dirty="0"/>
+          </a:p>
+          <a:p>
+            <a:pPr algn="l" indent="0" marL="0">
+              <a:lnSpc>
+                <a:spcPct val="115000"/>
+              </a:lnSpc>
+              <a:spcAft>
+                <a:spcPts val="100"/>
+              </a:spcAft>
+              <a:buNone/>
+            </a:pPr>
+            <a:r>
+              <a:rPr lang="en-US" sz="900" dirty="0">
+                <a:solidFill>
+                  <a:srgbClr val="FFFFFF"/>
+                </a:solidFill>
+                <a:latin typeface="Meiryo" pitchFamily="34" charset="0"/>
+                <a:ea typeface="Meiryo" pitchFamily="34" charset="-122"/>
+                <a:cs typeface="Meiryo" pitchFamily="34" charset="-120"/>
+              </a:rPr>
+              <a:t>採用を遅らせれば、計画の6割で黒字、5割を割ると黒字にならない。</a:t>
+            </a:r>
+            <a:endParaRPr lang="en-US" sz="900" dirty="0"/>
+          </a:p>
+          <a:p>
+            <a:pPr algn="l" indent="0" marL="0">
+              <a:lnSpc>
+                <a:spcPct val="115000"/>
+              </a:lnSpc>
+              <a:spcAft>
+                <a:spcPts val="100"/>
+              </a:spcAft>
+              <a:buNone/>
+            </a:pPr>
+            <a:r>
+              <a:rPr lang="en-US" sz="900" dirty="0">
+                <a:solidFill>
+                  <a:srgbClr val="FFFFFF"/>
+                </a:solidFill>
+                <a:latin typeface="Meiryo" pitchFamily="34" charset="0"/>
+                <a:ea typeface="Meiryo" pitchFamily="34" charset="-122"/>
+                <a:cs typeface="Meiryo" pitchFamily="34" charset="-120"/>
+              </a:rPr>
+              <a:t>遅れているのに計画どおり採用すると、7割でも現金が尽きる。</a:t>
+            </a:r>
+            <a:endParaRPr lang="en-US" sz="900" dirty="0"/>
+          </a:p>
+          <a:p>
+            <a:pPr algn="l" indent="0" marL="0">
+              <a:lnSpc>
+                <a:spcPct val="115000"/>
+              </a:lnSpc>
+              <a:spcAft>
+                <a:spcPts val="100"/>
+              </a:spcAft>
+              <a:buNone/>
+            </a:pPr>
+            <a:r>
+              <a:rPr lang="en-US" sz="900" dirty="0">
+                <a:solidFill>
+                  <a:srgbClr val="FFFFFF"/>
+                </a:solidFill>
+                <a:latin typeface="Meiryo" pitchFamily="34" charset="0"/>
+                <a:ea typeface="Meiryo" pitchFamily="34" charset="-122"/>
+                <a:cs typeface="Meiryo" pitchFamily="34" charset="-120"/>
+              </a:rPr>
+              <a:t>採用は「期末で社員1人3拠点」の見込みが立ってから</a:t>
+            </a:r>
+            <a:endParaRPr lang="en-US" sz="900" dirty="0"/>
+          </a:p>
+        </p:txBody>
+      </p:sp>
+      <p:sp>
+        <p:nvSpPr>
+          <p:cNvPr id="11" name="Text 7"/>
+          <p:cNvSpPr txBox="1"/>
+          <p:nvPr/>
+        </p:nvSpPr>
+        <p:spPr>
+          <a:xfrm>
+            <a:off x="5486400" y="1051560"/>
+            <a:ext cx="3291840" cy="237744"/>
           </a:xfrm>
           <a:prstGeom prst="rect">
             <a:avLst/>
@@ -9253,172 +11529,185 @@
               <a:buNone/>
             </a:pPr>
             <a:r>
-              <a:rPr lang="en-US" sz="1100" b="1" dirty="0">
-                <a:solidFill>
-                  <a:srgbClr val="E3A774"/>
-                </a:solidFill>
-                <a:latin typeface="Meiryo" pitchFamily="34" charset="0"/>
-                <a:ea typeface="Meiryo" pitchFamily="34" charset="-122"/>
-                <a:cs typeface="Meiryo" pitchFamily="34" charset="-120"/>
-              </a:rPr>
-              <a:t>今日</a:t>
-            </a:r>
-            <a:endParaRPr lang="en-US" sz="1100" dirty="0"/>
-          </a:p>
-        </p:txBody>
-      </p:sp>
-      <p:sp>
-        <p:nvSpPr>
-          <p:cNvPr id="7" name="Text 4"/>
-          <p:cNvSpPr txBox="1"/>
-          <p:nvPr/>
-        </p:nvSpPr>
-        <p:spPr>
-          <a:xfrm>
-            <a:off x="475488" y="1508760"/>
-            <a:ext cx="1783080" cy="457200"/>
-          </a:xfrm>
-          <a:prstGeom prst="rect">
-            <a:avLst/>
-          </a:prstGeom>
-          <a:noFill/>
-          <a:ln/>
-        </p:spPr>
-        <p:txBody>
-          <a:bodyPr wrap="square" lIns="0" tIns="0" rIns="0" bIns="0" rtlCol="0" anchor="t"/>
-          <a:lstStyle/>
-          <a:p>
-            <a:pPr algn="l" indent="0" marL="0">
-              <a:lnSpc>
-                <a:spcPct val="115000"/>
-              </a:lnSpc>
-              <a:buNone/>
-            </a:pPr>
-            <a:r>
-              <a:rPr lang="en-US" sz="1200" b="1" dirty="0">
-                <a:solidFill>
-                  <a:srgbClr val="FFFFFF"/>
-                </a:solidFill>
-                <a:latin typeface="Meiryo" pitchFamily="34" charset="0"/>
-                <a:ea typeface="Meiryo" pitchFamily="34" charset="-122"/>
-                <a:cs typeface="Meiryo" pitchFamily="34" charset="-120"/>
-              </a:rPr>
-              <a:t>500万円の出資</a:t>
-            </a:r>
-            <a:endParaRPr lang="en-US" sz="1200" dirty="0"/>
-          </a:p>
-        </p:txBody>
-      </p:sp>
-      <p:sp>
-        <p:nvSpPr>
-          <p:cNvPr id="8" name="Text 5"/>
-          <p:cNvSpPr txBox="1"/>
-          <p:nvPr/>
-        </p:nvSpPr>
-        <p:spPr>
-          <a:xfrm>
-            <a:off x="475488" y="1993392"/>
-            <a:ext cx="1783080" cy="411480"/>
-          </a:xfrm>
-          <a:prstGeom prst="rect">
-            <a:avLst/>
-          </a:prstGeom>
-          <a:noFill/>
-          <a:ln/>
-        </p:spPr>
-        <p:txBody>
-          <a:bodyPr wrap="square" lIns="0" tIns="0" rIns="0" bIns="0" rtlCol="0" anchor="t"/>
-          <a:lstStyle/>
-          <a:p>
-            <a:pPr algn="l" indent="0" marL="0">
-              <a:lnSpc>
-                <a:spcPct val="115000"/>
-              </a:lnSpc>
-              <a:buNone/>
-            </a:pPr>
-            <a:r>
-              <a:rPr lang="en-US" sz="900" dirty="0">
-                <a:solidFill>
-                  <a:srgbClr val="FFFFFF"/>
-                </a:solidFill>
-                <a:latin typeface="Meiryo" pitchFamily="34" charset="0"/>
-                <a:ea typeface="Meiryo" pitchFamily="34" charset="-122"/>
-                <a:cs typeface="Meiryo" pitchFamily="34" charset="-120"/>
-              </a:rPr>
-              <a:t>試作品・端末・実証</a:t>
-            </a:r>
-            <a:endParaRPr lang="en-US" sz="900" dirty="0"/>
-          </a:p>
-        </p:txBody>
-      </p:sp>
-      <p:sp>
-        <p:nvSpPr>
-          <p:cNvPr id="9" name="Shape 6"/>
+              <a:rPr lang="en-US" sz="1050" b="1" dirty="0">
+                <a:solidFill>
+                  <a:srgbClr val="1A1A1A"/>
+                </a:solidFill>
+                <a:latin typeface="Meiryo" pitchFamily="34" charset="0"/>
+                <a:ea typeface="Meiryo" pitchFamily="34" charset="-122"/>
+                <a:cs typeface="Meiryo" pitchFamily="34" charset="-120"/>
+              </a:rPr>
+              <a:t>進む・直す・止まるの線</a:t>
+            </a:r>
+            <a:endParaRPr lang="en-US" sz="1050" dirty="0"/>
+          </a:p>
+        </p:txBody>
+      </p:sp>
+      <p:sp>
+        <p:nvSpPr>
+          <p:cNvPr id="12" name="Shape 8"/>
           <p:cNvSpPr/>
           <p:nvPr/>
         </p:nvSpPr>
         <p:spPr>
           <a:xfrm>
-            <a:off x="2350008" y="1783080"/>
-            <a:ext cx="137160" cy="0"/>
-          </a:xfrm>
-          <a:prstGeom prst="line">
-            <a:avLst/>
-          </a:prstGeom>
-          <a:noFill/>
-          <a:ln w="25400">
+            <a:off x="5486400" y="1344168"/>
+            <a:ext cx="3291840" cy="1371600"/>
+          </a:xfrm>
+          <a:prstGeom prst="rect">
+            <a:avLst/>
+          </a:prstGeom>
+          <a:solidFill>
+            <a:srgbClr val="FFFFFF"/>
+          </a:solidFill>
+          <a:ln w="12700">
             <a:solidFill>
               <a:srgbClr val="1A1A1A"/>
             </a:solidFill>
             <a:prstDash val="solid"/>
-            <a:tailEnd type="triangle"/>
           </a:ln>
         </p:spPr>
       </p:sp>
       <p:sp>
         <p:nvSpPr>
-          <p:cNvPr id="10" name="Shape 7"/>
+          <p:cNvPr id="13" name="Text 9"/>
+          <p:cNvSpPr txBox="1"/>
+          <p:nvPr/>
+        </p:nvSpPr>
+        <p:spPr>
+          <a:xfrm>
+            <a:off x="5596128" y="1380744"/>
+            <a:ext cx="3072384" cy="256032"/>
+          </a:xfrm>
+          <a:prstGeom prst="rect">
+            <a:avLst/>
+          </a:prstGeom>
+          <a:noFill/>
+          <a:ln/>
+        </p:spPr>
+        <p:txBody>
+          <a:bodyPr wrap="square" lIns="0" tIns="0" rIns="0" bIns="0" rtlCol="0" anchor="ctr"/>
+          <a:lstStyle/>
+          <a:p>
+            <a:pPr algn="l" indent="0" marL="0">
+              <a:lnSpc>
+                <a:spcPct val="115000"/>
+              </a:lnSpc>
+              <a:buNone/>
+            </a:pPr>
+            <a:r>
+              <a:rPr lang="en-US" sz="950" b="1" dirty="0">
+                <a:solidFill>
+                  <a:srgbClr val="B8692E"/>
+                </a:solidFill>
+                <a:latin typeface="Meiryo" pitchFamily="34" charset="0"/>
+                <a:ea typeface="Meiryo" pitchFamily="34" charset="-122"/>
+                <a:cs typeface="Meiryo" pitchFamily="34" charset="-120"/>
+              </a:rPr>
+              <a:t>1年目末　</a:t>
+            </a:r>
+            <a:pPr algn="l" indent="0" marL="0">
+              <a:lnSpc>
+                <a:spcPct val="115000"/>
+              </a:lnSpc>
+              <a:buNone/>
+            </a:pPr>
+            <a:r>
+              <a:rPr lang="en-US" sz="950" b="1" dirty="0">
+                <a:solidFill>
+                  <a:srgbClr val="1A1A1A"/>
+                </a:solidFill>
+                <a:latin typeface="Meiryo" pitchFamily="34" charset="0"/>
+                <a:ea typeface="Meiryo" pitchFamily="34" charset="-122"/>
+                <a:cs typeface="Meiryo" pitchFamily="34" charset="-120"/>
+              </a:rPr>
+              <a:t>実証3社のうち本契約</a:t>
+            </a:r>
+            <a:endParaRPr lang="en-US" sz="950" dirty="0"/>
+          </a:p>
+        </p:txBody>
+      </p:sp>
+      <p:sp>
+        <p:nvSpPr>
+          <p:cNvPr id="14" name="Shape 10"/>
           <p:cNvSpPr/>
           <p:nvPr/>
         </p:nvSpPr>
         <p:spPr>
           <a:xfrm>
-            <a:off x="2496312" y="1097280"/>
-            <a:ext cx="1965960" cy="1371600"/>
+            <a:off x="5596128" y="1673352"/>
+            <a:ext cx="777240" cy="292608"/>
           </a:xfrm>
           <a:prstGeom prst="rect">
             <a:avLst/>
           </a:prstGeom>
           <a:solidFill>
-            <a:srgbClr val="F2F2F2"/>
+            <a:srgbClr val="1A1A1A"/>
           </a:solidFill>
-          <a:ln w="9525">
-            <a:solidFill>
-              <a:srgbClr val="BFBFBF"/>
-            </a:solidFill>
-            <a:prstDash val="solid"/>
-          </a:ln>
-        </p:spPr>
-      </p:sp>
-      <p:sp>
-        <p:nvSpPr>
-          <p:cNvPr id="11" name="Text 8"/>
-          <p:cNvSpPr txBox="1"/>
-          <p:nvPr/>
-        </p:nvSpPr>
-        <p:spPr>
-          <a:xfrm>
-            <a:off x="2606040" y="1188720"/>
-            <a:ext cx="1737360" cy="274320"/>
-          </a:xfrm>
-          <a:prstGeom prst="rect">
-            <a:avLst/>
-          </a:prstGeom>
-          <a:noFill/>
-          <a:ln/>
-        </p:spPr>
-        <p:txBody>
-          <a:bodyPr wrap="square" lIns="0" tIns="0" rIns="0" bIns="0" rtlCol="0" anchor="t"/>
+          <a:ln/>
+        </p:spPr>
+      </p:sp>
+      <p:sp>
+        <p:nvSpPr>
+          <p:cNvPr id="15" name="Text 11"/>
+          <p:cNvSpPr txBox="1"/>
+          <p:nvPr/>
+        </p:nvSpPr>
+        <p:spPr>
+          <a:xfrm>
+            <a:off x="5596128" y="1673352"/>
+            <a:ext cx="777240" cy="292608"/>
+          </a:xfrm>
+          <a:prstGeom prst="rect">
+            <a:avLst/>
+          </a:prstGeom>
+          <a:noFill/>
+          <a:ln/>
+        </p:spPr>
+        <p:txBody>
+          <a:bodyPr wrap="square" lIns="0" tIns="0" rIns="0" bIns="0" rtlCol="0" anchor="ctr"/>
+          <a:lstStyle/>
+          <a:p>
+            <a:pPr algn="ctr" indent="0" marL="0">
+              <a:lnSpc>
+                <a:spcPct val="115000"/>
+              </a:lnSpc>
+              <a:buNone/>
+            </a:pPr>
+            <a:r>
+              <a:rPr lang="en-US" sz="900" b="1" dirty="0">
+                <a:solidFill>
+                  <a:srgbClr val="FFFFFF"/>
+                </a:solidFill>
+                <a:latin typeface="Meiryo" pitchFamily="34" charset="0"/>
+                <a:ea typeface="Meiryo" pitchFamily="34" charset="-122"/>
+                <a:cs typeface="Meiryo" pitchFamily="34" charset="-120"/>
+              </a:rPr>
+              <a:t>2社以上</a:t>
+            </a:r>
+            <a:endParaRPr lang="en-US" sz="900" dirty="0"/>
+          </a:p>
+        </p:txBody>
+      </p:sp>
+      <p:sp>
+        <p:nvSpPr>
+          <p:cNvPr id="16" name="Text 12"/>
+          <p:cNvSpPr txBox="1"/>
+          <p:nvPr/>
+        </p:nvSpPr>
+        <p:spPr>
+          <a:xfrm>
+            <a:off x="6446520" y="1673352"/>
+            <a:ext cx="2240280" cy="292608"/>
+          </a:xfrm>
+          <a:prstGeom prst="rect">
+            <a:avLst/>
+          </a:prstGeom>
+          <a:noFill/>
+          <a:ln/>
+        </p:spPr>
+        <p:txBody>
+          <a:bodyPr wrap="square" lIns="0" tIns="0" rIns="0" bIns="0" rtlCol="0" anchor="ctr"/>
           <a:lstStyle/>
           <a:p>
             <a:pPr algn="l" indent="0" marL="0">
@@ -9428,39 +11717,101 @@
               <a:buNone/>
             </a:pPr>
             <a:r>
-              <a:rPr lang="en-US" sz="1100" b="1" dirty="0">
-                <a:solidFill>
-                  <a:srgbClr val="B8692E"/>
-                </a:solidFill>
-                <a:latin typeface="Meiryo" pitchFamily="34" charset="0"/>
-                <a:ea typeface="Meiryo" pitchFamily="34" charset="-122"/>
-                <a:cs typeface="Meiryo" pitchFamily="34" charset="-120"/>
-              </a:rPr>
-              <a:t>3か月</a:t>
-            </a:r>
-            <a:endParaRPr lang="en-US" sz="1100" dirty="0"/>
-          </a:p>
-        </p:txBody>
-      </p:sp>
-      <p:sp>
-        <p:nvSpPr>
-          <p:cNvPr id="12" name="Text 9"/>
-          <p:cNvSpPr txBox="1"/>
-          <p:nvPr/>
-        </p:nvSpPr>
-        <p:spPr>
-          <a:xfrm>
-            <a:off x="2606040" y="1508760"/>
-            <a:ext cx="1783080" cy="457200"/>
-          </a:xfrm>
-          <a:prstGeom prst="rect">
-            <a:avLst/>
-          </a:prstGeom>
-          <a:noFill/>
-          <a:ln/>
-        </p:spPr>
-        <p:txBody>
-          <a:bodyPr wrap="square" lIns="0" tIns="0" rIns="0" bIns="0" rtlCol="0" anchor="t"/>
+              <a:rPr lang="en-US" sz="950" dirty="0">
+                <a:solidFill>
+                  <a:srgbClr val="1A1A1A"/>
+                </a:solidFill>
+                <a:latin typeface="Meiryo" pitchFamily="34" charset="0"/>
+                <a:ea typeface="Meiryo" pitchFamily="34" charset="-122"/>
+                <a:cs typeface="Meiryo" pitchFamily="34" charset="-120"/>
+              </a:rPr>
+              <a:t>→ 進む</a:t>
+            </a:r>
+            <a:endParaRPr lang="en-US" sz="950" dirty="0"/>
+          </a:p>
+        </p:txBody>
+      </p:sp>
+      <p:sp>
+        <p:nvSpPr>
+          <p:cNvPr id="17" name="Shape 13"/>
+          <p:cNvSpPr/>
+          <p:nvPr/>
+        </p:nvSpPr>
+        <p:spPr>
+          <a:xfrm>
+            <a:off x="5596128" y="2020824"/>
+            <a:ext cx="777240" cy="292608"/>
+          </a:xfrm>
+          <a:prstGeom prst="rect">
+            <a:avLst/>
+          </a:prstGeom>
+          <a:solidFill>
+            <a:srgbClr val="4D4D4D"/>
+          </a:solidFill>
+          <a:ln/>
+        </p:spPr>
+      </p:sp>
+      <p:sp>
+        <p:nvSpPr>
+          <p:cNvPr id="18" name="Text 14"/>
+          <p:cNvSpPr txBox="1"/>
+          <p:nvPr/>
+        </p:nvSpPr>
+        <p:spPr>
+          <a:xfrm>
+            <a:off x="5596128" y="2020824"/>
+            <a:ext cx="777240" cy="292608"/>
+          </a:xfrm>
+          <a:prstGeom prst="rect">
+            <a:avLst/>
+          </a:prstGeom>
+          <a:noFill/>
+          <a:ln/>
+        </p:spPr>
+        <p:txBody>
+          <a:bodyPr wrap="square" lIns="0" tIns="0" rIns="0" bIns="0" rtlCol="0" anchor="ctr"/>
+          <a:lstStyle/>
+          <a:p>
+            <a:pPr algn="ctr" indent="0" marL="0">
+              <a:lnSpc>
+                <a:spcPct val="115000"/>
+              </a:lnSpc>
+              <a:buNone/>
+            </a:pPr>
+            <a:r>
+              <a:rPr lang="en-US" sz="900" b="1" dirty="0">
+                <a:solidFill>
+                  <a:srgbClr val="FFFFFF"/>
+                </a:solidFill>
+                <a:latin typeface="Meiryo" pitchFamily="34" charset="0"/>
+                <a:ea typeface="Meiryo" pitchFamily="34" charset="-122"/>
+                <a:cs typeface="Meiryo" pitchFamily="34" charset="-120"/>
+              </a:rPr>
+              <a:t>1社</a:t>
+            </a:r>
+            <a:endParaRPr lang="en-US" sz="900" dirty="0"/>
+          </a:p>
+        </p:txBody>
+      </p:sp>
+      <p:sp>
+        <p:nvSpPr>
+          <p:cNvPr id="19" name="Text 15"/>
+          <p:cNvSpPr txBox="1"/>
+          <p:nvPr/>
+        </p:nvSpPr>
+        <p:spPr>
+          <a:xfrm>
+            <a:off x="6446520" y="2020824"/>
+            <a:ext cx="2240280" cy="292608"/>
+          </a:xfrm>
+          <a:prstGeom prst="rect">
+            <a:avLst/>
+          </a:prstGeom>
+          <a:noFill/>
+          <a:ln/>
+        </p:spPr>
+        <p:txBody>
+          <a:bodyPr wrap="square" lIns="0" tIns="0" rIns="0" bIns="0" rtlCol="0" anchor="ctr"/>
           <a:lstStyle/>
           <a:p>
             <a:pPr algn="l" indent="0" marL="0">
@@ -9470,7 +11821,7 @@
               <a:buNone/>
             </a:pPr>
             <a:r>
-              <a:rPr lang="en-US" sz="1200" b="1" dirty="0">
+              <a:rPr lang="en-US" sz="950" dirty="0">
                 <a:solidFill>
                   <a:srgbClr val="1A1A1A"/>
                 </a:solidFill>
@@ -9478,31 +11829,93 @@
                 <a:ea typeface="Meiryo" pitchFamily="34" charset="-122"/>
                 <a:cs typeface="Meiryo" pitchFamily="34" charset="-120"/>
               </a:rPr>
-              <a:t>試作品ができる</a:t>
-            </a:r>
-            <a:endParaRPr lang="en-US" sz="1200" dirty="0"/>
-          </a:p>
-        </p:txBody>
-      </p:sp>
-      <p:sp>
-        <p:nvSpPr>
-          <p:cNvPr id="13" name="Text 10"/>
-          <p:cNvSpPr txBox="1"/>
-          <p:nvPr/>
-        </p:nvSpPr>
-        <p:spPr>
-          <a:xfrm>
-            <a:off x="2606040" y="1993392"/>
-            <a:ext cx="1783080" cy="411480"/>
-          </a:xfrm>
-          <a:prstGeom prst="rect">
-            <a:avLst/>
-          </a:prstGeom>
-          <a:noFill/>
-          <a:ln/>
-        </p:spPr>
-        <p:txBody>
-          <a:bodyPr wrap="square" lIns="0" tIns="0" rIns="0" bIns="0" rtlCol="0" anchor="t"/>
+              <a:t>→ 値段と顧客を見直す</a:t>
+            </a:r>
+            <a:endParaRPr lang="en-US" sz="950" dirty="0"/>
+          </a:p>
+        </p:txBody>
+      </p:sp>
+      <p:sp>
+        <p:nvSpPr>
+          <p:cNvPr id="20" name="Shape 16"/>
+          <p:cNvSpPr/>
+          <p:nvPr/>
+        </p:nvSpPr>
+        <p:spPr>
+          <a:xfrm>
+            <a:off x="5596128" y="2368296"/>
+            <a:ext cx="777240" cy="292608"/>
+          </a:xfrm>
+          <a:prstGeom prst="rect">
+            <a:avLst/>
+          </a:prstGeom>
+          <a:solidFill>
+            <a:srgbClr val="B8692E"/>
+          </a:solidFill>
+          <a:ln/>
+        </p:spPr>
+      </p:sp>
+      <p:sp>
+        <p:nvSpPr>
+          <p:cNvPr id="21" name="Text 17"/>
+          <p:cNvSpPr txBox="1"/>
+          <p:nvPr/>
+        </p:nvSpPr>
+        <p:spPr>
+          <a:xfrm>
+            <a:off x="5596128" y="2368296"/>
+            <a:ext cx="777240" cy="292608"/>
+          </a:xfrm>
+          <a:prstGeom prst="rect">
+            <a:avLst/>
+          </a:prstGeom>
+          <a:noFill/>
+          <a:ln/>
+        </p:spPr>
+        <p:txBody>
+          <a:bodyPr wrap="square" lIns="0" tIns="0" rIns="0" bIns="0" rtlCol="0" anchor="ctr"/>
+          <a:lstStyle/>
+          <a:p>
+            <a:pPr algn="ctr" indent="0" marL="0">
+              <a:lnSpc>
+                <a:spcPct val="115000"/>
+              </a:lnSpc>
+              <a:buNone/>
+            </a:pPr>
+            <a:r>
+              <a:rPr lang="en-US" sz="900" b="1" dirty="0">
+                <a:solidFill>
+                  <a:srgbClr val="FFFFFF"/>
+                </a:solidFill>
+                <a:latin typeface="Meiryo" pitchFamily="34" charset="0"/>
+                <a:ea typeface="Meiryo" pitchFamily="34" charset="-122"/>
+                <a:cs typeface="Meiryo" pitchFamily="34" charset="-120"/>
+              </a:rPr>
+              <a:t>0社</a:t>
+            </a:r>
+            <a:endParaRPr lang="en-US" sz="900" dirty="0"/>
+          </a:p>
+        </p:txBody>
+      </p:sp>
+      <p:sp>
+        <p:nvSpPr>
+          <p:cNvPr id="22" name="Text 18"/>
+          <p:cNvSpPr txBox="1"/>
+          <p:nvPr/>
+        </p:nvSpPr>
+        <p:spPr>
+          <a:xfrm>
+            <a:off x="6446520" y="2368296"/>
+            <a:ext cx="2240280" cy="292608"/>
+          </a:xfrm>
+          <a:prstGeom prst="rect">
+            <a:avLst/>
+          </a:prstGeom>
+          <a:noFill/>
+          <a:ln/>
+        </p:spPr>
+        <p:txBody>
+          <a:bodyPr wrap="square" lIns="0" tIns="0" rIns="0" bIns="0" rtlCol="0" anchor="ctr"/>
           <a:lstStyle/>
           <a:p>
             <a:pPr algn="l" indent="0" marL="0">
@@ -9512,7 +11925,7 @@
               <a:buNone/>
             </a:pPr>
             <a:r>
-              <a:rPr lang="en-US" sz="900" dirty="0">
+              <a:rPr lang="en-US" sz="950" dirty="0">
                 <a:solidFill>
                   <a:srgbClr val="1A1A1A"/>
                 </a:solidFill>
@@ -9520,80 +11933,177 @@
                 <a:ea typeface="Meiryo" pitchFamily="34" charset="-122"/>
                 <a:cs typeface="Meiryo" pitchFamily="34" charset="-120"/>
               </a:rPr>
-              <a:t>記録→写真抽出→報告書</a:t>
-            </a:r>
-            <a:endParaRPr lang="en-US" sz="900" dirty="0"/>
-          </a:p>
-        </p:txBody>
-      </p:sp>
-      <p:sp>
-        <p:nvSpPr>
-          <p:cNvPr id="14" name="Shape 11"/>
+              <a:t>→ 撤退か方向転換</a:t>
+            </a:r>
+            <a:endParaRPr lang="en-US" sz="950" dirty="0"/>
+          </a:p>
+        </p:txBody>
+      </p:sp>
+      <p:sp>
+        <p:nvSpPr>
+          <p:cNvPr id="23" name="Shape 19"/>
           <p:cNvSpPr/>
           <p:nvPr/>
         </p:nvSpPr>
         <p:spPr>
           <a:xfrm>
-            <a:off x="4480560" y="1783080"/>
-            <a:ext cx="137160" cy="0"/>
-          </a:xfrm>
-          <a:prstGeom prst="line">
-            <a:avLst/>
-          </a:prstGeom>
-          <a:noFill/>
-          <a:ln w="25400">
+            <a:off x="5486400" y="2825496"/>
+            <a:ext cx="3291840" cy="1024128"/>
+          </a:xfrm>
+          <a:prstGeom prst="rect">
+            <a:avLst/>
+          </a:prstGeom>
+          <a:solidFill>
+            <a:srgbClr val="FFFFFF"/>
+          </a:solidFill>
+          <a:ln w="12700">
             <a:solidFill>
               <a:srgbClr val="1A1A1A"/>
             </a:solidFill>
             <a:prstDash val="solid"/>
-            <a:tailEnd type="triangle"/>
           </a:ln>
         </p:spPr>
       </p:sp>
       <p:sp>
         <p:nvSpPr>
-          <p:cNvPr id="15" name="Shape 12"/>
+          <p:cNvPr id="24" name="Text 20"/>
+          <p:cNvSpPr txBox="1"/>
+          <p:nvPr/>
+        </p:nvSpPr>
+        <p:spPr>
+          <a:xfrm>
+            <a:off x="5596128" y="2862072"/>
+            <a:ext cx="3072384" cy="256032"/>
+          </a:xfrm>
+          <a:prstGeom prst="rect">
+            <a:avLst/>
+          </a:prstGeom>
+          <a:noFill/>
+          <a:ln/>
+        </p:spPr>
+        <p:txBody>
+          <a:bodyPr wrap="square" lIns="0" tIns="0" rIns="0" bIns="0" rtlCol="0" anchor="ctr"/>
+          <a:lstStyle/>
+          <a:p>
+            <a:pPr algn="l" indent="0" marL="0">
+              <a:lnSpc>
+                <a:spcPct val="115000"/>
+              </a:lnSpc>
+              <a:buNone/>
+            </a:pPr>
+            <a:r>
+              <a:rPr lang="en-US" sz="950" b="1" dirty="0">
+                <a:solidFill>
+                  <a:srgbClr val="B8692E"/>
+                </a:solidFill>
+                <a:latin typeface="Meiryo" pitchFamily="34" charset="0"/>
+                <a:ea typeface="Meiryo" pitchFamily="34" charset="-122"/>
+                <a:cs typeface="Meiryo" pitchFamily="34" charset="-120"/>
+              </a:rPr>
+              <a:t>2年目末　</a:t>
+            </a:r>
+            <a:pPr algn="l" indent="0" marL="0">
+              <a:lnSpc>
+                <a:spcPct val="115000"/>
+              </a:lnSpc>
+              <a:buNone/>
+            </a:pPr>
+            <a:r>
+              <a:rPr lang="en-US" sz="950" b="1" dirty="0">
+                <a:solidFill>
+                  <a:srgbClr val="1A1A1A"/>
+                </a:solidFill>
+                <a:latin typeface="Meiryo" pitchFamily="34" charset="0"/>
+                <a:ea typeface="Meiryo" pitchFamily="34" charset="-122"/>
+                <a:cs typeface="Meiryo" pitchFamily="34" charset="-120"/>
+              </a:rPr>
+              <a:t>新規拠点</a:t>
+            </a:r>
+            <a:endParaRPr lang="en-US" sz="950" dirty="0"/>
+          </a:p>
+        </p:txBody>
+      </p:sp>
+      <p:sp>
+        <p:nvSpPr>
+          <p:cNvPr id="25" name="Shape 21"/>
           <p:cNvSpPr/>
           <p:nvPr/>
         </p:nvSpPr>
         <p:spPr>
           <a:xfrm>
-            <a:off x="4626864" y="1097280"/>
-            <a:ext cx="1965960" cy="1371600"/>
+            <a:off x="5596128" y="3154680"/>
+            <a:ext cx="777240" cy="292608"/>
           </a:xfrm>
           <a:prstGeom prst="rect">
             <a:avLst/>
           </a:prstGeom>
           <a:solidFill>
-            <a:srgbClr val="F2F2F2"/>
+            <a:srgbClr val="1A1A1A"/>
           </a:solidFill>
-          <a:ln w="9525">
-            <a:solidFill>
-              <a:srgbClr val="BFBFBF"/>
-            </a:solidFill>
-            <a:prstDash val="solid"/>
-          </a:ln>
-        </p:spPr>
-      </p:sp>
-      <p:sp>
-        <p:nvSpPr>
-          <p:cNvPr id="16" name="Text 13"/>
-          <p:cNvSpPr txBox="1"/>
-          <p:nvPr/>
-        </p:nvSpPr>
-        <p:spPr>
-          <a:xfrm>
-            <a:off x="4736592" y="1188720"/>
-            <a:ext cx="1737360" cy="274320"/>
-          </a:xfrm>
-          <a:prstGeom prst="rect">
-            <a:avLst/>
-          </a:prstGeom>
-          <a:noFill/>
-          <a:ln/>
-        </p:spPr>
-        <p:txBody>
-          <a:bodyPr wrap="square" lIns="0" tIns="0" rIns="0" bIns="0" rtlCol="0" anchor="t"/>
+          <a:ln/>
+        </p:spPr>
+      </p:sp>
+      <p:sp>
+        <p:nvSpPr>
+          <p:cNvPr id="26" name="Text 22"/>
+          <p:cNvSpPr txBox="1"/>
+          <p:nvPr/>
+        </p:nvSpPr>
+        <p:spPr>
+          <a:xfrm>
+            <a:off x="5596128" y="3154680"/>
+            <a:ext cx="777240" cy="292608"/>
+          </a:xfrm>
+          <a:prstGeom prst="rect">
+            <a:avLst/>
+          </a:prstGeom>
+          <a:noFill/>
+          <a:ln/>
+        </p:spPr>
+        <p:txBody>
+          <a:bodyPr wrap="square" lIns="0" tIns="0" rIns="0" bIns="0" rtlCol="0" anchor="ctr"/>
+          <a:lstStyle/>
+          <a:p>
+            <a:pPr algn="ctr" indent="0" marL="0">
+              <a:lnSpc>
+                <a:spcPct val="115000"/>
+              </a:lnSpc>
+              <a:buNone/>
+            </a:pPr>
+            <a:r>
+              <a:rPr lang="en-US" sz="900" b="1" dirty="0">
+                <a:solidFill>
+                  <a:srgbClr val="FFFFFF"/>
+                </a:solidFill>
+                <a:latin typeface="Meiryo" pitchFamily="34" charset="0"/>
+                <a:ea typeface="Meiryo" pitchFamily="34" charset="-122"/>
+                <a:cs typeface="Meiryo" pitchFamily="34" charset="-120"/>
+              </a:rPr>
+              <a:t>5以上</a:t>
+            </a:r>
+            <a:endParaRPr lang="en-US" sz="900" dirty="0"/>
+          </a:p>
+        </p:txBody>
+      </p:sp>
+      <p:sp>
+        <p:nvSpPr>
+          <p:cNvPr id="27" name="Text 23"/>
+          <p:cNvSpPr txBox="1"/>
+          <p:nvPr/>
+        </p:nvSpPr>
+        <p:spPr>
+          <a:xfrm>
+            <a:off x="6446520" y="3154680"/>
+            <a:ext cx="2240280" cy="292608"/>
+          </a:xfrm>
+          <a:prstGeom prst="rect">
+            <a:avLst/>
+          </a:prstGeom>
+          <a:noFill/>
+          <a:ln/>
+        </p:spPr>
+        <p:txBody>
+          <a:bodyPr wrap="square" lIns="0" tIns="0" rIns="0" bIns="0" rtlCol="0" anchor="ctr"/>
           <a:lstStyle/>
           <a:p>
             <a:pPr algn="l" indent="0" marL="0">
@@ -9603,49 +12113,7 @@
               <a:buNone/>
             </a:pPr>
             <a:r>
-              <a:rPr lang="en-US" sz="1100" b="1" dirty="0">
-                <a:solidFill>
-                  <a:srgbClr val="B8692E"/>
-                </a:solidFill>
-                <a:latin typeface="Meiryo" pitchFamily="34" charset="0"/>
-                <a:ea typeface="Meiryo" pitchFamily="34" charset="-122"/>
-                <a:cs typeface="Meiryo" pitchFamily="34" charset="-120"/>
-              </a:rPr>
-              <a:t>6か月</a:t>
-            </a:r>
-            <a:endParaRPr lang="en-US" sz="1100" dirty="0"/>
-          </a:p>
-        </p:txBody>
-      </p:sp>
-      <p:sp>
-        <p:nvSpPr>
-          <p:cNvPr id="17" name="Text 14"/>
-          <p:cNvSpPr txBox="1"/>
-          <p:nvPr/>
-        </p:nvSpPr>
-        <p:spPr>
-          <a:xfrm>
-            <a:off x="4736592" y="1508760"/>
-            <a:ext cx="1783080" cy="457200"/>
-          </a:xfrm>
-          <a:prstGeom prst="rect">
-            <a:avLst/>
-          </a:prstGeom>
-          <a:noFill/>
-          <a:ln/>
-        </p:spPr>
-        <p:txBody>
-          <a:bodyPr wrap="square" lIns="0" tIns="0" rIns="0" bIns="0" rtlCol="0" anchor="t"/>
-          <a:lstStyle/>
-          <a:p>
-            <a:pPr algn="l" indent="0" marL="0">
-              <a:lnSpc>
-                <a:spcPct val="115000"/>
-              </a:lnSpc>
-              <a:buNone/>
-            </a:pPr>
-            <a:r>
-              <a:rPr lang="en-US" sz="1200" b="1" dirty="0">
+              <a:rPr lang="en-US" sz="950" dirty="0">
                 <a:solidFill>
                   <a:srgbClr val="1A1A1A"/>
                 </a:solidFill>
@@ -9653,323 +12121,22 @@
                 <a:ea typeface="Meiryo" pitchFamily="34" charset="-122"/>
                 <a:cs typeface="Meiryo" pitchFamily="34" charset="-120"/>
               </a:rPr>
-              <a:t>1拠点で実証</a:t>
-            </a:r>
-            <a:endParaRPr lang="en-US" sz="1200" dirty="0"/>
-          </a:p>
-        </p:txBody>
-      </p:sp>
-      <p:sp>
-        <p:nvSpPr>
-          <p:cNvPr id="18" name="Text 15"/>
-          <p:cNvSpPr txBox="1"/>
-          <p:nvPr/>
-        </p:nvSpPr>
-        <p:spPr>
-          <a:xfrm>
-            <a:off x="4736592" y="1993392"/>
-            <a:ext cx="1783080" cy="411480"/>
-          </a:xfrm>
-          <a:prstGeom prst="rect">
-            <a:avLst/>
-          </a:prstGeom>
-          <a:noFill/>
-          <a:ln/>
-        </p:spPr>
-        <p:txBody>
-          <a:bodyPr wrap="square" lIns="0" tIns="0" rIns="0" bIns="0" rtlCol="0" anchor="t"/>
-          <a:lstStyle/>
-          <a:p>
-            <a:pPr algn="l" indent="0" marL="0">
-              <a:lnSpc>
-                <a:spcPct val="115000"/>
-              </a:lnSpc>
-              <a:buNone/>
-            </a:pPr>
-            <a:r>
-              <a:rPr lang="en-US" sz="900" dirty="0">
-                <a:solidFill>
-                  <a:srgbClr val="1A1A1A"/>
-                </a:solidFill>
-                <a:latin typeface="Meiryo" pitchFamily="34" charset="0"/>
-                <a:ea typeface="Meiryo" pitchFamily="34" charset="-122"/>
-                <a:cs typeface="Meiryo" pitchFamily="34" charset="-120"/>
-              </a:rPr>
-              <a:t>報告書の時間がどれだけ減ったか実測</a:t>
-            </a:r>
-            <a:endParaRPr lang="en-US" sz="900" dirty="0"/>
-          </a:p>
-        </p:txBody>
-      </p:sp>
-      <p:sp>
-        <p:nvSpPr>
-          <p:cNvPr id="19" name="Shape 16"/>
+              <a:t>→ 計画どおり採用</a:t>
+            </a:r>
+            <a:endParaRPr lang="en-US" sz="950" dirty="0"/>
+          </a:p>
+        </p:txBody>
+      </p:sp>
+      <p:sp>
+        <p:nvSpPr>
+          <p:cNvPr id="28" name="Shape 24"/>
           <p:cNvSpPr/>
           <p:nvPr/>
         </p:nvSpPr>
         <p:spPr>
           <a:xfrm>
-            <a:off x="6611112" y="1783080"/>
-            <a:ext cx="137160" cy="0"/>
-          </a:xfrm>
-          <a:prstGeom prst="line">
-            <a:avLst/>
-          </a:prstGeom>
-          <a:noFill/>
-          <a:ln w="25400">
-            <a:solidFill>
-              <a:srgbClr val="1A1A1A"/>
-            </a:solidFill>
-            <a:prstDash val="solid"/>
-            <a:tailEnd type="triangle"/>
-          </a:ln>
-        </p:spPr>
-      </p:sp>
-      <p:sp>
-        <p:nvSpPr>
-          <p:cNvPr id="20" name="Shape 17"/>
-          <p:cNvSpPr/>
-          <p:nvPr/>
-        </p:nvSpPr>
-        <p:spPr>
-          <a:xfrm>
-            <a:off x="6757416" y="1097280"/>
-            <a:ext cx="1965960" cy="1371600"/>
-          </a:xfrm>
-          <a:prstGeom prst="rect">
-            <a:avLst/>
-          </a:prstGeom>
-          <a:solidFill>
-            <a:srgbClr val="F2F2F2"/>
-          </a:solidFill>
-          <a:ln w="9525">
-            <a:solidFill>
-              <a:srgbClr val="BFBFBF"/>
-            </a:solidFill>
-            <a:prstDash val="solid"/>
-          </a:ln>
-        </p:spPr>
-      </p:sp>
-      <p:sp>
-        <p:nvSpPr>
-          <p:cNvPr id="21" name="Text 18"/>
-          <p:cNvSpPr txBox="1"/>
-          <p:nvPr/>
-        </p:nvSpPr>
-        <p:spPr>
-          <a:xfrm>
-            <a:off x="6867144" y="1188720"/>
-            <a:ext cx="1737360" cy="274320"/>
-          </a:xfrm>
-          <a:prstGeom prst="rect">
-            <a:avLst/>
-          </a:prstGeom>
-          <a:noFill/>
-          <a:ln/>
-        </p:spPr>
-        <p:txBody>
-          <a:bodyPr wrap="square" lIns="0" tIns="0" rIns="0" bIns="0" rtlCol="0" anchor="t"/>
-          <a:lstStyle/>
-          <a:p>
-            <a:pPr algn="l" indent="0" marL="0">
-              <a:lnSpc>
-                <a:spcPct val="115000"/>
-              </a:lnSpc>
-              <a:buNone/>
-            </a:pPr>
-            <a:r>
-              <a:rPr lang="en-US" sz="1100" b="1" dirty="0">
-                <a:solidFill>
-                  <a:srgbClr val="B8692E"/>
-                </a:solidFill>
-                <a:latin typeface="Meiryo" pitchFamily="34" charset="0"/>
-                <a:ea typeface="Meiryo" pitchFamily="34" charset="-122"/>
-                <a:cs typeface="Meiryo" pitchFamily="34" charset="-120"/>
-              </a:rPr>
-              <a:t>その後</a:t>
-            </a:r>
-            <a:endParaRPr lang="en-US" sz="1100" dirty="0"/>
-          </a:p>
-        </p:txBody>
-      </p:sp>
-      <p:sp>
-        <p:nvSpPr>
-          <p:cNvPr id="22" name="Text 19"/>
-          <p:cNvSpPr txBox="1"/>
-          <p:nvPr/>
-        </p:nvSpPr>
-        <p:spPr>
-          <a:xfrm>
-            <a:off x="6867144" y="1508760"/>
-            <a:ext cx="1783080" cy="457200"/>
-          </a:xfrm>
-          <a:prstGeom prst="rect">
-            <a:avLst/>
-          </a:prstGeom>
-          <a:noFill/>
-          <a:ln/>
-        </p:spPr>
-        <p:txBody>
-          <a:bodyPr wrap="square" lIns="0" tIns="0" rIns="0" bIns="0" rtlCol="0" anchor="t"/>
-          <a:lstStyle/>
-          <a:p>
-            <a:pPr algn="l" indent="0" marL="0">
-              <a:lnSpc>
-                <a:spcPct val="115000"/>
-              </a:lnSpc>
-              <a:buNone/>
-            </a:pPr>
-            <a:r>
-              <a:rPr lang="en-US" sz="1200" b="1" dirty="0">
-                <a:solidFill>
-                  <a:srgbClr val="1A1A1A"/>
-                </a:solidFill>
-                <a:latin typeface="Meiryo" pitchFamily="34" charset="0"/>
-                <a:ea typeface="Meiryo" pitchFamily="34" charset="-122"/>
-                <a:cs typeface="Meiryo" pitchFamily="34" charset="-120"/>
-              </a:rPr>
-              <a:t>公庫1,000万円＋VC1.15億円</a:t>
-            </a:r>
-            <a:endParaRPr lang="en-US" sz="1200" dirty="0"/>
-          </a:p>
-        </p:txBody>
-      </p:sp>
-      <p:sp>
-        <p:nvSpPr>
-          <p:cNvPr id="23" name="Text 20"/>
-          <p:cNvSpPr txBox="1"/>
-          <p:nvPr/>
-        </p:nvSpPr>
-        <p:spPr>
-          <a:xfrm>
-            <a:off x="6867144" y="1993392"/>
-            <a:ext cx="1783080" cy="411480"/>
-          </a:xfrm>
-          <a:prstGeom prst="rect">
-            <a:avLst/>
-          </a:prstGeom>
-          <a:noFill/>
-          <a:ln/>
-        </p:spPr>
-        <p:txBody>
-          <a:bodyPr wrap="square" lIns="0" tIns="0" rIns="0" bIns="0" rtlCol="0" anchor="t"/>
-          <a:lstStyle/>
-          <a:p>
-            <a:pPr algn="l" indent="0" marL="0">
-              <a:lnSpc>
-                <a:spcPct val="115000"/>
-              </a:lnSpc>
-              <a:buNone/>
-            </a:pPr>
-            <a:r>
-              <a:rPr lang="en-US" sz="900" dirty="0">
-                <a:solidFill>
-                  <a:srgbClr val="1A1A1A"/>
-                </a:solidFill>
-                <a:latin typeface="Meiryo" pitchFamily="34" charset="0"/>
-                <a:ea typeface="Meiryo" pitchFamily="34" charset="-122"/>
-                <a:cs typeface="Meiryo" pitchFamily="34" charset="-120"/>
-              </a:rPr>
-              <a:t>実証の結果を持って調達</a:t>
-            </a:r>
-            <a:endParaRPr lang="en-US" sz="900" dirty="0"/>
-          </a:p>
-        </p:txBody>
-      </p:sp>
-      <p:sp>
-        <p:nvSpPr>
-          <p:cNvPr id="24" name="Text 21"/>
-          <p:cNvSpPr txBox="1"/>
-          <p:nvPr/>
-        </p:nvSpPr>
-        <p:spPr>
-          <a:xfrm>
-            <a:off x="365760" y="2697480"/>
-            <a:ext cx="3657600" cy="237744"/>
-          </a:xfrm>
-          <a:prstGeom prst="rect">
-            <a:avLst/>
-          </a:prstGeom>
-          <a:noFill/>
-          <a:ln/>
-        </p:spPr>
-        <p:txBody>
-          <a:bodyPr wrap="square" lIns="0" tIns="0" rIns="0" bIns="0" rtlCol="0" anchor="t"/>
-          <a:lstStyle/>
-          <a:p>
-            <a:pPr algn="l" indent="0" marL="0">
-              <a:lnSpc>
-                <a:spcPct val="115000"/>
-              </a:lnSpc>
-              <a:buNone/>
-            </a:pPr>
-            <a:r>
-              <a:rPr lang="en-US" sz="1050" b="1" dirty="0">
-                <a:solidFill>
-                  <a:srgbClr val="1A1A1A"/>
-                </a:solidFill>
-                <a:latin typeface="Meiryo" pitchFamily="34" charset="0"/>
-                <a:ea typeface="Meiryo" pitchFamily="34" charset="-122"/>
-                <a:cs typeface="Meiryo" pitchFamily="34" charset="-120"/>
-              </a:rPr>
-              <a:t>使い道（万円）</a:t>
-            </a:r>
-            <a:endParaRPr lang="en-US" sz="1050" dirty="0"/>
-          </a:p>
-        </p:txBody>
-      </p:sp>
-      <p:sp>
-        <p:nvSpPr>
-          <p:cNvPr id="25" name="Text 22"/>
-          <p:cNvSpPr txBox="1"/>
-          <p:nvPr/>
-        </p:nvSpPr>
-        <p:spPr>
-          <a:xfrm>
-            <a:off x="365760" y="2990088"/>
-            <a:ext cx="1600200" cy="256032"/>
-          </a:xfrm>
-          <a:prstGeom prst="rect">
-            <a:avLst/>
-          </a:prstGeom>
-          <a:noFill/>
-          <a:ln/>
-        </p:spPr>
-        <p:txBody>
-          <a:bodyPr wrap="square" lIns="0" tIns="0" rIns="0" bIns="0" rtlCol="0" anchor="ctr"/>
-          <a:lstStyle/>
-          <a:p>
-            <a:pPr algn="l" indent="0" marL="0">
-              <a:lnSpc>
-                <a:spcPct val="115000"/>
-              </a:lnSpc>
-              <a:buNone/>
-            </a:pPr>
-            <a:r>
-              <a:rPr lang="en-US" sz="950" dirty="0">
-                <a:solidFill>
-                  <a:srgbClr val="1A1A1A"/>
-                </a:solidFill>
-                <a:latin typeface="Meiryo" pitchFamily="34" charset="0"/>
-                <a:ea typeface="Meiryo" pitchFamily="34" charset="-122"/>
-                <a:cs typeface="Meiryo" pitchFamily="34" charset="-120"/>
-              </a:rPr>
-              <a:t>試作品の開発</a:t>
-            </a:r>
-            <a:endParaRPr lang="en-US" sz="950" dirty="0"/>
-          </a:p>
-        </p:txBody>
-      </p:sp>
-      <p:sp>
-        <p:nvSpPr>
-          <p:cNvPr id="26" name="Shape 23"/>
-          <p:cNvSpPr/>
-          <p:nvPr/>
-        </p:nvSpPr>
-        <p:spPr>
-          <a:xfrm>
-            <a:off x="2011680" y="3026664"/>
-            <a:ext cx="2194560" cy="182880"/>
+            <a:off x="5596128" y="3502152"/>
+            <a:ext cx="777240" cy="292608"/>
           </a:xfrm>
           <a:prstGeom prst="rect">
             <a:avLst/>
@@ -9982,14 +12149,14 @@
       </p:sp>
       <p:sp>
         <p:nvSpPr>
-          <p:cNvPr id="27" name="Text 24"/>
-          <p:cNvSpPr txBox="1"/>
-          <p:nvPr/>
-        </p:nvSpPr>
-        <p:spPr>
-          <a:xfrm>
-            <a:off x="4251960" y="2990088"/>
-            <a:ext cx="457200" cy="256032"/>
+          <p:cNvPr id="29" name="Text 25"/>
+          <p:cNvSpPr txBox="1"/>
+          <p:nvPr/>
+        </p:nvSpPr>
+        <p:spPr>
+          <a:xfrm>
+            <a:off x="5596128" y="3502152"/>
+            <a:ext cx="777240" cy="292608"/>
           </a:xfrm>
           <a:prstGeom prst="rect">
             <a:avLst/>
@@ -10001,6 +12168,48 @@
           <a:bodyPr wrap="square" lIns="0" tIns="0" rIns="0" bIns="0" rtlCol="0" anchor="ctr"/>
           <a:lstStyle/>
           <a:p>
+            <a:pPr algn="ctr" indent="0" marL="0">
+              <a:lnSpc>
+                <a:spcPct val="115000"/>
+              </a:lnSpc>
+              <a:buNone/>
+            </a:pPr>
+            <a:r>
+              <a:rPr lang="en-US" sz="900" b="1" dirty="0">
+                <a:solidFill>
+                  <a:srgbClr val="FFFFFF"/>
+                </a:solidFill>
+                <a:latin typeface="Meiryo" pitchFamily="34" charset="0"/>
+                <a:ea typeface="Meiryo" pitchFamily="34" charset="-122"/>
+                <a:cs typeface="Meiryo" pitchFamily="34" charset="-120"/>
+              </a:rPr>
+              <a:t>5未満</a:t>
+            </a:r>
+            <a:endParaRPr lang="en-US" sz="900" dirty="0"/>
+          </a:p>
+        </p:txBody>
+      </p:sp>
+      <p:sp>
+        <p:nvSpPr>
+          <p:cNvPr id="30" name="Text 26"/>
+          <p:cNvSpPr txBox="1"/>
+          <p:nvPr/>
+        </p:nvSpPr>
+        <p:spPr>
+          <a:xfrm>
+            <a:off x="6446520" y="3502152"/>
+            <a:ext cx="2240280" cy="292608"/>
+          </a:xfrm>
+          <a:prstGeom prst="rect">
+            <a:avLst/>
+          </a:prstGeom>
+          <a:noFill/>
+          <a:ln/>
+        </p:spPr>
+        <p:txBody>
+          <a:bodyPr wrap="square" lIns="0" tIns="0" rIns="0" bIns="0" rtlCol="0" anchor="ctr"/>
+          <a:lstStyle/>
+          <a:p>
             <a:pPr algn="l" indent="0" marL="0">
               <a:lnSpc>
                 <a:spcPct val="115000"/>
@@ -10008,7 +12217,7 @@
               <a:buNone/>
             </a:pPr>
             <a:r>
-              <a:rPr lang="en-US" sz="1000" b="1" dirty="0">
+              <a:rPr lang="en-US" sz="950" dirty="0">
                 <a:solidFill>
                   <a:srgbClr val="1A1A1A"/>
                 </a:solidFill>
@@ -10016,31 +12225,31 @@
                 <a:ea typeface="Meiryo" pitchFamily="34" charset="-122"/>
                 <a:cs typeface="Meiryo" pitchFamily="34" charset="-120"/>
               </a:rPr>
-              <a:t>250</a:t>
-            </a:r>
-            <a:endParaRPr lang="en-US" sz="1000" dirty="0"/>
-          </a:p>
-        </p:txBody>
-      </p:sp>
-      <p:sp>
-        <p:nvSpPr>
-          <p:cNvPr id="28" name="Text 25"/>
-          <p:cNvSpPr txBox="1"/>
-          <p:nvPr/>
-        </p:nvSpPr>
-        <p:spPr>
-          <a:xfrm>
-            <a:off x="365760" y="3291840"/>
-            <a:ext cx="1600200" cy="256032"/>
-          </a:xfrm>
-          <a:prstGeom prst="rect">
-            <a:avLst/>
-          </a:prstGeom>
-          <a:noFill/>
-          <a:ln/>
-        </p:spPr>
-        <p:txBody>
-          <a:bodyPr wrap="square" lIns="0" tIns="0" rIns="0" bIns="0" rtlCol="0" anchor="ctr"/>
+              <a:t>→ 採用を止める</a:t>
+            </a:r>
+            <a:endParaRPr lang="en-US" sz="950" dirty="0"/>
+          </a:p>
+        </p:txBody>
+      </p:sp>
+      <p:sp>
+        <p:nvSpPr>
+          <p:cNvPr id="31" name="Text 27"/>
+          <p:cNvSpPr txBox="1"/>
+          <p:nvPr/>
+        </p:nvSpPr>
+        <p:spPr>
+          <a:xfrm>
+            <a:off x="365760" y="4480560"/>
+            <a:ext cx="8412480" cy="219456"/>
+          </a:xfrm>
+          <a:prstGeom prst="rect">
+            <a:avLst/>
+          </a:prstGeom>
+          <a:noFill/>
+          <a:ln/>
+        </p:spPr>
+        <p:txBody>
+          <a:bodyPr wrap="square" lIns="0" tIns="0" rIns="0" bIns="0" rtlCol="0" anchor="t"/>
           <a:lstStyle/>
           <a:p>
             <a:pPr algn="l" indent="0" marL="0">
@@ -10050,577 +12259,17 @@
               <a:buNone/>
             </a:pPr>
             <a:r>
-              <a:rPr lang="en-US" sz="950" dirty="0">
-                <a:solidFill>
-                  <a:srgbClr val="1A1A1A"/>
-                </a:solidFill>
-                <a:latin typeface="Meiryo" pitchFamily="34" charset="0"/>
-                <a:ea typeface="Meiryo" pitchFamily="34" charset="-122"/>
-                <a:cs typeface="Meiryo" pitchFamily="34" charset="-120"/>
-              </a:rPr>
-              <a:t>実証（1拠点・3か月）</a:t>
-            </a:r>
-            <a:endParaRPr lang="en-US" sz="950" dirty="0"/>
-          </a:p>
-        </p:txBody>
-      </p:sp>
-      <p:sp>
-        <p:nvSpPr>
-          <p:cNvPr id="29" name="Shape 26"/>
-          <p:cNvSpPr/>
-          <p:nvPr/>
-        </p:nvSpPr>
-        <p:spPr>
-          <a:xfrm>
-            <a:off x="2011680" y="3328416"/>
-            <a:ext cx="877824" cy="182880"/>
-          </a:xfrm>
-          <a:prstGeom prst="rect">
-            <a:avLst/>
-          </a:prstGeom>
-          <a:solidFill>
-            <a:srgbClr val="1A1A1A"/>
-          </a:solidFill>
-          <a:ln/>
-        </p:spPr>
-      </p:sp>
-      <p:sp>
-        <p:nvSpPr>
-          <p:cNvPr id="30" name="Text 27"/>
-          <p:cNvSpPr txBox="1"/>
-          <p:nvPr/>
-        </p:nvSpPr>
-        <p:spPr>
-          <a:xfrm>
-            <a:off x="2935224" y="3291840"/>
-            <a:ext cx="457200" cy="256032"/>
-          </a:xfrm>
-          <a:prstGeom prst="rect">
-            <a:avLst/>
-          </a:prstGeom>
-          <a:noFill/>
-          <a:ln/>
-        </p:spPr>
-        <p:txBody>
-          <a:bodyPr wrap="square" lIns="0" tIns="0" rIns="0" bIns="0" rtlCol="0" anchor="ctr"/>
-          <a:lstStyle/>
-          <a:p>
-            <a:pPr algn="l" indent="0" marL="0">
-              <a:lnSpc>
-                <a:spcPct val="115000"/>
-              </a:lnSpc>
-              <a:buNone/>
-            </a:pPr>
-            <a:r>
-              <a:rPr lang="en-US" sz="1000" b="1" dirty="0">
-                <a:solidFill>
-                  <a:srgbClr val="1A1A1A"/>
-                </a:solidFill>
-                <a:latin typeface="Meiryo" pitchFamily="34" charset="0"/>
-                <a:ea typeface="Meiryo" pitchFamily="34" charset="-122"/>
-                <a:cs typeface="Meiryo" pitchFamily="34" charset="-120"/>
-              </a:rPr>
-              <a:t>100</a:t>
-            </a:r>
-            <a:endParaRPr lang="en-US" sz="1000" dirty="0"/>
-          </a:p>
-        </p:txBody>
-      </p:sp>
-      <p:sp>
-        <p:nvSpPr>
-          <p:cNvPr id="31" name="Text 28"/>
-          <p:cNvSpPr txBox="1"/>
-          <p:nvPr/>
-        </p:nvSpPr>
-        <p:spPr>
-          <a:xfrm>
-            <a:off x="365760" y="3593592"/>
-            <a:ext cx="1600200" cy="256032"/>
-          </a:xfrm>
-          <a:prstGeom prst="rect">
-            <a:avLst/>
-          </a:prstGeom>
-          <a:noFill/>
-          <a:ln/>
-        </p:spPr>
-        <p:txBody>
-          <a:bodyPr wrap="square" lIns="0" tIns="0" rIns="0" bIns="0" rtlCol="0" anchor="ctr"/>
-          <a:lstStyle/>
-          <a:p>
-            <a:pPr algn="l" indent="0" marL="0">
-              <a:lnSpc>
-                <a:spcPct val="115000"/>
-              </a:lnSpc>
-              <a:buNone/>
-            </a:pPr>
-            <a:r>
-              <a:rPr lang="en-US" sz="950" dirty="0">
-                <a:solidFill>
-                  <a:srgbClr val="1A1A1A"/>
-                </a:solidFill>
-                <a:latin typeface="Meiryo" pitchFamily="34" charset="0"/>
-                <a:ea typeface="Meiryo" pitchFamily="34" charset="-122"/>
-                <a:cs typeface="Meiryo" pitchFamily="34" charset="-120"/>
-              </a:rPr>
-              <a:t>端末・機材</a:t>
-            </a:r>
-            <a:endParaRPr lang="en-US" sz="950" dirty="0"/>
-          </a:p>
-        </p:txBody>
-      </p:sp>
-      <p:sp>
-        <p:nvSpPr>
-          <p:cNvPr id="32" name="Shape 29"/>
-          <p:cNvSpPr/>
-          <p:nvPr/>
-        </p:nvSpPr>
-        <p:spPr>
-          <a:xfrm>
-            <a:off x="2011680" y="3630168"/>
-            <a:ext cx="702259" cy="182880"/>
-          </a:xfrm>
-          <a:prstGeom prst="rect">
-            <a:avLst/>
-          </a:prstGeom>
-          <a:solidFill>
-            <a:srgbClr val="1A1A1A"/>
-          </a:solidFill>
-          <a:ln/>
-        </p:spPr>
-      </p:sp>
-      <p:sp>
-        <p:nvSpPr>
-          <p:cNvPr id="33" name="Text 30"/>
-          <p:cNvSpPr txBox="1"/>
-          <p:nvPr/>
-        </p:nvSpPr>
-        <p:spPr>
-          <a:xfrm>
-            <a:off x="2759659" y="3593592"/>
-            <a:ext cx="457200" cy="256032"/>
-          </a:xfrm>
-          <a:prstGeom prst="rect">
-            <a:avLst/>
-          </a:prstGeom>
-          <a:noFill/>
-          <a:ln/>
-        </p:spPr>
-        <p:txBody>
-          <a:bodyPr wrap="square" lIns="0" tIns="0" rIns="0" bIns="0" rtlCol="0" anchor="ctr"/>
-          <a:lstStyle/>
-          <a:p>
-            <a:pPr algn="l" indent="0" marL="0">
-              <a:lnSpc>
-                <a:spcPct val="115000"/>
-              </a:lnSpc>
-              <a:buNone/>
-            </a:pPr>
-            <a:r>
-              <a:rPr lang="en-US" sz="1000" b="1" dirty="0">
-                <a:solidFill>
-                  <a:srgbClr val="1A1A1A"/>
-                </a:solidFill>
-                <a:latin typeface="Meiryo" pitchFamily="34" charset="0"/>
-                <a:ea typeface="Meiryo" pitchFamily="34" charset="-122"/>
-                <a:cs typeface="Meiryo" pitchFamily="34" charset="-120"/>
-              </a:rPr>
-              <a:t>80</a:t>
-            </a:r>
-            <a:endParaRPr lang="en-US" sz="1000" dirty="0"/>
-          </a:p>
-        </p:txBody>
-      </p:sp>
-      <p:sp>
-        <p:nvSpPr>
-          <p:cNvPr id="34" name="Text 31"/>
-          <p:cNvSpPr txBox="1"/>
-          <p:nvPr/>
-        </p:nvSpPr>
-        <p:spPr>
-          <a:xfrm>
-            <a:off x="365760" y="3895344"/>
-            <a:ext cx="1600200" cy="256032"/>
-          </a:xfrm>
-          <a:prstGeom prst="rect">
-            <a:avLst/>
-          </a:prstGeom>
-          <a:noFill/>
-          <a:ln/>
-        </p:spPr>
-        <p:txBody>
-          <a:bodyPr wrap="square" lIns="0" tIns="0" rIns="0" bIns="0" rtlCol="0" anchor="ctr"/>
-          <a:lstStyle/>
-          <a:p>
-            <a:pPr algn="l" indent="0" marL="0">
-              <a:lnSpc>
-                <a:spcPct val="115000"/>
-              </a:lnSpc>
-              <a:buNone/>
-            </a:pPr>
-            <a:r>
-              <a:rPr lang="en-US" sz="950" dirty="0">
-                <a:solidFill>
-                  <a:srgbClr val="1A1A1A"/>
-                </a:solidFill>
-                <a:latin typeface="Meiryo" pitchFamily="34" charset="0"/>
-                <a:ea typeface="Meiryo" pitchFamily="34" charset="-122"/>
-                <a:cs typeface="Meiryo" pitchFamily="34" charset="-120"/>
-              </a:rPr>
-              <a:t>設立・契約</a:t>
-            </a:r>
-            <a:endParaRPr lang="en-US" sz="950" dirty="0"/>
-          </a:p>
-        </p:txBody>
-      </p:sp>
-      <p:sp>
-        <p:nvSpPr>
-          <p:cNvPr id="35" name="Shape 32"/>
-          <p:cNvSpPr/>
-          <p:nvPr/>
-        </p:nvSpPr>
-        <p:spPr>
-          <a:xfrm>
-            <a:off x="2011680" y="3931920"/>
-            <a:ext cx="351130" cy="182880"/>
-          </a:xfrm>
-          <a:prstGeom prst="rect">
-            <a:avLst/>
-          </a:prstGeom>
-          <a:solidFill>
-            <a:srgbClr val="1A1A1A"/>
-          </a:solidFill>
-          <a:ln/>
-        </p:spPr>
-      </p:sp>
-      <p:sp>
-        <p:nvSpPr>
-          <p:cNvPr id="36" name="Text 33"/>
-          <p:cNvSpPr txBox="1"/>
-          <p:nvPr/>
-        </p:nvSpPr>
-        <p:spPr>
-          <a:xfrm>
-            <a:off x="2408530" y="3895344"/>
-            <a:ext cx="457200" cy="256032"/>
-          </a:xfrm>
-          <a:prstGeom prst="rect">
-            <a:avLst/>
-          </a:prstGeom>
-          <a:noFill/>
-          <a:ln/>
-        </p:spPr>
-        <p:txBody>
-          <a:bodyPr wrap="square" lIns="0" tIns="0" rIns="0" bIns="0" rtlCol="0" anchor="ctr"/>
-          <a:lstStyle/>
-          <a:p>
-            <a:pPr algn="l" indent="0" marL="0">
-              <a:lnSpc>
-                <a:spcPct val="115000"/>
-              </a:lnSpc>
-              <a:buNone/>
-            </a:pPr>
-            <a:r>
-              <a:rPr lang="en-US" sz="1000" b="1" dirty="0">
-                <a:solidFill>
-                  <a:srgbClr val="1A1A1A"/>
-                </a:solidFill>
-                <a:latin typeface="Meiryo" pitchFamily="34" charset="0"/>
-                <a:ea typeface="Meiryo" pitchFamily="34" charset="-122"/>
-                <a:cs typeface="Meiryo" pitchFamily="34" charset="-120"/>
-              </a:rPr>
-              <a:t>40</a:t>
-            </a:r>
-            <a:endParaRPr lang="en-US" sz="1000" dirty="0"/>
-          </a:p>
-        </p:txBody>
-      </p:sp>
-      <p:sp>
-        <p:nvSpPr>
-          <p:cNvPr id="37" name="Text 34"/>
-          <p:cNvSpPr txBox="1"/>
-          <p:nvPr/>
-        </p:nvSpPr>
-        <p:spPr>
-          <a:xfrm>
-            <a:off x="365760" y="4197096"/>
-            <a:ext cx="1600200" cy="256032"/>
-          </a:xfrm>
-          <a:prstGeom prst="rect">
-            <a:avLst/>
-          </a:prstGeom>
-          <a:noFill/>
-          <a:ln/>
-        </p:spPr>
-        <p:txBody>
-          <a:bodyPr wrap="square" lIns="0" tIns="0" rIns="0" bIns="0" rtlCol="0" anchor="ctr"/>
-          <a:lstStyle/>
-          <a:p>
-            <a:pPr algn="l" indent="0" marL="0">
-              <a:lnSpc>
-                <a:spcPct val="115000"/>
-              </a:lnSpc>
-              <a:buNone/>
-            </a:pPr>
-            <a:r>
-              <a:rPr lang="en-US" sz="950" dirty="0">
-                <a:solidFill>
-                  <a:srgbClr val="1A1A1A"/>
-                </a:solidFill>
-                <a:latin typeface="Meiryo" pitchFamily="34" charset="0"/>
-                <a:ea typeface="Meiryo" pitchFamily="34" charset="-122"/>
-                <a:cs typeface="Meiryo" pitchFamily="34" charset="-120"/>
-              </a:rPr>
-              <a:t>予備</a:t>
-            </a:r>
-            <a:endParaRPr lang="en-US" sz="950" dirty="0"/>
-          </a:p>
-        </p:txBody>
-      </p:sp>
-      <p:sp>
-        <p:nvSpPr>
-          <p:cNvPr id="38" name="Shape 35"/>
-          <p:cNvSpPr/>
-          <p:nvPr/>
-        </p:nvSpPr>
-        <p:spPr>
-          <a:xfrm>
-            <a:off x="2011680" y="4233672"/>
-            <a:ext cx="263347" cy="182880"/>
-          </a:xfrm>
-          <a:prstGeom prst="rect">
-            <a:avLst/>
-          </a:prstGeom>
-          <a:solidFill>
-            <a:srgbClr val="1A1A1A"/>
-          </a:solidFill>
-          <a:ln/>
-        </p:spPr>
-      </p:sp>
-      <p:sp>
-        <p:nvSpPr>
-          <p:cNvPr id="39" name="Text 36"/>
-          <p:cNvSpPr txBox="1"/>
-          <p:nvPr/>
-        </p:nvSpPr>
-        <p:spPr>
-          <a:xfrm>
-            <a:off x="2320747" y="4197096"/>
-            <a:ext cx="457200" cy="256032"/>
-          </a:xfrm>
-          <a:prstGeom prst="rect">
-            <a:avLst/>
-          </a:prstGeom>
-          <a:noFill/>
-          <a:ln/>
-        </p:spPr>
-        <p:txBody>
-          <a:bodyPr wrap="square" lIns="0" tIns="0" rIns="0" bIns="0" rtlCol="0" anchor="ctr"/>
-          <a:lstStyle/>
-          <a:p>
-            <a:pPr algn="l" indent="0" marL="0">
-              <a:lnSpc>
-                <a:spcPct val="115000"/>
-              </a:lnSpc>
-              <a:buNone/>
-            </a:pPr>
-            <a:r>
-              <a:rPr lang="en-US" sz="1000" b="1" dirty="0">
-                <a:solidFill>
-                  <a:srgbClr val="1A1A1A"/>
-                </a:solidFill>
-                <a:latin typeface="Meiryo" pitchFamily="34" charset="0"/>
-                <a:ea typeface="Meiryo" pitchFamily="34" charset="-122"/>
-                <a:cs typeface="Meiryo" pitchFamily="34" charset="-120"/>
-              </a:rPr>
-              <a:t>30</a:t>
-            </a:r>
-            <a:endParaRPr lang="en-US" sz="1000" dirty="0"/>
-          </a:p>
-        </p:txBody>
-      </p:sp>
-      <p:sp>
-        <p:nvSpPr>
-          <p:cNvPr id="40" name="Shape 37"/>
-          <p:cNvSpPr/>
-          <p:nvPr/>
-        </p:nvSpPr>
-        <p:spPr>
-          <a:xfrm>
-            <a:off x="4572000" y="2697480"/>
-            <a:ext cx="4206240" cy="1783080"/>
-          </a:xfrm>
-          <a:prstGeom prst="rect">
-            <a:avLst/>
-          </a:prstGeom>
-          <a:solidFill>
-            <a:srgbClr val="FFFFFF"/>
-          </a:solidFill>
-          <a:ln w="25400">
-            <a:solidFill>
-              <a:srgbClr val="B8692E"/>
-            </a:solidFill>
-            <a:prstDash val="solid"/>
-          </a:ln>
-        </p:spPr>
-      </p:sp>
-      <p:pic>
-        <p:nvPicPr>
-          <p:cNvPr id="41" name="Image 0" descr="preencoded.png">    </p:cNvPr>
-          <p:cNvPicPr>
-            <a:picLocks noChangeAspect="1"/>
-          </p:cNvPicPr>
-          <p:nvPr/>
-        </p:nvPicPr>
-        <p:blipFill>
-          <a:blip r:embed="rId1"/>
-          <a:stretch>
-            <a:fillRect/>
-          </a:stretch>
-        </p:blipFill>
-        <p:spPr>
-          <a:xfrm>
-            <a:off x="4709160" y="2926080"/>
-            <a:ext cx="1066800" cy="1280160"/>
-          </a:xfrm>
-          <a:prstGeom prst="rect">
-            <a:avLst/>
-          </a:prstGeom>
-        </p:spPr>
-      </p:pic>
-      <p:sp>
-        <p:nvSpPr>
-          <p:cNvPr id="42" name="Text 38"/>
-          <p:cNvSpPr txBox="1"/>
-          <p:nvPr/>
-        </p:nvSpPr>
-        <p:spPr>
-          <a:xfrm>
-            <a:off x="5852160" y="2788920"/>
-            <a:ext cx="2834640" cy="1600200"/>
-          </a:xfrm>
-          <a:prstGeom prst="rect">
-            <a:avLst/>
-          </a:prstGeom>
-          <a:noFill/>
-          <a:ln/>
-        </p:spPr>
-        <p:txBody>
-          <a:bodyPr wrap="square" lIns="0" tIns="0" rIns="0" bIns="0" rtlCol="0" anchor="ctr"/>
-          <a:lstStyle/>
-          <a:p>
-            <a:pPr algn="l" indent="0" marL="0">
-              <a:lnSpc>
-                <a:spcPct val="115000"/>
-              </a:lnSpc>
-              <a:spcAft>
-                <a:spcPts val="200"/>
-              </a:spcAft>
-              <a:buNone/>
-            </a:pPr>
-            <a:r>
-              <a:rPr lang="en-US" sz="1100" b="1" dirty="0">
-                <a:solidFill>
-                  <a:srgbClr val="B8692E"/>
-                </a:solidFill>
-                <a:latin typeface="Meiryo" pitchFamily="34" charset="0"/>
-                <a:ea typeface="Meiryo" pitchFamily="34" charset="-122"/>
-                <a:cs typeface="Meiryo" pitchFamily="34" charset="-120"/>
-              </a:rPr>
-              <a:t>出資者へのお返し（提案）</a:t>
-            </a:r>
-            <a:endParaRPr lang="en-US" sz="1000" dirty="0"/>
-          </a:p>
-          <a:p>
-            <a:pPr algn="l" indent="0" marL="0">
-              <a:lnSpc>
-                <a:spcPct val="115000"/>
-              </a:lnSpc>
-              <a:spcAft>
-                <a:spcPts val="200"/>
-              </a:spcAft>
-              <a:buNone/>
-            </a:pPr>
-            <a:r>
-              <a:rPr lang="en-US" sz="1400" b="1" dirty="0">
-                <a:solidFill>
-                  <a:srgbClr val="1A1A1A"/>
-                </a:solidFill>
-                <a:latin typeface="Meiryo" pitchFamily="34" charset="0"/>
-                <a:ea typeface="Meiryo" pitchFamily="34" charset="-122"/>
-                <a:cs typeface="Meiryo" pitchFamily="34" charset="-120"/>
-              </a:rPr>
-              <a:t>500万円で株式の10%</a:t>
-            </a:r>
-            <a:endParaRPr lang="en-US" sz="1000" dirty="0"/>
-          </a:p>
-          <a:p>
-            <a:pPr algn="l" indent="0" marL="0">
-              <a:lnSpc>
-                <a:spcPct val="115000"/>
-              </a:lnSpc>
-              <a:spcAft>
-                <a:spcPts val="200"/>
-              </a:spcAft>
-              <a:buNone/>
-            </a:pPr>
-            <a:r>
-              <a:rPr lang="en-US" sz="900" dirty="0">
-                <a:solidFill>
-                  <a:srgbClr val="1A1A1A"/>
-                </a:solidFill>
-                <a:latin typeface="Meiryo" pitchFamily="34" charset="0"/>
-                <a:ea typeface="Meiryo" pitchFamily="34" charset="-122"/>
-                <a:cs typeface="Meiryo" pitchFamily="34" charset="-120"/>
-              </a:rPr>
-              <a:t>（出資前の会社の値段 4,500万円）</a:t>
-            </a:r>
-            <a:endParaRPr lang="en-US" sz="1000" dirty="0"/>
-          </a:p>
-          <a:p>
-            <a:pPr algn="l" indent="0" marL="0">
-              <a:lnSpc>
-                <a:spcPct val="115000"/>
-              </a:lnSpc>
-              <a:spcAft>
-                <a:spcPts val="200"/>
-              </a:spcAft>
-              <a:buNone/>
-            </a:pPr>
-            <a:r>
-              <a:rPr lang="en-US" sz="950" dirty="0">
-                <a:solidFill>
-                  <a:srgbClr val="1A1A1A"/>
-                </a:solidFill>
-                <a:latin typeface="Meiryo" pitchFamily="34" charset="0"/>
-                <a:ea typeface="Meiryo" pitchFamily="34" charset="-122"/>
-                <a:cs typeface="Meiryo" pitchFamily="34" charset="-120"/>
-              </a:rPr>
-              <a:t>出口：上場、または事業会社への売却</a:t>
-            </a:r>
-            <a:endParaRPr lang="en-US" sz="1000" dirty="0"/>
-          </a:p>
-          <a:p>
-            <a:pPr algn="l" indent="0" marL="0">
-              <a:lnSpc>
-                <a:spcPct val="115000"/>
-              </a:lnSpc>
-              <a:spcAft>
-                <a:spcPts val="200"/>
-              </a:spcAft>
-              <a:buNone/>
-            </a:pPr>
-            <a:r>
-              <a:rPr lang="en-US" sz="950" dirty="0">
-                <a:solidFill>
-                  <a:srgbClr val="1A1A1A"/>
-                </a:solidFill>
-                <a:latin typeface="Meiryo" pitchFamily="34" charset="0"/>
-                <a:ea typeface="Meiryo" pitchFamily="34" charset="-122"/>
-                <a:cs typeface="Meiryo" pitchFamily="34" charset="-120"/>
-              </a:rPr>
-              <a:t>お願い：実証先の電気工事会社のご紹介も</a:t>
-            </a:r>
-            <a:endParaRPr lang="en-US" sz="1000" dirty="0"/>
+              <a:rPr lang="en-US" sz="800" dirty="0">
+                <a:solidFill>
+                  <a:srgbClr val="8C8C8C"/>
+                </a:solidFill>
+                <a:latin typeface="Meiryo" pitchFamily="34" charset="0"/>
+                <a:ea typeface="Meiryo" pitchFamily="34" charset="-122"/>
+                <a:cs typeface="Meiryo" pitchFamily="34" charset="-120"/>
+              </a:rPr>
+              <a:t>左の表：新しい拠点が計画の何割だったら、何年目に黒字になるか（最低現金は百万円）。この計画は出資1.15億円が前提</a:t>
+            </a:r>
+            <a:endParaRPr lang="en-US" sz="800" dirty="0"/>
           </a:p>
         </p:txBody>
       </p:sp>
@@ -10733,7 +12382,7 @@
                 <a:ea typeface="Meiryo" pitchFamily="34" charset="-122"/>
                 <a:cs typeface="Meiryo" pitchFamily="34" charset="-120"/>
               </a:rPr>
-              <a:t>1枚で言うと ─ 上は記録とサービス、下はお金</a:t>
+              <a:t>500万円で、6か月以内に最初の1拠点を動かす</a:t>
             </a:r>
             <a:endParaRPr lang="en-US" sz="2000" dirty="0"/>
           </a:p>
@@ -10775,7 +12424,7 @@
                 <a:ea typeface="Meiryo" pitchFamily="34" charset="-122"/>
                 <a:cs typeface="Meiryo" pitchFamily="34" charset="-120"/>
               </a:rPr>
-              <a:t>記録が貯まるほど真似されにくく、お客様が増えるほど黒字が厚くなる</a:t>
+              <a:t>創業者の給料はゼロ。すべて試作品と実証に使う</a:t>
             </a:r>
             <a:endParaRPr lang="en-US" sz="1200" dirty="0"/>
           </a:p>
@@ -10789,189 +12438,8 @@
         </p:nvSpPr>
         <p:spPr>
           <a:xfrm>
-            <a:off x="365760" y="1371600"/>
-            <a:ext cx="1920240" cy="2926080"/>
-          </a:xfrm>
-          <a:prstGeom prst="rect">
-            <a:avLst/>
-          </a:prstGeom>
-          <a:solidFill>
-            <a:srgbClr val="FFFFFF"/>
-          </a:solidFill>
-          <a:ln w="19050">
-            <a:solidFill>
-              <a:srgbClr val="1A1A1A"/>
-            </a:solidFill>
-            <a:prstDash val="solid"/>
-          </a:ln>
-        </p:spPr>
-      </p:sp>
-      <p:pic>
-        <p:nvPicPr>
-          <p:cNvPr id="6" name="Image 0" descr="preencoded.png">    </p:cNvPr>
-          <p:cNvPicPr>
-            <a:picLocks noChangeAspect="1"/>
-          </p:cNvPicPr>
-          <p:nvPr/>
-        </p:nvPicPr>
-        <p:blipFill>
-          <a:blip r:embed="rId1"/>
-          <a:stretch>
-            <a:fillRect/>
-          </a:stretch>
-        </p:blipFill>
-        <p:spPr>
-          <a:xfrm>
-            <a:off x="822960" y="1508760"/>
-            <a:ext cx="1005840" cy="1005840"/>
-          </a:xfrm>
-          <a:prstGeom prst="rect">
-            <a:avLst/>
-          </a:prstGeom>
-        </p:spPr>
-      </p:pic>
-      <p:sp>
-        <p:nvSpPr>
-          <p:cNvPr id="7" name="Text 3"/>
-          <p:cNvSpPr txBox="1"/>
-          <p:nvPr/>
-        </p:nvSpPr>
-        <p:spPr>
-          <a:xfrm>
-            <a:off x="365760" y="2651760"/>
-            <a:ext cx="1920240" cy="256032"/>
-          </a:xfrm>
-          <a:prstGeom prst="rect">
-            <a:avLst/>
-          </a:prstGeom>
-          <a:noFill/>
-          <a:ln/>
-        </p:spPr>
-        <p:txBody>
-          <a:bodyPr wrap="square" lIns="0" tIns="0" rIns="0" bIns="0" rtlCol="0" anchor="t"/>
-          <a:lstStyle/>
-          <a:p>
-            <a:pPr algn="ctr" indent="0" marL="0">
-              <a:lnSpc>
-                <a:spcPct val="115000"/>
-              </a:lnSpc>
-              <a:buNone/>
-            </a:pPr>
-            <a:r>
-              <a:rPr lang="en-US" sz="1100" b="1" dirty="0">
-                <a:solidFill>
-                  <a:srgbClr val="1A1A1A"/>
-                </a:solidFill>
-                <a:latin typeface="Meiryo" pitchFamily="34" charset="0"/>
-                <a:ea typeface="Meiryo" pitchFamily="34" charset="-122"/>
-                <a:cs typeface="Meiryo" pitchFamily="34" charset="-120"/>
-              </a:rPr>
-              <a:t>電気工事会社（お客様）</a:t>
-            </a:r>
-            <a:endParaRPr lang="en-US" sz="1100" dirty="0"/>
-          </a:p>
-        </p:txBody>
-      </p:sp>
-      <p:pic>
-        <p:nvPicPr>
-          <p:cNvPr id="8" name="Image 1" descr="preencoded.png">    </p:cNvPr>
-          <p:cNvPicPr>
-            <a:picLocks noChangeAspect="1"/>
-          </p:cNvPicPr>
-          <p:nvPr/>
-        </p:nvPicPr>
-        <p:blipFill>
-          <a:blip r:embed="rId2"/>
-          <a:stretch>
-            <a:fillRect/>
-          </a:stretch>
-        </p:blipFill>
-        <p:spPr>
-          <a:xfrm>
-            <a:off x="502920" y="3017520"/>
-            <a:ext cx="723900" cy="868680"/>
-          </a:xfrm>
-          <a:prstGeom prst="rect">
-            <a:avLst/>
-          </a:prstGeom>
-        </p:spPr>
-      </p:pic>
-      <p:pic>
-        <p:nvPicPr>
-          <p:cNvPr id="9" name="Image 2" descr="preencoded.png">    </p:cNvPr>
-          <p:cNvPicPr>
-            <a:picLocks noChangeAspect="1"/>
-          </p:cNvPicPr>
-          <p:nvPr/>
-        </p:nvPicPr>
-        <p:blipFill>
-          <a:blip r:embed="rId3"/>
-          <a:stretch>
-            <a:fillRect/>
-          </a:stretch>
-        </p:blipFill>
-        <p:spPr>
-          <a:xfrm>
-            <a:off x="1280160" y="3017520"/>
-            <a:ext cx="723900" cy="868680"/>
-          </a:xfrm>
-          <a:prstGeom prst="rect">
-            <a:avLst/>
-          </a:prstGeom>
-        </p:spPr>
-      </p:pic>
-      <p:sp>
-        <p:nvSpPr>
-          <p:cNvPr id="10" name="Text 4"/>
-          <p:cNvSpPr txBox="1"/>
-          <p:nvPr/>
-        </p:nvSpPr>
-        <p:spPr>
-          <a:xfrm>
-            <a:off x="365760" y="3931920"/>
-            <a:ext cx="1920240" cy="228600"/>
-          </a:xfrm>
-          <a:prstGeom prst="rect">
-            <a:avLst/>
-          </a:prstGeom>
-          <a:noFill/>
-          <a:ln/>
-        </p:spPr>
-        <p:txBody>
-          <a:bodyPr wrap="square" lIns="0" tIns="0" rIns="0" bIns="0" rtlCol="0" anchor="t"/>
-          <a:lstStyle/>
-          <a:p>
-            <a:pPr algn="ctr" indent="0" marL="0">
-              <a:lnSpc>
-                <a:spcPct val="115000"/>
-              </a:lnSpc>
-              <a:buNone/>
-            </a:pPr>
-            <a:r>
-              <a:rPr lang="en-US" sz="850" dirty="0">
-                <a:solidFill>
-                  <a:srgbClr val="4D4D4D"/>
-                </a:solidFill>
-                <a:latin typeface="Meiryo" pitchFamily="34" charset="0"/>
-                <a:ea typeface="Meiryo" pitchFamily="34" charset="-122"/>
-                <a:cs typeface="Meiryo" pitchFamily="34" charset="-120"/>
-              </a:rPr>
-              <a:t>熟練者・若手・工事部長</a:t>
-            </a:r>
-            <a:endParaRPr lang="en-US" sz="850" dirty="0"/>
-          </a:p>
-        </p:txBody>
-      </p:sp>
-      <p:sp>
-        <p:nvSpPr>
-          <p:cNvPr id="11" name="Shape 5"/>
-          <p:cNvSpPr/>
-          <p:nvPr/>
-        </p:nvSpPr>
-        <p:spPr>
-          <a:xfrm>
-            <a:off x="3429000" y="1371600"/>
-            <a:ext cx="2240280" cy="2926080"/>
+            <a:off x="365760" y="1097280"/>
+            <a:ext cx="1965960" cy="1371600"/>
           </a:xfrm>
           <a:prstGeom prst="rect">
             <a:avLst/>
@@ -10984,14 +12452,14 @@
       </p:sp>
       <p:sp>
         <p:nvSpPr>
-          <p:cNvPr id="12" name="Text 6"/>
-          <p:cNvSpPr txBox="1"/>
-          <p:nvPr/>
-        </p:nvSpPr>
-        <p:spPr>
-          <a:xfrm>
-            <a:off x="3429000" y="1463040"/>
-            <a:ext cx="2240280" cy="274320"/>
+          <p:cNvPr id="6" name="Text 3"/>
+          <p:cNvSpPr txBox="1"/>
+          <p:nvPr/>
+        </p:nvSpPr>
+        <p:spPr>
+          <a:xfrm>
+            <a:off x="475488" y="1188720"/>
+            <a:ext cx="1737360" cy="274320"/>
           </a:xfrm>
           <a:prstGeom prst="rect">
             <a:avLst/>
@@ -11003,7 +12471,49 @@
           <a:bodyPr wrap="square" lIns="0" tIns="0" rIns="0" bIns="0" rtlCol="0" anchor="t"/>
           <a:lstStyle/>
           <a:p>
-            <a:pPr algn="ctr" indent="0" marL="0">
+            <a:pPr algn="l" indent="0" marL="0">
+              <a:lnSpc>
+                <a:spcPct val="115000"/>
+              </a:lnSpc>
+              <a:buNone/>
+            </a:pPr>
+            <a:r>
+              <a:rPr lang="en-US" sz="1100" b="1" dirty="0">
+                <a:solidFill>
+                  <a:srgbClr val="E3A774"/>
+                </a:solidFill>
+                <a:latin typeface="Meiryo" pitchFamily="34" charset="0"/>
+                <a:ea typeface="Meiryo" pitchFamily="34" charset="-122"/>
+                <a:cs typeface="Meiryo" pitchFamily="34" charset="-120"/>
+              </a:rPr>
+              <a:t>今日</a:t>
+            </a:r>
+            <a:endParaRPr lang="en-US" sz="1100" dirty="0"/>
+          </a:p>
+        </p:txBody>
+      </p:sp>
+      <p:sp>
+        <p:nvSpPr>
+          <p:cNvPr id="7" name="Text 4"/>
+          <p:cNvSpPr txBox="1"/>
+          <p:nvPr/>
+        </p:nvSpPr>
+        <p:spPr>
+          <a:xfrm>
+            <a:off x="475488" y="1508760"/>
+            <a:ext cx="1783080" cy="457200"/>
+          </a:xfrm>
+          <a:prstGeom prst="rect">
+            <a:avLst/>
+          </a:prstGeom>
+          <a:noFill/>
+          <a:ln/>
+        </p:spPr>
+        <p:txBody>
+          <a:bodyPr wrap="square" lIns="0" tIns="0" rIns="0" bIns="0" rtlCol="0" anchor="t"/>
+          <a:lstStyle/>
+          <a:p>
+            <a:pPr algn="l" indent="0" marL="0">
               <a:lnSpc>
                 <a:spcPct val="115000"/>
               </a:lnSpc>
@@ -11018,46 +12528,22 @@
                 <a:ea typeface="Meiryo" pitchFamily="34" charset="-122"/>
                 <a:cs typeface="Meiryo" pitchFamily="34" charset="-120"/>
               </a:rPr>
-              <a:t>カンツギ</a:t>
+              <a:t>500万円の出資</a:t>
             </a:r>
             <a:endParaRPr lang="en-US" sz="1200" dirty="0"/>
           </a:p>
         </p:txBody>
       </p:sp>
-      <p:pic>
-        <p:nvPicPr>
-          <p:cNvPr id="13" name="Image 3" descr="preencoded.png">    </p:cNvPr>
-          <p:cNvPicPr>
-            <a:picLocks noChangeAspect="1"/>
-          </p:cNvPicPr>
-          <p:nvPr/>
-        </p:nvPicPr>
-        <p:blipFill>
-          <a:blip r:embed="rId4"/>
-          <a:stretch>
-            <a:fillRect/>
-          </a:stretch>
-        </p:blipFill>
-        <p:spPr>
-          <a:xfrm>
-            <a:off x="4297680" y="1828800"/>
-            <a:ext cx="640080" cy="640080"/>
-          </a:xfrm>
-          <a:prstGeom prst="rect">
-            <a:avLst/>
-          </a:prstGeom>
-        </p:spPr>
-      </p:pic>
-      <p:sp>
-        <p:nvSpPr>
-          <p:cNvPr id="14" name="Text 7"/>
-          <p:cNvSpPr txBox="1"/>
-          <p:nvPr/>
-        </p:nvSpPr>
-        <p:spPr>
-          <a:xfrm>
-            <a:off x="3520440" y="2514600"/>
-            <a:ext cx="2057400" cy="777240"/>
+      <p:sp>
+        <p:nvSpPr>
+          <p:cNvPr id="8" name="Text 5"/>
+          <p:cNvSpPr txBox="1"/>
+          <p:nvPr/>
+        </p:nvSpPr>
+        <p:spPr>
+          <a:xfrm>
+            <a:off x="475488" y="1993392"/>
+            <a:ext cx="1783080" cy="411480"/>
           </a:xfrm>
           <a:prstGeom prst="rect">
             <a:avLst/>
@@ -11069,14 +12555,14 @@
           <a:bodyPr wrap="square" lIns="0" tIns="0" rIns="0" bIns="0" rtlCol="0" anchor="t"/>
           <a:lstStyle/>
           <a:p>
-            <a:pPr algn="ctr" indent="0" marL="0">
-              <a:lnSpc>
-                <a:spcPct val="115000"/>
-              </a:lnSpc>
-              <a:buNone/>
-            </a:pPr>
-            <a:r>
-              <a:rPr lang="en-US" sz="1000" b="1" dirty="0">
+            <a:pPr algn="l" indent="0" marL="0">
+              <a:lnSpc>
+                <a:spcPct val="115000"/>
+              </a:lnSpc>
+              <a:buNone/>
+            </a:pPr>
+            <a:r>
+              <a:rPr lang="en-US" sz="900" dirty="0">
                 <a:solidFill>
                   <a:srgbClr val="FFFFFF"/>
                 </a:solidFill>
@@ -11084,130 +12570,28 @@
                 <a:ea typeface="Meiryo" pitchFamily="34" charset="-122"/>
                 <a:cs typeface="Meiryo" pitchFamily="34" charset="-120"/>
               </a:rPr>
-              <a:t>AIが整理</a:t>
-            </a:r>
-            <a:endParaRPr lang="en-US" sz="1000" dirty="0"/>
-          </a:p>
-          <a:p>
-            <a:pPr algn="ctr" indent="0" marL="0">
-              <a:lnSpc>
-                <a:spcPct val="115000"/>
-              </a:lnSpc>
-              <a:buNone/>
-            </a:pPr>
-            <a:r>
-              <a:rPr lang="en-US" sz="1000" dirty="0">
-                <a:solidFill>
-                  <a:srgbClr val="FFFFFF"/>
-                </a:solidFill>
-                <a:latin typeface="Meiryo" pitchFamily="34" charset="0"/>
-                <a:ea typeface="Meiryo" pitchFamily="34" charset="-122"/>
-                <a:cs typeface="Meiryo" pitchFamily="34" charset="-120"/>
-              </a:rPr>
-              <a:t>記録が貯まるほど</a:t>
-            </a:r>
-            <a:endParaRPr lang="en-US" sz="1000" dirty="0"/>
-          </a:p>
-          <a:p>
-            <a:pPr algn="ctr" indent="0" marL="0">
-              <a:lnSpc>
-                <a:spcPct val="115000"/>
-              </a:lnSpc>
-              <a:buNone/>
-            </a:pPr>
-            <a:r>
-              <a:rPr lang="en-US" sz="1000" b="1" dirty="0">
-                <a:solidFill>
-                  <a:srgbClr val="E3A774"/>
-                </a:solidFill>
-                <a:latin typeface="Meiryo" pitchFamily="34" charset="0"/>
-                <a:ea typeface="Meiryo" pitchFamily="34" charset="-122"/>
-                <a:cs typeface="Meiryo" pitchFamily="34" charset="-120"/>
-              </a:rPr>
-              <a:t>真似されにくくなる</a:t>
-            </a:r>
-            <a:endParaRPr lang="en-US" sz="1000" dirty="0"/>
-          </a:p>
-        </p:txBody>
-      </p:sp>
-      <p:sp>
-        <p:nvSpPr>
-          <p:cNvPr id="15" name="Text 8"/>
-          <p:cNvSpPr txBox="1"/>
-          <p:nvPr/>
-        </p:nvSpPr>
-        <p:spPr>
-          <a:xfrm>
-            <a:off x="3520440" y="3383280"/>
-            <a:ext cx="2057400" cy="548640"/>
-          </a:xfrm>
-          <a:prstGeom prst="rect">
-            <a:avLst/>
-          </a:prstGeom>
-          <a:noFill/>
-          <a:ln/>
-        </p:spPr>
-        <p:txBody>
-          <a:bodyPr wrap="square" lIns="0" tIns="0" rIns="0" bIns="0" rtlCol="0" anchor="t"/>
-          <a:lstStyle/>
-          <a:p>
-            <a:pPr algn="ctr" indent="0" marL="0">
-              <a:lnSpc>
-                <a:spcPct val="115000"/>
-              </a:lnSpc>
-              <a:buNone/>
-            </a:pPr>
-            <a:r>
-              <a:rPr lang="en-US" sz="950" b="1" dirty="0">
-                <a:solidFill>
-                  <a:srgbClr val="FFFFFF"/>
-                </a:solidFill>
-                <a:latin typeface="Meiryo" pitchFamily="34" charset="0"/>
-                <a:ea typeface="Meiryo" pitchFamily="34" charset="-122"/>
-                <a:cs typeface="Meiryo" pitchFamily="34" charset="-120"/>
-              </a:rPr>
-              <a:t>1拠点の粗利 255万円</a:t>
-            </a:r>
-            <a:endParaRPr lang="en-US" sz="950" dirty="0"/>
-          </a:p>
-          <a:p>
-            <a:pPr algn="ctr" indent="0" marL="0">
-              <a:lnSpc>
-                <a:spcPct val="115000"/>
-              </a:lnSpc>
-              <a:buNone/>
-            </a:pPr>
-            <a:r>
-              <a:rPr lang="en-US" sz="950" dirty="0">
-                <a:solidFill>
-                  <a:srgbClr val="FFFFFF"/>
-                </a:solidFill>
-                <a:latin typeface="Meiryo" pitchFamily="34" charset="0"/>
-                <a:ea typeface="Meiryo" pitchFamily="34" charset="-122"/>
-                <a:cs typeface="Meiryo" pitchFamily="34" charset="-120"/>
-              </a:rPr>
-              <a:t>（300万円 − サーバー代45万円）</a:t>
-            </a:r>
-            <a:endParaRPr lang="en-US" sz="950" dirty="0"/>
-          </a:p>
-        </p:txBody>
-      </p:sp>
-      <p:sp>
-        <p:nvSpPr>
-          <p:cNvPr id="16" name="Shape 9"/>
+              <a:t>試作品・端末・実証</a:t>
+            </a:r>
+            <a:endParaRPr lang="en-US" sz="900" dirty="0"/>
+          </a:p>
+        </p:txBody>
+      </p:sp>
+      <p:sp>
+        <p:nvSpPr>
+          <p:cNvPr id="9" name="Shape 6"/>
           <p:cNvSpPr/>
           <p:nvPr/>
         </p:nvSpPr>
         <p:spPr>
           <a:xfrm>
-            <a:off x="2377440" y="1737360"/>
-            <a:ext cx="960120" cy="0"/>
+            <a:off x="2350008" y="1783080"/>
+            <a:ext cx="137160" cy="0"/>
           </a:xfrm>
           <a:prstGeom prst="line">
             <a:avLst/>
           </a:prstGeom>
           <a:noFill/>
-          <a:ln w="31750">
+          <a:ln w="25400">
             <a:solidFill>
               <a:srgbClr val="1A1A1A"/>
             </a:solidFill>
@@ -11218,14 +12602,39 @@
       </p:sp>
       <p:sp>
         <p:nvSpPr>
-          <p:cNvPr id="17" name="Text 10"/>
-          <p:cNvSpPr txBox="1"/>
-          <p:nvPr/>
-        </p:nvSpPr>
-        <p:spPr>
-          <a:xfrm>
-            <a:off x="2286000" y="1435608"/>
-            <a:ext cx="1143000" cy="256032"/>
+          <p:cNvPr id="10" name="Shape 7"/>
+          <p:cNvSpPr/>
+          <p:nvPr/>
+        </p:nvSpPr>
+        <p:spPr>
+          <a:xfrm>
+            <a:off x="2496312" y="1097280"/>
+            <a:ext cx="1965960" cy="1371600"/>
+          </a:xfrm>
+          <a:prstGeom prst="rect">
+            <a:avLst/>
+          </a:prstGeom>
+          <a:solidFill>
+            <a:srgbClr val="F2F2F2"/>
+          </a:solidFill>
+          <a:ln w="9525">
+            <a:solidFill>
+              <a:srgbClr val="BFBFBF"/>
+            </a:solidFill>
+            <a:prstDash val="solid"/>
+          </a:ln>
+        </p:spPr>
+      </p:sp>
+      <p:sp>
+        <p:nvSpPr>
+          <p:cNvPr id="11" name="Text 8"/>
+          <p:cNvSpPr txBox="1"/>
+          <p:nvPr/>
+        </p:nvSpPr>
+        <p:spPr>
+          <a:xfrm>
+            <a:off x="2606040" y="1188720"/>
+            <a:ext cx="1737360" cy="274320"/>
           </a:xfrm>
           <a:prstGeom prst="rect">
             <a:avLst/>
@@ -11237,14 +12646,56 @@
           <a:bodyPr wrap="square" lIns="0" tIns="0" rIns="0" bIns="0" rtlCol="0" anchor="t"/>
           <a:lstStyle/>
           <a:p>
-            <a:pPr algn="ctr" indent="0" marL="0">
-              <a:lnSpc>
-                <a:spcPct val="115000"/>
-              </a:lnSpc>
-              <a:buNone/>
-            </a:pPr>
-            <a:r>
-              <a:rPr lang="en-US" sz="900" b="1" dirty="0">
+            <a:pPr algn="l" indent="0" marL="0">
+              <a:lnSpc>
+                <a:spcPct val="115000"/>
+              </a:lnSpc>
+              <a:buNone/>
+            </a:pPr>
+            <a:r>
+              <a:rPr lang="en-US" sz="1100" b="1" dirty="0">
+                <a:solidFill>
+                  <a:srgbClr val="B8692E"/>
+                </a:solidFill>
+                <a:latin typeface="Meiryo" pitchFamily="34" charset="0"/>
+                <a:ea typeface="Meiryo" pitchFamily="34" charset="-122"/>
+                <a:cs typeface="Meiryo" pitchFamily="34" charset="-120"/>
+              </a:rPr>
+              <a:t>3か月</a:t>
+            </a:r>
+            <a:endParaRPr lang="en-US" sz="1100" dirty="0"/>
+          </a:p>
+        </p:txBody>
+      </p:sp>
+      <p:sp>
+        <p:nvSpPr>
+          <p:cNvPr id="12" name="Text 9"/>
+          <p:cNvSpPr txBox="1"/>
+          <p:nvPr/>
+        </p:nvSpPr>
+        <p:spPr>
+          <a:xfrm>
+            <a:off x="2606040" y="1508760"/>
+            <a:ext cx="1783080" cy="457200"/>
+          </a:xfrm>
+          <a:prstGeom prst="rect">
+            <a:avLst/>
+          </a:prstGeom>
+          <a:noFill/>
+          <a:ln/>
+        </p:spPr>
+        <p:txBody>
+          <a:bodyPr wrap="square" lIns="0" tIns="0" rIns="0" bIns="0" rtlCol="0" anchor="t"/>
+          <a:lstStyle/>
+          <a:p>
+            <a:pPr algn="l" indent="0" marL="0">
+              <a:lnSpc>
+                <a:spcPct val="115000"/>
+              </a:lnSpc>
+              <a:buNone/>
+            </a:pPr>
+            <a:r>
+              <a:rPr lang="en-US" sz="1200" b="1" dirty="0">
                 <a:solidFill>
                   <a:srgbClr val="1A1A1A"/>
                 </a:solidFill>
@@ -11252,7 +12703,49 @@
                 <a:ea typeface="Meiryo" pitchFamily="34" charset="-122"/>
                 <a:cs typeface="Meiryo" pitchFamily="34" charset="-120"/>
               </a:rPr>
-              <a:t>① 動画と会話</a:t>
+              <a:t>試作品ができる</a:t>
+            </a:r>
+            <a:endParaRPr lang="en-US" sz="1200" dirty="0"/>
+          </a:p>
+        </p:txBody>
+      </p:sp>
+      <p:sp>
+        <p:nvSpPr>
+          <p:cNvPr id="13" name="Text 10"/>
+          <p:cNvSpPr txBox="1"/>
+          <p:nvPr/>
+        </p:nvSpPr>
+        <p:spPr>
+          <a:xfrm>
+            <a:off x="2606040" y="1993392"/>
+            <a:ext cx="1783080" cy="411480"/>
+          </a:xfrm>
+          <a:prstGeom prst="rect">
+            <a:avLst/>
+          </a:prstGeom>
+          <a:noFill/>
+          <a:ln/>
+        </p:spPr>
+        <p:txBody>
+          <a:bodyPr wrap="square" lIns="0" tIns="0" rIns="0" bIns="0" rtlCol="0" anchor="t"/>
+          <a:lstStyle/>
+          <a:p>
+            <a:pPr algn="l" indent="0" marL="0">
+              <a:lnSpc>
+                <a:spcPct val="115000"/>
+              </a:lnSpc>
+              <a:buNone/>
+            </a:pPr>
+            <a:r>
+              <a:rPr lang="en-US" sz="900" dirty="0">
+                <a:solidFill>
+                  <a:srgbClr val="1A1A1A"/>
+                </a:solidFill>
+                <a:latin typeface="Meiryo" pitchFamily="34" charset="0"/>
+                <a:ea typeface="Meiryo" pitchFamily="34" charset="-122"/>
+                <a:cs typeface="Meiryo" pitchFamily="34" charset="-120"/>
+              </a:rPr>
+              <a:t>記録→写真抽出→報告書</a:t>
             </a:r>
             <a:endParaRPr lang="en-US" sz="900" dirty="0"/>
           </a:p>
@@ -11260,20 +12753,20 @@
       </p:sp>
       <p:sp>
         <p:nvSpPr>
-          <p:cNvPr id="18" name="Shape 11"/>
+          <p:cNvPr id="14" name="Shape 11"/>
           <p:cNvSpPr/>
           <p:nvPr/>
         </p:nvSpPr>
         <p:spPr>
-          <a:xfrm flipH="1">
-            <a:off x="2377440" y="2514600"/>
-            <a:ext cx="960120" cy="0"/>
+          <a:xfrm>
+            <a:off x="4480560" y="1783080"/>
+            <a:ext cx="137160" cy="0"/>
           </a:xfrm>
           <a:prstGeom prst="line">
             <a:avLst/>
           </a:prstGeom>
           <a:noFill/>
-          <a:ln w="31750">
+          <a:ln w="25400">
             <a:solidFill>
               <a:srgbClr val="1A1A1A"/>
             </a:solidFill>
@@ -11284,124 +12777,39 @@
       </p:sp>
       <p:sp>
         <p:nvSpPr>
-          <p:cNvPr id="19" name="Text 12"/>
-          <p:cNvSpPr txBox="1"/>
-          <p:nvPr/>
-        </p:nvSpPr>
-        <p:spPr>
-          <a:xfrm>
-            <a:off x="2286000" y="2011680"/>
-            <a:ext cx="1143000" cy="457200"/>
-          </a:xfrm>
-          <a:prstGeom prst="rect">
-            <a:avLst/>
-          </a:prstGeom>
-          <a:noFill/>
-          <a:ln/>
-        </p:spPr>
-        <p:txBody>
-          <a:bodyPr wrap="square" lIns="0" tIns="0" rIns="0" bIns="0" rtlCol="0" anchor="t"/>
-          <a:lstStyle/>
-          <a:p>
-            <a:pPr algn="ctr" indent="0" marL="0">
-              <a:lnSpc>
-                <a:spcPct val="115000"/>
-              </a:lnSpc>
-              <a:buNone/>
-            </a:pPr>
-            <a:r>
-              <a:rPr lang="en-US" sz="900" b="1" dirty="0">
-                <a:solidFill>
-                  <a:srgbClr val="1A1A1A"/>
-                </a:solidFill>
-                <a:latin typeface="Meiryo" pitchFamily="34" charset="0"/>
-                <a:ea typeface="Meiryo" pitchFamily="34" charset="-122"/>
-                <a:cs typeface="Meiryo" pitchFamily="34" charset="-120"/>
-              </a:rPr>
-              <a:t>② 照合・報告書</a:t>
-            </a:r>
-            <a:endParaRPr lang="en-US" sz="900" dirty="0"/>
-          </a:p>
-          <a:p>
-            <a:pPr algn="ctr" indent="0" marL="0">
-              <a:lnSpc>
-                <a:spcPct val="115000"/>
-              </a:lnSpc>
-              <a:buNone/>
-            </a:pPr>
-            <a:r>
-              <a:rPr lang="en-US" sz="900" b="1" dirty="0">
-                <a:solidFill>
-                  <a:srgbClr val="1A1A1A"/>
-                </a:solidFill>
-                <a:latin typeface="Meiryo" pitchFamily="34" charset="0"/>
-                <a:ea typeface="Meiryo" pitchFamily="34" charset="-122"/>
-                <a:cs typeface="Meiryo" pitchFamily="34" charset="-120"/>
-              </a:rPr>
-              <a:t>・教材</a:t>
-            </a:r>
-            <a:endParaRPr lang="en-US" sz="900" dirty="0"/>
-          </a:p>
-        </p:txBody>
-      </p:sp>
-      <p:sp>
-        <p:nvSpPr>
-          <p:cNvPr id="20" name="Shape 13"/>
+          <p:cNvPr id="15" name="Shape 12"/>
           <p:cNvSpPr/>
           <p:nvPr/>
         </p:nvSpPr>
         <p:spPr>
           <a:xfrm>
-            <a:off x="2377440" y="3749040"/>
-            <a:ext cx="960120" cy="0"/>
-          </a:xfrm>
-          <a:prstGeom prst="line">
-            <a:avLst/>
-          </a:prstGeom>
-          <a:noFill/>
-          <a:ln w="50800">
+            <a:off x="4626864" y="1097280"/>
+            <a:ext cx="1965960" cy="1371600"/>
+          </a:xfrm>
+          <a:prstGeom prst="rect">
+            <a:avLst/>
+          </a:prstGeom>
+          <a:solidFill>
+            <a:srgbClr val="F2F2F2"/>
+          </a:solidFill>
+          <a:ln w="9525">
             <a:solidFill>
-              <a:srgbClr val="B8692E"/>
+              <a:srgbClr val="BFBFBF"/>
             </a:solidFill>
             <a:prstDash val="solid"/>
-            <a:tailEnd type="triangle"/>
           </a:ln>
         </p:spPr>
       </p:sp>
-      <p:pic>
-        <p:nvPicPr>
-          <p:cNvPr id="21" name="Image 4" descr="preencoded.png">    </p:cNvPr>
-          <p:cNvPicPr>
-            <a:picLocks noChangeAspect="1"/>
-          </p:cNvPicPr>
-          <p:nvPr/>
-        </p:nvPicPr>
-        <p:blipFill>
-          <a:blip r:embed="rId5"/>
-          <a:stretch>
-            <a:fillRect/>
-          </a:stretch>
-        </p:blipFill>
-        <p:spPr>
-          <a:xfrm>
-            <a:off x="2651760" y="3154680"/>
-            <a:ext cx="457200" cy="457200"/>
-          </a:xfrm>
-          <a:prstGeom prst="rect">
-            <a:avLst/>
-          </a:prstGeom>
-        </p:spPr>
-      </p:pic>
-      <p:sp>
-        <p:nvSpPr>
-          <p:cNvPr id="22" name="Text 14"/>
-          <p:cNvSpPr txBox="1"/>
-          <p:nvPr/>
-        </p:nvSpPr>
-        <p:spPr>
-          <a:xfrm>
-            <a:off x="2286000" y="3840480"/>
-            <a:ext cx="1143000" cy="256032"/>
+      <p:sp>
+        <p:nvSpPr>
+          <p:cNvPr id="16" name="Text 13"/>
+          <p:cNvSpPr txBox="1"/>
+          <p:nvPr/>
+        </p:nvSpPr>
+        <p:spPr>
+          <a:xfrm>
+            <a:off x="4736592" y="1188720"/>
+            <a:ext cx="1737360" cy="274320"/>
           </a:xfrm>
           <a:prstGeom prst="rect">
             <a:avLst/>
@@ -11413,14 +12821,14 @@
           <a:bodyPr wrap="square" lIns="0" tIns="0" rIns="0" bIns="0" rtlCol="0" anchor="t"/>
           <a:lstStyle/>
           <a:p>
-            <a:pPr algn="ctr" indent="0" marL="0">
-              <a:lnSpc>
-                <a:spcPct val="115000"/>
-              </a:lnSpc>
-              <a:buNone/>
-            </a:pPr>
-            <a:r>
-              <a:rPr lang="en-US" sz="1000" b="1" dirty="0">
+            <a:pPr algn="l" indent="0" marL="0">
+              <a:lnSpc>
+                <a:spcPct val="115000"/>
+              </a:lnSpc>
+              <a:buNone/>
+            </a:pPr>
+            <a:r>
+              <a:rPr lang="en-US" sz="1100" b="1" dirty="0">
                 <a:solidFill>
                   <a:srgbClr val="B8692E"/>
                 </a:solidFill>
@@ -11428,28 +12836,112 @@
                 <a:ea typeface="Meiryo" pitchFamily="34" charset="-122"/>
                 <a:cs typeface="Meiryo" pitchFamily="34" charset="-120"/>
               </a:rPr>
-              <a:t>③ 年300万円</a:t>
-            </a:r>
-            <a:endParaRPr lang="en-US" sz="1000" dirty="0"/>
-          </a:p>
-        </p:txBody>
-      </p:sp>
-      <p:sp>
-        <p:nvSpPr>
-          <p:cNvPr id="23" name="Shape 15"/>
+              <a:t>6か月</a:t>
+            </a:r>
+            <a:endParaRPr lang="en-US" sz="1100" dirty="0"/>
+          </a:p>
+        </p:txBody>
+      </p:sp>
+      <p:sp>
+        <p:nvSpPr>
+          <p:cNvPr id="17" name="Text 14"/>
+          <p:cNvSpPr txBox="1"/>
+          <p:nvPr/>
+        </p:nvSpPr>
+        <p:spPr>
+          <a:xfrm>
+            <a:off x="4736592" y="1508760"/>
+            <a:ext cx="1783080" cy="457200"/>
+          </a:xfrm>
+          <a:prstGeom prst="rect">
+            <a:avLst/>
+          </a:prstGeom>
+          <a:noFill/>
+          <a:ln/>
+        </p:spPr>
+        <p:txBody>
+          <a:bodyPr wrap="square" lIns="0" tIns="0" rIns="0" bIns="0" rtlCol="0" anchor="t"/>
+          <a:lstStyle/>
+          <a:p>
+            <a:pPr algn="l" indent="0" marL="0">
+              <a:lnSpc>
+                <a:spcPct val="115000"/>
+              </a:lnSpc>
+              <a:buNone/>
+            </a:pPr>
+            <a:r>
+              <a:rPr lang="en-US" sz="1200" b="1" dirty="0">
+                <a:solidFill>
+                  <a:srgbClr val="1A1A1A"/>
+                </a:solidFill>
+                <a:latin typeface="Meiryo" pitchFamily="34" charset="0"/>
+                <a:ea typeface="Meiryo" pitchFamily="34" charset="-122"/>
+                <a:cs typeface="Meiryo" pitchFamily="34" charset="-120"/>
+              </a:rPr>
+              <a:t>1拠点で実証</a:t>
+            </a:r>
+            <a:endParaRPr lang="en-US" sz="1200" dirty="0"/>
+          </a:p>
+        </p:txBody>
+      </p:sp>
+      <p:sp>
+        <p:nvSpPr>
+          <p:cNvPr id="18" name="Text 15"/>
+          <p:cNvSpPr txBox="1"/>
+          <p:nvPr/>
+        </p:nvSpPr>
+        <p:spPr>
+          <a:xfrm>
+            <a:off x="4736592" y="1993392"/>
+            <a:ext cx="1783080" cy="411480"/>
+          </a:xfrm>
+          <a:prstGeom prst="rect">
+            <a:avLst/>
+          </a:prstGeom>
+          <a:noFill/>
+          <a:ln/>
+        </p:spPr>
+        <p:txBody>
+          <a:bodyPr wrap="square" lIns="0" tIns="0" rIns="0" bIns="0" rtlCol="0" anchor="t"/>
+          <a:lstStyle/>
+          <a:p>
+            <a:pPr algn="l" indent="0" marL="0">
+              <a:lnSpc>
+                <a:spcPct val="115000"/>
+              </a:lnSpc>
+              <a:buNone/>
+            </a:pPr>
+            <a:r>
+              <a:rPr lang="en-US" sz="900" dirty="0">
+                <a:solidFill>
+                  <a:srgbClr val="1A1A1A"/>
+                </a:solidFill>
+                <a:latin typeface="Meiryo" pitchFamily="34" charset="0"/>
+                <a:ea typeface="Meiryo" pitchFamily="34" charset="-122"/>
+                <a:cs typeface="Meiryo" pitchFamily="34" charset="-120"/>
+              </a:rPr>
+              <a:t>報告書の時間がどれだけ減ったか実測</a:t>
+            </a:r>
+            <a:endParaRPr lang="en-US" sz="900" dirty="0"/>
+          </a:p>
+        </p:txBody>
+      </p:sp>
+      <p:sp>
+        <p:nvSpPr>
+          <p:cNvPr id="19" name="Shape 16"/>
           <p:cNvSpPr/>
           <p:nvPr/>
         </p:nvSpPr>
         <p:spPr>
           <a:xfrm>
-            <a:off x="5705856" y="2011680"/>
-            <a:ext cx="347472" cy="0"/>
+            <a:off x="6611112" y="1783080"/>
+            <a:ext cx="137160" cy="0"/>
           </a:xfrm>
           <a:prstGeom prst="line">
             <a:avLst/>
           </a:prstGeom>
           <a:noFill/>
-          <a:ln w="31750">
+          <a:ln w="25400">
             <a:solidFill>
               <a:srgbClr val="1A1A1A"/>
             </a:solidFill>
@@ -11460,38 +12952,14 @@
       </p:sp>
       <p:sp>
         <p:nvSpPr>
-          <p:cNvPr id="24" name="Shape 16"/>
+          <p:cNvPr id="20" name="Shape 17"/>
           <p:cNvSpPr/>
           <p:nvPr/>
         </p:nvSpPr>
         <p:spPr>
           <a:xfrm>
-            <a:off x="5705856" y="3566160"/>
-            <a:ext cx="347472" cy="0"/>
-          </a:xfrm>
-          <a:prstGeom prst="line">
-            <a:avLst/>
-          </a:prstGeom>
-          <a:noFill/>
-          <a:ln w="31750">
-            <a:solidFill>
-              <a:srgbClr val="1A1A1A"/>
-            </a:solidFill>
-            <a:prstDash val="solid"/>
-            <a:tailEnd type="triangle"/>
-          </a:ln>
-        </p:spPr>
-      </p:sp>
-      <p:sp>
-        <p:nvSpPr>
-          <p:cNvPr id="25" name="Shape 17"/>
-          <p:cNvSpPr/>
-          <p:nvPr/>
-        </p:nvSpPr>
-        <p:spPr>
-          <a:xfrm>
-            <a:off x="6080760" y="1371600"/>
-            <a:ext cx="2697480" cy="1280160"/>
+            <a:off x="6757416" y="1097280"/>
+            <a:ext cx="1965960" cy="1371600"/>
           </a:xfrm>
           <a:prstGeom prst="rect">
             <a:avLst/>
@@ -11499,19 +12967,192 @@
           <a:solidFill>
             <a:srgbClr val="F2F2F2"/>
           </a:solidFill>
-          <a:ln/>
-        </p:spPr>
-      </p:sp>
-      <p:sp>
-        <p:nvSpPr>
-          <p:cNvPr id="26" name="Text 18"/>
-          <p:cNvSpPr txBox="1"/>
-          <p:nvPr/>
-        </p:nvSpPr>
-        <p:spPr>
-          <a:xfrm>
-            <a:off x="6190488" y="1417320"/>
-            <a:ext cx="2478024" cy="1188720"/>
+          <a:ln w="9525">
+            <a:solidFill>
+              <a:srgbClr val="BFBFBF"/>
+            </a:solidFill>
+            <a:prstDash val="solid"/>
+          </a:ln>
+        </p:spPr>
+      </p:sp>
+      <p:sp>
+        <p:nvSpPr>
+          <p:cNvPr id="21" name="Text 18"/>
+          <p:cNvSpPr txBox="1"/>
+          <p:nvPr/>
+        </p:nvSpPr>
+        <p:spPr>
+          <a:xfrm>
+            <a:off x="6867144" y="1188720"/>
+            <a:ext cx="1737360" cy="274320"/>
+          </a:xfrm>
+          <a:prstGeom prst="rect">
+            <a:avLst/>
+          </a:prstGeom>
+          <a:noFill/>
+          <a:ln/>
+        </p:spPr>
+        <p:txBody>
+          <a:bodyPr wrap="square" lIns="0" tIns="0" rIns="0" bIns="0" rtlCol="0" anchor="t"/>
+          <a:lstStyle/>
+          <a:p>
+            <a:pPr algn="l" indent="0" marL="0">
+              <a:lnSpc>
+                <a:spcPct val="115000"/>
+              </a:lnSpc>
+              <a:buNone/>
+            </a:pPr>
+            <a:r>
+              <a:rPr lang="en-US" sz="1100" b="1" dirty="0">
+                <a:solidFill>
+                  <a:srgbClr val="B8692E"/>
+                </a:solidFill>
+                <a:latin typeface="Meiryo" pitchFamily="34" charset="0"/>
+                <a:ea typeface="Meiryo" pitchFamily="34" charset="-122"/>
+                <a:cs typeface="Meiryo" pitchFamily="34" charset="-120"/>
+              </a:rPr>
+              <a:t>その後</a:t>
+            </a:r>
+            <a:endParaRPr lang="en-US" sz="1100" dirty="0"/>
+          </a:p>
+        </p:txBody>
+      </p:sp>
+      <p:sp>
+        <p:nvSpPr>
+          <p:cNvPr id="22" name="Text 19"/>
+          <p:cNvSpPr txBox="1"/>
+          <p:nvPr/>
+        </p:nvSpPr>
+        <p:spPr>
+          <a:xfrm>
+            <a:off x="6867144" y="1508760"/>
+            <a:ext cx="1783080" cy="457200"/>
+          </a:xfrm>
+          <a:prstGeom prst="rect">
+            <a:avLst/>
+          </a:prstGeom>
+          <a:noFill/>
+          <a:ln/>
+        </p:spPr>
+        <p:txBody>
+          <a:bodyPr wrap="square" lIns="0" tIns="0" rIns="0" bIns="0" rtlCol="0" anchor="t"/>
+          <a:lstStyle/>
+          <a:p>
+            <a:pPr algn="l" indent="0" marL="0">
+              <a:lnSpc>
+                <a:spcPct val="115000"/>
+              </a:lnSpc>
+              <a:buNone/>
+            </a:pPr>
+            <a:r>
+              <a:rPr lang="en-US" sz="1200" b="1" dirty="0">
+                <a:solidFill>
+                  <a:srgbClr val="1A1A1A"/>
+                </a:solidFill>
+                <a:latin typeface="Meiryo" pitchFamily="34" charset="0"/>
+                <a:ea typeface="Meiryo" pitchFamily="34" charset="-122"/>
+                <a:cs typeface="Meiryo" pitchFamily="34" charset="-120"/>
+              </a:rPr>
+              <a:t>公庫1,000万円＋VC1.15億円</a:t>
+            </a:r>
+            <a:endParaRPr lang="en-US" sz="1200" dirty="0"/>
+          </a:p>
+        </p:txBody>
+      </p:sp>
+      <p:sp>
+        <p:nvSpPr>
+          <p:cNvPr id="23" name="Text 20"/>
+          <p:cNvSpPr txBox="1"/>
+          <p:nvPr/>
+        </p:nvSpPr>
+        <p:spPr>
+          <a:xfrm>
+            <a:off x="6867144" y="1993392"/>
+            <a:ext cx="1783080" cy="411480"/>
+          </a:xfrm>
+          <a:prstGeom prst="rect">
+            <a:avLst/>
+          </a:prstGeom>
+          <a:noFill/>
+          <a:ln/>
+        </p:spPr>
+        <p:txBody>
+          <a:bodyPr wrap="square" lIns="0" tIns="0" rIns="0" bIns="0" rtlCol="0" anchor="t"/>
+          <a:lstStyle/>
+          <a:p>
+            <a:pPr algn="l" indent="0" marL="0">
+              <a:lnSpc>
+                <a:spcPct val="115000"/>
+              </a:lnSpc>
+              <a:buNone/>
+            </a:pPr>
+            <a:r>
+              <a:rPr lang="en-US" sz="900" dirty="0">
+                <a:solidFill>
+                  <a:srgbClr val="1A1A1A"/>
+                </a:solidFill>
+                <a:latin typeface="Meiryo" pitchFamily="34" charset="0"/>
+                <a:ea typeface="Meiryo" pitchFamily="34" charset="-122"/>
+                <a:cs typeface="Meiryo" pitchFamily="34" charset="-120"/>
+              </a:rPr>
+              <a:t>実証の結果を持って調達</a:t>
+            </a:r>
+            <a:endParaRPr lang="en-US" sz="900" dirty="0"/>
+          </a:p>
+        </p:txBody>
+      </p:sp>
+      <p:sp>
+        <p:nvSpPr>
+          <p:cNvPr id="24" name="Text 21"/>
+          <p:cNvSpPr txBox="1"/>
+          <p:nvPr/>
+        </p:nvSpPr>
+        <p:spPr>
+          <a:xfrm>
+            <a:off x="365760" y="2697480"/>
+            <a:ext cx="3657600" cy="237744"/>
+          </a:xfrm>
+          <a:prstGeom prst="rect">
+            <a:avLst/>
+          </a:prstGeom>
+          <a:noFill/>
+          <a:ln/>
+        </p:spPr>
+        <p:txBody>
+          <a:bodyPr wrap="square" lIns="0" tIns="0" rIns="0" bIns="0" rtlCol="0" anchor="t"/>
+          <a:lstStyle/>
+          <a:p>
+            <a:pPr algn="l" indent="0" marL="0">
+              <a:lnSpc>
+                <a:spcPct val="115000"/>
+              </a:lnSpc>
+              <a:buNone/>
+            </a:pPr>
+            <a:r>
+              <a:rPr lang="en-US" sz="1050" b="1" dirty="0">
+                <a:solidFill>
+                  <a:srgbClr val="1A1A1A"/>
+                </a:solidFill>
+                <a:latin typeface="Meiryo" pitchFamily="34" charset="0"/>
+                <a:ea typeface="Meiryo" pitchFamily="34" charset="-122"/>
+                <a:cs typeface="Meiryo" pitchFamily="34" charset="-120"/>
+              </a:rPr>
+              <a:t>使い道（万円）</a:t>
+            </a:r>
+            <a:endParaRPr lang="en-US" sz="1050" dirty="0"/>
+          </a:p>
+        </p:txBody>
+      </p:sp>
+      <p:sp>
+        <p:nvSpPr>
+          <p:cNvPr id="25" name="Text 22"/>
+          <p:cNvSpPr txBox="1"/>
+          <p:nvPr/>
+        </p:nvSpPr>
+        <p:spPr>
+          <a:xfrm>
+            <a:off x="365760" y="2990088"/>
+            <a:ext cx="1600200" cy="256032"/>
           </a:xfrm>
           <a:prstGeom prst="rect">
             <a:avLst/>
@@ -11527,36 +13168,114 @@
               <a:lnSpc>
                 <a:spcPct val="115000"/>
               </a:lnSpc>
-              <a:spcAft>
-                <a:spcPts val="300"/>
-              </a:spcAft>
+              <a:buNone/>
+            </a:pPr>
+            <a:r>
+              <a:rPr lang="en-US" sz="950" dirty="0">
+                <a:solidFill>
+                  <a:srgbClr val="1A1A1A"/>
+                </a:solidFill>
+                <a:latin typeface="Meiryo" pitchFamily="34" charset="0"/>
+                <a:ea typeface="Meiryo" pitchFamily="34" charset="-122"/>
+                <a:cs typeface="Meiryo" pitchFamily="34" charset="-120"/>
+              </a:rPr>
+              <a:t>試作品の開発</a:t>
+            </a:r>
+            <a:endParaRPr lang="en-US" sz="950" dirty="0"/>
+          </a:p>
+        </p:txBody>
+      </p:sp>
+      <p:sp>
+        <p:nvSpPr>
+          <p:cNvPr id="26" name="Shape 23"/>
+          <p:cNvSpPr/>
+          <p:nvPr/>
+        </p:nvSpPr>
+        <p:spPr>
+          <a:xfrm>
+            <a:off x="2011680" y="3026664"/>
+            <a:ext cx="2194560" cy="182880"/>
+          </a:xfrm>
+          <a:prstGeom prst="rect">
+            <a:avLst/>
+          </a:prstGeom>
+          <a:solidFill>
+            <a:srgbClr val="B8692E"/>
+          </a:solidFill>
+          <a:ln/>
+        </p:spPr>
+      </p:sp>
+      <p:sp>
+        <p:nvSpPr>
+          <p:cNvPr id="27" name="Text 24"/>
+          <p:cNvSpPr txBox="1"/>
+          <p:nvPr/>
+        </p:nvSpPr>
+        <p:spPr>
+          <a:xfrm>
+            <a:off x="4251960" y="2990088"/>
+            <a:ext cx="457200" cy="256032"/>
+          </a:xfrm>
+          <a:prstGeom prst="rect">
+            <a:avLst/>
+          </a:prstGeom>
+          <a:noFill/>
+          <a:ln/>
+        </p:spPr>
+        <p:txBody>
+          <a:bodyPr wrap="square" lIns="0" tIns="0" rIns="0" bIns="0" rtlCol="0" anchor="ctr"/>
+          <a:lstStyle/>
+          <a:p>
+            <a:pPr algn="l" indent="0" marL="0">
+              <a:lnSpc>
+                <a:spcPct val="115000"/>
+              </a:lnSpc>
               <a:buNone/>
             </a:pPr>
             <a:r>
               <a:rPr lang="en-US" sz="1000" b="1" dirty="0">
                 <a:solidFill>
-                  <a:srgbClr val="B8692E"/>
-                </a:solidFill>
-                <a:latin typeface="Meiryo" pitchFamily="34" charset="0"/>
-                <a:ea typeface="Meiryo" pitchFamily="34" charset="-122"/>
-                <a:cs typeface="Meiryo" pitchFamily="34" charset="-120"/>
-              </a:rPr>
-              <a:t>④ 出ていくお金</a:t>
+                  <a:srgbClr val="1A1A1A"/>
+                </a:solidFill>
+                <a:latin typeface="Meiryo" pitchFamily="34" charset="0"/>
+                <a:ea typeface="Meiryo" pitchFamily="34" charset="-122"/>
+                <a:cs typeface="Meiryo" pitchFamily="34" charset="-120"/>
+              </a:rPr>
+              <a:t>250</a:t>
             </a:r>
             <a:endParaRPr lang="en-US" sz="1000" dirty="0"/>
           </a:p>
+        </p:txBody>
+      </p:sp>
+      <p:sp>
+        <p:nvSpPr>
+          <p:cNvPr id="28" name="Text 25"/>
+          <p:cNvSpPr txBox="1"/>
+          <p:nvPr/>
+        </p:nvSpPr>
+        <p:spPr>
+          <a:xfrm>
+            <a:off x="365760" y="3291840"/>
+            <a:ext cx="1600200" cy="256032"/>
+          </a:xfrm>
+          <a:prstGeom prst="rect">
+            <a:avLst/>
+          </a:prstGeom>
+          <a:noFill/>
+          <a:ln/>
+        </p:spPr>
+        <p:txBody>
+          <a:bodyPr wrap="square" lIns="0" tIns="0" rIns="0" bIns="0" rtlCol="0" anchor="ctr"/>
+          <a:lstStyle/>
           <a:p>
             <a:pPr algn="l" indent="0" marL="0">
               <a:lnSpc>
                 <a:spcPct val="115000"/>
               </a:lnSpc>
-              <a:spcAft>
-                <a:spcPts val="300"/>
-              </a:spcAft>
-              <a:buNone/>
-            </a:pPr>
-            <a:r>
-              <a:rPr lang="en-US" sz="1000" dirty="0">
+              <a:buNone/>
+            </a:pPr>
+            <a:r>
+              <a:rPr lang="en-US" sz="950" dirty="0">
                 <a:solidFill>
                   <a:srgbClr val="1A1A1A"/>
                 </a:solidFill>
@@ -11564,22 +13283,103 @@
                 <a:ea typeface="Meiryo" pitchFamily="34" charset="-122"/>
                 <a:cs typeface="Meiryo" pitchFamily="34" charset="-120"/>
               </a:rPr>
-              <a:t>サーバー・AI代：売上の15%</a:t>
+              <a:t>実証（1拠点・3か月）</a:t>
+            </a:r>
+            <a:endParaRPr lang="en-US" sz="950" dirty="0"/>
+          </a:p>
+        </p:txBody>
+      </p:sp>
+      <p:sp>
+        <p:nvSpPr>
+          <p:cNvPr id="29" name="Shape 26"/>
+          <p:cNvSpPr/>
+          <p:nvPr/>
+        </p:nvSpPr>
+        <p:spPr>
+          <a:xfrm>
+            <a:off x="2011680" y="3328416"/>
+            <a:ext cx="877824" cy="182880"/>
+          </a:xfrm>
+          <a:prstGeom prst="rect">
+            <a:avLst/>
+          </a:prstGeom>
+          <a:solidFill>
+            <a:srgbClr val="1A1A1A"/>
+          </a:solidFill>
+          <a:ln/>
+        </p:spPr>
+      </p:sp>
+      <p:sp>
+        <p:nvSpPr>
+          <p:cNvPr id="30" name="Text 27"/>
+          <p:cNvSpPr txBox="1"/>
+          <p:nvPr/>
+        </p:nvSpPr>
+        <p:spPr>
+          <a:xfrm>
+            <a:off x="2935224" y="3291840"/>
+            <a:ext cx="457200" cy="256032"/>
+          </a:xfrm>
+          <a:prstGeom prst="rect">
+            <a:avLst/>
+          </a:prstGeom>
+          <a:noFill/>
+          <a:ln/>
+        </p:spPr>
+        <p:txBody>
+          <a:bodyPr wrap="square" lIns="0" tIns="0" rIns="0" bIns="0" rtlCol="0" anchor="ctr"/>
+          <a:lstStyle/>
+          <a:p>
+            <a:pPr algn="l" indent="0" marL="0">
+              <a:lnSpc>
+                <a:spcPct val="115000"/>
+              </a:lnSpc>
+              <a:buNone/>
+            </a:pPr>
+            <a:r>
+              <a:rPr lang="en-US" sz="1000" b="1" dirty="0">
+                <a:solidFill>
+                  <a:srgbClr val="1A1A1A"/>
+                </a:solidFill>
+                <a:latin typeface="Meiryo" pitchFamily="34" charset="0"/>
+                <a:ea typeface="Meiryo" pitchFamily="34" charset="-122"/>
+                <a:cs typeface="Meiryo" pitchFamily="34" charset="-120"/>
+              </a:rPr>
+              <a:t>100</a:t>
             </a:r>
             <a:endParaRPr lang="en-US" sz="1000" dirty="0"/>
           </a:p>
+        </p:txBody>
+      </p:sp>
+      <p:sp>
+        <p:nvSpPr>
+          <p:cNvPr id="31" name="Text 28"/>
+          <p:cNvSpPr txBox="1"/>
+          <p:nvPr/>
+        </p:nvSpPr>
+        <p:spPr>
+          <a:xfrm>
+            <a:off x="365760" y="3593592"/>
+            <a:ext cx="1600200" cy="256032"/>
+          </a:xfrm>
+          <a:prstGeom prst="rect">
+            <a:avLst/>
+          </a:prstGeom>
+          <a:noFill/>
+          <a:ln/>
+        </p:spPr>
+        <p:txBody>
+          <a:bodyPr wrap="square" lIns="0" tIns="0" rIns="0" bIns="0" rtlCol="0" anchor="ctr"/>
+          <a:lstStyle/>
           <a:p>
             <a:pPr algn="l" indent="0" marL="0">
               <a:lnSpc>
                 <a:spcPct val="115000"/>
               </a:lnSpc>
-              <a:spcAft>
-                <a:spcPts val="300"/>
-              </a:spcAft>
-              <a:buNone/>
-            </a:pPr>
-            <a:r>
-              <a:rPr lang="en-US" sz="1000" dirty="0">
+              <a:buNone/>
+            </a:pPr>
+            <a:r>
+              <a:rPr lang="en-US" sz="950" dirty="0">
                 <a:solidFill>
                   <a:srgbClr val="1A1A1A"/>
                 </a:solidFill>
@@ -11587,7 +13387,69 @@
                 <a:ea typeface="Meiryo" pitchFamily="34" charset="-122"/>
                 <a:cs typeface="Meiryo" pitchFamily="34" charset="-120"/>
               </a:rPr>
-              <a:t>社員1人：年713万円（給料・家賃など）</a:t>
+              <a:t>端末・機材</a:t>
+            </a:r>
+            <a:endParaRPr lang="en-US" sz="950" dirty="0"/>
+          </a:p>
+        </p:txBody>
+      </p:sp>
+      <p:sp>
+        <p:nvSpPr>
+          <p:cNvPr id="32" name="Shape 29"/>
+          <p:cNvSpPr/>
+          <p:nvPr/>
+        </p:nvSpPr>
+        <p:spPr>
+          <a:xfrm>
+            <a:off x="2011680" y="3630168"/>
+            <a:ext cx="702259" cy="182880"/>
+          </a:xfrm>
+          <a:prstGeom prst="rect">
+            <a:avLst/>
+          </a:prstGeom>
+          <a:solidFill>
+            <a:srgbClr val="1A1A1A"/>
+          </a:solidFill>
+          <a:ln/>
+        </p:spPr>
+      </p:sp>
+      <p:sp>
+        <p:nvSpPr>
+          <p:cNvPr id="33" name="Text 30"/>
+          <p:cNvSpPr txBox="1"/>
+          <p:nvPr/>
+        </p:nvSpPr>
+        <p:spPr>
+          <a:xfrm>
+            <a:off x="2759659" y="3593592"/>
+            <a:ext cx="457200" cy="256032"/>
+          </a:xfrm>
+          <a:prstGeom prst="rect">
+            <a:avLst/>
+          </a:prstGeom>
+          <a:noFill/>
+          <a:ln/>
+        </p:spPr>
+        <p:txBody>
+          <a:bodyPr wrap="square" lIns="0" tIns="0" rIns="0" bIns="0" rtlCol="0" anchor="ctr"/>
+          <a:lstStyle/>
+          <a:p>
+            <a:pPr algn="l" indent="0" marL="0">
+              <a:lnSpc>
+                <a:spcPct val="115000"/>
+              </a:lnSpc>
+              <a:buNone/>
+            </a:pPr>
+            <a:r>
+              <a:rPr lang="en-US" sz="1000" b="1" dirty="0">
+                <a:solidFill>
+                  <a:srgbClr val="1A1A1A"/>
+                </a:solidFill>
+                <a:latin typeface="Meiryo" pitchFamily="34" charset="0"/>
+                <a:ea typeface="Meiryo" pitchFamily="34" charset="-122"/>
+                <a:cs typeface="Meiryo" pitchFamily="34" charset="-120"/>
+              </a:rPr>
+              <a:t>80</a:t>
             </a:r>
             <a:endParaRPr lang="en-US" sz="1000" dirty="0"/>
           </a:p>
@@ -11595,14 +13457,222 @@
       </p:sp>
       <p:sp>
         <p:nvSpPr>
-          <p:cNvPr id="27" name="Shape 19"/>
+          <p:cNvPr id="34" name="Text 31"/>
+          <p:cNvSpPr txBox="1"/>
+          <p:nvPr/>
+        </p:nvSpPr>
+        <p:spPr>
+          <a:xfrm>
+            <a:off x="365760" y="3895344"/>
+            <a:ext cx="1600200" cy="256032"/>
+          </a:xfrm>
+          <a:prstGeom prst="rect">
+            <a:avLst/>
+          </a:prstGeom>
+          <a:noFill/>
+          <a:ln/>
+        </p:spPr>
+        <p:txBody>
+          <a:bodyPr wrap="square" lIns="0" tIns="0" rIns="0" bIns="0" rtlCol="0" anchor="ctr"/>
+          <a:lstStyle/>
+          <a:p>
+            <a:pPr algn="l" indent="0" marL="0">
+              <a:lnSpc>
+                <a:spcPct val="115000"/>
+              </a:lnSpc>
+              <a:buNone/>
+            </a:pPr>
+            <a:r>
+              <a:rPr lang="en-US" sz="950" dirty="0">
+                <a:solidFill>
+                  <a:srgbClr val="1A1A1A"/>
+                </a:solidFill>
+                <a:latin typeface="Meiryo" pitchFamily="34" charset="0"/>
+                <a:ea typeface="Meiryo" pitchFamily="34" charset="-122"/>
+                <a:cs typeface="Meiryo" pitchFamily="34" charset="-120"/>
+              </a:rPr>
+              <a:t>設立・契約</a:t>
+            </a:r>
+            <a:endParaRPr lang="en-US" sz="950" dirty="0"/>
+          </a:p>
+        </p:txBody>
+      </p:sp>
+      <p:sp>
+        <p:nvSpPr>
+          <p:cNvPr id="35" name="Shape 32"/>
           <p:cNvSpPr/>
           <p:nvPr/>
         </p:nvSpPr>
         <p:spPr>
           <a:xfrm>
-            <a:off x="6080760" y="2880360"/>
-            <a:ext cx="2697480" cy="1417320"/>
+            <a:off x="2011680" y="3931920"/>
+            <a:ext cx="351130" cy="182880"/>
+          </a:xfrm>
+          <a:prstGeom prst="rect">
+            <a:avLst/>
+          </a:prstGeom>
+          <a:solidFill>
+            <a:srgbClr val="1A1A1A"/>
+          </a:solidFill>
+          <a:ln/>
+        </p:spPr>
+      </p:sp>
+      <p:sp>
+        <p:nvSpPr>
+          <p:cNvPr id="36" name="Text 33"/>
+          <p:cNvSpPr txBox="1"/>
+          <p:nvPr/>
+        </p:nvSpPr>
+        <p:spPr>
+          <a:xfrm>
+            <a:off x="2408530" y="3895344"/>
+            <a:ext cx="457200" cy="256032"/>
+          </a:xfrm>
+          <a:prstGeom prst="rect">
+            <a:avLst/>
+          </a:prstGeom>
+          <a:noFill/>
+          <a:ln/>
+        </p:spPr>
+        <p:txBody>
+          <a:bodyPr wrap="square" lIns="0" tIns="0" rIns="0" bIns="0" rtlCol="0" anchor="ctr"/>
+          <a:lstStyle/>
+          <a:p>
+            <a:pPr algn="l" indent="0" marL="0">
+              <a:lnSpc>
+                <a:spcPct val="115000"/>
+              </a:lnSpc>
+              <a:buNone/>
+            </a:pPr>
+            <a:r>
+              <a:rPr lang="en-US" sz="1000" b="1" dirty="0">
+                <a:solidFill>
+                  <a:srgbClr val="1A1A1A"/>
+                </a:solidFill>
+                <a:latin typeface="Meiryo" pitchFamily="34" charset="0"/>
+                <a:ea typeface="Meiryo" pitchFamily="34" charset="-122"/>
+                <a:cs typeface="Meiryo" pitchFamily="34" charset="-120"/>
+              </a:rPr>
+              <a:t>40</a:t>
+            </a:r>
+            <a:endParaRPr lang="en-US" sz="1000" dirty="0"/>
+          </a:p>
+        </p:txBody>
+      </p:sp>
+      <p:sp>
+        <p:nvSpPr>
+          <p:cNvPr id="37" name="Text 34"/>
+          <p:cNvSpPr txBox="1"/>
+          <p:nvPr/>
+        </p:nvSpPr>
+        <p:spPr>
+          <a:xfrm>
+            <a:off x="365760" y="4197096"/>
+            <a:ext cx="1600200" cy="256032"/>
+          </a:xfrm>
+          <a:prstGeom prst="rect">
+            <a:avLst/>
+          </a:prstGeom>
+          <a:noFill/>
+          <a:ln/>
+        </p:spPr>
+        <p:txBody>
+          <a:bodyPr wrap="square" lIns="0" tIns="0" rIns="0" bIns="0" rtlCol="0" anchor="ctr"/>
+          <a:lstStyle/>
+          <a:p>
+            <a:pPr algn="l" indent="0" marL="0">
+              <a:lnSpc>
+                <a:spcPct val="115000"/>
+              </a:lnSpc>
+              <a:buNone/>
+            </a:pPr>
+            <a:r>
+              <a:rPr lang="en-US" sz="950" dirty="0">
+                <a:solidFill>
+                  <a:srgbClr val="1A1A1A"/>
+                </a:solidFill>
+                <a:latin typeface="Meiryo" pitchFamily="34" charset="0"/>
+                <a:ea typeface="Meiryo" pitchFamily="34" charset="-122"/>
+                <a:cs typeface="Meiryo" pitchFamily="34" charset="-120"/>
+              </a:rPr>
+              <a:t>予備</a:t>
+            </a:r>
+            <a:endParaRPr lang="en-US" sz="950" dirty="0"/>
+          </a:p>
+        </p:txBody>
+      </p:sp>
+      <p:sp>
+        <p:nvSpPr>
+          <p:cNvPr id="38" name="Shape 35"/>
+          <p:cNvSpPr/>
+          <p:nvPr/>
+        </p:nvSpPr>
+        <p:spPr>
+          <a:xfrm>
+            <a:off x="2011680" y="4233672"/>
+            <a:ext cx="263347" cy="182880"/>
+          </a:xfrm>
+          <a:prstGeom prst="rect">
+            <a:avLst/>
+          </a:prstGeom>
+          <a:solidFill>
+            <a:srgbClr val="1A1A1A"/>
+          </a:solidFill>
+          <a:ln/>
+        </p:spPr>
+      </p:sp>
+      <p:sp>
+        <p:nvSpPr>
+          <p:cNvPr id="39" name="Text 36"/>
+          <p:cNvSpPr txBox="1"/>
+          <p:nvPr/>
+        </p:nvSpPr>
+        <p:spPr>
+          <a:xfrm>
+            <a:off x="2320747" y="4197096"/>
+            <a:ext cx="457200" cy="256032"/>
+          </a:xfrm>
+          <a:prstGeom prst="rect">
+            <a:avLst/>
+          </a:prstGeom>
+          <a:noFill/>
+          <a:ln/>
+        </p:spPr>
+        <p:txBody>
+          <a:bodyPr wrap="square" lIns="0" tIns="0" rIns="0" bIns="0" rtlCol="0" anchor="ctr"/>
+          <a:lstStyle/>
+          <a:p>
+            <a:pPr algn="l" indent="0" marL="0">
+              <a:lnSpc>
+                <a:spcPct val="115000"/>
+              </a:lnSpc>
+              <a:buNone/>
+            </a:pPr>
+            <a:r>
+              <a:rPr lang="en-US" sz="1000" b="1" dirty="0">
+                <a:solidFill>
+                  <a:srgbClr val="1A1A1A"/>
+                </a:solidFill>
+                <a:latin typeface="Meiryo" pitchFamily="34" charset="0"/>
+                <a:ea typeface="Meiryo" pitchFamily="34" charset="-122"/>
+                <a:cs typeface="Meiryo" pitchFamily="34" charset="-120"/>
+              </a:rPr>
+              <a:t>30</a:t>
+            </a:r>
+            <a:endParaRPr lang="en-US" sz="1000" dirty="0"/>
+          </a:p>
+        </p:txBody>
+      </p:sp>
+      <p:sp>
+        <p:nvSpPr>
+          <p:cNvPr id="40" name="Shape 37"/>
+          <p:cNvSpPr/>
+          <p:nvPr/>
+        </p:nvSpPr>
+        <p:spPr>
+          <a:xfrm>
+            <a:off x="4572000" y="2697480"/>
+            <a:ext cx="4206240" cy="1783080"/>
           </a:xfrm>
           <a:prstGeom prst="rect">
             <a:avLst/>
@@ -11618,16 +13688,40 @@
           </a:ln>
         </p:spPr>
       </p:sp>
-      <p:sp>
-        <p:nvSpPr>
-          <p:cNvPr id="28" name="Text 20"/>
-          <p:cNvSpPr txBox="1"/>
-          <p:nvPr/>
-        </p:nvSpPr>
-        <p:spPr>
-          <a:xfrm>
-            <a:off x="6190488" y="2926080"/>
-            <a:ext cx="2478024" cy="1325880"/>
+      <p:pic>
+        <p:nvPicPr>
+          <p:cNvPr id="41" name="Image 0" descr="preencoded.png">    </p:cNvPr>
+          <p:cNvPicPr>
+            <a:picLocks noChangeAspect="1"/>
+          </p:cNvPicPr>
+          <p:nvPr/>
+        </p:nvPicPr>
+        <p:blipFill>
+          <a:blip r:embed="rId1"/>
+          <a:stretch>
+            <a:fillRect/>
+          </a:stretch>
+        </p:blipFill>
+        <p:spPr>
+          <a:xfrm>
+            <a:off x="4709160" y="2926080"/>
+            <a:ext cx="1066800" cy="1280160"/>
+          </a:xfrm>
+          <a:prstGeom prst="rect">
+            <a:avLst/>
+          </a:prstGeom>
+        </p:spPr>
+      </p:pic>
+      <p:sp>
+        <p:nvSpPr>
+          <p:cNvPr id="42" name="Text 38"/>
+          <p:cNvSpPr txBox="1"/>
+          <p:nvPr/>
+        </p:nvSpPr>
+        <p:spPr>
+          <a:xfrm>
+            <a:off x="5852160" y="2788920"/>
+            <a:ext cx="2834640" cy="1600200"/>
           </a:xfrm>
           <a:prstGeom prst="rect">
             <a:avLst/>
@@ -11649,7 +13743,7 @@
               <a:buNone/>
             </a:pPr>
             <a:r>
-              <a:rPr lang="en-US" sz="1000" b="1" dirty="0">
+              <a:rPr lang="en-US" sz="1100" b="1" dirty="0">
                 <a:solidFill>
                   <a:srgbClr val="B8692E"/>
                 </a:solidFill>
@@ -11657,7 +13751,7 @@
                 <a:ea typeface="Meiryo" pitchFamily="34" charset="-122"/>
                 <a:cs typeface="Meiryo" pitchFamily="34" charset="-120"/>
               </a:rPr>
-              <a:t>⑤ 黒字の条件</a:t>
+              <a:t>出資者へのお返し（提案）</a:t>
             </a:r>
             <a:endParaRPr lang="en-US" sz="1000" dirty="0"/>
           </a:p>
@@ -11672,7 +13766,7 @@
               <a:buNone/>
             </a:pPr>
             <a:r>
-              <a:rPr lang="en-US" sz="1500" b="1" dirty="0">
+              <a:rPr lang="en-US" sz="1400" b="1" dirty="0">
                 <a:solidFill>
                   <a:srgbClr val="1A1A1A"/>
                 </a:solidFill>
@@ -11680,7 +13774,7 @@
                 <a:ea typeface="Meiryo" pitchFamily="34" charset="-122"/>
                 <a:cs typeface="Meiryo" pitchFamily="34" charset="-120"/>
               </a:rPr>
-              <a:t>社員1人 × 2.8拠点 以上</a:t>
+              <a:t>500万円で株式の10%</a:t>
             </a:r>
             <a:endParaRPr lang="en-US" sz="1000" dirty="0"/>
           </a:p>
@@ -11695,7 +13789,7 @@
               <a:buNone/>
             </a:pPr>
             <a:r>
-              <a:rPr lang="en-US" sz="1000" dirty="0">
+              <a:rPr lang="en-US" sz="900" dirty="0">
                 <a:solidFill>
                   <a:srgbClr val="1A1A1A"/>
                 </a:solidFill>
@@ -11703,7 +13797,7 @@
                 <a:ea typeface="Meiryo" pitchFamily="34" charset="-122"/>
                 <a:cs typeface="Meiryo" pitchFamily="34" charset="-120"/>
               </a:rPr>
-              <a:t>4年目に3.67となり黒字</a:t>
+              <a:t>（出資前の会社の値段 4,500万円）</a:t>
             </a:r>
             <a:endParaRPr lang="en-US" sz="1000" dirty="0"/>
           </a:p>
@@ -11718,7 +13812,7 @@
               <a:buNone/>
             </a:pPr>
             <a:r>
-              <a:rPr lang="en-US" sz="1000" dirty="0">
+              <a:rPr lang="en-US" sz="950" dirty="0">
                 <a:solidFill>
                   <a:srgbClr val="1A1A1A"/>
                 </a:solidFill>
@@ -11726,51 +13820,32 @@
                 <a:ea typeface="Meiryo" pitchFamily="34" charset="-122"/>
                 <a:cs typeface="Meiryo" pitchFamily="34" charset="-120"/>
               </a:rPr>
-              <a:t>5年目 営業利益 6,900万円</a:t>
+              <a:t>出口：上場、または事業会社への売却</a:t>
             </a:r>
             <a:endParaRPr lang="en-US" sz="1000" dirty="0"/>
           </a:p>
-        </p:txBody>
-      </p:sp>
-      <p:sp>
-        <p:nvSpPr>
-          <p:cNvPr id="29" name="Text 21"/>
-          <p:cNvSpPr txBox="1"/>
-          <p:nvPr/>
-        </p:nvSpPr>
-        <p:spPr>
-          <a:xfrm>
-            <a:off x="365760" y="4434840"/>
-            <a:ext cx="8412480" cy="237744"/>
-          </a:xfrm>
-          <a:prstGeom prst="rect">
-            <a:avLst/>
-          </a:prstGeom>
-          <a:noFill/>
-          <a:ln/>
-        </p:spPr>
-        <p:txBody>
-          <a:bodyPr wrap="square" lIns="0" tIns="0" rIns="0" bIns="0" rtlCol="0" anchor="t"/>
-          <a:lstStyle/>
           <a:p>
             <a:pPr algn="l" indent="0" marL="0">
               <a:lnSpc>
                 <a:spcPct val="115000"/>
               </a:lnSpc>
-              <a:buNone/>
-            </a:pPr>
-            <a:r>
-              <a:rPr lang="en-US" sz="950" b="1" dirty="0">
-                <a:solidFill>
-                  <a:srgbClr val="4D4D4D"/>
-                </a:solidFill>
-                <a:latin typeface="Meiryo" pitchFamily="34" charset="0"/>
-                <a:ea typeface="Meiryo" pitchFamily="34" charset="-122"/>
-                <a:cs typeface="Meiryo" pitchFamily="34" charset="-120"/>
-              </a:rPr>
-              <a:t>将来：貯まった作業の記録で、ロボットに作業を教える（フィジカルAI）</a:t>
-            </a:r>
-            <a:endParaRPr lang="en-US" sz="950" dirty="0"/>
+              <a:spcAft>
+                <a:spcPts val="200"/>
+              </a:spcAft>
+              <a:buNone/>
+            </a:pPr>
+            <a:r>
+              <a:rPr lang="en-US" sz="950" dirty="0">
+                <a:solidFill>
+                  <a:srgbClr val="1A1A1A"/>
+                </a:solidFill>
+                <a:latin typeface="Meiryo" pitchFamily="34" charset="0"/>
+                <a:ea typeface="Meiryo" pitchFamily="34" charset="-122"/>
+                <a:cs typeface="Meiryo" pitchFamily="34" charset="-120"/>
+              </a:rPr>
+              <a:t>お願い：実証先の電気工事会社のご紹介も</a:t>
+            </a:r>
+            <a:endParaRPr lang="en-US" sz="1000" dirty="0"/>
           </a:p>
         </p:txBody>
       </p:sp>
@@ -11883,7 +13958,7 @@
                 <a:ea typeface="Meiryo" pitchFamily="34" charset="-122"/>
                 <a:cs typeface="Meiryo" pitchFamily="34" charset="-120"/>
               </a:rPr>
-              <a:t>よくあるツッコミ3つ ─ この一言で返す</a:t>
+              <a:t>1枚で言うと ─ 上は記録とサービス、下はお金</a:t>
             </a:r>
             <a:endParaRPr lang="en-US" sz="2000" dirty="0"/>
           </a:p>
@@ -11925,48 +14000,24 @@
                 <a:ea typeface="Meiryo" pitchFamily="34" charset="-122"/>
                 <a:cs typeface="Meiryo" pitchFamily="34" charset="-120"/>
               </a:rPr>
-              <a:t>答えは必ず数字から言う。理由は後</a:t>
+              <a:t>記録が貯まるほど真似されにくく、お客様が増えるほど黒字が厚くなる</a:t>
             </a:r>
             <a:endParaRPr lang="en-US" sz="1200" dirty="0"/>
           </a:p>
         </p:txBody>
       </p:sp>
-      <p:pic>
-        <p:nvPicPr>
-          <p:cNvPr id="5" name="Image 0" descr="preencoded.png">    </p:cNvPr>
-          <p:cNvPicPr>
-            <a:picLocks noChangeAspect="1"/>
-          </p:cNvPicPr>
-          <p:nvPr/>
-        </p:nvPicPr>
-        <p:blipFill>
-          <a:blip r:embed="rId1"/>
-          <a:stretch>
-            <a:fillRect/>
-          </a:stretch>
-        </p:blipFill>
-        <p:spPr>
-          <a:xfrm>
-            <a:off x="365760" y="1051560"/>
-            <a:ext cx="800100" cy="960120"/>
-          </a:xfrm>
-          <a:prstGeom prst="rect">
-            <a:avLst/>
-          </a:prstGeom>
-        </p:spPr>
-      </p:pic>
-      <p:sp>
-        <p:nvSpPr>
-          <p:cNvPr id="6" name="Shape 2"/>
+      <p:sp>
+        <p:nvSpPr>
+          <p:cNvPr id="5" name="Shape 2"/>
           <p:cNvSpPr/>
           <p:nvPr/>
         </p:nvSpPr>
         <p:spPr>
           <a:xfrm>
-            <a:off x="1234440" y="1143000"/>
-            <a:ext cx="2377440" cy="548640"/>
-          </a:xfrm>
-          <a:prstGeom prst="wedgeRoundRectCallout">
+            <a:off x="365760" y="1371600"/>
+            <a:ext cx="1920240" cy="2926080"/>
+          </a:xfrm>
+          <a:prstGeom prst="rect">
             <a:avLst/>
           </a:prstGeom>
           <a:solidFill>
@@ -11980,118 +14031,75 @@
           </a:ln>
         </p:spPr>
       </p:sp>
-      <p:sp>
-        <p:nvSpPr>
-          <p:cNvPr id="7" name="Text 3"/>
-          <p:cNvSpPr txBox="1"/>
-          <p:nvPr/>
-        </p:nvSpPr>
-        <p:spPr>
-          <a:xfrm>
-            <a:off x="1307592" y="1179576"/>
-            <a:ext cx="2231136" cy="475488"/>
-          </a:xfrm>
-          <a:prstGeom prst="rect">
-            <a:avLst/>
-          </a:prstGeom>
-          <a:noFill/>
-          <a:ln/>
-        </p:spPr>
-        <p:txBody>
-          <a:bodyPr wrap="square" lIns="0" tIns="0" rIns="0" bIns="0" rtlCol="0" anchor="ctr"/>
-          <a:lstStyle/>
-          <a:p>
-            <a:pPr algn="ctr" indent="0" marL="0">
-              <a:lnSpc>
-                <a:spcPct val="110000"/>
-              </a:lnSpc>
-              <a:buNone/>
-            </a:pPr>
-            <a:r>
-              <a:rPr lang="en-US" sz="1050" b="1" dirty="0">
-                <a:solidFill>
-                  <a:srgbClr val="1A1A1A"/>
-                </a:solidFill>
-                <a:latin typeface="Meiryo" pitchFamily="34" charset="0"/>
-                <a:ea typeface="Meiryo" pitchFamily="34" charset="-122"/>
-                <a:cs typeface="Meiryo" pitchFamily="34" charset="-120"/>
-              </a:rPr>
-              <a:t>本当に年300万円も払うの？</a:t>
-            </a:r>
-            <a:endParaRPr lang="en-US" sz="1050" dirty="0"/>
-          </a:p>
-        </p:txBody>
-      </p:sp>
-      <p:sp>
-        <p:nvSpPr>
-          <p:cNvPr id="8" name="Shape 4"/>
-          <p:cNvSpPr/>
-          <p:nvPr/>
-        </p:nvSpPr>
-        <p:spPr>
-          <a:xfrm flipH="1">
-            <a:off x="3703320" y="1143000"/>
-            <a:ext cx="4069080" cy="685800"/>
-          </a:xfrm>
-          <a:prstGeom prst="wedgeRoundRectCallout">
-            <a:avLst/>
-          </a:prstGeom>
-          <a:solidFill>
-            <a:srgbClr val="F2F2F2"/>
-          </a:solidFill>
-          <a:ln w="19050">
-            <a:solidFill>
-              <a:srgbClr val="1A1A1A"/>
-            </a:solidFill>
-            <a:prstDash val="solid"/>
-          </a:ln>
-        </p:spPr>
-      </p:sp>
-      <p:sp>
-        <p:nvSpPr>
-          <p:cNvPr id="9" name="Text 5"/>
-          <p:cNvSpPr txBox="1"/>
-          <p:nvPr/>
-        </p:nvSpPr>
-        <p:spPr>
-          <a:xfrm>
-            <a:off x="3776472" y="1179576"/>
-            <a:ext cx="3922776" cy="612648"/>
-          </a:xfrm>
-          <a:prstGeom prst="rect">
-            <a:avLst/>
-          </a:prstGeom>
-          <a:noFill/>
-          <a:ln/>
-        </p:spPr>
-        <p:txBody>
-          <a:bodyPr wrap="square" lIns="0" tIns="0" rIns="0" bIns="0" rtlCol="0" anchor="ctr"/>
-          <a:lstStyle/>
-          <a:p>
-            <a:pPr algn="ctr" indent="0" marL="0">
-              <a:lnSpc>
-                <a:spcPct val="110000"/>
-              </a:lnSpc>
-              <a:buNone/>
-            </a:pPr>
-            <a:r>
-              <a:rPr lang="en-US" sz="1050" dirty="0">
-                <a:solidFill>
-                  <a:srgbClr val="1A1A1A"/>
-                </a:solidFill>
-                <a:latin typeface="Meiryo" pitchFamily="34" charset="0"/>
-                <a:ea typeface="Meiryo" pitchFamily="34" charset="-122"/>
-                <a:cs typeface="Meiryo" pitchFamily="34" charset="-120"/>
-              </a:rPr>
-              <a:t>月240万円分の時間が浮くので、約2か月で元が取れます</a:t>
-            </a:r>
-            <a:endParaRPr lang="en-US" sz="1050" dirty="0"/>
-          </a:p>
-        </p:txBody>
-      </p:sp>
       <p:pic>
         <p:nvPicPr>
-          <p:cNvPr id="10" name="Image 1" descr="preencoded.png">    </p:cNvPr>
+          <p:cNvPr id="6" name="Image 0" descr="preencoded.png">    </p:cNvPr>
+          <p:cNvPicPr>
+            <a:picLocks noChangeAspect="1"/>
+          </p:cNvPicPr>
+          <p:nvPr/>
+        </p:nvPicPr>
+        <p:blipFill>
+          <a:blip r:embed="rId1"/>
+          <a:stretch>
+            <a:fillRect/>
+          </a:stretch>
+        </p:blipFill>
+        <p:spPr>
+          <a:xfrm>
+            <a:off x="822960" y="1508760"/>
+            <a:ext cx="1005840" cy="1005840"/>
+          </a:xfrm>
+          <a:prstGeom prst="rect">
+            <a:avLst/>
+          </a:prstGeom>
+        </p:spPr>
+      </p:pic>
+      <p:sp>
+        <p:nvSpPr>
+          <p:cNvPr id="7" name="Text 3"/>
+          <p:cNvSpPr txBox="1"/>
+          <p:nvPr/>
+        </p:nvSpPr>
+        <p:spPr>
+          <a:xfrm>
+            <a:off x="365760" y="2651760"/>
+            <a:ext cx="1920240" cy="256032"/>
+          </a:xfrm>
+          <a:prstGeom prst="rect">
+            <a:avLst/>
+          </a:prstGeom>
+          <a:noFill/>
+          <a:ln/>
+        </p:spPr>
+        <p:txBody>
+          <a:bodyPr wrap="square" lIns="0" tIns="0" rIns="0" bIns="0" rtlCol="0" anchor="t"/>
+          <a:lstStyle/>
+          <a:p>
+            <a:pPr algn="ctr" indent="0" marL="0">
+              <a:lnSpc>
+                <a:spcPct val="115000"/>
+              </a:lnSpc>
+              <a:buNone/>
+            </a:pPr>
+            <a:r>
+              <a:rPr lang="en-US" sz="1100" b="1" dirty="0">
+                <a:solidFill>
+                  <a:srgbClr val="1A1A1A"/>
+                </a:solidFill>
+                <a:latin typeface="Meiryo" pitchFamily="34" charset="0"/>
+                <a:ea typeface="Meiryo" pitchFamily="34" charset="-122"/>
+                <a:cs typeface="Meiryo" pitchFamily="34" charset="-120"/>
+              </a:rPr>
+              <a:t>電気工事会社（お客様）</a:t>
+            </a:r>
+            <a:endParaRPr lang="en-US" sz="1100" dirty="0"/>
+          </a:p>
+        </p:txBody>
+      </p:sp>
+      <p:pic>
+        <p:nvPicPr>
+          <p:cNvPr id="8" name="Image 1" descr="preencoded.png">    </p:cNvPr>
           <p:cNvPicPr>
             <a:picLocks noChangeAspect="1"/>
           </p:cNvPicPr>
@@ -12105,59 +14113,17 @@
         </p:blipFill>
         <p:spPr>
           <a:xfrm>
-            <a:off x="7863840" y="1051560"/>
-            <a:ext cx="800100" cy="960120"/>
+            <a:off x="502920" y="3017520"/>
+            <a:ext cx="723900" cy="868680"/>
           </a:xfrm>
           <a:prstGeom prst="rect">
             <a:avLst/>
           </a:prstGeom>
         </p:spPr>
       </p:pic>
-      <p:sp>
-        <p:nvSpPr>
-          <p:cNvPr id="11" name="Text 6"/>
-          <p:cNvSpPr txBox="1"/>
-          <p:nvPr/>
-        </p:nvSpPr>
-        <p:spPr>
-          <a:xfrm>
-            <a:off x="3749040" y="1856232"/>
-            <a:ext cx="3749040" cy="219456"/>
-          </a:xfrm>
-          <a:prstGeom prst="rect">
-            <a:avLst/>
-          </a:prstGeom>
-          <a:noFill/>
-          <a:ln/>
-        </p:spPr>
-        <p:txBody>
-          <a:bodyPr wrap="square" lIns="0" tIns="0" rIns="0" bIns="0" rtlCol="0" anchor="t"/>
-          <a:lstStyle/>
-          <a:p>
-            <a:pPr algn="l" indent="0" marL="0">
-              <a:lnSpc>
-                <a:spcPct val="115000"/>
-              </a:lnSpc>
-              <a:buNone/>
-            </a:pPr>
-            <a:r>
-              <a:rPr lang="en-US" sz="850" b="1" dirty="0">
-                <a:solidFill>
-                  <a:srgbClr val="B8692E"/>
-                </a:solidFill>
-                <a:latin typeface="Meiryo" pitchFamily="34" charset="0"/>
-                <a:ea typeface="Meiryo" pitchFamily="34" charset="-122"/>
-                <a:cs typeface="Meiryo" pitchFamily="34" charset="-120"/>
-              </a:rPr>
-              <a:t>根拠：100人×月6時間×4,000円</a:t>
-            </a:r>
-            <a:endParaRPr lang="en-US" sz="850" dirty="0"/>
-          </a:p>
-        </p:txBody>
-      </p:sp>
       <p:pic>
         <p:nvPicPr>
-          <p:cNvPr id="12" name="Image 2" descr="preencoded.png">    </p:cNvPr>
+          <p:cNvPr id="9" name="Image 2" descr="preencoded.png">    </p:cNvPr>
           <p:cNvPicPr>
             <a:picLocks noChangeAspect="1"/>
           </p:cNvPicPr>
@@ -12171,8 +14137,8 @@
         </p:blipFill>
         <p:spPr>
           <a:xfrm>
-            <a:off x="365760" y="2194560"/>
-            <a:ext cx="800100" cy="960120"/>
+            <a:off x="1280160" y="3017520"/>
+            <a:ext cx="723900" cy="868680"/>
           </a:xfrm>
           <a:prstGeom prst="rect">
             <a:avLst/>
@@ -12181,141 +14147,111 @@
       </p:pic>
       <p:sp>
         <p:nvSpPr>
-          <p:cNvPr id="13" name="Shape 7"/>
+          <p:cNvPr id="10" name="Text 4"/>
+          <p:cNvSpPr txBox="1"/>
+          <p:nvPr/>
+        </p:nvSpPr>
+        <p:spPr>
+          <a:xfrm>
+            <a:off x="365760" y="3931920"/>
+            <a:ext cx="1920240" cy="228600"/>
+          </a:xfrm>
+          <a:prstGeom prst="rect">
+            <a:avLst/>
+          </a:prstGeom>
+          <a:noFill/>
+          <a:ln/>
+        </p:spPr>
+        <p:txBody>
+          <a:bodyPr wrap="square" lIns="0" tIns="0" rIns="0" bIns="0" rtlCol="0" anchor="t"/>
+          <a:lstStyle/>
+          <a:p>
+            <a:pPr algn="ctr" indent="0" marL="0">
+              <a:lnSpc>
+                <a:spcPct val="115000"/>
+              </a:lnSpc>
+              <a:buNone/>
+            </a:pPr>
+            <a:r>
+              <a:rPr lang="en-US" sz="850" dirty="0">
+                <a:solidFill>
+                  <a:srgbClr val="4D4D4D"/>
+                </a:solidFill>
+                <a:latin typeface="Meiryo" pitchFamily="34" charset="0"/>
+                <a:ea typeface="Meiryo" pitchFamily="34" charset="-122"/>
+                <a:cs typeface="Meiryo" pitchFamily="34" charset="-120"/>
+              </a:rPr>
+              <a:t>熟練者・若手・工事部長</a:t>
+            </a:r>
+            <a:endParaRPr lang="en-US" sz="850" dirty="0"/>
+          </a:p>
+        </p:txBody>
+      </p:sp>
+      <p:sp>
+        <p:nvSpPr>
+          <p:cNvPr id="11" name="Shape 5"/>
           <p:cNvSpPr/>
           <p:nvPr/>
         </p:nvSpPr>
         <p:spPr>
           <a:xfrm>
-            <a:off x="1234440" y="2286000"/>
-            <a:ext cx="2377440" cy="548640"/>
-          </a:xfrm>
-          <a:prstGeom prst="wedgeRoundRectCallout">
+            <a:off x="3429000" y="1371600"/>
+            <a:ext cx="2240280" cy="2926080"/>
+          </a:xfrm>
+          <a:prstGeom prst="rect">
             <a:avLst/>
           </a:prstGeom>
           <a:solidFill>
-            <a:srgbClr val="FFFFFF"/>
+            <a:srgbClr val="1A1A1A"/>
           </a:solidFill>
-          <a:ln w="19050">
-            <a:solidFill>
-              <a:srgbClr val="1A1A1A"/>
-            </a:solidFill>
-            <a:prstDash val="solid"/>
-          </a:ln>
-        </p:spPr>
-      </p:sp>
-      <p:sp>
-        <p:nvSpPr>
-          <p:cNvPr id="14" name="Text 8"/>
-          <p:cNvSpPr txBox="1"/>
-          <p:nvPr/>
-        </p:nvSpPr>
-        <p:spPr>
-          <a:xfrm>
-            <a:off x="1307592" y="2322576"/>
-            <a:ext cx="2231136" cy="475488"/>
-          </a:xfrm>
-          <a:prstGeom prst="rect">
-            <a:avLst/>
-          </a:prstGeom>
-          <a:noFill/>
-          <a:ln/>
-        </p:spPr>
-        <p:txBody>
-          <a:bodyPr wrap="square" lIns="0" tIns="0" rIns="0" bIns="0" rtlCol="0" anchor="ctr"/>
+          <a:ln/>
+        </p:spPr>
+      </p:sp>
+      <p:sp>
+        <p:nvSpPr>
+          <p:cNvPr id="12" name="Text 6"/>
+          <p:cNvSpPr txBox="1"/>
+          <p:nvPr/>
+        </p:nvSpPr>
+        <p:spPr>
+          <a:xfrm>
+            <a:off x="3429000" y="1463040"/>
+            <a:ext cx="2240280" cy="274320"/>
+          </a:xfrm>
+          <a:prstGeom prst="rect">
+            <a:avLst/>
+          </a:prstGeom>
+          <a:noFill/>
+          <a:ln/>
+        </p:spPr>
+        <p:txBody>
+          <a:bodyPr wrap="square" lIns="0" tIns="0" rIns="0" bIns="0" rtlCol="0" anchor="t"/>
           <a:lstStyle/>
           <a:p>
             <a:pPr algn="ctr" indent="0" marL="0">
               <a:lnSpc>
-                <a:spcPct val="110000"/>
-              </a:lnSpc>
-              <a:buNone/>
-            </a:pPr>
-            <a:r>
-              <a:rPr lang="en-US" sz="1050" b="1" dirty="0">
-                <a:solidFill>
-                  <a:srgbClr val="1A1A1A"/>
-                </a:solidFill>
-                <a:latin typeface="Meiryo" pitchFamily="34" charset="0"/>
-                <a:ea typeface="Meiryo" pitchFamily="34" charset="-122"/>
-                <a:cs typeface="Meiryo" pitchFamily="34" charset="-120"/>
-              </a:rPr>
-              <a:t>なんで4年目まで赤字なの？</a:t>
-            </a:r>
-            <a:endParaRPr lang="en-US" sz="1050" dirty="0"/>
-          </a:p>
-        </p:txBody>
-      </p:sp>
-      <p:sp>
-        <p:nvSpPr>
-          <p:cNvPr id="15" name="Shape 9"/>
-          <p:cNvSpPr/>
-          <p:nvPr/>
-        </p:nvSpPr>
-        <p:spPr>
-          <a:xfrm flipH="1">
-            <a:off x="3703320" y="2286000"/>
-            <a:ext cx="4069080" cy="685800"/>
-          </a:xfrm>
-          <a:prstGeom prst="wedgeRoundRectCallout">
-            <a:avLst/>
-          </a:prstGeom>
-          <a:solidFill>
-            <a:srgbClr val="F2F2F2"/>
-          </a:solidFill>
-          <a:ln w="19050">
-            <a:solidFill>
-              <a:srgbClr val="1A1A1A"/>
-            </a:solidFill>
-            <a:prstDash val="solid"/>
-          </a:ln>
-        </p:spPr>
-      </p:sp>
-      <p:sp>
-        <p:nvSpPr>
-          <p:cNvPr id="16" name="Text 10"/>
-          <p:cNvSpPr txBox="1"/>
-          <p:nvPr/>
-        </p:nvSpPr>
-        <p:spPr>
-          <a:xfrm>
-            <a:off x="3776472" y="2322576"/>
-            <a:ext cx="3922776" cy="612648"/>
-          </a:xfrm>
-          <a:prstGeom prst="rect">
-            <a:avLst/>
-          </a:prstGeom>
-          <a:noFill/>
-          <a:ln/>
-        </p:spPr>
-        <p:txBody>
-          <a:bodyPr wrap="square" lIns="0" tIns="0" rIns="0" bIns="0" rtlCol="0" anchor="ctr"/>
-          <a:lstStyle/>
-          <a:p>
-            <a:pPr algn="ctr" indent="0" marL="0">
-              <a:lnSpc>
-                <a:spcPct val="110000"/>
-              </a:lnSpc>
-              <a:buNone/>
-            </a:pPr>
-            <a:r>
-              <a:rPr lang="en-US" sz="1050" dirty="0">
-                <a:solidFill>
-                  <a:srgbClr val="1A1A1A"/>
-                </a:solidFill>
-                <a:latin typeface="Meiryo" pitchFamily="34" charset="0"/>
-                <a:ea typeface="Meiryo" pitchFamily="34" charset="-122"/>
-                <a:cs typeface="Meiryo" pitchFamily="34" charset="-120"/>
-              </a:rPr>
-              <a:t>人を先に雇うからです。社員1人2.8拠点を超えたら黒字です</a:t>
-            </a:r>
-            <a:endParaRPr lang="en-US" sz="1050" dirty="0"/>
+                <a:spcPct val="115000"/>
+              </a:lnSpc>
+              <a:buNone/>
+            </a:pPr>
+            <a:r>
+              <a:rPr lang="en-US" sz="1200" b="1" dirty="0">
+                <a:solidFill>
+                  <a:srgbClr val="FFFFFF"/>
+                </a:solidFill>
+                <a:latin typeface="Meiryo" pitchFamily="34" charset="0"/>
+                <a:ea typeface="Meiryo" pitchFamily="34" charset="-122"/>
+                <a:cs typeface="Meiryo" pitchFamily="34" charset="-120"/>
+              </a:rPr>
+              <a:t>カンツギ</a:t>
+            </a:r>
+            <a:endParaRPr lang="en-US" sz="1200" dirty="0"/>
           </a:p>
         </p:txBody>
       </p:sp>
       <p:pic>
         <p:nvPicPr>
-          <p:cNvPr id="17" name="Image 3" descr="preencoded.png">    </p:cNvPr>
+          <p:cNvPr id="13" name="Image 3" descr="preencoded.png">    </p:cNvPr>
           <p:cNvPicPr>
             <a:picLocks noChangeAspect="1"/>
           </p:cNvPicPr>
@@ -12329,8 +14265,8 @@
         </p:blipFill>
         <p:spPr>
           <a:xfrm>
-            <a:off x="7863840" y="2194560"/>
-            <a:ext cx="800100" cy="960120"/>
+            <a:off x="4297680" y="1828800"/>
+            <a:ext cx="640080" cy="640080"/>
           </a:xfrm>
           <a:prstGeom prst="rect">
             <a:avLst/>
@@ -12339,14 +14275,14 @@
       </p:pic>
       <p:sp>
         <p:nvSpPr>
-          <p:cNvPr id="18" name="Text 11"/>
-          <p:cNvSpPr txBox="1"/>
-          <p:nvPr/>
-        </p:nvSpPr>
-        <p:spPr>
-          <a:xfrm>
-            <a:off x="3749040" y="2999232"/>
-            <a:ext cx="3749040" cy="219456"/>
+          <p:cNvPr id="14" name="Text 7"/>
+          <p:cNvSpPr txBox="1"/>
+          <p:nvPr/>
+        </p:nvSpPr>
+        <p:spPr>
+          <a:xfrm>
+            <a:off x="3520440" y="2514600"/>
+            <a:ext cx="2057400" cy="777240"/>
           </a:xfrm>
           <a:prstGeom prst="rect">
             <a:avLst/>
@@ -12358,30 +14294,308 @@
           <a:bodyPr wrap="square" lIns="0" tIns="0" rIns="0" bIns="0" rtlCol="0" anchor="t"/>
           <a:lstStyle/>
           <a:p>
-            <a:pPr algn="l" indent="0" marL="0">
-              <a:lnSpc>
-                <a:spcPct val="115000"/>
-              </a:lnSpc>
-              <a:buNone/>
-            </a:pPr>
-            <a:r>
-              <a:rPr lang="en-US" sz="850" b="1" dirty="0">
-                <a:solidFill>
-                  <a:srgbClr val="B8692E"/>
-                </a:solidFill>
-                <a:latin typeface="Meiryo" pitchFamily="34" charset="0"/>
-                <a:ea typeface="Meiryo" pitchFamily="34" charset="-122"/>
-                <a:cs typeface="Meiryo" pitchFamily="34" charset="-120"/>
-              </a:rPr>
-              <a:t>根拠：713万円÷255万円＝2.8</a:t>
-            </a:r>
-            <a:endParaRPr lang="en-US" sz="850" dirty="0"/>
-          </a:p>
-        </p:txBody>
+            <a:pPr algn="ctr" indent="0" marL="0">
+              <a:lnSpc>
+                <a:spcPct val="115000"/>
+              </a:lnSpc>
+              <a:buNone/>
+            </a:pPr>
+            <a:r>
+              <a:rPr lang="en-US" sz="1000" b="1" dirty="0">
+                <a:solidFill>
+                  <a:srgbClr val="FFFFFF"/>
+                </a:solidFill>
+                <a:latin typeface="Meiryo" pitchFamily="34" charset="0"/>
+                <a:ea typeface="Meiryo" pitchFamily="34" charset="-122"/>
+                <a:cs typeface="Meiryo" pitchFamily="34" charset="-120"/>
+              </a:rPr>
+              <a:t>AIが整理</a:t>
+            </a:r>
+            <a:endParaRPr lang="en-US" sz="1000" dirty="0"/>
+          </a:p>
+          <a:p>
+            <a:pPr algn="ctr" indent="0" marL="0">
+              <a:lnSpc>
+                <a:spcPct val="115000"/>
+              </a:lnSpc>
+              <a:buNone/>
+            </a:pPr>
+            <a:r>
+              <a:rPr lang="en-US" sz="1000" dirty="0">
+                <a:solidFill>
+                  <a:srgbClr val="FFFFFF"/>
+                </a:solidFill>
+                <a:latin typeface="Meiryo" pitchFamily="34" charset="0"/>
+                <a:ea typeface="Meiryo" pitchFamily="34" charset="-122"/>
+                <a:cs typeface="Meiryo" pitchFamily="34" charset="-120"/>
+              </a:rPr>
+              <a:t>記録が貯まるほど</a:t>
+            </a:r>
+            <a:endParaRPr lang="en-US" sz="1000" dirty="0"/>
+          </a:p>
+          <a:p>
+            <a:pPr algn="ctr" indent="0" marL="0">
+              <a:lnSpc>
+                <a:spcPct val="115000"/>
+              </a:lnSpc>
+              <a:buNone/>
+            </a:pPr>
+            <a:r>
+              <a:rPr lang="en-US" sz="1000" b="1" dirty="0">
+                <a:solidFill>
+                  <a:srgbClr val="E3A774"/>
+                </a:solidFill>
+                <a:latin typeface="Meiryo" pitchFamily="34" charset="0"/>
+                <a:ea typeface="Meiryo" pitchFamily="34" charset="-122"/>
+                <a:cs typeface="Meiryo" pitchFamily="34" charset="-120"/>
+              </a:rPr>
+              <a:t>真似されにくくなる</a:t>
+            </a:r>
+            <a:endParaRPr lang="en-US" sz="1000" dirty="0"/>
+          </a:p>
+        </p:txBody>
+      </p:sp>
+      <p:sp>
+        <p:nvSpPr>
+          <p:cNvPr id="15" name="Text 8"/>
+          <p:cNvSpPr txBox="1"/>
+          <p:nvPr/>
+        </p:nvSpPr>
+        <p:spPr>
+          <a:xfrm>
+            <a:off x="3520440" y="3383280"/>
+            <a:ext cx="2057400" cy="548640"/>
+          </a:xfrm>
+          <a:prstGeom prst="rect">
+            <a:avLst/>
+          </a:prstGeom>
+          <a:noFill/>
+          <a:ln/>
+        </p:spPr>
+        <p:txBody>
+          <a:bodyPr wrap="square" lIns="0" tIns="0" rIns="0" bIns="0" rtlCol="0" anchor="t"/>
+          <a:lstStyle/>
+          <a:p>
+            <a:pPr algn="ctr" indent="0" marL="0">
+              <a:lnSpc>
+                <a:spcPct val="115000"/>
+              </a:lnSpc>
+              <a:buNone/>
+            </a:pPr>
+            <a:r>
+              <a:rPr lang="en-US" sz="950" b="1" dirty="0">
+                <a:solidFill>
+                  <a:srgbClr val="FFFFFF"/>
+                </a:solidFill>
+                <a:latin typeface="Meiryo" pitchFamily="34" charset="0"/>
+                <a:ea typeface="Meiryo" pitchFamily="34" charset="-122"/>
+                <a:cs typeface="Meiryo" pitchFamily="34" charset="-120"/>
+              </a:rPr>
+              <a:t>1拠点の粗利 255万円</a:t>
+            </a:r>
+            <a:endParaRPr lang="en-US" sz="950" dirty="0"/>
+          </a:p>
+          <a:p>
+            <a:pPr algn="ctr" indent="0" marL="0">
+              <a:lnSpc>
+                <a:spcPct val="115000"/>
+              </a:lnSpc>
+              <a:buNone/>
+            </a:pPr>
+            <a:r>
+              <a:rPr lang="en-US" sz="950" dirty="0">
+                <a:solidFill>
+                  <a:srgbClr val="FFFFFF"/>
+                </a:solidFill>
+                <a:latin typeface="Meiryo" pitchFamily="34" charset="0"/>
+                <a:ea typeface="Meiryo" pitchFamily="34" charset="-122"/>
+                <a:cs typeface="Meiryo" pitchFamily="34" charset="-120"/>
+              </a:rPr>
+              <a:t>（300万円 − サーバー代45万円）</a:t>
+            </a:r>
+            <a:endParaRPr lang="en-US" sz="950" dirty="0"/>
+          </a:p>
+        </p:txBody>
+      </p:sp>
+      <p:sp>
+        <p:nvSpPr>
+          <p:cNvPr id="16" name="Shape 9"/>
+          <p:cNvSpPr/>
+          <p:nvPr/>
+        </p:nvSpPr>
+        <p:spPr>
+          <a:xfrm>
+            <a:off x="2377440" y="1737360"/>
+            <a:ext cx="960120" cy="0"/>
+          </a:xfrm>
+          <a:prstGeom prst="line">
+            <a:avLst/>
+          </a:prstGeom>
+          <a:noFill/>
+          <a:ln w="31750">
+            <a:solidFill>
+              <a:srgbClr val="1A1A1A"/>
+            </a:solidFill>
+            <a:prstDash val="solid"/>
+            <a:tailEnd type="triangle"/>
+          </a:ln>
+        </p:spPr>
+      </p:sp>
+      <p:sp>
+        <p:nvSpPr>
+          <p:cNvPr id="17" name="Text 10"/>
+          <p:cNvSpPr txBox="1"/>
+          <p:nvPr/>
+        </p:nvSpPr>
+        <p:spPr>
+          <a:xfrm>
+            <a:off x="2286000" y="1435608"/>
+            <a:ext cx="1143000" cy="256032"/>
+          </a:xfrm>
+          <a:prstGeom prst="rect">
+            <a:avLst/>
+          </a:prstGeom>
+          <a:noFill/>
+          <a:ln/>
+        </p:spPr>
+        <p:txBody>
+          <a:bodyPr wrap="square" lIns="0" tIns="0" rIns="0" bIns="0" rtlCol="0" anchor="t"/>
+          <a:lstStyle/>
+          <a:p>
+            <a:pPr algn="ctr" indent="0" marL="0">
+              <a:lnSpc>
+                <a:spcPct val="115000"/>
+              </a:lnSpc>
+              <a:buNone/>
+            </a:pPr>
+            <a:r>
+              <a:rPr lang="en-US" sz="900" b="1" dirty="0">
+                <a:solidFill>
+                  <a:srgbClr val="1A1A1A"/>
+                </a:solidFill>
+                <a:latin typeface="Meiryo" pitchFamily="34" charset="0"/>
+                <a:ea typeface="Meiryo" pitchFamily="34" charset="-122"/>
+                <a:cs typeface="Meiryo" pitchFamily="34" charset="-120"/>
+              </a:rPr>
+              <a:t>① 動画と会話</a:t>
+            </a:r>
+            <a:endParaRPr lang="en-US" sz="900" dirty="0"/>
+          </a:p>
+        </p:txBody>
+      </p:sp>
+      <p:sp>
+        <p:nvSpPr>
+          <p:cNvPr id="18" name="Shape 11"/>
+          <p:cNvSpPr/>
+          <p:nvPr/>
+        </p:nvSpPr>
+        <p:spPr>
+          <a:xfrm flipH="1">
+            <a:off x="2377440" y="2514600"/>
+            <a:ext cx="960120" cy="0"/>
+          </a:xfrm>
+          <a:prstGeom prst="line">
+            <a:avLst/>
+          </a:prstGeom>
+          <a:noFill/>
+          <a:ln w="31750">
+            <a:solidFill>
+              <a:srgbClr val="1A1A1A"/>
+            </a:solidFill>
+            <a:prstDash val="solid"/>
+            <a:tailEnd type="triangle"/>
+          </a:ln>
+        </p:spPr>
+      </p:sp>
+      <p:sp>
+        <p:nvSpPr>
+          <p:cNvPr id="19" name="Text 12"/>
+          <p:cNvSpPr txBox="1"/>
+          <p:nvPr/>
+        </p:nvSpPr>
+        <p:spPr>
+          <a:xfrm>
+            <a:off x="2286000" y="2011680"/>
+            <a:ext cx="1143000" cy="457200"/>
+          </a:xfrm>
+          <a:prstGeom prst="rect">
+            <a:avLst/>
+          </a:prstGeom>
+          <a:noFill/>
+          <a:ln/>
+        </p:spPr>
+        <p:txBody>
+          <a:bodyPr wrap="square" lIns="0" tIns="0" rIns="0" bIns="0" rtlCol="0" anchor="t"/>
+          <a:lstStyle/>
+          <a:p>
+            <a:pPr algn="ctr" indent="0" marL="0">
+              <a:lnSpc>
+                <a:spcPct val="115000"/>
+              </a:lnSpc>
+              <a:buNone/>
+            </a:pPr>
+            <a:r>
+              <a:rPr lang="en-US" sz="900" b="1" dirty="0">
+                <a:solidFill>
+                  <a:srgbClr val="1A1A1A"/>
+                </a:solidFill>
+                <a:latin typeface="Meiryo" pitchFamily="34" charset="0"/>
+                <a:ea typeface="Meiryo" pitchFamily="34" charset="-122"/>
+                <a:cs typeface="Meiryo" pitchFamily="34" charset="-120"/>
+              </a:rPr>
+              <a:t>② 照合・報告書</a:t>
+            </a:r>
+            <a:endParaRPr lang="en-US" sz="900" dirty="0"/>
+          </a:p>
+          <a:p>
+            <a:pPr algn="ctr" indent="0" marL="0">
+              <a:lnSpc>
+                <a:spcPct val="115000"/>
+              </a:lnSpc>
+              <a:buNone/>
+            </a:pPr>
+            <a:r>
+              <a:rPr lang="en-US" sz="900" b="1" dirty="0">
+                <a:solidFill>
+                  <a:srgbClr val="1A1A1A"/>
+                </a:solidFill>
+                <a:latin typeface="Meiryo" pitchFamily="34" charset="0"/>
+                <a:ea typeface="Meiryo" pitchFamily="34" charset="-122"/>
+                <a:cs typeface="Meiryo" pitchFamily="34" charset="-120"/>
+              </a:rPr>
+              <a:t>・教材</a:t>
+            </a:r>
+            <a:endParaRPr lang="en-US" sz="900" dirty="0"/>
+          </a:p>
+        </p:txBody>
+      </p:sp>
+      <p:sp>
+        <p:nvSpPr>
+          <p:cNvPr id="20" name="Shape 13"/>
+          <p:cNvSpPr/>
+          <p:nvPr/>
+        </p:nvSpPr>
+        <p:spPr>
+          <a:xfrm>
+            <a:off x="2377440" y="3749040"/>
+            <a:ext cx="960120" cy="0"/>
+          </a:xfrm>
+          <a:prstGeom prst="line">
+            <a:avLst/>
+          </a:prstGeom>
+          <a:noFill/>
+          <a:ln w="50800">
+            <a:solidFill>
+              <a:srgbClr val="B8692E"/>
+            </a:solidFill>
+            <a:prstDash val="solid"/>
+            <a:tailEnd type="triangle"/>
+          </a:ln>
+        </p:spPr>
       </p:sp>
       <p:pic>
         <p:nvPicPr>
-          <p:cNvPr id="19" name="Image 4" descr="preencoded.png">    </p:cNvPr>
+          <p:cNvPr id="21" name="Image 4" descr="preencoded.png">    </p:cNvPr>
           <p:cNvPicPr>
             <a:picLocks noChangeAspect="1"/>
           </p:cNvPicPr>
@@ -12395,8 +14609,8 @@
         </p:blipFill>
         <p:spPr>
           <a:xfrm>
-            <a:off x="365760" y="3337560"/>
-            <a:ext cx="800100" cy="960120"/>
+            <a:off x="2651760" y="3154680"/>
+            <a:ext cx="457200" cy="457200"/>
           </a:xfrm>
           <a:prstGeom prst="rect">
             <a:avLst/>
@@ -12405,106 +14619,124 @@
       </p:pic>
       <p:sp>
         <p:nvSpPr>
-          <p:cNvPr id="20" name="Shape 12"/>
+          <p:cNvPr id="22" name="Text 14"/>
+          <p:cNvSpPr txBox="1"/>
+          <p:nvPr/>
+        </p:nvSpPr>
+        <p:spPr>
+          <a:xfrm>
+            <a:off x="2286000" y="3840480"/>
+            <a:ext cx="1143000" cy="256032"/>
+          </a:xfrm>
+          <a:prstGeom prst="rect">
+            <a:avLst/>
+          </a:prstGeom>
+          <a:noFill/>
+          <a:ln/>
+        </p:spPr>
+        <p:txBody>
+          <a:bodyPr wrap="square" lIns="0" tIns="0" rIns="0" bIns="0" rtlCol="0" anchor="t"/>
+          <a:lstStyle/>
+          <a:p>
+            <a:pPr algn="ctr" indent="0" marL="0">
+              <a:lnSpc>
+                <a:spcPct val="115000"/>
+              </a:lnSpc>
+              <a:buNone/>
+            </a:pPr>
+            <a:r>
+              <a:rPr lang="en-US" sz="1000" b="1" dirty="0">
+                <a:solidFill>
+                  <a:srgbClr val="B8692E"/>
+                </a:solidFill>
+                <a:latin typeface="Meiryo" pitchFamily="34" charset="0"/>
+                <a:ea typeface="Meiryo" pitchFamily="34" charset="-122"/>
+                <a:cs typeface="Meiryo" pitchFamily="34" charset="-120"/>
+              </a:rPr>
+              <a:t>③ 年300万円</a:t>
+            </a:r>
+            <a:endParaRPr lang="en-US" sz="1000" dirty="0"/>
+          </a:p>
+        </p:txBody>
+      </p:sp>
+      <p:sp>
+        <p:nvSpPr>
+          <p:cNvPr id="23" name="Shape 15"/>
           <p:cNvSpPr/>
           <p:nvPr/>
         </p:nvSpPr>
         <p:spPr>
           <a:xfrm>
-            <a:off x="1234440" y="3429000"/>
-            <a:ext cx="2377440" cy="548640"/>
-          </a:xfrm>
-          <a:prstGeom prst="wedgeRoundRectCallout">
-            <a:avLst/>
-          </a:prstGeom>
-          <a:solidFill>
-            <a:srgbClr val="FFFFFF"/>
-          </a:solidFill>
-          <a:ln w="19050">
+            <a:off x="5705856" y="2011680"/>
+            <a:ext cx="347472" cy="0"/>
+          </a:xfrm>
+          <a:prstGeom prst="line">
+            <a:avLst/>
+          </a:prstGeom>
+          <a:noFill/>
+          <a:ln w="31750">
             <a:solidFill>
               <a:srgbClr val="1A1A1A"/>
             </a:solidFill>
             <a:prstDash val="solid"/>
+            <a:tailEnd type="triangle"/>
           </a:ln>
         </p:spPr>
       </p:sp>
       <p:sp>
         <p:nvSpPr>
-          <p:cNvPr id="21" name="Text 13"/>
-          <p:cNvSpPr txBox="1"/>
-          <p:nvPr/>
-        </p:nvSpPr>
-        <p:spPr>
-          <a:xfrm>
-            <a:off x="1307592" y="3465576"/>
-            <a:ext cx="2231136" cy="475488"/>
-          </a:xfrm>
-          <a:prstGeom prst="rect">
-            <a:avLst/>
-          </a:prstGeom>
-          <a:noFill/>
-          <a:ln/>
-        </p:spPr>
-        <p:txBody>
-          <a:bodyPr wrap="square" lIns="0" tIns="0" rIns="0" bIns="0" rtlCol="0" anchor="ctr"/>
-          <a:lstStyle/>
-          <a:p>
-            <a:pPr algn="ctr" indent="0" marL="0">
-              <a:lnSpc>
-                <a:spcPct val="110000"/>
-              </a:lnSpc>
-              <a:buNone/>
-            </a:pPr>
-            <a:r>
-              <a:rPr lang="en-US" sz="1050" b="1" dirty="0">
-                <a:solidFill>
-                  <a:srgbClr val="1A1A1A"/>
-                </a:solidFill>
-                <a:latin typeface="Meiryo" pitchFamily="34" charset="0"/>
-                <a:ea typeface="Meiryo" pitchFamily="34" charset="-122"/>
-                <a:cs typeface="Meiryo" pitchFamily="34" charset="-120"/>
-              </a:rPr>
-              <a:t>真似されたら終わりでは？</a:t>
-            </a:r>
-            <a:endParaRPr lang="en-US" sz="1050" dirty="0"/>
-          </a:p>
-        </p:txBody>
-      </p:sp>
-      <p:sp>
-        <p:nvSpPr>
-          <p:cNvPr id="22" name="Shape 14"/>
+          <p:cNvPr id="24" name="Shape 16"/>
           <p:cNvSpPr/>
           <p:nvPr/>
         </p:nvSpPr>
         <p:spPr>
-          <a:xfrm flipH="1">
-            <a:off x="3703320" y="3429000"/>
-            <a:ext cx="4069080" cy="685800"/>
-          </a:xfrm>
-          <a:prstGeom prst="wedgeRoundRectCallout">
-            <a:avLst/>
-          </a:prstGeom>
-          <a:solidFill>
-            <a:srgbClr val="F2F2F2"/>
-          </a:solidFill>
-          <a:ln w="19050">
+          <a:xfrm>
+            <a:off x="5705856" y="3566160"/>
+            <a:ext cx="347472" cy="0"/>
+          </a:xfrm>
+          <a:prstGeom prst="line">
+            <a:avLst/>
+          </a:prstGeom>
+          <a:noFill/>
+          <a:ln w="31750">
             <a:solidFill>
               <a:srgbClr val="1A1A1A"/>
             </a:solidFill>
             <a:prstDash val="solid"/>
+            <a:tailEnd type="triangle"/>
           </a:ln>
         </p:spPr>
       </p:sp>
       <p:sp>
         <p:nvSpPr>
-          <p:cNvPr id="23" name="Text 15"/>
-          <p:cNvSpPr txBox="1"/>
-          <p:nvPr/>
-        </p:nvSpPr>
-        <p:spPr>
-          <a:xfrm>
-            <a:off x="3776472" y="3465576"/>
-            <a:ext cx="3922776" cy="612648"/>
+          <p:cNvPr id="25" name="Shape 17"/>
+          <p:cNvSpPr/>
+          <p:nvPr/>
+        </p:nvSpPr>
+        <p:spPr>
+          <a:xfrm>
+            <a:off x="6080760" y="1371600"/>
+            <a:ext cx="2697480" cy="1280160"/>
+          </a:xfrm>
+          <a:prstGeom prst="rect">
+            <a:avLst/>
+          </a:prstGeom>
+          <a:solidFill>
+            <a:srgbClr val="F2F2F2"/>
+          </a:solidFill>
+          <a:ln/>
+        </p:spPr>
+      </p:sp>
+      <p:sp>
+        <p:nvSpPr>
+          <p:cNvPr id="26" name="Text 18"/>
+          <p:cNvSpPr txBox="1"/>
+          <p:nvPr/>
+        </p:nvSpPr>
+        <p:spPr>
+          <a:xfrm>
+            <a:off x="6190488" y="1417320"/>
+            <a:ext cx="2478024" cy="1188720"/>
           </a:xfrm>
           <a:prstGeom prst="rect">
             <a:avLst/>
@@ -12516,14 +14748,40 @@
           <a:bodyPr wrap="square" lIns="0" tIns="0" rIns="0" bIns="0" rtlCol="0" anchor="ctr"/>
           <a:lstStyle/>
           <a:p>
-            <a:pPr algn="ctr" indent="0" marL="0">
-              <a:lnSpc>
-                <a:spcPct val="110000"/>
-              </a:lnSpc>
-              <a:buNone/>
-            </a:pPr>
-            <a:r>
-              <a:rPr lang="en-US" sz="1050" dirty="0">
+            <a:pPr algn="l" indent="0" marL="0">
+              <a:lnSpc>
+                <a:spcPct val="115000"/>
+              </a:lnSpc>
+              <a:spcAft>
+                <a:spcPts val="300"/>
+              </a:spcAft>
+              <a:buNone/>
+            </a:pPr>
+            <a:r>
+              <a:rPr lang="en-US" sz="1000" b="1" dirty="0">
+                <a:solidFill>
+                  <a:srgbClr val="B8692E"/>
+                </a:solidFill>
+                <a:latin typeface="Meiryo" pitchFamily="34" charset="0"/>
+                <a:ea typeface="Meiryo" pitchFamily="34" charset="-122"/>
+                <a:cs typeface="Meiryo" pitchFamily="34" charset="-120"/>
+              </a:rPr>
+              <a:t>④ 出ていくお金</a:t>
+            </a:r>
+            <a:endParaRPr lang="en-US" sz="1000" dirty="0"/>
+          </a:p>
+          <a:p>
+            <a:pPr algn="l" indent="0" marL="0">
+              <a:lnSpc>
+                <a:spcPct val="115000"/>
+              </a:lnSpc>
+              <a:spcAft>
+                <a:spcPts val="300"/>
+              </a:spcAft>
+              <a:buNone/>
+            </a:pPr>
+            <a:r>
+              <a:rPr lang="en-US" sz="1000" dirty="0">
                 <a:solidFill>
                   <a:srgbClr val="1A1A1A"/>
                 </a:solidFill>
@@ -12531,46 +14789,184 @@
                 <a:ea typeface="Meiryo" pitchFamily="34" charset="-122"/>
                 <a:cs typeface="Meiryo" pitchFamily="34" charset="-120"/>
               </a:rPr>
-              <a:t>現場の記録は使うほど貯まり、後から来た会社には移せません</a:t>
-            </a:r>
-            <a:endParaRPr lang="en-US" sz="1050" dirty="0"/>
-          </a:p>
-        </p:txBody>
-      </p:sp>
-      <p:pic>
-        <p:nvPicPr>
-          <p:cNvPr id="24" name="Image 5" descr="preencoded.png">    </p:cNvPr>
-          <p:cNvPicPr>
-            <a:picLocks noChangeAspect="1"/>
-          </p:cNvPicPr>
-          <p:nvPr/>
-        </p:nvPicPr>
-        <p:blipFill>
-          <a:blip r:embed="rId6"/>
-          <a:stretch>
-            <a:fillRect/>
-          </a:stretch>
-        </p:blipFill>
-        <p:spPr>
-          <a:xfrm>
-            <a:off x="7863840" y="3337560"/>
-            <a:ext cx="800100" cy="960120"/>
-          </a:xfrm>
-          <a:prstGeom prst="rect">
-            <a:avLst/>
-          </a:prstGeom>
-        </p:spPr>
-      </p:pic>
-      <p:sp>
-        <p:nvSpPr>
-          <p:cNvPr id="25" name="Text 16"/>
-          <p:cNvSpPr txBox="1"/>
-          <p:nvPr/>
-        </p:nvSpPr>
-        <p:spPr>
-          <a:xfrm>
-            <a:off x="3749040" y="4142232"/>
-            <a:ext cx="3749040" cy="219456"/>
+              <a:t>サーバー・AI代：売上の15%</a:t>
+            </a:r>
+            <a:endParaRPr lang="en-US" sz="1000" dirty="0"/>
+          </a:p>
+          <a:p>
+            <a:pPr algn="l" indent="0" marL="0">
+              <a:lnSpc>
+                <a:spcPct val="115000"/>
+              </a:lnSpc>
+              <a:spcAft>
+                <a:spcPts val="300"/>
+              </a:spcAft>
+              <a:buNone/>
+            </a:pPr>
+            <a:r>
+              <a:rPr lang="en-US" sz="1000" dirty="0">
+                <a:solidFill>
+                  <a:srgbClr val="1A1A1A"/>
+                </a:solidFill>
+                <a:latin typeface="Meiryo" pitchFamily="34" charset="0"/>
+                <a:ea typeface="Meiryo" pitchFamily="34" charset="-122"/>
+                <a:cs typeface="Meiryo" pitchFamily="34" charset="-120"/>
+              </a:rPr>
+              <a:t>社員1人：年694万円（給料・家賃など）</a:t>
+            </a:r>
+            <a:endParaRPr lang="en-US" sz="1000" dirty="0"/>
+          </a:p>
+        </p:txBody>
+      </p:sp>
+      <p:sp>
+        <p:nvSpPr>
+          <p:cNvPr id="27" name="Shape 19"/>
+          <p:cNvSpPr/>
+          <p:nvPr/>
+        </p:nvSpPr>
+        <p:spPr>
+          <a:xfrm>
+            <a:off x="6080760" y="2880360"/>
+            <a:ext cx="2697480" cy="1417320"/>
+          </a:xfrm>
+          <a:prstGeom prst="rect">
+            <a:avLst/>
+          </a:prstGeom>
+          <a:solidFill>
+            <a:srgbClr val="FFFFFF"/>
+          </a:solidFill>
+          <a:ln w="25400">
+            <a:solidFill>
+              <a:srgbClr val="B8692E"/>
+            </a:solidFill>
+            <a:prstDash val="solid"/>
+          </a:ln>
+        </p:spPr>
+      </p:sp>
+      <p:sp>
+        <p:nvSpPr>
+          <p:cNvPr id="28" name="Text 20"/>
+          <p:cNvSpPr txBox="1"/>
+          <p:nvPr/>
+        </p:nvSpPr>
+        <p:spPr>
+          <a:xfrm>
+            <a:off x="6190488" y="2926080"/>
+            <a:ext cx="2478024" cy="1325880"/>
+          </a:xfrm>
+          <a:prstGeom prst="rect">
+            <a:avLst/>
+          </a:prstGeom>
+          <a:noFill/>
+          <a:ln/>
+        </p:spPr>
+        <p:txBody>
+          <a:bodyPr wrap="square" lIns="0" tIns="0" rIns="0" bIns="0" rtlCol="0" anchor="ctr"/>
+          <a:lstStyle/>
+          <a:p>
+            <a:pPr algn="l" indent="0" marL="0">
+              <a:lnSpc>
+                <a:spcPct val="115000"/>
+              </a:lnSpc>
+              <a:spcAft>
+                <a:spcPts val="200"/>
+              </a:spcAft>
+              <a:buNone/>
+            </a:pPr>
+            <a:r>
+              <a:rPr lang="en-US" sz="1000" b="1" dirty="0">
+                <a:solidFill>
+                  <a:srgbClr val="B8692E"/>
+                </a:solidFill>
+                <a:latin typeface="Meiryo" pitchFamily="34" charset="0"/>
+                <a:ea typeface="Meiryo" pitchFamily="34" charset="-122"/>
+                <a:cs typeface="Meiryo" pitchFamily="34" charset="-120"/>
+              </a:rPr>
+              <a:t>⑤ 黒字の条件</a:t>
+            </a:r>
+            <a:endParaRPr lang="en-US" sz="1000" dirty="0"/>
+          </a:p>
+          <a:p>
+            <a:pPr algn="l" indent="0" marL="0">
+              <a:lnSpc>
+                <a:spcPct val="115000"/>
+              </a:lnSpc>
+              <a:spcAft>
+                <a:spcPts val="200"/>
+              </a:spcAft>
+              <a:buNone/>
+            </a:pPr>
+            <a:r>
+              <a:rPr lang="en-US" sz="1500" b="1" dirty="0">
+                <a:solidFill>
+                  <a:srgbClr val="1A1A1A"/>
+                </a:solidFill>
+                <a:latin typeface="Meiryo" pitchFamily="34" charset="0"/>
+                <a:ea typeface="Meiryo" pitchFamily="34" charset="-122"/>
+                <a:cs typeface="Meiryo" pitchFamily="34" charset="-120"/>
+              </a:rPr>
+              <a:t>社員1人 × 3拠点 以上</a:t>
+            </a:r>
+            <a:endParaRPr lang="en-US" sz="1000" dirty="0"/>
+          </a:p>
+          <a:p>
+            <a:pPr algn="l" indent="0" marL="0">
+              <a:lnSpc>
+                <a:spcPct val="115000"/>
+              </a:lnSpc>
+              <a:spcAft>
+                <a:spcPts val="200"/>
+              </a:spcAft>
+              <a:buNone/>
+            </a:pPr>
+            <a:r>
+              <a:rPr lang="en-US" sz="1000" dirty="0">
+                <a:solidFill>
+                  <a:srgbClr val="1A1A1A"/>
+                </a:solidFill>
+                <a:latin typeface="Meiryo" pitchFamily="34" charset="0"/>
+                <a:ea typeface="Meiryo" pitchFamily="34" charset="-122"/>
+                <a:cs typeface="Meiryo" pitchFamily="34" charset="-120"/>
+              </a:rPr>
+              <a:t>4年目に3.44となり黒字</a:t>
+            </a:r>
+            <a:endParaRPr lang="en-US" sz="1000" dirty="0"/>
+          </a:p>
+          <a:p>
+            <a:pPr algn="l" indent="0" marL="0">
+              <a:lnSpc>
+                <a:spcPct val="115000"/>
+              </a:lnSpc>
+              <a:spcAft>
+                <a:spcPts val="200"/>
+              </a:spcAft>
+              <a:buNone/>
+            </a:pPr>
+            <a:r>
+              <a:rPr lang="en-US" sz="1000" dirty="0">
+                <a:solidFill>
+                  <a:srgbClr val="1A1A1A"/>
+                </a:solidFill>
+                <a:latin typeface="Meiryo" pitchFamily="34" charset="0"/>
+                <a:ea typeface="Meiryo" pitchFamily="34" charset="-122"/>
+                <a:cs typeface="Meiryo" pitchFamily="34" charset="-120"/>
+              </a:rPr>
+              <a:t>5年目 営業利益 約6,100万円</a:t>
+            </a:r>
+            <a:endParaRPr lang="en-US" sz="1000" dirty="0"/>
+          </a:p>
+        </p:txBody>
+      </p:sp>
+      <p:sp>
+        <p:nvSpPr>
+          <p:cNvPr id="29" name="Text 21"/>
+          <p:cNvSpPr txBox="1"/>
+          <p:nvPr/>
+        </p:nvSpPr>
+        <p:spPr>
+          <a:xfrm>
+            <a:off x="365760" y="4434840"/>
+            <a:ext cx="8412480" cy="237744"/>
           </a:xfrm>
           <a:prstGeom prst="rect">
             <a:avLst/>
@@ -12589,59 +14985,17 @@
               <a:buNone/>
             </a:pPr>
             <a:r>
-              <a:rPr lang="en-US" sz="850" b="1" dirty="0">
-                <a:solidFill>
-                  <a:srgbClr val="B8692E"/>
-                </a:solidFill>
-                <a:latin typeface="Meiryo" pitchFamily="34" charset="0"/>
-                <a:ea typeface="Meiryo" pitchFamily="34" charset="-122"/>
-                <a:cs typeface="Meiryo" pitchFamily="34" charset="-120"/>
-              </a:rPr>
-              <a:t>根拠：貯まる・意味づけ・業界の型</a:t>
-            </a:r>
-            <a:endParaRPr lang="en-US" sz="850" dirty="0"/>
-          </a:p>
-        </p:txBody>
-      </p:sp>
-      <p:sp>
-        <p:nvSpPr>
-          <p:cNvPr id="26" name="Text 17"/>
-          <p:cNvSpPr txBox="1"/>
-          <p:nvPr/>
-        </p:nvSpPr>
-        <p:spPr>
-          <a:xfrm>
-            <a:off x="365760" y="4480560"/>
-            <a:ext cx="8412480" cy="219456"/>
-          </a:xfrm>
-          <a:prstGeom prst="rect">
-            <a:avLst/>
-          </a:prstGeom>
-          <a:noFill/>
-          <a:ln/>
-        </p:spPr>
-        <p:txBody>
-          <a:bodyPr wrap="square" lIns="0" tIns="0" rIns="0" bIns="0" rtlCol="0" anchor="t"/>
-          <a:lstStyle/>
-          <a:p>
-            <a:pPr algn="l" indent="0" marL="0">
-              <a:lnSpc>
-                <a:spcPct val="115000"/>
-              </a:lnSpc>
-              <a:buNone/>
-            </a:pPr>
-            <a:r>
-              <a:rPr lang="en-US" sz="800" dirty="0">
-                <a:solidFill>
-                  <a:srgbClr val="8C8C8C"/>
-                </a:solidFill>
-                <a:latin typeface="Meiryo" pitchFamily="34" charset="0"/>
-                <a:ea typeface="Meiryo" pitchFamily="34" charset="-122"/>
-                <a:cs typeface="Meiryo" pitchFamily="34" charset="-120"/>
-              </a:rPr>
-              <a:t>左：投資家　右：社長（わたし）。細かい計算は「理論武装版」に</a:t>
-            </a:r>
-            <a:endParaRPr lang="en-US" sz="800" dirty="0"/>
+              <a:rPr lang="en-US" sz="950" b="1" dirty="0">
+                <a:solidFill>
+                  <a:srgbClr val="4D4D4D"/>
+                </a:solidFill>
+                <a:latin typeface="Meiryo" pitchFamily="34" charset="0"/>
+                <a:ea typeface="Meiryo" pitchFamily="34" charset="-122"/>
+                <a:cs typeface="Meiryo" pitchFamily="34" charset="-120"/>
+              </a:rPr>
+              <a:t>将来：貯まった作業の記録で、ロボットに作業を教える（フィジカルAI）</a:t>
+            </a:r>
+            <a:endParaRPr lang="en-US" sz="950" dirty="0"/>
           </a:p>
         </p:txBody>
       </p:sp>
@@ -12754,7 +15108,7 @@
                 <a:ea typeface="Meiryo" pitchFamily="34" charset="-122"/>
                 <a:cs typeface="Meiryo" pitchFamily="34" charset="-120"/>
               </a:rPr>
-              <a:t>まとめ ─ この3つの数字だけ覚えれば、話せる</a:t>
+              <a:t>よくあるツッコミ3つ ─ この一言で返す</a:t>
             </a:r>
             <a:endParaRPr lang="en-US" sz="2000" dirty="0"/>
           </a:p>
@@ -12796,7 +15150,878 @@
                 <a:ea typeface="Meiryo" pitchFamily="34" charset="-122"/>
                 <a:cs typeface="Meiryo" pitchFamily="34" charset="-120"/>
               </a:rPr>
-              <a:t>300万・255万・2.8。順番に言えば、お金の仕組みが全部つながる</a:t>
+              <a:t>答えは必ず数字から言う。理由は後</a:t>
+            </a:r>
+            <a:endParaRPr lang="en-US" sz="1200" dirty="0"/>
+          </a:p>
+        </p:txBody>
+      </p:sp>
+      <p:pic>
+        <p:nvPicPr>
+          <p:cNvPr id="5" name="Image 0" descr="preencoded.png">    </p:cNvPr>
+          <p:cNvPicPr>
+            <a:picLocks noChangeAspect="1"/>
+          </p:cNvPicPr>
+          <p:nvPr/>
+        </p:nvPicPr>
+        <p:blipFill>
+          <a:blip r:embed="rId1"/>
+          <a:stretch>
+            <a:fillRect/>
+          </a:stretch>
+        </p:blipFill>
+        <p:spPr>
+          <a:xfrm>
+            <a:off x="365760" y="1051560"/>
+            <a:ext cx="800100" cy="960120"/>
+          </a:xfrm>
+          <a:prstGeom prst="rect">
+            <a:avLst/>
+          </a:prstGeom>
+        </p:spPr>
+      </p:pic>
+      <p:sp>
+        <p:nvSpPr>
+          <p:cNvPr id="6" name="Shape 2"/>
+          <p:cNvSpPr/>
+          <p:nvPr/>
+        </p:nvSpPr>
+        <p:spPr>
+          <a:xfrm>
+            <a:off x="1234440" y="1143000"/>
+            <a:ext cx="2377440" cy="548640"/>
+          </a:xfrm>
+          <a:prstGeom prst="wedgeRoundRectCallout">
+            <a:avLst/>
+          </a:prstGeom>
+          <a:solidFill>
+            <a:srgbClr val="FFFFFF"/>
+          </a:solidFill>
+          <a:ln w="19050">
+            <a:solidFill>
+              <a:srgbClr val="1A1A1A"/>
+            </a:solidFill>
+            <a:prstDash val="solid"/>
+          </a:ln>
+        </p:spPr>
+      </p:sp>
+      <p:sp>
+        <p:nvSpPr>
+          <p:cNvPr id="7" name="Text 3"/>
+          <p:cNvSpPr txBox="1"/>
+          <p:nvPr/>
+        </p:nvSpPr>
+        <p:spPr>
+          <a:xfrm>
+            <a:off x="1307592" y="1179576"/>
+            <a:ext cx="2231136" cy="475488"/>
+          </a:xfrm>
+          <a:prstGeom prst="rect">
+            <a:avLst/>
+          </a:prstGeom>
+          <a:noFill/>
+          <a:ln/>
+        </p:spPr>
+        <p:txBody>
+          <a:bodyPr wrap="square" lIns="0" tIns="0" rIns="0" bIns="0" rtlCol="0" anchor="ctr"/>
+          <a:lstStyle/>
+          <a:p>
+            <a:pPr algn="ctr" indent="0" marL="0">
+              <a:lnSpc>
+                <a:spcPct val="110000"/>
+              </a:lnSpc>
+              <a:buNone/>
+            </a:pPr>
+            <a:r>
+              <a:rPr lang="en-US" sz="1050" b="1" dirty="0">
+                <a:solidFill>
+                  <a:srgbClr val="1A1A1A"/>
+                </a:solidFill>
+                <a:latin typeface="Meiryo" pitchFamily="34" charset="0"/>
+                <a:ea typeface="Meiryo" pitchFamily="34" charset="-122"/>
+                <a:cs typeface="Meiryo" pitchFamily="34" charset="-120"/>
+              </a:rPr>
+              <a:t>本当に年300万円も払うの？</a:t>
+            </a:r>
+            <a:endParaRPr lang="en-US" sz="1050" dirty="0"/>
+          </a:p>
+        </p:txBody>
+      </p:sp>
+      <p:sp>
+        <p:nvSpPr>
+          <p:cNvPr id="8" name="Shape 4"/>
+          <p:cNvSpPr/>
+          <p:nvPr/>
+        </p:nvSpPr>
+        <p:spPr>
+          <a:xfrm flipH="1">
+            <a:off x="3703320" y="1143000"/>
+            <a:ext cx="4069080" cy="685800"/>
+          </a:xfrm>
+          <a:prstGeom prst="wedgeRoundRectCallout">
+            <a:avLst/>
+          </a:prstGeom>
+          <a:solidFill>
+            <a:srgbClr val="F2F2F2"/>
+          </a:solidFill>
+          <a:ln w="19050">
+            <a:solidFill>
+              <a:srgbClr val="1A1A1A"/>
+            </a:solidFill>
+            <a:prstDash val="solid"/>
+          </a:ln>
+        </p:spPr>
+      </p:sp>
+      <p:sp>
+        <p:nvSpPr>
+          <p:cNvPr id="9" name="Text 5"/>
+          <p:cNvSpPr txBox="1"/>
+          <p:nvPr/>
+        </p:nvSpPr>
+        <p:spPr>
+          <a:xfrm>
+            <a:off x="3776472" y="1179576"/>
+            <a:ext cx="3922776" cy="612648"/>
+          </a:xfrm>
+          <a:prstGeom prst="rect">
+            <a:avLst/>
+          </a:prstGeom>
+          <a:noFill/>
+          <a:ln/>
+        </p:spPr>
+        <p:txBody>
+          <a:bodyPr wrap="square" lIns="0" tIns="0" rIns="0" bIns="0" rtlCol="0" anchor="ctr"/>
+          <a:lstStyle/>
+          <a:p>
+            <a:pPr algn="ctr" indent="0" marL="0">
+              <a:lnSpc>
+                <a:spcPct val="110000"/>
+              </a:lnSpc>
+              <a:buNone/>
+            </a:pPr>
+            <a:r>
+              <a:rPr lang="en-US" sz="1050" dirty="0">
+                <a:solidFill>
+                  <a:srgbClr val="1A1A1A"/>
+                </a:solidFill>
+                <a:latin typeface="Meiryo" pitchFamily="34" charset="0"/>
+                <a:ea typeface="Meiryo" pitchFamily="34" charset="-122"/>
+                <a:cs typeface="Meiryo" pitchFamily="34" charset="-120"/>
+              </a:rPr>
+              <a:t>月240万円分の時間が浮くので、約2か月で元が取れます</a:t>
+            </a:r>
+            <a:endParaRPr lang="en-US" sz="1050" dirty="0"/>
+          </a:p>
+        </p:txBody>
+      </p:sp>
+      <p:pic>
+        <p:nvPicPr>
+          <p:cNvPr id="10" name="Image 1" descr="preencoded.png">    </p:cNvPr>
+          <p:cNvPicPr>
+            <a:picLocks noChangeAspect="1"/>
+          </p:cNvPicPr>
+          <p:nvPr/>
+        </p:nvPicPr>
+        <p:blipFill>
+          <a:blip r:embed="rId2"/>
+          <a:stretch>
+            <a:fillRect/>
+          </a:stretch>
+        </p:blipFill>
+        <p:spPr>
+          <a:xfrm>
+            <a:off x="7863840" y="1051560"/>
+            <a:ext cx="800100" cy="960120"/>
+          </a:xfrm>
+          <a:prstGeom prst="rect">
+            <a:avLst/>
+          </a:prstGeom>
+        </p:spPr>
+      </p:pic>
+      <p:sp>
+        <p:nvSpPr>
+          <p:cNvPr id="11" name="Text 6"/>
+          <p:cNvSpPr txBox="1"/>
+          <p:nvPr/>
+        </p:nvSpPr>
+        <p:spPr>
+          <a:xfrm>
+            <a:off x="3749040" y="1856232"/>
+            <a:ext cx="3749040" cy="219456"/>
+          </a:xfrm>
+          <a:prstGeom prst="rect">
+            <a:avLst/>
+          </a:prstGeom>
+          <a:noFill/>
+          <a:ln/>
+        </p:spPr>
+        <p:txBody>
+          <a:bodyPr wrap="square" lIns="0" tIns="0" rIns="0" bIns="0" rtlCol="0" anchor="t"/>
+          <a:lstStyle/>
+          <a:p>
+            <a:pPr algn="l" indent="0" marL="0">
+              <a:lnSpc>
+                <a:spcPct val="115000"/>
+              </a:lnSpc>
+              <a:buNone/>
+            </a:pPr>
+            <a:r>
+              <a:rPr lang="en-US" sz="850" b="1" dirty="0">
+                <a:solidFill>
+                  <a:srgbClr val="B8692E"/>
+                </a:solidFill>
+                <a:latin typeface="Meiryo" pitchFamily="34" charset="0"/>
+                <a:ea typeface="Meiryo" pitchFamily="34" charset="-122"/>
+                <a:cs typeface="Meiryo" pitchFamily="34" charset="-120"/>
+              </a:rPr>
+              <a:t>根拠：100人×月6時間×4,000円</a:t>
+            </a:r>
+            <a:endParaRPr lang="en-US" sz="850" dirty="0"/>
+          </a:p>
+        </p:txBody>
+      </p:sp>
+      <p:pic>
+        <p:nvPicPr>
+          <p:cNvPr id="12" name="Image 2" descr="preencoded.png">    </p:cNvPr>
+          <p:cNvPicPr>
+            <a:picLocks noChangeAspect="1"/>
+          </p:cNvPicPr>
+          <p:nvPr/>
+        </p:nvPicPr>
+        <p:blipFill>
+          <a:blip r:embed="rId3"/>
+          <a:stretch>
+            <a:fillRect/>
+          </a:stretch>
+        </p:blipFill>
+        <p:spPr>
+          <a:xfrm>
+            <a:off x="365760" y="2194560"/>
+            <a:ext cx="800100" cy="960120"/>
+          </a:xfrm>
+          <a:prstGeom prst="rect">
+            <a:avLst/>
+          </a:prstGeom>
+        </p:spPr>
+      </p:pic>
+      <p:sp>
+        <p:nvSpPr>
+          <p:cNvPr id="13" name="Shape 7"/>
+          <p:cNvSpPr/>
+          <p:nvPr/>
+        </p:nvSpPr>
+        <p:spPr>
+          <a:xfrm>
+            <a:off x="1234440" y="2286000"/>
+            <a:ext cx="2377440" cy="548640"/>
+          </a:xfrm>
+          <a:prstGeom prst="wedgeRoundRectCallout">
+            <a:avLst/>
+          </a:prstGeom>
+          <a:solidFill>
+            <a:srgbClr val="FFFFFF"/>
+          </a:solidFill>
+          <a:ln w="19050">
+            <a:solidFill>
+              <a:srgbClr val="1A1A1A"/>
+            </a:solidFill>
+            <a:prstDash val="solid"/>
+          </a:ln>
+        </p:spPr>
+      </p:sp>
+      <p:sp>
+        <p:nvSpPr>
+          <p:cNvPr id="14" name="Text 8"/>
+          <p:cNvSpPr txBox="1"/>
+          <p:nvPr/>
+        </p:nvSpPr>
+        <p:spPr>
+          <a:xfrm>
+            <a:off x="1307592" y="2322576"/>
+            <a:ext cx="2231136" cy="475488"/>
+          </a:xfrm>
+          <a:prstGeom prst="rect">
+            <a:avLst/>
+          </a:prstGeom>
+          <a:noFill/>
+          <a:ln/>
+        </p:spPr>
+        <p:txBody>
+          <a:bodyPr wrap="square" lIns="0" tIns="0" rIns="0" bIns="0" rtlCol="0" anchor="ctr"/>
+          <a:lstStyle/>
+          <a:p>
+            <a:pPr algn="ctr" indent="0" marL="0">
+              <a:lnSpc>
+                <a:spcPct val="110000"/>
+              </a:lnSpc>
+              <a:buNone/>
+            </a:pPr>
+            <a:r>
+              <a:rPr lang="en-US" sz="1050" b="1" dirty="0">
+                <a:solidFill>
+                  <a:srgbClr val="1A1A1A"/>
+                </a:solidFill>
+                <a:latin typeface="Meiryo" pitchFamily="34" charset="0"/>
+                <a:ea typeface="Meiryo" pitchFamily="34" charset="-122"/>
+                <a:cs typeface="Meiryo" pitchFamily="34" charset="-120"/>
+              </a:rPr>
+              <a:t>なんで4年目まで赤字なの？</a:t>
+            </a:r>
+            <a:endParaRPr lang="en-US" sz="1050" dirty="0"/>
+          </a:p>
+        </p:txBody>
+      </p:sp>
+      <p:sp>
+        <p:nvSpPr>
+          <p:cNvPr id="15" name="Shape 9"/>
+          <p:cNvSpPr/>
+          <p:nvPr/>
+        </p:nvSpPr>
+        <p:spPr>
+          <a:xfrm flipH="1">
+            <a:off x="3703320" y="2286000"/>
+            <a:ext cx="4069080" cy="685800"/>
+          </a:xfrm>
+          <a:prstGeom prst="wedgeRoundRectCallout">
+            <a:avLst/>
+          </a:prstGeom>
+          <a:solidFill>
+            <a:srgbClr val="F2F2F2"/>
+          </a:solidFill>
+          <a:ln w="19050">
+            <a:solidFill>
+              <a:srgbClr val="1A1A1A"/>
+            </a:solidFill>
+            <a:prstDash val="solid"/>
+          </a:ln>
+        </p:spPr>
+      </p:sp>
+      <p:sp>
+        <p:nvSpPr>
+          <p:cNvPr id="16" name="Text 10"/>
+          <p:cNvSpPr txBox="1"/>
+          <p:nvPr/>
+        </p:nvSpPr>
+        <p:spPr>
+          <a:xfrm>
+            <a:off x="3776472" y="2322576"/>
+            <a:ext cx="3922776" cy="612648"/>
+          </a:xfrm>
+          <a:prstGeom prst="rect">
+            <a:avLst/>
+          </a:prstGeom>
+          <a:noFill/>
+          <a:ln/>
+        </p:spPr>
+        <p:txBody>
+          <a:bodyPr wrap="square" lIns="0" tIns="0" rIns="0" bIns="0" rtlCol="0" anchor="ctr"/>
+          <a:lstStyle/>
+          <a:p>
+            <a:pPr algn="ctr" indent="0" marL="0">
+              <a:lnSpc>
+                <a:spcPct val="110000"/>
+              </a:lnSpc>
+              <a:buNone/>
+            </a:pPr>
+            <a:r>
+              <a:rPr lang="en-US" sz="1050" dirty="0">
+                <a:solidFill>
+                  <a:srgbClr val="1A1A1A"/>
+                </a:solidFill>
+                <a:latin typeface="Meiryo" pitchFamily="34" charset="0"/>
+                <a:ea typeface="Meiryo" pitchFamily="34" charset="-122"/>
+                <a:cs typeface="Meiryo" pitchFamily="34" charset="-120"/>
+              </a:rPr>
+              <a:t>人を先に雇うからです。社員1人3拠点を超えたら黒字です</a:t>
+            </a:r>
+            <a:endParaRPr lang="en-US" sz="1050" dirty="0"/>
+          </a:p>
+        </p:txBody>
+      </p:sp>
+      <p:pic>
+        <p:nvPicPr>
+          <p:cNvPr id="17" name="Image 3" descr="preencoded.png">    </p:cNvPr>
+          <p:cNvPicPr>
+            <a:picLocks noChangeAspect="1"/>
+          </p:cNvPicPr>
+          <p:nvPr/>
+        </p:nvPicPr>
+        <p:blipFill>
+          <a:blip r:embed="rId4"/>
+          <a:stretch>
+            <a:fillRect/>
+          </a:stretch>
+        </p:blipFill>
+        <p:spPr>
+          <a:xfrm>
+            <a:off x="7863840" y="2194560"/>
+            <a:ext cx="800100" cy="960120"/>
+          </a:xfrm>
+          <a:prstGeom prst="rect">
+            <a:avLst/>
+          </a:prstGeom>
+        </p:spPr>
+      </p:pic>
+      <p:sp>
+        <p:nvSpPr>
+          <p:cNvPr id="18" name="Text 11"/>
+          <p:cNvSpPr txBox="1"/>
+          <p:nvPr/>
+        </p:nvSpPr>
+        <p:spPr>
+          <a:xfrm>
+            <a:off x="3749040" y="2999232"/>
+            <a:ext cx="3749040" cy="219456"/>
+          </a:xfrm>
+          <a:prstGeom prst="rect">
+            <a:avLst/>
+          </a:prstGeom>
+          <a:noFill/>
+          <a:ln/>
+        </p:spPr>
+        <p:txBody>
+          <a:bodyPr wrap="square" lIns="0" tIns="0" rIns="0" bIns="0" rtlCol="0" anchor="t"/>
+          <a:lstStyle/>
+          <a:p>
+            <a:pPr algn="l" indent="0" marL="0">
+              <a:lnSpc>
+                <a:spcPct val="115000"/>
+              </a:lnSpc>
+              <a:buNone/>
+            </a:pPr>
+            <a:r>
+              <a:rPr lang="en-US" sz="850" b="1" dirty="0">
+                <a:solidFill>
+                  <a:srgbClr val="B8692E"/>
+                </a:solidFill>
+                <a:latin typeface="Meiryo" pitchFamily="34" charset="0"/>
+                <a:ea typeface="Meiryo" pitchFamily="34" charset="-122"/>
+                <a:cs typeface="Meiryo" pitchFamily="34" charset="-120"/>
+              </a:rPr>
+              <a:t>根拠：694万円÷255万円＝2.7、半年分を見て3</a:t>
+            </a:r>
+            <a:endParaRPr lang="en-US" sz="850" dirty="0"/>
+          </a:p>
+        </p:txBody>
+      </p:sp>
+      <p:pic>
+        <p:nvPicPr>
+          <p:cNvPr id="19" name="Image 4" descr="preencoded.png">    </p:cNvPr>
+          <p:cNvPicPr>
+            <a:picLocks noChangeAspect="1"/>
+          </p:cNvPicPr>
+          <p:nvPr/>
+        </p:nvPicPr>
+        <p:blipFill>
+          <a:blip r:embed="rId5"/>
+          <a:stretch>
+            <a:fillRect/>
+          </a:stretch>
+        </p:blipFill>
+        <p:spPr>
+          <a:xfrm>
+            <a:off x="365760" y="3337560"/>
+            <a:ext cx="800100" cy="960120"/>
+          </a:xfrm>
+          <a:prstGeom prst="rect">
+            <a:avLst/>
+          </a:prstGeom>
+        </p:spPr>
+      </p:pic>
+      <p:sp>
+        <p:nvSpPr>
+          <p:cNvPr id="20" name="Shape 12"/>
+          <p:cNvSpPr/>
+          <p:nvPr/>
+        </p:nvSpPr>
+        <p:spPr>
+          <a:xfrm>
+            <a:off x="1234440" y="3429000"/>
+            <a:ext cx="2377440" cy="548640"/>
+          </a:xfrm>
+          <a:prstGeom prst="wedgeRoundRectCallout">
+            <a:avLst/>
+          </a:prstGeom>
+          <a:solidFill>
+            <a:srgbClr val="FFFFFF"/>
+          </a:solidFill>
+          <a:ln w="19050">
+            <a:solidFill>
+              <a:srgbClr val="1A1A1A"/>
+            </a:solidFill>
+            <a:prstDash val="solid"/>
+          </a:ln>
+        </p:spPr>
+      </p:sp>
+      <p:sp>
+        <p:nvSpPr>
+          <p:cNvPr id="21" name="Text 13"/>
+          <p:cNvSpPr txBox="1"/>
+          <p:nvPr/>
+        </p:nvSpPr>
+        <p:spPr>
+          <a:xfrm>
+            <a:off x="1307592" y="3465576"/>
+            <a:ext cx="2231136" cy="475488"/>
+          </a:xfrm>
+          <a:prstGeom prst="rect">
+            <a:avLst/>
+          </a:prstGeom>
+          <a:noFill/>
+          <a:ln/>
+        </p:spPr>
+        <p:txBody>
+          <a:bodyPr wrap="square" lIns="0" tIns="0" rIns="0" bIns="0" rtlCol="0" anchor="ctr"/>
+          <a:lstStyle/>
+          <a:p>
+            <a:pPr algn="ctr" indent="0" marL="0">
+              <a:lnSpc>
+                <a:spcPct val="110000"/>
+              </a:lnSpc>
+              <a:buNone/>
+            </a:pPr>
+            <a:r>
+              <a:rPr lang="en-US" sz="1050" b="1" dirty="0">
+                <a:solidFill>
+                  <a:srgbClr val="1A1A1A"/>
+                </a:solidFill>
+                <a:latin typeface="Meiryo" pitchFamily="34" charset="0"/>
+                <a:ea typeface="Meiryo" pitchFamily="34" charset="-122"/>
+                <a:cs typeface="Meiryo" pitchFamily="34" charset="-120"/>
+              </a:rPr>
+              <a:t>真似されたら終わりでは？</a:t>
+            </a:r>
+            <a:endParaRPr lang="en-US" sz="1050" dirty="0"/>
+          </a:p>
+        </p:txBody>
+      </p:sp>
+      <p:sp>
+        <p:nvSpPr>
+          <p:cNvPr id="22" name="Shape 14"/>
+          <p:cNvSpPr/>
+          <p:nvPr/>
+        </p:nvSpPr>
+        <p:spPr>
+          <a:xfrm flipH="1">
+            <a:off x="3703320" y="3429000"/>
+            <a:ext cx="4069080" cy="685800"/>
+          </a:xfrm>
+          <a:prstGeom prst="wedgeRoundRectCallout">
+            <a:avLst/>
+          </a:prstGeom>
+          <a:solidFill>
+            <a:srgbClr val="F2F2F2"/>
+          </a:solidFill>
+          <a:ln w="19050">
+            <a:solidFill>
+              <a:srgbClr val="1A1A1A"/>
+            </a:solidFill>
+            <a:prstDash val="solid"/>
+          </a:ln>
+        </p:spPr>
+      </p:sp>
+      <p:sp>
+        <p:nvSpPr>
+          <p:cNvPr id="23" name="Text 15"/>
+          <p:cNvSpPr txBox="1"/>
+          <p:nvPr/>
+        </p:nvSpPr>
+        <p:spPr>
+          <a:xfrm>
+            <a:off x="3776472" y="3465576"/>
+            <a:ext cx="3922776" cy="612648"/>
+          </a:xfrm>
+          <a:prstGeom prst="rect">
+            <a:avLst/>
+          </a:prstGeom>
+          <a:noFill/>
+          <a:ln/>
+        </p:spPr>
+        <p:txBody>
+          <a:bodyPr wrap="square" lIns="0" tIns="0" rIns="0" bIns="0" rtlCol="0" anchor="ctr"/>
+          <a:lstStyle/>
+          <a:p>
+            <a:pPr algn="ctr" indent="0" marL="0">
+              <a:lnSpc>
+                <a:spcPct val="110000"/>
+              </a:lnSpc>
+              <a:buNone/>
+            </a:pPr>
+            <a:r>
+              <a:rPr lang="en-US" sz="1050" dirty="0">
+                <a:solidFill>
+                  <a:srgbClr val="1A1A1A"/>
+                </a:solidFill>
+                <a:latin typeface="Meiryo" pitchFamily="34" charset="0"/>
+                <a:ea typeface="Meiryo" pitchFamily="34" charset="-122"/>
+                <a:cs typeface="Meiryo" pitchFamily="34" charset="-120"/>
+              </a:rPr>
+              <a:t>現場の記録は使うほど貯まり、後から来た会社には移せません</a:t>
+            </a:r>
+            <a:endParaRPr lang="en-US" sz="1050" dirty="0"/>
+          </a:p>
+        </p:txBody>
+      </p:sp>
+      <p:pic>
+        <p:nvPicPr>
+          <p:cNvPr id="24" name="Image 5" descr="preencoded.png">    </p:cNvPr>
+          <p:cNvPicPr>
+            <a:picLocks noChangeAspect="1"/>
+          </p:cNvPicPr>
+          <p:nvPr/>
+        </p:nvPicPr>
+        <p:blipFill>
+          <a:blip r:embed="rId6"/>
+          <a:stretch>
+            <a:fillRect/>
+          </a:stretch>
+        </p:blipFill>
+        <p:spPr>
+          <a:xfrm>
+            <a:off x="7863840" y="3337560"/>
+            <a:ext cx="800100" cy="960120"/>
+          </a:xfrm>
+          <a:prstGeom prst="rect">
+            <a:avLst/>
+          </a:prstGeom>
+        </p:spPr>
+      </p:pic>
+      <p:sp>
+        <p:nvSpPr>
+          <p:cNvPr id="25" name="Text 16"/>
+          <p:cNvSpPr txBox="1"/>
+          <p:nvPr/>
+        </p:nvSpPr>
+        <p:spPr>
+          <a:xfrm>
+            <a:off x="3749040" y="4142232"/>
+            <a:ext cx="3749040" cy="219456"/>
+          </a:xfrm>
+          <a:prstGeom prst="rect">
+            <a:avLst/>
+          </a:prstGeom>
+          <a:noFill/>
+          <a:ln/>
+        </p:spPr>
+        <p:txBody>
+          <a:bodyPr wrap="square" lIns="0" tIns="0" rIns="0" bIns="0" rtlCol="0" anchor="t"/>
+          <a:lstStyle/>
+          <a:p>
+            <a:pPr algn="l" indent="0" marL="0">
+              <a:lnSpc>
+                <a:spcPct val="115000"/>
+              </a:lnSpc>
+              <a:buNone/>
+            </a:pPr>
+            <a:r>
+              <a:rPr lang="en-US" sz="850" b="1" dirty="0">
+                <a:solidFill>
+                  <a:srgbClr val="B8692E"/>
+                </a:solidFill>
+                <a:latin typeface="Meiryo" pitchFamily="34" charset="0"/>
+                <a:ea typeface="Meiryo" pitchFamily="34" charset="-122"/>
+                <a:cs typeface="Meiryo" pitchFamily="34" charset="-120"/>
+              </a:rPr>
+              <a:t>根拠：貯まる・意味づけ・業界の型</a:t>
+            </a:r>
+            <a:endParaRPr lang="en-US" sz="850" dirty="0"/>
+          </a:p>
+        </p:txBody>
+      </p:sp>
+      <p:sp>
+        <p:nvSpPr>
+          <p:cNvPr id="26" name="Text 17"/>
+          <p:cNvSpPr txBox="1"/>
+          <p:nvPr/>
+        </p:nvSpPr>
+        <p:spPr>
+          <a:xfrm>
+            <a:off x="365760" y="4480560"/>
+            <a:ext cx="8412480" cy="219456"/>
+          </a:xfrm>
+          <a:prstGeom prst="rect">
+            <a:avLst/>
+          </a:prstGeom>
+          <a:noFill/>
+          <a:ln/>
+        </p:spPr>
+        <p:txBody>
+          <a:bodyPr wrap="square" lIns="0" tIns="0" rIns="0" bIns="0" rtlCol="0" anchor="t"/>
+          <a:lstStyle/>
+          <a:p>
+            <a:pPr algn="l" indent="0" marL="0">
+              <a:lnSpc>
+                <a:spcPct val="115000"/>
+              </a:lnSpc>
+              <a:buNone/>
+            </a:pPr>
+            <a:r>
+              <a:rPr lang="en-US" sz="800" dirty="0">
+                <a:solidFill>
+                  <a:srgbClr val="8C8C8C"/>
+                </a:solidFill>
+                <a:latin typeface="Meiryo" pitchFamily="34" charset="0"/>
+                <a:ea typeface="Meiryo" pitchFamily="34" charset="-122"/>
+                <a:cs typeface="Meiryo" pitchFamily="34" charset="-120"/>
+              </a:rPr>
+              <a:t>左：投資家　右：社長（わたし）。細かい計算は「理論武装版」に</a:t>
+            </a:r>
+            <a:endParaRPr lang="en-US" sz="800" dirty="0"/>
+          </a:p>
+        </p:txBody>
+      </p:sp>
+      <p:sp>
+        <p:nvSpPr>
+          <p:cNvPr id="25" name="Slide Number Placeholder 0"/>
+          <p:cNvSpPr>
+            <a:spLocks noGrp="1"/>
+          </p:cNvSpPr>
+          <p:nvPr>
+            <p:ph type="sldNum" sz="quarter" idx="4294967295"/>
+          </p:nvPr>
+        </p:nvSpPr>
+        <p:spPr>
+          <a:xfrm>
+            <a:off x="365760" y="4837176"/>
+            <a:ext cx="320040" cy="201168"/>
+          </a:xfrm>
+          <a:prstGeom prst="rect">
+            <a:avLst/>
+          </a:prstGeom>
+          <a:extLst>
+            <a:ext uri="{C572A759-6A51-4108-AA02-DFA0A04FC94B}">
+              <ma14:wrappingTextBoxFlag xmlns:ma14="http://schemas.microsoft.com/office/mac/drawingml/2011/main" val="0"/>
+            </a:ext>
+          </a:extLst>
+        </p:spPr>
+        <p:txBody>
+          <a:bodyPr lIns="0" tIns="0" rIns="0" bIns="0"/>
+          <a:lstStyle>
+            <a:lvl1pPr>
+              <a:defRPr sz="850">
+                <a:solidFill>
+                  <a:srgbClr val="8C8C8C"/>
+                </a:solidFill>
+                <a:latin typeface="Meiryo"/>
+                <a:ea typeface="Meiryo"/>
+                <a:cs typeface="Meiryo"/>
+              </a:defRPr>
+            </a:lvl1pPr>
+          </a:lstStyle>
+          <a:p>
+            <a:pPr algn="l"/>
+            <a:fld id="{F7021451-1387-4CA6-816F-3879F97B5CBC}" type="slidenum">
+              <a:rPr b="0" lang="en-US"/>
+              <a:t>17</a:t>
+            </a:fld>
+            <a:endParaRPr lang="en-US"/>
+          </a:p>
+        </p:txBody>
+      </p:sp>
+    </p:spTree>
+  </p:cSld>
+  <p:clrMapOvr>
+    <a:masterClrMapping/>
+  </p:clrMapOvr>
+</p:sld>
+</file>
+
+<file path=ppt/slides/slide18.xml><?xml version="1.0" encoding="utf-8"?>
+<p:sld xmlns:a="http://schemas.openxmlformats.org/drawingml/2006/main" xmlns:r="http://schemas.openxmlformats.org/officeDocument/2006/relationships" xmlns:p="http://schemas.openxmlformats.org/presentationml/2006/main">
+  <p:cSld name="Slide 18">
+    <p:spTree>
+      <p:nvGrpSpPr>
+        <p:cNvPr id="1" name=""/>
+        <p:cNvGrpSpPr/>
+        <p:nvPr/>
+      </p:nvGrpSpPr>
+      <p:grpSpPr>
+        <a:xfrm>
+          <a:off x="0" y="0"/>
+          <a:ext cx="0" cy="0"/>
+          <a:chOff x="0" y="0"/>
+          <a:chExt cx="0" cy="0"/>
+        </a:xfrm>
+      </p:grpSpPr>
+      <p:sp>
+        <p:nvSpPr>
+          <p:cNvPr id="3" name="title"/>
+          <p:cNvSpPr txBox="1"/>
+          <p:nvPr/>
+        </p:nvSpPr>
+        <p:spPr>
+          <a:xfrm>
+            <a:off x="365760" y="256032"/>
+            <a:ext cx="7955280" cy="384048"/>
+          </a:xfrm>
+          <a:prstGeom prst="rect">
+            <a:avLst/>
+          </a:prstGeom>
+          <a:noFill/>
+          <a:ln/>
+        </p:spPr>
+        <p:txBody>
+          <a:bodyPr wrap="square" lIns="0" tIns="0" rIns="0" bIns="0" rtlCol="0" anchor="ctr"/>
+          <a:lstStyle/>
+          <a:p>
+            <a:pPr algn="l" indent="0" marL="0">
+              <a:lnSpc>
+                <a:spcPct val="115000"/>
+              </a:lnSpc>
+              <a:buNone/>
+            </a:pPr>
+            <a:r>
+              <a:rPr lang="en-US" sz="2000" b="1" dirty="0">
+                <a:solidFill>
+                  <a:srgbClr val="1A1A1A"/>
+                </a:solidFill>
+                <a:latin typeface="Meiryo" pitchFamily="34" charset="0"/>
+                <a:ea typeface="Meiryo" pitchFamily="34" charset="-122"/>
+                <a:cs typeface="Meiryo" pitchFamily="34" charset="-120"/>
+              </a:rPr>
+              <a:t>まとめ ─ この3つの数字だけ覚えれば、話せる</a:t>
+            </a:r>
+            <a:endParaRPr lang="en-US" sz="2000" dirty="0"/>
+          </a:p>
+        </p:txBody>
+      </p:sp>
+      <p:sp>
+        <p:nvSpPr>
+          <p:cNvPr id="4" name="lead"/>
+          <p:cNvSpPr txBox="1"/>
+          <p:nvPr/>
+        </p:nvSpPr>
+        <p:spPr>
+          <a:xfrm>
+            <a:off x="365760" y="658368"/>
+            <a:ext cx="7955280" cy="256032"/>
+          </a:xfrm>
+          <a:prstGeom prst="rect">
+            <a:avLst/>
+          </a:prstGeom>
+          <a:noFill/>
+          <a:ln/>
+        </p:spPr>
+        <p:txBody>
+          <a:bodyPr wrap="square" lIns="0" tIns="0" rIns="0" bIns="0" rtlCol="0" anchor="ctr"/>
+          <a:lstStyle/>
+          <a:p>
+            <a:pPr algn="l" indent="0" marL="0">
+              <a:lnSpc>
+                <a:spcPct val="115000"/>
+              </a:lnSpc>
+              <a:buNone/>
+            </a:pPr>
+            <a:r>
+              <a:rPr lang="en-US" sz="1200" dirty="0">
+                <a:solidFill>
+                  <a:srgbClr val="4D4D4D"/>
+                </a:solidFill>
+                <a:latin typeface="Meiryo" pitchFamily="34" charset="0"/>
+                <a:ea typeface="Meiryo" pitchFamily="34" charset="-122"/>
+                <a:cs typeface="Meiryo" pitchFamily="34" charset="-120"/>
+              </a:rPr>
+              <a:t>300万・255万・3。順番に言えば、お金の仕組みが全部つながる</a:t>
             </a:r>
             <a:endParaRPr lang="en-US" sz="1200" dirty="0"/>
           </a:p>
@@ -13198,7 +16423,7 @@
                 <a:ea typeface="Meiryo" pitchFamily="34" charset="-122"/>
                 <a:cs typeface="Meiryo" pitchFamily="34" charset="-120"/>
               </a:rPr>
-              <a:t>2.8拠点</a:t>
+              <a:t>3拠点</a:t>
             </a:r>
             <a:endParaRPr lang="en-US" sz="3000" dirty="0"/>
           </a:p>
@@ -13282,7 +16507,7 @@
                 <a:ea typeface="Meiryo" pitchFamily="34" charset="-122"/>
                 <a:cs typeface="Meiryo" pitchFamily="34" charset="-120"/>
               </a:rPr>
-              <a:t>4年目に超え、5年目は4.25</a:t>
+              <a:t>4年目に超え、5年目は4.05</a:t>
             </a:r>
             <a:endParaRPr lang="en-US" sz="950" dirty="0"/>
           </a:p>
@@ -13391,7 +16616,7 @@
                 <a:ea typeface="Meiryo" pitchFamily="34" charset="-122"/>
                 <a:cs typeface="Meiryo" pitchFamily="34" charset="-120"/>
               </a:rPr>
-              <a:t>電気工事会社が1拠点あたり年300万円を払います。月240万円分の書類の時間が浮くので、2か月で元が取れます。当社にはサーバー代を引いた255万円が残り、社員1人で2.8拠点を見れば黒字です。人を先に雇うので3年目までは赤字ですが、去年のお客様が今年も払う積み上げ型なので、4年目に黒字、5年目に営業利益6,900万円になります。</a:t>
+              <a:t>電気工事会社が1拠点あたり年300万円を払います。月240万円分の書類の時間が浮くので、2か月で元が取れます。当社にはサーバー代を引いた255万円が残り、社員1人で3拠点を見れば黒字です。人を先に雇うので3年目までは赤字ですが、去年のお客様が今年も払う積み上げ型なので、4年目に黒字、5年目に営業利益約6,100万円になります。</a:t>
             </a:r>
             <a:endParaRPr lang="en-US" sz="1100" dirty="0"/>
           </a:p>
@@ -13463,7 +16688,7 @@
             <a:pPr algn="l"/>
             <a:fld id="{F7021451-1387-4CA6-816F-3879F97B5CBC}" type="slidenum">
               <a:rPr b="0" lang="en-US"/>
-              <a:t>17</a:t>
+              <a:t>18</a:t>
             </a:fld>
             <a:endParaRPr lang="en-US"/>
           </a:p>

--- a/deck/カンツギ_事業計画書_やさしい版.pptx
+++ b/deck/カンツギ_事業計画書_やさしい版.pptx
@@ -219,13 +219,13 @@
                   <c:v>9</c:v>
                 </c:pt>
                 <c:pt idx="2">
-                  <c:v>36</c:v>
+                  <c:v>33</c:v>
                 </c:pt>
                 <c:pt idx="3">
-                  <c:v>90</c:v>
+                  <c:v>78</c:v>
                 </c:pt>
                 <c:pt idx="4">
-                  <c:v>165</c:v>
+                  <c:v>144</c:v>
                 </c:pt>
               </c:numCache>
             </c:numRef>
@@ -1074,8 +1074,8 @@
             <a:r>
               <a:rPr lang="en-US" dirty="0"/>
               <a:t>【表紙・20秒】
-要約：数字は3つだけ。300万円、255万円、3拠点
-カンツギです。今日はお金の仕組みを、3つの数字だけでお話しします。お客様が1拠点で年300万円払う。そのうち255万円が当社に残る。社員1人で3拠点を見られれば黒字。この3つです。</a:t>
+要約：数字は3つだけ。300万円、216万円、約4拠点
+カンツギです。今日はお金の仕組みを、3つの数字だけでお話しします。お客様が1拠点でメガネ10台分、年300万円払う。そのうち216万円が当社に残る。社員1人で約4拠点を見られれば黒字。この3つです。</a:t>
             </a:r>
             <a:endParaRPr lang="en-US" dirty="0"/>
           </a:p>
@@ -1164,8 +1164,8 @@
             <a:r>
               <a:rPr lang="en-US" dirty="0"/>
               <a:t>【お金の話3・40秒】
-要約：利用料300万円のうち255万円が残る。だから利用料を積み上げる
-次に、当社の財布に何が残るか。300万円の利用料のうち、サーバーやAIの費用は15%の45万円。255万円が残ります。導入支援の200万円は、担当者が2か月現場に入るので、その人件費の約133万円が消え、残るのは約67万円。だから当社は、人が動く仕事ではなく、利用料を積み上げる会社にします。</a:t>
+要約：利用料300万円のうち216万円が残る。だから利用料を積み上げる
+次に、当社の財布に何が残るか。300万円の利用料のうち、AIの文字起こしや画像の解析、動画の保存の費用が、メガネ1台あたり月約6,000円、会社ごとのデータ置き場が月1万円で、10台なら年84万円。216万円が残ります。導入支援の200万円は、担当者が42人日現場に入り、交通費もかかるので、残るのは約59万円。だから当社は、人が動く仕事ではなく、利用料を積み上げる会社にします。</a:t>
             </a:r>
             <a:endParaRPr lang="en-US" dirty="0"/>
           </a:p>
@@ -1254,8 +1254,8 @@
             <a:r>
               <a:rPr lang="en-US" dirty="0"/>
               <a:t>【お金の話4・40秒】
-要約：社員1人で3拠点を見れば黒字。4年目に超える
-なぜ最初は赤字なのか。社員1人にかかる費用は、給料や家賃を合わせて年約690万円。1拠点から残るのは255万円。690を255で割ると2.7。ただ、新しいお客様は最初の年は半年分しか払わないので、年度末に数えると1人3拠点が目安です。ここで言う社員は、営業だけでなく技術やサポートの人も含めた全員です。1年目から3年目は、人を先に雇うので3に届かず赤字。4年目に3.44となって黒字になります。合言葉は3です。</a:t>
+要約：社員1人で約4拠点を見れば黒字。5年目に届く
+なぜ最初は赤字なのか。社員1人にかかる費用は、給料と会社負担、採用費、家賃などを合わせて年約730万円。1拠点から残るのは216万円。割ると約3.4。新しいお客様は最初の年は半年分しか払わないので、年度末に数えると1人約4拠点が目安です。社員は、営業だけでなく技術やサポートの人も含めた全員です。人を先に雇うので4年目までは赤字、5年目に3.86となって黒字に届きます。</a:t>
             </a:r>
             <a:endParaRPr lang="en-US" dirty="0"/>
           </a:p>
@@ -1345,7 +1345,7 @@
               <a:rPr lang="en-US" dirty="0"/>
               <a:t>【お金の話5・40秒】
 要約：去年のお客様が今年も払う。売上は雪だるま式
-利用料は毎年いただくので、去年までのお客様の分が今年の売上に乗ります。5年目の売上2億9,000万円のうち、57%は前の年までのお客様からの利用料です。新しいお客様が増えるたびに、雪だるまのように大きくなります。営業利益は4年目に黒字、5年目に約6,100万円です。</a:t>
+利用料は毎年いただくので、去年までのお客様の分が今年の売上に乗ります。解約は毎年1割と控えめに見ています。5年目の売上約269百万円のうち、54%は前の年までのお客様からの利用料です。新しいお客様が増えるたびに、雪だるまのように大きくなります。営業利益は5年目に黒字になります。</a:t>
             </a:r>
             <a:endParaRPr lang="en-US" dirty="0"/>
           </a:p>
@@ -1434,8 +1434,8 @@
             <a:r>
               <a:rPr lang="en-US" dirty="0"/>
               <a:t>【お金の話6・30秒】
-要約：88万円かけて連れてきたお客様が、1,850万円残してくれる
-お客様1拠点を連れてくる費用は約88万円。営業3人の人件費と広告費を、新しいお客様の数で割った数字です。一方、1拠点が7年間で残してくれる粗利は約1,850万円。約21倍です。88万円は約4か月で回収できます。7年は控えめに見た数字です。</a:t>
+要約：86万円かけて連れてきたお客様が、1,571万円残してくれる
+お客様1拠点を連れてくる費用は約86万円。営業3人の人件費と広告費を、新しいお客様の数で割った数字です。一方、1拠点が7年間で残してくれる粗利は約1,571万円。約18倍です。86万円は約5か月で回収できます。解約が年1割なら平均10年続くので、7年は控えめに見た数字です。</a:t>
             </a:r>
             <a:endParaRPr lang="en-US" dirty="0"/>
           </a:p>
@@ -1524,8 +1524,8 @@
             <a:r>
               <a:rPr lang="en-US" dirty="0"/>
               <a:t>【お金の話7・40秒】
-要約：計画の6割取れれば黒字。届かなければ、先に決めた線で止まる
-うまくいかなかったらどうするか。新しいお客様が計画の何割取れたら大丈夫かを計算しました。採用を実績に合わせて遅らせれば、計画の6割で黒字になります。5割を割ると黒字になりません。危ないのは、お客様が増えていないのに人を雇い続けることです。だから止まる線を先に決めます。1年目の終わりに、試してくれた3社のうち2社以上が本契約なら進む。1社なら値段とお客様を見直す。0社なら撤退か方向転換。2年目に新しい拠点が5つに届かなければ、採用を止めます。それと、この計画は出資を受けられることが前提です。</a:t>
+要約：黒字の鍵は、1拠点の台数。止まる線も先に決める
+うまくいかなかったらどうするか。新しいお客様が計画に届かなかった場合を計算しました。1拠点10台のままだと、計画の9割を割ると5年以内に黒字になりません。でも、効果が出た班から台数を増やして15台にできれば、計画の6割でも5年目に黒字です。だから大事なのは、拠点の数より、1拠点で使ってもらう台数です。そして止まる線を先に決めます。実証で1台1日26分減れば進む、15分未満なら撤退。1年目の終わりに、試してくれた3社のうち本契約が0社なら撤退か方向転換。2年目に新しい拠点が5つに届かなければ、採用を止めます。</a:t>
             </a:r>
             <a:endParaRPr lang="en-US" dirty="0"/>
           </a:p>
@@ -1613,9 +1613,9 @@
           <a:p>
             <a:r>
               <a:rPr lang="en-US" dirty="0"/>
-              <a:t>【500万円・30秒】
-要約：500万円で、6か月以内に1拠点を動かす
-今回お願いする500万円は、試作品と1拠点の実証に使います。私の給料はゼロです。3か月で試作品、6か月で実証。その結果を持って、公庫の融資とベンチャーキャピタルの出資を受けます。条件は10%でのご提案です。</a:t>
+              <a:t>【準備期・30秒】
+要約：準備期の6か月で、最初の1拠点を動かす
+最初の6か月は準備期です。費用は約500万円で、自己資金と補助金でまかないます。私の給料はゼロです。3か月で試作品、6か月で1拠点の実証。1台1日26分減ったかどうかを確かめます。その結果を持って、公庫の融資とベンチャーキャピタルの出資を受けます。</a:t>
             </a:r>
             <a:endParaRPr lang="en-US" dirty="0"/>
           </a:p>
@@ -1705,7 +1705,7 @@
               <a:rPr lang="en-US" dirty="0"/>
               <a:t>【全体図・30秒】
 要約：上の矢印は記録とサービス、下の矢印はお金
-1枚にまとめるとこうなります。上の流れが記録とサービス。お客様の現場から記録が来て、照合・報告書・教材にして返す。下の流れがお金。お客様から年300万円が入り、45万円がサーバー代、255万円が残って社員の費用をまかなう。社員1人で3拠点を超えたら黒字。そして記録が貯まるほど、真似されにくくなります。</a:t>
+1枚にまとめるとこうなります。上の流れが記録とサービス。お客様の現場から記録が来て、照合・報告書・教材にして返す。下の流れがお金。お客様から10台で年300万円が入り、84万円がAIと保存の費用、216万円が残って社員の費用をまかなう。社員1人で約4拠点を超えたら黒字。そして記録が貯まるほど、真似されにくくなります。</a:t>
             </a:r>
             <a:endParaRPr lang="en-US" dirty="0"/>
           </a:p>
@@ -1795,7 +1795,7 @@
               <a:rPr lang="en-US" dirty="0"/>
               <a:t>【ツッコミ対策・40秒】
 要約：3つのツッコミには、この一言で返す
-よく聞かれる3つの質問への答えです。本当に300万円も払うのか。月240万円分の時間が浮くので、2か月で元が取れます。なぜ4年目まで赤字なのか。人を先に雇うからで、社員1人3拠点を超えたら黒字になります。真似されないか。現場の記録は使うほど貯まり、後から来た会社には移せません。</a:t>
+よく聞かれる3つの質問への答えです。本当に300万円も払うのか。1台1日26分減れば元が取れます。想定は35分で、実証で測ります。なぜ赤字が続くのか。人を先に雇うからで、社員1人約4拠点を超えたら黒字になります。真似されないか。現場の記録は使うほど貯まり、後から来た会社には移せません。</a:t>
             </a:r>
             <a:endParaRPr lang="en-US" dirty="0"/>
           </a:p>
@@ -1884,8 +1884,8 @@
             <a:r>
               <a:rPr lang="en-US" dirty="0"/>
               <a:t>【まとめ・30秒】
-要約：300万・255万・3。この3つで話せる
-まとめです。お客様が年300万円払う。255万円が残る。社員1人3拠点で黒字。この3つの数字で、すべて説明できます。詳しい計算の根拠は、別冊の理論武装版にまとめています。</a:t>
+要約：300万・216万・4。この3つで話せる
+まとめです。お客様が10台で年300万円払う。216万円が残る。社員1人約4拠点で黒字。この3つの数字で、すべて説明できます。詳しい計算の過程は、別冊の計算詳細版にまとめています。</a:t>
             </a:r>
             <a:endParaRPr lang="en-US" dirty="0"/>
           </a:p>
@@ -2155,7 +2155,7 @@
               <a:rPr lang="en-US" dirty="0"/>
               <a:t>【第2話・40秒】
 要約：メガネを掛けて、いつも通り働くだけ
-そこで、スマートグラスを掛けてもらいます。田中さんは、いつも通り作業するだけ。動画と会話をAIが整理して、三つの形で渡します。若手には、図面とのズレをその場で表示。管理者には、報告書を自動で作成。そして後から、教材にします。</a:t>
+そこで、スマートグラスを掛けてもらいます。全員ではなく、1つの班に1台、職長が掛けます。田中さんは、いつも通り作業するだけ。動画と会話をAIが整理して、三つの形で渡します。若手には、図面とのズレをその場で表示。管理者には、報告書を自動で作成。そして後から、教材にします。</a:t>
             </a:r>
             <a:endParaRPr lang="en-US" dirty="0"/>
           </a:p>
@@ -2335,7 +2335,7 @@
               <a:rPr lang="en-US" dirty="0"/>
               <a:t>【第4話・40秒】
 要約：会う → 試す → 決める → 広がる
-最初のお客様は、関東の中堅の電気工事会社です。業界の勉強会で、2024年からの残業の上限と書類の削減について話します。展示会では、デモを自分の現場に当てはめて試してもらいます。次に、3か月の有償の試験導入で、報告書の時間が本当に減るかを数字で確かめます。本契約になったら、協力会社にも同じ形で使ってもらいます。関東の中堅735社のうち、半分近くに会い、4社に1社と契約できれば、5年で約83社です。</a:t>
+最初のお客様は、関東の中堅の電気工事会社です。中でも、電力会社や官公庁の工事が多く、写真台帳と報告書が多い会社を狙います。業界の勉強会で、2024年からの残業の上限と書類の削減について話します。展示会では、デモを自分の現場に当てはめて試してもらいます。次に、3か月の有償の試験導入で、報告書の時間が本当に減るかを数字で確かめます。本契約になったら、効果が出た班から台数を増やし、協力会社にも同じ形で使ってもらいます。</a:t>
             </a:r>
             <a:endParaRPr lang="en-US" dirty="0"/>
           </a:p>
@@ -2424,8 +2424,8 @@
             <a:r>
               <a:rPr lang="en-US" dirty="0"/>
               <a:t>【お金の話1・40秒】
-要約：1拠点 年300万円。初年度だけ導入支援200万円
-では、誰が何にいくら払うのか。払うのは電気工事会社です。1拠点、つまり1つの支店や営業所で、年300万円。月にすると25万円です。中身は、アプリとデータ置き場の基本料が100万円、記録する工区や現場の数で100万円、教材づくりなどの追加機能で100万円。初年度だけ、私たちが2か月現場に入る導入支援に200万円いただきます。スマホの契約と同じで、初期設定は最初だけ、月額は毎月です。</a:t>
+要約：会社の基盤 月5万円＋メガネ1台 月2万円。10台で年300万円
+では、誰が何にいくら払うのか。払うのは電気工事会社です。1拠点、つまり1つの支店や営業所で、会社のデータ置き場や管理画面の基盤に月5万円、メガネ1台ごとに月2万円。標準の10台なら月25万円、年300万円です。メガネ本体は、お客様がリース会社から借ります。10台で年約53万円です。初年度だけ、私たちが2か月現場に入る導入支援に200万円いただきます。スマホの契約と同じで、初期設定は最初だけ、月額は毎月です。</a:t>
             </a:r>
             <a:endParaRPr lang="en-US" dirty="0"/>
           </a:p>
@@ -2514,8 +2514,8 @@
             <a:r>
               <a:rPr lang="en-US" dirty="0"/>
               <a:t>【お金の話2・40秒】
-要約：月25万円払って、月240万円浮く。約2か月で元が取れる
-なぜ工事部長は払うのか。施工管理者と電工が100人の会社で、1人あたり日報や写真整理が月6時間減ると、時給4,000円換算で月240万円分の時間が浮きます。初年度の支払いは500万円なので、約2か月で元が取れます。月6時間とは、1日あたり約18分。朝の日報と夕方の写真整理がなくなるイメージです。</a:t>
+要約：1台1日35分減ると年479万円。26分減れば元が取れる
+なぜ工事部長は払うのか。メガネを掛けた班では、職長の日報と撮影が1日15分、施工管理者の写真整理と写真台帳が20分減ると考えています。10台を年240日使うと、浮く時間の価値は年約479万円。1時間の人件費は、国の統計の年収に会社が払う社会保険料を足し、残業を含む年2,000時間で割った約3,400円です。お客様が払うのは利用料とリースで年約353万円なので、約1.4倍。逆に言えば、1台1日26分減れば元が取れます。これを実証の合格ラインにします。</a:t>
             </a:r>
             <a:endParaRPr lang="en-US" dirty="0"/>
           </a:p>
@@ -2604,8 +2604,8 @@
             <a:r>
               <a:rPr lang="en-US" dirty="0"/>
               <a:t>【お金の話2つづき・40秒】
-要約：浮くのは時間だけじゃない。3つ合わせて年4,200万円
-工事部長が得するのは、書類の時間だけではありません。やり直しが2割減ると、完成工事高30億円の会社で年1,200万円。新人の指導の時間が減って年144万円。書類の時間と合わせて、年約4,200万円です。払うのは300万円なので、約14倍。浮いた時間は3.7人分。人を増やせない今、3.7人分の余力で、断っていた工事を受けられます。</a:t>
+要約：計画に入れるのは確かな分だけ。手戻りは測れたら上乗せ
+工事部長が得するのは、書類の時間だけではありません。やり直しが減れば、ARが効く工種だけでも年約360万円。ただ、これはAIの出来と私たちの監修次第なので、実証で測れるまで計画には入れません。新人の指導は、他の仕事と混ざっていて測れないので、金額にせず、独り立ちまでの月数で測ります。確かな分だけで約1.4倍、手戻りも減れば約2.4倍です。</a:t>
             </a:r>
             <a:endParaRPr lang="en-US" dirty="0"/>
           </a:p>
@@ -3343,7 +3343,7 @@
       </p:sp>
       <p:sp>
         <p:nvSpPr>
-          <p:cNvPr id="5" name="ask"/>
+          <p:cNvPr id="5" name="pass-line"/>
           <p:cNvSpPr/>
           <p:nvPr/>
         </p:nvSpPr>
@@ -3375,7 +3375,7 @@
         <p:spPr>
           <a:xfrm>
             <a:off x="6355080" y="475488"/>
-            <a:ext cx="1828800" cy="256032"/>
+            <a:ext cx="2286000" cy="256032"/>
           </a:xfrm>
           <a:prstGeom prst="rect">
             <a:avLst/>
@@ -3402,7 +3402,7 @@
                 <a:ea typeface="Meiryo" pitchFamily="34" charset="-122"/>
                 <a:cs typeface="Meiryo" pitchFamily="34" charset="-120"/>
               </a:rPr>
-              <a:t>希望金額</a:t>
+              <a:t>元が取れる条件</a:t>
             </a:r>
             <a:endParaRPr lang="en-US" sz="1100" dirty="0"/>
           </a:p>
@@ -3436,7 +3436,7 @@
               <a:buNone/>
             </a:pPr>
             <a:r>
-              <a:rPr lang="en-US" sz="3800" b="1" dirty="0">
+              <a:rPr lang="en-US" sz="2400" b="1" dirty="0">
                 <a:solidFill>
                   <a:srgbClr val="B8692E"/>
                 </a:solidFill>
@@ -3444,9 +3444,9 @@
                 <a:ea typeface="Meiryo" pitchFamily="34" charset="-122"/>
                 <a:cs typeface="Meiryo" pitchFamily="34" charset="-120"/>
               </a:rPr>
-              <a:t>500万円</a:t>
-            </a:r>
-            <a:endParaRPr lang="en-US" sz="3800" dirty="0"/>
+              <a:t>1台1日26分</a:t>
+            </a:r>
+            <a:endParaRPr lang="en-US" sz="2400" dirty="0"/>
           </a:p>
         </p:txBody>
       </p:sp>
@@ -3607,7 +3607,27 @@
                 <a:ea typeface="Meiryo" pitchFamily="34" charset="-122"/>
                 <a:cs typeface="Meiryo" pitchFamily="34" charset="-120"/>
               </a:rPr>
-              <a:t>1拠点・1年あたり</a:t>
+              <a:t>1拠点・10台</a:t>
+            </a:r>
+            <a:endParaRPr lang="en-US" sz="800" dirty="0"/>
+          </a:p>
+          <a:p>
+            <a:pPr algn="l" indent="0" marL="0">
+              <a:lnSpc>
+                <a:spcPct val="115000"/>
+              </a:lnSpc>
+              <a:buNone/>
+            </a:pPr>
+            <a:r>
+              <a:rPr lang="en-US" sz="800" dirty="0">
+                <a:solidFill>
+                  <a:srgbClr val="1A1A1A"/>
+                </a:solidFill>
+                <a:latin typeface="Meiryo" pitchFamily="34" charset="0"/>
+                <a:ea typeface="Meiryo" pitchFamily="34" charset="-122"/>
+                <a:cs typeface="Meiryo" pitchFamily="34" charset="-120"/>
+              </a:rPr>
+              <a:t>1年あたり</a:t>
             </a:r>
             <a:endParaRPr lang="en-US" sz="800" dirty="0"/>
           </a:p>
@@ -3728,7 +3748,7 @@
                 <a:ea typeface="Meiryo" pitchFamily="34" charset="-122"/>
                 <a:cs typeface="Meiryo" pitchFamily="34" charset="-120"/>
               </a:rPr>
-              <a:t>255万円</a:t>
+              <a:t>216万円</a:t>
             </a:r>
             <a:endParaRPr lang="en-US" sz="2200" dirty="0"/>
           </a:p>
@@ -3770,7 +3790,7 @@
                 <a:ea typeface="Meiryo" pitchFamily="34" charset="-122"/>
                 <a:cs typeface="Meiryo" pitchFamily="34" charset="-120"/>
               </a:rPr>
-              <a:t>サーバー代を</a:t>
+              <a:t>AI・保存の</a:t>
             </a:r>
             <a:endParaRPr lang="en-US" sz="800" dirty="0"/>
           </a:p>
@@ -3790,7 +3810,7 @@
                 <a:ea typeface="Meiryo" pitchFamily="34" charset="-122"/>
                 <a:cs typeface="Meiryo" pitchFamily="34" charset="-120"/>
               </a:rPr>
-              <a:t>引いた粗利</a:t>
+              <a:t>費用を引いた粗利</a:t>
             </a:r>
             <a:endParaRPr lang="en-US" sz="800" dirty="0"/>
           </a:p>
@@ -3911,7 +3931,7 @@
                 <a:ea typeface="Meiryo" pitchFamily="34" charset="-122"/>
                 <a:cs typeface="Meiryo" pitchFamily="34" charset="-120"/>
               </a:rPr>
-              <a:t>3拠点</a:t>
+              <a:t>約4拠点</a:t>
             </a:r>
             <a:endParaRPr lang="en-US" sz="2200" dirty="0"/>
           </a:p>
@@ -4430,7 +4450,7 @@
                 <a:ea typeface="Meiryo" pitchFamily="34" charset="-122"/>
                 <a:cs typeface="Meiryo" pitchFamily="34" charset="-120"/>
               </a:rPr>
-              <a:t>利用料は85%が残る。導入支援は3分の1しか残らない。だから利用料を積み上げる</a:t>
+              <a:t>利用料は72%が残る。導入支援は約3割しか残らない。だから利用料を積み上げる</a:t>
             </a:r>
             <a:endParaRPr lang="en-US" sz="1200" dirty="0"/>
           </a:p>
@@ -4577,7 +4597,7 @@
         <p:spPr>
           <a:xfrm>
             <a:off x="1463040" y="1691640"/>
-            <a:ext cx="868680" cy="322326"/>
+            <a:ext cx="868680" cy="601675"/>
           </a:xfrm>
           <a:prstGeom prst="rect">
             <a:avLst/>
@@ -4629,7 +4649,7 @@
                 <a:ea typeface="Meiryo" pitchFamily="34" charset="-122"/>
                 <a:cs typeface="Meiryo" pitchFamily="34" charset="-120"/>
               </a:rPr>
-              <a:t>−45万円</a:t>
+              <a:t>−84万円</a:t>
             </a:r>
             <a:endParaRPr lang="en-US" sz="1100" dirty="0"/>
           </a:p>
@@ -4643,8 +4663,8 @@
         </p:nvSpPr>
         <p:spPr>
           <a:xfrm>
-            <a:off x="2468880" y="2013966"/>
-            <a:ext cx="868680" cy="1826514"/>
+            <a:off x="2468880" y="2293315"/>
+            <a:ext cx="868680" cy="1547165"/>
           </a:xfrm>
           <a:prstGeom prst="rect">
             <a:avLst/>
@@ -4668,7 +4688,7 @@
         </p:nvSpPr>
         <p:spPr>
           <a:xfrm>
-            <a:off x="2286000" y="1721358"/>
+            <a:off x="2286000" y="2000707"/>
             <a:ext cx="1234440" cy="274320"/>
           </a:xfrm>
           <a:prstGeom prst="rect">
@@ -4696,7 +4716,7 @@
                 <a:ea typeface="Meiryo" pitchFamily="34" charset="-122"/>
                 <a:cs typeface="Meiryo" pitchFamily="34" charset="-120"/>
               </a:rPr>
-              <a:t>255万円</a:t>
+              <a:t>216万円</a:t>
             </a:r>
             <a:endParaRPr lang="en-US" sz="1100" dirty="0"/>
           </a:p>
@@ -4780,7 +4800,7 @@
                 <a:ea typeface="Meiryo" pitchFamily="34" charset="-122"/>
                 <a:cs typeface="Meiryo" pitchFamily="34" charset="-120"/>
               </a:rPr>
-              <a:t>サーバー・AI代</a:t>
+              <a:t>AI・保存の費用</a:t>
             </a:r>
             <a:endParaRPr lang="en-US" sz="900" dirty="0"/>
           </a:p>
@@ -4945,8 +4965,8 @@
         </p:nvSpPr>
         <p:spPr>
           <a:xfrm>
-            <a:off x="4343400" y="3360572"/>
-            <a:ext cx="640080" cy="479908"/>
+            <a:off x="4343400" y="3417875"/>
+            <a:ext cx="640080" cy="422605"/>
           </a:xfrm>
           <a:prstGeom prst="rect">
             <a:avLst/>
@@ -4970,7 +4990,7 @@
         </p:nvSpPr>
         <p:spPr>
           <a:xfrm>
-            <a:off x="4160520" y="3067964"/>
+            <a:off x="4160520" y="3125267"/>
             <a:ext cx="1005840" cy="274320"/>
           </a:xfrm>
           <a:prstGeom prst="rect">
@@ -4998,7 +5018,7 @@
                 <a:ea typeface="Meiryo" pitchFamily="34" charset="-122"/>
                 <a:cs typeface="Meiryo" pitchFamily="34" charset="-120"/>
               </a:rPr>
-              <a:t>67万円</a:t>
+              <a:t>59万円</a:t>
             </a:r>
             <a:endParaRPr lang="en-US" sz="1100" dirty="0"/>
           </a:p>
@@ -5124,7 +5144,7 @@
                 <a:ea typeface="Meiryo" pitchFamily="34" charset="-122"/>
                 <a:cs typeface="Meiryo" pitchFamily="34" charset="-120"/>
               </a:rPr>
-              <a:t>133万円は</a:t>
+              <a:t>141万円は</a:t>
             </a:r>
             <a:endParaRPr lang="en-US" sz="850" dirty="0"/>
           </a:p>
@@ -5144,7 +5164,7 @@
                 <a:ea typeface="Meiryo" pitchFamily="34" charset="-122"/>
                 <a:cs typeface="Meiryo" pitchFamily="34" charset="-120"/>
               </a:rPr>
-              <a:t>担当者2か月分</a:t>
+              <a:t>担当者42人日</a:t>
             </a:r>
             <a:endParaRPr lang="en-US" sz="850" dirty="0"/>
           </a:p>
@@ -5164,7 +5184,7 @@
                 <a:ea typeface="Meiryo" pitchFamily="34" charset="-122"/>
                 <a:cs typeface="Meiryo" pitchFamily="34" charset="-120"/>
               </a:rPr>
-              <a:t>の人件費</a:t>
+              <a:t>と交通費</a:t>
             </a:r>
             <a:endParaRPr lang="en-US" sz="850" dirty="0"/>
           </a:p>
@@ -5419,7 +5439,7 @@
                 <a:ea typeface="Meiryo" pitchFamily="34" charset="-122"/>
                 <a:cs typeface="Meiryo" pitchFamily="34" charset="-120"/>
               </a:rPr>
-              <a:t>1拠点あたりの金額。サーバー・AI代は売上の15%（大事な場面だけ送る前提）。導入支援の人件費は800万円×2か月÷12</a:t>
+              <a:t>1拠点10台あたり。AI・保存の費用＝メガネ1台 月約6,000円＋会社ごとのデータ置き場 月1万円（大事な場面だけ送る前提）</a:t>
             </a:r>
             <a:endParaRPr lang="en-US" sz="800" dirty="0"/>
           </a:p>
@@ -5551,7 +5571,7 @@
                 <a:ea typeface="Meiryo" pitchFamily="34" charset="-122"/>
                 <a:cs typeface="Meiryo" pitchFamily="34" charset="-120"/>
               </a:rPr>
-              <a:t>なぜ最初は赤字？ 合言葉は「3」</a:t>
+              <a:t>なぜ最初は赤字？ 合言葉は「4」</a:t>
             </a:r>
             <a:endParaRPr lang="en-US" sz="2000" dirty="0"/>
           </a:p>
@@ -5593,7 +5613,7 @@
                 <a:ea typeface="Meiryo" pitchFamily="34" charset="-122"/>
                 <a:cs typeface="Meiryo" pitchFamily="34" charset="-120"/>
               </a:rPr>
-              <a:t>社員1人で3拠点を見られれば黒字。4年目に超える</a:t>
+              <a:t>社員1人で約4拠点を見られれば黒字。5年目に届く</a:t>
             </a:r>
             <a:endParaRPr lang="en-US" sz="1200" dirty="0"/>
           </a:p>
@@ -5675,7 +5695,7 @@
                 <a:ea typeface="Meiryo" pitchFamily="34" charset="-122"/>
                 <a:cs typeface="Meiryo" pitchFamily="34" charset="-120"/>
               </a:rPr>
-              <a:t>年694万円</a:t>
+              <a:t>年734万円</a:t>
             </a:r>
             <a:endParaRPr lang="en-US" sz="950" dirty="0"/>
           </a:p>
@@ -5779,7 +5799,7 @@
                 <a:ea typeface="Meiryo" pitchFamily="34" charset="-122"/>
                 <a:cs typeface="Meiryo" pitchFamily="34" charset="-120"/>
               </a:rPr>
-              <a:t>年255万円</a:t>
+              <a:t>年216万円</a:t>
             </a:r>
             <a:endParaRPr lang="en-US" sz="950" dirty="0"/>
           </a:p>
@@ -5821,7 +5841,7 @@
                 <a:ea typeface="Meiryo" pitchFamily="34" charset="-122"/>
                 <a:cs typeface="Meiryo" pitchFamily="34" charset="-120"/>
               </a:rPr>
-              <a:t>＝ 2.7　→　</a:t>
+              <a:t>＝ 3.4　→　</a:t>
             </a:r>
             <a:pPr algn="ctr" indent="0" marL="0">
               <a:lnSpc>
@@ -5838,7 +5858,7 @@
                 <a:ea typeface="Meiryo" pitchFamily="34" charset="-122"/>
                 <a:cs typeface="Meiryo" pitchFamily="34" charset="-120"/>
               </a:rPr>
-              <a:t>目安 3拠点</a:t>
+              <a:t>目安 約4拠点</a:t>
             </a:r>
             <a:endParaRPr lang="en-US" sz="1600" dirty="0"/>
           </a:p>
@@ -5880,7 +5900,7 @@
                 <a:ea typeface="Meiryo" pitchFamily="34" charset="-122"/>
                 <a:cs typeface="Meiryo" pitchFamily="34" charset="-120"/>
               </a:rPr>
-              <a:t>新しいお客様は最初の年は半年分しか払わないので、年度末に数えると3</a:t>
+              <a:t>新しいお客様は最初の年は半年分しか払わないので、年度末に数えると約4</a:t>
             </a:r>
             <a:endParaRPr lang="en-US" sz="850" dirty="0"/>
           </a:p>
@@ -5926,8 +5946,8 @@
         </p:blipFill>
         <p:spPr>
           <a:xfrm>
-            <a:off x="1600200" y="3017520"/>
-            <a:ext cx="594360" cy="594360"/>
+            <a:off x="1600200" y="3063240"/>
+            <a:ext cx="548640" cy="548640"/>
           </a:xfrm>
           <a:prstGeom prst="rect">
             <a:avLst/>
@@ -5950,8 +5970,8 @@
         </p:blipFill>
         <p:spPr>
           <a:xfrm>
-            <a:off x="2286000" y="3017520"/>
-            <a:ext cx="594360" cy="594360"/>
+            <a:off x="2221992" y="3063240"/>
+            <a:ext cx="548640" cy="548640"/>
           </a:xfrm>
           <a:prstGeom prst="rect">
             <a:avLst/>
@@ -5974,17 +5994,41 @@
         </p:blipFill>
         <p:spPr>
           <a:xfrm>
-            <a:off x="2971800" y="3017520"/>
-            <a:ext cx="594360" cy="594360"/>
+            <a:off x="2843784" y="3063240"/>
+            <a:ext cx="548640" cy="548640"/>
           </a:xfrm>
           <a:prstGeom prst="rect">
             <a:avLst/>
           </a:prstGeom>
         </p:spPr>
       </p:pic>
-      <p:sp>
-        <p:nvSpPr>
-          <p:cNvPr id="15" name="Text 8"/>
+      <p:pic>
+        <p:nvPicPr>
+          <p:cNvPr id="15" name="Image 4" descr="preencoded.png">    </p:cNvPr>
+          <p:cNvPicPr>
+            <a:picLocks noChangeAspect="1"/>
+          </p:cNvPicPr>
+          <p:nvPr/>
+        </p:nvPicPr>
+        <p:blipFill>
+          <a:blip r:embed="rId5"/>
+          <a:stretch>
+            <a:fillRect/>
+          </a:stretch>
+        </p:blipFill>
+        <p:spPr>
+          <a:xfrm>
+            <a:off x="3465576" y="3063240"/>
+            <a:ext cx="548640" cy="548640"/>
+          </a:xfrm>
+          <a:prstGeom prst="rect">
+            <a:avLst/>
+          </a:prstGeom>
+        </p:spPr>
+      </p:pic>
+      <p:sp>
+        <p:nvSpPr>
+          <p:cNvPr id="16" name="Text 8"/>
           <p:cNvSpPr txBox="1"/>
           <p:nvPr/>
         </p:nvSpPr>
@@ -6018,7 +6062,7 @@
                 <a:ea typeface="Meiryo" pitchFamily="34" charset="-122"/>
                 <a:cs typeface="Meiryo" pitchFamily="34" charset="-120"/>
               </a:rPr>
-              <a:t>1人で、3拠点（支店・営業所）を見る</a:t>
+              <a:t>1人で、約4拠点（支店・営業所）を見る</a:t>
             </a:r>
             <a:endParaRPr lang="en-US" sz="1000" dirty="0"/>
           </a:p>
@@ -6026,7 +6070,7 @@
       </p:sp>
       <p:sp>
         <p:nvSpPr>
-          <p:cNvPr id="16" name="Text 9"/>
+          <p:cNvPr id="17" name="Text 9"/>
           <p:cNvSpPr txBox="1"/>
           <p:nvPr/>
         </p:nvSpPr>
@@ -6068,7 +6112,7 @@
       </p:sp>
       <p:sp>
         <p:nvSpPr>
-          <p:cNvPr id="17" name="Shape 10"/>
+          <p:cNvPr id="18" name="Shape 10"/>
           <p:cNvSpPr/>
           <p:nvPr/>
         </p:nvSpPr>
@@ -6091,7 +6135,7 @@
       </p:sp>
       <p:sp>
         <p:nvSpPr>
-          <p:cNvPr id="18" name="Shape 11"/>
+          <p:cNvPr id="19" name="Shape 11"/>
           <p:cNvSpPr/>
           <p:nvPr/>
         </p:nvSpPr>
@@ -6111,7 +6155,7 @@
       </p:sp>
       <p:sp>
         <p:nvSpPr>
-          <p:cNvPr id="19" name="Text 12"/>
+          <p:cNvPr id="20" name="Text 12"/>
           <p:cNvSpPr txBox="1"/>
           <p:nvPr/>
         </p:nvSpPr>
@@ -6153,7 +6197,7 @@
       </p:sp>
       <p:sp>
         <p:nvSpPr>
-          <p:cNvPr id="20" name="Text 13"/>
+          <p:cNvPr id="21" name="Text 13"/>
           <p:cNvSpPr txBox="1"/>
           <p:nvPr/>
         </p:nvSpPr>
@@ -6195,7 +6239,7 @@
       </p:sp>
       <p:sp>
         <p:nvSpPr>
-          <p:cNvPr id="21" name="Text 14"/>
+          <p:cNvPr id="22" name="Text 14"/>
           <p:cNvSpPr txBox="1"/>
           <p:nvPr/>
         </p:nvSpPr>
@@ -6237,7 +6281,7 @@
       </p:sp>
       <p:sp>
         <p:nvSpPr>
-          <p:cNvPr id="22" name="Shape 15"/>
+          <p:cNvPr id="23" name="Shape 15"/>
           <p:cNvSpPr/>
           <p:nvPr/>
         </p:nvSpPr>
@@ -6257,7 +6301,7 @@
       </p:sp>
       <p:sp>
         <p:nvSpPr>
-          <p:cNvPr id="23" name="Text 16"/>
+          <p:cNvPr id="24" name="Text 16"/>
           <p:cNvSpPr txBox="1"/>
           <p:nvPr/>
         </p:nvSpPr>
@@ -6299,7 +6343,7 @@
       </p:sp>
       <p:sp>
         <p:nvSpPr>
-          <p:cNvPr id="24" name="Text 17"/>
+          <p:cNvPr id="25" name="Text 17"/>
           <p:cNvSpPr txBox="1"/>
           <p:nvPr/>
         </p:nvSpPr>
@@ -6341,7 +6385,7 @@
       </p:sp>
       <p:sp>
         <p:nvSpPr>
-          <p:cNvPr id="25" name="Text 18"/>
+          <p:cNvPr id="26" name="Text 18"/>
           <p:cNvSpPr txBox="1"/>
           <p:nvPr/>
         </p:nvSpPr>
@@ -6383,14 +6427,14 @@
       </p:sp>
       <p:sp>
         <p:nvSpPr>
-          <p:cNvPr id="26" name="Shape 19"/>
+          <p:cNvPr id="27" name="Shape 19"/>
           <p:cNvSpPr/>
           <p:nvPr/>
         </p:nvSpPr>
         <p:spPr>
           <a:xfrm>
-            <a:off x="6373368" y="2520142"/>
-            <a:ext cx="502920" cy="1274618"/>
+            <a:off x="6373368" y="2562629"/>
+            <a:ext cx="502920" cy="1232131"/>
           </a:xfrm>
           <a:prstGeom prst="rect">
             <a:avLst/>
@@ -6403,13 +6447,13 @@
       </p:sp>
       <p:sp>
         <p:nvSpPr>
-          <p:cNvPr id="27" name="Text 20"/>
+          <p:cNvPr id="28" name="Text 20"/>
           <p:cNvSpPr txBox="1"/>
           <p:nvPr/>
         </p:nvSpPr>
         <p:spPr>
           <a:xfrm>
-            <a:off x="6236208" y="2282398"/>
+            <a:off x="6236208" y="2324885"/>
             <a:ext cx="777240" cy="219456"/>
           </a:xfrm>
           <a:prstGeom prst="rect">
@@ -6437,7 +6481,7 @@
                 <a:ea typeface="Meiryo" pitchFamily="34" charset="-122"/>
                 <a:cs typeface="Meiryo" pitchFamily="34" charset="-120"/>
               </a:rPr>
-              <a:t>2.73</a:t>
+              <a:t>2.64</a:t>
             </a:r>
             <a:endParaRPr lang="en-US" sz="1000" dirty="0"/>
           </a:p>
@@ -6445,7 +6489,7 @@
       </p:sp>
       <p:sp>
         <p:nvSpPr>
-          <p:cNvPr id="28" name="Text 21"/>
+          <p:cNvPr id="29" name="Text 21"/>
           <p:cNvSpPr txBox="1"/>
           <p:nvPr/>
         </p:nvSpPr>
@@ -6487,7 +6531,7 @@
       </p:sp>
       <p:sp>
         <p:nvSpPr>
-          <p:cNvPr id="29" name="Text 22"/>
+          <p:cNvPr id="30" name="Text 22"/>
           <p:cNvSpPr txBox="1"/>
           <p:nvPr/>
         </p:nvSpPr>
@@ -6521,7 +6565,7 @@
                 <a:ea typeface="Meiryo" pitchFamily="34" charset="-122"/>
                 <a:cs typeface="Meiryo" pitchFamily="34" charset="-120"/>
               </a:rPr>
-              <a:t>30拠点÷11人</a:t>
+              <a:t>29拠点÷11人</a:t>
             </a:r>
             <a:endParaRPr lang="en-US" sz="750" dirty="0"/>
           </a:p>
@@ -6529,14 +6573,160 @@
       </p:sp>
       <p:sp>
         <p:nvSpPr>
-          <p:cNvPr id="30" name="Shape 23"/>
+          <p:cNvPr id="31" name="Shape 23"/>
           <p:cNvSpPr/>
           <p:nvPr/>
         </p:nvSpPr>
         <p:spPr>
           <a:xfrm>
-            <a:off x="7159752" y="2188210"/>
-            <a:ext cx="502920" cy="1606550"/>
+            <a:off x="7159752" y="2337696"/>
+            <a:ext cx="502920" cy="1457064"/>
+          </a:xfrm>
+          <a:prstGeom prst="rect">
+            <a:avLst/>
+          </a:prstGeom>
+          <a:solidFill>
+            <a:srgbClr val="1A1A1A"/>
+          </a:solidFill>
+          <a:ln/>
+        </p:spPr>
+      </p:sp>
+      <p:sp>
+        <p:nvSpPr>
+          <p:cNvPr id="32" name="Text 24"/>
+          <p:cNvSpPr txBox="1"/>
+          <p:nvPr/>
+        </p:nvSpPr>
+        <p:spPr>
+          <a:xfrm>
+            <a:off x="7022592" y="2099952"/>
+            <a:ext cx="777240" cy="219456"/>
+          </a:xfrm>
+          <a:prstGeom prst="rect">
+            <a:avLst/>
+          </a:prstGeom>
+          <a:noFill/>
+          <a:ln/>
+        </p:spPr>
+        <p:txBody>
+          <a:bodyPr wrap="square" lIns="0" tIns="0" rIns="0" bIns="0" rtlCol="0" anchor="t"/>
+          <a:lstStyle/>
+          <a:p>
+            <a:pPr algn="ctr" indent="0" marL="0">
+              <a:lnSpc>
+                <a:spcPct val="115000"/>
+              </a:lnSpc>
+              <a:buNone/>
+            </a:pPr>
+            <a:r>
+              <a:rPr lang="en-US" sz="1000" b="1" dirty="0">
+                <a:solidFill>
+                  <a:srgbClr val="1A1A1A"/>
+                </a:solidFill>
+                <a:latin typeface="Meiryo" pitchFamily="34" charset="0"/>
+                <a:ea typeface="Meiryo" pitchFamily="34" charset="-122"/>
+                <a:cs typeface="Meiryo" pitchFamily="34" charset="-120"/>
+              </a:rPr>
+              <a:t>3.12</a:t>
+            </a:r>
+            <a:endParaRPr lang="en-US" sz="1000" dirty="0"/>
+          </a:p>
+        </p:txBody>
+      </p:sp>
+      <p:sp>
+        <p:nvSpPr>
+          <p:cNvPr id="33" name="Text 25"/>
+          <p:cNvSpPr txBox="1"/>
+          <p:nvPr/>
+        </p:nvSpPr>
+        <p:spPr>
+          <a:xfrm>
+            <a:off x="7022592" y="3831336"/>
+            <a:ext cx="777240" cy="201168"/>
+          </a:xfrm>
+          <a:prstGeom prst="rect">
+            <a:avLst/>
+          </a:prstGeom>
+          <a:noFill/>
+          <a:ln/>
+        </p:spPr>
+        <p:txBody>
+          <a:bodyPr wrap="square" lIns="0" tIns="0" rIns="0" bIns="0" rtlCol="0" anchor="t"/>
+          <a:lstStyle/>
+          <a:p>
+            <a:pPr algn="ctr" indent="0" marL="0">
+              <a:lnSpc>
+                <a:spcPct val="115000"/>
+              </a:lnSpc>
+              <a:buNone/>
+            </a:pPr>
+            <a:r>
+              <a:rPr lang="en-US" sz="900" dirty="0">
+                <a:solidFill>
+                  <a:srgbClr val="1A1A1A"/>
+                </a:solidFill>
+                <a:latin typeface="Meiryo" pitchFamily="34" charset="0"/>
+                <a:ea typeface="Meiryo" pitchFamily="34" charset="-122"/>
+                <a:cs typeface="Meiryo" pitchFamily="34" charset="-120"/>
+              </a:rPr>
+              <a:t>4年目</a:t>
+            </a:r>
+            <a:endParaRPr lang="en-US" sz="900" dirty="0"/>
+          </a:p>
+        </p:txBody>
+      </p:sp>
+      <p:sp>
+        <p:nvSpPr>
+          <p:cNvPr id="34" name="Text 26"/>
+          <p:cNvSpPr txBox="1"/>
+          <p:nvPr/>
+        </p:nvSpPr>
+        <p:spPr>
+          <a:xfrm>
+            <a:off x="6976872" y="4023360"/>
+            <a:ext cx="868680" cy="182880"/>
+          </a:xfrm>
+          <a:prstGeom prst="rect">
+            <a:avLst/>
+          </a:prstGeom>
+          <a:noFill/>
+          <a:ln/>
+        </p:spPr>
+        <p:txBody>
+          <a:bodyPr wrap="square" lIns="0" tIns="0" rIns="0" bIns="0" rtlCol="0" anchor="t"/>
+          <a:lstStyle/>
+          <a:p>
+            <a:pPr algn="ctr" indent="0" marL="0">
+              <a:lnSpc>
+                <a:spcPct val="115000"/>
+              </a:lnSpc>
+              <a:buNone/>
+            </a:pPr>
+            <a:r>
+              <a:rPr lang="en-US" sz="750" dirty="0">
+                <a:solidFill>
+                  <a:srgbClr val="4D4D4D"/>
+                </a:solidFill>
+                <a:latin typeface="Meiryo" pitchFamily="34" charset="0"/>
+                <a:ea typeface="Meiryo" pitchFamily="34" charset="-122"/>
+                <a:cs typeface="Meiryo" pitchFamily="34" charset="-120"/>
+              </a:rPr>
+              <a:t>53拠点÷17人</a:t>
+            </a:r>
+            <a:endParaRPr lang="en-US" sz="750" dirty="0"/>
+          </a:p>
+        </p:txBody>
+      </p:sp>
+      <p:sp>
+        <p:nvSpPr>
+          <p:cNvPr id="35" name="Shape 27"/>
+          <p:cNvSpPr/>
+          <p:nvPr/>
+        </p:nvSpPr>
+        <p:spPr>
+          <a:xfrm>
+            <a:off x="7946136" y="1992086"/>
+            <a:ext cx="502920" cy="1802674"/>
           </a:xfrm>
           <a:prstGeom prst="rect">
             <a:avLst/>
@@ -6549,13 +6739,13 @@
       </p:sp>
       <p:sp>
         <p:nvSpPr>
-          <p:cNvPr id="31" name="Text 24"/>
+          <p:cNvPr id="36" name="Text 28"/>
           <p:cNvSpPr txBox="1"/>
           <p:nvPr/>
         </p:nvSpPr>
         <p:spPr>
           <a:xfrm>
-            <a:off x="7022592" y="1950466"/>
+            <a:off x="7808976" y="1754342"/>
             <a:ext cx="777240" cy="219456"/>
           </a:xfrm>
           <a:prstGeom prst="rect">
@@ -6583,7 +6773,7 @@
                 <a:ea typeface="Meiryo" pitchFamily="34" charset="-122"/>
                 <a:cs typeface="Meiryo" pitchFamily="34" charset="-120"/>
               </a:rPr>
-              <a:t>3.44</a:t>
+              <a:t>3.86</a:t>
             </a:r>
             <a:endParaRPr lang="en-US" sz="1000" dirty="0"/>
           </a:p>
@@ -6591,153 +6781,7 @@
       </p:sp>
       <p:sp>
         <p:nvSpPr>
-          <p:cNvPr id="32" name="Text 25"/>
-          <p:cNvSpPr txBox="1"/>
-          <p:nvPr/>
-        </p:nvSpPr>
-        <p:spPr>
-          <a:xfrm>
-            <a:off x="7022592" y="3831336"/>
-            <a:ext cx="777240" cy="201168"/>
-          </a:xfrm>
-          <a:prstGeom prst="rect">
-            <a:avLst/>
-          </a:prstGeom>
-          <a:noFill/>
-          <a:ln/>
-        </p:spPr>
-        <p:txBody>
-          <a:bodyPr wrap="square" lIns="0" tIns="0" rIns="0" bIns="0" rtlCol="0" anchor="t"/>
-          <a:lstStyle/>
-          <a:p>
-            <a:pPr algn="ctr" indent="0" marL="0">
-              <a:lnSpc>
-                <a:spcPct val="115000"/>
-              </a:lnSpc>
-              <a:buNone/>
-            </a:pPr>
-            <a:r>
-              <a:rPr lang="en-US" sz="900" dirty="0">
-                <a:solidFill>
-                  <a:srgbClr val="1A1A1A"/>
-                </a:solidFill>
-                <a:latin typeface="Meiryo" pitchFamily="34" charset="0"/>
-                <a:ea typeface="Meiryo" pitchFamily="34" charset="-122"/>
-                <a:cs typeface="Meiryo" pitchFamily="34" charset="-120"/>
-              </a:rPr>
-              <a:t>4年目</a:t>
-            </a:r>
-            <a:endParaRPr lang="en-US" sz="900" dirty="0"/>
-          </a:p>
-        </p:txBody>
-      </p:sp>
-      <p:sp>
-        <p:nvSpPr>
-          <p:cNvPr id="33" name="Text 26"/>
-          <p:cNvSpPr txBox="1"/>
-          <p:nvPr/>
-        </p:nvSpPr>
-        <p:spPr>
-          <a:xfrm>
-            <a:off x="6976872" y="4023360"/>
-            <a:ext cx="868680" cy="182880"/>
-          </a:xfrm>
-          <a:prstGeom prst="rect">
-            <a:avLst/>
-          </a:prstGeom>
-          <a:noFill/>
-          <a:ln/>
-        </p:spPr>
-        <p:txBody>
-          <a:bodyPr wrap="square" lIns="0" tIns="0" rIns="0" bIns="0" rtlCol="0" anchor="t"/>
-          <a:lstStyle/>
-          <a:p>
-            <a:pPr algn="ctr" indent="0" marL="0">
-              <a:lnSpc>
-                <a:spcPct val="115000"/>
-              </a:lnSpc>
-              <a:buNone/>
-            </a:pPr>
-            <a:r>
-              <a:rPr lang="en-US" sz="750" dirty="0">
-                <a:solidFill>
-                  <a:srgbClr val="4D4D4D"/>
-                </a:solidFill>
-                <a:latin typeface="Meiryo" pitchFamily="34" charset="0"/>
-                <a:ea typeface="Meiryo" pitchFamily="34" charset="-122"/>
-                <a:cs typeface="Meiryo" pitchFamily="34" charset="-120"/>
-              </a:rPr>
-              <a:t>55拠点÷16人</a:t>
-            </a:r>
-            <a:endParaRPr lang="en-US" sz="750" dirty="0"/>
-          </a:p>
-        </p:txBody>
-      </p:sp>
-      <p:sp>
-        <p:nvSpPr>
-          <p:cNvPr id="34" name="Shape 27"/>
-          <p:cNvSpPr/>
-          <p:nvPr/>
-        </p:nvSpPr>
-        <p:spPr>
-          <a:xfrm>
-            <a:off x="7946136" y="1903065"/>
-            <a:ext cx="502920" cy="1891695"/>
-          </a:xfrm>
-          <a:prstGeom prst="rect">
-            <a:avLst/>
-          </a:prstGeom>
-          <a:solidFill>
-            <a:srgbClr val="B8692E"/>
-          </a:solidFill>
-          <a:ln/>
-        </p:spPr>
-      </p:sp>
-      <p:sp>
-        <p:nvSpPr>
-          <p:cNvPr id="35" name="Text 28"/>
-          <p:cNvSpPr txBox="1"/>
-          <p:nvPr/>
-        </p:nvSpPr>
-        <p:spPr>
-          <a:xfrm>
-            <a:off x="7808976" y="1665321"/>
-            <a:ext cx="777240" cy="219456"/>
-          </a:xfrm>
-          <a:prstGeom prst="rect">
-            <a:avLst/>
-          </a:prstGeom>
-          <a:noFill/>
-          <a:ln/>
-        </p:spPr>
-        <p:txBody>
-          <a:bodyPr wrap="square" lIns="0" tIns="0" rIns="0" bIns="0" rtlCol="0" anchor="t"/>
-          <a:lstStyle/>
-          <a:p>
-            <a:pPr algn="ctr" indent="0" marL="0">
-              <a:lnSpc>
-                <a:spcPct val="115000"/>
-              </a:lnSpc>
-              <a:buNone/>
-            </a:pPr>
-            <a:r>
-              <a:rPr lang="en-US" sz="1000" b="1" dirty="0">
-                <a:solidFill>
-                  <a:srgbClr val="1A1A1A"/>
-                </a:solidFill>
-                <a:latin typeface="Meiryo" pitchFamily="34" charset="0"/>
-                <a:ea typeface="Meiryo" pitchFamily="34" charset="-122"/>
-                <a:cs typeface="Meiryo" pitchFamily="34" charset="-120"/>
-              </a:rPr>
-              <a:t>4.05</a:t>
-            </a:r>
-            <a:endParaRPr lang="en-US" sz="1000" dirty="0"/>
-          </a:p>
-        </p:txBody>
-      </p:sp>
-      <p:sp>
-        <p:nvSpPr>
-          <p:cNvPr id="36" name="Text 29"/>
+          <p:cNvPr id="37" name="Text 29"/>
           <p:cNvSpPr txBox="1"/>
           <p:nvPr/>
         </p:nvSpPr>
@@ -6779,7 +6823,7 @@
       </p:sp>
       <p:sp>
         <p:nvSpPr>
-          <p:cNvPr id="37" name="Text 30"/>
+          <p:cNvPr id="38" name="Text 30"/>
           <p:cNvSpPr txBox="1"/>
           <p:nvPr/>
         </p:nvSpPr>
@@ -6813,7 +6857,7 @@
                 <a:ea typeface="Meiryo" pitchFamily="34" charset="-122"/>
                 <a:cs typeface="Meiryo" pitchFamily="34" charset="-120"/>
               </a:rPr>
-              <a:t>85拠点÷21人</a:t>
+              <a:t>81拠点÷21人</a:t>
             </a:r>
             <a:endParaRPr lang="en-US" sz="750" dirty="0"/>
           </a:p>
@@ -6821,13 +6865,13 @@
       </p:sp>
       <p:sp>
         <p:nvSpPr>
-          <p:cNvPr id="38" name="Shape 31"/>
+          <p:cNvPr id="39" name="Shape 31"/>
           <p:cNvSpPr/>
           <p:nvPr/>
         </p:nvSpPr>
         <p:spPr>
           <a:xfrm>
-            <a:off x="4617720" y="2392680"/>
+            <a:off x="4617720" y="1925320"/>
             <a:ext cx="4160520" cy="0"/>
           </a:xfrm>
           <a:prstGeom prst="line">
@@ -6844,13 +6888,13 @@
       </p:sp>
       <p:sp>
         <p:nvSpPr>
-          <p:cNvPr id="39" name="Text 32"/>
+          <p:cNvPr id="40" name="Text 32"/>
           <p:cNvSpPr txBox="1"/>
           <p:nvPr/>
         </p:nvSpPr>
         <p:spPr>
           <a:xfrm>
-            <a:off x="4663440" y="2145792"/>
+            <a:off x="4663440" y="1678432"/>
             <a:ext cx="1188720" cy="219456"/>
           </a:xfrm>
           <a:prstGeom prst="rect">
@@ -6878,7 +6922,7 @@
                 <a:ea typeface="Meiryo" pitchFamily="34" charset="-122"/>
                 <a:cs typeface="Meiryo" pitchFamily="34" charset="-120"/>
               </a:rPr>
-              <a:t>黒字ライン 3</a:t>
+              <a:t>目安 4</a:t>
             </a:r>
             <a:endParaRPr lang="en-US" sz="950" dirty="0"/>
           </a:p>
@@ -6886,14 +6930,14 @@
       </p:sp>
       <p:sp>
         <p:nvSpPr>
-          <p:cNvPr id="40" name="Shape 33"/>
+          <p:cNvPr id="41" name="Shape 33"/>
           <p:cNvSpPr/>
           <p:nvPr/>
         </p:nvSpPr>
         <p:spPr>
           <a:xfrm>
-            <a:off x="4663440" y="1389888"/>
-            <a:ext cx="2103120" cy="731520"/>
+            <a:off x="4663440" y="1325880"/>
+            <a:ext cx="1828800" cy="731520"/>
           </a:xfrm>
           <a:prstGeom prst="wedgeRoundRectCallout">
             <a:avLst/>
@@ -6911,14 +6955,14 @@
       </p:sp>
       <p:sp>
         <p:nvSpPr>
-          <p:cNvPr id="41" name="Text 34"/>
+          <p:cNvPr id="42" name="Text 34"/>
           <p:cNvSpPr txBox="1"/>
           <p:nvPr/>
         </p:nvSpPr>
         <p:spPr>
           <a:xfrm>
-            <a:off x="4736592" y="1426464"/>
-            <a:ext cx="1956816" cy="658368"/>
+            <a:off x="4736592" y="1362456"/>
+            <a:ext cx="1682496" cy="658368"/>
           </a:xfrm>
           <a:prstGeom prst="rect">
             <a:avLst/>
@@ -6945,7 +6989,7 @@
                 <a:ea typeface="Meiryo" pitchFamily="34" charset="-122"/>
                 <a:cs typeface="Meiryo" pitchFamily="34" charset="-120"/>
               </a:rPr>
-              <a:t>1〜3年目は人を先に</a:t>
+              <a:t>人を先に雇うから</a:t>
             </a:r>
             <a:endParaRPr lang="en-US" sz="950" dirty="0"/>
           </a:p>
@@ -6965,7 +7009,7 @@
                 <a:ea typeface="Meiryo" pitchFamily="34" charset="-122"/>
                 <a:cs typeface="Meiryo" pitchFamily="34" charset="-120"/>
               </a:rPr>
-              <a:t>雇うから赤字。</a:t>
+              <a:t>4年目までは赤字。</a:t>
             </a:r>
             <a:endParaRPr lang="en-US" sz="950" dirty="0"/>
           </a:p>
@@ -6985,7 +7029,7 @@
                 <a:ea typeface="Meiryo" pitchFamily="34" charset="-122"/>
                 <a:cs typeface="Meiryo" pitchFamily="34" charset="-120"/>
               </a:rPr>
-              <a:t>4年目に線を越えて黒字！</a:t>
+              <a:t>5年目に黒字！</a:t>
             </a:r>
             <a:endParaRPr lang="en-US" sz="950" dirty="0"/>
           </a:p>
@@ -6993,7 +7037,7 @@
       </p:sp>
       <p:sp>
         <p:nvSpPr>
-          <p:cNvPr id="42" name="Text 35"/>
+          <p:cNvPr id="43" name="Text 35"/>
           <p:cNvSpPr txBox="1"/>
           <p:nvPr/>
         </p:nvSpPr>
@@ -7027,7 +7071,7 @@
                 <a:ea typeface="Meiryo" pitchFamily="34" charset="-122"/>
                 <a:cs typeface="Meiryo" pitchFamily="34" charset="-120"/>
               </a:rPr>
-              <a:t>社員1人の費用＝4年目の販管費11,103万円÷16人（営業・技術・サポートの全員。給料のほか家賃・広告・交通費などを含む）</a:t>
+              <a:t>社員1人の費用＝5年目の販管費15,423万円÷21人（営業・技術・サポートの全員。給料・会社負担・採用費・家賃などを含む）。銅色は黒字の年</a:t>
             </a:r>
             <a:endParaRPr lang="en-US" sz="800" dirty="0"/>
           </a:p>
@@ -7201,7 +7245,7 @@
                 <a:ea typeface="Meiryo" pitchFamily="34" charset="-122"/>
                 <a:cs typeface="Meiryo" pitchFamily="34" charset="-120"/>
               </a:rPr>
-              <a:t>5年目の売上2億9,000万円のうち57%は、前の年までのお客様の利用料</a:t>
+              <a:t>5年目の売上約269百万円のうち54%は、前の年までのお客様の利用料（解約は年1割で引く）</a:t>
             </a:r>
             <a:endParaRPr lang="en-US" sz="1200" dirty="0"/>
           </a:p>
@@ -7551,7 +7595,7 @@
                           <a:ea typeface="Meiryo" pitchFamily="34" charset="-122"/>
                           <a:cs typeface="Meiryo" pitchFamily="34" charset="-120"/>
                         </a:rPr>
-                        <a:t>▲32</a:t>
+                        <a:t>▲40</a:t>
                       </a:r>
                       <a:endParaRPr lang="en-US" sz="1000" dirty="0">
                         <a:latin typeface="Meiryo" charset="0"/>
@@ -7703,7 +7747,7 @@
                           <a:ea typeface="Meiryo" pitchFamily="34" charset="-122"/>
                           <a:cs typeface="Meiryo" pitchFamily="34" charset="-120"/>
                         </a:rPr>
-                        <a:t>▲27</a:t>
+                        <a:t>▲39</a:t>
                       </a:r>
                       <a:endParaRPr lang="en-US" sz="1000" dirty="0">
                         <a:latin typeface="Meiryo" charset="0"/>
@@ -7805,7 +7849,7 @@
                           <a:ea typeface="Meiryo" pitchFamily="34" charset="-122"/>
                           <a:cs typeface="Meiryo" pitchFamily="34" charset="-120"/>
                         </a:rPr>
-                        <a:t>110</a:t>
+                        <a:t>107</a:t>
                       </a:r>
                       <a:endParaRPr lang="en-US" sz="1000" dirty="0">
                         <a:latin typeface="Meiryo" charset="0"/>
@@ -7855,7 +7899,7 @@
                           <a:ea typeface="Meiryo" pitchFamily="34" charset="-122"/>
                           <a:cs typeface="Meiryo" pitchFamily="34" charset="-120"/>
                         </a:rPr>
-                        <a:t>▲6</a:t>
+                        <a:t>▲27</a:t>
                       </a:r>
                       <a:endParaRPr lang="en-US" sz="1000" dirty="0">
                         <a:latin typeface="Meiryo" charset="0"/>
@@ -7957,7 +8001,7 @@
                           <a:ea typeface="Meiryo" pitchFamily="34" charset="-122"/>
                           <a:cs typeface="Meiryo" pitchFamily="34" charset="-120"/>
                         </a:rPr>
-                        <a:t>190</a:t>
+                        <a:t>178</a:t>
                       </a:r>
                       <a:endParaRPr lang="en-US" sz="1000" dirty="0">
                         <a:latin typeface="Meiryo" charset="0"/>
@@ -7999,15 +8043,15 @@
                         <a:buNone/>
                       </a:pPr>
                       <a:r>
-                        <a:rPr lang="en-US" sz="1000" b="1" dirty="0">
+                        <a:rPr lang="en-US" sz="1000" dirty="0">
                           <a:solidFill>
-                            <a:srgbClr val="B8692E"/>
+                            <a:srgbClr val="4D4D4D"/>
                           </a:solidFill>
                           <a:latin typeface="Meiryo" pitchFamily="34" charset="0"/>
                           <a:ea typeface="Meiryo" pitchFamily="34" charset="-122"/>
                           <a:cs typeface="Meiryo" pitchFamily="34" charset="-120"/>
                         </a:rPr>
-                        <a:t>20</a:t>
+                        <a:t>▲28</a:t>
                       </a:r>
                       <a:endParaRPr lang="en-US" sz="1000" dirty="0">
                         <a:latin typeface="Meiryo" charset="0"/>
@@ -8109,7 +8153,7 @@
                           <a:ea typeface="Meiryo" pitchFamily="34" charset="-122"/>
                           <a:cs typeface="Meiryo" pitchFamily="34" charset="-120"/>
                         </a:rPr>
-                        <a:t>290</a:t>
+                        <a:t>269</a:t>
                       </a:r>
                       <a:endParaRPr lang="en-US" sz="1000" dirty="0">
                         <a:latin typeface="Meiryo" charset="0"/>
@@ -8159,7 +8203,7 @@
                           <a:ea typeface="Meiryo" pitchFamily="34" charset="-122"/>
                           <a:cs typeface="Meiryo" pitchFamily="34" charset="-120"/>
                         </a:rPr>
-                        <a:t>61</a:t>
+                        <a:t>8</a:t>
                       </a:r>
                       <a:endParaRPr lang="en-US" sz="1000" dirty="0">
                         <a:latin typeface="Meiryo" charset="0"/>
@@ -8496,7 +8540,7 @@
                 <a:ea typeface="Meiryo" pitchFamily="34" charset="-122"/>
                 <a:cs typeface="Meiryo" pitchFamily="34" charset="-120"/>
               </a:rPr>
-              <a:t>88万円のエサで、1,852万円の魚を釣る</a:t>
+              <a:t>86万円のエサで、1,571万円の魚を釣る</a:t>
             </a:r>
             <a:endParaRPr lang="en-US" sz="2000" dirty="0"/>
           </a:p>
@@ -8691,7 +8735,7 @@
                 <a:ea typeface="Meiryo" pitchFamily="34" charset="-122"/>
                 <a:cs typeface="Meiryo" pitchFamily="34" charset="-120"/>
               </a:rPr>
-              <a:t>約88万円</a:t>
+              <a:t>約86万円</a:t>
             </a:r>
             <a:endParaRPr lang="en-US" sz="2400" dirty="0"/>
           </a:p>
@@ -8733,7 +8777,7 @@
                 <a:ea typeface="Meiryo" pitchFamily="34" charset="-122"/>
                 <a:cs typeface="Meiryo" pitchFamily="34" charset="-120"/>
               </a:rPr>
-              <a:t>（営業3人の人件費2,400万円</a:t>
+              <a:t>（営業3人の人件費2,340万円</a:t>
             </a:r>
             <a:endParaRPr lang="en-US" sz="1000" dirty="0"/>
           </a:p>
@@ -8815,7 +8859,7 @@
                 <a:ea typeface="Meiryo" pitchFamily="34" charset="-122"/>
                 <a:cs typeface="Meiryo" pitchFamily="34" charset="-120"/>
               </a:rPr>
-              <a:t>約21倍</a:t>
+              <a:t>約18倍</a:t>
             </a:r>
             <a:endParaRPr lang="en-US" sz="2400" dirty="0"/>
           </a:p>
@@ -8987,7 +9031,7 @@
                 <a:ea typeface="Meiryo" pitchFamily="34" charset="-122"/>
                 <a:cs typeface="Meiryo" pitchFamily="34" charset="-120"/>
               </a:rPr>
-              <a:t>約1,852万円</a:t>
+              <a:t>約1,571万円</a:t>
             </a:r>
             <a:endParaRPr lang="en-US" sz="2400" dirty="0"/>
           </a:p>
@@ -9029,7 +9073,7 @@
                 <a:ea typeface="Meiryo" pitchFamily="34" charset="-122"/>
                 <a:cs typeface="Meiryo" pitchFamily="34" charset="-120"/>
               </a:rPr>
-              <a:t>年255万円 × 7年</a:t>
+              <a:t>年216万円 × 7年</a:t>
             </a:r>
             <a:endParaRPr lang="en-US" sz="1050" dirty="0"/>
           </a:p>
@@ -9049,7 +9093,7 @@
                 <a:ea typeface="Meiryo" pitchFamily="34" charset="-122"/>
                 <a:cs typeface="Meiryo" pitchFamily="34" charset="-120"/>
               </a:rPr>
-              <a:t>＋ 導入支援の粗利67万円</a:t>
+              <a:t>＋ 導入支援の粗利59万円</a:t>
             </a:r>
             <a:endParaRPr lang="en-US" sz="1050" dirty="0"/>
           </a:p>
@@ -9069,7 +9113,7 @@
                 <a:ea typeface="Meiryo" pitchFamily="34" charset="-122"/>
                 <a:cs typeface="Meiryo" pitchFamily="34" charset="-120"/>
               </a:rPr>
-              <a:t>7年は控えめ。計画の解約率なら平均18年続く</a:t>
+              <a:t>7年は控えめ。解約が年1割なら平均10年続く</a:t>
             </a:r>
             <a:endParaRPr lang="en-US" sz="1050" dirty="0"/>
           </a:p>
@@ -9155,7 +9199,7 @@
                 <a:ea typeface="Meiryo" pitchFamily="34" charset="-122"/>
                 <a:cs typeface="Meiryo" pitchFamily="34" charset="-120"/>
               </a:rPr>
-              <a:t>88万円は約4か月で回収（88万円 ÷ 月21万円の粗利）。</a:t>
+              <a:t>86万円は約5か月で回収（86万円 ÷ 月18万円の粗利）。</a:t>
             </a:r>
             <a:endParaRPr lang="en-US" sz="1050" dirty="0"/>
           </a:p>
@@ -9175,7 +9219,7 @@
                 <a:ea typeface="Meiryo" pitchFamily="34" charset="-122"/>
                 <a:cs typeface="Meiryo" pitchFamily="34" charset="-120"/>
               </a:rPr>
-              <a:t>目安は「LTVがCACの3倍以上」。当社は約21倍なので、お客様を増やすほど会社が強くなる</a:t>
+              <a:t>目安は「LTVがCACの3倍以上」。当社は約18倍なので、お客様を増やすほど会社が強くなる</a:t>
             </a:r>
             <a:endParaRPr lang="en-US" sz="1050" dirty="0"/>
           </a:p>
@@ -9307,7 +9351,7 @@
                 <a:ea typeface="Meiryo" pitchFamily="34" charset="-122"/>
                 <a:cs typeface="Meiryo" pitchFamily="34" charset="-120"/>
               </a:rPr>
-              <a:t>うまくいかなかったら？ 止まる線を先に決める</a:t>
+              <a:t>うまくいかなかったら？ 鍵は1拠点の台数</a:t>
             </a:r>
             <a:endParaRPr lang="en-US" sz="2000" dirty="0"/>
           </a:p>
@@ -9349,7 +9393,7 @@
                 <a:ea typeface="Meiryo" pitchFamily="34" charset="-122"/>
                 <a:cs typeface="Meiryo" pitchFamily="34" charset="-120"/>
               </a:rPr>
-              <a:t>採用をお客様の数に合わせれば、計画の6割で黒字。届かなければ、決めた線で止まる</a:t>
+              <a:t>10台のままだと計画の9割を割ると黒字にならない。15台に増やせれば6割でも黒字</a:t>
             </a:r>
             <a:endParaRPr lang="en-US" sz="1200" dirty="0"/>
           </a:p>
@@ -9363,8 +9407,8 @@
         </p:nvSpPr>
         <p:spPr>
           <a:xfrm>
-            <a:off x="365760" y="1051560"/>
-            <a:ext cx="4846320" cy="237744"/>
+            <a:off x="365760" y="1024128"/>
+            <a:ext cx="8412480" cy="237744"/>
           </a:xfrm>
           <a:prstGeom prst="rect">
             <a:avLst/>
@@ -9383,7 +9427,7 @@
               <a:buNone/>
             </a:pPr>
             <a:r>
-              <a:rPr lang="en-US" sz="1050" b="1" dirty="0">
+              <a:rPr lang="en-US" sz="1000" b="1" dirty="0">
                 <a:solidFill>
                   <a:srgbClr val="1A1A1A"/>
                 </a:solidFill>
@@ -9391,97 +9435,9 @@
                 <a:ea typeface="Meiryo" pitchFamily="34" charset="-122"/>
                 <a:cs typeface="Meiryo" pitchFamily="34" charset="-120"/>
               </a:rPr>
-              <a:t>新規拠点が計画に届かなかったら（百万円）</a:t>
-            </a:r>
-            <a:endParaRPr lang="en-US" sz="1050" dirty="0"/>
-          </a:p>
-        </p:txBody>
-      </p:sp>
-      <p:sp>
-        <p:nvSpPr>
-          <p:cNvPr id="6" name="Text 3"/>
-          <p:cNvSpPr txBox="1"/>
-          <p:nvPr/>
-        </p:nvSpPr>
-        <p:spPr>
-          <a:xfrm>
-            <a:off x="2651760" y="1325880"/>
-            <a:ext cx="1280160" cy="219456"/>
-          </a:xfrm>
-          <a:prstGeom prst="rect">
-            <a:avLst/>
-          </a:prstGeom>
-          <a:solidFill>
-            <a:srgbClr val="F2F2F2"/>
-          </a:solidFill>
-          <a:ln/>
-        </p:spPr>
-        <p:txBody>
-          <a:bodyPr wrap="square" lIns="0" tIns="0" rIns="0" bIns="0" rtlCol="0" anchor="ctr"/>
-          <a:lstStyle/>
-          <a:p>
-            <a:pPr algn="ctr" indent="0" marL="0">
-              <a:lnSpc>
-                <a:spcPct val="115000"/>
-              </a:lnSpc>
-              <a:buNone/>
-            </a:pPr>
-            <a:r>
-              <a:rPr lang="en-US" sz="850" b="1" dirty="0">
-                <a:solidFill>
-                  <a:srgbClr val="1A1A1A"/>
-                </a:solidFill>
-                <a:latin typeface="Meiryo" pitchFamily="34" charset="0"/>
-                <a:ea typeface="Meiryo" pitchFamily="34" charset="-122"/>
-                <a:cs typeface="Meiryo" pitchFamily="34" charset="-120"/>
-              </a:rPr>
-              <a:t>採用を実績に合わせる</a:t>
-            </a:r>
-            <a:endParaRPr lang="en-US" sz="850" dirty="0"/>
-          </a:p>
-        </p:txBody>
-      </p:sp>
-      <p:sp>
-        <p:nvSpPr>
-          <p:cNvPr id="7" name="Text 4"/>
-          <p:cNvSpPr txBox="1"/>
-          <p:nvPr/>
-        </p:nvSpPr>
-        <p:spPr>
-          <a:xfrm>
-            <a:off x="3931920" y="1325880"/>
-            <a:ext cx="1280160" cy="219456"/>
-          </a:xfrm>
-          <a:prstGeom prst="rect">
-            <a:avLst/>
-          </a:prstGeom>
-          <a:solidFill>
-            <a:srgbClr val="F2F2F2"/>
-          </a:solidFill>
-          <a:ln/>
-        </p:spPr>
-        <p:txBody>
-          <a:bodyPr wrap="square" lIns="0" tIns="0" rIns="0" bIns="0" rtlCol="0" anchor="ctr"/>
-          <a:lstStyle/>
-          <a:p>
-            <a:pPr algn="ctr" indent="0" marL="0">
-              <a:lnSpc>
-                <a:spcPct val="115000"/>
-              </a:lnSpc>
-              <a:buNone/>
-            </a:pPr>
-            <a:r>
-              <a:rPr lang="en-US" sz="850" b="1" dirty="0">
-                <a:solidFill>
-                  <a:srgbClr val="B8692E"/>
-                </a:solidFill>
-                <a:latin typeface="Meiryo" pitchFamily="34" charset="0"/>
-                <a:ea typeface="Meiryo" pitchFamily="34" charset="-122"/>
-                <a:cs typeface="Meiryo" pitchFamily="34" charset="-120"/>
-              </a:rPr>
-              <a:t>採用は計画どおり</a:t>
-            </a:r>
-            <a:endParaRPr lang="en-US" sz="850" dirty="0"/>
+              <a:t>新規拠点が計画に届かなかったら（採用も拠点数に合わせて遅らせる・百万円）</a:t>
+            </a:r>
+            <a:endParaRPr lang="en-US" sz="1000" dirty="0"/>
           </a:p>
         </p:txBody>
       </p:sp>
@@ -9500,22 +9456,24 @@
           </p:nvPr>
         </p:nvGraphicFramePr>
         <p:xfrm>
-          <a:off x="365760" y="1554480"/>
-          <a:ext cx="4846320" cy="914400"/>
+          <a:off x="365760" y="1527048"/>
+          <a:ext cx="8412480" cy="914400"/>
         </p:xfrm>
         <a:graphic>
           <a:graphicData uri="http://schemas.openxmlformats.org/drawingml/2006/table">
             <a:tbl>
               <a:tblPr/>
               <a:tblGrid>
+                <a:gridCol w="1143000"/>
+                <a:gridCol w="1600200"/>
                 <a:gridCol w="960120"/>
-                <a:gridCol w="1325880"/>
-                <a:gridCol w="640080"/>
-                <a:gridCol w="640080"/>
-                <a:gridCol w="640080"/>
-                <a:gridCol w="640080"/>
+                <a:gridCol w="960120"/>
+                <a:gridCol w="868680"/>
+                <a:gridCol w="960120"/>
+                <a:gridCol w="1051560"/>
+                <a:gridCol w="868680"/>
               </a:tblGrid>
-              <a:tr h="292608">
+              <a:tr h="228600">
                 <a:tc>
                   <a:txBody>
                     <a:bodyPr/>
@@ -9683,6 +9641,56 @@
                           <a:ea typeface="Meiryo" pitchFamily="34" charset="-122"/>
                           <a:cs typeface="Meiryo" pitchFamily="34" charset="-120"/>
                         </a:rPr>
+                        <a:t>5年目利益</a:t>
+                      </a:r>
+                      <a:endParaRPr lang="en-US" sz="850" dirty="0">
+                        <a:latin typeface="Meiryo" charset="0"/>
+                        <a:ea typeface="Meiryo" charset="0"/>
+                        <a:cs typeface="Meiryo" charset="0"/>
+                      </a:endParaRPr>
+                    </a:p>
+                  </a:txBody>
+                  <a:tcPr marL="54864" marR="54864" marT="18288" marB="18288" anchor="ctr">
+                    <a:lnL w="0" cap="flat" cmpd="sng" algn="ctr">
+                      <a:noFill/>
+                    </a:lnL>
+                    <a:lnR w="0" cap="flat" cmpd="sng" algn="ctr">
+                      <a:noFill/>
+                    </a:lnR>
+                    <a:lnT w="0" cap="flat" cmpd="sng" algn="ctr">
+                      <a:noFill/>
+                    </a:lnT>
+                    <a:lnB w="19050" cap="flat" cmpd="sng" algn="ctr">
+                      <a:solidFill>
+                        <a:srgbClr val="1A1A1A"/>
+                      </a:solidFill>
+                      <a:prstDash val="solid"/>
+                      <a:round/>
+                      <a:headEnd type="none" w="med" len="med"/>
+                      <a:tailEnd type="none" w="med" len="med"/>
+                    </a:lnB>
+                    <a:solidFill>
+                      <a:srgbClr val="F2F2F2"/>
+                    </a:solidFill>
+                  </a:tcPr>
+                </a:tc>
+                <a:tc>
+                  <a:txBody>
+                    <a:bodyPr/>
+                    <a:lstStyle/>
+                    <a:p>
+                      <a:pPr algn="ctr" indent="0" marL="0">
+                        <a:buNone/>
+                      </a:pPr>
+                      <a:r>
+                        <a:rPr lang="en-US" sz="850" b="1" dirty="0">
+                          <a:solidFill>
+                            <a:srgbClr val="1A1A1A"/>
+                          </a:solidFill>
+                          <a:latin typeface="Meiryo" pitchFamily="34" charset="0"/>
+                          <a:ea typeface="Meiryo" pitchFamily="34" charset="-122"/>
+                          <a:cs typeface="Meiryo" pitchFamily="34" charset="-120"/>
+                        </a:rPr>
                         <a:t>最低現金</a:t>
                       </a:r>
                       <a:endParaRPr lang="en-US" sz="850" dirty="0">
@@ -9783,6 +9791,56 @@
                           <a:ea typeface="Meiryo" pitchFamily="34" charset="-122"/>
                           <a:cs typeface="Meiryo" pitchFamily="34" charset="-120"/>
                         </a:rPr>
+                        <a:t>5年目利益</a:t>
+                      </a:r>
+                      <a:endParaRPr lang="en-US" sz="850" dirty="0">
+                        <a:latin typeface="Meiryo" charset="0"/>
+                        <a:ea typeface="Meiryo" charset="0"/>
+                        <a:cs typeface="Meiryo" charset="0"/>
+                      </a:endParaRPr>
+                    </a:p>
+                  </a:txBody>
+                  <a:tcPr marL="54864" marR="54864" marT="18288" marB="18288" anchor="ctr">
+                    <a:lnL w="0" cap="flat" cmpd="sng" algn="ctr">
+                      <a:noFill/>
+                    </a:lnL>
+                    <a:lnR w="0" cap="flat" cmpd="sng" algn="ctr">
+                      <a:noFill/>
+                    </a:lnR>
+                    <a:lnT w="0" cap="flat" cmpd="sng" algn="ctr">
+                      <a:noFill/>
+                    </a:lnT>
+                    <a:lnB w="19050" cap="flat" cmpd="sng" algn="ctr">
+                      <a:solidFill>
+                        <a:srgbClr val="1A1A1A"/>
+                      </a:solidFill>
+                      <a:prstDash val="solid"/>
+                      <a:round/>
+                      <a:headEnd type="none" w="med" len="med"/>
+                      <a:tailEnd type="none" w="med" len="med"/>
+                    </a:lnB>
+                    <a:solidFill>
+                      <a:srgbClr val="F2F2F2"/>
+                    </a:solidFill>
+                  </a:tcPr>
+                </a:tc>
+                <a:tc>
+                  <a:txBody>
+                    <a:bodyPr/>
+                    <a:lstStyle/>
+                    <a:p>
+                      <a:pPr algn="ctr" indent="0" marL="0">
+                        <a:buNone/>
+                      </a:pPr>
+                      <a:r>
+                        <a:rPr lang="en-US" sz="850" b="1" dirty="0">
+                          <a:solidFill>
+                            <a:srgbClr val="1A1A1A"/>
+                          </a:solidFill>
+                          <a:latin typeface="Meiryo" pitchFamily="34" charset="0"/>
+                          <a:ea typeface="Meiryo" pitchFamily="34" charset="-122"/>
+                          <a:cs typeface="Meiryo" pitchFamily="34" charset="-120"/>
+                        </a:rPr>
                         <a:t>最低現金</a:t>
                       </a:r>
                       <a:endParaRPr lang="en-US" sz="850" dirty="0">
@@ -9817,913 +9875,7 @@
                   </a:tcPr>
                 </a:tc>
               </a:tr>
-              <a:tr h="292608">
-                <a:tc>
-                  <a:txBody>
-                    <a:bodyPr/>
-                    <a:lstStyle/>
-                    <a:p>
-                      <a:pPr algn="l" indent="0" marL="0">
-                        <a:buNone/>
-                      </a:pPr>
-                      <a:r>
-                        <a:rPr lang="en-US" sz="850" dirty="0">
-                          <a:solidFill>
-                            <a:srgbClr val="1A1A1A"/>
-                          </a:solidFill>
-                          <a:latin typeface="Meiryo" pitchFamily="34" charset="0"/>
-                          <a:ea typeface="Meiryo" pitchFamily="34" charset="-122"/>
-                          <a:cs typeface="Meiryo" pitchFamily="34" charset="-120"/>
-                        </a:rPr>
-                        <a:t>計画どおり</a:t>
-                      </a:r>
-                      <a:endParaRPr lang="en-US" sz="850" dirty="0">
-                        <a:latin typeface="Meiryo" charset="0"/>
-                        <a:ea typeface="Meiryo" charset="0"/>
-                        <a:cs typeface="Meiryo" charset="0"/>
-                      </a:endParaRPr>
-                    </a:p>
-                  </a:txBody>
-                  <a:tcPr marL="54864" marR="54864" marT="18288" marB="18288" anchor="ctr">
-                    <a:lnL w="0" cap="flat" cmpd="sng" algn="ctr">
-                      <a:noFill/>
-                    </a:lnL>
-                    <a:lnR w="0" cap="flat" cmpd="sng" algn="ctr">
-                      <a:noFill/>
-                    </a:lnR>
-                    <a:lnT w="0" cap="flat" cmpd="sng" algn="ctr">
-                      <a:noFill/>
-                    </a:lnT>
-                    <a:lnB w="9525" cap="flat" cmpd="sng" algn="ctr">
-                      <a:solidFill>
-                        <a:srgbClr val="BFBFBF"/>
-                      </a:solidFill>
-                      <a:prstDash val="solid"/>
-                      <a:round/>
-                      <a:headEnd type="none" w="med" len="med"/>
-                      <a:tailEnd type="none" w="med" len="med"/>
-                    </a:lnB>
-                    <a:solidFill>
-                      <a:srgbClr val="FFFFFF"/>
-                    </a:solidFill>
-                  </a:tcPr>
-                </a:tc>
-                <a:tc>
-                  <a:txBody>
-                    <a:bodyPr/>
-                    <a:lstStyle/>
-                    <a:p>
-                      <a:pPr algn="ctr" indent="0" marL="0">
-                        <a:buNone/>
-                      </a:pPr>
-                      <a:r>
-                        <a:rPr lang="en-US" sz="850" dirty="0">
-                          <a:solidFill>
-                            <a:srgbClr val="4D4D4D"/>
-                          </a:solidFill>
-                          <a:latin typeface="Meiryo" pitchFamily="34" charset="0"/>
-                          <a:ea typeface="Meiryo" pitchFamily="34" charset="-122"/>
-                          <a:cs typeface="Meiryo" pitchFamily="34" charset="-120"/>
-                        </a:rPr>
-                        <a:t>3・9・18・27・33</a:t>
-                      </a:r>
-                      <a:endParaRPr lang="en-US" sz="850" dirty="0">
-                        <a:latin typeface="Meiryo" charset="0"/>
-                        <a:ea typeface="Meiryo" charset="0"/>
-                        <a:cs typeface="Meiryo" charset="0"/>
-                      </a:endParaRPr>
-                    </a:p>
-                  </a:txBody>
-                  <a:tcPr marL="54864" marR="54864" marT="18288" marB="18288" anchor="ctr">
-                    <a:lnL w="0" cap="flat" cmpd="sng" algn="ctr">
-                      <a:noFill/>
-                    </a:lnL>
-                    <a:lnR w="0" cap="flat" cmpd="sng" algn="ctr">
-                      <a:noFill/>
-                    </a:lnR>
-                    <a:lnT w="0" cap="flat" cmpd="sng" algn="ctr">
-                      <a:noFill/>
-                    </a:lnT>
-                    <a:lnB w="9525" cap="flat" cmpd="sng" algn="ctr">
-                      <a:solidFill>
-                        <a:srgbClr val="BFBFBF"/>
-                      </a:solidFill>
-                      <a:prstDash val="solid"/>
-                      <a:round/>
-                      <a:headEnd type="none" w="med" len="med"/>
-                      <a:tailEnd type="none" w="med" len="med"/>
-                    </a:lnB>
-                    <a:solidFill>
-                      <a:srgbClr val="FFFFFF"/>
-                    </a:solidFill>
-                  </a:tcPr>
-                </a:tc>
-                <a:tc>
-                  <a:txBody>
-                    <a:bodyPr/>
-                    <a:lstStyle/>
-                    <a:p>
-                      <a:pPr algn="ctr" indent="0" marL="0">
-                        <a:buNone/>
-                      </a:pPr>
-                      <a:r>
-                        <a:rPr lang="en-US" sz="850" dirty="0">
-                          <a:solidFill>
-                            <a:srgbClr val="1A1A1A"/>
-                          </a:solidFill>
-                          <a:latin typeface="Meiryo" pitchFamily="34" charset="0"/>
-                          <a:ea typeface="Meiryo" pitchFamily="34" charset="-122"/>
-                          <a:cs typeface="Meiryo" pitchFamily="34" charset="-120"/>
-                        </a:rPr>
-                        <a:t>4年目</a:t>
-                      </a:r>
-                      <a:endParaRPr lang="en-US" sz="850" dirty="0">
-                        <a:latin typeface="Meiryo" charset="0"/>
-                        <a:ea typeface="Meiryo" charset="0"/>
-                        <a:cs typeface="Meiryo" charset="0"/>
-                      </a:endParaRPr>
-                    </a:p>
-                  </a:txBody>
-                  <a:tcPr marL="54864" marR="54864" marT="18288" marB="18288" anchor="ctr">
-                    <a:lnL w="0" cap="flat" cmpd="sng" algn="ctr">
-                      <a:noFill/>
-                    </a:lnL>
-                    <a:lnR w="0" cap="flat" cmpd="sng" algn="ctr">
-                      <a:noFill/>
-                    </a:lnR>
-                    <a:lnT w="0" cap="flat" cmpd="sng" algn="ctr">
-                      <a:noFill/>
-                    </a:lnT>
-                    <a:lnB w="9525" cap="flat" cmpd="sng" algn="ctr">
-                      <a:solidFill>
-                        <a:srgbClr val="BFBFBF"/>
-                      </a:solidFill>
-                      <a:prstDash val="solid"/>
-                      <a:round/>
-                      <a:headEnd type="none" w="med" len="med"/>
-                      <a:tailEnd type="none" w="med" len="med"/>
-                    </a:lnB>
-                    <a:solidFill>
-                      <a:srgbClr val="FFFFFF"/>
-                    </a:solidFill>
-                  </a:tcPr>
-                </a:tc>
-                <a:tc>
-                  <a:txBody>
-                    <a:bodyPr/>
-                    <a:lstStyle/>
-                    <a:p>
-                      <a:pPr algn="ctr" indent="0" marL="0">
-                        <a:buNone/>
-                      </a:pPr>
-                      <a:r>
-                        <a:rPr lang="en-US" sz="850" dirty="0">
-                          <a:solidFill>
-                            <a:srgbClr val="1A1A1A"/>
-                          </a:solidFill>
-                          <a:latin typeface="Meiryo" pitchFamily="34" charset="0"/>
-                          <a:ea typeface="Meiryo" pitchFamily="34" charset="-122"/>
-                          <a:cs typeface="Meiryo" pitchFamily="34" charset="-120"/>
-                        </a:rPr>
-                        <a:t>60</a:t>
-                      </a:r>
-                      <a:endParaRPr lang="en-US" sz="850" dirty="0">
-                        <a:latin typeface="Meiryo" charset="0"/>
-                        <a:ea typeface="Meiryo" charset="0"/>
-                        <a:cs typeface="Meiryo" charset="0"/>
-                      </a:endParaRPr>
-                    </a:p>
-                  </a:txBody>
-                  <a:tcPr marL="54864" marR="54864" marT="18288" marB="18288" anchor="ctr">
-                    <a:lnL w="0" cap="flat" cmpd="sng" algn="ctr">
-                      <a:noFill/>
-                    </a:lnL>
-                    <a:lnR w="0" cap="flat" cmpd="sng" algn="ctr">
-                      <a:noFill/>
-                    </a:lnR>
-                    <a:lnT w="0" cap="flat" cmpd="sng" algn="ctr">
-                      <a:noFill/>
-                    </a:lnT>
-                    <a:lnB w="9525" cap="flat" cmpd="sng" algn="ctr">
-                      <a:solidFill>
-                        <a:srgbClr val="BFBFBF"/>
-                      </a:solidFill>
-                      <a:prstDash val="solid"/>
-                      <a:round/>
-                      <a:headEnd type="none" w="med" len="med"/>
-                      <a:tailEnd type="none" w="med" len="med"/>
-                    </a:lnB>
-                    <a:solidFill>
-                      <a:srgbClr val="FFFFFF"/>
-                    </a:solidFill>
-                  </a:tcPr>
-                </a:tc>
-                <a:tc>
-                  <a:txBody>
-                    <a:bodyPr/>
-                    <a:lstStyle/>
-                    <a:p>
-                      <a:pPr algn="ctr" indent="0" marL="0">
-                        <a:buNone/>
-                      </a:pPr>
-                      <a:r>
-                        <a:rPr lang="en-US" sz="850" dirty="0">
-                          <a:solidFill>
-                            <a:srgbClr val="1A1A1A"/>
-                          </a:solidFill>
-                          <a:latin typeface="Meiryo" pitchFamily="34" charset="0"/>
-                          <a:ea typeface="Meiryo" pitchFamily="34" charset="-122"/>
-                          <a:cs typeface="Meiryo" pitchFamily="34" charset="-120"/>
-                        </a:rPr>
-                        <a:t>4年目</a:t>
-                      </a:r>
-                      <a:endParaRPr lang="en-US" sz="850" dirty="0">
-                        <a:latin typeface="Meiryo" charset="0"/>
-                        <a:ea typeface="Meiryo" charset="0"/>
-                        <a:cs typeface="Meiryo" charset="0"/>
-                      </a:endParaRPr>
-                    </a:p>
-                  </a:txBody>
-                  <a:tcPr marL="54864" marR="54864" marT="18288" marB="18288" anchor="ctr">
-                    <a:lnL w="0" cap="flat" cmpd="sng" algn="ctr">
-                      <a:noFill/>
-                    </a:lnL>
-                    <a:lnR w="0" cap="flat" cmpd="sng" algn="ctr">
-                      <a:noFill/>
-                    </a:lnR>
-                    <a:lnT w="0" cap="flat" cmpd="sng" algn="ctr">
-                      <a:noFill/>
-                    </a:lnT>
-                    <a:lnB w="9525" cap="flat" cmpd="sng" algn="ctr">
-                      <a:solidFill>
-                        <a:srgbClr val="BFBFBF"/>
-                      </a:solidFill>
-                      <a:prstDash val="solid"/>
-                      <a:round/>
-                      <a:headEnd type="none" w="med" len="med"/>
-                      <a:tailEnd type="none" w="med" len="med"/>
-                    </a:lnB>
-                    <a:solidFill>
-                      <a:srgbClr val="FFFFFF"/>
-                    </a:solidFill>
-                  </a:tcPr>
-                </a:tc>
-                <a:tc>
-                  <a:txBody>
-                    <a:bodyPr/>
-                    <a:lstStyle/>
-                    <a:p>
-                      <a:pPr algn="ctr" indent="0" marL="0">
-                        <a:buNone/>
-                      </a:pPr>
-                      <a:r>
-                        <a:rPr lang="en-US" sz="850" dirty="0">
-                          <a:solidFill>
-                            <a:srgbClr val="1A1A1A"/>
-                          </a:solidFill>
-                          <a:latin typeface="Meiryo" pitchFamily="34" charset="0"/>
-                          <a:ea typeface="Meiryo" pitchFamily="34" charset="-122"/>
-                          <a:cs typeface="Meiryo" pitchFamily="34" charset="-120"/>
-                        </a:rPr>
-                        <a:t>60</a:t>
-                      </a:r>
-                      <a:endParaRPr lang="en-US" sz="850" dirty="0">
-                        <a:latin typeface="Meiryo" charset="0"/>
-                        <a:ea typeface="Meiryo" charset="0"/>
-                        <a:cs typeface="Meiryo" charset="0"/>
-                      </a:endParaRPr>
-                    </a:p>
-                  </a:txBody>
-                  <a:tcPr marL="54864" marR="54864" marT="18288" marB="18288" anchor="ctr">
-                    <a:lnL w="0" cap="flat" cmpd="sng" algn="ctr">
-                      <a:noFill/>
-                    </a:lnL>
-                    <a:lnR w="0" cap="flat" cmpd="sng" algn="ctr">
-                      <a:noFill/>
-                    </a:lnR>
-                    <a:lnT w="0" cap="flat" cmpd="sng" algn="ctr">
-                      <a:noFill/>
-                    </a:lnT>
-                    <a:lnB w="9525" cap="flat" cmpd="sng" algn="ctr">
-                      <a:solidFill>
-                        <a:srgbClr val="BFBFBF"/>
-                      </a:solidFill>
-                      <a:prstDash val="solid"/>
-                      <a:round/>
-                      <a:headEnd type="none" w="med" len="med"/>
-                      <a:tailEnd type="none" w="med" len="med"/>
-                    </a:lnB>
-                    <a:solidFill>
-                      <a:srgbClr val="FFFFFF"/>
-                    </a:solidFill>
-                  </a:tcPr>
-                </a:tc>
-              </a:tr>
-              <a:tr h="292608">
-                <a:tc>
-                  <a:txBody>
-                    <a:bodyPr/>
-                    <a:lstStyle/>
-                    <a:p>
-                      <a:pPr algn="l" indent="0" marL="0">
-                        <a:buNone/>
-                      </a:pPr>
-                      <a:r>
-                        <a:rPr lang="en-US" sz="850" dirty="0">
-                          <a:solidFill>
-                            <a:srgbClr val="1A1A1A"/>
-                          </a:solidFill>
-                          <a:latin typeface="Meiryo" pitchFamily="34" charset="0"/>
-                          <a:ea typeface="Meiryo" pitchFamily="34" charset="-122"/>
-                          <a:cs typeface="Meiryo" pitchFamily="34" charset="-120"/>
-                        </a:rPr>
-                        <a:t>計画の8割</a:t>
-                      </a:r>
-                      <a:endParaRPr lang="en-US" sz="850" dirty="0">
-                        <a:latin typeface="Meiryo" charset="0"/>
-                        <a:ea typeface="Meiryo" charset="0"/>
-                        <a:cs typeface="Meiryo" charset="0"/>
-                      </a:endParaRPr>
-                    </a:p>
-                  </a:txBody>
-                  <a:tcPr marL="54864" marR="54864" marT="18288" marB="18288" anchor="ctr">
-                    <a:lnL w="0" cap="flat" cmpd="sng" algn="ctr">
-                      <a:noFill/>
-                    </a:lnL>
-                    <a:lnR w="0" cap="flat" cmpd="sng" algn="ctr">
-                      <a:noFill/>
-                    </a:lnR>
-                    <a:lnT w="0" cap="flat" cmpd="sng" algn="ctr">
-                      <a:noFill/>
-                    </a:lnT>
-                    <a:lnB w="9525" cap="flat" cmpd="sng" algn="ctr">
-                      <a:solidFill>
-                        <a:srgbClr val="BFBFBF"/>
-                      </a:solidFill>
-                      <a:prstDash val="solid"/>
-                      <a:round/>
-                      <a:headEnd type="none" w="med" len="med"/>
-                      <a:tailEnd type="none" w="med" len="med"/>
-                    </a:lnB>
-                    <a:solidFill>
-                      <a:srgbClr val="FFFFFF"/>
-                    </a:solidFill>
-                  </a:tcPr>
-                </a:tc>
-                <a:tc>
-                  <a:txBody>
-                    <a:bodyPr/>
-                    <a:lstStyle/>
-                    <a:p>
-                      <a:pPr algn="ctr" indent="0" marL="0">
-                        <a:buNone/>
-                      </a:pPr>
-                      <a:r>
-                        <a:rPr lang="en-US" sz="850" dirty="0">
-                          <a:solidFill>
-                            <a:srgbClr val="4D4D4D"/>
-                          </a:solidFill>
-                          <a:latin typeface="Meiryo" pitchFamily="34" charset="0"/>
-                          <a:ea typeface="Meiryo" pitchFamily="34" charset="-122"/>
-                          <a:cs typeface="Meiryo" pitchFamily="34" charset="-120"/>
-                        </a:rPr>
-                        <a:t>2・7・14・22・26</a:t>
-                      </a:r>
-                      <a:endParaRPr lang="en-US" sz="850" dirty="0">
-                        <a:latin typeface="Meiryo" charset="0"/>
-                        <a:ea typeface="Meiryo" charset="0"/>
-                        <a:cs typeface="Meiryo" charset="0"/>
-                      </a:endParaRPr>
-                    </a:p>
-                  </a:txBody>
-                  <a:tcPr marL="54864" marR="54864" marT="18288" marB="18288" anchor="ctr">
-                    <a:lnL w="0" cap="flat" cmpd="sng" algn="ctr">
-                      <a:noFill/>
-                    </a:lnL>
-                    <a:lnR w="0" cap="flat" cmpd="sng" algn="ctr">
-                      <a:noFill/>
-                    </a:lnR>
-                    <a:lnT w="0" cap="flat" cmpd="sng" algn="ctr">
-                      <a:noFill/>
-                    </a:lnT>
-                    <a:lnB w="9525" cap="flat" cmpd="sng" algn="ctr">
-                      <a:solidFill>
-                        <a:srgbClr val="BFBFBF"/>
-                      </a:solidFill>
-                      <a:prstDash val="solid"/>
-                      <a:round/>
-                      <a:headEnd type="none" w="med" len="med"/>
-                      <a:tailEnd type="none" w="med" len="med"/>
-                    </a:lnB>
-                    <a:solidFill>
-                      <a:srgbClr val="FFFFFF"/>
-                    </a:solidFill>
-                  </a:tcPr>
-                </a:tc>
-                <a:tc>
-                  <a:txBody>
-                    <a:bodyPr/>
-                    <a:lstStyle/>
-                    <a:p>
-                      <a:pPr algn="ctr" indent="0" marL="0">
-                        <a:buNone/>
-                      </a:pPr>
-                      <a:r>
-                        <a:rPr lang="en-US" sz="850" dirty="0">
-                          <a:solidFill>
-                            <a:srgbClr val="1A1A1A"/>
-                          </a:solidFill>
-                          <a:latin typeface="Meiryo" pitchFamily="34" charset="0"/>
-                          <a:ea typeface="Meiryo" pitchFamily="34" charset="-122"/>
-                          <a:cs typeface="Meiryo" pitchFamily="34" charset="-120"/>
-                        </a:rPr>
-                        <a:t>4年目</a:t>
-                      </a:r>
-                      <a:endParaRPr lang="en-US" sz="850" dirty="0">
-                        <a:latin typeface="Meiryo" charset="0"/>
-                        <a:ea typeface="Meiryo" charset="0"/>
-                        <a:cs typeface="Meiryo" charset="0"/>
-                      </a:endParaRPr>
-                    </a:p>
-                  </a:txBody>
-                  <a:tcPr marL="54864" marR="54864" marT="18288" marB="18288" anchor="ctr">
-                    <a:lnL w="0" cap="flat" cmpd="sng" algn="ctr">
-                      <a:noFill/>
-                    </a:lnL>
-                    <a:lnR w="0" cap="flat" cmpd="sng" algn="ctr">
-                      <a:noFill/>
-                    </a:lnR>
-                    <a:lnT w="0" cap="flat" cmpd="sng" algn="ctr">
-                      <a:noFill/>
-                    </a:lnT>
-                    <a:lnB w="9525" cap="flat" cmpd="sng" algn="ctr">
-                      <a:solidFill>
-                        <a:srgbClr val="BFBFBF"/>
-                      </a:solidFill>
-                      <a:prstDash val="solid"/>
-                      <a:round/>
-                      <a:headEnd type="none" w="med" len="med"/>
-                      <a:tailEnd type="none" w="med" len="med"/>
-                    </a:lnB>
-                    <a:solidFill>
-                      <a:srgbClr val="FFFFFF"/>
-                    </a:solidFill>
-                  </a:tcPr>
-                </a:tc>
-                <a:tc>
-                  <a:txBody>
-                    <a:bodyPr/>
-                    <a:lstStyle/>
-                    <a:p>
-                      <a:pPr algn="ctr" indent="0" marL="0">
-                        <a:buNone/>
-                      </a:pPr>
-                      <a:r>
-                        <a:rPr lang="en-US" sz="850" dirty="0">
-                          <a:solidFill>
-                            <a:srgbClr val="1A1A1A"/>
-                          </a:solidFill>
-                          <a:latin typeface="Meiryo" pitchFamily="34" charset="0"/>
-                          <a:ea typeface="Meiryo" pitchFamily="34" charset="-122"/>
-                          <a:cs typeface="Meiryo" pitchFamily="34" charset="-120"/>
-                        </a:rPr>
-                        <a:t>39</a:t>
-                      </a:r>
-                      <a:endParaRPr lang="en-US" sz="850" dirty="0">
-                        <a:latin typeface="Meiryo" charset="0"/>
-                        <a:ea typeface="Meiryo" charset="0"/>
-                        <a:cs typeface="Meiryo" charset="0"/>
-                      </a:endParaRPr>
-                    </a:p>
-                  </a:txBody>
-                  <a:tcPr marL="54864" marR="54864" marT="18288" marB="18288" anchor="ctr">
-                    <a:lnL w="0" cap="flat" cmpd="sng" algn="ctr">
-                      <a:noFill/>
-                    </a:lnL>
-                    <a:lnR w="0" cap="flat" cmpd="sng" algn="ctr">
-                      <a:noFill/>
-                    </a:lnR>
-                    <a:lnT w="0" cap="flat" cmpd="sng" algn="ctr">
-                      <a:noFill/>
-                    </a:lnT>
-                    <a:lnB w="9525" cap="flat" cmpd="sng" algn="ctr">
-                      <a:solidFill>
-                        <a:srgbClr val="BFBFBF"/>
-                      </a:solidFill>
-                      <a:prstDash val="solid"/>
-                      <a:round/>
-                      <a:headEnd type="none" w="med" len="med"/>
-                      <a:tailEnd type="none" w="med" len="med"/>
-                    </a:lnB>
-                    <a:solidFill>
-                      <a:srgbClr val="FFFFFF"/>
-                    </a:solidFill>
-                  </a:tcPr>
-                </a:tc>
-                <a:tc>
-                  <a:txBody>
-                    <a:bodyPr/>
-                    <a:lstStyle/>
-                    <a:p>
-                      <a:pPr algn="ctr" indent="0" marL="0">
-                        <a:buNone/>
-                      </a:pPr>
-                      <a:r>
-                        <a:rPr lang="en-US" sz="850" dirty="0">
-                          <a:solidFill>
-                            <a:srgbClr val="1A1A1A"/>
-                          </a:solidFill>
-                          <a:latin typeface="Meiryo" pitchFamily="34" charset="0"/>
-                          <a:ea typeface="Meiryo" pitchFamily="34" charset="-122"/>
-                          <a:cs typeface="Meiryo" pitchFamily="34" charset="-120"/>
-                        </a:rPr>
-                        <a:t>5年目</a:t>
-                      </a:r>
-                      <a:endParaRPr lang="en-US" sz="850" dirty="0">
-                        <a:latin typeface="Meiryo" charset="0"/>
-                        <a:ea typeface="Meiryo" charset="0"/>
-                        <a:cs typeface="Meiryo" charset="0"/>
-                      </a:endParaRPr>
-                    </a:p>
-                  </a:txBody>
-                  <a:tcPr marL="54864" marR="54864" marT="18288" marB="18288" anchor="ctr">
-                    <a:lnL w="0" cap="flat" cmpd="sng" algn="ctr">
-                      <a:noFill/>
-                    </a:lnL>
-                    <a:lnR w="0" cap="flat" cmpd="sng" algn="ctr">
-                      <a:noFill/>
-                    </a:lnR>
-                    <a:lnT w="0" cap="flat" cmpd="sng" algn="ctr">
-                      <a:noFill/>
-                    </a:lnT>
-                    <a:lnB w="9525" cap="flat" cmpd="sng" algn="ctr">
-                      <a:solidFill>
-                        <a:srgbClr val="BFBFBF"/>
-                      </a:solidFill>
-                      <a:prstDash val="solid"/>
-                      <a:round/>
-                      <a:headEnd type="none" w="med" len="med"/>
-                      <a:tailEnd type="none" w="med" len="med"/>
-                    </a:lnB>
-                    <a:solidFill>
-                      <a:srgbClr val="FFFFFF"/>
-                    </a:solidFill>
-                  </a:tcPr>
-                </a:tc>
-                <a:tc>
-                  <a:txBody>
-                    <a:bodyPr/>
-                    <a:lstStyle/>
-                    <a:p>
-                      <a:pPr algn="ctr" indent="0" marL="0">
-                        <a:buNone/>
-                      </a:pPr>
-                      <a:r>
-                        <a:rPr lang="en-US" sz="850" dirty="0">
-                          <a:solidFill>
-                            <a:srgbClr val="1A1A1A"/>
-                          </a:solidFill>
-                          <a:latin typeface="Meiryo" pitchFamily="34" charset="0"/>
-                          <a:ea typeface="Meiryo" pitchFamily="34" charset="-122"/>
-                          <a:cs typeface="Meiryo" pitchFamily="34" charset="-120"/>
-                        </a:rPr>
-                        <a:t>8</a:t>
-                      </a:r>
-                      <a:endParaRPr lang="en-US" sz="850" dirty="0">
-                        <a:latin typeface="Meiryo" charset="0"/>
-                        <a:ea typeface="Meiryo" charset="0"/>
-                        <a:cs typeface="Meiryo" charset="0"/>
-                      </a:endParaRPr>
-                    </a:p>
-                  </a:txBody>
-                  <a:tcPr marL="54864" marR="54864" marT="18288" marB="18288" anchor="ctr">
-                    <a:lnL w="0" cap="flat" cmpd="sng" algn="ctr">
-                      <a:noFill/>
-                    </a:lnL>
-                    <a:lnR w="0" cap="flat" cmpd="sng" algn="ctr">
-                      <a:noFill/>
-                    </a:lnR>
-                    <a:lnT w="0" cap="flat" cmpd="sng" algn="ctr">
-                      <a:noFill/>
-                    </a:lnT>
-                    <a:lnB w="9525" cap="flat" cmpd="sng" algn="ctr">
-                      <a:solidFill>
-                        <a:srgbClr val="BFBFBF"/>
-                      </a:solidFill>
-                      <a:prstDash val="solid"/>
-                      <a:round/>
-                      <a:headEnd type="none" w="med" len="med"/>
-                      <a:tailEnd type="none" w="med" len="med"/>
-                    </a:lnB>
-                    <a:solidFill>
-                      <a:srgbClr val="FFFFFF"/>
-                    </a:solidFill>
-                  </a:tcPr>
-                </a:tc>
-              </a:tr>
-              <a:tr h="292608">
-                <a:tc>
-                  <a:txBody>
-                    <a:bodyPr/>
-                    <a:lstStyle/>
-                    <a:p>
-                      <a:pPr algn="l" indent="0" marL="0">
-                        <a:buNone/>
-                      </a:pPr>
-                      <a:r>
-                        <a:rPr lang="en-US" sz="850" dirty="0">
-                          <a:solidFill>
-                            <a:srgbClr val="1A1A1A"/>
-                          </a:solidFill>
-                          <a:latin typeface="Meiryo" pitchFamily="34" charset="0"/>
-                          <a:ea typeface="Meiryo" pitchFamily="34" charset="-122"/>
-                          <a:cs typeface="Meiryo" pitchFamily="34" charset="-120"/>
-                        </a:rPr>
-                        <a:t>計画の7割</a:t>
-                      </a:r>
-                      <a:endParaRPr lang="en-US" sz="850" dirty="0">
-                        <a:latin typeface="Meiryo" charset="0"/>
-                        <a:ea typeface="Meiryo" charset="0"/>
-                        <a:cs typeface="Meiryo" charset="0"/>
-                      </a:endParaRPr>
-                    </a:p>
-                  </a:txBody>
-                  <a:tcPr marL="54864" marR="54864" marT="18288" marB="18288" anchor="ctr">
-                    <a:lnL w="0" cap="flat" cmpd="sng" algn="ctr">
-                      <a:noFill/>
-                    </a:lnL>
-                    <a:lnR w="0" cap="flat" cmpd="sng" algn="ctr">
-                      <a:noFill/>
-                    </a:lnR>
-                    <a:lnT w="0" cap="flat" cmpd="sng" algn="ctr">
-                      <a:noFill/>
-                    </a:lnT>
-                    <a:lnB w="9525" cap="flat" cmpd="sng" algn="ctr">
-                      <a:solidFill>
-                        <a:srgbClr val="BFBFBF"/>
-                      </a:solidFill>
-                      <a:prstDash val="solid"/>
-                      <a:round/>
-                      <a:headEnd type="none" w="med" len="med"/>
-                      <a:tailEnd type="none" w="med" len="med"/>
-                    </a:lnB>
-                    <a:solidFill>
-                      <a:srgbClr val="FFFFFF"/>
-                    </a:solidFill>
-                  </a:tcPr>
-                </a:tc>
-                <a:tc>
-                  <a:txBody>
-                    <a:bodyPr/>
-                    <a:lstStyle/>
-                    <a:p>
-                      <a:pPr algn="ctr" indent="0" marL="0">
-                        <a:buNone/>
-                      </a:pPr>
-                      <a:r>
-                        <a:rPr lang="en-US" sz="850" dirty="0">
-                          <a:solidFill>
-                            <a:srgbClr val="4D4D4D"/>
-                          </a:solidFill>
-                          <a:latin typeface="Meiryo" pitchFamily="34" charset="0"/>
-                          <a:ea typeface="Meiryo" pitchFamily="34" charset="-122"/>
-                          <a:cs typeface="Meiryo" pitchFamily="34" charset="-120"/>
-                        </a:rPr>
-                        <a:t>2・6・13・19・23</a:t>
-                      </a:r>
-                      <a:endParaRPr lang="en-US" sz="850" dirty="0">
-                        <a:latin typeface="Meiryo" charset="0"/>
-                        <a:ea typeface="Meiryo" charset="0"/>
-                        <a:cs typeface="Meiryo" charset="0"/>
-                      </a:endParaRPr>
-                    </a:p>
-                  </a:txBody>
-                  <a:tcPr marL="54864" marR="54864" marT="18288" marB="18288" anchor="ctr">
-                    <a:lnL w="0" cap="flat" cmpd="sng" algn="ctr">
-                      <a:noFill/>
-                    </a:lnL>
-                    <a:lnR w="0" cap="flat" cmpd="sng" algn="ctr">
-                      <a:noFill/>
-                    </a:lnR>
-                    <a:lnT w="0" cap="flat" cmpd="sng" algn="ctr">
-                      <a:noFill/>
-                    </a:lnT>
-                    <a:lnB w="9525" cap="flat" cmpd="sng" algn="ctr">
-                      <a:solidFill>
-                        <a:srgbClr val="BFBFBF"/>
-                      </a:solidFill>
-                      <a:prstDash val="solid"/>
-                      <a:round/>
-                      <a:headEnd type="none" w="med" len="med"/>
-                      <a:tailEnd type="none" w="med" len="med"/>
-                    </a:lnB>
-                    <a:solidFill>
-                      <a:srgbClr val="FFFFFF"/>
-                    </a:solidFill>
-                  </a:tcPr>
-                </a:tc>
-                <a:tc>
-                  <a:txBody>
-                    <a:bodyPr/>
-                    <a:lstStyle/>
-                    <a:p>
-                      <a:pPr algn="ctr" indent="0" marL="0">
-                        <a:buNone/>
-                      </a:pPr>
-                      <a:r>
-                        <a:rPr lang="en-US" sz="850" dirty="0">
-                          <a:solidFill>
-                            <a:srgbClr val="1A1A1A"/>
-                          </a:solidFill>
-                          <a:latin typeface="Meiryo" pitchFamily="34" charset="0"/>
-                          <a:ea typeface="Meiryo" pitchFamily="34" charset="-122"/>
-                          <a:cs typeface="Meiryo" pitchFamily="34" charset="-120"/>
-                        </a:rPr>
-                        <a:t>4年目</a:t>
-                      </a:r>
-                      <a:endParaRPr lang="en-US" sz="850" dirty="0">
-                        <a:latin typeface="Meiryo" charset="0"/>
-                        <a:ea typeface="Meiryo" charset="0"/>
-                        <a:cs typeface="Meiryo" charset="0"/>
-                      </a:endParaRPr>
-                    </a:p>
-                  </a:txBody>
-                  <a:tcPr marL="54864" marR="54864" marT="18288" marB="18288" anchor="ctr">
-                    <a:lnL w="0" cap="flat" cmpd="sng" algn="ctr">
-                      <a:noFill/>
-                    </a:lnL>
-                    <a:lnR w="0" cap="flat" cmpd="sng" algn="ctr">
-                      <a:noFill/>
-                    </a:lnR>
-                    <a:lnT w="0" cap="flat" cmpd="sng" algn="ctr">
-                      <a:noFill/>
-                    </a:lnT>
-                    <a:lnB w="9525" cap="flat" cmpd="sng" algn="ctr">
-                      <a:solidFill>
-                        <a:srgbClr val="BFBFBF"/>
-                      </a:solidFill>
-                      <a:prstDash val="solid"/>
-                      <a:round/>
-                      <a:headEnd type="none" w="med" len="med"/>
-                      <a:tailEnd type="none" w="med" len="med"/>
-                    </a:lnB>
-                    <a:solidFill>
-                      <a:srgbClr val="FFFFFF"/>
-                    </a:solidFill>
-                  </a:tcPr>
-                </a:tc>
-                <a:tc>
-                  <a:txBody>
-                    <a:bodyPr/>
-                    <a:lstStyle/>
-                    <a:p>
-                      <a:pPr algn="ctr" indent="0" marL="0">
-                        <a:buNone/>
-                      </a:pPr>
-                      <a:r>
-                        <a:rPr lang="en-US" sz="850" dirty="0">
-                          <a:solidFill>
-                            <a:srgbClr val="1A1A1A"/>
-                          </a:solidFill>
-                          <a:latin typeface="Meiryo" pitchFamily="34" charset="0"/>
-                          <a:ea typeface="Meiryo" pitchFamily="34" charset="-122"/>
-                          <a:cs typeface="Meiryo" pitchFamily="34" charset="-120"/>
-                        </a:rPr>
-                        <a:t>36</a:t>
-                      </a:r>
-                      <a:endParaRPr lang="en-US" sz="850" dirty="0">
-                        <a:latin typeface="Meiryo" charset="0"/>
-                        <a:ea typeface="Meiryo" charset="0"/>
-                        <a:cs typeface="Meiryo" charset="0"/>
-                      </a:endParaRPr>
-                    </a:p>
-                  </a:txBody>
-                  <a:tcPr marL="54864" marR="54864" marT="18288" marB="18288" anchor="ctr">
-                    <a:lnL w="0" cap="flat" cmpd="sng" algn="ctr">
-                      <a:noFill/>
-                    </a:lnL>
-                    <a:lnR w="0" cap="flat" cmpd="sng" algn="ctr">
-                      <a:noFill/>
-                    </a:lnR>
-                    <a:lnT w="0" cap="flat" cmpd="sng" algn="ctr">
-                      <a:noFill/>
-                    </a:lnT>
-                    <a:lnB w="9525" cap="flat" cmpd="sng" algn="ctr">
-                      <a:solidFill>
-                        <a:srgbClr val="BFBFBF"/>
-                      </a:solidFill>
-                      <a:prstDash val="solid"/>
-                      <a:round/>
-                      <a:headEnd type="none" w="med" len="med"/>
-                      <a:tailEnd type="none" w="med" len="med"/>
-                    </a:lnB>
-                    <a:solidFill>
-                      <a:srgbClr val="FFFFFF"/>
-                    </a:solidFill>
-                  </a:tcPr>
-                </a:tc>
-                <a:tc>
-                  <a:txBody>
-                    <a:bodyPr/>
-                    <a:lstStyle/>
-                    <a:p>
-                      <a:pPr algn="ctr" indent="0" marL="0">
-                        <a:buNone/>
-                      </a:pPr>
-                      <a:r>
-                        <a:rPr lang="en-US" sz="850" b="1" dirty="0">
-                          <a:solidFill>
-                            <a:srgbClr val="B8692E"/>
-                          </a:solidFill>
-                          <a:latin typeface="Meiryo" pitchFamily="34" charset="0"/>
-                          <a:ea typeface="Meiryo" pitchFamily="34" charset="-122"/>
-                          <a:cs typeface="Meiryo" pitchFamily="34" charset="-120"/>
-                        </a:rPr>
-                        <a:t>しない</a:t>
-                      </a:r>
-                      <a:endParaRPr lang="en-US" sz="850" dirty="0">
-                        <a:latin typeface="Meiryo" charset="0"/>
-                        <a:ea typeface="Meiryo" charset="0"/>
-                        <a:cs typeface="Meiryo" charset="0"/>
-                      </a:endParaRPr>
-                    </a:p>
-                  </a:txBody>
-                  <a:tcPr marL="54864" marR="54864" marT="18288" marB="18288" anchor="ctr">
-                    <a:lnL w="0" cap="flat" cmpd="sng" algn="ctr">
-                      <a:noFill/>
-                    </a:lnL>
-                    <a:lnR w="0" cap="flat" cmpd="sng" algn="ctr">
-                      <a:noFill/>
-                    </a:lnR>
-                    <a:lnT w="0" cap="flat" cmpd="sng" algn="ctr">
-                      <a:noFill/>
-                    </a:lnT>
-                    <a:lnB w="9525" cap="flat" cmpd="sng" algn="ctr">
-                      <a:solidFill>
-                        <a:srgbClr val="BFBFBF"/>
-                      </a:solidFill>
-                      <a:prstDash val="solid"/>
-                      <a:round/>
-                      <a:headEnd type="none" w="med" len="med"/>
-                      <a:tailEnd type="none" w="med" len="med"/>
-                    </a:lnB>
-                    <a:solidFill>
-                      <a:srgbClr val="FFFFFF"/>
-                    </a:solidFill>
-                  </a:tcPr>
-                </a:tc>
-                <a:tc>
-                  <a:txBody>
-                    <a:bodyPr/>
-                    <a:lstStyle/>
-                    <a:p>
-                      <a:pPr algn="ctr" indent="0" marL="0">
-                        <a:buNone/>
-                      </a:pPr>
-                      <a:r>
-                        <a:rPr lang="en-US" sz="850" b="1" dirty="0">
-                          <a:solidFill>
-                            <a:srgbClr val="B8692E"/>
-                          </a:solidFill>
-                          <a:latin typeface="Meiryo" pitchFamily="34" charset="0"/>
-                          <a:ea typeface="Meiryo" pitchFamily="34" charset="-122"/>
-                          <a:cs typeface="Meiryo" pitchFamily="34" charset="-120"/>
-                        </a:rPr>
-                        <a:t>-38</a:t>
-                      </a:r>
-                      <a:endParaRPr lang="en-US" sz="850" dirty="0">
-                        <a:latin typeface="Meiryo" charset="0"/>
-                        <a:ea typeface="Meiryo" charset="0"/>
-                        <a:cs typeface="Meiryo" charset="0"/>
-                      </a:endParaRPr>
-                    </a:p>
-                  </a:txBody>
-                  <a:tcPr marL="54864" marR="54864" marT="18288" marB="18288" anchor="ctr">
-                    <a:lnL w="0" cap="flat" cmpd="sng" algn="ctr">
-                      <a:noFill/>
-                    </a:lnL>
-                    <a:lnR w="0" cap="flat" cmpd="sng" algn="ctr">
-                      <a:noFill/>
-                    </a:lnR>
-                    <a:lnT w="0" cap="flat" cmpd="sng" algn="ctr">
-                      <a:noFill/>
-                    </a:lnT>
-                    <a:lnB w="9525" cap="flat" cmpd="sng" algn="ctr">
-                      <a:solidFill>
-                        <a:srgbClr val="BFBFBF"/>
-                      </a:solidFill>
-                      <a:prstDash val="solid"/>
-                      <a:round/>
-                      <a:headEnd type="none" w="med" len="med"/>
-                      <a:tailEnd type="none" w="med" len="med"/>
-                    </a:lnB>
-                    <a:solidFill>
-                      <a:srgbClr val="FFFFFF"/>
-                    </a:solidFill>
-                  </a:tcPr>
-                </a:tc>
-              </a:tr>
-              <a:tr h="292608">
+              <a:tr h="228600">
                 <a:tc>
                   <a:txBody>
                     <a:bodyPr/>
@@ -10735,13 +9887,13 @@
                       <a:r>
                         <a:rPr lang="en-US" sz="850" b="1" dirty="0">
                           <a:solidFill>
-                            <a:srgbClr val="B8692E"/>
+                            <a:srgbClr val="1A1A1A"/>
                           </a:solidFill>
                           <a:latin typeface="Meiryo" pitchFamily="34" charset="0"/>
                           <a:ea typeface="Meiryo" pitchFamily="34" charset="-122"/>
                           <a:cs typeface="Meiryo" pitchFamily="34" charset="-120"/>
                         </a:rPr>
-                        <a:t>計画の6割</a:t>
+                        <a:t>計画どおり</a:t>
                       </a:r>
                       <a:endParaRPr lang="en-US" sz="850" dirty="0">
                         <a:latin typeface="Meiryo" charset="0"/>
@@ -10797,7 +9949,7 @@
                           <a:ea typeface="Meiryo" pitchFamily="34" charset="-122"/>
                           <a:cs typeface="Meiryo" pitchFamily="34" charset="-120"/>
                         </a:rPr>
-                        <a:t>2・5・11・16・20</a:t>
+                        <a:t>3・9・18・27・33</a:t>
                       </a:r>
                       <a:endParaRPr lang="en-US" sz="850" dirty="0">
                         <a:latin typeface="Meiryo" charset="0"/>
@@ -10909,7 +10061,7 @@
                           <a:ea typeface="Meiryo" pitchFamily="34" charset="-122"/>
                           <a:cs typeface="Meiryo" pitchFamily="34" charset="-120"/>
                         </a:rPr>
-                        <a:t>20</a:t>
+                        <a:t>8</a:t>
                       </a:r>
                       <a:endParaRPr lang="en-US" sz="850" dirty="0">
                         <a:latin typeface="Meiryo" charset="0"/>
@@ -10959,13 +10111,13 @@
                       <a:r>
                         <a:rPr lang="en-US" sz="850" b="1" dirty="0">
                           <a:solidFill>
-                            <a:srgbClr val="B8692E"/>
+                            <a:srgbClr val="1A1A1A"/>
                           </a:solidFill>
                           <a:latin typeface="Meiryo" pitchFamily="34" charset="0"/>
                           <a:ea typeface="Meiryo" pitchFamily="34" charset="-122"/>
                           <a:cs typeface="Meiryo" pitchFamily="34" charset="-120"/>
                         </a:rPr>
-                        <a:t>しない</a:t>
+                        <a:t>40</a:t>
                       </a:r>
                       <a:endParaRPr lang="en-US" sz="850" dirty="0">
                         <a:latin typeface="Meiryo" charset="0"/>
@@ -11015,13 +10167,125 @@
                       <a:r>
                         <a:rPr lang="en-US" sz="850" b="1" dirty="0">
                           <a:solidFill>
-                            <a:srgbClr val="B8692E"/>
+                            <a:srgbClr val="1A1A1A"/>
                           </a:solidFill>
                           <a:latin typeface="Meiryo" pitchFamily="34" charset="0"/>
                           <a:ea typeface="Meiryo" pitchFamily="34" charset="-122"/>
                           <a:cs typeface="Meiryo" pitchFamily="34" charset="-120"/>
                         </a:rPr>
-                        <a:t>-97</a:t>
+                        <a:t>4年目</a:t>
+                      </a:r>
+                      <a:endParaRPr lang="en-US" sz="850" dirty="0">
+                        <a:latin typeface="Meiryo" charset="0"/>
+                        <a:ea typeface="Meiryo" charset="0"/>
+                        <a:cs typeface="Meiryo" charset="0"/>
+                      </a:endParaRPr>
+                    </a:p>
+                  </a:txBody>
+                  <a:tcPr marL="54864" marR="54864" marT="18288" marB="18288" anchor="ctr">
+                    <a:lnL w="0" cap="flat" cmpd="sng" algn="ctr">
+                      <a:noFill/>
+                    </a:lnL>
+                    <a:lnR w="0" cap="flat" cmpd="sng" algn="ctr">
+                      <a:noFill/>
+                    </a:lnR>
+                    <a:lnT w="19050" cap="flat" cmpd="sng" algn="ctr">
+                      <a:solidFill>
+                        <a:srgbClr val="1A1A1A"/>
+                      </a:solidFill>
+                      <a:prstDash val="solid"/>
+                      <a:round/>
+                      <a:headEnd type="none" w="med" len="med"/>
+                      <a:tailEnd type="none" w="med" len="med"/>
+                    </a:lnT>
+                    <a:lnB w="9525" cap="flat" cmpd="sng" algn="ctr">
+                      <a:solidFill>
+                        <a:srgbClr val="BFBFBF"/>
+                      </a:solidFill>
+                      <a:prstDash val="solid"/>
+                      <a:round/>
+                      <a:headEnd type="none" w="med" len="med"/>
+                      <a:tailEnd type="none" w="med" len="med"/>
+                    </a:lnB>
+                    <a:solidFill>
+                      <a:srgbClr val="FFFFFF"/>
+                    </a:solidFill>
+                  </a:tcPr>
+                </a:tc>
+                <a:tc>
+                  <a:txBody>
+                    <a:bodyPr/>
+                    <a:lstStyle/>
+                    <a:p>
+                      <a:pPr algn="ctr" indent="0" marL="0">
+                        <a:buNone/>
+                      </a:pPr>
+                      <a:r>
+                        <a:rPr lang="en-US" sz="850" b="1" dirty="0">
+                          <a:solidFill>
+                            <a:srgbClr val="1A1A1A"/>
+                          </a:solidFill>
+                          <a:latin typeface="Meiryo" pitchFamily="34" charset="0"/>
+                          <a:ea typeface="Meiryo" pitchFamily="34" charset="-122"/>
+                          <a:cs typeface="Meiryo" pitchFamily="34" charset="-120"/>
+                        </a:rPr>
+                        <a:t>62</a:t>
+                      </a:r>
+                      <a:endParaRPr lang="en-US" sz="850" dirty="0">
+                        <a:latin typeface="Meiryo" charset="0"/>
+                        <a:ea typeface="Meiryo" charset="0"/>
+                        <a:cs typeface="Meiryo" charset="0"/>
+                      </a:endParaRPr>
+                    </a:p>
+                  </a:txBody>
+                  <a:tcPr marL="54864" marR="54864" marT="18288" marB="18288" anchor="ctr">
+                    <a:lnL w="0" cap="flat" cmpd="sng" algn="ctr">
+                      <a:noFill/>
+                    </a:lnL>
+                    <a:lnR w="0" cap="flat" cmpd="sng" algn="ctr">
+                      <a:noFill/>
+                    </a:lnR>
+                    <a:lnT w="19050" cap="flat" cmpd="sng" algn="ctr">
+                      <a:solidFill>
+                        <a:srgbClr val="1A1A1A"/>
+                      </a:solidFill>
+                      <a:prstDash val="solid"/>
+                      <a:round/>
+                      <a:headEnd type="none" w="med" len="med"/>
+                      <a:tailEnd type="none" w="med" len="med"/>
+                    </a:lnT>
+                    <a:lnB w="9525" cap="flat" cmpd="sng" algn="ctr">
+                      <a:solidFill>
+                        <a:srgbClr val="BFBFBF"/>
+                      </a:solidFill>
+                      <a:prstDash val="solid"/>
+                      <a:round/>
+                      <a:headEnd type="none" w="med" len="med"/>
+                      <a:tailEnd type="none" w="med" len="med"/>
+                    </a:lnB>
+                    <a:solidFill>
+                      <a:srgbClr val="FFFFFF"/>
+                    </a:solidFill>
+                  </a:tcPr>
+                </a:tc>
+                <a:tc>
+                  <a:txBody>
+                    <a:bodyPr/>
+                    <a:lstStyle/>
+                    <a:p>
+                      <a:pPr algn="ctr" indent="0" marL="0">
+                        <a:buNone/>
+                      </a:pPr>
+                      <a:r>
+                        <a:rPr lang="en-US" sz="850" b="1" dirty="0">
+                          <a:solidFill>
+                            <a:srgbClr val="1A1A1A"/>
+                          </a:solidFill>
+                          <a:latin typeface="Meiryo" pitchFamily="34" charset="0"/>
+                          <a:ea typeface="Meiryo" pitchFamily="34" charset="-122"/>
+                          <a:cs typeface="Meiryo" pitchFamily="34" charset="-120"/>
+                        </a:rPr>
+                        <a:t>52</a:t>
                       </a:r>
                       <a:endParaRPr lang="en-US" sz="850" dirty="0">
                         <a:latin typeface="Meiryo" charset="0"/>
@@ -11061,7 +10325,7 @@
                   </a:tcPr>
                 </a:tc>
               </a:tr>
-              <a:tr h="292608">
+              <a:tr h="228600">
                 <a:tc>
                   <a:txBody>
                     <a:bodyPr/>
@@ -11079,7 +10343,7 @@
                           <a:ea typeface="Meiryo" pitchFamily="34" charset="-122"/>
                           <a:cs typeface="Meiryo" pitchFamily="34" charset="-120"/>
                         </a:rPr>
-                        <a:t>計画の5割</a:t>
+                        <a:t>計画の9割</a:t>
                       </a:r>
                       <a:endParaRPr lang="en-US" sz="850" dirty="0">
                         <a:latin typeface="Meiryo" charset="0"/>
@@ -11129,7 +10393,409 @@
                           <a:ea typeface="Meiryo" pitchFamily="34" charset="-122"/>
                           <a:cs typeface="Meiryo" pitchFamily="34" charset="-120"/>
                         </a:rPr>
-                        <a:t>2・5・9・14・17</a:t>
+                        <a:t>3・8・16・24・30</a:t>
+                      </a:r>
+                      <a:endParaRPr lang="en-US" sz="850" dirty="0">
+                        <a:latin typeface="Meiryo" charset="0"/>
+                        <a:ea typeface="Meiryo" charset="0"/>
+                        <a:cs typeface="Meiryo" charset="0"/>
+                      </a:endParaRPr>
+                    </a:p>
+                  </a:txBody>
+                  <a:tcPr marL="54864" marR="54864" marT="18288" marB="18288" anchor="ctr">
+                    <a:lnL w="0" cap="flat" cmpd="sng" algn="ctr">
+                      <a:noFill/>
+                    </a:lnL>
+                    <a:lnR w="0" cap="flat" cmpd="sng" algn="ctr">
+                      <a:noFill/>
+                    </a:lnR>
+                    <a:lnT w="0" cap="flat" cmpd="sng" algn="ctr">
+                      <a:noFill/>
+                    </a:lnT>
+                    <a:lnB w="9525" cap="flat" cmpd="sng" algn="ctr">
+                      <a:solidFill>
+                        <a:srgbClr val="BFBFBF"/>
+                      </a:solidFill>
+                      <a:prstDash val="solid"/>
+                      <a:round/>
+                      <a:headEnd type="none" w="med" len="med"/>
+                      <a:tailEnd type="none" w="med" len="med"/>
+                    </a:lnB>
+                    <a:solidFill>
+                      <a:srgbClr val="FFFFFF"/>
+                    </a:solidFill>
+                  </a:tcPr>
+                </a:tc>
+                <a:tc>
+                  <a:txBody>
+                    <a:bodyPr/>
+                    <a:lstStyle/>
+                    <a:p>
+                      <a:pPr algn="ctr" indent="0" marL="0">
+                        <a:buNone/>
+                      </a:pPr>
+                      <a:r>
+                        <a:rPr lang="en-US" sz="850" dirty="0">
+                          <a:solidFill>
+                            <a:srgbClr val="1A1A1A"/>
+                          </a:solidFill>
+                          <a:latin typeface="Meiryo" pitchFamily="34" charset="0"/>
+                          <a:ea typeface="Meiryo" pitchFamily="34" charset="-122"/>
+                          <a:cs typeface="Meiryo" pitchFamily="34" charset="-120"/>
+                        </a:rPr>
+                        <a:t>5年目</a:t>
+                      </a:r>
+                      <a:endParaRPr lang="en-US" sz="850" dirty="0">
+                        <a:latin typeface="Meiryo" charset="0"/>
+                        <a:ea typeface="Meiryo" charset="0"/>
+                        <a:cs typeface="Meiryo" charset="0"/>
+                      </a:endParaRPr>
+                    </a:p>
+                  </a:txBody>
+                  <a:tcPr marL="54864" marR="54864" marT="18288" marB="18288" anchor="ctr">
+                    <a:lnL w="0" cap="flat" cmpd="sng" algn="ctr">
+                      <a:noFill/>
+                    </a:lnL>
+                    <a:lnR w="0" cap="flat" cmpd="sng" algn="ctr">
+                      <a:noFill/>
+                    </a:lnR>
+                    <a:lnT w="0" cap="flat" cmpd="sng" algn="ctr">
+                      <a:noFill/>
+                    </a:lnT>
+                    <a:lnB w="9525" cap="flat" cmpd="sng" algn="ctr">
+                      <a:solidFill>
+                        <a:srgbClr val="BFBFBF"/>
+                      </a:solidFill>
+                      <a:prstDash val="solid"/>
+                      <a:round/>
+                      <a:headEnd type="none" w="med" len="med"/>
+                      <a:tailEnd type="none" w="med" len="med"/>
+                    </a:lnB>
+                    <a:solidFill>
+                      <a:srgbClr val="FFFFFF"/>
+                    </a:solidFill>
+                  </a:tcPr>
+                </a:tc>
+                <a:tc>
+                  <a:txBody>
+                    <a:bodyPr/>
+                    <a:lstStyle/>
+                    <a:p>
+                      <a:pPr algn="ctr" indent="0" marL="0">
+                        <a:buNone/>
+                      </a:pPr>
+                      <a:r>
+                        <a:rPr lang="en-US" sz="850" dirty="0">
+                          <a:solidFill>
+                            <a:srgbClr val="1A1A1A"/>
+                          </a:solidFill>
+                          <a:latin typeface="Meiryo" pitchFamily="34" charset="0"/>
+                          <a:ea typeface="Meiryo" pitchFamily="34" charset="-122"/>
+                          <a:cs typeface="Meiryo" pitchFamily="34" charset="-120"/>
+                        </a:rPr>
+                        <a:t>2</a:t>
+                      </a:r>
+                      <a:endParaRPr lang="en-US" sz="850" dirty="0">
+                        <a:latin typeface="Meiryo" charset="0"/>
+                        <a:ea typeface="Meiryo" charset="0"/>
+                        <a:cs typeface="Meiryo" charset="0"/>
+                      </a:endParaRPr>
+                    </a:p>
+                  </a:txBody>
+                  <a:tcPr marL="54864" marR="54864" marT="18288" marB="18288" anchor="ctr">
+                    <a:lnL w="0" cap="flat" cmpd="sng" algn="ctr">
+                      <a:noFill/>
+                    </a:lnL>
+                    <a:lnR w="0" cap="flat" cmpd="sng" algn="ctr">
+                      <a:noFill/>
+                    </a:lnR>
+                    <a:lnT w="0" cap="flat" cmpd="sng" algn="ctr">
+                      <a:noFill/>
+                    </a:lnT>
+                    <a:lnB w="9525" cap="flat" cmpd="sng" algn="ctr">
+                      <a:solidFill>
+                        <a:srgbClr val="BFBFBF"/>
+                      </a:solidFill>
+                      <a:prstDash val="solid"/>
+                      <a:round/>
+                      <a:headEnd type="none" w="med" len="med"/>
+                      <a:tailEnd type="none" w="med" len="med"/>
+                    </a:lnB>
+                    <a:solidFill>
+                      <a:srgbClr val="FFFFFF"/>
+                    </a:solidFill>
+                  </a:tcPr>
+                </a:tc>
+                <a:tc>
+                  <a:txBody>
+                    <a:bodyPr/>
+                    <a:lstStyle/>
+                    <a:p>
+                      <a:pPr algn="ctr" indent="0" marL="0">
+                        <a:buNone/>
+                      </a:pPr>
+                      <a:r>
+                        <a:rPr lang="en-US" sz="850" dirty="0">
+                          <a:solidFill>
+                            <a:srgbClr val="1A1A1A"/>
+                          </a:solidFill>
+                          <a:latin typeface="Meiryo" pitchFamily="34" charset="0"/>
+                          <a:ea typeface="Meiryo" pitchFamily="34" charset="-122"/>
+                          <a:cs typeface="Meiryo" pitchFamily="34" charset="-120"/>
+                        </a:rPr>
+                        <a:t>29</a:t>
+                      </a:r>
+                      <a:endParaRPr lang="en-US" sz="850" dirty="0">
+                        <a:latin typeface="Meiryo" charset="0"/>
+                        <a:ea typeface="Meiryo" charset="0"/>
+                        <a:cs typeface="Meiryo" charset="0"/>
+                      </a:endParaRPr>
+                    </a:p>
+                  </a:txBody>
+                  <a:tcPr marL="54864" marR="54864" marT="18288" marB="18288" anchor="ctr">
+                    <a:lnL w="0" cap="flat" cmpd="sng" algn="ctr">
+                      <a:noFill/>
+                    </a:lnL>
+                    <a:lnR w="0" cap="flat" cmpd="sng" algn="ctr">
+                      <a:noFill/>
+                    </a:lnR>
+                    <a:lnT w="0" cap="flat" cmpd="sng" algn="ctr">
+                      <a:noFill/>
+                    </a:lnT>
+                    <a:lnB w="9525" cap="flat" cmpd="sng" algn="ctr">
+                      <a:solidFill>
+                        <a:srgbClr val="BFBFBF"/>
+                      </a:solidFill>
+                      <a:prstDash val="solid"/>
+                      <a:round/>
+                      <a:headEnd type="none" w="med" len="med"/>
+                      <a:tailEnd type="none" w="med" len="med"/>
+                    </a:lnB>
+                    <a:solidFill>
+                      <a:srgbClr val="FFFFFF"/>
+                    </a:solidFill>
+                  </a:tcPr>
+                </a:tc>
+                <a:tc>
+                  <a:txBody>
+                    <a:bodyPr/>
+                    <a:lstStyle/>
+                    <a:p>
+                      <a:pPr algn="ctr" indent="0" marL="0">
+                        <a:buNone/>
+                      </a:pPr>
+                      <a:r>
+                        <a:rPr lang="en-US" sz="850" dirty="0">
+                          <a:solidFill>
+                            <a:srgbClr val="1A1A1A"/>
+                          </a:solidFill>
+                          <a:latin typeface="Meiryo" pitchFamily="34" charset="0"/>
+                          <a:ea typeface="Meiryo" pitchFamily="34" charset="-122"/>
+                          <a:cs typeface="Meiryo" pitchFamily="34" charset="-120"/>
+                        </a:rPr>
+                        <a:t>5年目</a:t>
+                      </a:r>
+                      <a:endParaRPr lang="en-US" sz="850" dirty="0">
+                        <a:latin typeface="Meiryo" charset="0"/>
+                        <a:ea typeface="Meiryo" charset="0"/>
+                        <a:cs typeface="Meiryo" charset="0"/>
+                      </a:endParaRPr>
+                    </a:p>
+                  </a:txBody>
+                  <a:tcPr marL="54864" marR="54864" marT="18288" marB="18288" anchor="ctr">
+                    <a:lnL w="0" cap="flat" cmpd="sng" algn="ctr">
+                      <a:noFill/>
+                    </a:lnL>
+                    <a:lnR w="0" cap="flat" cmpd="sng" algn="ctr">
+                      <a:noFill/>
+                    </a:lnR>
+                    <a:lnT w="0" cap="flat" cmpd="sng" algn="ctr">
+                      <a:noFill/>
+                    </a:lnT>
+                    <a:lnB w="9525" cap="flat" cmpd="sng" algn="ctr">
+                      <a:solidFill>
+                        <a:srgbClr val="BFBFBF"/>
+                      </a:solidFill>
+                      <a:prstDash val="solid"/>
+                      <a:round/>
+                      <a:headEnd type="none" w="med" len="med"/>
+                      <a:tailEnd type="none" w="med" len="med"/>
+                    </a:lnB>
+                    <a:solidFill>
+                      <a:srgbClr val="FFFFFF"/>
+                    </a:solidFill>
+                  </a:tcPr>
+                </a:tc>
+                <a:tc>
+                  <a:txBody>
+                    <a:bodyPr/>
+                    <a:lstStyle/>
+                    <a:p>
+                      <a:pPr algn="ctr" indent="0" marL="0">
+                        <a:buNone/>
+                      </a:pPr>
+                      <a:r>
+                        <a:rPr lang="en-US" sz="850" dirty="0">
+                          <a:solidFill>
+                            <a:srgbClr val="1A1A1A"/>
+                          </a:solidFill>
+                          <a:latin typeface="Meiryo" pitchFamily="34" charset="0"/>
+                          <a:ea typeface="Meiryo" pitchFamily="34" charset="-122"/>
+                          <a:cs typeface="Meiryo" pitchFamily="34" charset="-120"/>
+                        </a:rPr>
+                        <a:t>50</a:t>
+                      </a:r>
+                      <a:endParaRPr lang="en-US" sz="850" dirty="0">
+                        <a:latin typeface="Meiryo" charset="0"/>
+                        <a:ea typeface="Meiryo" charset="0"/>
+                        <a:cs typeface="Meiryo" charset="0"/>
+                      </a:endParaRPr>
+                    </a:p>
+                  </a:txBody>
+                  <a:tcPr marL="54864" marR="54864" marT="18288" marB="18288" anchor="ctr">
+                    <a:lnL w="0" cap="flat" cmpd="sng" algn="ctr">
+                      <a:noFill/>
+                    </a:lnL>
+                    <a:lnR w="0" cap="flat" cmpd="sng" algn="ctr">
+                      <a:noFill/>
+                    </a:lnR>
+                    <a:lnT w="0" cap="flat" cmpd="sng" algn="ctr">
+                      <a:noFill/>
+                    </a:lnT>
+                    <a:lnB w="9525" cap="flat" cmpd="sng" algn="ctr">
+                      <a:solidFill>
+                        <a:srgbClr val="BFBFBF"/>
+                      </a:solidFill>
+                      <a:prstDash val="solid"/>
+                      <a:round/>
+                      <a:headEnd type="none" w="med" len="med"/>
+                      <a:tailEnd type="none" w="med" len="med"/>
+                    </a:lnB>
+                    <a:solidFill>
+                      <a:srgbClr val="FFFFFF"/>
+                    </a:solidFill>
+                  </a:tcPr>
+                </a:tc>
+                <a:tc>
+                  <a:txBody>
+                    <a:bodyPr/>
+                    <a:lstStyle/>
+                    <a:p>
+                      <a:pPr algn="ctr" indent="0" marL="0">
+                        <a:buNone/>
+                      </a:pPr>
+                      <a:r>
+                        <a:rPr lang="en-US" sz="850" dirty="0">
+                          <a:solidFill>
+                            <a:srgbClr val="1A1A1A"/>
+                          </a:solidFill>
+                          <a:latin typeface="Meiryo" pitchFamily="34" charset="0"/>
+                          <a:ea typeface="Meiryo" pitchFamily="34" charset="-122"/>
+                          <a:cs typeface="Meiryo" pitchFamily="34" charset="-120"/>
+                        </a:rPr>
+                        <a:t>47</a:t>
+                      </a:r>
+                      <a:endParaRPr lang="en-US" sz="850" dirty="0">
+                        <a:latin typeface="Meiryo" charset="0"/>
+                        <a:ea typeface="Meiryo" charset="0"/>
+                        <a:cs typeface="Meiryo" charset="0"/>
+                      </a:endParaRPr>
+                    </a:p>
+                  </a:txBody>
+                  <a:tcPr marL="54864" marR="54864" marT="18288" marB="18288" anchor="ctr">
+                    <a:lnL w="0" cap="flat" cmpd="sng" algn="ctr">
+                      <a:noFill/>
+                    </a:lnL>
+                    <a:lnR w="0" cap="flat" cmpd="sng" algn="ctr">
+                      <a:noFill/>
+                    </a:lnR>
+                    <a:lnT w="0" cap="flat" cmpd="sng" algn="ctr">
+                      <a:noFill/>
+                    </a:lnT>
+                    <a:lnB w="9525" cap="flat" cmpd="sng" algn="ctr">
+                      <a:solidFill>
+                        <a:srgbClr val="BFBFBF"/>
+                      </a:solidFill>
+                      <a:prstDash val="solid"/>
+                      <a:round/>
+                      <a:headEnd type="none" w="med" len="med"/>
+                      <a:tailEnd type="none" w="med" len="med"/>
+                    </a:lnB>
+                    <a:solidFill>
+                      <a:srgbClr val="FFFFFF"/>
+                    </a:solidFill>
+                  </a:tcPr>
+                </a:tc>
+              </a:tr>
+              <a:tr h="228600">
+                <a:tc>
+                  <a:txBody>
+                    <a:bodyPr/>
+                    <a:lstStyle/>
+                    <a:p>
+                      <a:pPr algn="l" indent="0" marL="0">
+                        <a:buNone/>
+                      </a:pPr>
+                      <a:r>
+                        <a:rPr lang="en-US" sz="850" dirty="0">
+                          <a:solidFill>
+                            <a:srgbClr val="1A1A1A"/>
+                          </a:solidFill>
+                          <a:latin typeface="Meiryo" pitchFamily="34" charset="0"/>
+                          <a:ea typeface="Meiryo" pitchFamily="34" charset="-122"/>
+                          <a:cs typeface="Meiryo" pitchFamily="34" charset="-120"/>
+                        </a:rPr>
+                        <a:t>計画の8割</a:t>
+                      </a:r>
+                      <a:endParaRPr lang="en-US" sz="850" dirty="0">
+                        <a:latin typeface="Meiryo" charset="0"/>
+                        <a:ea typeface="Meiryo" charset="0"/>
+                        <a:cs typeface="Meiryo" charset="0"/>
+                      </a:endParaRPr>
+                    </a:p>
+                  </a:txBody>
+                  <a:tcPr marL="54864" marR="54864" marT="18288" marB="18288" anchor="ctr">
+                    <a:lnL w="0" cap="flat" cmpd="sng" algn="ctr">
+                      <a:noFill/>
+                    </a:lnL>
+                    <a:lnR w="0" cap="flat" cmpd="sng" algn="ctr">
+                      <a:noFill/>
+                    </a:lnR>
+                    <a:lnT w="0" cap="flat" cmpd="sng" algn="ctr">
+                      <a:noFill/>
+                    </a:lnT>
+                    <a:lnB w="9525" cap="flat" cmpd="sng" algn="ctr">
+                      <a:solidFill>
+                        <a:srgbClr val="BFBFBF"/>
+                      </a:solidFill>
+                      <a:prstDash val="solid"/>
+                      <a:round/>
+                      <a:headEnd type="none" w="med" len="med"/>
+                      <a:tailEnd type="none" w="med" len="med"/>
+                    </a:lnB>
+                    <a:solidFill>
+                      <a:srgbClr val="FFFFFF"/>
+                    </a:solidFill>
+                  </a:tcPr>
+                </a:tc>
+                <a:tc>
+                  <a:txBody>
+                    <a:bodyPr/>
+                    <a:lstStyle/>
+                    <a:p>
+                      <a:pPr algn="ctr" indent="0" marL="0">
+                        <a:buNone/>
+                      </a:pPr>
+                      <a:r>
+                        <a:rPr lang="en-US" sz="850" dirty="0">
+                          <a:solidFill>
+                            <a:srgbClr val="4D4D4D"/>
+                          </a:solidFill>
+                          <a:latin typeface="Meiryo" pitchFamily="34" charset="0"/>
+                          <a:ea typeface="Meiryo" pitchFamily="34" charset="-122"/>
+                          <a:cs typeface="Meiryo" pitchFamily="34" charset="-120"/>
+                        </a:rPr>
+                        <a:t>2・7・14・22・26</a:t>
                       </a:r>
                       <a:endParaRPr lang="en-US" sz="850" dirty="0">
                         <a:latin typeface="Meiryo" charset="0"/>
@@ -11179,7 +10845,57 @@
                           <a:ea typeface="Meiryo" pitchFamily="34" charset="-122"/>
                           <a:cs typeface="Meiryo" pitchFamily="34" charset="-120"/>
                         </a:rPr>
-                        <a:t>しない</a:t>
+                        <a:t>5年でしない</a:t>
+                      </a:r>
+                      <a:endParaRPr lang="en-US" sz="850" dirty="0">
+                        <a:latin typeface="Meiryo" charset="0"/>
+                        <a:ea typeface="Meiryo" charset="0"/>
+                        <a:cs typeface="Meiryo" charset="0"/>
+                      </a:endParaRPr>
+                    </a:p>
+                  </a:txBody>
+                  <a:tcPr marL="54864" marR="54864" marT="18288" marB="18288" anchor="ctr">
+                    <a:lnL w="0" cap="flat" cmpd="sng" algn="ctr">
+                      <a:noFill/>
+                    </a:lnL>
+                    <a:lnR w="0" cap="flat" cmpd="sng" algn="ctr">
+                      <a:noFill/>
+                    </a:lnR>
+                    <a:lnT w="0" cap="flat" cmpd="sng" algn="ctr">
+                      <a:noFill/>
+                    </a:lnT>
+                    <a:lnB w="9525" cap="flat" cmpd="sng" algn="ctr">
+                      <a:solidFill>
+                        <a:srgbClr val="BFBFBF"/>
+                      </a:solidFill>
+                      <a:prstDash val="solid"/>
+                      <a:round/>
+                      <a:headEnd type="none" w="med" len="med"/>
+                      <a:tailEnd type="none" w="med" len="med"/>
+                    </a:lnB>
+                    <a:solidFill>
+                      <a:srgbClr val="FFFFFF"/>
+                    </a:solidFill>
+                  </a:tcPr>
+                </a:tc>
+                <a:tc>
+                  <a:txBody>
+                    <a:bodyPr/>
+                    <a:lstStyle/>
+                    <a:p>
+                      <a:pPr algn="ctr" indent="0" marL="0">
+                        <a:buNone/>
+                      </a:pPr>
+                      <a:r>
+                        <a:rPr lang="en-US" sz="850" dirty="0">
+                          <a:solidFill>
+                            <a:srgbClr val="B8692E"/>
+                          </a:solidFill>
+                          <a:latin typeface="Meiryo" pitchFamily="34" charset="0"/>
+                          <a:ea typeface="Meiryo" pitchFamily="34" charset="-122"/>
+                          <a:cs typeface="Meiryo" pitchFamily="34" charset="-120"/>
+                        </a:rPr>
+                        <a:t>▲11</a:t>
                       </a:r>
                       <a:endParaRPr lang="en-US" sz="850" dirty="0">
                         <a:latin typeface="Meiryo" charset="0"/>
@@ -11229,7 +10945,259 @@
                           <a:ea typeface="Meiryo" pitchFamily="34" charset="-122"/>
                           <a:cs typeface="Meiryo" pitchFamily="34" charset="-120"/>
                         </a:rPr>
-                        <a:t>5</a:t>
+                        <a:t>12</a:t>
+                      </a:r>
+                      <a:endParaRPr lang="en-US" sz="850" dirty="0">
+                        <a:latin typeface="Meiryo" charset="0"/>
+                        <a:ea typeface="Meiryo" charset="0"/>
+                        <a:cs typeface="Meiryo" charset="0"/>
+                      </a:endParaRPr>
+                    </a:p>
+                  </a:txBody>
+                  <a:tcPr marL="54864" marR="54864" marT="18288" marB="18288" anchor="ctr">
+                    <a:lnL w="0" cap="flat" cmpd="sng" algn="ctr">
+                      <a:noFill/>
+                    </a:lnL>
+                    <a:lnR w="0" cap="flat" cmpd="sng" algn="ctr">
+                      <a:noFill/>
+                    </a:lnR>
+                    <a:lnT w="0" cap="flat" cmpd="sng" algn="ctr">
+                      <a:noFill/>
+                    </a:lnT>
+                    <a:lnB w="9525" cap="flat" cmpd="sng" algn="ctr">
+                      <a:solidFill>
+                        <a:srgbClr val="BFBFBF"/>
+                      </a:solidFill>
+                      <a:prstDash val="solid"/>
+                      <a:round/>
+                      <a:headEnd type="none" w="med" len="med"/>
+                      <a:tailEnd type="none" w="med" len="med"/>
+                    </a:lnB>
+                    <a:solidFill>
+                      <a:srgbClr val="FFFFFF"/>
+                    </a:solidFill>
+                  </a:tcPr>
+                </a:tc>
+                <a:tc>
+                  <a:txBody>
+                    <a:bodyPr/>
+                    <a:lstStyle/>
+                    <a:p>
+                      <a:pPr algn="ctr" indent="0" marL="0">
+                        <a:buNone/>
+                      </a:pPr>
+                      <a:r>
+                        <a:rPr lang="en-US" sz="850" dirty="0">
+                          <a:solidFill>
+                            <a:srgbClr val="1A1A1A"/>
+                          </a:solidFill>
+                          <a:latin typeface="Meiryo" pitchFamily="34" charset="0"/>
+                          <a:ea typeface="Meiryo" pitchFamily="34" charset="-122"/>
+                          <a:cs typeface="Meiryo" pitchFamily="34" charset="-120"/>
+                        </a:rPr>
+                        <a:t>5年目</a:t>
+                      </a:r>
+                      <a:endParaRPr lang="en-US" sz="850" dirty="0">
+                        <a:latin typeface="Meiryo" charset="0"/>
+                        <a:ea typeface="Meiryo" charset="0"/>
+                        <a:cs typeface="Meiryo" charset="0"/>
+                      </a:endParaRPr>
+                    </a:p>
+                  </a:txBody>
+                  <a:tcPr marL="54864" marR="54864" marT="18288" marB="18288" anchor="ctr">
+                    <a:lnL w="0" cap="flat" cmpd="sng" algn="ctr">
+                      <a:noFill/>
+                    </a:lnL>
+                    <a:lnR w="0" cap="flat" cmpd="sng" algn="ctr">
+                      <a:noFill/>
+                    </a:lnR>
+                    <a:lnT w="0" cap="flat" cmpd="sng" algn="ctr">
+                      <a:noFill/>
+                    </a:lnT>
+                    <a:lnB w="9525" cap="flat" cmpd="sng" algn="ctr">
+                      <a:solidFill>
+                        <a:srgbClr val="BFBFBF"/>
+                      </a:solidFill>
+                      <a:prstDash val="solid"/>
+                      <a:round/>
+                      <a:headEnd type="none" w="med" len="med"/>
+                      <a:tailEnd type="none" w="med" len="med"/>
+                    </a:lnB>
+                    <a:solidFill>
+                      <a:srgbClr val="FFFFFF"/>
+                    </a:solidFill>
+                  </a:tcPr>
+                </a:tc>
+                <a:tc>
+                  <a:txBody>
+                    <a:bodyPr/>
+                    <a:lstStyle/>
+                    <a:p>
+                      <a:pPr algn="ctr" indent="0" marL="0">
+                        <a:buNone/>
+                      </a:pPr>
+                      <a:r>
+                        <a:rPr lang="en-US" sz="850" dirty="0">
+                          <a:solidFill>
+                            <a:srgbClr val="1A1A1A"/>
+                          </a:solidFill>
+                          <a:latin typeface="Meiryo" pitchFamily="34" charset="0"/>
+                          <a:ea typeface="Meiryo" pitchFamily="34" charset="-122"/>
+                          <a:cs typeface="Meiryo" pitchFamily="34" charset="-120"/>
+                        </a:rPr>
+                        <a:t>32</a:t>
+                      </a:r>
+                      <a:endParaRPr lang="en-US" sz="850" dirty="0">
+                        <a:latin typeface="Meiryo" charset="0"/>
+                        <a:ea typeface="Meiryo" charset="0"/>
+                        <a:cs typeface="Meiryo" charset="0"/>
+                      </a:endParaRPr>
+                    </a:p>
+                  </a:txBody>
+                  <a:tcPr marL="54864" marR="54864" marT="18288" marB="18288" anchor="ctr">
+                    <a:lnL w="0" cap="flat" cmpd="sng" algn="ctr">
+                      <a:noFill/>
+                    </a:lnL>
+                    <a:lnR w="0" cap="flat" cmpd="sng" algn="ctr">
+                      <a:noFill/>
+                    </a:lnR>
+                    <a:lnT w="0" cap="flat" cmpd="sng" algn="ctr">
+                      <a:noFill/>
+                    </a:lnT>
+                    <a:lnB w="9525" cap="flat" cmpd="sng" algn="ctr">
+                      <a:solidFill>
+                        <a:srgbClr val="BFBFBF"/>
+                      </a:solidFill>
+                      <a:prstDash val="solid"/>
+                      <a:round/>
+                      <a:headEnd type="none" w="med" len="med"/>
+                      <a:tailEnd type="none" w="med" len="med"/>
+                    </a:lnB>
+                    <a:solidFill>
+                      <a:srgbClr val="FFFFFF"/>
+                    </a:solidFill>
+                  </a:tcPr>
+                </a:tc>
+                <a:tc>
+                  <a:txBody>
+                    <a:bodyPr/>
+                    <a:lstStyle/>
+                    <a:p>
+                      <a:pPr algn="ctr" indent="0" marL="0">
+                        <a:buNone/>
+                      </a:pPr>
+                      <a:r>
+                        <a:rPr lang="en-US" sz="850" dirty="0">
+                          <a:solidFill>
+                            <a:srgbClr val="1A1A1A"/>
+                          </a:solidFill>
+                          <a:latin typeface="Meiryo" pitchFamily="34" charset="0"/>
+                          <a:ea typeface="Meiryo" pitchFamily="34" charset="-122"/>
+                          <a:cs typeface="Meiryo" pitchFamily="34" charset="-120"/>
+                        </a:rPr>
+                        <a:t>47</a:t>
+                      </a:r>
+                      <a:endParaRPr lang="en-US" sz="850" dirty="0">
+                        <a:latin typeface="Meiryo" charset="0"/>
+                        <a:ea typeface="Meiryo" charset="0"/>
+                        <a:cs typeface="Meiryo" charset="0"/>
+                      </a:endParaRPr>
+                    </a:p>
+                  </a:txBody>
+                  <a:tcPr marL="54864" marR="54864" marT="18288" marB="18288" anchor="ctr">
+                    <a:lnL w="0" cap="flat" cmpd="sng" algn="ctr">
+                      <a:noFill/>
+                    </a:lnL>
+                    <a:lnR w="0" cap="flat" cmpd="sng" algn="ctr">
+                      <a:noFill/>
+                    </a:lnR>
+                    <a:lnT w="0" cap="flat" cmpd="sng" algn="ctr">
+                      <a:noFill/>
+                    </a:lnT>
+                    <a:lnB w="9525" cap="flat" cmpd="sng" algn="ctr">
+                      <a:solidFill>
+                        <a:srgbClr val="BFBFBF"/>
+                      </a:solidFill>
+                      <a:prstDash val="solid"/>
+                      <a:round/>
+                      <a:headEnd type="none" w="med" len="med"/>
+                      <a:tailEnd type="none" w="med" len="med"/>
+                    </a:lnB>
+                    <a:solidFill>
+                      <a:srgbClr val="FFFFFF"/>
+                    </a:solidFill>
+                  </a:tcPr>
+                </a:tc>
+              </a:tr>
+              <a:tr h="228600">
+                <a:tc>
+                  <a:txBody>
+                    <a:bodyPr/>
+                    <a:lstStyle/>
+                    <a:p>
+                      <a:pPr algn="l" indent="0" marL="0">
+                        <a:buNone/>
+                      </a:pPr>
+                      <a:r>
+                        <a:rPr lang="en-US" sz="850" dirty="0">
+                          <a:solidFill>
+                            <a:srgbClr val="1A1A1A"/>
+                          </a:solidFill>
+                          <a:latin typeface="Meiryo" pitchFamily="34" charset="0"/>
+                          <a:ea typeface="Meiryo" pitchFamily="34" charset="-122"/>
+                          <a:cs typeface="Meiryo" pitchFamily="34" charset="-120"/>
+                        </a:rPr>
+                        <a:t>計画の7割</a:t>
+                      </a:r>
+                      <a:endParaRPr lang="en-US" sz="850" dirty="0">
+                        <a:latin typeface="Meiryo" charset="0"/>
+                        <a:ea typeface="Meiryo" charset="0"/>
+                        <a:cs typeface="Meiryo" charset="0"/>
+                      </a:endParaRPr>
+                    </a:p>
+                  </a:txBody>
+                  <a:tcPr marL="54864" marR="54864" marT="18288" marB="18288" anchor="ctr">
+                    <a:lnL w="0" cap="flat" cmpd="sng" algn="ctr">
+                      <a:noFill/>
+                    </a:lnL>
+                    <a:lnR w="0" cap="flat" cmpd="sng" algn="ctr">
+                      <a:noFill/>
+                    </a:lnR>
+                    <a:lnT w="0" cap="flat" cmpd="sng" algn="ctr">
+                      <a:noFill/>
+                    </a:lnT>
+                    <a:lnB w="9525" cap="flat" cmpd="sng" algn="ctr">
+                      <a:solidFill>
+                        <a:srgbClr val="BFBFBF"/>
+                      </a:solidFill>
+                      <a:prstDash val="solid"/>
+                      <a:round/>
+                      <a:headEnd type="none" w="med" len="med"/>
+                      <a:tailEnd type="none" w="med" len="med"/>
+                    </a:lnB>
+                    <a:solidFill>
+                      <a:srgbClr val="FFFFFF"/>
+                    </a:solidFill>
+                  </a:tcPr>
+                </a:tc>
+                <a:tc>
+                  <a:txBody>
+                    <a:bodyPr/>
+                    <a:lstStyle/>
+                    <a:p>
+                      <a:pPr algn="ctr" indent="0" marL="0">
+                        <a:buNone/>
+                      </a:pPr>
+                      <a:r>
+                        <a:rPr lang="en-US" sz="850" dirty="0">
+                          <a:solidFill>
+                            <a:srgbClr val="4D4D4D"/>
+                          </a:solidFill>
+                          <a:latin typeface="Meiryo" pitchFamily="34" charset="0"/>
+                          <a:ea typeface="Meiryo" pitchFamily="34" charset="-122"/>
+                          <a:cs typeface="Meiryo" pitchFamily="34" charset="-120"/>
+                        </a:rPr>
+                        <a:t>2・6・13・19・23</a:t>
                       </a:r>
                       <a:endParaRPr lang="en-US" sz="850" dirty="0">
                         <a:latin typeface="Meiryo" charset="0"/>
@@ -11279,7 +11247,359 @@
                           <a:ea typeface="Meiryo" pitchFamily="34" charset="-122"/>
                           <a:cs typeface="Meiryo" pitchFamily="34" charset="-120"/>
                         </a:rPr>
-                        <a:t>しない</a:t>
+                        <a:t>5年でしない</a:t>
+                      </a:r>
+                      <a:endParaRPr lang="en-US" sz="850" dirty="0">
+                        <a:latin typeface="Meiryo" charset="0"/>
+                        <a:ea typeface="Meiryo" charset="0"/>
+                        <a:cs typeface="Meiryo" charset="0"/>
+                      </a:endParaRPr>
+                    </a:p>
+                  </a:txBody>
+                  <a:tcPr marL="54864" marR="54864" marT="18288" marB="18288" anchor="ctr">
+                    <a:lnL w="0" cap="flat" cmpd="sng" algn="ctr">
+                      <a:noFill/>
+                    </a:lnL>
+                    <a:lnR w="0" cap="flat" cmpd="sng" algn="ctr">
+                      <a:noFill/>
+                    </a:lnR>
+                    <a:lnT w="0" cap="flat" cmpd="sng" algn="ctr">
+                      <a:noFill/>
+                    </a:lnT>
+                    <a:lnB w="9525" cap="flat" cmpd="sng" algn="ctr">
+                      <a:solidFill>
+                        <a:srgbClr val="BFBFBF"/>
+                      </a:solidFill>
+                      <a:prstDash val="solid"/>
+                      <a:round/>
+                      <a:headEnd type="none" w="med" len="med"/>
+                      <a:tailEnd type="none" w="med" len="med"/>
+                    </a:lnB>
+                    <a:solidFill>
+                      <a:srgbClr val="FFFFFF"/>
+                    </a:solidFill>
+                  </a:tcPr>
+                </a:tc>
+                <a:tc>
+                  <a:txBody>
+                    <a:bodyPr/>
+                    <a:lstStyle/>
+                    <a:p>
+                      <a:pPr algn="ctr" indent="0" marL="0">
+                        <a:buNone/>
+                      </a:pPr>
+                      <a:r>
+                        <a:rPr lang="en-US" sz="850" dirty="0">
+                          <a:solidFill>
+                            <a:srgbClr val="B8692E"/>
+                          </a:solidFill>
+                          <a:latin typeface="Meiryo" pitchFamily="34" charset="0"/>
+                          <a:ea typeface="Meiryo" pitchFamily="34" charset="-122"/>
+                          <a:cs typeface="Meiryo" pitchFamily="34" charset="-120"/>
+                        </a:rPr>
+                        <a:t>▲15</a:t>
+                      </a:r>
+                      <a:endParaRPr lang="en-US" sz="850" dirty="0">
+                        <a:latin typeface="Meiryo" charset="0"/>
+                        <a:ea typeface="Meiryo" charset="0"/>
+                        <a:cs typeface="Meiryo" charset="0"/>
+                      </a:endParaRPr>
+                    </a:p>
+                  </a:txBody>
+                  <a:tcPr marL="54864" marR="54864" marT="18288" marB="18288" anchor="ctr">
+                    <a:lnL w="0" cap="flat" cmpd="sng" algn="ctr">
+                      <a:noFill/>
+                    </a:lnL>
+                    <a:lnR w="0" cap="flat" cmpd="sng" algn="ctr">
+                      <a:noFill/>
+                    </a:lnR>
+                    <a:lnT w="0" cap="flat" cmpd="sng" algn="ctr">
+                      <a:noFill/>
+                    </a:lnT>
+                    <a:lnB w="9525" cap="flat" cmpd="sng" algn="ctr">
+                      <a:solidFill>
+                        <a:srgbClr val="BFBFBF"/>
+                      </a:solidFill>
+                      <a:prstDash val="solid"/>
+                      <a:round/>
+                      <a:headEnd type="none" w="med" len="med"/>
+                      <a:tailEnd type="none" w="med" len="med"/>
+                    </a:lnB>
+                    <a:solidFill>
+                      <a:srgbClr val="FFFFFF"/>
+                    </a:solidFill>
+                  </a:tcPr>
+                </a:tc>
+                <a:tc>
+                  <a:txBody>
+                    <a:bodyPr/>
+                    <a:lstStyle/>
+                    <a:p>
+                      <a:pPr algn="ctr" indent="0" marL="0">
+                        <a:buNone/>
+                      </a:pPr>
+                      <a:r>
+                        <a:rPr lang="en-US" sz="850" dirty="0">
+                          <a:solidFill>
+                            <a:srgbClr val="1A1A1A"/>
+                          </a:solidFill>
+                          <a:latin typeface="Meiryo" pitchFamily="34" charset="0"/>
+                          <a:ea typeface="Meiryo" pitchFamily="34" charset="-122"/>
+                          <a:cs typeface="Meiryo" pitchFamily="34" charset="-120"/>
+                        </a:rPr>
+                        <a:t>1</a:t>
+                      </a:r>
+                      <a:endParaRPr lang="en-US" sz="850" dirty="0">
+                        <a:latin typeface="Meiryo" charset="0"/>
+                        <a:ea typeface="Meiryo" charset="0"/>
+                        <a:cs typeface="Meiryo" charset="0"/>
+                      </a:endParaRPr>
+                    </a:p>
+                  </a:txBody>
+                  <a:tcPr marL="54864" marR="54864" marT="18288" marB="18288" anchor="ctr">
+                    <a:lnL w="0" cap="flat" cmpd="sng" algn="ctr">
+                      <a:noFill/>
+                    </a:lnL>
+                    <a:lnR w="0" cap="flat" cmpd="sng" algn="ctr">
+                      <a:noFill/>
+                    </a:lnR>
+                    <a:lnT w="0" cap="flat" cmpd="sng" algn="ctr">
+                      <a:noFill/>
+                    </a:lnT>
+                    <a:lnB w="9525" cap="flat" cmpd="sng" algn="ctr">
+                      <a:solidFill>
+                        <a:srgbClr val="BFBFBF"/>
+                      </a:solidFill>
+                      <a:prstDash val="solid"/>
+                      <a:round/>
+                      <a:headEnd type="none" w="med" len="med"/>
+                      <a:tailEnd type="none" w="med" len="med"/>
+                    </a:lnB>
+                    <a:solidFill>
+                      <a:srgbClr val="FFFFFF"/>
+                    </a:solidFill>
+                  </a:tcPr>
+                </a:tc>
+                <a:tc>
+                  <a:txBody>
+                    <a:bodyPr/>
+                    <a:lstStyle/>
+                    <a:p>
+                      <a:pPr algn="ctr" indent="0" marL="0">
+                        <a:buNone/>
+                      </a:pPr>
+                      <a:r>
+                        <a:rPr lang="en-US" sz="850" dirty="0">
+                          <a:solidFill>
+                            <a:srgbClr val="1A1A1A"/>
+                          </a:solidFill>
+                          <a:latin typeface="Meiryo" pitchFamily="34" charset="0"/>
+                          <a:ea typeface="Meiryo" pitchFamily="34" charset="-122"/>
+                          <a:cs typeface="Meiryo" pitchFamily="34" charset="-120"/>
+                        </a:rPr>
+                        <a:t>5年目</a:t>
+                      </a:r>
+                      <a:endParaRPr lang="en-US" sz="850" dirty="0">
+                        <a:latin typeface="Meiryo" charset="0"/>
+                        <a:ea typeface="Meiryo" charset="0"/>
+                        <a:cs typeface="Meiryo" charset="0"/>
+                      </a:endParaRPr>
+                    </a:p>
+                  </a:txBody>
+                  <a:tcPr marL="54864" marR="54864" marT="18288" marB="18288" anchor="ctr">
+                    <a:lnL w="0" cap="flat" cmpd="sng" algn="ctr">
+                      <a:noFill/>
+                    </a:lnL>
+                    <a:lnR w="0" cap="flat" cmpd="sng" algn="ctr">
+                      <a:noFill/>
+                    </a:lnR>
+                    <a:lnT w="0" cap="flat" cmpd="sng" algn="ctr">
+                      <a:noFill/>
+                    </a:lnT>
+                    <a:lnB w="9525" cap="flat" cmpd="sng" algn="ctr">
+                      <a:solidFill>
+                        <a:srgbClr val="BFBFBF"/>
+                      </a:solidFill>
+                      <a:prstDash val="solid"/>
+                      <a:round/>
+                      <a:headEnd type="none" w="med" len="med"/>
+                      <a:tailEnd type="none" w="med" len="med"/>
+                    </a:lnB>
+                    <a:solidFill>
+                      <a:srgbClr val="FFFFFF"/>
+                    </a:solidFill>
+                  </a:tcPr>
+                </a:tc>
+                <a:tc>
+                  <a:txBody>
+                    <a:bodyPr/>
+                    <a:lstStyle/>
+                    <a:p>
+                      <a:pPr algn="ctr" indent="0" marL="0">
+                        <a:buNone/>
+                      </a:pPr>
+                      <a:r>
+                        <a:rPr lang="en-US" sz="850" dirty="0">
+                          <a:solidFill>
+                            <a:srgbClr val="1A1A1A"/>
+                          </a:solidFill>
+                          <a:latin typeface="Meiryo" pitchFamily="34" charset="0"/>
+                          <a:ea typeface="Meiryo" pitchFamily="34" charset="-122"/>
+                          <a:cs typeface="Meiryo" pitchFamily="34" charset="-120"/>
+                        </a:rPr>
+                        <a:t>23</a:t>
+                      </a:r>
+                      <a:endParaRPr lang="en-US" sz="850" dirty="0">
+                        <a:latin typeface="Meiryo" charset="0"/>
+                        <a:ea typeface="Meiryo" charset="0"/>
+                        <a:cs typeface="Meiryo" charset="0"/>
+                      </a:endParaRPr>
+                    </a:p>
+                  </a:txBody>
+                  <a:tcPr marL="54864" marR="54864" marT="18288" marB="18288" anchor="ctr">
+                    <a:lnL w="0" cap="flat" cmpd="sng" algn="ctr">
+                      <a:noFill/>
+                    </a:lnL>
+                    <a:lnR w="0" cap="flat" cmpd="sng" algn="ctr">
+                      <a:noFill/>
+                    </a:lnR>
+                    <a:lnT w="0" cap="flat" cmpd="sng" algn="ctr">
+                      <a:noFill/>
+                    </a:lnT>
+                    <a:lnB w="9525" cap="flat" cmpd="sng" algn="ctr">
+                      <a:solidFill>
+                        <a:srgbClr val="BFBFBF"/>
+                      </a:solidFill>
+                      <a:prstDash val="solid"/>
+                      <a:round/>
+                      <a:headEnd type="none" w="med" len="med"/>
+                      <a:tailEnd type="none" w="med" len="med"/>
+                    </a:lnB>
+                    <a:solidFill>
+                      <a:srgbClr val="FFFFFF"/>
+                    </a:solidFill>
+                  </a:tcPr>
+                </a:tc>
+                <a:tc>
+                  <a:txBody>
+                    <a:bodyPr/>
+                    <a:lstStyle/>
+                    <a:p>
+                      <a:pPr algn="ctr" indent="0" marL="0">
+                        <a:buNone/>
+                      </a:pPr>
+                      <a:r>
+                        <a:rPr lang="en-US" sz="850" dirty="0">
+                          <a:solidFill>
+                            <a:srgbClr val="1A1A1A"/>
+                          </a:solidFill>
+                          <a:latin typeface="Meiryo" pitchFamily="34" charset="0"/>
+                          <a:ea typeface="Meiryo" pitchFamily="34" charset="-122"/>
+                          <a:cs typeface="Meiryo" pitchFamily="34" charset="-120"/>
+                        </a:rPr>
+                        <a:t>43</a:t>
+                      </a:r>
+                      <a:endParaRPr lang="en-US" sz="850" dirty="0">
+                        <a:latin typeface="Meiryo" charset="0"/>
+                        <a:ea typeface="Meiryo" charset="0"/>
+                        <a:cs typeface="Meiryo" charset="0"/>
+                      </a:endParaRPr>
+                    </a:p>
+                  </a:txBody>
+                  <a:tcPr marL="54864" marR="54864" marT="18288" marB="18288" anchor="ctr">
+                    <a:lnL w="0" cap="flat" cmpd="sng" algn="ctr">
+                      <a:noFill/>
+                    </a:lnL>
+                    <a:lnR w="0" cap="flat" cmpd="sng" algn="ctr">
+                      <a:noFill/>
+                    </a:lnR>
+                    <a:lnT w="0" cap="flat" cmpd="sng" algn="ctr">
+                      <a:noFill/>
+                    </a:lnT>
+                    <a:lnB w="9525" cap="flat" cmpd="sng" algn="ctr">
+                      <a:solidFill>
+                        <a:srgbClr val="BFBFBF"/>
+                      </a:solidFill>
+                      <a:prstDash val="solid"/>
+                      <a:round/>
+                      <a:headEnd type="none" w="med" len="med"/>
+                      <a:tailEnd type="none" w="med" len="med"/>
+                    </a:lnB>
+                    <a:solidFill>
+                      <a:srgbClr val="FFFFFF"/>
+                    </a:solidFill>
+                  </a:tcPr>
+                </a:tc>
+              </a:tr>
+              <a:tr h="228600">
+                <a:tc>
+                  <a:txBody>
+                    <a:bodyPr/>
+                    <a:lstStyle/>
+                    <a:p>
+                      <a:pPr algn="l" indent="0" marL="0">
+                        <a:buNone/>
+                      </a:pPr>
+                      <a:r>
+                        <a:rPr lang="en-US" sz="850" dirty="0">
+                          <a:solidFill>
+                            <a:srgbClr val="1A1A1A"/>
+                          </a:solidFill>
+                          <a:latin typeface="Meiryo" pitchFamily="34" charset="0"/>
+                          <a:ea typeface="Meiryo" pitchFamily="34" charset="-122"/>
+                          <a:cs typeface="Meiryo" pitchFamily="34" charset="-120"/>
+                        </a:rPr>
+                        <a:t>計画の6割</a:t>
+                      </a:r>
+                      <a:endParaRPr lang="en-US" sz="850" dirty="0">
+                        <a:latin typeface="Meiryo" charset="0"/>
+                        <a:ea typeface="Meiryo" charset="0"/>
+                        <a:cs typeface="Meiryo" charset="0"/>
+                      </a:endParaRPr>
+                    </a:p>
+                  </a:txBody>
+                  <a:tcPr marL="54864" marR="54864" marT="18288" marB="18288" anchor="ctr">
+                    <a:lnL w="0" cap="flat" cmpd="sng" algn="ctr">
+                      <a:noFill/>
+                    </a:lnL>
+                    <a:lnR w="0" cap="flat" cmpd="sng" algn="ctr">
+                      <a:noFill/>
+                    </a:lnR>
+                    <a:lnT w="0" cap="flat" cmpd="sng" algn="ctr">
+                      <a:noFill/>
+                    </a:lnT>
+                    <a:lnB w="9525" cap="flat" cmpd="sng" algn="ctr">
+                      <a:solidFill>
+                        <a:srgbClr val="BFBFBF"/>
+                      </a:solidFill>
+                      <a:prstDash val="solid"/>
+                      <a:round/>
+                      <a:headEnd type="none" w="med" len="med"/>
+                      <a:tailEnd type="none" w="med" len="med"/>
+                    </a:lnB>
+                    <a:solidFill>
+                      <a:srgbClr val="FFFFFF"/>
+                    </a:solidFill>
+                  </a:tcPr>
+                </a:tc>
+                <a:tc>
+                  <a:txBody>
+                    <a:bodyPr/>
+                    <a:lstStyle/>
+                    <a:p>
+                      <a:pPr algn="ctr" indent="0" marL="0">
+                        <a:buNone/>
+                      </a:pPr>
+                      <a:r>
+                        <a:rPr lang="en-US" sz="850" dirty="0">
+                          <a:solidFill>
+                            <a:srgbClr val="4D4D4D"/>
+                          </a:solidFill>
+                          <a:latin typeface="Meiryo" pitchFamily="34" charset="0"/>
+                          <a:ea typeface="Meiryo" pitchFamily="34" charset="-122"/>
+                          <a:cs typeface="Meiryo" pitchFamily="34" charset="-120"/>
+                        </a:rPr>
+                        <a:t>2・5・11・16・20</a:t>
                       </a:r>
                       <a:endParaRPr lang="en-US" sz="850" dirty="0">
                         <a:latin typeface="Meiryo" charset="0"/>
@@ -11329,7 +11649,257 @@
                           <a:ea typeface="Meiryo" pitchFamily="34" charset="-122"/>
                           <a:cs typeface="Meiryo" pitchFamily="34" charset="-120"/>
                         </a:rPr>
-                        <a:t>-139</a:t>
+                        <a:t>5年でしない</a:t>
+                      </a:r>
+                      <a:endParaRPr lang="en-US" sz="850" dirty="0">
+                        <a:latin typeface="Meiryo" charset="0"/>
+                        <a:ea typeface="Meiryo" charset="0"/>
+                        <a:cs typeface="Meiryo" charset="0"/>
+                      </a:endParaRPr>
+                    </a:p>
+                  </a:txBody>
+                  <a:tcPr marL="54864" marR="54864" marT="18288" marB="18288" anchor="ctr">
+                    <a:lnL w="0" cap="flat" cmpd="sng" algn="ctr">
+                      <a:noFill/>
+                    </a:lnL>
+                    <a:lnR w="0" cap="flat" cmpd="sng" algn="ctr">
+                      <a:noFill/>
+                    </a:lnR>
+                    <a:lnT w="0" cap="flat" cmpd="sng" algn="ctr">
+                      <a:noFill/>
+                    </a:lnT>
+                    <a:lnB w="9525" cap="flat" cmpd="sng" algn="ctr">
+                      <a:solidFill>
+                        <a:srgbClr val="BFBFBF"/>
+                      </a:solidFill>
+                      <a:prstDash val="solid"/>
+                      <a:round/>
+                      <a:headEnd type="none" w="med" len="med"/>
+                      <a:tailEnd type="none" w="med" len="med"/>
+                    </a:lnB>
+                    <a:solidFill>
+                      <a:srgbClr val="FFFFFF"/>
+                    </a:solidFill>
+                  </a:tcPr>
+                </a:tc>
+                <a:tc>
+                  <a:txBody>
+                    <a:bodyPr/>
+                    <a:lstStyle/>
+                    <a:p>
+                      <a:pPr algn="ctr" indent="0" marL="0">
+                        <a:buNone/>
+                      </a:pPr>
+                      <a:r>
+                        <a:rPr lang="en-US" sz="850" dirty="0">
+                          <a:solidFill>
+                            <a:srgbClr val="B8692E"/>
+                          </a:solidFill>
+                          <a:latin typeface="Meiryo" pitchFamily="34" charset="0"/>
+                          <a:ea typeface="Meiryo" pitchFamily="34" charset="-122"/>
+                          <a:cs typeface="Meiryo" pitchFamily="34" charset="-120"/>
+                        </a:rPr>
+                        <a:t>▲19</a:t>
+                      </a:r>
+                      <a:endParaRPr lang="en-US" sz="850" dirty="0">
+                        <a:latin typeface="Meiryo" charset="0"/>
+                        <a:ea typeface="Meiryo" charset="0"/>
+                        <a:cs typeface="Meiryo" charset="0"/>
+                      </a:endParaRPr>
+                    </a:p>
+                  </a:txBody>
+                  <a:tcPr marL="54864" marR="54864" marT="18288" marB="18288" anchor="ctr">
+                    <a:lnL w="0" cap="flat" cmpd="sng" algn="ctr">
+                      <a:noFill/>
+                    </a:lnL>
+                    <a:lnR w="0" cap="flat" cmpd="sng" algn="ctr">
+                      <a:noFill/>
+                    </a:lnR>
+                    <a:lnT w="0" cap="flat" cmpd="sng" algn="ctr">
+                      <a:noFill/>
+                    </a:lnT>
+                    <a:lnB w="9525" cap="flat" cmpd="sng" algn="ctr">
+                      <a:solidFill>
+                        <a:srgbClr val="BFBFBF"/>
+                      </a:solidFill>
+                      <a:prstDash val="solid"/>
+                      <a:round/>
+                      <a:headEnd type="none" w="med" len="med"/>
+                      <a:tailEnd type="none" w="med" len="med"/>
+                    </a:lnB>
+                    <a:solidFill>
+                      <a:srgbClr val="FFFFFF"/>
+                    </a:solidFill>
+                  </a:tcPr>
+                </a:tc>
+                <a:tc>
+                  <a:txBody>
+                    <a:bodyPr/>
+                    <a:lstStyle/>
+                    <a:p>
+                      <a:pPr algn="ctr" indent="0" marL="0">
+                        <a:buNone/>
+                      </a:pPr>
+                      <a:r>
+                        <a:rPr lang="en-US" sz="850" dirty="0">
+                          <a:solidFill>
+                            <a:srgbClr val="B8692E"/>
+                          </a:solidFill>
+                          <a:latin typeface="Meiryo" pitchFamily="34" charset="0"/>
+                          <a:ea typeface="Meiryo" pitchFamily="34" charset="-122"/>
+                          <a:cs typeface="Meiryo" pitchFamily="34" charset="-120"/>
+                        </a:rPr>
+                        <a:t>-14</a:t>
+                      </a:r>
+                      <a:endParaRPr lang="en-US" sz="850" dirty="0">
+                        <a:latin typeface="Meiryo" charset="0"/>
+                        <a:ea typeface="Meiryo" charset="0"/>
+                        <a:cs typeface="Meiryo" charset="0"/>
+                      </a:endParaRPr>
+                    </a:p>
+                  </a:txBody>
+                  <a:tcPr marL="54864" marR="54864" marT="18288" marB="18288" anchor="ctr">
+                    <a:lnL w="0" cap="flat" cmpd="sng" algn="ctr">
+                      <a:noFill/>
+                    </a:lnL>
+                    <a:lnR w="0" cap="flat" cmpd="sng" algn="ctr">
+                      <a:noFill/>
+                    </a:lnR>
+                    <a:lnT w="0" cap="flat" cmpd="sng" algn="ctr">
+                      <a:noFill/>
+                    </a:lnT>
+                    <a:lnB w="9525" cap="flat" cmpd="sng" algn="ctr">
+                      <a:solidFill>
+                        <a:srgbClr val="BFBFBF"/>
+                      </a:solidFill>
+                      <a:prstDash val="solid"/>
+                      <a:round/>
+                      <a:headEnd type="none" w="med" len="med"/>
+                      <a:tailEnd type="none" w="med" len="med"/>
+                    </a:lnB>
+                    <a:solidFill>
+                      <a:srgbClr val="FFFFFF"/>
+                    </a:solidFill>
+                  </a:tcPr>
+                </a:tc>
+                <a:tc>
+                  <a:txBody>
+                    <a:bodyPr/>
+                    <a:lstStyle/>
+                    <a:p>
+                      <a:pPr algn="ctr" indent="0" marL="0">
+                        <a:buNone/>
+                      </a:pPr>
+                      <a:r>
+                        <a:rPr lang="en-US" sz="850" dirty="0">
+                          <a:solidFill>
+                            <a:srgbClr val="1A1A1A"/>
+                          </a:solidFill>
+                          <a:latin typeface="Meiryo" pitchFamily="34" charset="0"/>
+                          <a:ea typeface="Meiryo" pitchFamily="34" charset="-122"/>
+                          <a:cs typeface="Meiryo" pitchFamily="34" charset="-120"/>
+                        </a:rPr>
+                        <a:t>5年目</a:t>
+                      </a:r>
+                      <a:endParaRPr lang="en-US" sz="850" dirty="0">
+                        <a:latin typeface="Meiryo" charset="0"/>
+                        <a:ea typeface="Meiryo" charset="0"/>
+                        <a:cs typeface="Meiryo" charset="0"/>
+                      </a:endParaRPr>
+                    </a:p>
+                  </a:txBody>
+                  <a:tcPr marL="54864" marR="54864" marT="18288" marB="18288" anchor="ctr">
+                    <a:lnL w="0" cap="flat" cmpd="sng" algn="ctr">
+                      <a:noFill/>
+                    </a:lnL>
+                    <a:lnR w="0" cap="flat" cmpd="sng" algn="ctr">
+                      <a:noFill/>
+                    </a:lnR>
+                    <a:lnT w="0" cap="flat" cmpd="sng" algn="ctr">
+                      <a:noFill/>
+                    </a:lnT>
+                    <a:lnB w="9525" cap="flat" cmpd="sng" algn="ctr">
+                      <a:solidFill>
+                        <a:srgbClr val="BFBFBF"/>
+                      </a:solidFill>
+                      <a:prstDash val="solid"/>
+                      <a:round/>
+                      <a:headEnd type="none" w="med" len="med"/>
+                      <a:tailEnd type="none" w="med" len="med"/>
+                    </a:lnB>
+                    <a:solidFill>
+                      <a:srgbClr val="FFFFFF"/>
+                    </a:solidFill>
+                  </a:tcPr>
+                </a:tc>
+                <a:tc>
+                  <a:txBody>
+                    <a:bodyPr/>
+                    <a:lstStyle/>
+                    <a:p>
+                      <a:pPr algn="ctr" indent="0" marL="0">
+                        <a:buNone/>
+                      </a:pPr>
+                      <a:r>
+                        <a:rPr lang="en-US" sz="850" dirty="0">
+                          <a:solidFill>
+                            <a:srgbClr val="1A1A1A"/>
+                          </a:solidFill>
+                          <a:latin typeface="Meiryo" pitchFamily="34" charset="0"/>
+                          <a:ea typeface="Meiryo" pitchFamily="34" charset="-122"/>
+                          <a:cs typeface="Meiryo" pitchFamily="34" charset="-120"/>
+                        </a:rPr>
+                        <a:t>13</a:t>
+                      </a:r>
+                      <a:endParaRPr lang="en-US" sz="850" dirty="0">
+                        <a:latin typeface="Meiryo" charset="0"/>
+                        <a:ea typeface="Meiryo" charset="0"/>
+                        <a:cs typeface="Meiryo" charset="0"/>
+                      </a:endParaRPr>
+                    </a:p>
+                  </a:txBody>
+                  <a:tcPr marL="54864" marR="54864" marT="18288" marB="18288" anchor="ctr">
+                    <a:lnL w="0" cap="flat" cmpd="sng" algn="ctr">
+                      <a:noFill/>
+                    </a:lnL>
+                    <a:lnR w="0" cap="flat" cmpd="sng" algn="ctr">
+                      <a:noFill/>
+                    </a:lnR>
+                    <a:lnT w="0" cap="flat" cmpd="sng" algn="ctr">
+                      <a:noFill/>
+                    </a:lnT>
+                    <a:lnB w="9525" cap="flat" cmpd="sng" algn="ctr">
+                      <a:solidFill>
+                        <a:srgbClr val="BFBFBF"/>
+                      </a:solidFill>
+                      <a:prstDash val="solid"/>
+                      <a:round/>
+                      <a:headEnd type="none" w="med" len="med"/>
+                      <a:tailEnd type="none" w="med" len="med"/>
+                    </a:lnB>
+                    <a:solidFill>
+                      <a:srgbClr val="FFFFFF"/>
+                    </a:solidFill>
+                  </a:tcPr>
+                </a:tc>
+                <a:tc>
+                  <a:txBody>
+                    <a:bodyPr/>
+                    <a:lstStyle/>
+                    <a:p>
+                      <a:pPr algn="ctr" indent="0" marL="0">
+                        <a:buNone/>
+                      </a:pPr>
+                      <a:r>
+                        <a:rPr lang="en-US" sz="850" dirty="0">
+                          <a:solidFill>
+                            <a:srgbClr val="1A1A1A"/>
+                          </a:solidFill>
+                          <a:latin typeface="Meiryo" pitchFamily="34" charset="0"/>
+                          <a:ea typeface="Meiryo" pitchFamily="34" charset="-122"/>
+                          <a:cs typeface="Meiryo" pitchFamily="34" charset="-120"/>
+                        </a:rPr>
+                        <a:t>37</a:t>
                       </a:r>
                       <a:endParaRPr lang="en-US" sz="850" dirty="0">
                         <a:latin typeface="Meiryo" charset="0"/>
@@ -11369,893 +11939,1452 @@
       </p:graphicFrame>
       <p:sp>
         <p:nvSpPr>
-          <p:cNvPr id="9" name="Shape 5"/>
-          <p:cNvSpPr/>
-          <p:nvPr/>
-        </p:nvSpPr>
-        <p:spPr>
-          <a:xfrm>
-            <a:off x="365760" y="3447288"/>
-            <a:ext cx="4846320" cy="822960"/>
+          <p:cNvPr id="7" name="Text 3"/>
+          <p:cNvSpPr txBox="1"/>
+          <p:nvPr/>
+        </p:nvSpPr>
+        <p:spPr>
+          <a:xfrm>
+            <a:off x="3108960" y="1298448"/>
+            <a:ext cx="2788920" cy="210312"/>
           </a:xfrm>
           <a:prstGeom prst="rect">
             <a:avLst/>
           </a:prstGeom>
           <a:solidFill>
-            <a:srgbClr val="1A1A1A"/>
+            <a:srgbClr val="F2F2F2"/>
           </a:solidFill>
           <a:ln/>
         </p:spPr>
-      </p:sp>
-      <p:sp>
-        <p:nvSpPr>
-          <p:cNvPr id="10" name="Text 6"/>
+        <p:txBody>
+          <a:bodyPr wrap="square" lIns="0" tIns="0" rIns="0" bIns="0" rtlCol="0" anchor="ctr"/>
+          <a:lstStyle/>
+          <a:p>
+            <a:pPr algn="ctr" indent="0" marL="0">
+              <a:lnSpc>
+                <a:spcPct val="115000"/>
+              </a:lnSpc>
+              <a:buNone/>
+            </a:pPr>
+            <a:r>
+              <a:rPr lang="en-US" sz="850" b="1" dirty="0">
+                <a:solidFill>
+                  <a:srgbClr val="1A1A1A"/>
+                </a:solidFill>
+                <a:latin typeface="Meiryo" pitchFamily="34" charset="0"/>
+                <a:ea typeface="Meiryo" pitchFamily="34" charset="-122"/>
+                <a:cs typeface="Meiryo" pitchFamily="34" charset="-120"/>
+              </a:rPr>
+              <a:t>1拠点10台のまま</a:t>
+            </a:r>
+            <a:endParaRPr lang="en-US" sz="850" dirty="0"/>
+          </a:p>
+        </p:txBody>
+      </p:sp>
+      <p:sp>
+        <p:nvSpPr>
+          <p:cNvPr id="8" name="Text 4"/>
           <p:cNvSpPr txBox="1"/>
           <p:nvPr/>
         </p:nvSpPr>
         <p:spPr>
           <a:xfrm>
-            <a:off x="502920" y="3465576"/>
-            <a:ext cx="4572000" cy="786384"/>
-          </a:xfrm>
-          <a:prstGeom prst="rect">
-            <a:avLst/>
-          </a:prstGeom>
-          <a:noFill/>
+            <a:off x="5897880" y="1298448"/>
+            <a:ext cx="2880360" cy="210312"/>
+          </a:xfrm>
+          <a:prstGeom prst="rect">
+            <a:avLst/>
+          </a:prstGeom>
+          <a:solidFill>
+            <a:srgbClr val="F2F2F2"/>
+          </a:solidFill>
           <a:ln/>
         </p:spPr>
         <p:txBody>
           <a:bodyPr wrap="square" lIns="0" tIns="0" rIns="0" bIns="0" rtlCol="0" anchor="ctr"/>
           <a:lstStyle/>
           <a:p>
+            <a:pPr algn="ctr" indent="0" marL="0">
+              <a:lnSpc>
+                <a:spcPct val="115000"/>
+              </a:lnSpc>
+              <a:buNone/>
+            </a:pPr>
+            <a:r>
+              <a:rPr lang="en-US" sz="850" b="1" dirty="0">
+                <a:solidFill>
+                  <a:srgbClr val="B8692E"/>
+                </a:solidFill>
+                <a:latin typeface="Meiryo" pitchFamily="34" charset="0"/>
+                <a:ea typeface="Meiryo" pitchFamily="34" charset="-122"/>
+                <a:cs typeface="Meiryo" pitchFamily="34" charset="-120"/>
+              </a:rPr>
+              <a:t>1拠点15台に増やせた場合</a:t>
+            </a:r>
+            <a:endParaRPr lang="en-US" sz="850" dirty="0"/>
+          </a:p>
+        </p:txBody>
+      </p:sp>
+      <p:sp>
+        <p:nvSpPr>
+          <p:cNvPr id="9" name="Text 5"/>
+          <p:cNvSpPr txBox="1"/>
+          <p:nvPr/>
+        </p:nvSpPr>
+        <p:spPr>
+          <a:xfrm>
+            <a:off x="365760" y="2962656"/>
+            <a:ext cx="8412480" cy="237744"/>
+          </a:xfrm>
+          <a:prstGeom prst="rect">
+            <a:avLst/>
+          </a:prstGeom>
+          <a:noFill/>
+          <a:ln/>
+        </p:spPr>
+        <p:txBody>
+          <a:bodyPr wrap="square" lIns="0" tIns="0" rIns="0" bIns="0" rtlCol="0" anchor="t"/>
+          <a:lstStyle/>
+          <a:p>
             <a:pPr algn="l" indent="0" marL="0">
               <a:lnSpc>
                 <a:spcPct val="115000"/>
               </a:lnSpc>
-              <a:spcAft>
-                <a:spcPts val="100"/>
-              </a:spcAft>
-              <a:buNone/>
-            </a:pPr>
-            <a:r>
-              <a:rPr lang="en-US" sz="900" b="1" dirty="0">
-                <a:solidFill>
-                  <a:srgbClr val="E3A774"/>
-                </a:solidFill>
-                <a:latin typeface="Meiryo" pitchFamily="34" charset="0"/>
-                <a:ea typeface="Meiryo" pitchFamily="34" charset="-122"/>
-                <a:cs typeface="Meiryo" pitchFamily="34" charset="-120"/>
-              </a:rPr>
-              <a:t>読み方</a:t>
-            </a:r>
-            <a:endParaRPr lang="en-US" sz="900" dirty="0"/>
-          </a:p>
+              <a:buNone/>
+            </a:pPr>
+            <a:r>
+              <a:rPr lang="en-US" sz="1000" b="1" dirty="0">
+                <a:solidFill>
+                  <a:srgbClr val="1A1A1A"/>
+                </a:solidFill>
+                <a:latin typeface="Meiryo" pitchFamily="34" charset="0"/>
+                <a:ea typeface="Meiryo" pitchFamily="34" charset="-122"/>
+                <a:cs typeface="Meiryo" pitchFamily="34" charset="-120"/>
+              </a:rPr>
+              <a:t>進む・直す・止まるの線（案）</a:t>
+            </a:r>
+            <a:endParaRPr lang="en-US" sz="1000" dirty="0"/>
+          </a:p>
+        </p:txBody>
+      </p:sp>
+      <p:graphicFrame>
+        <p:nvGraphicFramePr>
+          <p:cNvPr id="29" name="gates"/>
+          <p:cNvGraphicFramePr>
+            <a:graphicFrameLocks noGrp="1"/>
+          </p:cNvGraphicFramePr>
+          <p:nvPr>
+            <p:extLst>
+              <p:ext uri="{D42A27DB-BD31-4B8C-83A1-F6EECF244321}">
+                <p14:modId xmlns:p14="http://schemas.microsoft.com/office/powerpoint/2010/main" val="1579011935"/>
+              </p:ext>
+            </p:extLst>
+          </p:nvPr>
+        </p:nvGraphicFramePr>
+        <p:xfrm>
+          <a:off x="365760" y="3218688"/>
+          <a:ext cx="8412480" cy="914400"/>
+        </p:xfrm>
+        <a:graphic>
+          <a:graphicData uri="http://schemas.openxmlformats.org/drawingml/2006/table">
+            <a:tbl>
+              <a:tblPr/>
+              <a:tblGrid>
+                <a:gridCol w="1097280"/>
+                <a:gridCol w="1737360"/>
+                <a:gridCol w="1463040"/>
+                <a:gridCol w="2286000"/>
+                <a:gridCol w="1828800"/>
+              </a:tblGrid>
+              <a:tr h="228600">
+                <a:tc>
+                  <a:txBody>
+                    <a:bodyPr/>
+                    <a:lstStyle/>
+                    <a:p>
+                      <a:pPr algn="l" indent="0" marL="0">
+                        <a:buNone/>
+                      </a:pPr>
+                      <a:r>
+                        <a:rPr lang="en-US" sz="850" b="1" dirty="0">
+                          <a:solidFill>
+                            <a:srgbClr val="1A1A1A"/>
+                          </a:solidFill>
+                          <a:latin typeface="Meiryo" pitchFamily="34" charset="0"/>
+                          <a:ea typeface="Meiryo" pitchFamily="34" charset="-122"/>
+                          <a:cs typeface="Meiryo" pitchFamily="34" charset="-120"/>
+                        </a:rPr>
+                        <a:t>時期</a:t>
+                      </a:r>
+                      <a:endParaRPr lang="en-US" sz="850" dirty="0">
+                        <a:latin typeface="Meiryo" charset="0"/>
+                        <a:ea typeface="Meiryo" charset="0"/>
+                        <a:cs typeface="Meiryo" charset="0"/>
+                      </a:endParaRPr>
+                    </a:p>
+                  </a:txBody>
+                  <a:tcPr marL="54864" marR="54864" marT="18288" marB="18288" anchor="ctr">
+                    <a:lnL w="0" cap="flat" cmpd="sng" algn="ctr">
+                      <a:noFill/>
+                    </a:lnL>
+                    <a:lnR w="0" cap="flat" cmpd="sng" algn="ctr">
+                      <a:noFill/>
+                    </a:lnR>
+                    <a:lnT w="0" cap="flat" cmpd="sng" algn="ctr">
+                      <a:noFill/>
+                    </a:lnT>
+                    <a:lnB w="19050" cap="flat" cmpd="sng" algn="ctr">
+                      <a:solidFill>
+                        <a:srgbClr val="1A1A1A"/>
+                      </a:solidFill>
+                      <a:prstDash val="solid"/>
+                      <a:round/>
+                      <a:headEnd type="none" w="med" len="med"/>
+                      <a:tailEnd type="none" w="med" len="med"/>
+                    </a:lnB>
+                    <a:solidFill>
+                      <a:srgbClr val="F2F2F2"/>
+                    </a:solidFill>
+                  </a:tcPr>
+                </a:tc>
+                <a:tc>
+                  <a:txBody>
+                    <a:bodyPr/>
+                    <a:lstStyle/>
+                    <a:p>
+                      <a:pPr algn="l" indent="0" marL="0">
+                        <a:buNone/>
+                      </a:pPr>
+                      <a:r>
+                        <a:rPr lang="en-US" sz="850" b="1" dirty="0">
+                          <a:solidFill>
+                            <a:srgbClr val="1A1A1A"/>
+                          </a:solidFill>
+                          <a:latin typeface="Meiryo" pitchFamily="34" charset="0"/>
+                          <a:ea typeface="Meiryo" pitchFamily="34" charset="-122"/>
+                          <a:cs typeface="Meiryo" pitchFamily="34" charset="-120"/>
+                        </a:rPr>
+                        <a:t>測るもの</a:t>
+                      </a:r>
+                      <a:endParaRPr lang="en-US" sz="850" dirty="0">
+                        <a:latin typeface="Meiryo" charset="0"/>
+                        <a:ea typeface="Meiryo" charset="0"/>
+                        <a:cs typeface="Meiryo" charset="0"/>
+                      </a:endParaRPr>
+                    </a:p>
+                  </a:txBody>
+                  <a:tcPr marL="54864" marR="54864" marT="18288" marB="18288" anchor="ctr">
+                    <a:lnL w="0" cap="flat" cmpd="sng" algn="ctr">
+                      <a:noFill/>
+                    </a:lnL>
+                    <a:lnR w="0" cap="flat" cmpd="sng" algn="ctr">
+                      <a:noFill/>
+                    </a:lnR>
+                    <a:lnT w="0" cap="flat" cmpd="sng" algn="ctr">
+                      <a:noFill/>
+                    </a:lnT>
+                    <a:lnB w="19050" cap="flat" cmpd="sng" algn="ctr">
+                      <a:solidFill>
+                        <a:srgbClr val="1A1A1A"/>
+                      </a:solidFill>
+                      <a:prstDash val="solid"/>
+                      <a:round/>
+                      <a:headEnd type="none" w="med" len="med"/>
+                      <a:tailEnd type="none" w="med" len="med"/>
+                    </a:lnB>
+                    <a:solidFill>
+                      <a:srgbClr val="F2F2F2"/>
+                    </a:solidFill>
+                  </a:tcPr>
+                </a:tc>
+                <a:tc>
+                  <a:txBody>
+                    <a:bodyPr/>
+                    <a:lstStyle/>
+                    <a:p>
+                      <a:pPr algn="l" indent="0" marL="0">
+                        <a:buNone/>
+                      </a:pPr>
+                      <a:r>
+                        <a:rPr lang="en-US" sz="850" b="1" dirty="0">
+                          <a:solidFill>
+                            <a:srgbClr val="1A1A1A"/>
+                          </a:solidFill>
+                          <a:latin typeface="Meiryo" pitchFamily="34" charset="0"/>
+                          <a:ea typeface="Meiryo" pitchFamily="34" charset="-122"/>
+                          <a:cs typeface="Meiryo" pitchFamily="34" charset="-120"/>
+                        </a:rPr>
+                        <a:t>進む</a:t>
+                      </a:r>
+                      <a:endParaRPr lang="en-US" sz="850" dirty="0">
+                        <a:latin typeface="Meiryo" charset="0"/>
+                        <a:ea typeface="Meiryo" charset="0"/>
+                        <a:cs typeface="Meiryo" charset="0"/>
+                      </a:endParaRPr>
+                    </a:p>
+                  </a:txBody>
+                  <a:tcPr marL="54864" marR="54864" marT="18288" marB="18288" anchor="ctr">
+                    <a:lnL w="0" cap="flat" cmpd="sng" algn="ctr">
+                      <a:noFill/>
+                    </a:lnL>
+                    <a:lnR w="0" cap="flat" cmpd="sng" algn="ctr">
+                      <a:noFill/>
+                    </a:lnR>
+                    <a:lnT w="0" cap="flat" cmpd="sng" algn="ctr">
+                      <a:noFill/>
+                    </a:lnT>
+                    <a:lnB w="19050" cap="flat" cmpd="sng" algn="ctr">
+                      <a:solidFill>
+                        <a:srgbClr val="1A1A1A"/>
+                      </a:solidFill>
+                      <a:prstDash val="solid"/>
+                      <a:round/>
+                      <a:headEnd type="none" w="med" len="med"/>
+                      <a:tailEnd type="none" w="med" len="med"/>
+                    </a:lnB>
+                    <a:solidFill>
+                      <a:srgbClr val="F2F2F2"/>
+                    </a:solidFill>
+                  </a:tcPr>
+                </a:tc>
+                <a:tc>
+                  <a:txBody>
+                    <a:bodyPr/>
+                    <a:lstStyle/>
+                    <a:p>
+                      <a:pPr algn="l" indent="0" marL="0">
+                        <a:buNone/>
+                      </a:pPr>
+                      <a:r>
+                        <a:rPr lang="en-US" sz="850" b="1" dirty="0">
+                          <a:solidFill>
+                            <a:srgbClr val="1A1A1A"/>
+                          </a:solidFill>
+                          <a:latin typeface="Meiryo" pitchFamily="34" charset="0"/>
+                          <a:ea typeface="Meiryo" pitchFamily="34" charset="-122"/>
+                          <a:cs typeface="Meiryo" pitchFamily="34" charset="-120"/>
+                        </a:rPr>
+                        <a:t>直す</a:t>
+                      </a:r>
+                      <a:endParaRPr lang="en-US" sz="850" dirty="0">
+                        <a:latin typeface="Meiryo" charset="0"/>
+                        <a:ea typeface="Meiryo" charset="0"/>
+                        <a:cs typeface="Meiryo" charset="0"/>
+                      </a:endParaRPr>
+                    </a:p>
+                  </a:txBody>
+                  <a:tcPr marL="54864" marR="54864" marT="18288" marB="18288" anchor="ctr">
+                    <a:lnL w="0" cap="flat" cmpd="sng" algn="ctr">
+                      <a:noFill/>
+                    </a:lnL>
+                    <a:lnR w="0" cap="flat" cmpd="sng" algn="ctr">
+                      <a:noFill/>
+                    </a:lnR>
+                    <a:lnT w="0" cap="flat" cmpd="sng" algn="ctr">
+                      <a:noFill/>
+                    </a:lnT>
+                    <a:lnB w="19050" cap="flat" cmpd="sng" algn="ctr">
+                      <a:solidFill>
+                        <a:srgbClr val="1A1A1A"/>
+                      </a:solidFill>
+                      <a:prstDash val="solid"/>
+                      <a:round/>
+                      <a:headEnd type="none" w="med" len="med"/>
+                      <a:tailEnd type="none" w="med" len="med"/>
+                    </a:lnB>
+                    <a:solidFill>
+                      <a:srgbClr val="F2F2F2"/>
+                    </a:solidFill>
+                  </a:tcPr>
+                </a:tc>
+                <a:tc>
+                  <a:txBody>
+                    <a:bodyPr/>
+                    <a:lstStyle/>
+                    <a:p>
+                      <a:pPr algn="l" indent="0" marL="0">
+                        <a:buNone/>
+                      </a:pPr>
+                      <a:r>
+                        <a:rPr lang="en-US" sz="850" b="1" dirty="0">
+                          <a:solidFill>
+                            <a:srgbClr val="1A1A1A"/>
+                          </a:solidFill>
+                          <a:latin typeface="Meiryo" pitchFamily="34" charset="0"/>
+                          <a:ea typeface="Meiryo" pitchFamily="34" charset="-122"/>
+                          <a:cs typeface="Meiryo" pitchFamily="34" charset="-120"/>
+                        </a:rPr>
+                        <a:t>止まる</a:t>
+                      </a:r>
+                      <a:endParaRPr lang="en-US" sz="850" dirty="0">
+                        <a:latin typeface="Meiryo" charset="0"/>
+                        <a:ea typeface="Meiryo" charset="0"/>
+                        <a:cs typeface="Meiryo" charset="0"/>
+                      </a:endParaRPr>
+                    </a:p>
+                  </a:txBody>
+                  <a:tcPr marL="54864" marR="54864" marT="18288" marB="18288" anchor="ctr">
+                    <a:lnL w="0" cap="flat" cmpd="sng" algn="ctr">
+                      <a:noFill/>
+                    </a:lnL>
+                    <a:lnR w="0" cap="flat" cmpd="sng" algn="ctr">
+                      <a:noFill/>
+                    </a:lnR>
+                    <a:lnT w="0" cap="flat" cmpd="sng" algn="ctr">
+                      <a:noFill/>
+                    </a:lnT>
+                    <a:lnB w="19050" cap="flat" cmpd="sng" algn="ctr">
+                      <a:solidFill>
+                        <a:srgbClr val="1A1A1A"/>
+                      </a:solidFill>
+                      <a:prstDash val="solid"/>
+                      <a:round/>
+                      <a:headEnd type="none" w="med" len="med"/>
+                      <a:tailEnd type="none" w="med" len="med"/>
+                    </a:lnB>
+                    <a:solidFill>
+                      <a:srgbClr val="F2F2F2"/>
+                    </a:solidFill>
+                  </a:tcPr>
+                </a:tc>
+              </a:tr>
+              <a:tr h="228600">
+                <a:tc>
+                  <a:txBody>
+                    <a:bodyPr/>
+                    <a:lstStyle/>
+                    <a:p>
+                      <a:pPr algn="l" indent="0" marL="0">
+                        <a:buNone/>
+                      </a:pPr>
+                      <a:r>
+                        <a:rPr lang="en-US" sz="850" dirty="0">
+                          <a:solidFill>
+                            <a:srgbClr val="1A1A1A"/>
+                          </a:solidFill>
+                          <a:latin typeface="Meiryo" pitchFamily="34" charset="0"/>
+                          <a:ea typeface="Meiryo" pitchFamily="34" charset="-122"/>
+                          <a:cs typeface="Meiryo" pitchFamily="34" charset="-120"/>
+                        </a:rPr>
+                        <a:t>実証（準備期）</a:t>
+                      </a:r>
+                      <a:endParaRPr lang="en-US" sz="850" dirty="0">
+                        <a:latin typeface="Meiryo" charset="0"/>
+                        <a:ea typeface="Meiryo" charset="0"/>
+                        <a:cs typeface="Meiryo" charset="0"/>
+                      </a:endParaRPr>
+                    </a:p>
+                  </a:txBody>
+                  <a:tcPr marL="54864" marR="54864" marT="18288" marB="18288" anchor="ctr">
+                    <a:lnL w="0" cap="flat" cmpd="sng" algn="ctr">
+                      <a:noFill/>
+                    </a:lnL>
+                    <a:lnR w="0" cap="flat" cmpd="sng" algn="ctr">
+                      <a:noFill/>
+                    </a:lnR>
+                    <a:lnT w="0" cap="flat" cmpd="sng" algn="ctr">
+                      <a:noFill/>
+                    </a:lnT>
+                    <a:lnB w="9525" cap="flat" cmpd="sng" algn="ctr">
+                      <a:solidFill>
+                        <a:srgbClr val="BFBFBF"/>
+                      </a:solidFill>
+                      <a:prstDash val="solid"/>
+                      <a:round/>
+                      <a:headEnd type="none" w="med" len="med"/>
+                      <a:tailEnd type="none" w="med" len="med"/>
+                    </a:lnB>
+                    <a:solidFill>
+                      <a:srgbClr val="FFFFFF"/>
+                    </a:solidFill>
+                  </a:tcPr>
+                </a:tc>
+                <a:tc>
+                  <a:txBody>
+                    <a:bodyPr/>
+                    <a:lstStyle/>
+                    <a:p>
+                      <a:pPr algn="l" indent="0" marL="0">
+                        <a:buNone/>
+                      </a:pPr>
+                      <a:r>
+                        <a:rPr lang="en-US" sz="850" dirty="0">
+                          <a:solidFill>
+                            <a:srgbClr val="1A1A1A"/>
+                          </a:solidFill>
+                          <a:latin typeface="Meiryo" pitchFamily="34" charset="0"/>
+                          <a:ea typeface="Meiryo" pitchFamily="34" charset="-122"/>
+                          <a:cs typeface="Meiryo" pitchFamily="34" charset="-120"/>
+                        </a:rPr>
+                        <a:t>1台1日の削減時間</a:t>
+                      </a:r>
+                      <a:endParaRPr lang="en-US" sz="850" dirty="0">
+                        <a:latin typeface="Meiryo" charset="0"/>
+                        <a:ea typeface="Meiryo" charset="0"/>
+                        <a:cs typeface="Meiryo" charset="0"/>
+                      </a:endParaRPr>
+                    </a:p>
+                  </a:txBody>
+                  <a:tcPr marL="54864" marR="54864" marT="18288" marB="18288" anchor="ctr">
+                    <a:lnL w="0" cap="flat" cmpd="sng" algn="ctr">
+                      <a:noFill/>
+                    </a:lnL>
+                    <a:lnR w="0" cap="flat" cmpd="sng" algn="ctr">
+                      <a:noFill/>
+                    </a:lnR>
+                    <a:lnT w="0" cap="flat" cmpd="sng" algn="ctr">
+                      <a:noFill/>
+                    </a:lnT>
+                    <a:lnB w="9525" cap="flat" cmpd="sng" algn="ctr">
+                      <a:solidFill>
+                        <a:srgbClr val="BFBFBF"/>
+                      </a:solidFill>
+                      <a:prstDash val="solid"/>
+                      <a:round/>
+                      <a:headEnd type="none" w="med" len="med"/>
+                      <a:tailEnd type="none" w="med" len="med"/>
+                    </a:lnB>
+                    <a:solidFill>
+                      <a:srgbClr val="FFFFFF"/>
+                    </a:solidFill>
+                  </a:tcPr>
+                </a:tc>
+                <a:tc>
+                  <a:txBody>
+                    <a:bodyPr/>
+                    <a:lstStyle/>
+                    <a:p>
+                      <a:pPr algn="l" indent="0" marL="0">
+                        <a:buNone/>
+                      </a:pPr>
+                      <a:r>
+                        <a:rPr lang="en-US" sz="850" dirty="0">
+                          <a:solidFill>
+                            <a:srgbClr val="1A1A1A"/>
+                          </a:solidFill>
+                          <a:latin typeface="Meiryo" pitchFamily="34" charset="0"/>
+                          <a:ea typeface="Meiryo" pitchFamily="34" charset="-122"/>
+                          <a:cs typeface="Meiryo" pitchFamily="34" charset="-120"/>
+                        </a:rPr>
+                        <a:t>26分以上</a:t>
+                      </a:r>
+                      <a:endParaRPr lang="en-US" sz="850" dirty="0">
+                        <a:latin typeface="Meiryo" charset="0"/>
+                        <a:ea typeface="Meiryo" charset="0"/>
+                        <a:cs typeface="Meiryo" charset="0"/>
+                      </a:endParaRPr>
+                    </a:p>
+                  </a:txBody>
+                  <a:tcPr marL="54864" marR="54864" marT="18288" marB="18288" anchor="ctr">
+                    <a:lnL w="0" cap="flat" cmpd="sng" algn="ctr">
+                      <a:noFill/>
+                    </a:lnL>
+                    <a:lnR w="0" cap="flat" cmpd="sng" algn="ctr">
+                      <a:noFill/>
+                    </a:lnR>
+                    <a:lnT w="0" cap="flat" cmpd="sng" algn="ctr">
+                      <a:noFill/>
+                    </a:lnT>
+                    <a:lnB w="9525" cap="flat" cmpd="sng" algn="ctr">
+                      <a:solidFill>
+                        <a:srgbClr val="BFBFBF"/>
+                      </a:solidFill>
+                      <a:prstDash val="solid"/>
+                      <a:round/>
+                      <a:headEnd type="none" w="med" len="med"/>
+                      <a:tailEnd type="none" w="med" len="med"/>
+                    </a:lnB>
+                    <a:solidFill>
+                      <a:srgbClr val="FFFFFF"/>
+                    </a:solidFill>
+                  </a:tcPr>
+                </a:tc>
+                <a:tc>
+                  <a:txBody>
+                    <a:bodyPr/>
+                    <a:lstStyle/>
+                    <a:p>
+                      <a:pPr algn="l" indent="0" marL="0">
+                        <a:buNone/>
+                      </a:pPr>
+                      <a:r>
+                        <a:rPr lang="en-US" sz="850" dirty="0">
+                          <a:solidFill>
+                            <a:srgbClr val="1A1A1A"/>
+                          </a:solidFill>
+                          <a:latin typeface="Meiryo" pitchFamily="34" charset="0"/>
+                          <a:ea typeface="Meiryo" pitchFamily="34" charset="-122"/>
+                          <a:cs typeface="Meiryo" pitchFamily="34" charset="-120"/>
+                        </a:rPr>
+                        <a:t>15〜26分：機能を写真台帳に絞る</a:t>
+                      </a:r>
+                      <a:endParaRPr lang="en-US" sz="850" dirty="0">
+                        <a:latin typeface="Meiryo" charset="0"/>
+                        <a:ea typeface="Meiryo" charset="0"/>
+                        <a:cs typeface="Meiryo" charset="0"/>
+                      </a:endParaRPr>
+                    </a:p>
+                  </a:txBody>
+                  <a:tcPr marL="54864" marR="54864" marT="18288" marB="18288" anchor="ctr">
+                    <a:lnL w="0" cap="flat" cmpd="sng" algn="ctr">
+                      <a:noFill/>
+                    </a:lnL>
+                    <a:lnR w="0" cap="flat" cmpd="sng" algn="ctr">
+                      <a:noFill/>
+                    </a:lnR>
+                    <a:lnT w="0" cap="flat" cmpd="sng" algn="ctr">
+                      <a:noFill/>
+                    </a:lnT>
+                    <a:lnB w="9525" cap="flat" cmpd="sng" algn="ctr">
+                      <a:solidFill>
+                        <a:srgbClr val="BFBFBF"/>
+                      </a:solidFill>
+                      <a:prstDash val="solid"/>
+                      <a:round/>
+                      <a:headEnd type="none" w="med" len="med"/>
+                      <a:tailEnd type="none" w="med" len="med"/>
+                    </a:lnB>
+                    <a:solidFill>
+                      <a:srgbClr val="FFFFFF"/>
+                    </a:solidFill>
+                  </a:tcPr>
+                </a:tc>
+                <a:tc>
+                  <a:txBody>
+                    <a:bodyPr/>
+                    <a:lstStyle/>
+                    <a:p>
+                      <a:pPr algn="l" indent="0" marL="0">
+                        <a:buNone/>
+                      </a:pPr>
+                      <a:r>
+                        <a:rPr lang="en-US" sz="850" dirty="0">
+                          <a:solidFill>
+                            <a:srgbClr val="1A1A1A"/>
+                          </a:solidFill>
+                          <a:latin typeface="Meiryo" pitchFamily="34" charset="0"/>
+                          <a:ea typeface="Meiryo" pitchFamily="34" charset="-122"/>
+                          <a:cs typeface="Meiryo" pitchFamily="34" charset="-120"/>
+                        </a:rPr>
+                        <a:t>15分未満：撤退</a:t>
+                      </a:r>
+                      <a:endParaRPr lang="en-US" sz="850" dirty="0">
+                        <a:latin typeface="Meiryo" charset="0"/>
+                        <a:ea typeface="Meiryo" charset="0"/>
+                        <a:cs typeface="Meiryo" charset="0"/>
+                      </a:endParaRPr>
+                    </a:p>
+                  </a:txBody>
+                  <a:tcPr marL="54864" marR="54864" marT="18288" marB="18288" anchor="ctr">
+                    <a:lnL w="0" cap="flat" cmpd="sng" algn="ctr">
+                      <a:noFill/>
+                    </a:lnL>
+                    <a:lnR w="0" cap="flat" cmpd="sng" algn="ctr">
+                      <a:noFill/>
+                    </a:lnR>
+                    <a:lnT w="0" cap="flat" cmpd="sng" algn="ctr">
+                      <a:noFill/>
+                    </a:lnT>
+                    <a:lnB w="9525" cap="flat" cmpd="sng" algn="ctr">
+                      <a:solidFill>
+                        <a:srgbClr val="BFBFBF"/>
+                      </a:solidFill>
+                      <a:prstDash val="solid"/>
+                      <a:round/>
+                      <a:headEnd type="none" w="med" len="med"/>
+                      <a:tailEnd type="none" w="med" len="med"/>
+                    </a:lnB>
+                    <a:solidFill>
+                      <a:srgbClr val="FFFFFF"/>
+                    </a:solidFill>
+                  </a:tcPr>
+                </a:tc>
+              </a:tr>
+              <a:tr h="228600">
+                <a:tc>
+                  <a:txBody>
+                    <a:bodyPr/>
+                    <a:lstStyle/>
+                    <a:p>
+                      <a:pPr algn="l" indent="0" marL="0">
+                        <a:buNone/>
+                      </a:pPr>
+                      <a:r>
+                        <a:rPr lang="en-US" sz="850" dirty="0">
+                          <a:solidFill>
+                            <a:srgbClr val="1A1A1A"/>
+                          </a:solidFill>
+                          <a:latin typeface="Meiryo" pitchFamily="34" charset="0"/>
+                          <a:ea typeface="Meiryo" pitchFamily="34" charset="-122"/>
+                          <a:cs typeface="Meiryo" pitchFamily="34" charset="-120"/>
+                        </a:rPr>
+                        <a:t>1年目末</a:t>
+                      </a:r>
+                      <a:endParaRPr lang="en-US" sz="850" dirty="0">
+                        <a:latin typeface="Meiryo" charset="0"/>
+                        <a:ea typeface="Meiryo" charset="0"/>
+                        <a:cs typeface="Meiryo" charset="0"/>
+                      </a:endParaRPr>
+                    </a:p>
+                  </a:txBody>
+                  <a:tcPr marL="54864" marR="54864" marT="18288" marB="18288" anchor="ctr">
+                    <a:lnL w="0" cap="flat" cmpd="sng" algn="ctr">
+                      <a:noFill/>
+                    </a:lnL>
+                    <a:lnR w="0" cap="flat" cmpd="sng" algn="ctr">
+                      <a:noFill/>
+                    </a:lnR>
+                    <a:lnT w="0" cap="flat" cmpd="sng" algn="ctr">
+                      <a:noFill/>
+                    </a:lnT>
+                    <a:lnB w="9525" cap="flat" cmpd="sng" algn="ctr">
+                      <a:solidFill>
+                        <a:srgbClr val="BFBFBF"/>
+                      </a:solidFill>
+                      <a:prstDash val="solid"/>
+                      <a:round/>
+                      <a:headEnd type="none" w="med" len="med"/>
+                      <a:tailEnd type="none" w="med" len="med"/>
+                    </a:lnB>
+                    <a:solidFill>
+                      <a:srgbClr val="FFFFFF"/>
+                    </a:solidFill>
+                  </a:tcPr>
+                </a:tc>
+                <a:tc>
+                  <a:txBody>
+                    <a:bodyPr/>
+                    <a:lstStyle/>
+                    <a:p>
+                      <a:pPr algn="l" indent="0" marL="0">
+                        <a:buNone/>
+                      </a:pPr>
+                      <a:r>
+                        <a:rPr lang="en-US" sz="850" dirty="0">
+                          <a:solidFill>
+                            <a:srgbClr val="1A1A1A"/>
+                          </a:solidFill>
+                          <a:latin typeface="Meiryo" pitchFamily="34" charset="0"/>
+                          <a:ea typeface="Meiryo" pitchFamily="34" charset="-122"/>
+                          <a:cs typeface="Meiryo" pitchFamily="34" charset="-120"/>
+                        </a:rPr>
+                        <a:t>試験導入3社の本契約</a:t>
+                      </a:r>
+                      <a:endParaRPr lang="en-US" sz="850" dirty="0">
+                        <a:latin typeface="Meiryo" charset="0"/>
+                        <a:ea typeface="Meiryo" charset="0"/>
+                        <a:cs typeface="Meiryo" charset="0"/>
+                      </a:endParaRPr>
+                    </a:p>
+                  </a:txBody>
+                  <a:tcPr marL="54864" marR="54864" marT="18288" marB="18288" anchor="ctr">
+                    <a:lnL w="0" cap="flat" cmpd="sng" algn="ctr">
+                      <a:noFill/>
+                    </a:lnL>
+                    <a:lnR w="0" cap="flat" cmpd="sng" algn="ctr">
+                      <a:noFill/>
+                    </a:lnR>
+                    <a:lnT w="0" cap="flat" cmpd="sng" algn="ctr">
+                      <a:noFill/>
+                    </a:lnT>
+                    <a:lnB w="9525" cap="flat" cmpd="sng" algn="ctr">
+                      <a:solidFill>
+                        <a:srgbClr val="BFBFBF"/>
+                      </a:solidFill>
+                      <a:prstDash val="solid"/>
+                      <a:round/>
+                      <a:headEnd type="none" w="med" len="med"/>
+                      <a:tailEnd type="none" w="med" len="med"/>
+                    </a:lnB>
+                    <a:solidFill>
+                      <a:srgbClr val="FFFFFF"/>
+                    </a:solidFill>
+                  </a:tcPr>
+                </a:tc>
+                <a:tc>
+                  <a:txBody>
+                    <a:bodyPr/>
+                    <a:lstStyle/>
+                    <a:p>
+                      <a:pPr algn="l" indent="0" marL="0">
+                        <a:buNone/>
+                      </a:pPr>
+                      <a:r>
+                        <a:rPr lang="en-US" sz="850" dirty="0">
+                          <a:solidFill>
+                            <a:srgbClr val="1A1A1A"/>
+                          </a:solidFill>
+                          <a:latin typeface="Meiryo" pitchFamily="34" charset="0"/>
+                          <a:ea typeface="Meiryo" pitchFamily="34" charset="-122"/>
+                          <a:cs typeface="Meiryo" pitchFamily="34" charset="-120"/>
+                        </a:rPr>
+                        <a:t>2社以上</a:t>
+                      </a:r>
+                      <a:endParaRPr lang="en-US" sz="850" dirty="0">
+                        <a:latin typeface="Meiryo" charset="0"/>
+                        <a:ea typeface="Meiryo" charset="0"/>
+                        <a:cs typeface="Meiryo" charset="0"/>
+                      </a:endParaRPr>
+                    </a:p>
+                  </a:txBody>
+                  <a:tcPr marL="54864" marR="54864" marT="18288" marB="18288" anchor="ctr">
+                    <a:lnL w="0" cap="flat" cmpd="sng" algn="ctr">
+                      <a:noFill/>
+                    </a:lnL>
+                    <a:lnR w="0" cap="flat" cmpd="sng" algn="ctr">
+                      <a:noFill/>
+                    </a:lnR>
+                    <a:lnT w="0" cap="flat" cmpd="sng" algn="ctr">
+                      <a:noFill/>
+                    </a:lnT>
+                    <a:lnB w="9525" cap="flat" cmpd="sng" algn="ctr">
+                      <a:solidFill>
+                        <a:srgbClr val="BFBFBF"/>
+                      </a:solidFill>
+                      <a:prstDash val="solid"/>
+                      <a:round/>
+                      <a:headEnd type="none" w="med" len="med"/>
+                      <a:tailEnd type="none" w="med" len="med"/>
+                    </a:lnB>
+                    <a:solidFill>
+                      <a:srgbClr val="FFFFFF"/>
+                    </a:solidFill>
+                  </a:tcPr>
+                </a:tc>
+                <a:tc>
+                  <a:txBody>
+                    <a:bodyPr/>
+                    <a:lstStyle/>
+                    <a:p>
+                      <a:pPr algn="l" indent="0" marL="0">
+                        <a:buNone/>
+                      </a:pPr>
+                      <a:r>
+                        <a:rPr lang="en-US" sz="850" dirty="0">
+                          <a:solidFill>
+                            <a:srgbClr val="1A1A1A"/>
+                          </a:solidFill>
+                          <a:latin typeface="Meiryo" pitchFamily="34" charset="0"/>
+                          <a:ea typeface="Meiryo" pitchFamily="34" charset="-122"/>
+                          <a:cs typeface="Meiryo" pitchFamily="34" charset="-120"/>
+                        </a:rPr>
+                        <a:t>1社：値段と顧客を見直す</a:t>
+                      </a:r>
+                      <a:endParaRPr lang="en-US" sz="850" dirty="0">
+                        <a:latin typeface="Meiryo" charset="0"/>
+                        <a:ea typeface="Meiryo" charset="0"/>
+                        <a:cs typeface="Meiryo" charset="0"/>
+                      </a:endParaRPr>
+                    </a:p>
+                  </a:txBody>
+                  <a:tcPr marL="54864" marR="54864" marT="18288" marB="18288" anchor="ctr">
+                    <a:lnL w="0" cap="flat" cmpd="sng" algn="ctr">
+                      <a:noFill/>
+                    </a:lnL>
+                    <a:lnR w="0" cap="flat" cmpd="sng" algn="ctr">
+                      <a:noFill/>
+                    </a:lnR>
+                    <a:lnT w="0" cap="flat" cmpd="sng" algn="ctr">
+                      <a:noFill/>
+                    </a:lnT>
+                    <a:lnB w="9525" cap="flat" cmpd="sng" algn="ctr">
+                      <a:solidFill>
+                        <a:srgbClr val="BFBFBF"/>
+                      </a:solidFill>
+                      <a:prstDash val="solid"/>
+                      <a:round/>
+                      <a:headEnd type="none" w="med" len="med"/>
+                      <a:tailEnd type="none" w="med" len="med"/>
+                    </a:lnB>
+                    <a:solidFill>
+                      <a:srgbClr val="FFFFFF"/>
+                    </a:solidFill>
+                  </a:tcPr>
+                </a:tc>
+                <a:tc>
+                  <a:txBody>
+                    <a:bodyPr/>
+                    <a:lstStyle/>
+                    <a:p>
+                      <a:pPr algn="l" indent="0" marL="0">
+                        <a:buNone/>
+                      </a:pPr>
+                      <a:r>
+                        <a:rPr lang="en-US" sz="850" dirty="0">
+                          <a:solidFill>
+                            <a:srgbClr val="1A1A1A"/>
+                          </a:solidFill>
+                          <a:latin typeface="Meiryo" pitchFamily="34" charset="0"/>
+                          <a:ea typeface="Meiryo" pitchFamily="34" charset="-122"/>
+                          <a:cs typeface="Meiryo" pitchFamily="34" charset="-120"/>
+                        </a:rPr>
+                        <a:t>0社：撤退か方向転換</a:t>
+                      </a:r>
+                      <a:endParaRPr lang="en-US" sz="850" dirty="0">
+                        <a:latin typeface="Meiryo" charset="0"/>
+                        <a:ea typeface="Meiryo" charset="0"/>
+                        <a:cs typeface="Meiryo" charset="0"/>
+                      </a:endParaRPr>
+                    </a:p>
+                  </a:txBody>
+                  <a:tcPr marL="54864" marR="54864" marT="18288" marB="18288" anchor="ctr">
+                    <a:lnL w="0" cap="flat" cmpd="sng" algn="ctr">
+                      <a:noFill/>
+                    </a:lnL>
+                    <a:lnR w="0" cap="flat" cmpd="sng" algn="ctr">
+                      <a:noFill/>
+                    </a:lnR>
+                    <a:lnT w="0" cap="flat" cmpd="sng" algn="ctr">
+                      <a:noFill/>
+                    </a:lnT>
+                    <a:lnB w="9525" cap="flat" cmpd="sng" algn="ctr">
+                      <a:solidFill>
+                        <a:srgbClr val="BFBFBF"/>
+                      </a:solidFill>
+                      <a:prstDash val="solid"/>
+                      <a:round/>
+                      <a:headEnd type="none" w="med" len="med"/>
+                      <a:tailEnd type="none" w="med" len="med"/>
+                    </a:lnB>
+                    <a:solidFill>
+                      <a:srgbClr val="FFFFFF"/>
+                    </a:solidFill>
+                  </a:tcPr>
+                </a:tc>
+              </a:tr>
+              <a:tr h="228600">
+                <a:tc>
+                  <a:txBody>
+                    <a:bodyPr/>
+                    <a:lstStyle/>
+                    <a:p>
+                      <a:pPr algn="l" indent="0" marL="0">
+                        <a:buNone/>
+                      </a:pPr>
+                      <a:r>
+                        <a:rPr lang="en-US" sz="850" dirty="0">
+                          <a:solidFill>
+                            <a:srgbClr val="1A1A1A"/>
+                          </a:solidFill>
+                          <a:latin typeface="Meiryo" pitchFamily="34" charset="0"/>
+                          <a:ea typeface="Meiryo" pitchFamily="34" charset="-122"/>
+                          <a:cs typeface="Meiryo" pitchFamily="34" charset="-120"/>
+                        </a:rPr>
+                        <a:t>2年目末</a:t>
+                      </a:r>
+                      <a:endParaRPr lang="en-US" sz="850" dirty="0">
+                        <a:latin typeface="Meiryo" charset="0"/>
+                        <a:ea typeface="Meiryo" charset="0"/>
+                        <a:cs typeface="Meiryo" charset="0"/>
+                      </a:endParaRPr>
+                    </a:p>
+                  </a:txBody>
+                  <a:tcPr marL="54864" marR="54864" marT="18288" marB="18288" anchor="ctr">
+                    <a:lnL w="0" cap="flat" cmpd="sng" algn="ctr">
+                      <a:noFill/>
+                    </a:lnL>
+                    <a:lnR w="0" cap="flat" cmpd="sng" algn="ctr">
+                      <a:noFill/>
+                    </a:lnR>
+                    <a:lnT w="0" cap="flat" cmpd="sng" algn="ctr">
+                      <a:noFill/>
+                    </a:lnT>
+                    <a:lnB w="9525" cap="flat" cmpd="sng" algn="ctr">
+                      <a:solidFill>
+                        <a:srgbClr val="BFBFBF"/>
+                      </a:solidFill>
+                      <a:prstDash val="solid"/>
+                      <a:round/>
+                      <a:headEnd type="none" w="med" len="med"/>
+                      <a:tailEnd type="none" w="med" len="med"/>
+                    </a:lnB>
+                    <a:solidFill>
+                      <a:srgbClr val="FFFFFF"/>
+                    </a:solidFill>
+                  </a:tcPr>
+                </a:tc>
+                <a:tc>
+                  <a:txBody>
+                    <a:bodyPr/>
+                    <a:lstStyle/>
+                    <a:p>
+                      <a:pPr algn="l" indent="0" marL="0">
+                        <a:buNone/>
+                      </a:pPr>
+                      <a:r>
+                        <a:rPr lang="en-US" sz="850" dirty="0">
+                          <a:solidFill>
+                            <a:srgbClr val="1A1A1A"/>
+                          </a:solidFill>
+                          <a:latin typeface="Meiryo" pitchFamily="34" charset="0"/>
+                          <a:ea typeface="Meiryo" pitchFamily="34" charset="-122"/>
+                          <a:cs typeface="Meiryo" pitchFamily="34" charset="-120"/>
+                        </a:rPr>
+                        <a:t>新規拠点・1拠点の台数</a:t>
+                      </a:r>
+                      <a:endParaRPr lang="en-US" sz="850" dirty="0">
+                        <a:latin typeface="Meiryo" charset="0"/>
+                        <a:ea typeface="Meiryo" charset="0"/>
+                        <a:cs typeface="Meiryo" charset="0"/>
+                      </a:endParaRPr>
+                    </a:p>
+                  </a:txBody>
+                  <a:tcPr marL="54864" marR="54864" marT="18288" marB="18288" anchor="ctr">
+                    <a:lnL w="0" cap="flat" cmpd="sng" algn="ctr">
+                      <a:noFill/>
+                    </a:lnL>
+                    <a:lnR w="0" cap="flat" cmpd="sng" algn="ctr">
+                      <a:noFill/>
+                    </a:lnR>
+                    <a:lnT w="0" cap="flat" cmpd="sng" algn="ctr">
+                      <a:noFill/>
+                    </a:lnT>
+                    <a:lnB w="9525" cap="flat" cmpd="sng" algn="ctr">
+                      <a:solidFill>
+                        <a:srgbClr val="BFBFBF"/>
+                      </a:solidFill>
+                      <a:prstDash val="solid"/>
+                      <a:round/>
+                      <a:headEnd type="none" w="med" len="med"/>
+                      <a:tailEnd type="none" w="med" len="med"/>
+                    </a:lnB>
+                    <a:solidFill>
+                      <a:srgbClr val="FFFFFF"/>
+                    </a:solidFill>
+                  </a:tcPr>
+                </a:tc>
+                <a:tc>
+                  <a:txBody>
+                    <a:bodyPr/>
+                    <a:lstStyle/>
+                    <a:p>
+                      <a:pPr algn="l" indent="0" marL="0">
+                        <a:buNone/>
+                      </a:pPr>
+                      <a:r>
+                        <a:rPr lang="en-US" sz="850" dirty="0">
+                          <a:solidFill>
+                            <a:srgbClr val="1A1A1A"/>
+                          </a:solidFill>
+                          <a:latin typeface="Meiryo" pitchFamily="34" charset="0"/>
+                          <a:ea typeface="Meiryo" pitchFamily="34" charset="-122"/>
+                          <a:cs typeface="Meiryo" pitchFamily="34" charset="-120"/>
+                        </a:rPr>
+                        <a:t>5拠点以上・平均12台</a:t>
+                      </a:r>
+                      <a:endParaRPr lang="en-US" sz="850" dirty="0">
+                        <a:latin typeface="Meiryo" charset="0"/>
+                        <a:ea typeface="Meiryo" charset="0"/>
+                        <a:cs typeface="Meiryo" charset="0"/>
+                      </a:endParaRPr>
+                    </a:p>
+                  </a:txBody>
+                  <a:tcPr marL="54864" marR="54864" marT="18288" marB="18288" anchor="ctr">
+                    <a:lnL w="0" cap="flat" cmpd="sng" algn="ctr">
+                      <a:noFill/>
+                    </a:lnL>
+                    <a:lnR w="0" cap="flat" cmpd="sng" algn="ctr">
+                      <a:noFill/>
+                    </a:lnR>
+                    <a:lnT w="0" cap="flat" cmpd="sng" algn="ctr">
+                      <a:noFill/>
+                    </a:lnT>
+                    <a:lnB w="9525" cap="flat" cmpd="sng" algn="ctr">
+                      <a:solidFill>
+                        <a:srgbClr val="BFBFBF"/>
+                      </a:solidFill>
+                      <a:prstDash val="solid"/>
+                      <a:round/>
+                      <a:headEnd type="none" w="med" len="med"/>
+                      <a:tailEnd type="none" w="med" len="med"/>
+                    </a:lnB>
+                    <a:solidFill>
+                      <a:srgbClr val="FFFFFF"/>
+                    </a:solidFill>
+                  </a:tcPr>
+                </a:tc>
+                <a:tc>
+                  <a:txBody>
+                    <a:bodyPr/>
+                    <a:lstStyle/>
+                    <a:p>
+                      <a:pPr algn="l" indent="0" marL="0">
+                        <a:buNone/>
+                      </a:pPr>
+                      <a:r>
+                        <a:rPr lang="en-US" sz="850" dirty="0">
+                          <a:solidFill>
+                            <a:srgbClr val="1A1A1A"/>
+                          </a:solidFill>
+                          <a:latin typeface="Meiryo" pitchFamily="34" charset="0"/>
+                          <a:ea typeface="Meiryo" pitchFamily="34" charset="-122"/>
+                          <a:cs typeface="Meiryo" pitchFamily="34" charset="-120"/>
+                        </a:rPr>
+                        <a:t>5拠点未満：採用を止める</a:t>
+                      </a:r>
+                      <a:endParaRPr lang="en-US" sz="850" dirty="0">
+                        <a:latin typeface="Meiryo" charset="0"/>
+                        <a:ea typeface="Meiryo" charset="0"/>
+                        <a:cs typeface="Meiryo" charset="0"/>
+                      </a:endParaRPr>
+                    </a:p>
+                  </a:txBody>
+                  <a:tcPr marL="54864" marR="54864" marT="18288" marB="18288" anchor="ctr">
+                    <a:lnL w="0" cap="flat" cmpd="sng" algn="ctr">
+                      <a:noFill/>
+                    </a:lnL>
+                    <a:lnR w="0" cap="flat" cmpd="sng" algn="ctr">
+                      <a:noFill/>
+                    </a:lnR>
+                    <a:lnT w="0" cap="flat" cmpd="sng" algn="ctr">
+                      <a:noFill/>
+                    </a:lnT>
+                    <a:lnB w="9525" cap="flat" cmpd="sng" algn="ctr">
+                      <a:solidFill>
+                        <a:srgbClr val="BFBFBF"/>
+                      </a:solidFill>
+                      <a:prstDash val="solid"/>
+                      <a:round/>
+                      <a:headEnd type="none" w="med" len="med"/>
+                      <a:tailEnd type="none" w="med" len="med"/>
+                    </a:lnB>
+                    <a:solidFill>
+                      <a:srgbClr val="FFFFFF"/>
+                    </a:solidFill>
+                  </a:tcPr>
+                </a:tc>
+                <a:tc>
+                  <a:txBody>
+                    <a:bodyPr/>
+                    <a:lstStyle/>
+                    <a:p>
+                      <a:pPr algn="l" indent="0" marL="0">
+                        <a:buNone/>
+                      </a:pPr>
+                      <a:r>
+                        <a:rPr lang="en-US" sz="850" dirty="0">
+                          <a:solidFill>
+                            <a:srgbClr val="1A1A1A"/>
+                          </a:solidFill>
+                          <a:latin typeface="Meiryo" pitchFamily="34" charset="0"/>
+                          <a:ea typeface="Meiryo" pitchFamily="34" charset="-122"/>
+                          <a:cs typeface="Meiryo" pitchFamily="34" charset="-120"/>
+                        </a:rPr>
+                        <a:t>─</a:t>
+                      </a:r>
+                      <a:endParaRPr lang="en-US" sz="850" dirty="0">
+                        <a:latin typeface="Meiryo" charset="0"/>
+                        <a:ea typeface="Meiryo" charset="0"/>
+                        <a:cs typeface="Meiryo" charset="0"/>
+                      </a:endParaRPr>
+                    </a:p>
+                  </a:txBody>
+                  <a:tcPr marL="54864" marR="54864" marT="18288" marB="18288" anchor="ctr">
+                    <a:lnL w="0" cap="flat" cmpd="sng" algn="ctr">
+                      <a:noFill/>
+                    </a:lnL>
+                    <a:lnR w="0" cap="flat" cmpd="sng" algn="ctr">
+                      <a:noFill/>
+                    </a:lnR>
+                    <a:lnT w="0" cap="flat" cmpd="sng" algn="ctr">
+                      <a:noFill/>
+                    </a:lnT>
+                    <a:lnB w="9525" cap="flat" cmpd="sng" algn="ctr">
+                      <a:solidFill>
+                        <a:srgbClr val="BFBFBF"/>
+                      </a:solidFill>
+                      <a:prstDash val="solid"/>
+                      <a:round/>
+                      <a:headEnd type="none" w="med" len="med"/>
+                      <a:tailEnd type="none" w="med" len="med"/>
+                    </a:lnB>
+                    <a:solidFill>
+                      <a:srgbClr val="FFFFFF"/>
+                    </a:solidFill>
+                  </a:tcPr>
+                </a:tc>
+              </a:tr>
+              <a:tr h="228600">
+                <a:tc>
+                  <a:txBody>
+                    <a:bodyPr/>
+                    <a:lstStyle/>
+                    <a:p>
+                      <a:pPr algn="l" indent="0" marL="0">
+                        <a:buNone/>
+                      </a:pPr>
+                      <a:r>
+                        <a:rPr lang="en-US" sz="850" dirty="0">
+                          <a:solidFill>
+                            <a:srgbClr val="1A1A1A"/>
+                          </a:solidFill>
+                          <a:latin typeface="Meiryo" pitchFamily="34" charset="0"/>
+                          <a:ea typeface="Meiryo" pitchFamily="34" charset="-122"/>
+                          <a:cs typeface="Meiryo" pitchFamily="34" charset="-120"/>
+                        </a:rPr>
+                        <a:t>3年目</a:t>
+                      </a:r>
+                      <a:endParaRPr lang="en-US" sz="850" dirty="0">
+                        <a:latin typeface="Meiryo" charset="0"/>
+                        <a:ea typeface="Meiryo" charset="0"/>
+                        <a:cs typeface="Meiryo" charset="0"/>
+                      </a:endParaRPr>
+                    </a:p>
+                  </a:txBody>
+                  <a:tcPr marL="54864" marR="54864" marT="18288" marB="18288" anchor="ctr">
+                    <a:lnL w="0" cap="flat" cmpd="sng" algn="ctr">
+                      <a:noFill/>
+                    </a:lnL>
+                    <a:lnR w="0" cap="flat" cmpd="sng" algn="ctr">
+                      <a:noFill/>
+                    </a:lnR>
+                    <a:lnT w="0" cap="flat" cmpd="sng" algn="ctr">
+                      <a:noFill/>
+                    </a:lnT>
+                    <a:lnB w="9525" cap="flat" cmpd="sng" algn="ctr">
+                      <a:solidFill>
+                        <a:srgbClr val="BFBFBF"/>
+                      </a:solidFill>
+                      <a:prstDash val="solid"/>
+                      <a:round/>
+                      <a:headEnd type="none" w="med" len="med"/>
+                      <a:tailEnd type="none" w="med" len="med"/>
+                    </a:lnB>
+                    <a:solidFill>
+                      <a:srgbClr val="FFFFFF"/>
+                    </a:solidFill>
+                  </a:tcPr>
+                </a:tc>
+                <a:tc>
+                  <a:txBody>
+                    <a:bodyPr/>
+                    <a:lstStyle/>
+                    <a:p>
+                      <a:pPr algn="l" indent="0" marL="0">
+                        <a:buNone/>
+                      </a:pPr>
+                      <a:r>
+                        <a:rPr lang="en-US" sz="850" dirty="0">
+                          <a:solidFill>
+                            <a:srgbClr val="1A1A1A"/>
+                          </a:solidFill>
+                          <a:latin typeface="Meiryo" pitchFamily="34" charset="0"/>
+                          <a:ea typeface="Meiryo" pitchFamily="34" charset="-122"/>
+                          <a:cs typeface="Meiryo" pitchFamily="34" charset="-120"/>
+                        </a:rPr>
+                        <a:t>シリーズAの交渉</a:t>
+                      </a:r>
+                      <a:endParaRPr lang="en-US" sz="850" dirty="0">
+                        <a:latin typeface="Meiryo" charset="0"/>
+                        <a:ea typeface="Meiryo" charset="0"/>
+                        <a:cs typeface="Meiryo" charset="0"/>
+                      </a:endParaRPr>
+                    </a:p>
+                  </a:txBody>
+                  <a:tcPr marL="54864" marR="54864" marT="18288" marB="18288" anchor="ctr">
+                    <a:lnL w="0" cap="flat" cmpd="sng" algn="ctr">
+                      <a:noFill/>
+                    </a:lnL>
+                    <a:lnR w="0" cap="flat" cmpd="sng" algn="ctr">
+                      <a:noFill/>
+                    </a:lnR>
+                    <a:lnT w="0" cap="flat" cmpd="sng" algn="ctr">
+                      <a:noFill/>
+                    </a:lnT>
+                    <a:lnB w="9525" cap="flat" cmpd="sng" algn="ctr">
+                      <a:solidFill>
+                        <a:srgbClr val="BFBFBF"/>
+                      </a:solidFill>
+                      <a:prstDash val="solid"/>
+                      <a:round/>
+                      <a:headEnd type="none" w="med" len="med"/>
+                      <a:tailEnd type="none" w="med" len="med"/>
+                    </a:lnB>
+                    <a:solidFill>
+                      <a:srgbClr val="FFFFFF"/>
+                    </a:solidFill>
+                  </a:tcPr>
+                </a:tc>
+                <a:tc>
+                  <a:txBody>
+                    <a:bodyPr/>
+                    <a:lstStyle/>
+                    <a:p>
+                      <a:pPr algn="l" indent="0" marL="0">
+                        <a:buNone/>
+                      </a:pPr>
+                      <a:r>
+                        <a:rPr lang="en-US" sz="850" dirty="0">
+                          <a:solidFill>
+                            <a:srgbClr val="1A1A1A"/>
+                          </a:solidFill>
+                          <a:latin typeface="Meiryo" pitchFamily="34" charset="0"/>
+                          <a:ea typeface="Meiryo" pitchFamily="34" charset="-122"/>
+                          <a:cs typeface="Meiryo" pitchFamily="34" charset="-120"/>
+                        </a:rPr>
+                        <a:t>継続率90%以上</a:t>
+                      </a:r>
+                      <a:endParaRPr lang="en-US" sz="850" dirty="0">
+                        <a:latin typeface="Meiryo" charset="0"/>
+                        <a:ea typeface="Meiryo" charset="0"/>
+                        <a:cs typeface="Meiryo" charset="0"/>
+                      </a:endParaRPr>
+                    </a:p>
+                  </a:txBody>
+                  <a:tcPr marL="54864" marR="54864" marT="18288" marB="18288" anchor="ctr">
+                    <a:lnL w="0" cap="flat" cmpd="sng" algn="ctr">
+                      <a:noFill/>
+                    </a:lnL>
+                    <a:lnR w="0" cap="flat" cmpd="sng" algn="ctr">
+                      <a:noFill/>
+                    </a:lnR>
+                    <a:lnT w="0" cap="flat" cmpd="sng" algn="ctr">
+                      <a:noFill/>
+                    </a:lnT>
+                    <a:lnB w="9525" cap="flat" cmpd="sng" algn="ctr">
+                      <a:solidFill>
+                        <a:srgbClr val="BFBFBF"/>
+                      </a:solidFill>
+                      <a:prstDash val="solid"/>
+                      <a:round/>
+                      <a:headEnd type="none" w="med" len="med"/>
+                      <a:tailEnd type="none" w="med" len="med"/>
+                    </a:lnB>
+                    <a:solidFill>
+                      <a:srgbClr val="FFFFFF"/>
+                    </a:solidFill>
+                  </a:tcPr>
+                </a:tc>
+                <a:tc>
+                  <a:txBody>
+                    <a:bodyPr/>
+                    <a:lstStyle/>
+                    <a:p>
+                      <a:pPr algn="l" indent="0" marL="0">
+                        <a:buNone/>
+                      </a:pPr>
+                      <a:r>
+                        <a:rPr lang="en-US" sz="850" dirty="0">
+                          <a:solidFill>
+                            <a:srgbClr val="1A1A1A"/>
+                          </a:solidFill>
+                          <a:latin typeface="Meiryo" pitchFamily="34" charset="0"/>
+                          <a:ea typeface="Meiryo" pitchFamily="34" charset="-122"/>
+                          <a:cs typeface="Meiryo" pitchFamily="34" charset="-120"/>
+                        </a:rPr>
+                        <a:t>未達：調達額と採用を絞る</a:t>
+                      </a:r>
+                      <a:endParaRPr lang="en-US" sz="850" dirty="0">
+                        <a:latin typeface="Meiryo" charset="0"/>
+                        <a:ea typeface="Meiryo" charset="0"/>
+                        <a:cs typeface="Meiryo" charset="0"/>
+                      </a:endParaRPr>
+                    </a:p>
+                  </a:txBody>
+                  <a:tcPr marL="54864" marR="54864" marT="18288" marB="18288" anchor="ctr">
+                    <a:lnL w="0" cap="flat" cmpd="sng" algn="ctr">
+                      <a:noFill/>
+                    </a:lnL>
+                    <a:lnR w="0" cap="flat" cmpd="sng" algn="ctr">
+                      <a:noFill/>
+                    </a:lnR>
+                    <a:lnT w="0" cap="flat" cmpd="sng" algn="ctr">
+                      <a:noFill/>
+                    </a:lnT>
+                    <a:lnB w="9525" cap="flat" cmpd="sng" algn="ctr">
+                      <a:solidFill>
+                        <a:srgbClr val="BFBFBF"/>
+                      </a:solidFill>
+                      <a:prstDash val="solid"/>
+                      <a:round/>
+                      <a:headEnd type="none" w="med" len="med"/>
+                      <a:tailEnd type="none" w="med" len="med"/>
+                    </a:lnB>
+                    <a:solidFill>
+                      <a:srgbClr val="FFFFFF"/>
+                    </a:solidFill>
+                  </a:tcPr>
+                </a:tc>
+                <a:tc>
+                  <a:txBody>
+                    <a:bodyPr/>
+                    <a:lstStyle/>
+                    <a:p>
+                      <a:pPr algn="l" indent="0" marL="0">
+                        <a:buNone/>
+                      </a:pPr>
+                      <a:r>
+                        <a:rPr lang="en-US" sz="850" dirty="0">
+                          <a:solidFill>
+                            <a:srgbClr val="1A1A1A"/>
+                          </a:solidFill>
+                          <a:latin typeface="Meiryo" pitchFamily="34" charset="0"/>
+                          <a:ea typeface="Meiryo" pitchFamily="34" charset="-122"/>
+                          <a:cs typeface="Meiryo" pitchFamily="34" charset="-120"/>
+                        </a:rPr>
+                        <a:t>─</a:t>
+                      </a:r>
+                      <a:endParaRPr lang="en-US" sz="850" dirty="0">
+                        <a:latin typeface="Meiryo" charset="0"/>
+                        <a:ea typeface="Meiryo" charset="0"/>
+                        <a:cs typeface="Meiryo" charset="0"/>
+                      </a:endParaRPr>
+                    </a:p>
+                  </a:txBody>
+                  <a:tcPr marL="54864" marR="54864" marT="18288" marB="18288" anchor="ctr">
+                    <a:lnL w="0" cap="flat" cmpd="sng" algn="ctr">
+                      <a:noFill/>
+                    </a:lnL>
+                    <a:lnR w="0" cap="flat" cmpd="sng" algn="ctr">
+                      <a:noFill/>
+                    </a:lnR>
+                    <a:lnT w="0" cap="flat" cmpd="sng" algn="ctr">
+                      <a:noFill/>
+                    </a:lnT>
+                    <a:lnB w="9525" cap="flat" cmpd="sng" algn="ctr">
+                      <a:solidFill>
+                        <a:srgbClr val="BFBFBF"/>
+                      </a:solidFill>
+                      <a:prstDash val="solid"/>
+                      <a:round/>
+                      <a:headEnd type="none" w="med" len="med"/>
+                      <a:tailEnd type="none" w="med" len="med"/>
+                    </a:lnB>
+                    <a:solidFill>
+                      <a:srgbClr val="FFFFFF"/>
+                    </a:solidFill>
+                  </a:tcPr>
+                </a:tc>
+              </a:tr>
+            </a:tbl>
+          </a:graphicData>
+        </a:graphic>
+      </p:graphicFrame>
+      <p:sp>
+        <p:nvSpPr>
+          <p:cNvPr id="11" name="Text 6"/>
+          <p:cNvSpPr txBox="1"/>
+          <p:nvPr/>
+        </p:nvSpPr>
+        <p:spPr>
+          <a:xfrm>
+            <a:off x="365760" y="4553712"/>
+            <a:ext cx="8412480" cy="219456"/>
+          </a:xfrm>
+          <a:prstGeom prst="rect">
+            <a:avLst/>
+          </a:prstGeom>
+          <a:noFill/>
+          <a:ln/>
+        </p:spPr>
+        <p:txBody>
+          <a:bodyPr wrap="square" lIns="0" tIns="0" rIns="0" bIns="0" rtlCol="0" anchor="t"/>
+          <a:lstStyle/>
           <a:p>
             <a:pPr algn="l" indent="0" marL="0">
               <a:lnSpc>
                 <a:spcPct val="115000"/>
               </a:lnSpc>
-              <a:spcAft>
-                <a:spcPts val="100"/>
-              </a:spcAft>
-              <a:buNone/>
-            </a:pPr>
-            <a:r>
-              <a:rPr lang="en-US" sz="900" dirty="0">
-                <a:solidFill>
-                  <a:srgbClr val="FFFFFF"/>
-                </a:solidFill>
-                <a:latin typeface="Meiryo" pitchFamily="34" charset="0"/>
-                <a:ea typeface="Meiryo" pitchFamily="34" charset="-122"/>
-                <a:cs typeface="Meiryo" pitchFamily="34" charset="-120"/>
-              </a:rPr>
-              <a:t>採用を遅らせれば、計画の6割で黒字、5割を割ると黒字にならない。</a:t>
-            </a:r>
-            <a:endParaRPr lang="en-US" sz="900" dirty="0"/>
-          </a:p>
-          <a:p>
-            <a:pPr algn="l" indent="0" marL="0">
-              <a:lnSpc>
-                <a:spcPct val="115000"/>
-              </a:lnSpc>
-              <a:spcAft>
-                <a:spcPts val="100"/>
-              </a:spcAft>
-              <a:buNone/>
-            </a:pPr>
-            <a:r>
-              <a:rPr lang="en-US" sz="900" dirty="0">
-                <a:solidFill>
-                  <a:srgbClr val="FFFFFF"/>
-                </a:solidFill>
-                <a:latin typeface="Meiryo" pitchFamily="34" charset="0"/>
-                <a:ea typeface="Meiryo" pitchFamily="34" charset="-122"/>
-                <a:cs typeface="Meiryo" pitchFamily="34" charset="-120"/>
-              </a:rPr>
-              <a:t>遅れているのに計画どおり採用すると、7割でも現金が尽きる。</a:t>
-            </a:r>
-            <a:endParaRPr lang="en-US" sz="900" dirty="0"/>
-          </a:p>
-          <a:p>
-            <a:pPr algn="l" indent="0" marL="0">
-              <a:lnSpc>
-                <a:spcPct val="115000"/>
-              </a:lnSpc>
-              <a:spcAft>
-                <a:spcPts val="100"/>
-              </a:spcAft>
-              <a:buNone/>
-            </a:pPr>
-            <a:r>
-              <a:rPr lang="en-US" sz="900" dirty="0">
-                <a:solidFill>
-                  <a:srgbClr val="FFFFFF"/>
-                </a:solidFill>
-                <a:latin typeface="Meiryo" pitchFamily="34" charset="0"/>
-                <a:ea typeface="Meiryo" pitchFamily="34" charset="-122"/>
-                <a:cs typeface="Meiryo" pitchFamily="34" charset="-120"/>
-              </a:rPr>
-              <a:t>採用は「期末で社員1人3拠点」の見込みが立ってから</a:t>
-            </a:r>
-            <a:endParaRPr lang="en-US" sz="900" dirty="0"/>
-          </a:p>
-        </p:txBody>
-      </p:sp>
-      <p:sp>
-        <p:nvSpPr>
-          <p:cNvPr id="11" name="Text 7"/>
-          <p:cNvSpPr txBox="1"/>
-          <p:nvPr/>
-        </p:nvSpPr>
-        <p:spPr>
-          <a:xfrm>
-            <a:off x="5486400" y="1051560"/>
-            <a:ext cx="3291840" cy="237744"/>
-          </a:xfrm>
-          <a:prstGeom prst="rect">
-            <a:avLst/>
-          </a:prstGeom>
-          <a:noFill/>
-          <a:ln/>
-        </p:spPr>
-        <p:txBody>
-          <a:bodyPr wrap="square" lIns="0" tIns="0" rIns="0" bIns="0" rtlCol="0" anchor="t"/>
-          <a:lstStyle/>
-          <a:p>
-            <a:pPr algn="l" indent="0" marL="0">
-              <a:lnSpc>
-                <a:spcPct val="115000"/>
-              </a:lnSpc>
-              <a:buNone/>
-            </a:pPr>
-            <a:r>
-              <a:rPr lang="en-US" sz="1050" b="1" dirty="0">
-                <a:solidFill>
-                  <a:srgbClr val="1A1A1A"/>
-                </a:solidFill>
-                <a:latin typeface="Meiryo" pitchFamily="34" charset="0"/>
-                <a:ea typeface="Meiryo" pitchFamily="34" charset="-122"/>
-                <a:cs typeface="Meiryo" pitchFamily="34" charset="-120"/>
-              </a:rPr>
-              <a:t>進む・直す・止まるの線</a:t>
-            </a:r>
-            <a:endParaRPr lang="en-US" sz="1050" dirty="0"/>
-          </a:p>
-        </p:txBody>
-      </p:sp>
-      <p:sp>
-        <p:nvSpPr>
-          <p:cNvPr id="12" name="Shape 8"/>
-          <p:cNvSpPr/>
-          <p:nvPr/>
-        </p:nvSpPr>
-        <p:spPr>
-          <a:xfrm>
-            <a:off x="5486400" y="1344168"/>
-            <a:ext cx="3291840" cy="1371600"/>
-          </a:xfrm>
-          <a:prstGeom prst="rect">
-            <a:avLst/>
-          </a:prstGeom>
-          <a:solidFill>
-            <a:srgbClr val="FFFFFF"/>
-          </a:solidFill>
-          <a:ln w="12700">
-            <a:solidFill>
-              <a:srgbClr val="1A1A1A"/>
-            </a:solidFill>
-            <a:prstDash val="solid"/>
-          </a:ln>
-        </p:spPr>
-      </p:sp>
-      <p:sp>
-        <p:nvSpPr>
-          <p:cNvPr id="13" name="Text 9"/>
-          <p:cNvSpPr txBox="1"/>
-          <p:nvPr/>
-        </p:nvSpPr>
-        <p:spPr>
-          <a:xfrm>
-            <a:off x="5596128" y="1380744"/>
-            <a:ext cx="3072384" cy="256032"/>
-          </a:xfrm>
-          <a:prstGeom prst="rect">
-            <a:avLst/>
-          </a:prstGeom>
-          <a:noFill/>
-          <a:ln/>
-        </p:spPr>
-        <p:txBody>
-          <a:bodyPr wrap="square" lIns="0" tIns="0" rIns="0" bIns="0" rtlCol="0" anchor="ctr"/>
-          <a:lstStyle/>
-          <a:p>
-            <a:pPr algn="l" indent="0" marL="0">
-              <a:lnSpc>
-                <a:spcPct val="115000"/>
-              </a:lnSpc>
-              <a:buNone/>
-            </a:pPr>
-            <a:r>
-              <a:rPr lang="en-US" sz="950" b="1" dirty="0">
-                <a:solidFill>
-                  <a:srgbClr val="B8692E"/>
-                </a:solidFill>
-                <a:latin typeface="Meiryo" pitchFamily="34" charset="0"/>
-                <a:ea typeface="Meiryo" pitchFamily="34" charset="-122"/>
-                <a:cs typeface="Meiryo" pitchFamily="34" charset="-120"/>
-              </a:rPr>
-              <a:t>1年目末　</a:t>
-            </a:r>
-            <a:pPr algn="l" indent="0" marL="0">
-              <a:lnSpc>
-                <a:spcPct val="115000"/>
-              </a:lnSpc>
-              <a:buNone/>
-            </a:pPr>
-            <a:r>
-              <a:rPr lang="en-US" sz="950" b="1" dirty="0">
-                <a:solidFill>
-                  <a:srgbClr val="1A1A1A"/>
-                </a:solidFill>
-                <a:latin typeface="Meiryo" pitchFamily="34" charset="0"/>
-                <a:ea typeface="Meiryo" pitchFamily="34" charset="-122"/>
-                <a:cs typeface="Meiryo" pitchFamily="34" charset="-120"/>
-              </a:rPr>
-              <a:t>実証3社のうち本契約</a:t>
-            </a:r>
-            <a:endParaRPr lang="en-US" sz="950" dirty="0"/>
-          </a:p>
-        </p:txBody>
-      </p:sp>
-      <p:sp>
-        <p:nvSpPr>
-          <p:cNvPr id="14" name="Shape 10"/>
-          <p:cNvSpPr/>
-          <p:nvPr/>
-        </p:nvSpPr>
-        <p:spPr>
-          <a:xfrm>
-            <a:off x="5596128" y="1673352"/>
-            <a:ext cx="777240" cy="292608"/>
-          </a:xfrm>
-          <a:prstGeom prst="rect">
-            <a:avLst/>
-          </a:prstGeom>
-          <a:solidFill>
-            <a:srgbClr val="1A1A1A"/>
-          </a:solidFill>
-          <a:ln/>
-        </p:spPr>
-      </p:sp>
-      <p:sp>
-        <p:nvSpPr>
-          <p:cNvPr id="15" name="Text 11"/>
-          <p:cNvSpPr txBox="1"/>
-          <p:nvPr/>
-        </p:nvSpPr>
-        <p:spPr>
-          <a:xfrm>
-            <a:off x="5596128" y="1673352"/>
-            <a:ext cx="777240" cy="292608"/>
-          </a:xfrm>
-          <a:prstGeom prst="rect">
-            <a:avLst/>
-          </a:prstGeom>
-          <a:noFill/>
-          <a:ln/>
-        </p:spPr>
-        <p:txBody>
-          <a:bodyPr wrap="square" lIns="0" tIns="0" rIns="0" bIns="0" rtlCol="0" anchor="ctr"/>
-          <a:lstStyle/>
-          <a:p>
-            <a:pPr algn="ctr" indent="0" marL="0">
-              <a:lnSpc>
-                <a:spcPct val="115000"/>
-              </a:lnSpc>
-              <a:buNone/>
-            </a:pPr>
-            <a:r>
-              <a:rPr lang="en-US" sz="900" b="1" dirty="0">
-                <a:solidFill>
-                  <a:srgbClr val="FFFFFF"/>
-                </a:solidFill>
-                <a:latin typeface="Meiryo" pitchFamily="34" charset="0"/>
-                <a:ea typeface="Meiryo" pitchFamily="34" charset="-122"/>
-                <a:cs typeface="Meiryo" pitchFamily="34" charset="-120"/>
-              </a:rPr>
-              <a:t>2社以上</a:t>
-            </a:r>
-            <a:endParaRPr lang="en-US" sz="900" dirty="0"/>
-          </a:p>
-        </p:txBody>
-      </p:sp>
-      <p:sp>
-        <p:nvSpPr>
-          <p:cNvPr id="16" name="Text 12"/>
-          <p:cNvSpPr txBox="1"/>
-          <p:nvPr/>
-        </p:nvSpPr>
-        <p:spPr>
-          <a:xfrm>
-            <a:off x="6446520" y="1673352"/>
-            <a:ext cx="2240280" cy="292608"/>
-          </a:xfrm>
-          <a:prstGeom prst="rect">
-            <a:avLst/>
-          </a:prstGeom>
-          <a:noFill/>
-          <a:ln/>
-        </p:spPr>
-        <p:txBody>
-          <a:bodyPr wrap="square" lIns="0" tIns="0" rIns="0" bIns="0" rtlCol="0" anchor="ctr"/>
-          <a:lstStyle/>
-          <a:p>
-            <a:pPr algn="l" indent="0" marL="0">
-              <a:lnSpc>
-                <a:spcPct val="115000"/>
-              </a:lnSpc>
-              <a:buNone/>
-            </a:pPr>
-            <a:r>
-              <a:rPr lang="en-US" sz="950" dirty="0">
-                <a:solidFill>
-                  <a:srgbClr val="1A1A1A"/>
-                </a:solidFill>
-                <a:latin typeface="Meiryo" pitchFamily="34" charset="0"/>
-                <a:ea typeface="Meiryo" pitchFamily="34" charset="-122"/>
-                <a:cs typeface="Meiryo" pitchFamily="34" charset="-120"/>
-              </a:rPr>
-              <a:t>→ 進む</a:t>
-            </a:r>
-            <a:endParaRPr lang="en-US" sz="950" dirty="0"/>
-          </a:p>
-        </p:txBody>
-      </p:sp>
-      <p:sp>
-        <p:nvSpPr>
-          <p:cNvPr id="17" name="Shape 13"/>
-          <p:cNvSpPr/>
-          <p:nvPr/>
-        </p:nvSpPr>
-        <p:spPr>
-          <a:xfrm>
-            <a:off x="5596128" y="2020824"/>
-            <a:ext cx="777240" cy="292608"/>
-          </a:xfrm>
-          <a:prstGeom prst="rect">
-            <a:avLst/>
-          </a:prstGeom>
-          <a:solidFill>
-            <a:srgbClr val="4D4D4D"/>
-          </a:solidFill>
-          <a:ln/>
-        </p:spPr>
-      </p:sp>
-      <p:sp>
-        <p:nvSpPr>
-          <p:cNvPr id="18" name="Text 14"/>
-          <p:cNvSpPr txBox="1"/>
-          <p:nvPr/>
-        </p:nvSpPr>
-        <p:spPr>
-          <a:xfrm>
-            <a:off x="5596128" y="2020824"/>
-            <a:ext cx="777240" cy="292608"/>
-          </a:xfrm>
-          <a:prstGeom prst="rect">
-            <a:avLst/>
-          </a:prstGeom>
-          <a:noFill/>
-          <a:ln/>
-        </p:spPr>
-        <p:txBody>
-          <a:bodyPr wrap="square" lIns="0" tIns="0" rIns="0" bIns="0" rtlCol="0" anchor="ctr"/>
-          <a:lstStyle/>
-          <a:p>
-            <a:pPr algn="ctr" indent="0" marL="0">
-              <a:lnSpc>
-                <a:spcPct val="115000"/>
-              </a:lnSpc>
-              <a:buNone/>
-            </a:pPr>
-            <a:r>
-              <a:rPr lang="en-US" sz="900" b="1" dirty="0">
-                <a:solidFill>
-                  <a:srgbClr val="FFFFFF"/>
-                </a:solidFill>
-                <a:latin typeface="Meiryo" pitchFamily="34" charset="0"/>
-                <a:ea typeface="Meiryo" pitchFamily="34" charset="-122"/>
-                <a:cs typeface="Meiryo" pitchFamily="34" charset="-120"/>
-              </a:rPr>
-              <a:t>1社</a:t>
-            </a:r>
-            <a:endParaRPr lang="en-US" sz="900" dirty="0"/>
-          </a:p>
-        </p:txBody>
-      </p:sp>
-      <p:sp>
-        <p:nvSpPr>
-          <p:cNvPr id="19" name="Text 15"/>
-          <p:cNvSpPr txBox="1"/>
-          <p:nvPr/>
-        </p:nvSpPr>
-        <p:spPr>
-          <a:xfrm>
-            <a:off x="6446520" y="2020824"/>
-            <a:ext cx="2240280" cy="292608"/>
-          </a:xfrm>
-          <a:prstGeom prst="rect">
-            <a:avLst/>
-          </a:prstGeom>
-          <a:noFill/>
-          <a:ln/>
-        </p:spPr>
-        <p:txBody>
-          <a:bodyPr wrap="square" lIns="0" tIns="0" rIns="0" bIns="0" rtlCol="0" anchor="ctr"/>
-          <a:lstStyle/>
-          <a:p>
-            <a:pPr algn="l" indent="0" marL="0">
-              <a:lnSpc>
-                <a:spcPct val="115000"/>
-              </a:lnSpc>
-              <a:buNone/>
-            </a:pPr>
-            <a:r>
-              <a:rPr lang="en-US" sz="950" dirty="0">
-                <a:solidFill>
-                  <a:srgbClr val="1A1A1A"/>
-                </a:solidFill>
-                <a:latin typeface="Meiryo" pitchFamily="34" charset="0"/>
-                <a:ea typeface="Meiryo" pitchFamily="34" charset="-122"/>
-                <a:cs typeface="Meiryo" pitchFamily="34" charset="-120"/>
-              </a:rPr>
-              <a:t>→ 値段と顧客を見直す</a:t>
-            </a:r>
-            <a:endParaRPr lang="en-US" sz="950" dirty="0"/>
-          </a:p>
-        </p:txBody>
-      </p:sp>
-      <p:sp>
-        <p:nvSpPr>
-          <p:cNvPr id="20" name="Shape 16"/>
-          <p:cNvSpPr/>
-          <p:nvPr/>
-        </p:nvSpPr>
-        <p:spPr>
-          <a:xfrm>
-            <a:off x="5596128" y="2368296"/>
-            <a:ext cx="777240" cy="292608"/>
-          </a:xfrm>
-          <a:prstGeom prst="rect">
-            <a:avLst/>
-          </a:prstGeom>
-          <a:solidFill>
-            <a:srgbClr val="B8692E"/>
-          </a:solidFill>
-          <a:ln/>
-        </p:spPr>
-      </p:sp>
-      <p:sp>
-        <p:nvSpPr>
-          <p:cNvPr id="21" name="Text 17"/>
-          <p:cNvSpPr txBox="1"/>
-          <p:nvPr/>
-        </p:nvSpPr>
-        <p:spPr>
-          <a:xfrm>
-            <a:off x="5596128" y="2368296"/>
-            <a:ext cx="777240" cy="292608"/>
-          </a:xfrm>
-          <a:prstGeom prst="rect">
-            <a:avLst/>
-          </a:prstGeom>
-          <a:noFill/>
-          <a:ln/>
-        </p:spPr>
-        <p:txBody>
-          <a:bodyPr wrap="square" lIns="0" tIns="0" rIns="0" bIns="0" rtlCol="0" anchor="ctr"/>
-          <a:lstStyle/>
-          <a:p>
-            <a:pPr algn="ctr" indent="0" marL="0">
-              <a:lnSpc>
-                <a:spcPct val="115000"/>
-              </a:lnSpc>
-              <a:buNone/>
-            </a:pPr>
-            <a:r>
-              <a:rPr lang="en-US" sz="900" b="1" dirty="0">
-                <a:solidFill>
-                  <a:srgbClr val="FFFFFF"/>
-                </a:solidFill>
-                <a:latin typeface="Meiryo" pitchFamily="34" charset="0"/>
-                <a:ea typeface="Meiryo" pitchFamily="34" charset="-122"/>
-                <a:cs typeface="Meiryo" pitchFamily="34" charset="-120"/>
-              </a:rPr>
-              <a:t>0社</a:t>
-            </a:r>
-            <a:endParaRPr lang="en-US" sz="900" dirty="0"/>
-          </a:p>
-        </p:txBody>
-      </p:sp>
-      <p:sp>
-        <p:nvSpPr>
-          <p:cNvPr id="22" name="Text 18"/>
-          <p:cNvSpPr txBox="1"/>
-          <p:nvPr/>
-        </p:nvSpPr>
-        <p:spPr>
-          <a:xfrm>
-            <a:off x="6446520" y="2368296"/>
-            <a:ext cx="2240280" cy="292608"/>
-          </a:xfrm>
-          <a:prstGeom prst="rect">
-            <a:avLst/>
-          </a:prstGeom>
-          <a:noFill/>
-          <a:ln/>
-        </p:spPr>
-        <p:txBody>
-          <a:bodyPr wrap="square" lIns="0" tIns="0" rIns="0" bIns="0" rtlCol="0" anchor="ctr"/>
-          <a:lstStyle/>
-          <a:p>
-            <a:pPr algn="l" indent="0" marL="0">
-              <a:lnSpc>
-                <a:spcPct val="115000"/>
-              </a:lnSpc>
-              <a:buNone/>
-            </a:pPr>
-            <a:r>
-              <a:rPr lang="en-US" sz="950" dirty="0">
-                <a:solidFill>
-                  <a:srgbClr val="1A1A1A"/>
-                </a:solidFill>
-                <a:latin typeface="Meiryo" pitchFamily="34" charset="0"/>
-                <a:ea typeface="Meiryo" pitchFamily="34" charset="-122"/>
-                <a:cs typeface="Meiryo" pitchFamily="34" charset="-120"/>
-              </a:rPr>
-              <a:t>→ 撤退か方向転換</a:t>
-            </a:r>
-            <a:endParaRPr lang="en-US" sz="950" dirty="0"/>
-          </a:p>
-        </p:txBody>
-      </p:sp>
-      <p:sp>
-        <p:nvSpPr>
-          <p:cNvPr id="23" name="Shape 19"/>
-          <p:cNvSpPr/>
-          <p:nvPr/>
-        </p:nvSpPr>
-        <p:spPr>
-          <a:xfrm>
-            <a:off x="5486400" y="2825496"/>
-            <a:ext cx="3291840" cy="1024128"/>
-          </a:xfrm>
-          <a:prstGeom prst="rect">
-            <a:avLst/>
-          </a:prstGeom>
-          <a:solidFill>
-            <a:srgbClr val="FFFFFF"/>
-          </a:solidFill>
-          <a:ln w="12700">
-            <a:solidFill>
-              <a:srgbClr val="1A1A1A"/>
-            </a:solidFill>
-            <a:prstDash val="solid"/>
-          </a:ln>
-        </p:spPr>
-      </p:sp>
-      <p:sp>
-        <p:nvSpPr>
-          <p:cNvPr id="24" name="Text 20"/>
-          <p:cNvSpPr txBox="1"/>
-          <p:nvPr/>
-        </p:nvSpPr>
-        <p:spPr>
-          <a:xfrm>
-            <a:off x="5596128" y="2862072"/>
-            <a:ext cx="3072384" cy="256032"/>
-          </a:xfrm>
-          <a:prstGeom prst="rect">
-            <a:avLst/>
-          </a:prstGeom>
-          <a:noFill/>
-          <a:ln/>
-        </p:spPr>
-        <p:txBody>
-          <a:bodyPr wrap="square" lIns="0" tIns="0" rIns="0" bIns="0" rtlCol="0" anchor="ctr"/>
-          <a:lstStyle/>
-          <a:p>
-            <a:pPr algn="l" indent="0" marL="0">
-              <a:lnSpc>
-                <a:spcPct val="115000"/>
-              </a:lnSpc>
-              <a:buNone/>
-            </a:pPr>
-            <a:r>
-              <a:rPr lang="en-US" sz="950" b="1" dirty="0">
-                <a:solidFill>
-                  <a:srgbClr val="B8692E"/>
-                </a:solidFill>
-                <a:latin typeface="Meiryo" pitchFamily="34" charset="0"/>
-                <a:ea typeface="Meiryo" pitchFamily="34" charset="-122"/>
-                <a:cs typeface="Meiryo" pitchFamily="34" charset="-120"/>
-              </a:rPr>
-              <a:t>2年目末　</a:t>
-            </a:r>
-            <a:pPr algn="l" indent="0" marL="0">
-              <a:lnSpc>
-                <a:spcPct val="115000"/>
-              </a:lnSpc>
-              <a:buNone/>
-            </a:pPr>
-            <a:r>
-              <a:rPr lang="en-US" sz="950" b="1" dirty="0">
-                <a:solidFill>
-                  <a:srgbClr val="1A1A1A"/>
-                </a:solidFill>
-                <a:latin typeface="Meiryo" pitchFamily="34" charset="0"/>
-                <a:ea typeface="Meiryo" pitchFamily="34" charset="-122"/>
-                <a:cs typeface="Meiryo" pitchFamily="34" charset="-120"/>
-              </a:rPr>
-              <a:t>新規拠点</a:t>
-            </a:r>
-            <a:endParaRPr lang="en-US" sz="950" dirty="0"/>
-          </a:p>
-        </p:txBody>
-      </p:sp>
-      <p:sp>
-        <p:nvSpPr>
-          <p:cNvPr id="25" name="Shape 21"/>
-          <p:cNvSpPr/>
-          <p:nvPr/>
-        </p:nvSpPr>
-        <p:spPr>
-          <a:xfrm>
-            <a:off x="5596128" y="3154680"/>
-            <a:ext cx="777240" cy="292608"/>
-          </a:xfrm>
-          <a:prstGeom prst="rect">
-            <a:avLst/>
-          </a:prstGeom>
-          <a:solidFill>
-            <a:srgbClr val="1A1A1A"/>
-          </a:solidFill>
-          <a:ln/>
-        </p:spPr>
-      </p:sp>
-      <p:sp>
-        <p:nvSpPr>
-          <p:cNvPr id="26" name="Text 22"/>
-          <p:cNvSpPr txBox="1"/>
-          <p:nvPr/>
-        </p:nvSpPr>
-        <p:spPr>
-          <a:xfrm>
-            <a:off x="5596128" y="3154680"/>
-            <a:ext cx="777240" cy="292608"/>
-          </a:xfrm>
-          <a:prstGeom prst="rect">
-            <a:avLst/>
-          </a:prstGeom>
-          <a:noFill/>
-          <a:ln/>
-        </p:spPr>
-        <p:txBody>
-          <a:bodyPr wrap="square" lIns="0" tIns="0" rIns="0" bIns="0" rtlCol="0" anchor="ctr"/>
-          <a:lstStyle/>
-          <a:p>
-            <a:pPr algn="ctr" indent="0" marL="0">
-              <a:lnSpc>
-                <a:spcPct val="115000"/>
-              </a:lnSpc>
-              <a:buNone/>
-            </a:pPr>
-            <a:r>
-              <a:rPr lang="en-US" sz="900" b="1" dirty="0">
-                <a:solidFill>
-                  <a:srgbClr val="FFFFFF"/>
-                </a:solidFill>
-                <a:latin typeface="Meiryo" pitchFamily="34" charset="0"/>
-                <a:ea typeface="Meiryo" pitchFamily="34" charset="-122"/>
-                <a:cs typeface="Meiryo" pitchFamily="34" charset="-120"/>
-              </a:rPr>
-              <a:t>5以上</a:t>
-            </a:r>
-            <a:endParaRPr lang="en-US" sz="900" dirty="0"/>
-          </a:p>
-        </p:txBody>
-      </p:sp>
-      <p:sp>
-        <p:nvSpPr>
-          <p:cNvPr id="27" name="Text 23"/>
-          <p:cNvSpPr txBox="1"/>
-          <p:nvPr/>
-        </p:nvSpPr>
-        <p:spPr>
-          <a:xfrm>
-            <a:off x="6446520" y="3154680"/>
-            <a:ext cx="2240280" cy="292608"/>
-          </a:xfrm>
-          <a:prstGeom prst="rect">
-            <a:avLst/>
-          </a:prstGeom>
-          <a:noFill/>
-          <a:ln/>
-        </p:spPr>
-        <p:txBody>
-          <a:bodyPr wrap="square" lIns="0" tIns="0" rIns="0" bIns="0" rtlCol="0" anchor="ctr"/>
-          <a:lstStyle/>
-          <a:p>
-            <a:pPr algn="l" indent="0" marL="0">
-              <a:lnSpc>
-                <a:spcPct val="115000"/>
-              </a:lnSpc>
-              <a:buNone/>
-            </a:pPr>
-            <a:r>
-              <a:rPr lang="en-US" sz="950" dirty="0">
-                <a:solidFill>
-                  <a:srgbClr val="1A1A1A"/>
-                </a:solidFill>
-                <a:latin typeface="Meiryo" pitchFamily="34" charset="0"/>
-                <a:ea typeface="Meiryo" pitchFamily="34" charset="-122"/>
-                <a:cs typeface="Meiryo" pitchFamily="34" charset="-120"/>
-              </a:rPr>
-              <a:t>→ 計画どおり採用</a:t>
-            </a:r>
-            <a:endParaRPr lang="en-US" sz="950" dirty="0"/>
-          </a:p>
-        </p:txBody>
-      </p:sp>
-      <p:sp>
-        <p:nvSpPr>
-          <p:cNvPr id="28" name="Shape 24"/>
-          <p:cNvSpPr/>
-          <p:nvPr/>
-        </p:nvSpPr>
-        <p:spPr>
-          <a:xfrm>
-            <a:off x="5596128" y="3502152"/>
-            <a:ext cx="777240" cy="292608"/>
-          </a:xfrm>
-          <a:prstGeom prst="rect">
-            <a:avLst/>
-          </a:prstGeom>
-          <a:solidFill>
-            <a:srgbClr val="B8692E"/>
-          </a:solidFill>
-          <a:ln/>
-        </p:spPr>
-      </p:sp>
-      <p:sp>
-        <p:nvSpPr>
-          <p:cNvPr id="29" name="Text 25"/>
-          <p:cNvSpPr txBox="1"/>
-          <p:nvPr/>
-        </p:nvSpPr>
-        <p:spPr>
-          <a:xfrm>
-            <a:off x="5596128" y="3502152"/>
-            <a:ext cx="777240" cy="292608"/>
-          </a:xfrm>
-          <a:prstGeom prst="rect">
-            <a:avLst/>
-          </a:prstGeom>
-          <a:noFill/>
-          <a:ln/>
-        </p:spPr>
-        <p:txBody>
-          <a:bodyPr wrap="square" lIns="0" tIns="0" rIns="0" bIns="0" rtlCol="0" anchor="ctr"/>
-          <a:lstStyle/>
-          <a:p>
-            <a:pPr algn="ctr" indent="0" marL="0">
-              <a:lnSpc>
-                <a:spcPct val="115000"/>
-              </a:lnSpc>
-              <a:buNone/>
-            </a:pPr>
-            <a:r>
-              <a:rPr lang="en-US" sz="900" b="1" dirty="0">
-                <a:solidFill>
-                  <a:srgbClr val="FFFFFF"/>
-                </a:solidFill>
-                <a:latin typeface="Meiryo" pitchFamily="34" charset="0"/>
-                <a:ea typeface="Meiryo" pitchFamily="34" charset="-122"/>
-                <a:cs typeface="Meiryo" pitchFamily="34" charset="-120"/>
-              </a:rPr>
-              <a:t>5未満</a:t>
-            </a:r>
-            <a:endParaRPr lang="en-US" sz="900" dirty="0"/>
-          </a:p>
-        </p:txBody>
-      </p:sp>
-      <p:sp>
-        <p:nvSpPr>
-          <p:cNvPr id="30" name="Text 26"/>
-          <p:cNvSpPr txBox="1"/>
-          <p:nvPr/>
-        </p:nvSpPr>
-        <p:spPr>
-          <a:xfrm>
-            <a:off x="6446520" y="3502152"/>
-            <a:ext cx="2240280" cy="292608"/>
-          </a:xfrm>
-          <a:prstGeom prst="rect">
-            <a:avLst/>
-          </a:prstGeom>
-          <a:noFill/>
-          <a:ln/>
-        </p:spPr>
-        <p:txBody>
-          <a:bodyPr wrap="square" lIns="0" tIns="0" rIns="0" bIns="0" rtlCol="0" anchor="ctr"/>
-          <a:lstStyle/>
-          <a:p>
-            <a:pPr algn="l" indent="0" marL="0">
-              <a:lnSpc>
-                <a:spcPct val="115000"/>
-              </a:lnSpc>
-              <a:buNone/>
-            </a:pPr>
-            <a:r>
-              <a:rPr lang="en-US" sz="950" dirty="0">
-                <a:solidFill>
-                  <a:srgbClr val="1A1A1A"/>
-                </a:solidFill>
-                <a:latin typeface="Meiryo" pitchFamily="34" charset="0"/>
-                <a:ea typeface="Meiryo" pitchFamily="34" charset="-122"/>
-                <a:cs typeface="Meiryo" pitchFamily="34" charset="-120"/>
-              </a:rPr>
-              <a:t>→ 採用を止める</a:t>
-            </a:r>
-            <a:endParaRPr lang="en-US" sz="950" dirty="0"/>
-          </a:p>
-        </p:txBody>
-      </p:sp>
-      <p:sp>
-        <p:nvSpPr>
-          <p:cNvPr id="31" name="Text 27"/>
-          <p:cNvSpPr txBox="1"/>
-          <p:nvPr/>
-        </p:nvSpPr>
-        <p:spPr>
-          <a:xfrm>
-            <a:off x="365760" y="4480560"/>
-            <a:ext cx="8412480" cy="219456"/>
-          </a:xfrm>
-          <a:prstGeom prst="rect">
-            <a:avLst/>
-          </a:prstGeom>
-          <a:noFill/>
-          <a:ln/>
-        </p:spPr>
-        <p:txBody>
-          <a:bodyPr wrap="square" lIns="0" tIns="0" rIns="0" bIns="0" rtlCol="0" anchor="t"/>
-          <a:lstStyle/>
-          <a:p>
-            <a:pPr algn="l" indent="0" marL="0">
-              <a:lnSpc>
-                <a:spcPct val="115000"/>
-              </a:lnSpc>
               <a:buNone/>
             </a:pPr>
             <a:r>
@@ -12267,7 +13396,7 @@
                 <a:ea typeface="Meiryo" pitchFamily="34" charset="-122"/>
                 <a:cs typeface="Meiryo" pitchFamily="34" charset="-120"/>
               </a:rPr>
-              <a:t>左の表：新しい拠点が計画の何割だったら、何年目に黒字になるか（最低現金は百万円）。この計画は出資1.15億円が前提</a:t>
+              <a:t>上の表：新しい拠点が計画の何割だったら、何年目に黒字になるか（百万円）。下の表：進む・直す・止まるを先に決めておく</a:t>
             </a:r>
             <a:endParaRPr lang="en-US" sz="800" dirty="0"/>
           </a:p>
@@ -12382,7 +13511,7 @@
                 <a:ea typeface="Meiryo" pitchFamily="34" charset="-122"/>
                 <a:cs typeface="Meiryo" pitchFamily="34" charset="-120"/>
               </a:rPr>
-              <a:t>500万円で、6か月以内に最初の1拠点を動かす</a:t>
+              <a:t>準備期の6か月で、最初の1拠点を動かす</a:t>
             </a:r>
             <a:endParaRPr lang="en-US" sz="2000" dirty="0"/>
           </a:p>
@@ -12424,7 +13553,7 @@
                 <a:ea typeface="Meiryo" pitchFamily="34" charset="-122"/>
                 <a:cs typeface="Meiryo" pitchFamily="34" charset="-120"/>
               </a:rPr>
-              <a:t>創業者の給料はゼロ。すべて試作品と実証に使う</a:t>
+              <a:t>費用は約500万円。自己資金と補助金でまかない、創業者の給料はゼロ</a:t>
             </a:r>
             <a:endParaRPr lang="en-US" sz="1200" dirty="0"/>
           </a:p>
@@ -12486,7 +13615,7 @@
                 <a:ea typeface="Meiryo" pitchFamily="34" charset="-122"/>
                 <a:cs typeface="Meiryo" pitchFamily="34" charset="-120"/>
               </a:rPr>
-              <a:t>今日</a:t>
+              <a:t>はじまり</a:t>
             </a:r>
             <a:endParaRPr lang="en-US" sz="1100" dirty="0"/>
           </a:p>
@@ -12528,7 +13657,7 @@
                 <a:ea typeface="Meiryo" pitchFamily="34" charset="-122"/>
                 <a:cs typeface="Meiryo" pitchFamily="34" charset="-120"/>
               </a:rPr>
-              <a:t>500万円の出資</a:t>
+              <a:t>準備期</a:t>
             </a:r>
             <a:endParaRPr lang="en-US" sz="1200" dirty="0"/>
           </a:p>
@@ -12570,7 +13699,7 @@
                 <a:ea typeface="Meiryo" pitchFamily="34" charset="-122"/>
                 <a:cs typeface="Meiryo" pitchFamily="34" charset="-120"/>
               </a:rPr>
-              <a:t>試作品・端末・実証</a:t>
+              <a:t>自己資金と補助金で約500万円</a:t>
             </a:r>
             <a:endParaRPr lang="en-US" sz="900" dirty="0"/>
           </a:p>
@@ -12920,7 +14049,7 @@
                 <a:ea typeface="Meiryo" pitchFamily="34" charset="-122"/>
                 <a:cs typeface="Meiryo" pitchFamily="34" charset="-120"/>
               </a:rPr>
-              <a:t>報告書の時間がどれだけ減ったか実測</a:t>
+              <a:t>1台1日26分減ったかを測る</a:t>
             </a:r>
             <a:endParaRPr lang="en-US" sz="900" dirty="0"/>
           </a:p>
@@ -13137,7 +14266,7 @@
                 <a:ea typeface="Meiryo" pitchFamily="34" charset="-122"/>
                 <a:cs typeface="Meiryo" pitchFamily="34" charset="-120"/>
               </a:rPr>
-              <a:t>使い道（万円）</a:t>
+              <a:t>準備期の費用（万円）</a:t>
             </a:r>
             <a:endParaRPr lang="en-US" sz="1050" dirty="0"/>
           </a:p>
@@ -13751,7 +14880,7 @@
                 <a:ea typeface="Meiryo" pitchFamily="34" charset="-122"/>
                 <a:cs typeface="Meiryo" pitchFamily="34" charset="-120"/>
               </a:rPr>
-              <a:t>出資者へのお返し（提案）</a:t>
+              <a:t>実証の合格ライン</a:t>
             </a:r>
             <a:endParaRPr lang="en-US" sz="1000" dirty="0"/>
           </a:p>
@@ -13766,7 +14895,7 @@
               <a:buNone/>
             </a:pPr>
             <a:r>
-              <a:rPr lang="en-US" sz="1400" b="1" dirty="0">
+              <a:rPr lang="en-US" sz="1300" b="1" dirty="0">
                 <a:solidFill>
                   <a:srgbClr val="1A1A1A"/>
                 </a:solidFill>
@@ -13774,7 +14903,7 @@
                 <a:ea typeface="Meiryo" pitchFamily="34" charset="-122"/>
                 <a:cs typeface="Meiryo" pitchFamily="34" charset="-120"/>
               </a:rPr>
-              <a:t>500万円で株式の10%</a:t>
+              <a:t>1台1日26分以上減れば進む</a:t>
             </a:r>
             <a:endParaRPr lang="en-US" sz="1000" dirty="0"/>
           </a:p>
@@ -13797,7 +14926,7 @@
                 <a:ea typeface="Meiryo" pitchFamily="34" charset="-122"/>
                 <a:cs typeface="Meiryo" pitchFamily="34" charset="-120"/>
               </a:rPr>
-              <a:t>（出資前の会社の値段 4,500万円）</a:t>
+              <a:t>15分未満なら撤退。その間なら機能を写真台帳に絞る</a:t>
             </a:r>
             <a:endParaRPr lang="en-US" sz="1000" dirty="0"/>
           </a:p>
@@ -13820,30 +14949,7 @@
                 <a:ea typeface="Meiryo" pitchFamily="34" charset="-122"/>
                 <a:cs typeface="Meiryo" pitchFamily="34" charset="-120"/>
               </a:rPr>
-              <a:t>出口：上場、または事業会社への売却</a:t>
-            </a:r>
-            <a:endParaRPr lang="en-US" sz="1000" dirty="0"/>
-          </a:p>
-          <a:p>
-            <a:pPr algn="l" indent="0" marL="0">
-              <a:lnSpc>
-                <a:spcPct val="115000"/>
-              </a:lnSpc>
-              <a:spcAft>
-                <a:spcPts val="200"/>
-              </a:spcAft>
-              <a:buNone/>
-            </a:pPr>
-            <a:r>
-              <a:rPr lang="en-US" sz="950" dirty="0">
-                <a:solidFill>
-                  <a:srgbClr val="1A1A1A"/>
-                </a:solidFill>
-                <a:latin typeface="Meiryo" pitchFamily="34" charset="0"/>
-                <a:ea typeface="Meiryo" pitchFamily="34" charset="-122"/>
-                <a:cs typeface="Meiryo" pitchFamily="34" charset="-120"/>
-              </a:rPr>
-              <a:t>お願い：実証先の電気工事会社のご紹介も</a:t>
+              <a:t>お願い：実証先の電気工事会社のご紹介</a:t>
             </a:r>
             <a:endParaRPr lang="en-US" sz="1000" dirty="0"/>
           </a:p>
@@ -14391,7 +15497,7 @@
                 <a:ea typeface="Meiryo" pitchFamily="34" charset="-122"/>
                 <a:cs typeface="Meiryo" pitchFamily="34" charset="-120"/>
               </a:rPr>
-              <a:t>1拠点の粗利 255万円</a:t>
+              <a:t>1拠点の粗利 216万円</a:t>
             </a:r>
             <a:endParaRPr lang="en-US" sz="950" dirty="0"/>
           </a:p>
@@ -14411,7 +15517,7 @@
                 <a:ea typeface="Meiryo" pitchFamily="34" charset="-122"/>
                 <a:cs typeface="Meiryo" pitchFamily="34" charset="-120"/>
               </a:rPr>
-              <a:t>（300万円 − サーバー代45万円）</a:t>
+              <a:t>（300万円 − AI・保存84万円）</a:t>
             </a:r>
             <a:endParaRPr lang="en-US" sz="950" dirty="0"/>
           </a:p>
@@ -14653,7 +15759,7 @@
                 <a:ea typeface="Meiryo" pitchFamily="34" charset="-122"/>
                 <a:cs typeface="Meiryo" pitchFamily="34" charset="-120"/>
               </a:rPr>
-              <a:t>③ 年300万円</a:t>
+              <a:t>③ 年300万円（10台）</a:t>
             </a:r>
             <a:endParaRPr lang="en-US" sz="1000" dirty="0"/>
           </a:p>
@@ -14789,7 +15895,7 @@
                 <a:ea typeface="Meiryo" pitchFamily="34" charset="-122"/>
                 <a:cs typeface="Meiryo" pitchFamily="34" charset="-120"/>
               </a:rPr>
-              <a:t>サーバー・AI代：売上の15%</a:t>
+              <a:t>AI・保存：メガネ1台 月約6,000円</a:t>
             </a:r>
             <a:endParaRPr lang="en-US" sz="1000" dirty="0"/>
           </a:p>
@@ -14812,7 +15918,7 @@
                 <a:ea typeface="Meiryo" pitchFamily="34" charset="-122"/>
                 <a:cs typeface="Meiryo" pitchFamily="34" charset="-120"/>
               </a:rPr>
-              <a:t>社員1人：年694万円（給料・家賃など）</a:t>
+              <a:t>社員1人：年734万円（給料・家賃など）</a:t>
             </a:r>
             <a:endParaRPr lang="en-US" sz="1000" dirty="0"/>
           </a:p>
@@ -14905,7 +16011,7 @@
                 <a:ea typeface="Meiryo" pitchFamily="34" charset="-122"/>
                 <a:cs typeface="Meiryo" pitchFamily="34" charset="-120"/>
               </a:rPr>
-              <a:t>社員1人 × 3拠点 以上</a:t>
+              <a:t>社員1人 × 約4拠点</a:t>
             </a:r>
             <a:endParaRPr lang="en-US" sz="1000" dirty="0"/>
           </a:p>
@@ -14928,7 +16034,7 @@
                 <a:ea typeface="Meiryo" pitchFamily="34" charset="-122"/>
                 <a:cs typeface="Meiryo" pitchFamily="34" charset="-120"/>
               </a:rPr>
-              <a:t>4年目に3.44となり黒字</a:t>
+              <a:t>5年目に3.86となり黒字</a:t>
             </a:r>
             <a:endParaRPr lang="en-US" sz="1000" dirty="0"/>
           </a:p>
@@ -14951,7 +16057,7 @@
                 <a:ea typeface="Meiryo" pitchFamily="34" charset="-122"/>
                 <a:cs typeface="Meiryo" pitchFamily="34" charset="-120"/>
               </a:rPr>
-              <a:t>5年目 営業利益 約6,100万円</a:t>
+              <a:t>台数を15台に増やせれば1年早まる</a:t>
             </a:r>
             <a:endParaRPr lang="en-US" sz="1000" dirty="0"/>
           </a:p>
@@ -15308,7 +16414,7 @@
                 <a:ea typeface="Meiryo" pitchFamily="34" charset="-122"/>
                 <a:cs typeface="Meiryo" pitchFamily="34" charset="-120"/>
               </a:rPr>
-              <a:t>月240万円分の時間が浮くので、約2か月で元が取れます</a:t>
+              <a:t>1台1日26分減れば元が取れます。想定は35分で、実証で測ります</a:t>
             </a:r>
             <a:endParaRPr lang="en-US" sz="1050" dirty="0"/>
           </a:p>
@@ -15374,7 +16480,7 @@
                 <a:ea typeface="Meiryo" pitchFamily="34" charset="-122"/>
                 <a:cs typeface="Meiryo" pitchFamily="34" charset="-120"/>
               </a:rPr>
-              <a:t>根拠：100人×月6時間×4,000円</a:t>
+              <a:t>根拠：353万円÷（10台×240日）÷1時間の人件費</a:t>
             </a:r>
             <a:endParaRPr lang="en-US" sz="850" dirty="0"/>
           </a:p>
@@ -15465,7 +16571,7 @@
                 <a:ea typeface="Meiryo" pitchFamily="34" charset="-122"/>
                 <a:cs typeface="Meiryo" pitchFamily="34" charset="-120"/>
               </a:rPr>
-              <a:t>なんで4年目まで赤字なの？</a:t>
+              <a:t>なんで赤字が続くの？</a:t>
             </a:r>
             <a:endParaRPr lang="en-US" sz="1050" dirty="0"/>
           </a:p>
@@ -15532,7 +16638,7 @@
                 <a:ea typeface="Meiryo" pitchFamily="34" charset="-122"/>
                 <a:cs typeface="Meiryo" pitchFamily="34" charset="-120"/>
               </a:rPr>
-              <a:t>人を先に雇うからです。社員1人3拠点を超えたら黒字です</a:t>
+              <a:t>人を先に雇うからです。社員1人約4拠点を超えたら黒字です</a:t>
             </a:r>
             <a:endParaRPr lang="en-US" sz="1050" dirty="0"/>
           </a:p>
@@ -15598,7 +16704,7 @@
                 <a:ea typeface="Meiryo" pitchFamily="34" charset="-122"/>
                 <a:cs typeface="Meiryo" pitchFamily="34" charset="-120"/>
               </a:rPr>
-              <a:t>根拠：694万円÷255万円＝2.7、半年分を見て3</a:t>
+              <a:t>根拠：734万円÷216万円＝3.4、半年分を見て約4</a:t>
             </a:r>
             <a:endParaRPr lang="en-US" sz="850" dirty="0"/>
           </a:p>
@@ -15864,7 +16970,7 @@
                 <a:ea typeface="Meiryo" pitchFamily="34" charset="-122"/>
                 <a:cs typeface="Meiryo" pitchFamily="34" charset="-120"/>
               </a:rPr>
-              <a:t>左：投資家　右：社長（わたし）。細かい計算は「理論武装版」に</a:t>
+              <a:t>左：投資家　右：社長（わたし）。細かい計算は「計算詳細版」に</a:t>
             </a:r>
             <a:endParaRPr lang="en-US" sz="800" dirty="0"/>
           </a:p>
@@ -16021,7 +17127,7 @@
                 <a:ea typeface="Meiryo" pitchFamily="34" charset="-122"/>
                 <a:cs typeface="Meiryo" pitchFamily="34" charset="-120"/>
               </a:rPr>
-              <a:t>300万・255万・3。順番に言えば、お金の仕組みが全部つながる</a:t>
+              <a:t>300万・216万・4。順番に言えば、お金の仕組みが全部つながる</a:t>
             </a:r>
             <a:endParaRPr lang="en-US" sz="1200" dirty="0"/>
           </a:p>
@@ -16125,7 +17231,7 @@
                 <a:ea typeface="Meiryo" pitchFamily="34" charset="-122"/>
                 <a:cs typeface="Meiryo" pitchFamily="34" charset="-120"/>
               </a:rPr>
-              <a:t>お客様が1拠点で毎年払う</a:t>
+              <a:t>お客様が10台で毎年払う</a:t>
             </a:r>
             <a:endParaRPr lang="en-US" sz="1150" dirty="0"/>
           </a:p>
@@ -16167,7 +17273,7 @@
                 <a:ea typeface="Meiryo" pitchFamily="34" charset="-122"/>
                 <a:cs typeface="Meiryo" pitchFamily="34" charset="-120"/>
               </a:rPr>
-              <a:t>2か月で元が取れるから払う</a:t>
+              <a:t>1台1日26分減れば元が取れる</a:t>
             </a:r>
             <a:endParaRPr lang="en-US" sz="950" dirty="0"/>
           </a:p>
@@ -16253,7 +17359,7 @@
                 <a:ea typeface="Meiryo" pitchFamily="34" charset="-122"/>
                 <a:cs typeface="Meiryo" pitchFamily="34" charset="-120"/>
               </a:rPr>
-              <a:t>255万円</a:t>
+              <a:t>216万円</a:t>
             </a:r>
             <a:endParaRPr lang="en-US" sz="3000" dirty="0"/>
           </a:p>
@@ -16337,7 +17443,7 @@
                 <a:ea typeface="Meiryo" pitchFamily="34" charset="-122"/>
                 <a:cs typeface="Meiryo" pitchFamily="34" charset="-120"/>
               </a:rPr>
-              <a:t>サーバー代15%を引いた残り</a:t>
+              <a:t>AI・保存の84万円を引いた残り</a:t>
             </a:r>
             <a:endParaRPr lang="en-US" sz="950" dirty="0"/>
           </a:p>
@@ -16423,7 +17529,7 @@
                 <a:ea typeface="Meiryo" pitchFamily="34" charset="-122"/>
                 <a:cs typeface="Meiryo" pitchFamily="34" charset="-120"/>
               </a:rPr>
-              <a:t>3拠点</a:t>
+              <a:t>約4拠点</a:t>
             </a:r>
             <a:endParaRPr lang="en-US" sz="3000" dirty="0"/>
           </a:p>
@@ -16507,7 +17613,7 @@
                 <a:ea typeface="Meiryo" pitchFamily="34" charset="-122"/>
                 <a:cs typeface="Meiryo" pitchFamily="34" charset="-120"/>
               </a:rPr>
-              <a:t>4年目に超え、5年目は4.05</a:t>
+              <a:t>5年目に3.86で届く</a:t>
             </a:r>
             <a:endParaRPr lang="en-US" sz="950" dirty="0"/>
           </a:p>
@@ -16616,7 +17722,7 @@
                 <a:ea typeface="Meiryo" pitchFamily="34" charset="-122"/>
                 <a:cs typeface="Meiryo" pitchFamily="34" charset="-120"/>
               </a:rPr>
-              <a:t>電気工事会社が1拠点あたり年300万円を払います。月240万円分の書類の時間が浮くので、2か月で元が取れます。当社にはサーバー代を引いた255万円が残り、社員1人で3拠点を見れば黒字です。人を先に雇うので3年目までは赤字ですが、去年のお客様が今年も払う積み上げ型なので、4年目に黒字、5年目に営業利益約6,100万円になります。</a:t>
+              <a:t>電気工事会社が、メガネ10台で年300万円を払います。掛けた班の書類の時間が1台1日26分減れば元が取れ、想定の35分なら約1.4倍の得です。当社にはAIと保存の費用を引いた216万円が残り、社員1人で約4拠点を見れば黒字です。人を先に雇うので4年目までは赤字ですが、去年のお客様が今年も払う積み上げ型なので、5年目に黒字になります。</a:t>
             </a:r>
             <a:endParaRPr lang="en-US" sz="1100" dirty="0"/>
           </a:p>
@@ -23032,7 +24138,7 @@
                 <a:ea typeface="Meiryo" pitchFamily="34" charset="-122"/>
                 <a:cs typeface="Meiryo" pitchFamily="34" charset="-120"/>
               </a:rPr>
-              <a:t>関東の中堅735社 → 会う45% → 契約25% ＝ 約83社。大手1社を目玉の事例にして協力会社へ広げる（率は仮定）</a:t>
+              <a:t>条件に合う約180社を中心に5年で約85拠点（解約を引いて81）。効果が出た班から台数を増やす</a:t>
             </a:r>
             <a:endParaRPr lang="en-US" sz="950" dirty="0"/>
           </a:p>
@@ -23206,7 +24312,7 @@
                 <a:ea typeface="Meiryo" pitchFamily="34" charset="-122"/>
                 <a:cs typeface="Meiryo" pitchFamily="34" charset="-120"/>
               </a:rPr>
-              <a:t>払うのは電気工事会社（1拠点＝支店・営業所）。毎年300万円、初年度だけ導入支援200万円</a:t>
+              <a:t>払うのは電気工事会社。会社の基盤＋メガネの台数。10台で年300万円、初年度だけ導入支援200万円</a:t>
             </a:r>
             <a:endParaRPr lang="en-US" sz="1200" dirty="0"/>
           </a:p>
@@ -23472,7 +24578,7 @@
                 <a:ea typeface="Meiryo" pitchFamily="34" charset="-122"/>
                 <a:cs typeface="Meiryo" pitchFamily="34" charset="-120"/>
               </a:rPr>
-              <a:t>（月25万円）</a:t>
+              <a:t>（10台・月25万円）</a:t>
             </a:r>
             <a:endParaRPr lang="en-US" sz="1400" dirty="0"/>
           </a:p>
@@ -23663,7 +24769,7 @@
         <p:spPr>
           <a:xfrm>
             <a:off x="5257800" y="1554480"/>
-            <a:ext cx="2377440" cy="365760"/>
+            <a:ext cx="2377440" cy="457200"/>
           </a:xfrm>
           <a:prstGeom prst="rect">
             <a:avLst/>
@@ -23690,7 +24796,7 @@
                 <a:ea typeface="Meiryo" pitchFamily="34" charset="-122"/>
                 <a:cs typeface="Meiryo" pitchFamily="34" charset="-120"/>
               </a:rPr>
-              <a:t>基本料</a:t>
+              <a:t>会社の基盤</a:t>
             </a:r>
             <a:endParaRPr lang="en-US" sz="1050" dirty="0"/>
           </a:p>
@@ -23710,7 +24816,7 @@
                 <a:ea typeface="Meiryo" pitchFamily="34" charset="-122"/>
                 <a:cs typeface="Meiryo" pitchFamily="34" charset="-120"/>
               </a:rPr>
-              <a:t>アプリとデータ置き場</a:t>
+              <a:t>データ置き場・管理画面 月5万円×12</a:t>
             </a:r>
             <a:endParaRPr lang="en-US" sz="1050" dirty="0"/>
           </a:p>
@@ -23725,7 +24831,7 @@
         <p:spPr>
           <a:xfrm>
             <a:off x="7635240" y="1554480"/>
-            <a:ext cx="960120" cy="365760"/>
+            <a:ext cx="960120" cy="457200"/>
           </a:xfrm>
           <a:prstGeom prst="rect">
             <a:avLst/>
@@ -23752,7 +24858,7 @@
                 <a:ea typeface="Meiryo" pitchFamily="34" charset="-122"/>
                 <a:cs typeface="Meiryo" pitchFamily="34" charset="-120"/>
               </a:rPr>
-              <a:t>100万円</a:t>
+              <a:t>60万円</a:t>
             </a:r>
             <a:endParaRPr lang="en-US" sz="1100" dirty="0"/>
           </a:p>
@@ -23766,8 +24872,8 @@
         </p:nvSpPr>
         <p:spPr>
           <a:xfrm>
-            <a:off x="5257800" y="1938528"/>
-            <a:ext cx="2377440" cy="365760"/>
+            <a:off x="5257800" y="2057400"/>
+            <a:ext cx="2377440" cy="457200"/>
           </a:xfrm>
           <a:prstGeom prst="rect">
             <a:avLst/>
@@ -23794,7 +24900,7 @@
                 <a:ea typeface="Meiryo" pitchFamily="34" charset="-122"/>
                 <a:cs typeface="Meiryo" pitchFamily="34" charset="-120"/>
               </a:rPr>
-              <a:t>現場登録</a:t>
+              <a:t>メガネの利用料</a:t>
             </a:r>
             <a:endParaRPr lang="en-US" sz="1050" dirty="0"/>
           </a:p>
@@ -23814,7 +24920,7 @@
                 <a:ea typeface="Meiryo" pitchFamily="34" charset="-122"/>
                 <a:cs typeface="Meiryo" pitchFamily="34" charset="-120"/>
               </a:rPr>
-              <a:t>記録する工区・現場 20万円×5</a:t>
+              <a:t>1台 月2万円×10台×12</a:t>
             </a:r>
             <a:endParaRPr lang="en-US" sz="1050" dirty="0"/>
           </a:p>
@@ -23828,8 +24934,8 @@
         </p:nvSpPr>
         <p:spPr>
           <a:xfrm>
-            <a:off x="7635240" y="1938528"/>
-            <a:ext cx="960120" cy="365760"/>
+            <a:off x="7635240" y="2057400"/>
+            <a:ext cx="960120" cy="457200"/>
           </a:xfrm>
           <a:prstGeom prst="rect">
             <a:avLst/>
@@ -23856,7 +24962,7 @@
                 <a:ea typeface="Meiryo" pitchFamily="34" charset="-122"/>
                 <a:cs typeface="Meiryo" pitchFamily="34" charset="-120"/>
               </a:rPr>
-              <a:t>100万円</a:t>
+              <a:t>240万円</a:t>
             </a:r>
             <a:endParaRPr lang="en-US" sz="1100" dirty="0"/>
           </a:p>
@@ -23864,117 +24970,13 @@
       </p:sp>
       <p:sp>
         <p:nvSpPr>
-          <p:cNvPr id="22" name="Text 15"/>
-          <p:cNvSpPr txBox="1"/>
-          <p:nvPr/>
-        </p:nvSpPr>
-        <p:spPr>
-          <a:xfrm>
-            <a:off x="5257800" y="2322576"/>
-            <a:ext cx="2377440" cy="365760"/>
-          </a:xfrm>
-          <a:prstGeom prst="rect">
-            <a:avLst/>
-          </a:prstGeom>
-          <a:noFill/>
-          <a:ln/>
-        </p:spPr>
-        <p:txBody>
-          <a:bodyPr wrap="square" lIns="0" tIns="0" rIns="0" bIns="0" rtlCol="0" anchor="t"/>
-          <a:lstStyle/>
-          <a:p>
-            <a:pPr algn="l" indent="0" marL="0">
-              <a:lnSpc>
-                <a:spcPct val="115000"/>
-              </a:lnSpc>
-              <a:buNone/>
-            </a:pPr>
-            <a:r>
-              <a:rPr lang="en-US" sz="1050" b="1" dirty="0">
-                <a:solidFill>
-                  <a:srgbClr val="1A1A1A"/>
-                </a:solidFill>
-                <a:latin typeface="Meiryo" pitchFamily="34" charset="0"/>
-                <a:ea typeface="Meiryo" pitchFamily="34" charset="-122"/>
-                <a:cs typeface="Meiryo" pitchFamily="34" charset="-120"/>
-              </a:rPr>
-              <a:t>追加機能</a:t>
-            </a:r>
-            <a:endParaRPr lang="en-US" sz="1050" dirty="0"/>
-          </a:p>
-          <a:p>
-            <a:pPr algn="l" indent="0" marL="0">
-              <a:lnSpc>
-                <a:spcPct val="115000"/>
-              </a:lnSpc>
-              <a:buNone/>
-            </a:pPr>
-            <a:r>
-              <a:rPr lang="en-US" sz="850" dirty="0">
-                <a:solidFill>
-                  <a:srgbClr val="4D4D4D"/>
-                </a:solidFill>
-                <a:latin typeface="Meiryo" pitchFamily="34" charset="0"/>
-                <a:ea typeface="Meiryo" pitchFamily="34" charset="-122"/>
-                <a:cs typeface="Meiryo" pitchFamily="34" charset="-120"/>
-              </a:rPr>
-              <a:t>教材づくり等 50万円×2つ</a:t>
-            </a:r>
-            <a:endParaRPr lang="en-US" sz="1050" dirty="0"/>
-          </a:p>
-        </p:txBody>
-      </p:sp>
-      <p:sp>
-        <p:nvSpPr>
-          <p:cNvPr id="23" name="Text 16"/>
-          <p:cNvSpPr txBox="1"/>
-          <p:nvPr/>
-        </p:nvSpPr>
-        <p:spPr>
-          <a:xfrm>
-            <a:off x="7635240" y="2322576"/>
-            <a:ext cx="960120" cy="365760"/>
-          </a:xfrm>
-          <a:prstGeom prst="rect">
-            <a:avLst/>
-          </a:prstGeom>
-          <a:noFill/>
-          <a:ln/>
-        </p:spPr>
-        <p:txBody>
-          <a:bodyPr wrap="square" lIns="0" tIns="0" rIns="0" bIns="0" rtlCol="0" anchor="ctr"/>
-          <a:lstStyle/>
-          <a:p>
-            <a:pPr algn="r" indent="0" marL="0">
-              <a:lnSpc>
-                <a:spcPct val="115000"/>
-              </a:lnSpc>
-              <a:buNone/>
-            </a:pPr>
-            <a:r>
-              <a:rPr lang="en-US" sz="1100" dirty="0">
-                <a:solidFill>
-                  <a:srgbClr val="1A1A1A"/>
-                </a:solidFill>
-                <a:latin typeface="Meiryo" pitchFamily="34" charset="0"/>
-                <a:ea typeface="Meiryo" pitchFamily="34" charset="-122"/>
-                <a:cs typeface="Meiryo" pitchFamily="34" charset="-120"/>
-              </a:rPr>
-              <a:t>100万円</a:t>
-            </a:r>
-            <a:endParaRPr lang="en-US" sz="1100" dirty="0"/>
-          </a:p>
-        </p:txBody>
-      </p:sp>
-      <p:sp>
-        <p:nvSpPr>
-          <p:cNvPr id="24" name="Shape 17"/>
+          <p:cNvPr id="22" name="Shape 15"/>
           <p:cNvSpPr/>
           <p:nvPr/>
         </p:nvSpPr>
         <p:spPr>
           <a:xfrm>
-            <a:off x="5257800" y="2743200"/>
+            <a:off x="5257800" y="2606040"/>
             <a:ext cx="3337560" cy="0"/>
           </a:xfrm>
           <a:prstGeom prst="line">
@@ -23991,13 +24993,13 @@
       </p:sp>
       <p:sp>
         <p:nvSpPr>
-          <p:cNvPr id="25" name="Text 18"/>
+          <p:cNvPr id="23" name="Text 16"/>
           <p:cNvSpPr txBox="1"/>
           <p:nvPr/>
         </p:nvSpPr>
         <p:spPr>
           <a:xfrm>
-            <a:off x="5257800" y="2798064"/>
+            <a:off x="5257800" y="2670048"/>
             <a:ext cx="1828800" cy="365760"/>
           </a:xfrm>
           <a:prstGeom prst="rect">
@@ -24033,13 +25035,13 @@
       </p:sp>
       <p:sp>
         <p:nvSpPr>
-          <p:cNvPr id="26" name="Text 19"/>
+          <p:cNvPr id="24" name="Text 17"/>
           <p:cNvSpPr txBox="1"/>
           <p:nvPr/>
         </p:nvSpPr>
         <p:spPr>
           <a:xfrm>
-            <a:off x="7086600" y="2798064"/>
+            <a:off x="7086600" y="2670048"/>
             <a:ext cx="1508760" cy="365760"/>
           </a:xfrm>
           <a:prstGeom prst="rect">
@@ -24075,13 +25077,13 @@
       </p:sp>
       <p:sp>
         <p:nvSpPr>
-          <p:cNvPr id="27" name="Shape 20"/>
+          <p:cNvPr id="25" name="Shape 18"/>
           <p:cNvSpPr/>
           <p:nvPr/>
         </p:nvSpPr>
         <p:spPr>
           <a:xfrm>
-            <a:off x="5257800" y="3246120"/>
+            <a:off x="5257800" y="3108960"/>
             <a:ext cx="3337560" cy="0"/>
           </a:xfrm>
           <a:prstGeom prst="line">
@@ -24098,14 +25100,14 @@
       </p:sp>
       <p:sp>
         <p:nvSpPr>
-          <p:cNvPr id="28" name="Text 21"/>
+          <p:cNvPr id="26" name="Text 19"/>
           <p:cNvSpPr txBox="1"/>
           <p:nvPr/>
         </p:nvSpPr>
         <p:spPr>
           <a:xfrm>
-            <a:off x="5257800" y="3310128"/>
-            <a:ext cx="3337560" cy="438912"/>
+            <a:off x="5257800" y="3172968"/>
+            <a:ext cx="3337560" cy="548640"/>
           </a:xfrm>
           <a:prstGeom prst="rect">
             <a:avLst/>
@@ -24152,7 +25154,7 @@
                 <a:ea typeface="Meiryo" pitchFamily="34" charset="-122"/>
                 <a:cs typeface="Meiryo" pitchFamily="34" charset="-120"/>
               </a:rPr>
-              <a:t>当社の担当者が約2か月、現場に入って設定する</a:t>
+              <a:t>メガネ本体はリース会社から（10台で年約53万円）</a:t>
             </a:r>
             <a:endParaRPr lang="en-US" sz="1000" dirty="0"/>
           </a:p>
@@ -24160,7 +25162,7 @@
       </p:sp>
       <p:sp>
         <p:nvSpPr>
-          <p:cNvPr id="29" name="Shape 22"/>
+          <p:cNvPr id="27" name="Shape 20"/>
           <p:cNvSpPr/>
           <p:nvPr/>
         </p:nvSpPr>
@@ -24180,7 +25182,7 @@
       </p:sp>
       <p:sp>
         <p:nvSpPr>
-          <p:cNvPr id="30" name="Text 23"/>
+          <p:cNvPr id="28" name="Text 21"/>
           <p:cNvSpPr txBox="1"/>
           <p:nvPr/>
         </p:nvSpPr>
@@ -24234,7 +25236,7 @@
                 <a:ea typeface="Meiryo" pitchFamily="34" charset="-122"/>
                 <a:cs typeface="Meiryo" pitchFamily="34" charset="-120"/>
               </a:rPr>
-              <a:t>初期設定（導入支援）は最初だけ。月額料金（利用料）は毎月入ってくる → 去年のお客様が、今年も払ってくれる</a:t>
+              <a:t>初期設定（導入支援）は最初だけ。月額料金（利用料）は毎月入ってくる。台数が増えれば、そのぶん月額も増える</a:t>
             </a:r>
             <a:endParaRPr lang="en-US" sz="1050" dirty="0"/>
           </a:p>
@@ -24408,7 +25410,7 @@
                 <a:ea typeface="Meiryo" pitchFamily="34" charset="-122"/>
                 <a:cs typeface="Meiryo" pitchFamily="34" charset="-120"/>
               </a:rPr>
-              <a:t>月25万円払うと、月240万円分の時間が浮く。約2か月で元が取れる</a:t>
+              <a:t>メガネを掛けた班の書類の時間が減る。1台1日26分減れば元が取れる</a:t>
             </a:r>
             <a:endParaRPr lang="en-US" sz="1200" dirty="0"/>
           </a:p>
@@ -24423,7 +25425,7 @@
         <p:spPr>
           <a:xfrm>
             <a:off x="365760" y="1097280"/>
-            <a:ext cx="1325880" cy="822960"/>
+            <a:ext cx="1097280" cy="822960"/>
           </a:xfrm>
           <a:prstGeom prst="rect">
             <a:avLst/>
@@ -24443,7 +25445,7 @@
         <p:spPr>
           <a:xfrm>
             <a:off x="365760" y="1170432"/>
-            <a:ext cx="1325880" cy="457200"/>
+            <a:ext cx="1097280" cy="457200"/>
           </a:xfrm>
           <a:prstGeom prst="rect">
             <a:avLst/>
@@ -24462,7 +25464,7 @@
               <a:buNone/>
             </a:pPr>
             <a:r>
-              <a:rPr lang="en-US" sz="1800" b="1" dirty="0">
+              <a:rPr lang="en-US" sz="1500" b="1" dirty="0">
                 <a:solidFill>
                   <a:srgbClr val="1A1A1A"/>
                 </a:solidFill>
@@ -24470,9 +25472,9 @@
                 <a:ea typeface="Meiryo" pitchFamily="34" charset="-122"/>
                 <a:cs typeface="Meiryo" pitchFamily="34" charset="-120"/>
               </a:rPr>
-              <a:t>100人</a:t>
-            </a:r>
-            <a:endParaRPr lang="en-US" sz="1800" dirty="0"/>
+              <a:t>10台</a:t>
+            </a:r>
+            <a:endParaRPr lang="en-US" sz="1500" dirty="0"/>
           </a:p>
         </p:txBody>
       </p:sp>
@@ -24485,7 +25487,7 @@
         <p:spPr>
           <a:xfrm>
             <a:off x="365760" y="1609344"/>
-            <a:ext cx="1325880" cy="256032"/>
+            <a:ext cx="1097280" cy="256032"/>
           </a:xfrm>
           <a:prstGeom prst="rect">
             <a:avLst/>
@@ -24504,7 +25506,7 @@
               <a:buNone/>
             </a:pPr>
             <a:r>
-              <a:rPr lang="en-US" sz="850" dirty="0">
+              <a:rPr lang="en-US" sz="800" dirty="0">
                 <a:solidFill>
                   <a:srgbClr val="4D4D4D"/>
                 </a:solidFill>
@@ -24512,9 +25514,9 @@
                 <a:ea typeface="Meiryo" pitchFamily="34" charset="-122"/>
                 <a:cs typeface="Meiryo" pitchFamily="34" charset="-120"/>
               </a:rPr>
-              <a:t>施工管理者・電工</a:t>
-            </a:r>
-            <a:endParaRPr lang="en-US" sz="850" dirty="0"/>
+              <a:t>メガネの数</a:t>
+            </a:r>
+            <a:endParaRPr lang="en-US" sz="800" dirty="0"/>
           </a:p>
         </p:txBody>
       </p:sp>
@@ -24526,8 +25528,8 @@
         </p:nvSpPr>
         <p:spPr>
           <a:xfrm>
-            <a:off x="1746504" y="1234440"/>
-            <a:ext cx="320040" cy="548640"/>
+            <a:off x="1499616" y="1234440"/>
+            <a:ext cx="274320" cy="548640"/>
           </a:xfrm>
           <a:prstGeom prst="rect">
             <a:avLst/>
@@ -24546,7 +25548,7 @@
               <a:buNone/>
             </a:pPr>
             <a:r>
-              <a:rPr lang="en-US" sz="2200" b="1" dirty="0">
+              <a:rPr lang="en-US" sz="2000" b="1" dirty="0">
                 <a:solidFill>
                   <a:srgbClr val="1A1A1A"/>
                 </a:solidFill>
@@ -24556,7 +25558,7 @@
               </a:rPr>
               <a:t>×</a:t>
             </a:r>
-            <a:endParaRPr lang="en-US" sz="2200" dirty="0"/>
+            <a:endParaRPr lang="en-US" sz="2000" dirty="0"/>
           </a:p>
         </p:txBody>
       </p:sp>
@@ -24568,8 +25570,8 @@
         </p:nvSpPr>
         <p:spPr>
           <a:xfrm>
-            <a:off x="2121408" y="1097280"/>
-            <a:ext cx="1325880" cy="822960"/>
+            <a:off x="1810512" y="1097280"/>
+            <a:ext cx="1097280" cy="822960"/>
           </a:xfrm>
           <a:prstGeom prst="rect">
             <a:avLst/>
@@ -24588,8 +25590,8 @@
         </p:nvSpPr>
         <p:spPr>
           <a:xfrm>
-            <a:off x="2121408" y="1170432"/>
-            <a:ext cx="1325880" cy="457200"/>
+            <a:off x="1810512" y="1170432"/>
+            <a:ext cx="1097280" cy="457200"/>
           </a:xfrm>
           <a:prstGeom prst="rect">
             <a:avLst/>
@@ -24608,7 +25610,7 @@
               <a:buNone/>
             </a:pPr>
             <a:r>
-              <a:rPr lang="en-US" sz="1800" b="1" dirty="0">
+              <a:rPr lang="en-US" sz="1500" b="1" dirty="0">
                 <a:solidFill>
                   <a:srgbClr val="1A1A1A"/>
                 </a:solidFill>
@@ -24616,9 +25618,9 @@
                 <a:ea typeface="Meiryo" pitchFamily="34" charset="-122"/>
                 <a:cs typeface="Meiryo" pitchFamily="34" charset="-120"/>
               </a:rPr>
-              <a:t>月6時間</a:t>
-            </a:r>
-            <a:endParaRPr lang="en-US" sz="1800" dirty="0"/>
+              <a:t>240日</a:t>
+            </a:r>
+            <a:endParaRPr lang="en-US" sz="1500" dirty="0"/>
           </a:p>
         </p:txBody>
       </p:sp>
@@ -24630,8 +25632,8 @@
         </p:nvSpPr>
         <p:spPr>
           <a:xfrm>
-            <a:off x="2121408" y="1609344"/>
-            <a:ext cx="1325880" cy="256032"/>
+            <a:off x="1810512" y="1609344"/>
+            <a:ext cx="1097280" cy="256032"/>
           </a:xfrm>
           <a:prstGeom prst="rect">
             <a:avLst/>
@@ -24650,7 +25652,7 @@
               <a:buNone/>
             </a:pPr>
             <a:r>
-              <a:rPr lang="en-US" sz="850" dirty="0">
+              <a:rPr lang="en-US" sz="800" dirty="0">
                 <a:solidFill>
                   <a:srgbClr val="4D4D4D"/>
                 </a:solidFill>
@@ -24658,9 +25660,9 @@
                 <a:ea typeface="Meiryo" pitchFamily="34" charset="-122"/>
                 <a:cs typeface="Meiryo" pitchFamily="34" charset="-120"/>
               </a:rPr>
-              <a:t>1人の書類作業が減る</a:t>
-            </a:r>
-            <a:endParaRPr lang="en-US" sz="850" dirty="0"/>
+              <a:t>1年に使う日</a:t>
+            </a:r>
+            <a:endParaRPr lang="en-US" sz="800" dirty="0"/>
           </a:p>
         </p:txBody>
       </p:sp>
@@ -24672,8 +25674,8 @@
         </p:nvSpPr>
         <p:spPr>
           <a:xfrm>
-            <a:off x="3502152" y="1234440"/>
-            <a:ext cx="320040" cy="548640"/>
+            <a:off x="2944368" y="1234440"/>
+            <a:ext cx="274320" cy="548640"/>
           </a:xfrm>
           <a:prstGeom prst="rect">
             <a:avLst/>
@@ -24692,7 +25694,7 @@
               <a:buNone/>
             </a:pPr>
             <a:r>
-              <a:rPr lang="en-US" sz="2200" b="1" dirty="0">
+              <a:rPr lang="en-US" sz="2000" b="1" dirty="0">
                 <a:solidFill>
                   <a:srgbClr val="1A1A1A"/>
                 </a:solidFill>
@@ -24702,7 +25704,7 @@
               </a:rPr>
               <a:t>×</a:t>
             </a:r>
-            <a:endParaRPr lang="en-US" sz="2200" dirty="0"/>
+            <a:endParaRPr lang="en-US" sz="2000" dirty="0"/>
           </a:p>
         </p:txBody>
       </p:sp>
@@ -24714,8 +25716,8 @@
         </p:nvSpPr>
         <p:spPr>
           <a:xfrm>
-            <a:off x="3877056" y="1097280"/>
-            <a:ext cx="1325880" cy="822960"/>
+            <a:off x="3255264" y="1097280"/>
+            <a:ext cx="1097280" cy="822960"/>
           </a:xfrm>
           <a:prstGeom prst="rect">
             <a:avLst/>
@@ -24734,8 +25736,8 @@
         </p:nvSpPr>
         <p:spPr>
           <a:xfrm>
-            <a:off x="3877056" y="1170432"/>
-            <a:ext cx="1325880" cy="457200"/>
+            <a:off x="3255264" y="1170432"/>
+            <a:ext cx="1097280" cy="457200"/>
           </a:xfrm>
           <a:prstGeom prst="rect">
             <a:avLst/>
@@ -24754,7 +25756,7 @@
               <a:buNone/>
             </a:pPr>
             <a:r>
-              <a:rPr lang="en-US" sz="1800" b="1" dirty="0">
+              <a:rPr lang="en-US" sz="1500" b="1" dirty="0">
                 <a:solidFill>
                   <a:srgbClr val="1A1A1A"/>
                 </a:solidFill>
@@ -24762,9 +25764,9 @@
                 <a:ea typeface="Meiryo" pitchFamily="34" charset="-122"/>
                 <a:cs typeface="Meiryo" pitchFamily="34" charset="-120"/>
               </a:rPr>
-              <a:t>4,000円</a:t>
-            </a:r>
-            <a:endParaRPr lang="en-US" sz="1800" dirty="0"/>
+              <a:t>35分</a:t>
+            </a:r>
+            <a:endParaRPr lang="en-US" sz="1500" dirty="0"/>
           </a:p>
         </p:txBody>
       </p:sp>
@@ -24776,8 +25778,8 @@
         </p:nvSpPr>
         <p:spPr>
           <a:xfrm>
-            <a:off x="3877056" y="1609344"/>
-            <a:ext cx="1325880" cy="256032"/>
+            <a:off x="3255264" y="1609344"/>
+            <a:ext cx="1097280" cy="256032"/>
           </a:xfrm>
           <a:prstGeom prst="rect">
             <a:avLst/>
@@ -24796,7 +25798,7 @@
               <a:buNone/>
             </a:pPr>
             <a:r>
-              <a:rPr lang="en-US" sz="850" dirty="0">
+              <a:rPr lang="en-US" sz="800" dirty="0">
                 <a:solidFill>
                   <a:srgbClr val="4D4D4D"/>
                 </a:solidFill>
@@ -24804,9 +25806,9 @@
                 <a:ea typeface="Meiryo" pitchFamily="34" charset="-122"/>
                 <a:cs typeface="Meiryo" pitchFamily="34" charset="-120"/>
               </a:rPr>
-              <a:t>1時間の人件費</a:t>
-            </a:r>
-            <a:endParaRPr lang="en-US" sz="850" dirty="0"/>
+              <a:t>1台1日減る時間</a:t>
+            </a:r>
+            <a:endParaRPr lang="en-US" sz="800" dirty="0"/>
           </a:p>
         </p:txBody>
       </p:sp>
@@ -24818,8 +25820,8 @@
         </p:nvSpPr>
         <p:spPr>
           <a:xfrm>
-            <a:off x="5257800" y="1234440"/>
-            <a:ext cx="320040" cy="548640"/>
+            <a:off x="4389120" y="1234440"/>
+            <a:ext cx="274320" cy="548640"/>
           </a:xfrm>
           <a:prstGeom prst="rect">
             <a:avLst/>
@@ -24838,7 +25840,7 @@
               <a:buNone/>
             </a:pPr>
             <a:r>
-              <a:rPr lang="en-US" sz="2200" b="1" dirty="0">
+              <a:rPr lang="en-US" sz="2000" b="1" dirty="0">
                 <a:solidFill>
                   <a:srgbClr val="1A1A1A"/>
                 </a:solidFill>
@@ -24846,9 +25848,9 @@
                 <a:ea typeface="Meiryo" pitchFamily="34" charset="-122"/>
                 <a:cs typeface="Meiryo" pitchFamily="34" charset="-120"/>
               </a:rPr>
-              <a:t>＝</a:t>
-            </a:r>
-            <a:endParaRPr lang="en-US" sz="2200" dirty="0"/>
+              <a:t>×</a:t>
+            </a:r>
+            <a:endParaRPr lang="en-US" sz="2000" dirty="0"/>
           </a:p>
         </p:txBody>
       </p:sp>
@@ -24860,8 +25862,154 @@
         </p:nvSpPr>
         <p:spPr>
           <a:xfrm>
-            <a:off x="5632704" y="1097280"/>
-            <a:ext cx="1737360" cy="822960"/>
+            <a:off x="4700016" y="1097280"/>
+            <a:ext cx="1097280" cy="822960"/>
+          </a:xfrm>
+          <a:prstGeom prst="rect">
+            <a:avLst/>
+          </a:prstGeom>
+          <a:solidFill>
+            <a:srgbClr val="F2F2F2"/>
+          </a:solidFill>
+          <a:ln/>
+        </p:spPr>
+      </p:sp>
+      <p:sp>
+        <p:nvSpPr>
+          <p:cNvPr id="18" name="Text 15"/>
+          <p:cNvSpPr txBox="1"/>
+          <p:nvPr/>
+        </p:nvSpPr>
+        <p:spPr>
+          <a:xfrm>
+            <a:off x="4700016" y="1170432"/>
+            <a:ext cx="1097280" cy="457200"/>
+          </a:xfrm>
+          <a:prstGeom prst="rect">
+            <a:avLst/>
+          </a:prstGeom>
+          <a:noFill/>
+          <a:ln/>
+        </p:spPr>
+        <p:txBody>
+          <a:bodyPr wrap="square" lIns="0" tIns="0" rIns="0" bIns="0" rtlCol="0" anchor="ctr"/>
+          <a:lstStyle/>
+          <a:p>
+            <a:pPr algn="ctr" indent="0" marL="0">
+              <a:lnSpc>
+                <a:spcPct val="115000"/>
+              </a:lnSpc>
+              <a:buNone/>
+            </a:pPr>
+            <a:r>
+              <a:rPr lang="en-US" sz="1500" b="1" dirty="0">
+                <a:solidFill>
+                  <a:srgbClr val="1A1A1A"/>
+                </a:solidFill>
+                <a:latin typeface="Meiryo" pitchFamily="34" charset="0"/>
+                <a:ea typeface="Meiryo" pitchFamily="34" charset="-122"/>
+                <a:cs typeface="Meiryo" pitchFamily="34" charset="-120"/>
+              </a:rPr>
+              <a:t>約3,420円</a:t>
+            </a:r>
+            <a:endParaRPr lang="en-US" sz="1500" dirty="0"/>
+          </a:p>
+        </p:txBody>
+      </p:sp>
+      <p:sp>
+        <p:nvSpPr>
+          <p:cNvPr id="19" name="Text 16"/>
+          <p:cNvSpPr txBox="1"/>
+          <p:nvPr/>
+        </p:nvSpPr>
+        <p:spPr>
+          <a:xfrm>
+            <a:off x="4700016" y="1609344"/>
+            <a:ext cx="1097280" cy="256032"/>
+          </a:xfrm>
+          <a:prstGeom prst="rect">
+            <a:avLst/>
+          </a:prstGeom>
+          <a:noFill/>
+          <a:ln/>
+        </p:spPr>
+        <p:txBody>
+          <a:bodyPr wrap="square" lIns="0" tIns="0" rIns="0" bIns="0" rtlCol="0" anchor="t"/>
+          <a:lstStyle/>
+          <a:p>
+            <a:pPr algn="ctr" indent="0" marL="0">
+              <a:lnSpc>
+                <a:spcPct val="115000"/>
+              </a:lnSpc>
+              <a:buNone/>
+            </a:pPr>
+            <a:r>
+              <a:rPr lang="en-US" sz="800" dirty="0">
+                <a:solidFill>
+                  <a:srgbClr val="4D4D4D"/>
+                </a:solidFill>
+                <a:latin typeface="Meiryo" pitchFamily="34" charset="0"/>
+                <a:ea typeface="Meiryo" pitchFamily="34" charset="-122"/>
+                <a:cs typeface="Meiryo" pitchFamily="34" charset="-120"/>
+              </a:rPr>
+              <a:t>1時間の人件費</a:t>
+            </a:r>
+            <a:endParaRPr lang="en-US" sz="800" dirty="0"/>
+          </a:p>
+        </p:txBody>
+      </p:sp>
+      <p:sp>
+        <p:nvSpPr>
+          <p:cNvPr id="20" name="Text 17"/>
+          <p:cNvSpPr txBox="1"/>
+          <p:nvPr/>
+        </p:nvSpPr>
+        <p:spPr>
+          <a:xfrm>
+            <a:off x="5833872" y="1234440"/>
+            <a:ext cx="274320" cy="548640"/>
+          </a:xfrm>
+          <a:prstGeom prst="rect">
+            <a:avLst/>
+          </a:prstGeom>
+          <a:noFill/>
+          <a:ln/>
+        </p:spPr>
+        <p:txBody>
+          <a:bodyPr wrap="square" lIns="0" tIns="0" rIns="0" bIns="0" rtlCol="0" anchor="ctr"/>
+          <a:lstStyle/>
+          <a:p>
+            <a:pPr algn="ctr" indent="0" marL="0">
+              <a:lnSpc>
+                <a:spcPct val="115000"/>
+              </a:lnSpc>
+              <a:buNone/>
+            </a:pPr>
+            <a:r>
+              <a:rPr lang="en-US" sz="2000" b="1" dirty="0">
+                <a:solidFill>
+                  <a:srgbClr val="1A1A1A"/>
+                </a:solidFill>
+                <a:latin typeface="Meiryo" pitchFamily="34" charset="0"/>
+                <a:ea typeface="Meiryo" pitchFamily="34" charset="-122"/>
+                <a:cs typeface="Meiryo" pitchFamily="34" charset="-120"/>
+              </a:rPr>
+              <a:t>＝</a:t>
+            </a:r>
+            <a:endParaRPr lang="en-US" sz="2000" dirty="0"/>
+          </a:p>
+        </p:txBody>
+      </p:sp>
+      <p:sp>
+        <p:nvSpPr>
+          <p:cNvPr id="21" name="Shape 18"/>
+          <p:cNvSpPr/>
+          <p:nvPr/>
+        </p:nvSpPr>
+        <p:spPr>
+          <a:xfrm>
+            <a:off x="6144768" y="1097280"/>
+            <a:ext cx="1600200" cy="822960"/>
           </a:xfrm>
           <a:prstGeom prst="rect">
             <a:avLst/>
@@ -24874,14 +26022,14 @@
       </p:sp>
       <p:sp>
         <p:nvSpPr>
-          <p:cNvPr id="18" name="Text 15"/>
+          <p:cNvPr id="22" name="Text 19"/>
           <p:cNvSpPr txBox="1"/>
           <p:nvPr/>
         </p:nvSpPr>
         <p:spPr>
           <a:xfrm>
-            <a:off x="5632704" y="1170432"/>
-            <a:ext cx="1737360" cy="457200"/>
+            <a:off x="6144768" y="1170432"/>
+            <a:ext cx="1600200" cy="457200"/>
           </a:xfrm>
           <a:prstGeom prst="rect">
             <a:avLst/>
@@ -24900,7 +26048,7 @@
               <a:buNone/>
             </a:pPr>
             <a:r>
-              <a:rPr lang="en-US" sz="1800" b="1" dirty="0">
+              <a:rPr lang="en-US" sz="1500" b="1" dirty="0">
                 <a:solidFill>
                   <a:srgbClr val="E3A774"/>
                 </a:solidFill>
@@ -24908,22 +26056,22 @@
                 <a:ea typeface="Meiryo" pitchFamily="34" charset="-122"/>
                 <a:cs typeface="Meiryo" pitchFamily="34" charset="-120"/>
               </a:rPr>
-              <a:t>月240万円</a:t>
-            </a:r>
-            <a:endParaRPr lang="en-US" sz="1800" dirty="0"/>
-          </a:p>
-        </p:txBody>
-      </p:sp>
-      <p:sp>
-        <p:nvSpPr>
-          <p:cNvPr id="19" name="Text 16"/>
+              <a:t>年479万円</a:t>
+            </a:r>
+            <a:endParaRPr lang="en-US" sz="1500" dirty="0"/>
+          </a:p>
+        </p:txBody>
+      </p:sp>
+      <p:sp>
+        <p:nvSpPr>
+          <p:cNvPr id="23" name="Text 20"/>
           <p:cNvSpPr txBox="1"/>
           <p:nvPr/>
         </p:nvSpPr>
         <p:spPr>
           <a:xfrm>
-            <a:off x="5632704" y="1609344"/>
-            <a:ext cx="1737360" cy="256032"/>
+            <a:off x="6144768" y="1609344"/>
+            <a:ext cx="1600200" cy="256032"/>
           </a:xfrm>
           <a:prstGeom prst="rect">
             <a:avLst/>
@@ -24942,7 +26090,7 @@
               <a:buNone/>
             </a:pPr>
             <a:r>
-              <a:rPr lang="en-US" sz="850" dirty="0">
+              <a:rPr lang="en-US" sz="800" dirty="0">
                 <a:solidFill>
                   <a:srgbClr val="FFFFFF"/>
                 </a:solidFill>
@@ -24952,19 +26100,19 @@
               </a:rPr>
               <a:t>浮く時間の価値</a:t>
             </a:r>
-            <a:endParaRPr lang="en-US" sz="850" dirty="0"/>
-          </a:p>
-        </p:txBody>
-      </p:sp>
-      <p:sp>
-        <p:nvSpPr>
-          <p:cNvPr id="20" name="Text 17"/>
+            <a:endParaRPr lang="en-US" sz="800" dirty="0"/>
+          </a:p>
+        </p:txBody>
+      </p:sp>
+      <p:sp>
+        <p:nvSpPr>
+          <p:cNvPr id="24" name="Text 21"/>
           <p:cNvSpPr txBox="1"/>
           <p:nvPr/>
         </p:nvSpPr>
         <p:spPr>
           <a:xfrm>
-            <a:off x="365760" y="2194560"/>
+            <a:off x="365760" y="2148840"/>
             <a:ext cx="2743200" cy="237744"/>
           </a:xfrm>
           <a:prstGeom prst="rect">
@@ -24992,7 +26140,7 @@
                 <a:ea typeface="Meiryo" pitchFamily="34" charset="-122"/>
                 <a:cs typeface="Meiryo" pitchFamily="34" charset="-120"/>
               </a:rPr>
-              <a:t>1か月あたり</a:t>
+              <a:t>1年あたり（2年目以降）</a:t>
             </a:r>
             <a:endParaRPr lang="en-US" sz="1000" dirty="0"/>
           </a:p>
@@ -25000,14 +26148,14 @@
       </p:sp>
       <p:sp>
         <p:nvSpPr>
-          <p:cNvPr id="21" name="Text 18"/>
+          <p:cNvPr id="25" name="Text 22"/>
           <p:cNvSpPr txBox="1"/>
           <p:nvPr/>
         </p:nvSpPr>
         <p:spPr>
           <a:xfrm>
-            <a:off x="365760" y="2514600"/>
-            <a:ext cx="1371600" cy="384048"/>
+            <a:off x="365760" y="2450592"/>
+            <a:ext cx="1188720" cy="365760"/>
           </a:xfrm>
           <a:prstGeom prst="rect">
             <a:avLst/>
@@ -25042,14 +26190,14 @@
       </p:sp>
       <p:sp>
         <p:nvSpPr>
-          <p:cNvPr id="22" name="Shape 19"/>
+          <p:cNvPr id="26" name="Shape 23"/>
           <p:cNvSpPr/>
           <p:nvPr/>
         </p:nvSpPr>
         <p:spPr>
           <a:xfrm>
-            <a:off x="1554480" y="2514600"/>
-            <a:ext cx="371475" cy="384048"/>
+            <a:off x="1554480" y="2450592"/>
+            <a:ext cx="2419502" cy="365760"/>
           </a:xfrm>
           <a:prstGeom prst="rect">
             <a:avLst/>
@@ -25062,14 +26210,14 @@
       </p:sp>
       <p:sp>
         <p:nvSpPr>
-          <p:cNvPr id="23" name="Text 20"/>
+          <p:cNvPr id="27" name="Text 24"/>
           <p:cNvSpPr txBox="1"/>
           <p:nvPr/>
         </p:nvSpPr>
         <p:spPr>
           <a:xfrm>
-            <a:off x="1999107" y="2514600"/>
-            <a:ext cx="3657600" cy="384048"/>
+            <a:off x="4047134" y="2450592"/>
+            <a:ext cx="2743200" cy="365760"/>
           </a:xfrm>
           <a:prstGeom prst="rect">
             <a:avLst/>
@@ -25088,7 +26236,7 @@
               <a:buNone/>
             </a:pPr>
             <a:r>
-              <a:rPr lang="en-US" sz="1050" dirty="0">
+              <a:rPr lang="en-US" sz="1000" dirty="0">
                 <a:solidFill>
                   <a:srgbClr val="1A1A1A"/>
                 </a:solidFill>
@@ -25096,22 +26244,22 @@
                 <a:ea typeface="Meiryo" pitchFamily="34" charset="-122"/>
                 <a:cs typeface="Meiryo" pitchFamily="34" charset="-120"/>
               </a:rPr>
-              <a:t>月25万円（初年度は導入支援込みで月42万円）</a:t>
-            </a:r>
-            <a:endParaRPr lang="en-US" sz="1050" dirty="0"/>
-          </a:p>
-        </p:txBody>
-      </p:sp>
-      <p:sp>
-        <p:nvSpPr>
-          <p:cNvPr id="24" name="Text 21"/>
+              <a:t>年353万円</a:t>
+            </a:r>
+            <a:endParaRPr lang="en-US" sz="1000" dirty="0"/>
+          </a:p>
+        </p:txBody>
+      </p:sp>
+      <p:sp>
+        <p:nvSpPr>
+          <p:cNvPr id="28" name="Text 25"/>
           <p:cNvSpPr txBox="1"/>
           <p:nvPr/>
         </p:nvSpPr>
         <p:spPr>
           <a:xfrm>
-            <a:off x="365760" y="3017520"/>
-            <a:ext cx="1371600" cy="384048"/>
+            <a:off x="365760" y="2907792"/>
+            <a:ext cx="1188720" cy="365760"/>
           </a:xfrm>
           <a:prstGeom prst="rect">
             <a:avLst/>
@@ -25146,14 +26294,14 @@
       </p:sp>
       <p:sp>
         <p:nvSpPr>
-          <p:cNvPr id="25" name="Shape 22"/>
+          <p:cNvPr id="29" name="Shape 26"/>
           <p:cNvSpPr/>
           <p:nvPr/>
         </p:nvSpPr>
         <p:spPr>
           <a:xfrm>
-            <a:off x="1554480" y="3017520"/>
-            <a:ext cx="3566160" cy="384048"/>
+            <a:off x="1554480" y="2907792"/>
+            <a:ext cx="3287917" cy="365760"/>
           </a:xfrm>
           <a:prstGeom prst="rect">
             <a:avLst/>
@@ -25166,14 +26314,14 @@
       </p:sp>
       <p:sp>
         <p:nvSpPr>
-          <p:cNvPr id="26" name="Text 23"/>
+          <p:cNvPr id="30" name="Text 27"/>
           <p:cNvSpPr txBox="1"/>
           <p:nvPr/>
         </p:nvSpPr>
         <p:spPr>
           <a:xfrm>
-            <a:off x="1645920" y="3017520"/>
-            <a:ext cx="3383280" cy="384048"/>
+            <a:off x="4915549" y="2907792"/>
+            <a:ext cx="2743200" cy="365760"/>
           </a:xfrm>
           <a:prstGeom prst="rect">
             <a:avLst/>
@@ -25185,30 +26333,30 @@
           <a:bodyPr wrap="square" lIns="0" tIns="0" rIns="0" bIns="0" rtlCol="0" anchor="ctr"/>
           <a:lstStyle/>
           <a:p>
-            <a:pPr algn="r" indent="0" marL="0">
-              <a:lnSpc>
-                <a:spcPct val="115000"/>
-              </a:lnSpc>
-              <a:buNone/>
-            </a:pPr>
-            <a:r>
-              <a:rPr lang="en-US" sz="1200" b="1" dirty="0">
-                <a:solidFill>
-                  <a:srgbClr val="FFFFFF"/>
-                </a:solidFill>
-                <a:latin typeface="Meiryo" pitchFamily="34" charset="0"/>
-                <a:ea typeface="Meiryo" pitchFamily="34" charset="-122"/>
-                <a:cs typeface="Meiryo" pitchFamily="34" charset="-120"/>
-              </a:rPr>
-              <a:t>月240万円</a:t>
-            </a:r>
-            <a:endParaRPr lang="en-US" sz="1200" dirty="0"/>
+            <a:pPr algn="l" indent="0" marL="0">
+              <a:lnSpc>
+                <a:spcPct val="115000"/>
+              </a:lnSpc>
+              <a:buNone/>
+            </a:pPr>
+            <a:r>
+              <a:rPr lang="en-US" sz="1000" dirty="0">
+                <a:solidFill>
+                  <a:srgbClr val="1A1A1A"/>
+                </a:solidFill>
+                <a:latin typeface="Meiryo" pitchFamily="34" charset="0"/>
+                <a:ea typeface="Meiryo" pitchFamily="34" charset="-122"/>
+                <a:cs typeface="Meiryo" pitchFamily="34" charset="-120"/>
+              </a:rPr>
+              <a:t>年479万円</a:t>
+            </a:r>
+            <a:endParaRPr lang="en-US" sz="1000" dirty="0"/>
           </a:p>
         </p:txBody>
       </p:sp>
       <p:pic>
         <p:nvPicPr>
-          <p:cNvPr id="27" name="Image 0" descr="preencoded.png">    </p:cNvPr>
+          <p:cNvPr id="31" name="Image 0" descr="preencoded.png">    </p:cNvPr>
           <p:cNvPicPr>
             <a:picLocks noChangeAspect="1"/>
           </p:cNvPicPr>
@@ -25222,8 +26370,8 @@
         </p:blipFill>
         <p:spPr>
           <a:xfrm>
-            <a:off x="7498080" y="2240280"/>
-            <a:ext cx="1104900" cy="1325880"/>
+            <a:off x="7589520" y="2148840"/>
+            <a:ext cx="1028700" cy="1234440"/>
           </a:xfrm>
           <a:prstGeom prst="rect">
             <a:avLst/>
@@ -25232,14 +26380,14 @@
       </p:pic>
       <p:sp>
         <p:nvSpPr>
-          <p:cNvPr id="28" name="Shape 24"/>
+          <p:cNvPr id="32" name="Shape 28"/>
           <p:cNvSpPr/>
           <p:nvPr/>
         </p:nvSpPr>
         <p:spPr>
           <a:xfrm flipH="1">
-            <a:off x="5623560" y="2057400"/>
-            <a:ext cx="1691640" cy="685800"/>
+            <a:off x="5989320" y="2011680"/>
+            <a:ext cx="1600200" cy="640080"/>
           </a:xfrm>
           <a:prstGeom prst="wedgeRoundRectCallout">
             <a:avLst/>
@@ -25257,14 +26405,14 @@
       </p:sp>
       <p:sp>
         <p:nvSpPr>
-          <p:cNvPr id="29" name="Text 25"/>
+          <p:cNvPr id="33" name="Text 29"/>
           <p:cNvSpPr txBox="1"/>
           <p:nvPr/>
         </p:nvSpPr>
         <p:spPr>
           <a:xfrm>
-            <a:off x="5696712" y="2093976"/>
-            <a:ext cx="1545336" cy="612648"/>
+            <a:off x="6062472" y="2048256"/>
+            <a:ext cx="1453896" cy="566928"/>
           </a:xfrm>
           <a:prstGeom prst="rect">
             <a:avLst/>
@@ -25283,7 +26431,7 @@
               <a:buNone/>
             </a:pPr>
             <a:r>
-              <a:rPr lang="en-US" sz="1100" b="1" dirty="0">
+              <a:rPr lang="en-US" sz="1050" b="1" dirty="0">
                 <a:solidFill>
                   <a:srgbClr val="1A1A1A"/>
                 </a:solidFill>
@@ -25291,9 +26439,9 @@
                 <a:ea typeface="Meiryo" pitchFamily="34" charset="-122"/>
                 <a:cs typeface="Meiryo" pitchFamily="34" charset="-120"/>
               </a:rPr>
-              <a:t>2か月で戻るなら</a:t>
-            </a:r>
-            <a:endParaRPr lang="en-US" sz="1100" dirty="0"/>
+              <a:t>1日26分減れば</a:t>
+            </a:r>
+            <a:endParaRPr lang="en-US" sz="1050" dirty="0"/>
           </a:p>
           <a:p>
             <a:pPr algn="ctr" indent="0" marL="0">
@@ -25303,7 +26451,7 @@
               <a:buNone/>
             </a:pPr>
             <a:r>
-              <a:rPr lang="en-US" sz="1100" b="1" dirty="0">
+              <a:rPr lang="en-US" sz="1050" b="1" dirty="0">
                 <a:solidFill>
                   <a:srgbClr val="1A1A1A"/>
                 </a:solidFill>
@@ -25311,22 +26459,22 @@
                 <a:ea typeface="Meiryo" pitchFamily="34" charset="-122"/>
                 <a:cs typeface="Meiryo" pitchFamily="34" charset="-120"/>
               </a:rPr>
-              <a:t>安い！</a:t>
-            </a:r>
-            <a:endParaRPr lang="en-US" sz="1100" dirty="0"/>
-          </a:p>
-        </p:txBody>
-      </p:sp>
-      <p:sp>
-        <p:nvSpPr>
-          <p:cNvPr id="30" name="Shape 26"/>
+              <a:t>元が取れるのか！</a:t>
+            </a:r>
+            <a:endParaRPr lang="en-US" sz="1050" dirty="0"/>
+          </a:p>
+        </p:txBody>
+      </p:sp>
+      <p:sp>
+        <p:nvSpPr>
+          <p:cNvPr id="34" name="Shape 30"/>
           <p:cNvSpPr/>
           <p:nvPr/>
         </p:nvSpPr>
         <p:spPr>
           <a:xfrm>
-            <a:off x="365760" y="3657600"/>
-            <a:ext cx="8412480" cy="987552"/>
+            <a:off x="365760" y="3566160"/>
+            <a:ext cx="8412480" cy="1078992"/>
           </a:xfrm>
           <a:prstGeom prst="rect">
             <a:avLst/>
@@ -25339,14 +26487,14 @@
       </p:sp>
       <p:sp>
         <p:nvSpPr>
-          <p:cNvPr id="31" name="Text 27"/>
+          <p:cNvPr id="35" name="Text 31"/>
           <p:cNvSpPr txBox="1"/>
           <p:nvPr/>
         </p:nvSpPr>
         <p:spPr>
           <a:xfrm>
-            <a:off x="502920" y="3657600"/>
-            <a:ext cx="8138160" cy="987552"/>
+            <a:off x="502920" y="3566160"/>
+            <a:ext cx="8138160" cy="1078992"/>
           </a:xfrm>
           <a:prstGeom prst="rect">
             <a:avLst/>
@@ -25363,12 +26511,12 @@
                 <a:spcPct val="115000"/>
               </a:lnSpc>
               <a:spcAft>
-                <a:spcPts val="200"/>
+                <a:spcPts val="100"/>
               </a:spcAft>
               <a:buNone/>
             </a:pPr>
             <a:r>
-              <a:rPr lang="en-US" sz="1000" b="1" dirty="0">
+              <a:rPr lang="en-US" sz="950" b="1" dirty="0">
                 <a:solidFill>
                   <a:srgbClr val="B8692E"/>
                 </a:solidFill>
@@ -25376,19 +26524,19 @@
                 <a:ea typeface="Meiryo" pitchFamily="34" charset="-122"/>
                 <a:cs typeface="Meiryo" pitchFamily="34" charset="-120"/>
               </a:rPr>
-              <a:t>元が取れるまで：</a:t>
+              <a:t>元が取れる条件：</a:t>
             </a:r>
             <a:pPr algn="l" indent="0" marL="0">
               <a:lnSpc>
                 <a:spcPct val="115000"/>
               </a:lnSpc>
               <a:spcAft>
-                <a:spcPts val="200"/>
+                <a:spcPts val="100"/>
               </a:spcAft>
               <a:buNone/>
             </a:pPr>
             <a:r>
-              <a:rPr lang="en-US" sz="1000" b="1" dirty="0">
+              <a:rPr lang="en-US" sz="950" b="1" dirty="0">
                 <a:solidFill>
                   <a:srgbClr val="1A1A1A"/>
                 </a:solidFill>
@@ -25396,9 +26544,9 @@
                 <a:ea typeface="Meiryo" pitchFamily="34" charset="-122"/>
                 <a:cs typeface="Meiryo" pitchFamily="34" charset="-120"/>
               </a:rPr>
-              <a:t>初年度の支払い 500万円 ÷ 月240万円 ＝ 約2.1か月</a:t>
-            </a:r>
-            <a:endParaRPr lang="en-US" sz="1000" dirty="0"/>
+              <a:t>払うお金353万円 ÷（10台×240日）÷ 1時間の人件費 ＝ 1台1日約26分</a:t>
+            </a:r>
+            <a:endParaRPr lang="en-US" sz="950" dirty="0"/>
           </a:p>
           <a:p>
             <a:pPr algn="l" indent="0" marL="0">
@@ -25406,12 +26554,12 @@
                 <a:spcPct val="115000"/>
               </a:lnSpc>
               <a:spcAft>
-                <a:spcPts val="200"/>
+                <a:spcPts val="100"/>
               </a:spcAft>
               <a:buNone/>
             </a:pPr>
             <a:r>
-              <a:rPr lang="en-US" sz="1000" b="1" dirty="0">
+              <a:rPr lang="en-US" sz="950" b="1" dirty="0">
                 <a:solidFill>
                   <a:srgbClr val="B8692E"/>
                 </a:solidFill>
@@ -25419,19 +26567,19 @@
                 <a:ea typeface="Meiryo" pitchFamily="34" charset="-122"/>
                 <a:cs typeface="Meiryo" pitchFamily="34" charset="-120"/>
               </a:rPr>
-              <a:t>月6時間って？</a:t>
+              <a:t>35分って？</a:t>
             </a:r>
             <a:pPr algn="l" indent="0" marL="0">
               <a:lnSpc>
                 <a:spcPct val="115000"/>
               </a:lnSpc>
               <a:spcAft>
-                <a:spcPts val="200"/>
+                <a:spcPts val="100"/>
               </a:spcAft>
               <a:buNone/>
             </a:pPr>
             <a:r>
-              <a:rPr lang="en-US" sz="1000" dirty="0">
+              <a:rPr lang="en-US" sz="950" dirty="0">
                 <a:solidFill>
                   <a:srgbClr val="1A1A1A"/>
                 </a:solidFill>
@@ -25439,9 +26587,9 @@
                 <a:ea typeface="Meiryo" pitchFamily="34" charset="-122"/>
                 <a:cs typeface="Meiryo" pitchFamily="34" charset="-120"/>
               </a:rPr>
-              <a:t>　6時間÷20日＝1日あたり約18分。朝の日報と夕方の写真整理がなくなるイメージ</a:t>
-            </a:r>
-            <a:endParaRPr lang="en-US" sz="1000" dirty="0"/>
+              <a:t>　職長の日報・撮影15分＋施工管理者の写真整理・写真台帳20分（実証で測る）</a:t>
+            </a:r>
+            <a:endParaRPr lang="en-US" sz="950" dirty="0"/>
           </a:p>
           <a:p>
             <a:pPr algn="l" indent="0" marL="0">
@@ -25449,12 +26597,12 @@
                 <a:spcPct val="115000"/>
               </a:lnSpc>
               <a:spcAft>
-                <a:spcPts val="200"/>
+                <a:spcPts val="100"/>
               </a:spcAft>
               <a:buNone/>
             </a:pPr>
             <a:r>
-              <a:rPr lang="en-US" sz="1000" b="1" dirty="0">
+              <a:rPr lang="en-US" sz="950" b="1" dirty="0">
                 <a:solidFill>
                   <a:srgbClr val="B8692E"/>
                 </a:solidFill>
@@ -25462,19 +26610,19 @@
                 <a:ea typeface="Meiryo" pitchFamily="34" charset="-122"/>
                 <a:cs typeface="Meiryo" pitchFamily="34" charset="-120"/>
               </a:rPr>
-              <a:t>1時間4,000円って？</a:t>
+              <a:t>1時間の人件費って？</a:t>
             </a:r>
             <a:pPr algn="l" indent="0" marL="0">
               <a:lnSpc>
                 <a:spcPct val="115000"/>
               </a:lnSpc>
               <a:spcAft>
-                <a:spcPts val="200"/>
+                <a:spcPts val="100"/>
               </a:spcAft>
               <a:buNone/>
             </a:pPr>
             <a:r>
-              <a:rPr lang="en-US" sz="1000" dirty="0">
+              <a:rPr lang="en-US" sz="950" dirty="0">
                 <a:solidFill>
                   <a:srgbClr val="1A1A1A"/>
                 </a:solidFill>
@@ -25482,9 +26630,52 @@
                 <a:ea typeface="Meiryo" pitchFamily="34" charset="-122"/>
                 <a:cs typeface="Meiryo" pitchFamily="34" charset="-120"/>
               </a:rPr>
-              <a:t>　年収600万円×1.3（社会保険など）÷年1,950時間</a:t>
-            </a:r>
-            <a:endParaRPr lang="en-US" sz="1000" dirty="0"/>
+              <a:t>　国の統計の年収×会社負担1.16÷残業を含む年2,000時間（電工約3,200円・施工管理約3,600円）</a:t>
+            </a:r>
+            <a:endParaRPr lang="en-US" sz="950" dirty="0"/>
+          </a:p>
+          <a:p>
+            <a:pPr algn="l" indent="0" marL="0">
+              <a:lnSpc>
+                <a:spcPct val="115000"/>
+              </a:lnSpc>
+              <a:spcAft>
+                <a:spcPts val="100"/>
+              </a:spcAft>
+              <a:buNone/>
+            </a:pPr>
+            <a:r>
+              <a:rPr lang="en-US" sz="950" b="1" dirty="0">
+                <a:solidFill>
+                  <a:srgbClr val="B8692E"/>
+                </a:solidFill>
+                <a:latin typeface="Meiryo" pitchFamily="34" charset="0"/>
+                <a:ea typeface="Meiryo" pitchFamily="34" charset="-122"/>
+                <a:cs typeface="Meiryo" pitchFamily="34" charset="-120"/>
+              </a:rPr>
+              <a:t>初年度は？</a:t>
+            </a:r>
+            <a:pPr algn="l" indent="0" marL="0">
+              <a:lnSpc>
+                <a:spcPct val="115000"/>
+              </a:lnSpc>
+              <a:spcAft>
+                <a:spcPts val="100"/>
+              </a:spcAft>
+              <a:buNone/>
+            </a:pPr>
+            <a:r>
+              <a:rPr lang="en-US" sz="950" dirty="0">
+                <a:solidFill>
+                  <a:srgbClr val="1A1A1A"/>
+                </a:solidFill>
+                <a:latin typeface="Meiryo" pitchFamily="34" charset="0"/>
+                <a:ea typeface="Meiryo" pitchFamily="34" charset="-122"/>
+                <a:cs typeface="Meiryo" pitchFamily="34" charset="-120"/>
+              </a:rPr>
+              <a:t>　導入支援200万円も払うので、約14か月で元が取れる</a:t>
+            </a:r>
+            <a:endParaRPr lang="en-US" sz="950" dirty="0"/>
           </a:p>
         </p:txBody>
       </p:sp>
@@ -25614,7 +26805,7 @@
                 <a:ea typeface="Meiryo" pitchFamily="34" charset="-122"/>
                 <a:cs typeface="Meiryo" pitchFamily="34" charset="-120"/>
               </a:rPr>
-              <a:t>つづき ─ 浮くのは時間だけじゃない</a:t>
+              <a:t>つづき ─ 計画に入れるのは、確かな分だけ</a:t>
             </a:r>
             <a:endParaRPr lang="en-US" sz="2000" dirty="0"/>
           </a:p>
@@ -25656,7 +26847,7 @@
                 <a:ea typeface="Meiryo" pitchFamily="34" charset="-122"/>
                 <a:cs typeface="Meiryo" pitchFamily="34" charset="-120"/>
               </a:rPr>
-              <a:t>時間・やり直し・新人の指導。3つ合わせて年約4,200万円</a:t>
+              <a:t>確かな分（書類の時間）で約1.4倍。手戻りも減れば約2.4倍</a:t>
             </a:r>
             <a:endParaRPr lang="en-US" sz="1200" dirty="0"/>
           </a:p>
@@ -25714,7 +26905,7 @@
         </p:nvSpPr>
         <p:spPr>
           <a:xfrm>
-            <a:off x="438912" y="1856232"/>
+            <a:off x="438912" y="1837944"/>
             <a:ext cx="1591056" cy="274320"/>
           </a:xfrm>
           <a:prstGeom prst="rect">
@@ -25734,7 +26925,7 @@
               <a:buNone/>
             </a:pPr>
             <a:r>
-              <a:rPr lang="en-US" sz="1050" b="1" dirty="0">
+              <a:rPr lang="en-US" sz="1000" b="1" dirty="0">
                 <a:solidFill>
                   <a:srgbClr val="1A1A1A"/>
                 </a:solidFill>
@@ -25742,9 +26933,9 @@
                 <a:ea typeface="Meiryo" pitchFamily="34" charset="-122"/>
                 <a:cs typeface="Meiryo" pitchFamily="34" charset="-120"/>
               </a:rPr>
-              <a:t>書類・報告の時間</a:t>
-            </a:r>
-            <a:endParaRPr lang="en-US" sz="1050" dirty="0"/>
+              <a:t>書類・写真整理の時間</a:t>
+            </a:r>
+            <a:endParaRPr lang="en-US" sz="1000" dirty="0"/>
           </a:p>
         </p:txBody>
       </p:sp>
@@ -25756,8 +26947,8 @@
         </p:nvSpPr>
         <p:spPr>
           <a:xfrm>
-            <a:off x="438912" y="2148840"/>
-            <a:ext cx="1591056" cy="365760"/>
+            <a:off x="438912" y="2112264"/>
+            <a:ext cx="1591056" cy="329184"/>
           </a:xfrm>
           <a:prstGeom prst="rect">
             <a:avLst/>
@@ -25776,7 +26967,7 @@
               <a:buNone/>
             </a:pPr>
             <a:r>
-              <a:rPr lang="en-US" sz="1500" b="1" dirty="0">
+              <a:rPr lang="en-US" sz="1400" b="1" dirty="0">
                 <a:solidFill>
                   <a:srgbClr val="B8692E"/>
                 </a:solidFill>
@@ -25784,9 +26975,9 @@
                 <a:ea typeface="Meiryo" pitchFamily="34" charset="-122"/>
                 <a:cs typeface="Meiryo" pitchFamily="34" charset="-120"/>
               </a:rPr>
-              <a:t>年2,880万円</a:t>
-            </a:r>
-            <a:endParaRPr lang="en-US" sz="1500" dirty="0"/>
+              <a:t>年479万円</a:t>
+            </a:r>
+            <a:endParaRPr lang="en-US" sz="1400" dirty="0"/>
           </a:p>
         </p:txBody>
       </p:sp>
@@ -25798,8 +26989,8 @@
         </p:nvSpPr>
         <p:spPr>
           <a:xfrm>
-            <a:off x="438912" y="2514600"/>
-            <a:ext cx="1591056" cy="411480"/>
+            <a:off x="438912" y="2441448"/>
+            <a:ext cx="1591056" cy="182880"/>
           </a:xfrm>
           <a:prstGeom prst="rect">
             <a:avLst/>
@@ -25818,17 +27009,17 @@
               <a:buNone/>
             </a:pPr>
             <a:r>
-              <a:rPr lang="en-US" sz="750" dirty="0">
-                <a:solidFill>
-                  <a:srgbClr val="4D4D4D"/>
-                </a:solidFill>
-                <a:latin typeface="Meiryo" pitchFamily="34" charset="0"/>
-                <a:ea typeface="Meiryo" pitchFamily="34" charset="-122"/>
-                <a:cs typeface="Meiryo" pitchFamily="34" charset="-120"/>
-              </a:rPr>
-              <a:t>100人×月6時間×12か月×4,000円</a:t>
-            </a:r>
-            <a:endParaRPr lang="en-US" sz="750" dirty="0"/>
+              <a:rPr lang="en-US" sz="850" b="1" dirty="0">
+                <a:solidFill>
+                  <a:srgbClr val="B8692E"/>
+                </a:solidFill>
+                <a:latin typeface="Meiryo" pitchFamily="34" charset="0"/>
+                <a:ea typeface="Meiryo" pitchFamily="34" charset="-122"/>
+                <a:cs typeface="Meiryo" pitchFamily="34" charset="-120"/>
+              </a:rPr>
+              <a:t>計画に入れる</a:t>
+            </a:r>
+            <a:endParaRPr lang="en-US" sz="850" dirty="0"/>
           </a:p>
         </p:txBody>
       </p:sp>
@@ -25840,8 +27031,8 @@
         </p:nvSpPr>
         <p:spPr>
           <a:xfrm>
-            <a:off x="2084832" y="1783080"/>
-            <a:ext cx="182880" cy="365760"/>
+            <a:off x="438912" y="2624328"/>
+            <a:ext cx="1591056" cy="329184"/>
           </a:xfrm>
           <a:prstGeom prst="rect">
             <a:avLst/>
@@ -25860,17 +27051,17 @@
               <a:buNone/>
             </a:pPr>
             <a:r>
-              <a:rPr lang="en-US" sz="1600" b="1" dirty="0">
-                <a:solidFill>
-                  <a:srgbClr val="1A1A1A"/>
-                </a:solidFill>
-                <a:latin typeface="Meiryo" pitchFamily="34" charset="0"/>
-                <a:ea typeface="Meiryo" pitchFamily="34" charset="-122"/>
-                <a:cs typeface="Meiryo" pitchFamily="34" charset="-120"/>
-              </a:rPr>
-              <a:t>＋</a:t>
-            </a:r>
-            <a:endParaRPr lang="en-US" sz="1600" dirty="0"/>
+              <a:rPr lang="en-US" sz="700" dirty="0">
+                <a:solidFill>
+                  <a:srgbClr val="4D4D4D"/>
+                </a:solidFill>
+                <a:latin typeface="Meiryo" pitchFamily="34" charset="0"/>
+                <a:ea typeface="Meiryo" pitchFamily="34" charset="-122"/>
+                <a:cs typeface="Meiryo" pitchFamily="34" charset="-120"/>
+              </a:rPr>
+              <a:t>10台×240日×（職長15分＋施工管理20分）</a:t>
+            </a:r>
+            <a:endParaRPr lang="en-US" sz="700" dirty="0"/>
           </a:p>
         </p:txBody>
       </p:sp>
@@ -25889,9 +27080,14 @@
             <a:avLst/>
           </a:prstGeom>
           <a:solidFill>
-            <a:srgbClr val="F2F2F2"/>
+            <a:srgbClr val="FFFFFF"/>
           </a:solidFill>
-          <a:ln/>
+          <a:ln w="9525">
+            <a:solidFill>
+              <a:srgbClr val="BFBFBF"/>
+            </a:solidFill>
+            <a:prstDash val="solid"/>
+          </a:ln>
         </p:spPr>
       </p:sp>
       <p:pic>
@@ -25926,7 +27122,7 @@
         </p:nvSpPr>
         <p:spPr>
           <a:xfrm>
-            <a:off x="2313432" y="1856232"/>
+            <a:off x="2313432" y="1837944"/>
             <a:ext cx="1591056" cy="274320"/>
           </a:xfrm>
           <a:prstGeom prst="rect">
@@ -25946,7 +27142,7 @@
               <a:buNone/>
             </a:pPr>
             <a:r>
-              <a:rPr lang="en-US" sz="1050" b="1" dirty="0">
+              <a:rPr lang="en-US" sz="1000" b="1" dirty="0">
                 <a:solidFill>
                   <a:srgbClr val="1A1A1A"/>
                 </a:solidFill>
@@ -25954,9 +27150,9 @@
                 <a:ea typeface="Meiryo" pitchFamily="34" charset="-122"/>
                 <a:cs typeface="Meiryo" pitchFamily="34" charset="-120"/>
               </a:rPr>
-              <a:t>手戻り・施工ミス</a:t>
-            </a:r>
-            <a:endParaRPr lang="en-US" sz="1050" dirty="0"/>
+              <a:t>手戻り（上振れ）</a:t>
+            </a:r>
+            <a:endParaRPr lang="en-US" sz="1000" dirty="0"/>
           </a:p>
         </p:txBody>
       </p:sp>
@@ -25968,8 +27164,8 @@
         </p:nvSpPr>
         <p:spPr>
           <a:xfrm>
-            <a:off x="2313432" y="2148840"/>
-            <a:ext cx="1591056" cy="365760"/>
+            <a:off x="2313432" y="2112264"/>
+            <a:ext cx="1591056" cy="329184"/>
           </a:xfrm>
           <a:prstGeom prst="rect">
             <a:avLst/>
@@ -25988,17 +27184,17 @@
               <a:buNone/>
             </a:pPr>
             <a:r>
-              <a:rPr lang="en-US" sz="1500" b="1" dirty="0">
-                <a:solidFill>
-                  <a:srgbClr val="B8692E"/>
-                </a:solidFill>
-                <a:latin typeface="Meiryo" pitchFamily="34" charset="0"/>
-                <a:ea typeface="Meiryo" pitchFamily="34" charset="-122"/>
-                <a:cs typeface="Meiryo" pitchFamily="34" charset="-120"/>
-              </a:rPr>
-              <a:t>年1,200万円</a:t>
-            </a:r>
-            <a:endParaRPr lang="en-US" sz="1500" dirty="0"/>
+              <a:rPr lang="en-US" sz="1400" b="1" dirty="0">
+                <a:solidFill>
+                  <a:srgbClr val="4D4D4D"/>
+                </a:solidFill>
+                <a:latin typeface="Meiryo" pitchFamily="34" charset="0"/>
+                <a:ea typeface="Meiryo" pitchFamily="34" charset="-122"/>
+                <a:cs typeface="Meiryo" pitchFamily="34" charset="-120"/>
+              </a:rPr>
+              <a:t>年360万円</a:t>
+            </a:r>
+            <a:endParaRPr lang="en-US" sz="1400" dirty="0"/>
           </a:p>
         </p:txBody>
       </p:sp>
@@ -26010,8 +27206,8 @@
         </p:nvSpPr>
         <p:spPr>
           <a:xfrm>
-            <a:off x="2313432" y="2514600"/>
-            <a:ext cx="1591056" cy="411480"/>
+            <a:off x="2313432" y="2441448"/>
+            <a:ext cx="1591056" cy="182880"/>
           </a:xfrm>
           <a:prstGeom prst="rect">
             <a:avLst/>
@@ -26030,7 +27226,7 @@
               <a:buNone/>
             </a:pPr>
             <a:r>
-              <a:rPr lang="en-US" sz="750" dirty="0">
+              <a:rPr lang="en-US" sz="850" b="1" dirty="0">
                 <a:solidFill>
                   <a:srgbClr val="4D4D4D"/>
                 </a:solidFill>
@@ -26038,9 +27234,9 @@
                 <a:ea typeface="Meiryo" pitchFamily="34" charset="-122"/>
                 <a:cs typeface="Meiryo" pitchFamily="34" charset="-120"/>
               </a:rPr>
-              <a:t>完成工事高30億円×手戻り2%×削減20%</a:t>
-            </a:r>
-            <a:endParaRPr lang="en-US" sz="750" dirty="0"/>
+              <a:t>測れたら上乗せ</a:t>
+            </a:r>
+            <a:endParaRPr lang="en-US" sz="850" dirty="0"/>
           </a:p>
         </p:txBody>
       </p:sp>
@@ -26052,8 +27248,8 @@
         </p:nvSpPr>
         <p:spPr>
           <a:xfrm>
-            <a:off x="3959352" y="1783080"/>
-            <a:ext cx="182880" cy="365760"/>
+            <a:off x="2313432" y="2624328"/>
+            <a:ext cx="1591056" cy="329184"/>
           </a:xfrm>
           <a:prstGeom prst="rect">
             <a:avLst/>
@@ -26072,17 +27268,17 @@
               <a:buNone/>
             </a:pPr>
             <a:r>
-              <a:rPr lang="en-US" sz="1600" b="1" dirty="0">
-                <a:solidFill>
-                  <a:srgbClr val="1A1A1A"/>
-                </a:solidFill>
-                <a:latin typeface="Meiryo" pitchFamily="34" charset="0"/>
-                <a:ea typeface="Meiryo" pitchFamily="34" charset="-122"/>
-                <a:cs typeface="Meiryo" pitchFamily="34" charset="-120"/>
-              </a:rPr>
-              <a:t>＋</a:t>
-            </a:r>
-            <a:endParaRPr lang="en-US" sz="1600" dirty="0"/>
+              <a:rPr lang="en-US" sz="700" dirty="0">
+                <a:solidFill>
+                  <a:srgbClr val="4D4D4D"/>
+                </a:solidFill>
+                <a:latin typeface="Meiryo" pitchFamily="34" charset="0"/>
+                <a:ea typeface="Meiryo" pitchFamily="34" charset="-122"/>
+                <a:cs typeface="Meiryo" pitchFamily="34" charset="-120"/>
+              </a:rPr>
+              <a:t>完成工事高30億円×2%×対象工種30%×削減20%</a:t>
+            </a:r>
+            <a:endParaRPr lang="en-US" sz="700" dirty="0"/>
           </a:p>
         </p:txBody>
       </p:sp>
@@ -26101,9 +27297,14 @@
             <a:avLst/>
           </a:prstGeom>
           <a:solidFill>
-            <a:srgbClr val="F2F2F2"/>
+            <a:srgbClr val="FFFFFF"/>
           </a:solidFill>
-          <a:ln/>
+          <a:ln w="9525">
+            <a:solidFill>
+              <a:srgbClr val="BFBFBF"/>
+            </a:solidFill>
+            <a:prstDash val="solid"/>
+          </a:ln>
         </p:spPr>
       </p:sp>
       <p:pic>
@@ -26138,7 +27339,7 @@
         </p:nvSpPr>
         <p:spPr>
           <a:xfrm>
-            <a:off x="4187952" y="1856232"/>
+            <a:off x="4187952" y="1837944"/>
             <a:ext cx="1591056" cy="274320"/>
           </a:xfrm>
           <a:prstGeom prst="rect">
@@ -26158,7 +27359,7 @@
               <a:buNone/>
             </a:pPr>
             <a:r>
-              <a:rPr lang="en-US" sz="1050" b="1" dirty="0">
+              <a:rPr lang="en-US" sz="1000" b="1" dirty="0">
                 <a:solidFill>
                   <a:srgbClr val="1A1A1A"/>
                 </a:solidFill>
@@ -26166,9 +27367,9 @@
                 <a:ea typeface="Meiryo" pitchFamily="34" charset="-122"/>
                 <a:cs typeface="Meiryo" pitchFamily="34" charset="-120"/>
               </a:rPr>
-              <a:t>新人の指導時間</a:t>
-            </a:r>
-            <a:endParaRPr lang="en-US" sz="1050" dirty="0"/>
+              <a:t>新人の指導</a:t>
+            </a:r>
+            <a:endParaRPr lang="en-US" sz="1000" dirty="0"/>
           </a:p>
         </p:txBody>
       </p:sp>
@@ -26180,8 +27381,8 @@
         </p:nvSpPr>
         <p:spPr>
           <a:xfrm>
-            <a:off x="4187952" y="2148840"/>
-            <a:ext cx="1591056" cy="365760"/>
+            <a:off x="4187952" y="2112264"/>
+            <a:ext cx="1591056" cy="329184"/>
           </a:xfrm>
           <a:prstGeom prst="rect">
             <a:avLst/>
@@ -26200,17 +27401,17 @@
               <a:buNone/>
             </a:pPr>
             <a:r>
-              <a:rPr lang="en-US" sz="1500" b="1" dirty="0">
-                <a:solidFill>
-                  <a:srgbClr val="B8692E"/>
-                </a:solidFill>
-                <a:latin typeface="Meiryo" pitchFamily="34" charset="0"/>
-                <a:ea typeface="Meiryo" pitchFamily="34" charset="-122"/>
-                <a:cs typeface="Meiryo" pitchFamily="34" charset="-120"/>
-              </a:rPr>
-              <a:t>年144万円</a:t>
-            </a:r>
-            <a:endParaRPr lang="en-US" sz="1500" dirty="0"/>
+              <a:rPr lang="en-US" sz="1400" b="1" dirty="0">
+                <a:solidFill>
+                  <a:srgbClr val="4D4D4D"/>
+                </a:solidFill>
+                <a:latin typeface="Meiryo" pitchFamily="34" charset="0"/>
+                <a:ea typeface="Meiryo" pitchFamily="34" charset="-122"/>
+                <a:cs typeface="Meiryo" pitchFamily="34" charset="-120"/>
+              </a:rPr>
+              <a:t>月数で測る</a:t>
+            </a:r>
+            <a:endParaRPr lang="en-US" sz="1400" dirty="0"/>
           </a:p>
         </p:txBody>
       </p:sp>
@@ -26222,8 +27423,8 @@
         </p:nvSpPr>
         <p:spPr>
           <a:xfrm>
-            <a:off x="4187952" y="2514600"/>
-            <a:ext cx="1591056" cy="411480"/>
+            <a:off x="4187952" y="2441448"/>
+            <a:ext cx="1591056" cy="182880"/>
           </a:xfrm>
           <a:prstGeom prst="rect">
             <a:avLst/>
@@ -26242,7 +27443,7 @@
               <a:buNone/>
             </a:pPr>
             <a:r>
-              <a:rPr lang="en-US" sz="750" dirty="0">
+              <a:rPr lang="en-US" sz="850" b="1" dirty="0">
                 <a:solidFill>
                   <a:srgbClr val="4D4D4D"/>
                 </a:solidFill>
@@ -26250,15 +27451,57 @@
                 <a:ea typeface="Meiryo" pitchFamily="34" charset="-122"/>
                 <a:cs typeface="Meiryo" pitchFamily="34" charset="-120"/>
               </a:rPr>
-              <a:t>新人5人×年240時間×削減30%×4,000円</a:t>
-            </a:r>
-            <a:endParaRPr lang="en-US" sz="750" dirty="0"/>
-          </a:p>
-        </p:txBody>
-      </p:sp>
-      <p:sp>
-        <p:nvSpPr>
-          <p:cNvPr id="22" name="Shape 16"/>
+              <a:t>金額にしない</a:t>
+            </a:r>
+            <a:endParaRPr lang="en-US" sz="850" dirty="0"/>
+          </a:p>
+        </p:txBody>
+      </p:sp>
+      <p:sp>
+        <p:nvSpPr>
+          <p:cNvPr id="22" name="Text 16"/>
+          <p:cNvSpPr txBox="1"/>
+          <p:nvPr/>
+        </p:nvSpPr>
+        <p:spPr>
+          <a:xfrm>
+            <a:off x="4187952" y="2624328"/>
+            <a:ext cx="1591056" cy="329184"/>
+          </a:xfrm>
+          <a:prstGeom prst="rect">
+            <a:avLst/>
+          </a:prstGeom>
+          <a:noFill/>
+          <a:ln/>
+        </p:spPr>
+        <p:txBody>
+          <a:bodyPr wrap="square" lIns="0" tIns="0" rIns="0" bIns="0" rtlCol="0" anchor="t"/>
+          <a:lstStyle/>
+          <a:p>
+            <a:pPr algn="ctr" indent="0" marL="0">
+              <a:lnSpc>
+                <a:spcPct val="115000"/>
+              </a:lnSpc>
+              <a:buNone/>
+            </a:pPr>
+            <a:r>
+              <a:rPr lang="en-US" sz="700" dirty="0">
+                <a:solidFill>
+                  <a:srgbClr val="4D4D4D"/>
+                </a:solidFill>
+                <a:latin typeface="Meiryo" pitchFamily="34" charset="0"/>
+                <a:ea typeface="Meiryo" pitchFamily="34" charset="-122"/>
+                <a:cs typeface="Meiryo" pitchFamily="34" charset="-120"/>
+              </a:rPr>
+              <a:t>金額にせず、独り立ちの月数で測る</a:t>
+            </a:r>
+            <a:endParaRPr lang="en-US" sz="700" dirty="0"/>
+          </a:p>
+        </p:txBody>
+      </p:sp>
+      <p:sp>
+        <p:nvSpPr>
+          <p:cNvPr id="23" name="Shape 17"/>
           <p:cNvSpPr/>
           <p:nvPr/>
         </p:nvSpPr>
@@ -26278,7 +27521,7 @@
       </p:sp>
       <p:sp>
         <p:nvSpPr>
-          <p:cNvPr id="23" name="Text 17"/>
+          <p:cNvPr id="24" name="Text 18"/>
           <p:cNvSpPr txBox="1"/>
           <p:nvPr/>
         </p:nvSpPr>
@@ -26312,7 +27555,7 @@
                 <a:ea typeface="Meiryo" pitchFamily="34" charset="-122"/>
                 <a:cs typeface="Meiryo" pitchFamily="34" charset="-120"/>
               </a:rPr>
-              <a:t>合計 </a:t>
+              <a:t>計画に入れる得 </a:t>
             </a:r>
             <a:pPr algn="l" indent="0" marL="0">
               <a:lnSpc>
@@ -26329,7 +27572,7 @@
                 <a:ea typeface="Meiryo" pitchFamily="34" charset="-122"/>
                 <a:cs typeface="Meiryo" pitchFamily="34" charset="-120"/>
               </a:rPr>
-              <a:t>年4,224万円</a:t>
+              <a:t>年479万円</a:t>
             </a:r>
             <a:pPr algn="l" indent="0" marL="0">
               <a:lnSpc>
@@ -26346,7 +27589,7 @@
                 <a:ea typeface="Meiryo" pitchFamily="34" charset="-122"/>
                 <a:cs typeface="Meiryo" pitchFamily="34" charset="-120"/>
               </a:rPr>
-              <a:t>　払うのは300万円 → 約14倍</a:t>
+              <a:t>　払うのは353万円 → 約1.4倍</a:t>
             </a:r>
             <a:endParaRPr lang="en-US" sz="1200" dirty="0"/>
           </a:p>
@@ -26354,7 +27597,7 @@
       </p:sp>
       <p:pic>
         <p:nvPicPr>
-          <p:cNvPr id="24" name="Image 3" descr="preencoded.png">    </p:cNvPr>
+          <p:cNvPr id="25" name="Image 3" descr="preencoded.png">    </p:cNvPr>
           <p:cNvPicPr>
             <a:picLocks noChangeAspect="1"/>
           </p:cNvPicPr>
@@ -26378,7 +27621,7 @@
       </p:pic>
       <p:sp>
         <p:nvSpPr>
-          <p:cNvPr id="25" name="Shape 18"/>
+          <p:cNvPr id="26" name="Shape 19"/>
           <p:cNvSpPr/>
           <p:nvPr/>
         </p:nvSpPr>
@@ -26403,7 +27646,7 @@
       </p:sp>
       <p:sp>
         <p:nvSpPr>
-          <p:cNvPr id="26" name="Text 19"/>
+          <p:cNvPr id="27" name="Text 20"/>
           <p:cNvSpPr txBox="1"/>
           <p:nvPr/>
         </p:nvSpPr>
@@ -26437,7 +27680,7 @@
                 <a:ea typeface="Meiryo" pitchFamily="34" charset="-122"/>
                 <a:cs typeface="Meiryo" pitchFamily="34" charset="-120"/>
               </a:rPr>
-              <a:t>人を増やせない今、</a:t>
+              <a:t>確かな分だけで</a:t>
             </a:r>
             <a:endParaRPr lang="en-US" sz="950" dirty="0"/>
           </a:p>
@@ -26457,7 +27700,7 @@
                 <a:ea typeface="Meiryo" pitchFamily="34" charset="-122"/>
                 <a:cs typeface="Meiryo" pitchFamily="34" charset="-120"/>
               </a:rPr>
-              <a:t>3.7人分の余力は</a:t>
+              <a:t>元が取れるなら</a:t>
             </a:r>
             <a:endParaRPr lang="en-US" sz="950" dirty="0"/>
           </a:p>
@@ -26477,7 +27720,7 @@
                 <a:ea typeface="Meiryo" pitchFamily="34" charset="-122"/>
                 <a:cs typeface="Meiryo" pitchFamily="34" charset="-120"/>
               </a:rPr>
-              <a:t>ありがたい！</a:t>
+              <a:t>安心だ</a:t>
             </a:r>
             <a:endParaRPr lang="en-US" sz="950" dirty="0"/>
           </a:p>
@@ -26485,7 +27728,7 @@
       </p:sp>
       <p:sp>
         <p:nvSpPr>
-          <p:cNvPr id="27" name="Shape 20"/>
+          <p:cNvPr id="28" name="Shape 21"/>
           <p:cNvSpPr/>
           <p:nvPr/>
         </p:nvSpPr>
@@ -26510,7 +27753,7 @@
       </p:sp>
       <p:sp>
         <p:nvSpPr>
-          <p:cNvPr id="28" name="Text 21"/>
+          <p:cNvPr id="29" name="Text 22"/>
           <p:cNvSpPr txBox="1"/>
           <p:nvPr/>
         </p:nvSpPr>
@@ -26544,7 +27787,7 @@
                 <a:ea typeface="Meiryo" pitchFamily="34" charset="-122"/>
                 <a:cs typeface="Meiryo" pitchFamily="34" charset="-120"/>
               </a:rPr>
-              <a:t>浮く時間 年7,200時間</a:t>
+              <a:t>浮く時間 年1,400時間</a:t>
             </a:r>
             <a:endParaRPr lang="en-US" sz="1050" dirty="0"/>
           </a:p>
@@ -26564,7 +27807,7 @@
                 <a:ea typeface="Meiryo" pitchFamily="34" charset="-122"/>
                 <a:cs typeface="Meiryo" pitchFamily="34" charset="-120"/>
               </a:rPr>
-              <a:t>＝3.7人分。残業上限の2割の余力</a:t>
+              <a:t>10台分。掛けた班の時間だけを数える</a:t>
             </a:r>
             <a:endParaRPr lang="en-US" sz="1050" dirty="0"/>
           </a:p>
@@ -26572,7 +27815,7 @@
       </p:sp>
       <p:sp>
         <p:nvSpPr>
-          <p:cNvPr id="29" name="Shape 22"/>
+          <p:cNvPr id="30" name="Shape 23"/>
           <p:cNvSpPr/>
           <p:nvPr/>
         </p:nvSpPr>
@@ -26592,7 +27835,7 @@
       </p:sp>
       <p:sp>
         <p:nvSpPr>
-          <p:cNvPr id="30" name="Text 23"/>
+          <p:cNvPr id="31" name="Text 24"/>
           <p:cNvSpPr txBox="1"/>
           <p:nvPr/>
         </p:nvSpPr>
@@ -26618,7 +27861,7 @@
               <a:buNone/>
             </a:pPr>
             <a:r>
-              <a:rPr lang="en-US" sz="1050" b="1" dirty="0">
+              <a:rPr lang="en-US" sz="1000" b="1" dirty="0">
                 <a:solidFill>
                   <a:srgbClr val="B8692E"/>
                 </a:solidFill>
@@ -26626,7 +27869,7 @@
                 <a:ea typeface="Meiryo" pitchFamily="34" charset="-122"/>
                 <a:cs typeface="Meiryo" pitchFamily="34" charset="-120"/>
               </a:rPr>
-              <a:t>前提を全部半分にしても：</a:t>
+              <a:t>大きく言わない：</a:t>
             </a:r>
             <a:pPr algn="l" indent="0" marL="0">
               <a:lnSpc>
@@ -26635,7 +27878,7 @@
               <a:buNone/>
             </a:pPr>
             <a:r>
-              <a:rPr lang="en-US" sz="1050" dirty="0">
+              <a:rPr lang="en-US" sz="1000" dirty="0">
                 <a:solidFill>
                   <a:srgbClr val="1A1A1A"/>
                 </a:solidFill>
@@ -26643,9 +27886,9 @@
                 <a:ea typeface="Meiryo" pitchFamily="34" charset="-122"/>
                 <a:cs typeface="Meiryo" pitchFamily="34" charset="-120"/>
               </a:rPr>
-              <a:t>年約2,100万円・約7倍。思いだけでなく、お金で得する仕組み</a:t>
-            </a:r>
-            <a:endParaRPr lang="en-US" sz="1050" dirty="0"/>
+              <a:t>得をするのは全員ではなく、メガネを掛けた班だけ。手戻りはAIの出来と当社の監修しだいなので、測れてから足す</a:t>
+            </a:r>
+            <a:endParaRPr lang="en-US" sz="1000" dirty="0"/>
           </a:p>
         </p:txBody>
       </p:sp>

--- a/deck/カンツギ_事業計画書_やさしい版.pptx
+++ b/deck/カンツギ_事業計画書_やさしい版.pptx
@@ -430,7 +430,7 @@
               <c:strCache>
                 <c:ptCount val="1"/>
                 <c:pt idx="0">
-                  <c:v>受託開発</c:v>
+                  <c:v>個社設定</c:v>
                 </c:pt>
               </c:strCache>
             </c:strRef>
@@ -1254,8 +1254,8 @@
             <a:r>
               <a:rPr lang="en-US" dirty="0"/>
               <a:t>【お金の話4・40秒】
-要約：社員1人で約4拠点を見れば黒字。5年目に届く
-なぜ最初は赤字なのか。社員1人にかかる費用は、給料と会社負担、採用費、家賃などを合わせて年約730万円。1拠点から残るのは216万円。割ると約3.4。新しいお客様は最初の年は半年分しか払わないので、年度末に数えると1人約4拠点が目安です。社員は、営業だけでなく技術やサポートの人も含めた全員です。人を先に雇うので4年目までは赤字、5年目に3.86となって黒字に届きます。</a:t>
+要約：社員1人で約4拠点を見れば黒字。10台のままでは5年目でも届かない
+なぜ赤字が続くのか。社員1人にかかる費用は、給料と会社負担、採用費、家賃などを合わせて年約753万円。1拠点から残るのは216万円。割ると約3.5。新しいお客様は最初の年は半年分しか払わないので、年度末に数えると1人約4拠点が目安です。社員は、営業だけでなく技術や導入コンサルタントも含めた全員です。人を先に雇うので、10台のままでは5年目でも3.52で届きません。だから、効果が出た班からメガネを増やしてもらいます。</a:t>
             </a:r>
             <a:endParaRPr lang="en-US" dirty="0"/>
           </a:p>
@@ -1345,7 +1345,7 @@
               <a:rPr lang="en-US" dirty="0"/>
               <a:t>【お金の話5・40秒】
 要約：去年のお客様が今年も払う。売上は雪だるま式
-利用料は毎年いただくので、去年までのお客様の分が今年の売上に乗ります。解約は毎年1割と控えめに見ています。5年目の売上約269百万円のうち、54%は前の年までのお客様からの利用料です。新しいお客様が増えるたびに、雪だるまのように大きくなります。営業利益は5年目に黒字になります。</a:t>
+利用料は毎年いただくので、去年までのお客様の分が今年の売上に乗ります。解約は毎年1割と控えめに見ています。5年目の売上約269百万円のうち、54%は前の年までのお客様からの利用料です。新しいお客様が増えるたびに、雪だるまのように大きくなります。10台のままでは5年目もまだ赤字で、1拠点15台に増やせれば5年目に黒字です。</a:t>
             </a:r>
             <a:endParaRPr lang="en-US" dirty="0"/>
           </a:p>
@@ -1525,7 +1525,7 @@
               <a:rPr lang="en-US" dirty="0"/>
               <a:t>【お金の話7・40秒】
 要約：黒字の鍵は、1拠点の台数。止まる線も先に決める
-うまくいかなかったらどうするか。新しいお客様が計画に届かなかった場合を計算しました。1拠点10台のままだと、計画の9割を割ると5年以内に黒字になりません。でも、効果が出た班から台数を増やして15台にできれば、計画の6割でも5年目に黒字です。だから大事なのは、拠点の数より、1拠点で使ってもらう台数です。そして止まる線を先に決めます。実証で1台1日26分減れば進む、15分未満なら撤退。1年目の終わりに、試してくれた3社のうち本契約が0社なら撤退か方向転換。2年目に新しい拠点が5つに届かなければ、採用を止めます。</a:t>
+うまくいかなかったらどうするか。計算すると、1拠点10台のままだと、計画どおりにお客様が増えても5年以内に黒字になりません。でも、効果が出た班から台数を増やして15台にできれば、新しいお客様が計画の6割でも5年目に黒字です。だから大事なのは、拠点の数より、1拠点で使ってもらう台数です。そして止まる線を先に決めます。実証で1台1日23分減れば進む、15分未満なら撤退。1年目の終わりに、試してくれた3社のうち本契約が0社なら撤退か方向転換。2年目の終わりに平均12台に届かなければ、採用を止めます。</a:t>
             </a:r>
             <a:endParaRPr lang="en-US" dirty="0"/>
           </a:p>
@@ -1615,7 +1615,7 @@
               <a:rPr lang="en-US" dirty="0"/>
               <a:t>【準備期・30秒】
 要約：準備期の6か月で、最初の1拠点を動かす
-最初の6か月は準備期です。費用は約500万円で、自己資金と補助金でまかないます。私の給料はゼロです。3か月で試作品、6か月で1拠点の実証。1台1日26分減ったかどうかを確かめます。その結果を持って、公庫の融資とベンチャーキャピタルの出資を受けます。</a:t>
+最初の6か月は準備期です。費用は約500万円で、自己資金でまかないます。私の給料はゼロです。3か月で試作品、6か月で1拠点の実証。1台1日23分減ったか、メガネで1日記録できるかを確かめます。合格したら、自己資金の2億円を入れて、仲間を採用します。</a:t>
             </a:r>
             <a:endParaRPr lang="en-US" dirty="0"/>
           </a:p>
@@ -1795,7 +1795,7 @@
               <a:rPr lang="en-US" dirty="0"/>
               <a:t>【ツッコミ対策・40秒】
 要約：3つのツッコミには、この一言で返す
-よく聞かれる3つの質問への答えです。本当に300万円も払うのか。1台1日26分減れば元が取れます。想定は35分で、実証で測ります。なぜ赤字が続くのか。人を先に雇うからで、社員1人約4拠点を超えたら黒字になります。真似されないか。現場の記録は使うほど貯まり、後から来た会社には移せません。</a:t>
+よく聞かれる3つの質問への答えです。本当に300万円も払うのか。1台1日23分減れば元が取れます。想定は35分で、実証で測ります。なぜ赤字が続くのか。人を先に雇うからで、社員1人約4拠点を超えたら黒字になります。だから台数を増やしてもらいます。真似されないか。現場の記録は使うほど貯まり、後から来た会社には移せません。</a:t>
             </a:r>
             <a:endParaRPr lang="en-US" dirty="0"/>
           </a:p>
@@ -2155,7 +2155,7 @@
               <a:rPr lang="en-US" dirty="0"/>
               <a:t>【第2話・40秒】
 要約：メガネを掛けて、いつも通り働くだけ
-そこで、スマートグラスを掛けてもらいます。全員ではなく、1つの班に1台、職長が掛けます。田中さんは、いつも通り作業するだけ。動画と会話をAIが整理して、三つの形で渡します。若手には、図面とのズレをその場で表示。管理者には、報告書を自動で作成。そして後から、教材にします。</a:t>
+そこで、普段のメガネと同じ軽さのAIグラスを掛けてもらいます。全員ではなく、1つの班に1台、職長が掛けます。田中さんは、いつも通り作業するだけ。動画と会話をAIが整理して、三つの形で渡します。若手には、図面とのズレをその場で表示。管理者には、報告書を自動で作成。そして後から、教材にします。</a:t>
             </a:r>
             <a:endParaRPr lang="en-US" dirty="0"/>
           </a:p>
@@ -2425,7 +2425,7 @@
               <a:rPr lang="en-US" dirty="0"/>
               <a:t>【お金の話1・40秒】
 要約：会社の基盤 月5万円＋メガネ1台 月2万円。10台で年300万円
-では、誰が何にいくら払うのか。払うのは電気工事会社です。1拠点、つまり1つの支店や営業所で、会社のデータ置き場や管理画面の基盤に月5万円、メガネ1台ごとに月2万円。標準の10台なら月25万円、年300万円です。メガネ本体は、お客様がリース会社から借ります。10台で年約53万円です。初年度だけ、私たちが2か月現場に入る導入支援に200万円いただきます。スマホの契約と同じで、初期設定は最初だけ、月額は毎月です。</a:t>
+では、誰が何にいくら払うのか。払うのは電気工事会社です。1拠点、つまり1つの支店や営業所で、会社のデータ置き場や管理画面の基盤に月5万円、メガネ1台ごとに月2万円。標準の10台なら月25万円、年300万円です。報告書の形に整えるところまで、この中に入っています。メガネ本体は、お客様の名前でリースし、手続きは私たちが代わりにします。10台で年約32万円です。初年度だけ、私たちが2か月現場に入る導入支援に200万円いただきます。スマホの契約と同じで、初期設定は最初だけ、月額は毎月です。</a:t>
             </a:r>
             <a:endParaRPr lang="en-US" dirty="0"/>
           </a:p>
@@ -2514,8 +2514,8 @@
             <a:r>
               <a:rPr lang="en-US" dirty="0"/>
               <a:t>【お金の話2・40秒】
-要約：1台1日35分減ると年479万円。26分減れば元が取れる
-なぜ工事部長は払うのか。メガネを掛けた班では、職長の日報と撮影が1日15分、施工管理者の写真整理と写真台帳が20分減ると考えています。10台を年240日使うと、浮く時間の価値は年約479万円。1時間の人件費は、国の統計の年収に会社が払う社会保険料を足し、残業を含む年2,000時間で割った約3,400円です。お客様が払うのは利用料とリースで年約353万円なので、約1.4倍。逆に言えば、1台1日26分減れば元が取れます。これを実証の合格ラインにします。</a:t>
+要約：1台1日35分減ると年499万円。23分減れば元が取れる
+なぜ工事部長は払うのか。メガネを掛けた班では、職長の日報と撮影が1日15分、施工管理者の写真整理と写真台帳が20分減ると考えています。10台を年240日使うと、浮く時間の価値は年約499万円。1時間の人件費は、国の統計の年収に会社が払う社会保険料を足し、残業を含む年1,938時間で割った約3,560円です。お客様が払うのは利用料とリースで年約332万円なので、約1.5倍。逆に言えば、1台1日23分減れば元が取れます。これを実証の合格ラインにします。</a:t>
             </a:r>
             <a:endParaRPr lang="en-US" dirty="0"/>
           </a:p>
@@ -2605,7 +2605,7 @@
               <a:rPr lang="en-US" dirty="0"/>
               <a:t>【お金の話2つづき・40秒】
 要約：計画に入れるのは確かな分だけ。手戻りは測れたら上乗せ
-工事部長が得するのは、書類の時間だけではありません。やり直しが減れば、ARが効く工種だけでも年約360万円。ただ、これはAIの出来と私たちの監修次第なので、実証で測れるまで計画には入れません。新人の指導は、他の仕事と混ざっていて測れないので、金額にせず、独り立ちまでの月数で測ります。確かな分だけで約1.4倍、手戻りも減れば約2.4倍です。</a:t>
+工事部長が得するのは、書類の時間だけではありません。やり直しが減れば、ARが効く工種だけでも年約360万円。ただ、これはAIの出来と私たちの監修次第なので、実証で測れるまで計画には入れません。新人の指導は、他の仕事と混ざっていて測れないので、金額にせず、独り立ちまでの月数で測ります。確かな分だけで約1.5倍、手戻りも減れば約2.6倍です。</a:t>
             </a:r>
             <a:endParaRPr lang="en-US" dirty="0"/>
           </a:p>
@@ -3444,7 +3444,7 @@
                 <a:ea typeface="Meiryo" pitchFamily="34" charset="-122"/>
                 <a:cs typeface="Meiryo" pitchFamily="34" charset="-120"/>
               </a:rPr>
-              <a:t>1台1日26分</a:t>
+              <a:t>1台1日23分</a:t>
             </a:r>
             <a:endParaRPr lang="en-US" sz="2400" dirty="0"/>
           </a:p>
@@ -5571,7 +5571,7 @@
                 <a:ea typeface="Meiryo" pitchFamily="34" charset="-122"/>
                 <a:cs typeface="Meiryo" pitchFamily="34" charset="-120"/>
               </a:rPr>
-              <a:t>なぜ最初は赤字？ 合言葉は「4」</a:t>
+              <a:t>なぜ赤字が続く？ 合言葉は「4」</a:t>
             </a:r>
             <a:endParaRPr lang="en-US" sz="2000" dirty="0"/>
           </a:p>
@@ -5613,7 +5613,7 @@
                 <a:ea typeface="Meiryo" pitchFamily="34" charset="-122"/>
                 <a:cs typeface="Meiryo" pitchFamily="34" charset="-120"/>
               </a:rPr>
-              <a:t>社員1人で約4拠点を見られれば黒字。5年目に届く</a:t>
+              <a:t>社員1人で約4拠点を見られれば黒字。10台のままでは5年目でも3.52</a:t>
             </a:r>
             <a:endParaRPr lang="en-US" sz="1200" dirty="0"/>
           </a:p>
@@ -5695,7 +5695,7 @@
                 <a:ea typeface="Meiryo" pitchFamily="34" charset="-122"/>
                 <a:cs typeface="Meiryo" pitchFamily="34" charset="-120"/>
               </a:rPr>
-              <a:t>年734万円</a:t>
+              <a:t>年753万円</a:t>
             </a:r>
             <a:endParaRPr lang="en-US" sz="950" dirty="0"/>
           </a:p>
@@ -5841,7 +5841,7 @@
                 <a:ea typeface="Meiryo" pitchFamily="34" charset="-122"/>
                 <a:cs typeface="Meiryo" pitchFamily="34" charset="-120"/>
               </a:rPr>
-              <a:t>＝ 3.4　→　</a:t>
+              <a:t>＝ 3.5　→　</a:t>
             </a:r>
             <a:pPr algn="ctr" indent="0" marL="0">
               <a:lnSpc>
@@ -6141,8 +6141,8 @@
         </p:nvSpPr>
         <p:spPr>
           <a:xfrm>
-            <a:off x="4800600" y="3444240"/>
-            <a:ext cx="502920" cy="350520"/>
+            <a:off x="4800600" y="3514344"/>
+            <a:ext cx="502920" cy="280416"/>
           </a:xfrm>
           <a:prstGeom prst="rect">
             <a:avLst/>
@@ -6161,7 +6161,7 @@
         </p:nvSpPr>
         <p:spPr>
           <a:xfrm>
-            <a:off x="4663440" y="3206496"/>
+            <a:off x="4663440" y="3276600"/>
             <a:ext cx="777240" cy="219456"/>
           </a:xfrm>
           <a:prstGeom prst="rect">
@@ -6189,7 +6189,7 @@
                 <a:ea typeface="Meiryo" pitchFamily="34" charset="-122"/>
                 <a:cs typeface="Meiryo" pitchFamily="34" charset="-120"/>
               </a:rPr>
-              <a:t>0.75</a:t>
+              <a:t>0.60</a:t>
             </a:r>
             <a:endParaRPr lang="en-US" sz="1000" dirty="0"/>
           </a:p>
@@ -6273,7 +6273,7 @@
                 <a:ea typeface="Meiryo" pitchFamily="34" charset="-122"/>
                 <a:cs typeface="Meiryo" pitchFamily="34" charset="-120"/>
               </a:rPr>
-              <a:t>3拠点÷4人</a:t>
+              <a:t>3拠点÷5人</a:t>
             </a:r>
             <a:endParaRPr lang="en-US" sz="750" dirty="0"/>
           </a:p>
@@ -6287,8 +6287,8 @@
         </p:nvSpPr>
         <p:spPr>
           <a:xfrm>
-            <a:off x="5586984" y="2993571"/>
-            <a:ext cx="502920" cy="801189"/>
+            <a:off x="5586984" y="3093720"/>
+            <a:ext cx="502920" cy="701040"/>
           </a:xfrm>
           <a:prstGeom prst="rect">
             <a:avLst/>
@@ -6307,7 +6307,7 @@
         </p:nvSpPr>
         <p:spPr>
           <a:xfrm>
-            <a:off x="5449824" y="2755827"/>
+            <a:off x="5449824" y="2855976"/>
             <a:ext cx="777240" cy="219456"/>
           </a:xfrm>
           <a:prstGeom prst="rect">
@@ -6335,7 +6335,7 @@
                 <a:ea typeface="Meiryo" pitchFamily="34" charset="-122"/>
                 <a:cs typeface="Meiryo" pitchFamily="34" charset="-120"/>
               </a:rPr>
-              <a:t>1.71</a:t>
+              <a:t>1.50</a:t>
             </a:r>
             <a:endParaRPr lang="en-US" sz="1000" dirty="0"/>
           </a:p>
@@ -6419,7 +6419,7 @@
                 <a:ea typeface="Meiryo" pitchFamily="34" charset="-122"/>
                 <a:cs typeface="Meiryo" pitchFamily="34" charset="-120"/>
               </a:rPr>
-              <a:t>12拠点÷7人</a:t>
+              <a:t>12拠点÷8人</a:t>
             </a:r>
             <a:endParaRPr lang="en-US" sz="750" dirty="0"/>
           </a:p>
@@ -6433,8 +6433,8 @@
         </p:nvSpPr>
         <p:spPr>
           <a:xfrm>
-            <a:off x="6373368" y="2562629"/>
-            <a:ext cx="502920" cy="1232131"/>
+            <a:off x="6373368" y="2665307"/>
+            <a:ext cx="502920" cy="1129453"/>
           </a:xfrm>
           <a:prstGeom prst="rect">
             <a:avLst/>
@@ -6453,7 +6453,7 @@
         </p:nvSpPr>
         <p:spPr>
           <a:xfrm>
-            <a:off x="6236208" y="2324885"/>
+            <a:off x="6236208" y="2427563"/>
             <a:ext cx="777240" cy="219456"/>
           </a:xfrm>
           <a:prstGeom prst="rect">
@@ -6481,7 +6481,7 @@
                 <a:ea typeface="Meiryo" pitchFamily="34" charset="-122"/>
                 <a:cs typeface="Meiryo" pitchFamily="34" charset="-120"/>
               </a:rPr>
-              <a:t>2.64</a:t>
+              <a:t>2.42</a:t>
             </a:r>
             <a:endParaRPr lang="en-US" sz="1000" dirty="0"/>
           </a:p>
@@ -6565,7 +6565,7 @@
                 <a:ea typeface="Meiryo" pitchFamily="34" charset="-122"/>
                 <a:cs typeface="Meiryo" pitchFamily="34" charset="-120"/>
               </a:rPr>
-              <a:t>29拠点÷11人</a:t>
+              <a:t>29拠点÷12人</a:t>
             </a:r>
             <a:endParaRPr lang="en-US" sz="750" dirty="0"/>
           </a:p>
@@ -6579,8 +6579,8 @@
         </p:nvSpPr>
         <p:spPr>
           <a:xfrm>
-            <a:off x="7159752" y="2337696"/>
-            <a:ext cx="502920" cy="1457064"/>
+            <a:off x="7159752" y="2418644"/>
+            <a:ext cx="502920" cy="1376116"/>
           </a:xfrm>
           <a:prstGeom prst="rect">
             <a:avLst/>
@@ -6599,7 +6599,7 @@
         </p:nvSpPr>
         <p:spPr>
           <a:xfrm>
-            <a:off x="7022592" y="2099952"/>
+            <a:off x="7022592" y="2180900"/>
             <a:ext cx="777240" cy="219456"/>
           </a:xfrm>
           <a:prstGeom prst="rect">
@@ -6627,7 +6627,7 @@
                 <a:ea typeface="Meiryo" pitchFamily="34" charset="-122"/>
                 <a:cs typeface="Meiryo" pitchFamily="34" charset="-120"/>
               </a:rPr>
-              <a:t>3.12</a:t>
+              <a:t>2.94</a:t>
             </a:r>
             <a:endParaRPr lang="en-US" sz="1000" dirty="0"/>
           </a:p>
@@ -6711,7 +6711,7 @@
                 <a:ea typeface="Meiryo" pitchFamily="34" charset="-122"/>
                 <a:cs typeface="Meiryo" pitchFamily="34" charset="-120"/>
               </a:rPr>
-              <a:t>53拠点÷17人</a:t>
+              <a:t>53拠点÷18人</a:t>
             </a:r>
             <a:endParaRPr lang="en-US" sz="750" dirty="0"/>
           </a:p>
@@ -6725,14 +6725,14 @@
         </p:nvSpPr>
         <p:spPr>
           <a:xfrm>
-            <a:off x="7946136" y="1992086"/>
-            <a:ext cx="502920" cy="1802674"/>
+            <a:off x="7946136" y="2148840"/>
+            <a:ext cx="502920" cy="1645920"/>
           </a:xfrm>
           <a:prstGeom prst="rect">
             <a:avLst/>
           </a:prstGeom>
           <a:solidFill>
-            <a:srgbClr val="B8692E"/>
+            <a:srgbClr val="1A1A1A"/>
           </a:solidFill>
           <a:ln/>
         </p:spPr>
@@ -6745,7 +6745,7 @@
         </p:nvSpPr>
         <p:spPr>
           <a:xfrm>
-            <a:off x="7808976" y="1754342"/>
+            <a:off x="7808976" y="1911096"/>
             <a:ext cx="777240" cy="219456"/>
           </a:xfrm>
           <a:prstGeom prst="rect">
@@ -6773,7 +6773,7 @@
                 <a:ea typeface="Meiryo" pitchFamily="34" charset="-122"/>
                 <a:cs typeface="Meiryo" pitchFamily="34" charset="-120"/>
               </a:rPr>
-              <a:t>3.86</a:t>
+              <a:t>3.52</a:t>
             </a:r>
             <a:endParaRPr lang="en-US" sz="1000" dirty="0"/>
           </a:p>
@@ -6857,7 +6857,7 @@
                 <a:ea typeface="Meiryo" pitchFamily="34" charset="-122"/>
                 <a:cs typeface="Meiryo" pitchFamily="34" charset="-120"/>
               </a:rPr>
-              <a:t>81拠点÷21人</a:t>
+              <a:t>81拠点÷23人</a:t>
             </a:r>
             <a:endParaRPr lang="en-US" sz="750" dirty="0"/>
           </a:p>
@@ -7009,7 +7009,7 @@
                 <a:ea typeface="Meiryo" pitchFamily="34" charset="-122"/>
                 <a:cs typeface="Meiryo" pitchFamily="34" charset="-120"/>
               </a:rPr>
-              <a:t>4年目までは赤字。</a:t>
+              <a:t>5年目でもまだ赤字。</a:t>
             </a:r>
             <a:endParaRPr lang="en-US" sz="950" dirty="0"/>
           </a:p>
@@ -7029,7 +7029,7 @@
                 <a:ea typeface="Meiryo" pitchFamily="34" charset="-122"/>
                 <a:cs typeface="Meiryo" pitchFamily="34" charset="-120"/>
               </a:rPr>
-              <a:t>5年目に黒字！</a:t>
+              <a:t>台数を増やして届かせる！</a:t>
             </a:r>
             <a:endParaRPr lang="en-US" sz="950" dirty="0"/>
           </a:p>
@@ -7071,7 +7071,7 @@
                 <a:ea typeface="Meiryo" pitchFamily="34" charset="-122"/>
                 <a:cs typeface="Meiryo" pitchFamily="34" charset="-120"/>
               </a:rPr>
-              <a:t>社員1人の費用＝5年目の販管費15,423万円÷21人（営業・技術・サポートの全員。給料・会社負担・採用費・家賃などを含む）。銅色は黒字の年</a:t>
+              <a:t>社員1人の費用＝5年目の販管費17,313万円÷23人（営業・技術・導入コンサルタントの全員。給料・会社負担・採用費・家賃などを含む）</a:t>
             </a:r>
             <a:endParaRPr lang="en-US" sz="800" dirty="0"/>
           </a:p>
@@ -7595,7 +7595,7 @@
                           <a:ea typeface="Meiryo" pitchFamily="34" charset="-122"/>
                           <a:cs typeface="Meiryo" pitchFamily="34" charset="-120"/>
                         </a:rPr>
-                        <a:t>▲40</a:t>
+                        <a:t>▲48</a:t>
                       </a:r>
                       <a:endParaRPr lang="en-US" sz="1000" dirty="0">
                         <a:latin typeface="Meiryo" charset="0"/>
@@ -7747,7 +7747,7 @@
                           <a:ea typeface="Meiryo" pitchFamily="34" charset="-122"/>
                           <a:cs typeface="Meiryo" pitchFamily="34" charset="-120"/>
                         </a:rPr>
-                        <a:t>▲39</a:t>
+                        <a:t>▲48</a:t>
                       </a:r>
                       <a:endParaRPr lang="en-US" sz="1000" dirty="0">
                         <a:latin typeface="Meiryo" charset="0"/>
@@ -7899,7 +7899,7 @@
                           <a:ea typeface="Meiryo" pitchFamily="34" charset="-122"/>
                           <a:cs typeface="Meiryo" pitchFamily="34" charset="-120"/>
                         </a:rPr>
-                        <a:t>▲27</a:t>
+                        <a:t>▲37</a:t>
                       </a:r>
                       <a:endParaRPr lang="en-US" sz="1000" dirty="0">
                         <a:latin typeface="Meiryo" charset="0"/>
@@ -8051,7 +8051,7 @@
                           <a:ea typeface="Meiryo" pitchFamily="34" charset="-122"/>
                           <a:cs typeface="Meiryo" pitchFamily="34" charset="-120"/>
                         </a:rPr>
-                        <a:t>▲28</a:t>
+                        <a:t>▲39</a:t>
                       </a:r>
                       <a:endParaRPr lang="en-US" sz="1000" dirty="0">
                         <a:latin typeface="Meiryo" charset="0"/>
@@ -8195,15 +8195,15 @@
                         <a:buNone/>
                       </a:pPr>
                       <a:r>
-                        <a:rPr lang="en-US" sz="1000" b="1" dirty="0">
+                        <a:rPr lang="en-US" sz="1000" dirty="0">
                           <a:solidFill>
-                            <a:srgbClr val="B8692E"/>
+                            <a:srgbClr val="4D4D4D"/>
                           </a:solidFill>
                           <a:latin typeface="Meiryo" pitchFamily="34" charset="0"/>
                           <a:ea typeface="Meiryo" pitchFamily="34" charset="-122"/>
                           <a:cs typeface="Meiryo" pitchFamily="34" charset="-120"/>
                         </a:rPr>
-                        <a:t>8</a:t>
+                        <a:t>▲11</a:t>
                       </a:r>
                       <a:endParaRPr lang="en-US" sz="1000" dirty="0">
                         <a:latin typeface="Meiryo" charset="0"/>
@@ -9351,7 +9351,7 @@
                 <a:ea typeface="Meiryo" pitchFamily="34" charset="-122"/>
                 <a:cs typeface="Meiryo" pitchFamily="34" charset="-120"/>
               </a:rPr>
-              <a:t>うまくいかなかったら？ 鍵は1拠点の台数</a:t>
+              <a:t>どうすれば黒字？ 鍵は1拠点の台数</a:t>
             </a:r>
             <a:endParaRPr lang="en-US" sz="2000" dirty="0"/>
           </a:p>
@@ -9393,7 +9393,7 @@
                 <a:ea typeface="Meiryo" pitchFamily="34" charset="-122"/>
                 <a:cs typeface="Meiryo" pitchFamily="34" charset="-120"/>
               </a:rPr>
-              <a:t>10台のままだと計画の9割を割ると黒字にならない。15台に増やせれば6割でも黒字</a:t>
+              <a:t>10台のままだと計画どおりでも5年で黒字にならない。15台に増やせれば6割でも5年目に黒字</a:t>
             </a:r>
             <a:endParaRPr lang="en-US" sz="1200" dirty="0"/>
           </a:p>
@@ -9999,6 +9999,174 @@
                       <a:r>
                         <a:rPr lang="en-US" sz="850" b="1" dirty="0">
                           <a:solidFill>
+                            <a:srgbClr val="B8692E"/>
+                          </a:solidFill>
+                          <a:latin typeface="Meiryo" pitchFamily="34" charset="0"/>
+                          <a:ea typeface="Meiryo" pitchFamily="34" charset="-122"/>
+                          <a:cs typeface="Meiryo" pitchFamily="34" charset="-120"/>
+                        </a:rPr>
+                        <a:t>5年でしない</a:t>
+                      </a:r>
+                      <a:endParaRPr lang="en-US" sz="850" dirty="0">
+                        <a:latin typeface="Meiryo" charset="0"/>
+                        <a:ea typeface="Meiryo" charset="0"/>
+                        <a:cs typeface="Meiryo" charset="0"/>
+                      </a:endParaRPr>
+                    </a:p>
+                  </a:txBody>
+                  <a:tcPr marL="54864" marR="54864" marT="18288" marB="18288" anchor="ctr">
+                    <a:lnL w="0" cap="flat" cmpd="sng" algn="ctr">
+                      <a:noFill/>
+                    </a:lnL>
+                    <a:lnR w="0" cap="flat" cmpd="sng" algn="ctr">
+                      <a:noFill/>
+                    </a:lnR>
+                    <a:lnT w="19050" cap="flat" cmpd="sng" algn="ctr">
+                      <a:solidFill>
+                        <a:srgbClr val="1A1A1A"/>
+                      </a:solidFill>
+                      <a:prstDash val="solid"/>
+                      <a:round/>
+                      <a:headEnd type="none" w="med" len="med"/>
+                      <a:tailEnd type="none" w="med" len="med"/>
+                    </a:lnT>
+                    <a:lnB w="9525" cap="flat" cmpd="sng" algn="ctr">
+                      <a:solidFill>
+                        <a:srgbClr val="BFBFBF"/>
+                      </a:solidFill>
+                      <a:prstDash val="solid"/>
+                      <a:round/>
+                      <a:headEnd type="none" w="med" len="med"/>
+                      <a:tailEnd type="none" w="med" len="med"/>
+                    </a:lnB>
+                    <a:solidFill>
+                      <a:srgbClr val="FFFFFF"/>
+                    </a:solidFill>
+                  </a:tcPr>
+                </a:tc>
+                <a:tc>
+                  <a:txBody>
+                    <a:bodyPr/>
+                    <a:lstStyle/>
+                    <a:p>
+                      <a:pPr algn="ctr" indent="0" marL="0">
+                        <a:buNone/>
+                      </a:pPr>
+                      <a:r>
+                        <a:rPr lang="en-US" sz="850" b="1" dirty="0">
+                          <a:solidFill>
+                            <a:srgbClr val="B8692E"/>
+                          </a:solidFill>
+                          <a:latin typeface="Meiryo" pitchFamily="34" charset="0"/>
+                          <a:ea typeface="Meiryo" pitchFamily="34" charset="-122"/>
+                          <a:cs typeface="Meiryo" pitchFamily="34" charset="-120"/>
+                        </a:rPr>
+                        <a:t>▲11</a:t>
+                      </a:r>
+                      <a:endParaRPr lang="en-US" sz="850" dirty="0">
+                        <a:latin typeface="Meiryo" charset="0"/>
+                        <a:ea typeface="Meiryo" charset="0"/>
+                        <a:cs typeface="Meiryo" charset="0"/>
+                      </a:endParaRPr>
+                    </a:p>
+                  </a:txBody>
+                  <a:tcPr marL="54864" marR="54864" marT="18288" marB="18288" anchor="ctr">
+                    <a:lnL w="0" cap="flat" cmpd="sng" algn="ctr">
+                      <a:noFill/>
+                    </a:lnL>
+                    <a:lnR w="0" cap="flat" cmpd="sng" algn="ctr">
+                      <a:noFill/>
+                    </a:lnR>
+                    <a:lnT w="19050" cap="flat" cmpd="sng" algn="ctr">
+                      <a:solidFill>
+                        <a:srgbClr val="1A1A1A"/>
+                      </a:solidFill>
+                      <a:prstDash val="solid"/>
+                      <a:round/>
+                      <a:headEnd type="none" w="med" len="med"/>
+                      <a:tailEnd type="none" w="med" len="med"/>
+                    </a:lnT>
+                    <a:lnB w="9525" cap="flat" cmpd="sng" algn="ctr">
+                      <a:solidFill>
+                        <a:srgbClr val="BFBFBF"/>
+                      </a:solidFill>
+                      <a:prstDash val="solid"/>
+                      <a:round/>
+                      <a:headEnd type="none" w="med" len="med"/>
+                      <a:tailEnd type="none" w="med" len="med"/>
+                    </a:lnB>
+                    <a:solidFill>
+                      <a:srgbClr val="FFFFFF"/>
+                    </a:solidFill>
+                  </a:tcPr>
+                </a:tc>
+                <a:tc>
+                  <a:txBody>
+                    <a:bodyPr/>
+                    <a:lstStyle/>
+                    <a:p>
+                      <a:pPr algn="ctr" indent="0" marL="0">
+                        <a:buNone/>
+                      </a:pPr>
+                      <a:r>
+                        <a:rPr lang="en-US" sz="850" b="1" dirty="0">
+                          <a:solidFill>
+                            <a:srgbClr val="1A1A1A"/>
+                          </a:solidFill>
+                          <a:latin typeface="Meiryo" pitchFamily="34" charset="0"/>
+                          <a:ea typeface="Meiryo" pitchFamily="34" charset="-122"/>
+                          <a:cs typeface="Meiryo" pitchFamily="34" charset="-120"/>
+                        </a:rPr>
+                        <a:t>67</a:t>
+                      </a:r>
+                      <a:endParaRPr lang="en-US" sz="850" dirty="0">
+                        <a:latin typeface="Meiryo" charset="0"/>
+                        <a:ea typeface="Meiryo" charset="0"/>
+                        <a:cs typeface="Meiryo" charset="0"/>
+                      </a:endParaRPr>
+                    </a:p>
+                  </a:txBody>
+                  <a:tcPr marL="54864" marR="54864" marT="18288" marB="18288" anchor="ctr">
+                    <a:lnL w="0" cap="flat" cmpd="sng" algn="ctr">
+                      <a:noFill/>
+                    </a:lnL>
+                    <a:lnR w="0" cap="flat" cmpd="sng" algn="ctr">
+                      <a:noFill/>
+                    </a:lnR>
+                    <a:lnT w="19050" cap="flat" cmpd="sng" algn="ctr">
+                      <a:solidFill>
+                        <a:srgbClr val="1A1A1A"/>
+                      </a:solidFill>
+                      <a:prstDash val="solid"/>
+                      <a:round/>
+                      <a:headEnd type="none" w="med" len="med"/>
+                      <a:tailEnd type="none" w="med" len="med"/>
+                    </a:lnT>
+                    <a:lnB w="9525" cap="flat" cmpd="sng" algn="ctr">
+                      <a:solidFill>
+                        <a:srgbClr val="BFBFBF"/>
+                      </a:solidFill>
+                      <a:prstDash val="solid"/>
+                      <a:round/>
+                      <a:headEnd type="none" w="med" len="med"/>
+                      <a:tailEnd type="none" w="med" len="med"/>
+                    </a:lnB>
+                    <a:solidFill>
+                      <a:srgbClr val="FFFFFF"/>
+                    </a:solidFill>
+                  </a:tcPr>
+                </a:tc>
+                <a:tc>
+                  <a:txBody>
+                    <a:bodyPr/>
+                    <a:lstStyle/>
+                    <a:p>
+                      <a:pPr algn="ctr" indent="0" marL="0">
+                        <a:buNone/>
+                      </a:pPr>
+                      <a:r>
+                        <a:rPr lang="en-US" sz="850" b="1" dirty="0">
+                          <a:solidFill>
                             <a:srgbClr val="1A1A1A"/>
                           </a:solidFill>
                           <a:latin typeface="Meiryo" pitchFamily="34" charset="0"/>
@@ -10061,7 +10229,7 @@
                           <a:ea typeface="Meiryo" pitchFamily="34" charset="-122"/>
                           <a:cs typeface="Meiryo" pitchFamily="34" charset="-120"/>
                         </a:rPr>
-                        <a:t>8</a:t>
+                        <a:t>43</a:t>
                       </a:r>
                       <a:endParaRPr lang="en-US" sz="850" dirty="0">
                         <a:latin typeface="Meiryo" charset="0"/>
@@ -10117,175 +10285,7 @@
                           <a:ea typeface="Meiryo" pitchFamily="34" charset="-122"/>
                           <a:cs typeface="Meiryo" pitchFamily="34" charset="-120"/>
                         </a:rPr>
-                        <a:t>40</a:t>
-                      </a:r>
-                      <a:endParaRPr lang="en-US" sz="850" dirty="0">
-                        <a:latin typeface="Meiryo" charset="0"/>
-                        <a:ea typeface="Meiryo" charset="0"/>
-                        <a:cs typeface="Meiryo" charset="0"/>
-                      </a:endParaRPr>
-                    </a:p>
-                  </a:txBody>
-                  <a:tcPr marL="54864" marR="54864" marT="18288" marB="18288" anchor="ctr">
-                    <a:lnL w="0" cap="flat" cmpd="sng" algn="ctr">
-                      <a:noFill/>
-                    </a:lnL>
-                    <a:lnR w="0" cap="flat" cmpd="sng" algn="ctr">
-                      <a:noFill/>
-                    </a:lnR>
-                    <a:lnT w="19050" cap="flat" cmpd="sng" algn="ctr">
-                      <a:solidFill>
-                        <a:srgbClr val="1A1A1A"/>
-                      </a:solidFill>
-                      <a:prstDash val="solid"/>
-                      <a:round/>
-                      <a:headEnd type="none" w="med" len="med"/>
-                      <a:tailEnd type="none" w="med" len="med"/>
-                    </a:lnT>
-                    <a:lnB w="9525" cap="flat" cmpd="sng" algn="ctr">
-                      <a:solidFill>
-                        <a:srgbClr val="BFBFBF"/>
-                      </a:solidFill>
-                      <a:prstDash val="solid"/>
-                      <a:round/>
-                      <a:headEnd type="none" w="med" len="med"/>
-                      <a:tailEnd type="none" w="med" len="med"/>
-                    </a:lnB>
-                    <a:solidFill>
-                      <a:srgbClr val="FFFFFF"/>
-                    </a:solidFill>
-                  </a:tcPr>
-                </a:tc>
-                <a:tc>
-                  <a:txBody>
-                    <a:bodyPr/>
-                    <a:lstStyle/>
-                    <a:p>
-                      <a:pPr algn="ctr" indent="0" marL="0">
-                        <a:buNone/>
-                      </a:pPr>
-                      <a:r>
-                        <a:rPr lang="en-US" sz="850" b="1" dirty="0">
-                          <a:solidFill>
-                            <a:srgbClr val="1A1A1A"/>
-                          </a:solidFill>
-                          <a:latin typeface="Meiryo" pitchFamily="34" charset="0"/>
-                          <a:ea typeface="Meiryo" pitchFamily="34" charset="-122"/>
-                          <a:cs typeface="Meiryo" pitchFamily="34" charset="-120"/>
-                        </a:rPr>
-                        <a:t>4年目</a:t>
-                      </a:r>
-                      <a:endParaRPr lang="en-US" sz="850" dirty="0">
-                        <a:latin typeface="Meiryo" charset="0"/>
-                        <a:ea typeface="Meiryo" charset="0"/>
-                        <a:cs typeface="Meiryo" charset="0"/>
-                      </a:endParaRPr>
-                    </a:p>
-                  </a:txBody>
-                  <a:tcPr marL="54864" marR="54864" marT="18288" marB="18288" anchor="ctr">
-                    <a:lnL w="0" cap="flat" cmpd="sng" algn="ctr">
-                      <a:noFill/>
-                    </a:lnL>
-                    <a:lnR w="0" cap="flat" cmpd="sng" algn="ctr">
-                      <a:noFill/>
-                    </a:lnR>
-                    <a:lnT w="19050" cap="flat" cmpd="sng" algn="ctr">
-                      <a:solidFill>
-                        <a:srgbClr val="1A1A1A"/>
-                      </a:solidFill>
-                      <a:prstDash val="solid"/>
-                      <a:round/>
-                      <a:headEnd type="none" w="med" len="med"/>
-                      <a:tailEnd type="none" w="med" len="med"/>
-                    </a:lnT>
-                    <a:lnB w="9525" cap="flat" cmpd="sng" algn="ctr">
-                      <a:solidFill>
-                        <a:srgbClr val="BFBFBF"/>
-                      </a:solidFill>
-                      <a:prstDash val="solid"/>
-                      <a:round/>
-                      <a:headEnd type="none" w="med" len="med"/>
-                      <a:tailEnd type="none" w="med" len="med"/>
-                    </a:lnB>
-                    <a:solidFill>
-                      <a:srgbClr val="FFFFFF"/>
-                    </a:solidFill>
-                  </a:tcPr>
-                </a:tc>
-                <a:tc>
-                  <a:txBody>
-                    <a:bodyPr/>
-                    <a:lstStyle/>
-                    <a:p>
-                      <a:pPr algn="ctr" indent="0" marL="0">
-                        <a:buNone/>
-                      </a:pPr>
-                      <a:r>
-                        <a:rPr lang="en-US" sz="850" b="1" dirty="0">
-                          <a:solidFill>
-                            <a:srgbClr val="1A1A1A"/>
-                          </a:solidFill>
-                          <a:latin typeface="Meiryo" pitchFamily="34" charset="0"/>
-                          <a:ea typeface="Meiryo" pitchFamily="34" charset="-122"/>
-                          <a:cs typeface="Meiryo" pitchFamily="34" charset="-120"/>
-                        </a:rPr>
-                        <a:t>62</a:t>
-                      </a:r>
-                      <a:endParaRPr lang="en-US" sz="850" dirty="0">
-                        <a:latin typeface="Meiryo" charset="0"/>
-                        <a:ea typeface="Meiryo" charset="0"/>
-                        <a:cs typeface="Meiryo" charset="0"/>
-                      </a:endParaRPr>
-                    </a:p>
-                  </a:txBody>
-                  <a:tcPr marL="54864" marR="54864" marT="18288" marB="18288" anchor="ctr">
-                    <a:lnL w="0" cap="flat" cmpd="sng" algn="ctr">
-                      <a:noFill/>
-                    </a:lnL>
-                    <a:lnR w="0" cap="flat" cmpd="sng" algn="ctr">
-                      <a:noFill/>
-                    </a:lnR>
-                    <a:lnT w="19050" cap="flat" cmpd="sng" algn="ctr">
-                      <a:solidFill>
-                        <a:srgbClr val="1A1A1A"/>
-                      </a:solidFill>
-                      <a:prstDash val="solid"/>
-                      <a:round/>
-                      <a:headEnd type="none" w="med" len="med"/>
-                      <a:tailEnd type="none" w="med" len="med"/>
-                    </a:lnT>
-                    <a:lnB w="9525" cap="flat" cmpd="sng" algn="ctr">
-                      <a:solidFill>
-                        <a:srgbClr val="BFBFBF"/>
-                      </a:solidFill>
-                      <a:prstDash val="solid"/>
-                      <a:round/>
-                      <a:headEnd type="none" w="med" len="med"/>
-                      <a:tailEnd type="none" w="med" len="med"/>
-                    </a:lnB>
-                    <a:solidFill>
-                      <a:srgbClr val="FFFFFF"/>
-                    </a:solidFill>
-                  </a:tcPr>
-                </a:tc>
-                <a:tc>
-                  <a:txBody>
-                    <a:bodyPr/>
-                    <a:lstStyle/>
-                    <a:p>
-                      <a:pPr algn="ctr" indent="0" marL="0">
-                        <a:buNone/>
-                      </a:pPr>
-                      <a:r>
-                        <a:rPr lang="en-US" sz="850" b="1" dirty="0">
-                          <a:solidFill>
-                            <a:srgbClr val="1A1A1A"/>
-                          </a:solidFill>
-                          <a:latin typeface="Meiryo" pitchFamily="34" charset="0"/>
-                          <a:ea typeface="Meiryo" pitchFamily="34" charset="-122"/>
-                          <a:cs typeface="Meiryo" pitchFamily="34" charset="-120"/>
-                        </a:rPr>
-                        <a:t>52</a:t>
+                        <a:t>110</a:t>
                       </a:r>
                       <a:endParaRPr lang="en-US" sz="850" dirty="0">
                         <a:latin typeface="Meiryo" charset="0"/>
@@ -10435,15 +10435,65 @@
                         <a:buNone/>
                       </a:pPr>
                       <a:r>
-                        <a:rPr lang="en-US" sz="850" dirty="0">
+                        <a:rPr lang="en-US" sz="850" b="1" dirty="0">
                           <a:solidFill>
-                            <a:srgbClr val="1A1A1A"/>
+                            <a:srgbClr val="B8692E"/>
                           </a:solidFill>
                           <a:latin typeface="Meiryo" pitchFamily="34" charset="0"/>
                           <a:ea typeface="Meiryo" pitchFamily="34" charset="-122"/>
                           <a:cs typeface="Meiryo" pitchFamily="34" charset="-120"/>
                         </a:rPr>
-                        <a:t>5年目</a:t>
+                        <a:t>5年でしない</a:t>
+                      </a:r>
+                      <a:endParaRPr lang="en-US" sz="850" dirty="0">
+                        <a:latin typeface="Meiryo" charset="0"/>
+                        <a:ea typeface="Meiryo" charset="0"/>
+                        <a:cs typeface="Meiryo" charset="0"/>
+                      </a:endParaRPr>
+                    </a:p>
+                  </a:txBody>
+                  <a:tcPr marL="54864" marR="54864" marT="18288" marB="18288" anchor="ctr">
+                    <a:lnL w="0" cap="flat" cmpd="sng" algn="ctr">
+                      <a:noFill/>
+                    </a:lnL>
+                    <a:lnR w="0" cap="flat" cmpd="sng" algn="ctr">
+                      <a:noFill/>
+                    </a:lnR>
+                    <a:lnT w="0" cap="flat" cmpd="sng" algn="ctr">
+                      <a:noFill/>
+                    </a:lnT>
+                    <a:lnB w="9525" cap="flat" cmpd="sng" algn="ctr">
+                      <a:solidFill>
+                        <a:srgbClr val="BFBFBF"/>
+                      </a:solidFill>
+                      <a:prstDash val="solid"/>
+                      <a:round/>
+                      <a:headEnd type="none" w="med" len="med"/>
+                      <a:tailEnd type="none" w="med" len="med"/>
+                    </a:lnB>
+                    <a:solidFill>
+                      <a:srgbClr val="FFFFFF"/>
+                    </a:solidFill>
+                  </a:tcPr>
+                </a:tc>
+                <a:tc>
+                  <a:txBody>
+                    <a:bodyPr/>
+                    <a:lstStyle/>
+                    <a:p>
+                      <a:pPr algn="ctr" indent="0" marL="0">
+                        <a:buNone/>
+                      </a:pPr>
+                      <a:r>
+                        <a:rPr lang="en-US" sz="850" dirty="0">
+                          <a:solidFill>
+                            <a:srgbClr val="B8692E"/>
+                          </a:solidFill>
+                          <a:latin typeface="Meiryo" pitchFamily="34" charset="0"/>
+                          <a:ea typeface="Meiryo" pitchFamily="34" charset="-122"/>
+                          <a:cs typeface="Meiryo" pitchFamily="34" charset="-120"/>
+                        </a:rPr>
+                        <a:t>▲17</a:t>
                       </a:r>
                       <a:endParaRPr lang="en-US" sz="850" dirty="0">
                         <a:latin typeface="Meiryo" charset="0"/>
@@ -10493,57 +10543,7 @@
                           <a:ea typeface="Meiryo" pitchFamily="34" charset="-122"/>
                           <a:cs typeface="Meiryo" pitchFamily="34" charset="-120"/>
                         </a:rPr>
-                        <a:t>2</a:t>
-                      </a:r>
-                      <a:endParaRPr lang="en-US" sz="850" dirty="0">
-                        <a:latin typeface="Meiryo" charset="0"/>
-                        <a:ea typeface="Meiryo" charset="0"/>
-                        <a:cs typeface="Meiryo" charset="0"/>
-                      </a:endParaRPr>
-                    </a:p>
-                  </a:txBody>
-                  <a:tcPr marL="54864" marR="54864" marT="18288" marB="18288" anchor="ctr">
-                    <a:lnL w="0" cap="flat" cmpd="sng" algn="ctr">
-                      <a:noFill/>
-                    </a:lnL>
-                    <a:lnR w="0" cap="flat" cmpd="sng" algn="ctr">
-                      <a:noFill/>
-                    </a:lnR>
-                    <a:lnT w="0" cap="flat" cmpd="sng" algn="ctr">
-                      <a:noFill/>
-                    </a:lnT>
-                    <a:lnB w="9525" cap="flat" cmpd="sng" algn="ctr">
-                      <a:solidFill>
-                        <a:srgbClr val="BFBFBF"/>
-                      </a:solidFill>
-                      <a:prstDash val="solid"/>
-                      <a:round/>
-                      <a:headEnd type="none" w="med" len="med"/>
-                      <a:tailEnd type="none" w="med" len="med"/>
-                    </a:lnB>
-                    <a:solidFill>
-                      <a:srgbClr val="FFFFFF"/>
-                    </a:solidFill>
-                  </a:tcPr>
-                </a:tc>
-                <a:tc>
-                  <a:txBody>
-                    <a:bodyPr/>
-                    <a:lstStyle/>
-                    <a:p>
-                      <a:pPr algn="ctr" indent="0" marL="0">
-                        <a:buNone/>
-                      </a:pPr>
-                      <a:r>
-                        <a:rPr lang="en-US" sz="850" dirty="0">
-                          <a:solidFill>
-                            <a:srgbClr val="1A1A1A"/>
-                          </a:solidFill>
-                          <a:latin typeface="Meiryo" pitchFamily="34" charset="0"/>
-                          <a:ea typeface="Meiryo" pitchFamily="34" charset="-122"/>
-                          <a:cs typeface="Meiryo" pitchFamily="34" charset="-120"/>
-                        </a:rPr>
-                        <a:t>29</a:t>
+                        <a:t>49</a:t>
                       </a:r>
                       <a:endParaRPr lang="en-US" sz="850" dirty="0">
                         <a:latin typeface="Meiryo" charset="0"/>
@@ -10643,7 +10643,7 @@
                           <a:ea typeface="Meiryo" pitchFamily="34" charset="-122"/>
                           <a:cs typeface="Meiryo" pitchFamily="34" charset="-120"/>
                         </a:rPr>
-                        <a:t>50</a:t>
+                        <a:t>31</a:t>
                       </a:r>
                       <a:endParaRPr lang="en-US" sz="850" dirty="0">
                         <a:latin typeface="Meiryo" charset="0"/>
@@ -10693,7 +10693,7 @@
                           <a:ea typeface="Meiryo" pitchFamily="34" charset="-122"/>
                           <a:cs typeface="Meiryo" pitchFamily="34" charset="-120"/>
                         </a:rPr>
-                        <a:t>47</a:t>
+                        <a:t>105</a:t>
                       </a:r>
                       <a:endParaRPr lang="en-US" sz="850" dirty="0">
                         <a:latin typeface="Meiryo" charset="0"/>
@@ -10895,7 +10895,7 @@
                           <a:ea typeface="Meiryo" pitchFamily="34" charset="-122"/>
                           <a:cs typeface="Meiryo" pitchFamily="34" charset="-120"/>
                         </a:rPr>
-                        <a:t>▲11</a:t>
+                        <a:t>▲22</a:t>
                       </a:r>
                       <a:endParaRPr lang="en-US" sz="850" dirty="0">
                         <a:latin typeface="Meiryo" charset="0"/>
@@ -10945,7 +10945,7 @@
                           <a:ea typeface="Meiryo" pitchFamily="34" charset="-122"/>
                           <a:cs typeface="Meiryo" pitchFamily="34" charset="-120"/>
                         </a:rPr>
-                        <a:t>12</a:t>
+                        <a:t>47</a:t>
                       </a:r>
                       <a:endParaRPr lang="en-US" sz="850" dirty="0">
                         <a:latin typeface="Meiryo" charset="0"/>
@@ -11045,7 +11045,7 @@
                           <a:ea typeface="Meiryo" pitchFamily="34" charset="-122"/>
                           <a:cs typeface="Meiryo" pitchFamily="34" charset="-120"/>
                         </a:rPr>
-                        <a:t>32</a:t>
+                        <a:t>21</a:t>
                       </a:r>
                       <a:endParaRPr lang="en-US" sz="850" dirty="0">
                         <a:latin typeface="Meiryo" charset="0"/>
@@ -11095,7 +11095,7 @@
                           <a:ea typeface="Meiryo" pitchFamily="34" charset="-122"/>
                           <a:cs typeface="Meiryo" pitchFamily="34" charset="-120"/>
                         </a:rPr>
-                        <a:t>47</a:t>
+                        <a:t>105</a:t>
                       </a:r>
                       <a:endParaRPr lang="en-US" sz="850" dirty="0">
                         <a:latin typeface="Meiryo" charset="0"/>
@@ -11297,7 +11297,7 @@
                           <a:ea typeface="Meiryo" pitchFamily="34" charset="-122"/>
                           <a:cs typeface="Meiryo" pitchFamily="34" charset="-120"/>
                         </a:rPr>
-                        <a:t>▲15</a:t>
+                        <a:t>▲26</a:t>
                       </a:r>
                       <a:endParaRPr lang="en-US" sz="850" dirty="0">
                         <a:latin typeface="Meiryo" charset="0"/>
@@ -11347,7 +11347,7 @@
                           <a:ea typeface="Meiryo" pitchFamily="34" charset="-122"/>
                           <a:cs typeface="Meiryo" pitchFamily="34" charset="-120"/>
                         </a:rPr>
-                        <a:t>1</a:t>
+                        <a:t>28</a:t>
                       </a:r>
                       <a:endParaRPr lang="en-US" sz="850" dirty="0">
                         <a:latin typeface="Meiryo" charset="0"/>
@@ -11447,7 +11447,7 @@
                           <a:ea typeface="Meiryo" pitchFamily="34" charset="-122"/>
                           <a:cs typeface="Meiryo" pitchFamily="34" charset="-120"/>
                         </a:rPr>
-                        <a:t>23</a:t>
+                        <a:t>12</a:t>
                       </a:r>
                       <a:endParaRPr lang="en-US" sz="850" dirty="0">
                         <a:latin typeface="Meiryo" charset="0"/>
@@ -11497,7 +11497,7 @@
                           <a:ea typeface="Meiryo" pitchFamily="34" charset="-122"/>
                           <a:cs typeface="Meiryo" pitchFamily="34" charset="-120"/>
                         </a:rPr>
-                        <a:t>43</a:t>
+                        <a:t>92</a:t>
                       </a:r>
                       <a:endParaRPr lang="en-US" sz="850" dirty="0">
                         <a:latin typeface="Meiryo" charset="0"/>
@@ -11699,7 +11699,7 @@
                           <a:ea typeface="Meiryo" pitchFamily="34" charset="-122"/>
                           <a:cs typeface="Meiryo" pitchFamily="34" charset="-120"/>
                         </a:rPr>
-                        <a:t>▲19</a:t>
+                        <a:t>▲30</a:t>
                       </a:r>
                       <a:endParaRPr lang="en-US" sz="850" dirty="0">
                         <a:latin typeface="Meiryo" charset="0"/>
@@ -11743,13 +11743,13 @@
                       <a:r>
                         <a:rPr lang="en-US" sz="850" dirty="0">
                           <a:solidFill>
-                            <a:srgbClr val="B8692E"/>
+                            <a:srgbClr val="1A1A1A"/>
                           </a:solidFill>
                           <a:latin typeface="Meiryo" pitchFamily="34" charset="0"/>
                           <a:ea typeface="Meiryo" pitchFamily="34" charset="-122"/>
                           <a:cs typeface="Meiryo" pitchFamily="34" charset="-120"/>
                         </a:rPr>
-                        <a:t>-14</a:t>
+                        <a:t>29</a:t>
                       </a:r>
                       <a:endParaRPr lang="en-US" sz="850" dirty="0">
                         <a:latin typeface="Meiryo" charset="0"/>
@@ -11849,7 +11849,7 @@
                           <a:ea typeface="Meiryo" pitchFamily="34" charset="-122"/>
                           <a:cs typeface="Meiryo" pitchFamily="34" charset="-120"/>
                         </a:rPr>
-                        <a:t>13</a:t>
+                        <a:t>2</a:t>
                       </a:r>
                       <a:endParaRPr lang="en-US" sz="850" dirty="0">
                         <a:latin typeface="Meiryo" charset="0"/>
@@ -11899,7 +11899,7 @@
                           <a:ea typeface="Meiryo" pitchFamily="34" charset="-122"/>
                           <a:cs typeface="Meiryo" pitchFamily="34" charset="-120"/>
                         </a:rPr>
-                        <a:t>37</a:t>
+                        <a:t>92</a:t>
                       </a:r>
                       <a:endParaRPr lang="en-US" sz="850" dirty="0">
                         <a:latin typeface="Meiryo" charset="0"/>
@@ -12466,7 +12466,7 @@
                           <a:ea typeface="Meiryo" pitchFamily="34" charset="-122"/>
                           <a:cs typeface="Meiryo" pitchFamily="34" charset="-120"/>
                         </a:rPr>
-                        <a:t>26分以上</a:t>
+                        <a:t>23分以上</a:t>
                       </a:r>
                       <a:endParaRPr lang="en-US" sz="850" dirty="0">
                         <a:latin typeface="Meiryo" charset="0"/>
@@ -12516,7 +12516,7 @@
                           <a:ea typeface="Meiryo" pitchFamily="34" charset="-122"/>
                           <a:cs typeface="Meiryo" pitchFamily="34" charset="-120"/>
                         </a:rPr>
-                        <a:t>15〜26分：機能を写真台帳に絞る</a:t>
+                        <a:t>15〜23分：機能を写真台帳に絞る</a:t>
                       </a:r>
                       <a:endParaRPr lang="en-US" sz="850" dirty="0">
                         <a:latin typeface="Meiryo" charset="0"/>
@@ -13172,7 +13172,7 @@
                           <a:ea typeface="Meiryo" pitchFamily="34" charset="-122"/>
                           <a:cs typeface="Meiryo" pitchFamily="34" charset="-120"/>
                         </a:rPr>
-                        <a:t>シリーズAの交渉</a:t>
+                        <a:t>追加の5,000万円を入れるか</a:t>
                       </a:r>
                       <a:endParaRPr lang="en-US" sz="850" dirty="0">
                         <a:latin typeface="Meiryo" charset="0"/>
@@ -13272,7 +13272,7 @@
                           <a:ea typeface="Meiryo" pitchFamily="34" charset="-122"/>
                           <a:cs typeface="Meiryo" pitchFamily="34" charset="-120"/>
                         </a:rPr>
-                        <a:t>未達：調達額と採用を絞る</a:t>
+                        <a:t>未達：追加額と採用を絞る</a:t>
                       </a:r>
                       <a:endParaRPr lang="en-US" sz="850" dirty="0">
                         <a:latin typeface="Meiryo" charset="0"/>
@@ -13553,7 +13553,7 @@
                 <a:ea typeface="Meiryo" pitchFamily="34" charset="-122"/>
                 <a:cs typeface="Meiryo" pitchFamily="34" charset="-120"/>
               </a:rPr>
-              <a:t>費用は約500万円。自己資金と補助金でまかない、創業者の給料はゼロ</a:t>
+              <a:t>費用は約500万円。自己資金でまかない、創業者の給料はゼロ</a:t>
             </a:r>
             <a:endParaRPr lang="en-US" sz="1200" dirty="0"/>
           </a:p>
@@ -13699,7 +13699,7 @@
                 <a:ea typeface="Meiryo" pitchFamily="34" charset="-122"/>
                 <a:cs typeface="Meiryo" pitchFamily="34" charset="-120"/>
               </a:rPr>
-              <a:t>自己資金と補助金で約500万円</a:t>
+              <a:t>自己資金で約500万円</a:t>
             </a:r>
             <a:endParaRPr lang="en-US" sz="900" dirty="0"/>
           </a:p>
@@ -14049,7 +14049,7 @@
                 <a:ea typeface="Meiryo" pitchFamily="34" charset="-122"/>
                 <a:cs typeface="Meiryo" pitchFamily="34" charset="-120"/>
               </a:rPr>
-              <a:t>1台1日26分減ったかを測る</a:t>
+              <a:t>1台1日23分減ったかを測る</a:t>
             </a:r>
             <a:endParaRPr lang="en-US" sz="900" dirty="0"/>
           </a:p>
@@ -14182,7 +14182,7 @@
                 <a:ea typeface="Meiryo" pitchFamily="34" charset="-122"/>
                 <a:cs typeface="Meiryo" pitchFamily="34" charset="-120"/>
               </a:rPr>
-              <a:t>公庫1,000万円＋VC1.15億円</a:t>
+              <a:t>自己資金2億円を入れる</a:t>
             </a:r>
             <a:endParaRPr lang="en-US" sz="1200" dirty="0"/>
           </a:p>
@@ -14224,7 +14224,7 @@
                 <a:ea typeface="Meiryo" pitchFamily="34" charset="-122"/>
                 <a:cs typeface="Meiryo" pitchFamily="34" charset="-120"/>
               </a:rPr>
-              <a:t>実証の結果を持って調達</a:t>
+              <a:t>実証に合格したら採用を始める</a:t>
             </a:r>
             <a:endParaRPr lang="en-US" sz="900" dirty="0"/>
           </a:p>
@@ -14516,7 +14516,7 @@
                 <a:ea typeface="Meiryo" pitchFamily="34" charset="-122"/>
                 <a:cs typeface="Meiryo" pitchFamily="34" charset="-120"/>
               </a:rPr>
-              <a:t>端末・機材</a:t>
+              <a:t>メガネ・機材</a:t>
             </a:r>
             <a:endParaRPr lang="en-US" sz="950" dirty="0"/>
           </a:p>
@@ -14903,7 +14903,7 @@
                 <a:ea typeface="Meiryo" pitchFamily="34" charset="-122"/>
                 <a:cs typeface="Meiryo" pitchFamily="34" charset="-120"/>
               </a:rPr>
-              <a:t>1台1日26分以上減れば進む</a:t>
+              <a:t>1台1日23分以上減れば進む</a:t>
             </a:r>
             <a:endParaRPr lang="en-US" sz="1000" dirty="0"/>
           </a:p>
@@ -15918,7 +15918,7 @@
                 <a:ea typeface="Meiryo" pitchFamily="34" charset="-122"/>
                 <a:cs typeface="Meiryo" pitchFamily="34" charset="-120"/>
               </a:rPr>
-              <a:t>社員1人：年734万円（給料・家賃など）</a:t>
+              <a:t>社員1人：年753万円（給料・家賃など）</a:t>
             </a:r>
             <a:endParaRPr lang="en-US" sz="1000" dirty="0"/>
           </a:p>
@@ -16034,7 +16034,7 @@
                 <a:ea typeface="Meiryo" pitchFamily="34" charset="-122"/>
                 <a:cs typeface="Meiryo" pitchFamily="34" charset="-120"/>
               </a:rPr>
-              <a:t>5年目に3.86となり黒字</a:t>
+              <a:t>10台のままでは5年目でも3.52</a:t>
             </a:r>
             <a:endParaRPr lang="en-US" sz="1000" dirty="0"/>
           </a:p>
@@ -16057,7 +16057,7 @@
                 <a:ea typeface="Meiryo" pitchFamily="34" charset="-122"/>
                 <a:cs typeface="Meiryo" pitchFamily="34" charset="-120"/>
               </a:rPr>
-              <a:t>台数を15台に増やせれば1年早まる</a:t>
+              <a:t>15台に増やせれば5年目に黒字</a:t>
             </a:r>
             <a:endParaRPr lang="en-US" sz="1000" dirty="0"/>
           </a:p>
@@ -16414,7 +16414,7 @@
                 <a:ea typeface="Meiryo" pitchFamily="34" charset="-122"/>
                 <a:cs typeface="Meiryo" pitchFamily="34" charset="-120"/>
               </a:rPr>
-              <a:t>1台1日26分減れば元が取れます。想定は35分で、実証で測ります</a:t>
+              <a:t>1台1日23分減れば元が取れます。想定は35分で、実証で測ります</a:t>
             </a:r>
             <a:endParaRPr lang="en-US" sz="1050" dirty="0"/>
           </a:p>
@@ -16480,7 +16480,7 @@
                 <a:ea typeface="Meiryo" pitchFamily="34" charset="-122"/>
                 <a:cs typeface="Meiryo" pitchFamily="34" charset="-120"/>
               </a:rPr>
-              <a:t>根拠：353万円÷（10台×240日）÷1時間の人件費</a:t>
+              <a:t>根拠：332万円÷（10台×240日）÷1時間の人件費</a:t>
             </a:r>
             <a:endParaRPr lang="en-US" sz="850" dirty="0"/>
           </a:p>
@@ -16638,7 +16638,7 @@
                 <a:ea typeface="Meiryo" pitchFamily="34" charset="-122"/>
                 <a:cs typeface="Meiryo" pitchFamily="34" charset="-120"/>
               </a:rPr>
-              <a:t>人を先に雇うからです。社員1人約4拠点を超えたら黒字です</a:t>
+              <a:t>人を先に雇うからです。社員1人約4拠点で黒字。台数を増やして早めます</a:t>
             </a:r>
             <a:endParaRPr lang="en-US" sz="1050" dirty="0"/>
           </a:p>
@@ -16704,7 +16704,7 @@
                 <a:ea typeface="Meiryo" pitchFamily="34" charset="-122"/>
                 <a:cs typeface="Meiryo" pitchFamily="34" charset="-120"/>
               </a:rPr>
-              <a:t>根拠：734万円÷216万円＝3.4、半年分を見て約4</a:t>
+              <a:t>根拠：753万円÷216万円＝3.5、半年分を見て約4</a:t>
             </a:r>
             <a:endParaRPr lang="en-US" sz="850" dirty="0"/>
           </a:p>
@@ -17273,7 +17273,7 @@
                 <a:ea typeface="Meiryo" pitchFamily="34" charset="-122"/>
                 <a:cs typeface="Meiryo" pitchFamily="34" charset="-120"/>
               </a:rPr>
-              <a:t>1台1日26分減れば元が取れる</a:t>
+              <a:t>1台1日23分減れば元が取れる</a:t>
             </a:r>
             <a:endParaRPr lang="en-US" sz="950" dirty="0"/>
           </a:p>
@@ -17613,7 +17613,7 @@
                 <a:ea typeface="Meiryo" pitchFamily="34" charset="-122"/>
                 <a:cs typeface="Meiryo" pitchFamily="34" charset="-120"/>
               </a:rPr>
-              <a:t>5年目に3.86で届く</a:t>
+              <a:t>10台のままでは5年目3.52、15台なら5年目に黒字</a:t>
             </a:r>
             <a:endParaRPr lang="en-US" sz="950" dirty="0"/>
           </a:p>
@@ -17722,7 +17722,7 @@
                 <a:ea typeface="Meiryo" pitchFamily="34" charset="-122"/>
                 <a:cs typeface="Meiryo" pitchFamily="34" charset="-120"/>
               </a:rPr>
-              <a:t>電気工事会社が、メガネ10台で年300万円を払います。掛けた班の書類の時間が1台1日26分減れば元が取れ、想定の35分なら約1.4倍の得です。当社にはAIと保存の費用を引いた216万円が残り、社員1人で約4拠点を見れば黒字です。人を先に雇うので4年目までは赤字ですが、去年のお客様が今年も払う積み上げ型なので、5年目に黒字になります。</a:t>
+              <a:t>電気工事会社が、メガネ10台で年300万円を払います。掛けた班の書類の時間が1台1日23分減れば元が取れ、想定の35分なら約1.5倍の得です。当社にはAIと保存の費用を引いた216万円が残り、社員1人で約4拠点を見れば黒字です。人を先に雇うので10台のままでは5年目も赤字ですが、効果が出た班から15台に増やせば5年目に黒字になります。</a:t>
             </a:r>
             <a:endParaRPr lang="en-US" sz="1100" dirty="0"/>
           </a:p>
@@ -25154,7 +25154,7 @@
                 <a:ea typeface="Meiryo" pitchFamily="34" charset="-122"/>
                 <a:cs typeface="Meiryo" pitchFamily="34" charset="-120"/>
               </a:rPr>
-              <a:t>メガネ本体はリース会社から（10台で年約53万円）</a:t>
+              <a:t>メガネ本体はお客様の名前でリース、手続きは当社（10台で年約32万円）</a:t>
             </a:r>
             <a:endParaRPr lang="en-US" sz="1000" dirty="0"/>
           </a:p>
@@ -25410,7 +25410,7 @@
                 <a:ea typeface="Meiryo" pitchFamily="34" charset="-122"/>
                 <a:cs typeface="Meiryo" pitchFamily="34" charset="-120"/>
               </a:rPr>
-              <a:t>メガネを掛けた班の書類の時間が減る。1台1日26分減れば元が取れる</a:t>
+              <a:t>メガネを掛けた班の書類の時間が減る。1台1日23分減れば元が取れる</a:t>
             </a:r>
             <a:endParaRPr lang="en-US" sz="1200" dirty="0"/>
           </a:p>
@@ -25910,7 +25910,7 @@
                 <a:ea typeface="Meiryo" pitchFamily="34" charset="-122"/>
                 <a:cs typeface="Meiryo" pitchFamily="34" charset="-120"/>
               </a:rPr>
-              <a:t>約3,420円</a:t>
+              <a:t>約3,560円</a:t>
             </a:r>
             <a:endParaRPr lang="en-US" sz="1500" dirty="0"/>
           </a:p>
@@ -26056,7 +26056,7 @@
                 <a:ea typeface="Meiryo" pitchFamily="34" charset="-122"/>
                 <a:cs typeface="Meiryo" pitchFamily="34" charset="-120"/>
               </a:rPr>
-              <a:t>年479万円</a:t>
+              <a:t>年499万円</a:t>
             </a:r>
             <a:endParaRPr lang="en-US" sz="1500" dirty="0"/>
           </a:p>
@@ -26197,7 +26197,7 @@
         <p:spPr>
           <a:xfrm>
             <a:off x="1554480" y="2450592"/>
-            <a:ext cx="2419502" cy="365760"/>
+            <a:ext cx="2274661" cy="365760"/>
           </a:xfrm>
           <a:prstGeom prst="rect">
             <a:avLst/>
@@ -26216,7 +26216,7 @@
         </p:nvSpPr>
         <p:spPr>
           <a:xfrm>
-            <a:off x="4047134" y="2450592"/>
+            <a:off x="3902293" y="2450592"/>
             <a:ext cx="2743200" cy="365760"/>
           </a:xfrm>
           <a:prstGeom prst="rect">
@@ -26244,7 +26244,7 @@
                 <a:ea typeface="Meiryo" pitchFamily="34" charset="-122"/>
                 <a:cs typeface="Meiryo" pitchFamily="34" charset="-120"/>
               </a:rPr>
-              <a:t>年353万円</a:t>
+              <a:t>年332万円</a:t>
             </a:r>
             <a:endParaRPr lang="en-US" sz="1000" dirty="0"/>
           </a:p>
@@ -26301,7 +26301,7 @@
         <p:spPr>
           <a:xfrm>
             <a:off x="1554480" y="2907792"/>
-            <a:ext cx="3287917" cy="365760"/>
+            <a:ext cx="3422354" cy="365760"/>
           </a:xfrm>
           <a:prstGeom prst="rect">
             <a:avLst/>
@@ -26320,7 +26320,7 @@
         </p:nvSpPr>
         <p:spPr>
           <a:xfrm>
-            <a:off x="4915549" y="2907792"/>
+            <a:off x="5049986" y="2907792"/>
             <a:ext cx="2743200" cy="365760"/>
           </a:xfrm>
           <a:prstGeom prst="rect">
@@ -26348,7 +26348,7 @@
                 <a:ea typeface="Meiryo" pitchFamily="34" charset="-122"/>
                 <a:cs typeface="Meiryo" pitchFamily="34" charset="-120"/>
               </a:rPr>
-              <a:t>年479万円</a:t>
+              <a:t>年499万円</a:t>
             </a:r>
             <a:endParaRPr lang="en-US" sz="1000" dirty="0"/>
           </a:p>
@@ -26439,7 +26439,7 @@
                 <a:ea typeface="Meiryo" pitchFamily="34" charset="-122"/>
                 <a:cs typeface="Meiryo" pitchFamily="34" charset="-120"/>
               </a:rPr>
-              <a:t>1日26分減れば</a:t>
+              <a:t>1日23分減れば</a:t>
             </a:r>
             <a:endParaRPr lang="en-US" sz="1050" dirty="0"/>
           </a:p>
@@ -26544,7 +26544,7 @@
                 <a:ea typeface="Meiryo" pitchFamily="34" charset="-122"/>
                 <a:cs typeface="Meiryo" pitchFamily="34" charset="-120"/>
               </a:rPr>
-              <a:t>払うお金353万円 ÷（10台×240日）÷ 1時間の人件費 ＝ 1台1日約26分</a:t>
+              <a:t>払うお金332万円 ÷（10台×240日）÷ 1時間の人件費 ＝ 1台1日約23分</a:t>
             </a:r>
             <a:endParaRPr lang="en-US" sz="950" dirty="0"/>
           </a:p>
@@ -26630,7 +26630,7 @@
                 <a:ea typeface="Meiryo" pitchFamily="34" charset="-122"/>
                 <a:cs typeface="Meiryo" pitchFamily="34" charset="-120"/>
               </a:rPr>
-              <a:t>　国の統計の年収×会社負担1.16÷残業を含む年2,000時間（電工約3,200円・施工管理約3,600円）</a:t>
+              <a:t>　国の統計の年収×会社負担1.17÷残業を含む年1,938時間（電工約3,300円・施工管理約3,700円）</a:t>
             </a:r>
             <a:endParaRPr lang="en-US" sz="950" dirty="0"/>
           </a:p>
@@ -26673,7 +26673,7 @@
                 <a:ea typeface="Meiryo" pitchFamily="34" charset="-122"/>
                 <a:cs typeface="Meiryo" pitchFamily="34" charset="-120"/>
               </a:rPr>
-              <a:t>　導入支援200万円も払うので、約14か月で元が取れる</a:t>
+              <a:t>　導入支援200万円も払うので、約13か月で元が取れる</a:t>
             </a:r>
             <a:endParaRPr lang="en-US" sz="950" dirty="0"/>
           </a:p>
@@ -26847,7 +26847,7 @@
                 <a:ea typeface="Meiryo" pitchFamily="34" charset="-122"/>
                 <a:cs typeface="Meiryo" pitchFamily="34" charset="-120"/>
               </a:rPr>
-              <a:t>確かな分（書類の時間）で約1.4倍。手戻りも減れば約2.4倍</a:t>
+              <a:t>確かな分（書類の時間）で約1.5倍。手戻りも減れば約2.6倍</a:t>
             </a:r>
             <a:endParaRPr lang="en-US" sz="1200" dirty="0"/>
           </a:p>
@@ -26975,7 +26975,7 @@
                 <a:ea typeface="Meiryo" pitchFamily="34" charset="-122"/>
                 <a:cs typeface="Meiryo" pitchFamily="34" charset="-120"/>
               </a:rPr>
-              <a:t>年479万円</a:t>
+              <a:t>年499万円</a:t>
             </a:r>
             <a:endParaRPr lang="en-US" sz="1400" dirty="0"/>
           </a:p>
@@ -27572,7 +27572,7 @@
                 <a:ea typeface="Meiryo" pitchFamily="34" charset="-122"/>
                 <a:cs typeface="Meiryo" pitchFamily="34" charset="-120"/>
               </a:rPr>
-              <a:t>年479万円</a:t>
+              <a:t>年499万円</a:t>
             </a:r>
             <a:pPr algn="l" indent="0" marL="0">
               <a:lnSpc>
@@ -27589,7 +27589,7 @@
                 <a:ea typeface="Meiryo" pitchFamily="34" charset="-122"/>
                 <a:cs typeface="Meiryo" pitchFamily="34" charset="-120"/>
               </a:rPr>
-              <a:t>　払うのは353万円 → 約1.4倍</a:t>
+              <a:t>　払うのは332万円 → 約1.5倍</a:t>
             </a:r>
             <a:endParaRPr lang="en-US" sz="1200" dirty="0"/>
           </a:p>

--- a/deck/カンツギ_事業計画書_やさしい版.pptx
+++ b/deck/カンツギ_事業計画書_やさしい版.pptx
@@ -2856,7 +2856,7 @@
                 <a:ea typeface="BIZ UDPGothic" pitchFamily="34" charset="-122"/>
                 <a:cs typeface="BIZ UDPGothic" pitchFamily="34" charset="-120"/>
               </a:rPr>
-              <a:t>現場の勘を、次の担い手へ。</a:t>
+              <a:t>現場の勘を次の担い手へ</a:t>
             </a:r>
             <a:endParaRPr lang="en-US" sz="800" dirty="0"/>
           </a:p>
@@ -20028,7 +20028,7 @@
                 <a:ea typeface="BIZ UDPGothic" pitchFamily="34" charset="-122"/>
                 <a:cs typeface="BIZ UDPGothic" pitchFamily="34" charset="-120"/>
               </a:rPr>
-              <a:t>現場の勘を、</a:t>
+              <a:t>現場の勘を</a:t>
             </a:r>
             <a:endParaRPr lang="en-US" sz="1000" dirty="0"/>
           </a:p>
